--- a/07_presentations/razor-clam-sampling-design.pptx
+++ b/07_presentations/razor-clam-sampling-design.pptx
@@ -4,29 +4,30 @@
   <p:sldMasterIdLst>
     <p:sldMasterId id="2147483648" r:id="rId4"/>
   </p:sldMasterIdLst>
-  <p:notesMasterIdLst>
-    <p:notesMasterId r:id="rId21"/>
-  </p:notesMasterIdLst>
   <p:handoutMasterIdLst>
-    <p:handoutMasterId r:id="rId22"/>
+    <p:handoutMasterId r:id="rId19"/>
   </p:handoutMasterIdLst>
   <p:sldIdLst>
-    <p:sldId id="256" r:id="rId5"/>
-    <p:sldId id="257" r:id="rId6"/>
-    <p:sldId id="258" r:id="rId7"/>
-    <p:sldId id="259" r:id="rId8"/>
-    <p:sldId id="260" r:id="rId9"/>
-    <p:sldId id="261" r:id="rId10"/>
-    <p:sldId id="262" r:id="rId11"/>
-    <p:sldId id="263" r:id="rId12"/>
-    <p:sldId id="264" r:id="rId13"/>
-    <p:sldId id="265" r:id="rId14"/>
-    <p:sldId id="266" r:id="rId15"/>
-    <p:sldId id="267" r:id="rId16"/>
-    <p:sldId id="268" r:id="rId17"/>
-    <p:sldId id="269" r:id="rId18"/>
-    <p:sldId id="270" r:id="rId19"/>
-    <p:sldId id="271" r:id="rId20"/>
+    <p:sldId id="256" r:id="rId11"/>
+    <p:sldId id="257" r:id="rId13"/>
+    <p:sldId id="258" r:id="rId14"/>
+    <p:sldId id="259" r:id="rId15"/>
+    <p:sldId id="260" r:id="rId16"/>
+    <p:sldId id="261" r:id="rId17"/>
+    <p:sldId id="262" r:id="rId18"/>
+    <p:sldId id="263" r:id="rId10"/>
+    <p:sldId id="264" r:id="rId9"/>
+    <p:sldId id="265" r:id="rId8"/>
+    <p:sldId id="266" r:id="rId7"/>
+    <p:sldId id="267" r:id="rId6"/>
+    <p:sldId id="268" r:id="rId5"/>
+    <p:sldId id="269" r:id="rId25"/>
+    <p:sldId id="270" r:id="rId26"/>
+    <p:sldId id="271" r:id="rId27"/>
+    <p:sldId id="272" r:id="rId28"/>
+    <p:sldId id="273" r:id="rId29"/>
+    <p:sldId id="274" r:id="rId30"/>
+    <p:sldId id="275" r:id="rId31"/>
   </p:sldIdLst>
   <p:sldSz cx="12192000" cy="6858000"/>
   <p:notesSz cx="6858000" cy="9144000"/>
@@ -237,7 +238,7 @@
           <a:p>
             <a:fld id="{DAA1D058-9860-4C37-9D21-AC6EFE975A47}" type="datetimeFigureOut">
               <a:rPr lang="en-US" smtClean="0"/>
-              <a:t>7/13/2026</a:t>
+              <a:t>3/12/2026</a:t>
             </a:fld>
             <a:endParaRPr lang="en-US"/>
           </a:p>
@@ -333,7 +334,7 @@
 </file>
 
 <file path=ppt/notesMasters/notesMaster1.xml><?xml version="1.0" encoding="utf-8"?>
-<p:notesMaster xmlns:a="http://schemas.openxmlformats.org/drawingml/2006/main" xmlns:r="http://schemas.openxmlformats.org/officeDocument/2006/relationships" xmlns:p="http://schemas.openxmlformats.org/presentationml/2006/main">
+<p:notesMaster xmlns:a="http://schemas.openxmlformats.org/drawingml/2006/main" xmlns:p="http://schemas.openxmlformats.org/presentationml/2006/main" xmlns:r="http://schemas.openxmlformats.org/officeDocument/2006/relationships">
   <p:cSld>
     <p:bg>
       <p:bgRef idx="1001">
@@ -354,16 +355,241 @@
           <a:chExt cx="0" cy="0"/>
         </a:xfrm>
       </p:grpSpPr>
+      <p:sp>
+        <p:nvSpPr>
+          <p:cNvPr id="2" name="Header Placeholder 1"/>
+          <p:cNvSpPr>
+            <a:spLocks noGrp="1"/>
+          </p:cNvSpPr>
+          <p:nvPr>
+            <p:ph type="hdr" sz="quarter"/>
+          </p:nvPr>
+        </p:nvSpPr>
+        <p:spPr>
+          <a:xfrm>
+            <a:off x="0" y="0"/>
+            <a:ext cx="2971800" cy="457200"/>
+          </a:xfrm>
+          <a:prstGeom prst="rect">
+            <a:avLst/>
+          </a:prstGeom>
+        </p:spPr>
+        <p:txBody>
+          <a:bodyPr vert="horz" lIns="91440" tIns="45720" rIns="91440" bIns="45720" rtlCol="0"/>
+          <a:lstStyle>
+            <a:lvl1pPr algn="l">
+              <a:defRPr sz="1200"/>
+            </a:lvl1pPr>
+          </a:lstStyle>
+          <a:p>
+            <a:endParaRPr lang="en-US"/>
+          </a:p>
+        </p:txBody>
+      </p:sp>
+      <p:sp>
+        <p:nvSpPr>
+          <p:cNvPr id="3" name="Date Placeholder 2"/>
+          <p:cNvSpPr>
+            <a:spLocks noGrp="1"/>
+          </p:cNvSpPr>
+          <p:nvPr>
+            <p:ph type="dt" idx="1"/>
+          </p:nvPr>
+        </p:nvSpPr>
+        <p:spPr>
+          <a:xfrm>
+            <a:off x="3884613" y="0"/>
+            <a:ext cx="2971800" cy="457200"/>
+          </a:xfrm>
+          <a:prstGeom prst="rect">
+            <a:avLst/>
+          </a:prstGeom>
+        </p:spPr>
+        <p:txBody>
+          <a:bodyPr vert="horz" lIns="91440" tIns="45720" rIns="91440" bIns="45720" rtlCol="0"/>
+          <a:lstStyle>
+            <a:lvl1pPr algn="r">
+              <a:defRPr sz="1200"/>
+            </a:lvl1pPr>
+          </a:lstStyle>
+          <a:p>
+            <a:fld id="{0F89C1C7-3DCD-1040-A9CF-14679D8B5DDD}" type="datetimeFigureOut">
+              <a:rPr lang="en-US" smtClean="0"/>
+              <a:t>10/17/16</a:t>
+            </a:fld>
+            <a:endParaRPr lang="en-US"/>
+          </a:p>
+        </p:txBody>
+      </p:sp>
+      <p:sp>
+        <p:nvSpPr>
+          <p:cNvPr id="4" name="Slide Image Placeholder 3"/>
+          <p:cNvSpPr>
+            <a:spLocks noGrp="1" noRot="1" noChangeAspect="1"/>
+          </p:cNvSpPr>
+          <p:nvPr>
+            <p:ph type="sldImg" idx="2"/>
+          </p:nvPr>
+        </p:nvSpPr>
+        <p:spPr>
+          <a:xfrm>
+            <a:off x="1143000" y="685800"/>
+            <a:ext cx="4572000" cy="3429000"/>
+          </a:xfrm>
+          <a:prstGeom prst="rect">
+            <a:avLst/>
+          </a:prstGeom>
+          <a:noFill/>
+          <a:ln w="12700">
+            <a:solidFill>
+              <a:prstClr val="black"/>
+            </a:solidFill>
+          </a:ln>
+        </p:spPr>
+        <p:txBody>
+          <a:bodyPr vert="horz" lIns="91440" tIns="45720" rIns="91440" bIns="45720" rtlCol="0" anchor="ctr"/>
+          <a:lstStyle/>
+          <a:p>
+            <a:endParaRPr lang="en-US"/>
+          </a:p>
+        </p:txBody>
+      </p:sp>
+      <p:sp>
+        <p:nvSpPr>
+          <p:cNvPr id="5" name="Notes Placeholder 4"/>
+          <p:cNvSpPr>
+            <a:spLocks noGrp="1"/>
+          </p:cNvSpPr>
+          <p:nvPr>
+            <p:ph type="body" sz="quarter" idx="3"/>
+          </p:nvPr>
+        </p:nvSpPr>
+        <p:spPr>
+          <a:xfrm>
+            <a:off x="685800" y="4343400"/>
+            <a:ext cx="5486400" cy="4114800"/>
+          </a:xfrm>
+          <a:prstGeom prst="rect">
+            <a:avLst/>
+          </a:prstGeom>
+        </p:spPr>
+        <p:txBody>
+          <a:bodyPr vert="horz" lIns="91440" tIns="45720" rIns="91440" bIns="45720" rtlCol="0"/>
+          <a:lstStyle/>
+          <a:p>
+            <a:pPr lvl="0"/>
+            <a:r>
+              <a:rPr lang="en-US" smtClean="0"/>
+              <a:t>Click to edit Master text styles</a:t>
+            </a:r>
+          </a:p>
+          <a:p>
+            <a:pPr lvl="1"/>
+            <a:r>
+              <a:rPr lang="en-US" smtClean="0"/>
+              <a:t>Second level</a:t>
+            </a:r>
+          </a:p>
+          <a:p>
+            <a:pPr lvl="2"/>
+            <a:r>
+              <a:rPr lang="en-US" smtClean="0"/>
+              <a:t>Third level</a:t>
+            </a:r>
+          </a:p>
+          <a:p>
+            <a:pPr lvl="3"/>
+            <a:r>
+              <a:rPr lang="en-US" smtClean="0"/>
+              <a:t>Fourth level</a:t>
+            </a:r>
+          </a:p>
+          <a:p>
+            <a:pPr lvl="4"/>
+            <a:r>
+              <a:rPr lang="en-US" smtClean="0"/>
+              <a:t>Fifth level</a:t>
+            </a:r>
+            <a:endParaRPr lang="en-US"/>
+          </a:p>
+        </p:txBody>
+      </p:sp>
+      <p:sp>
+        <p:nvSpPr>
+          <p:cNvPr id="6" name="Footer Placeholder 5"/>
+          <p:cNvSpPr>
+            <a:spLocks noGrp="1"/>
+          </p:cNvSpPr>
+          <p:nvPr>
+            <p:ph type="ftr" sz="quarter" idx="4"/>
+          </p:nvPr>
+        </p:nvSpPr>
+        <p:spPr>
+          <a:xfrm>
+            <a:off x="0" y="8685213"/>
+            <a:ext cx="2971800" cy="457200"/>
+          </a:xfrm>
+          <a:prstGeom prst="rect">
+            <a:avLst/>
+          </a:prstGeom>
+        </p:spPr>
+        <p:txBody>
+          <a:bodyPr vert="horz" lIns="91440" tIns="45720" rIns="91440" bIns="45720" rtlCol="0" anchor="b"/>
+          <a:lstStyle>
+            <a:lvl1pPr algn="l">
+              <a:defRPr sz="1200"/>
+            </a:lvl1pPr>
+          </a:lstStyle>
+          <a:p>
+            <a:endParaRPr lang="en-US"/>
+          </a:p>
+        </p:txBody>
+      </p:sp>
+      <p:sp>
+        <p:nvSpPr>
+          <p:cNvPr id="7" name="Slide Number Placeholder 6"/>
+          <p:cNvSpPr>
+            <a:spLocks noGrp="1"/>
+          </p:cNvSpPr>
+          <p:nvPr>
+            <p:ph type="sldNum" sz="quarter" idx="5"/>
+          </p:nvPr>
+        </p:nvSpPr>
+        <p:spPr>
+          <a:xfrm>
+            <a:off x="3884613" y="8685213"/>
+            <a:ext cx="2971800" cy="457200"/>
+          </a:xfrm>
+          <a:prstGeom prst="rect">
+            <a:avLst/>
+          </a:prstGeom>
+        </p:spPr>
+        <p:txBody>
+          <a:bodyPr vert="horz" lIns="91440" tIns="45720" rIns="91440" bIns="45720" rtlCol="0" anchor="b"/>
+          <a:lstStyle>
+            <a:lvl1pPr algn="r">
+              <a:defRPr sz="1200"/>
+            </a:lvl1pPr>
+          </a:lstStyle>
+          <a:p>
+            <a:fld id="{BB5E49A5-4136-284D-997B-48E1D791AD67}" type="slidenum">
+              <a:rPr lang="en-US" smtClean="0"/>
+              <a:t>‹#›</a:t>
+            </a:fld>
+            <a:endParaRPr lang="en-US"/>
+          </a:p>
+        </p:txBody>
+      </p:sp>
     </p:spTree>
     <p:extLst>
       <p:ext uri="{BB962C8B-B14F-4D97-AF65-F5344CB8AC3E}">
-        <p14:creationId xmlns:p14="http://schemas.microsoft.com/office/powerpoint/2010/main" val="1327163138"/>
+        <p14:creationId xmlns:p14="http://schemas.microsoft.com/office/powerpoint/2010/main" val="2623252185"/>
       </p:ext>
     </p:extLst>
   </p:cSld>
   <p:clrMap bg1="lt1" tx1="dk1" bg2="lt2" tx2="dk2" accent1="accent1" accent2="accent2" accent3="accent3" accent4="accent4" accent5="accent5" accent6="accent6" hlink="hlink" folHlink="folHlink"/>
   <p:notesStyle>
-    <a:lvl1pPr marL="0" algn="l" defTabSz="914400" rtl="0" eaLnBrk="1" latinLnBrk="0" hangingPunct="1">
+    <a:lvl1pPr marL="0" algn="l" defTabSz="457200" rtl="0" eaLnBrk="1" latinLnBrk="0" hangingPunct="1">
       <a:defRPr sz="1200" kern="1200">
         <a:solidFill>
           <a:schemeClr val="tx1"/>
@@ -373,7 +599,7 @@
         <a:cs typeface="+mn-cs"/>
       </a:defRPr>
     </a:lvl1pPr>
-    <a:lvl2pPr marL="457200" algn="l" defTabSz="914400" rtl="0" eaLnBrk="1" latinLnBrk="0" hangingPunct="1">
+    <a:lvl2pPr marL="457200" algn="l" defTabSz="457200" rtl="0" eaLnBrk="1" latinLnBrk="0" hangingPunct="1">
       <a:defRPr sz="1200" kern="1200">
         <a:solidFill>
           <a:schemeClr val="tx1"/>
@@ -383,7 +609,7 @@
         <a:cs typeface="+mn-cs"/>
       </a:defRPr>
     </a:lvl2pPr>
-    <a:lvl3pPr marL="914400" algn="l" defTabSz="914400" rtl="0" eaLnBrk="1" latinLnBrk="0" hangingPunct="1">
+    <a:lvl3pPr marL="914400" algn="l" defTabSz="457200" rtl="0" eaLnBrk="1" latinLnBrk="0" hangingPunct="1">
       <a:defRPr sz="1200" kern="1200">
         <a:solidFill>
           <a:schemeClr val="tx1"/>
@@ -393,7 +619,7 @@
         <a:cs typeface="+mn-cs"/>
       </a:defRPr>
     </a:lvl3pPr>
-    <a:lvl4pPr marL="1371600" algn="l" defTabSz="914400" rtl="0" eaLnBrk="1" latinLnBrk="0" hangingPunct="1">
+    <a:lvl4pPr marL="1371600" algn="l" defTabSz="457200" rtl="0" eaLnBrk="1" latinLnBrk="0" hangingPunct="1">
       <a:defRPr sz="1200" kern="1200">
         <a:solidFill>
           <a:schemeClr val="tx1"/>
@@ -403,7 +629,7 @@
         <a:cs typeface="+mn-cs"/>
       </a:defRPr>
     </a:lvl4pPr>
-    <a:lvl5pPr marL="1828800" algn="l" defTabSz="914400" rtl="0" eaLnBrk="1" latinLnBrk="0" hangingPunct="1">
+    <a:lvl5pPr marL="1828800" algn="l" defTabSz="457200" rtl="0" eaLnBrk="1" latinLnBrk="0" hangingPunct="1">
       <a:defRPr sz="1200" kern="1200">
         <a:solidFill>
           <a:schemeClr val="tx1"/>
@@ -413,7 +639,7 @@
         <a:cs typeface="+mn-cs"/>
       </a:defRPr>
     </a:lvl5pPr>
-    <a:lvl6pPr marL="2286000" algn="l" defTabSz="914400" rtl="0" eaLnBrk="1" latinLnBrk="0" hangingPunct="1">
+    <a:lvl6pPr marL="2286000" algn="l" defTabSz="457200" rtl="0" eaLnBrk="1" latinLnBrk="0" hangingPunct="1">
       <a:defRPr sz="1200" kern="1200">
         <a:solidFill>
           <a:schemeClr val="tx1"/>
@@ -423,7 +649,7 @@
         <a:cs typeface="+mn-cs"/>
       </a:defRPr>
     </a:lvl6pPr>
-    <a:lvl7pPr marL="2743200" algn="l" defTabSz="914400" rtl="0" eaLnBrk="1" latinLnBrk="0" hangingPunct="1">
+    <a:lvl7pPr marL="2743200" algn="l" defTabSz="457200" rtl="0" eaLnBrk="1" latinLnBrk="0" hangingPunct="1">
       <a:defRPr sz="1200" kern="1200">
         <a:solidFill>
           <a:schemeClr val="tx1"/>
@@ -433,7 +659,7 @@
         <a:cs typeface="+mn-cs"/>
       </a:defRPr>
     </a:lvl7pPr>
-    <a:lvl8pPr marL="3200400" algn="l" defTabSz="914400" rtl="0" eaLnBrk="1" latinLnBrk="0" hangingPunct="1">
+    <a:lvl8pPr marL="3200400" algn="l" defTabSz="457200" rtl="0" eaLnBrk="1" latinLnBrk="0" hangingPunct="1">
       <a:defRPr sz="1200" kern="1200">
         <a:solidFill>
           <a:schemeClr val="tx1"/>
@@ -443,7 +669,7 @@
         <a:cs typeface="+mn-cs"/>
       </a:defRPr>
     </a:lvl8pPr>
-    <a:lvl9pPr marL="3657600" algn="l" defTabSz="914400" rtl="0" eaLnBrk="1" latinLnBrk="0" hangingPunct="1">
+    <a:lvl9pPr marL="3657600" algn="l" defTabSz="457200" rtl="0" eaLnBrk="1" latinLnBrk="0" hangingPunct="1">
       <a:defRPr sz="1200" kern="1200">
         <a:solidFill>
           <a:schemeClr val="tx1"/>
@@ -458,7 +684,7 @@
 </file>
 
 <file path=ppt/notesSlides/notesSlide1.xml><?xml version="1.0" encoding="utf-8"?>
-<p:notes xmlns:a="http://schemas.openxmlformats.org/drawingml/2006/main" xmlns:r="http://schemas.openxmlformats.org/officeDocument/2006/relationships" xmlns:p="http://schemas.openxmlformats.org/presentationml/2006/main">
+<p:notes xmlns:a="http://schemas.openxmlformats.org/drawingml/2006/main" xmlns:p="http://schemas.openxmlformats.org/presentationml/2006/main" xmlns:r="http://schemas.openxmlformats.org/officeDocument/2006/relationships">
   <p:cSld>
     <p:spTree>
       <p:nvGrpSpPr>
@@ -478,7 +704,7 @@
         <p:nvSpPr>
           <p:cNvPr id="2" name="Slide Image Placeholder 1"/>
           <p:cNvSpPr>
-            <a:spLocks noGrp="1" noRot="1" noChangeAspect="1"/>
+            <a:spLocks noGrp="1"/>
           </p:cNvSpPr>
           <p:nvPr>
             <p:ph type="sldImg" idx="2"/>
@@ -493,7 +719,7 @@
             <a:spLocks noGrp="1"/>
           </p:cNvSpPr>
           <p:nvPr>
-            <p:ph type="body" sz="quarter" idx="3"/>
+            <p:ph type="body" idx="3" sz="quarter"/>
           </p:nvPr>
         </p:nvSpPr>
         <p:spPr/>
@@ -514,7 +740,7 @@
             <a:spLocks noGrp="1"/>
           </p:cNvSpPr>
           <p:nvPr>
-            <p:ph type="sldNum" sz="quarter" idx="5"/>
+            <p:ph type="sldNum" idx="5" sz="quarter"/>
           </p:nvPr>
         </p:nvSpPr>
         <p:spPr/>
@@ -528,7 +754,7 @@
 </file>
 
 <file path=ppt/notesSlides/notesSlide10.xml><?xml version="1.0" encoding="utf-8"?>
-<p:notes xmlns:a="http://schemas.openxmlformats.org/drawingml/2006/main" xmlns:r="http://schemas.openxmlformats.org/officeDocument/2006/relationships" xmlns:p="http://schemas.openxmlformats.org/presentationml/2006/main">
+<p:notes xmlns:a="http://schemas.openxmlformats.org/drawingml/2006/main" xmlns:p="http://schemas.openxmlformats.org/presentationml/2006/main" xmlns:r="http://schemas.openxmlformats.org/officeDocument/2006/relationships">
   <p:cSld>
     <p:spTree>
       <p:nvGrpSpPr>
@@ -548,7 +774,7 @@
         <p:nvSpPr>
           <p:cNvPr id="2" name="Slide Image Placeholder 1"/>
           <p:cNvSpPr>
-            <a:spLocks noGrp="1" noRot="1" noChangeAspect="1"/>
+            <a:spLocks noGrp="1"/>
           </p:cNvSpPr>
           <p:nvPr>
             <p:ph type="sldImg" idx="2"/>
@@ -563,7 +789,7 @@
             <a:spLocks noGrp="1"/>
           </p:cNvSpPr>
           <p:nvPr>
-            <p:ph type="body" sz="quarter" idx="3"/>
+            <p:ph type="body" idx="3" sz="quarter"/>
           </p:nvPr>
         </p:nvSpPr>
         <p:spPr/>
@@ -584,7 +810,7 @@
             <a:spLocks noGrp="1"/>
           </p:cNvSpPr>
           <p:nvPr>
-            <p:ph type="sldNum" sz="quarter" idx="5"/>
+            <p:ph type="sldNum" idx="5" sz="quarter"/>
           </p:nvPr>
         </p:nvSpPr>
         <p:spPr/>
@@ -598,7 +824,7 @@
 </file>
 
 <file path=ppt/notesSlides/notesSlide11.xml><?xml version="1.0" encoding="utf-8"?>
-<p:notes xmlns:a="http://schemas.openxmlformats.org/drawingml/2006/main" xmlns:r="http://schemas.openxmlformats.org/officeDocument/2006/relationships" xmlns:p="http://schemas.openxmlformats.org/presentationml/2006/main">
+<p:notes xmlns:a="http://schemas.openxmlformats.org/drawingml/2006/main" xmlns:p="http://schemas.openxmlformats.org/presentationml/2006/main" xmlns:r="http://schemas.openxmlformats.org/officeDocument/2006/relationships">
   <p:cSld>
     <p:spTree>
       <p:nvGrpSpPr>
@@ -618,7 +844,7 @@
         <p:nvSpPr>
           <p:cNvPr id="2" name="Slide Image Placeholder 1"/>
           <p:cNvSpPr>
-            <a:spLocks noGrp="1" noRot="1" noChangeAspect="1"/>
+            <a:spLocks noGrp="1"/>
           </p:cNvSpPr>
           <p:nvPr>
             <p:ph type="sldImg" idx="2"/>
@@ -633,7 +859,7 @@
             <a:spLocks noGrp="1"/>
           </p:cNvSpPr>
           <p:nvPr>
-            <p:ph type="body" sz="quarter" idx="3"/>
+            <p:ph type="body" idx="3" sz="quarter"/>
           </p:nvPr>
         </p:nvSpPr>
         <p:spPr/>
@@ -642,7 +868,7 @@
           <a:lstStyle/>
           <a:p>
             <a:r>
-              <a:t>Sec 11.6 + new analysis (Fig 15). The tribal data-share turns the caveat into an upgrade.</a:t>
+              <a:t>Sec 11.6-11.7 + revised Fig 15. Correction: the Quinault alternate-day fishery is NOT a state proxy, so there is no offsetting data-share. The cost of thinning the donor is real and unoffset. This is why the recommendation is to hold the donor at its co-management floor and fund Long Beach from the pilot instead.</a:t>
             </a:r>
           </a:p>
         </p:txBody>
@@ -654,7 +880,7 @@
             <a:spLocks noGrp="1"/>
           </p:cNvSpPr>
           <p:nvPr>
-            <p:ph type="sldNum" sz="quarter" idx="5"/>
+            <p:ph type="sldNum" idx="5" sz="quarter"/>
           </p:nvPr>
         </p:nvSpPr>
         <p:spPr/>
@@ -668,7 +894,7 @@
 </file>
 
 <file path=ppt/notesSlides/notesSlide12.xml><?xml version="1.0" encoding="utf-8"?>
-<p:notes xmlns:a="http://schemas.openxmlformats.org/drawingml/2006/main" xmlns:r="http://schemas.openxmlformats.org/officeDocument/2006/relationships" xmlns:p="http://schemas.openxmlformats.org/presentationml/2006/main">
+<p:notes xmlns:a="http://schemas.openxmlformats.org/drawingml/2006/main" xmlns:p="http://schemas.openxmlformats.org/presentationml/2006/main" xmlns:r="http://schemas.openxmlformats.org/officeDocument/2006/relationships">
   <p:cSld>
     <p:spTree>
       <p:nvGrpSpPr>
@@ -688,7 +914,7 @@
         <p:nvSpPr>
           <p:cNvPr id="2" name="Slide Image Placeholder 1"/>
           <p:cNvSpPr>
-            <a:spLocks noGrp="1" noRot="1" noChangeAspect="1"/>
+            <a:spLocks noGrp="1"/>
           </p:cNvSpPr>
           <p:nvPr>
             <p:ph type="sldImg" idx="2"/>
@@ -703,7 +929,7 @@
             <a:spLocks noGrp="1"/>
           </p:cNvSpPr>
           <p:nvPr>
-            <p:ph type="body" sz="quarter" idx="3"/>
+            <p:ph type="body" idx="3" sz="quarter"/>
           </p:nvPr>
         </p:nvSpPr>
         <p:spPr/>
@@ -712,7 +938,7 @@
           <a:lstStyle/>
           <a:p>
             <a:r>
-              <a:t>The four recommendations. #1 and #3 are the ones with the highest leverage.</a:t>
+              <a:t>Sources: INGRESSPLAN98.docx (method, one counter per approach); consolidated IE inventory (Long Beach surveys were Oysterville-north-only or Seaview-south-only, never whole-beach); wdfw02656.pdf (7-section effort structure; the six drivable approaches are Seaview, Long Beach/Bolstad, Cranberry, Klipsan, Ocean Park, Oysterville).</a:t>
             </a:r>
           </a:p>
         </p:txBody>
@@ -724,7 +950,7 @@
             <a:spLocks noGrp="1"/>
           </p:cNvSpPr>
           <p:nvPr>
-            <p:ph type="sldNum" sz="quarter" idx="5"/>
+            <p:ph type="sldNum" idx="5" sz="quarter"/>
           </p:nvPr>
         </p:nvSpPr>
         <p:spPr/>
@@ -737,8 +963,8 @@
 </p:notes>
 </file>
 
-<file path=ppt/notesSlides/notesSlide2.xml><?xml version="1.0" encoding="utf-8"?>
-<p:notes xmlns:a="http://schemas.openxmlformats.org/drawingml/2006/main" xmlns:r="http://schemas.openxmlformats.org/officeDocument/2006/relationships" xmlns:p="http://schemas.openxmlformats.org/presentationml/2006/main">
+<file path=ppt/notesSlides/notesSlide13.xml><?xml version="1.0" encoding="utf-8"?>
+<p:notes xmlns:a="http://schemas.openxmlformats.org/drawingml/2006/main" xmlns:p="http://schemas.openxmlformats.org/presentationml/2006/main" xmlns:r="http://schemas.openxmlformats.org/officeDocument/2006/relationships">
   <p:cSld>
     <p:spTree>
       <p:nvGrpSpPr>
@@ -758,7 +984,7 @@
         <p:nvSpPr>
           <p:cNvPr id="2" name="Slide Image Placeholder 1"/>
           <p:cNvSpPr>
-            <a:spLocks noGrp="1" noRot="1" noChangeAspect="1"/>
+            <a:spLocks noGrp="1"/>
           </p:cNvSpPr>
           <p:nvPr>
             <p:ph type="sldImg" idx="2"/>
@@ -773,7 +999,7 @@
             <a:spLocks noGrp="1"/>
           </p:cNvSpPr>
           <p:nvPr>
-            <p:ph type="body" sz="quarter" idx="3"/>
+            <p:ph type="body" idx="3" sz="quarter"/>
           </p:nvPr>
         </p:nvSpPr>
         <p:spPr/>
@@ -782,7 +1008,7 @@
           <a:lstStyle/>
           <a:p>
             <a:r>
-              <a:t>Set up the decision. The standard is external because WDFW has none for this fishery.</a:t>
+              <a:t>Two crews, not one, because Long Beach is far longer than Twin Harbors or Mocrocks and carries several thousand diggers on a good day. The paired northern survey is the explicit test of the imputation the whole program leans on.</a:t>
             </a:r>
           </a:p>
         </p:txBody>
@@ -794,7 +1020,7 @@
             <a:spLocks noGrp="1"/>
           </p:cNvSpPr>
           <p:nvPr>
-            <p:ph type="sldNum" sz="quarter" idx="5"/>
+            <p:ph type="sldNum" idx="5" sz="quarter"/>
           </p:nvPr>
         </p:nvSpPr>
         <p:spPr/>
@@ -807,8 +1033,8 @@
 </p:notes>
 </file>
 
-<file path=ppt/notesSlides/notesSlide3.xml><?xml version="1.0" encoding="utf-8"?>
-<p:notes xmlns:a="http://schemas.openxmlformats.org/drawingml/2006/main" xmlns:r="http://schemas.openxmlformats.org/officeDocument/2006/relationships" xmlns:p="http://schemas.openxmlformats.org/presentationml/2006/main">
+<file path=ppt/notesSlides/notesSlide14.xml><?xml version="1.0" encoding="utf-8"?>
+<p:notes xmlns:a="http://schemas.openxmlformats.org/drawingml/2006/main" xmlns:p="http://schemas.openxmlformats.org/presentationml/2006/main" xmlns:r="http://schemas.openxmlformats.org/officeDocument/2006/relationships">
   <p:cSld>
     <p:spTree>
       <p:nvGrpSpPr>
@@ -828,7 +1054,7 @@
         <p:nvSpPr>
           <p:cNvPr id="2" name="Slide Image Placeholder 1"/>
           <p:cNvSpPr>
-            <a:spLocks noGrp="1" noRot="1" noChangeAspect="1"/>
+            <a:spLocks noGrp="1"/>
           </p:cNvSpPr>
           <p:nvPr>
             <p:ph type="sldImg" idx="2"/>
@@ -843,7 +1069,7 @@
             <a:spLocks noGrp="1"/>
           </p:cNvSpPr>
           <p:nvPr>
-            <p:ph type="body" sz="quarter" idx="3"/>
+            <p:ph type="body" idx="3" sz="quarter"/>
           </p:nvPr>
         </p:nvSpPr>
         <p:spPr/>
@@ -852,7 +1078,7 @@
           <a:lstStyle/>
           <a:p>
             <a:r>
-              <a:t>Sec 6.2-6.3. The instrument itself changed, which propagates into the imputation ratios.</a:t>
+              <a:t>Sec 10.3 / new Fig 16. The pilot is not one survey but the start of a rebuilt table; and because it is whole-beach it fixes the within-beach section allocation that partial surveys leave imputed.</a:t>
             </a:r>
           </a:p>
         </p:txBody>
@@ -864,7 +1090,7 @@
             <a:spLocks noGrp="1"/>
           </p:cNvSpPr>
           <p:nvPr>
-            <p:ph type="sldNum" sz="quarter" idx="5"/>
+            <p:ph type="sldNum" idx="5" sz="quarter"/>
           </p:nvPr>
         </p:nvSpPr>
         <p:spPr/>
@@ -877,8 +1103,8 @@
 </p:notes>
 </file>
 
-<file path=ppt/notesSlides/notesSlide4.xml><?xml version="1.0" encoding="utf-8"?>
-<p:notes xmlns:a="http://schemas.openxmlformats.org/drawingml/2006/main" xmlns:r="http://schemas.openxmlformats.org/officeDocument/2006/relationships" xmlns:p="http://schemas.openxmlformats.org/presentationml/2006/main">
+<file path=ppt/notesSlides/notesSlide15.xml><?xml version="1.0" encoding="utf-8"?>
+<p:notes xmlns:a="http://schemas.openxmlformats.org/drawingml/2006/main" xmlns:p="http://schemas.openxmlformats.org/presentationml/2006/main" xmlns:r="http://schemas.openxmlformats.org/officeDocument/2006/relationships">
   <p:cSld>
     <p:spTree>
       <p:nvGrpSpPr>
@@ -898,7 +1124,7 @@
         <p:nvSpPr>
           <p:cNvPr id="2" name="Slide Image Placeholder 1"/>
           <p:cNvSpPr>
-            <a:spLocks noGrp="1" noRot="1" noChangeAspect="1"/>
+            <a:spLocks noGrp="1"/>
           </p:cNvSpPr>
           <p:nvPr>
             <p:ph type="sldImg" idx="2"/>
@@ -913,7 +1139,7 @@
             <a:spLocks noGrp="1"/>
           </p:cNvSpPr>
           <p:nvPr>
-            <p:ph type="body" sz="quarter" idx="3"/>
+            <p:ph type="body" idx="3" sz="quarter"/>
           </p:nvPr>
         </p:nvSpPr>
         <p:spPr/>
@@ -922,7 +1148,7 @@
           <a:lstStyle/>
           <a:p>
             <a:r>
-              <a:t>Sec 10.1 / Table 14. Key reframing: magnitude is not what matters, correlation is.</a:t>
+              <a:t>Reordered after the Quinault correction. #1 (the pilot) and #2 (hold the donor floor) are the highest-leverage moves. #4 replaces the old 'condition the pullback on tribal data-sharing', which was wrong: there is no tribal offset.</a:t>
             </a:r>
           </a:p>
         </p:txBody>
@@ -934,7 +1160,7 @@
             <a:spLocks noGrp="1"/>
           </p:cNvSpPr>
           <p:nvPr>
-            <p:ph type="sldNum" sz="quarter" idx="5"/>
+            <p:ph type="sldNum" idx="5" sz="quarter"/>
           </p:nvPr>
         </p:nvSpPr>
         <p:spPr/>
@@ -947,8 +1173,8 @@
 </p:notes>
 </file>
 
-<file path=ppt/notesSlides/notesSlide5.xml><?xml version="1.0" encoding="utf-8"?>
-<p:notes xmlns:a="http://schemas.openxmlformats.org/drawingml/2006/main" xmlns:r="http://schemas.openxmlformats.org/officeDocument/2006/relationships" xmlns:p="http://schemas.openxmlformats.org/presentationml/2006/main">
+<file path=ppt/notesSlides/notesSlide2.xml><?xml version="1.0" encoding="utf-8"?>
+<p:notes xmlns:a="http://schemas.openxmlformats.org/drawingml/2006/main" xmlns:p="http://schemas.openxmlformats.org/presentationml/2006/main" xmlns:r="http://schemas.openxmlformats.org/officeDocument/2006/relationships">
   <p:cSld>
     <p:spTree>
       <p:nvGrpSpPr>
@@ -968,7 +1194,7 @@
         <p:nvSpPr>
           <p:cNvPr id="2" name="Slide Image Placeholder 1"/>
           <p:cNvSpPr>
-            <a:spLocks noGrp="1" noRot="1" noChangeAspect="1"/>
+            <a:spLocks noGrp="1"/>
           </p:cNvSpPr>
           <p:nvPr>
             <p:ph type="sldImg" idx="2"/>
@@ -983,7 +1209,7 @@
             <a:spLocks noGrp="1"/>
           </p:cNvSpPr>
           <p:nvPr>
-            <p:ph type="body" sz="quarter" idx="3"/>
+            <p:ph type="body" idx="3" sz="quarter"/>
           </p:nvPr>
         </p:nvSpPr>
         <p:spPr/>
@@ -992,7 +1218,7 @@
           <a:lstStyle/>
           <a:p>
             <a:r>
-              <a:t>Sec 10.2 / Tables 15-16. Foreshadows the donor question: the southern beaches are the donors.</a:t>
+              <a:t>Set up the decision. The standard is external because WDFW has none for this fishery.</a:t>
             </a:r>
           </a:p>
         </p:txBody>
@@ -1004,7 +1230,7 @@
             <a:spLocks noGrp="1"/>
           </p:cNvSpPr>
           <p:nvPr>
-            <p:ph type="sldNum" sz="quarter" idx="5"/>
+            <p:ph type="sldNum" idx="5" sz="quarter"/>
           </p:nvPr>
         </p:nvSpPr>
         <p:spPr/>
@@ -1017,8 +1243,8 @@
 </p:notes>
 </file>
 
-<file path=ppt/notesSlides/notesSlide6.xml><?xml version="1.0" encoding="utf-8"?>
-<p:notes xmlns:a="http://schemas.openxmlformats.org/drawingml/2006/main" xmlns:r="http://schemas.openxmlformats.org/officeDocument/2006/relationships" xmlns:p="http://schemas.openxmlformats.org/presentationml/2006/main">
+<file path=ppt/notesSlides/notesSlide3.xml><?xml version="1.0" encoding="utf-8"?>
+<p:notes xmlns:a="http://schemas.openxmlformats.org/drawingml/2006/main" xmlns:p="http://schemas.openxmlformats.org/presentationml/2006/main" xmlns:r="http://schemas.openxmlformats.org/officeDocument/2006/relationships">
   <p:cSld>
     <p:spTree>
       <p:nvGrpSpPr>
@@ -1038,7 +1264,7 @@
         <p:nvSpPr>
           <p:cNvPr id="2" name="Slide Image Placeholder 1"/>
           <p:cNvSpPr>
-            <a:spLocks noGrp="1" noRot="1" noChangeAspect="1"/>
+            <a:spLocks noGrp="1"/>
           </p:cNvSpPr>
           <p:nvPr>
             <p:ph type="sldImg" idx="2"/>
@@ -1053,7 +1279,7 @@
             <a:spLocks noGrp="1"/>
           </p:cNvSpPr>
           <p:nvPr>
-            <p:ph type="body" sz="quarter" idx="3"/>
+            <p:ph type="body" idx="3" sz="quarter"/>
           </p:nvPr>
         </p:nvSpPr>
         <p:spPr/>
@@ -1062,7 +1288,7 @@
           <a:lstStyle/>
           <a:p>
             <a:r>
-              <a:t>Sec 11.2 / Table 19. The headline answer.</a:t>
+              <a:t>Sec 6.2-6.3. The instrument itself changed, which propagates into the imputation ratios.</a:t>
             </a:r>
           </a:p>
         </p:txBody>
@@ -1074,7 +1300,7 @@
             <a:spLocks noGrp="1"/>
           </p:cNvSpPr>
           <p:nvPr>
-            <p:ph type="sldNum" sz="quarter" idx="5"/>
+            <p:ph type="sldNum" idx="5" sz="quarter"/>
           </p:nvPr>
         </p:nvSpPr>
         <p:spPr/>
@@ -1087,8 +1313,8 @@
 </p:notes>
 </file>
 
-<file path=ppt/notesSlides/notesSlide7.xml><?xml version="1.0" encoding="utf-8"?>
-<p:notes xmlns:a="http://schemas.openxmlformats.org/drawingml/2006/main" xmlns:r="http://schemas.openxmlformats.org/officeDocument/2006/relationships" xmlns:p="http://schemas.openxmlformats.org/presentationml/2006/main">
+<file path=ppt/notesSlides/notesSlide4.xml><?xml version="1.0" encoding="utf-8"?>
+<p:notes xmlns:a="http://schemas.openxmlformats.org/drawingml/2006/main" xmlns:p="http://schemas.openxmlformats.org/presentationml/2006/main" xmlns:r="http://schemas.openxmlformats.org/officeDocument/2006/relationships">
   <p:cSld>
     <p:spTree>
       <p:nvGrpSpPr>
@@ -1108,7 +1334,7 @@
         <p:nvSpPr>
           <p:cNvPr id="2" name="Slide Image Placeholder 1"/>
           <p:cNvSpPr>
-            <a:spLocks noGrp="1" noRot="1" noChangeAspect="1"/>
+            <a:spLocks noGrp="1"/>
           </p:cNvSpPr>
           <p:nvPr>
             <p:ph type="sldImg" idx="2"/>
@@ -1123,7 +1349,7 @@
             <a:spLocks noGrp="1"/>
           </p:cNvSpPr>
           <p:nvPr>
-            <p:ph type="body" sz="quarter" idx="3"/>
+            <p:ph type="body" idx="3" sz="quarter"/>
           </p:nvPr>
         </p:nvSpPr>
         <p:spPr/>
@@ -1132,7 +1358,7 @@
           <a:lstStyle/>
           <a:p>
             <a:r>
-              <a:t>Sec 11.3 / Table 20.</a:t>
+              <a:t>Sec 10.1 / Table 14. Key reframing: magnitude is not what matters, correlation is.</a:t>
             </a:r>
           </a:p>
         </p:txBody>
@@ -1144,7 +1370,7 @@
             <a:spLocks noGrp="1"/>
           </p:cNvSpPr>
           <p:nvPr>
-            <p:ph type="sldNum" sz="quarter" idx="5"/>
+            <p:ph type="sldNum" idx="5" sz="quarter"/>
           </p:nvPr>
         </p:nvSpPr>
         <p:spPr/>
@@ -1157,8 +1383,8 @@
 </p:notes>
 </file>
 
-<file path=ppt/notesSlides/notesSlide8.xml><?xml version="1.0" encoding="utf-8"?>
-<p:notes xmlns:a="http://schemas.openxmlformats.org/drawingml/2006/main" xmlns:r="http://schemas.openxmlformats.org/officeDocument/2006/relationships" xmlns:p="http://schemas.openxmlformats.org/presentationml/2006/main">
+<file path=ppt/notesSlides/notesSlide5.xml><?xml version="1.0" encoding="utf-8"?>
+<p:notes xmlns:a="http://schemas.openxmlformats.org/drawingml/2006/main" xmlns:p="http://schemas.openxmlformats.org/presentationml/2006/main" xmlns:r="http://schemas.openxmlformats.org/officeDocument/2006/relationships">
   <p:cSld>
     <p:spTree>
       <p:nvGrpSpPr>
@@ -1178,7 +1404,7 @@
         <p:nvSpPr>
           <p:cNvPr id="2" name="Slide Image Placeholder 1"/>
           <p:cNvSpPr>
-            <a:spLocks noGrp="1" noRot="1" noChangeAspect="1"/>
+            <a:spLocks noGrp="1"/>
           </p:cNvSpPr>
           <p:nvPr>
             <p:ph type="sldImg" idx="2"/>
@@ -1193,7 +1419,7 @@
             <a:spLocks noGrp="1"/>
           </p:cNvSpPr>
           <p:nvPr>
-            <p:ph type="body" sz="quarter" idx="3"/>
+            <p:ph type="body" idx="3" sz="quarter"/>
           </p:nvPr>
         </p:nvSpPr>
         <p:spPr/>
@@ -1202,7 +1428,7 @@
           <a:lstStyle/>
           <a:p>
             <a:r>
-              <a:t>Sec 11.4 / Table 21. Only surveys move the floor.</a:t>
+              <a:t>Sec 10.2 / Tables 15-16. Foreshadows the donor question: the southern beaches are the donors.</a:t>
             </a:r>
           </a:p>
         </p:txBody>
@@ -1214,7 +1440,7 @@
             <a:spLocks noGrp="1"/>
           </p:cNvSpPr>
           <p:nvPr>
-            <p:ph type="sldNum" sz="quarter" idx="5"/>
+            <p:ph type="sldNum" idx="5" sz="quarter"/>
           </p:nvPr>
         </p:nvSpPr>
         <p:spPr/>
@@ -1227,8 +1453,8 @@
 </p:notes>
 </file>
 
-<file path=ppt/notesSlides/notesSlide9.xml><?xml version="1.0" encoding="utf-8"?>
-<p:notes xmlns:a="http://schemas.openxmlformats.org/drawingml/2006/main" xmlns:r="http://schemas.openxmlformats.org/officeDocument/2006/relationships" xmlns:p="http://schemas.openxmlformats.org/presentationml/2006/main">
+<file path=ppt/notesSlides/notesSlide6.xml><?xml version="1.0" encoding="utf-8"?>
+<p:notes xmlns:a="http://schemas.openxmlformats.org/drawingml/2006/main" xmlns:p="http://schemas.openxmlformats.org/presentationml/2006/main" xmlns:r="http://schemas.openxmlformats.org/officeDocument/2006/relationships">
   <p:cSld>
     <p:spTree>
       <p:nvGrpSpPr>
@@ -1248,7 +1474,7 @@
         <p:nvSpPr>
           <p:cNvPr id="2" name="Slide Image Placeholder 1"/>
           <p:cNvSpPr>
-            <a:spLocks noGrp="1" noRot="1" noChangeAspect="1"/>
+            <a:spLocks noGrp="1"/>
           </p:cNvSpPr>
           <p:nvPr>
             <p:ph type="sldImg" idx="2"/>
@@ -1263,7 +1489,7 @@
             <a:spLocks noGrp="1"/>
           </p:cNvSpPr>
           <p:nvPr>
-            <p:ph type="body" sz="quarter" idx="3"/>
+            <p:ph type="body" idx="3" sz="quarter"/>
           </p:nvPr>
         </p:nvSpPr>
         <p:spPr/>
@@ -1272,6 +1498,216 @@
           <a:lstStyle/>
           <a:p>
             <a:r>
+              <a:t>Sec 11.2 / Table 19. The headline answer.</a:t>
+            </a:r>
+          </a:p>
+        </p:txBody>
+      </p:sp>
+      <p:sp>
+        <p:nvSpPr>
+          <p:cNvPr id="4" name="Slide Number Placeholder 3"/>
+          <p:cNvSpPr>
+            <a:spLocks noGrp="1"/>
+          </p:cNvSpPr>
+          <p:nvPr>
+            <p:ph type="sldNum" idx="5" sz="quarter"/>
+          </p:nvPr>
+        </p:nvSpPr>
+        <p:spPr/>
+      </p:sp>
+    </p:spTree>
+  </p:cSld>
+  <p:clrMapOvr>
+    <a:masterClrMapping/>
+  </p:clrMapOvr>
+</p:notes>
+</file>
+
+<file path=ppt/notesSlides/notesSlide7.xml><?xml version="1.0" encoding="utf-8"?>
+<p:notes xmlns:a="http://schemas.openxmlformats.org/drawingml/2006/main" xmlns:p="http://schemas.openxmlformats.org/presentationml/2006/main" xmlns:r="http://schemas.openxmlformats.org/officeDocument/2006/relationships">
+  <p:cSld>
+    <p:spTree>
+      <p:nvGrpSpPr>
+        <p:cNvPr id="1" name=""/>
+        <p:cNvGrpSpPr/>
+        <p:nvPr/>
+      </p:nvGrpSpPr>
+      <p:grpSpPr>
+        <a:xfrm>
+          <a:off x="0" y="0"/>
+          <a:ext cx="0" cy="0"/>
+          <a:chOff x="0" y="0"/>
+          <a:chExt cx="0" cy="0"/>
+        </a:xfrm>
+      </p:grpSpPr>
+      <p:sp>
+        <p:nvSpPr>
+          <p:cNvPr id="2" name="Slide Image Placeholder 1"/>
+          <p:cNvSpPr>
+            <a:spLocks noGrp="1"/>
+          </p:cNvSpPr>
+          <p:nvPr>
+            <p:ph type="sldImg" idx="2"/>
+          </p:nvPr>
+        </p:nvSpPr>
+        <p:spPr/>
+      </p:sp>
+      <p:sp>
+        <p:nvSpPr>
+          <p:cNvPr id="3" name="Notes Placeholder 2"/>
+          <p:cNvSpPr>
+            <a:spLocks noGrp="1"/>
+          </p:cNvSpPr>
+          <p:nvPr>
+            <p:ph type="body" idx="3" sz="quarter"/>
+          </p:nvPr>
+        </p:nvSpPr>
+        <p:spPr/>
+        <p:txBody>
+          <a:bodyPr/>
+          <a:lstStyle/>
+          <a:p>
+            <a:r>
+              <a:t>Sec 11.3 / Table 20.</a:t>
+            </a:r>
+          </a:p>
+        </p:txBody>
+      </p:sp>
+      <p:sp>
+        <p:nvSpPr>
+          <p:cNvPr id="4" name="Slide Number Placeholder 3"/>
+          <p:cNvSpPr>
+            <a:spLocks noGrp="1"/>
+          </p:cNvSpPr>
+          <p:nvPr>
+            <p:ph type="sldNum" idx="5" sz="quarter"/>
+          </p:nvPr>
+        </p:nvSpPr>
+        <p:spPr/>
+      </p:sp>
+    </p:spTree>
+  </p:cSld>
+  <p:clrMapOvr>
+    <a:masterClrMapping/>
+  </p:clrMapOvr>
+</p:notes>
+</file>
+
+<file path=ppt/notesSlides/notesSlide8.xml><?xml version="1.0" encoding="utf-8"?>
+<p:notes xmlns:a="http://schemas.openxmlformats.org/drawingml/2006/main" xmlns:p="http://schemas.openxmlformats.org/presentationml/2006/main" xmlns:r="http://schemas.openxmlformats.org/officeDocument/2006/relationships">
+  <p:cSld>
+    <p:spTree>
+      <p:nvGrpSpPr>
+        <p:cNvPr id="1" name=""/>
+        <p:cNvGrpSpPr/>
+        <p:nvPr/>
+      </p:nvGrpSpPr>
+      <p:grpSpPr>
+        <a:xfrm>
+          <a:off x="0" y="0"/>
+          <a:ext cx="0" cy="0"/>
+          <a:chOff x="0" y="0"/>
+          <a:chExt cx="0" cy="0"/>
+        </a:xfrm>
+      </p:grpSpPr>
+      <p:sp>
+        <p:nvSpPr>
+          <p:cNvPr id="2" name="Slide Image Placeholder 1"/>
+          <p:cNvSpPr>
+            <a:spLocks noGrp="1"/>
+          </p:cNvSpPr>
+          <p:nvPr>
+            <p:ph type="sldImg" idx="2"/>
+          </p:nvPr>
+        </p:nvSpPr>
+        <p:spPr/>
+      </p:sp>
+      <p:sp>
+        <p:nvSpPr>
+          <p:cNvPr id="3" name="Notes Placeholder 2"/>
+          <p:cNvSpPr>
+            <a:spLocks noGrp="1"/>
+          </p:cNvSpPr>
+          <p:nvPr>
+            <p:ph type="body" idx="3" sz="quarter"/>
+          </p:nvPr>
+        </p:nvSpPr>
+        <p:spPr/>
+        <p:txBody>
+          <a:bodyPr/>
+          <a:lstStyle/>
+          <a:p>
+            <a:r>
+              <a:t>Sec 11.4 / Table 21. Only surveys move the floor.</a:t>
+            </a:r>
+          </a:p>
+        </p:txBody>
+      </p:sp>
+      <p:sp>
+        <p:nvSpPr>
+          <p:cNvPr id="4" name="Slide Number Placeholder 3"/>
+          <p:cNvSpPr>
+            <a:spLocks noGrp="1"/>
+          </p:cNvSpPr>
+          <p:nvPr>
+            <p:ph type="sldNum" idx="5" sz="quarter"/>
+          </p:nvPr>
+        </p:nvSpPr>
+        <p:spPr/>
+      </p:sp>
+    </p:spTree>
+  </p:cSld>
+  <p:clrMapOvr>
+    <a:masterClrMapping/>
+  </p:clrMapOvr>
+</p:notes>
+</file>
+
+<file path=ppt/notesSlides/notesSlide9.xml><?xml version="1.0" encoding="utf-8"?>
+<p:notes xmlns:a="http://schemas.openxmlformats.org/drawingml/2006/main" xmlns:p="http://schemas.openxmlformats.org/presentationml/2006/main" xmlns:r="http://schemas.openxmlformats.org/officeDocument/2006/relationships">
+  <p:cSld>
+    <p:spTree>
+      <p:nvGrpSpPr>
+        <p:cNvPr id="1" name=""/>
+        <p:cNvGrpSpPr/>
+        <p:nvPr/>
+      </p:nvGrpSpPr>
+      <p:grpSpPr>
+        <a:xfrm>
+          <a:off x="0" y="0"/>
+          <a:ext cx="0" cy="0"/>
+          <a:chOff x="0" y="0"/>
+          <a:chExt cx="0" cy="0"/>
+        </a:xfrm>
+      </p:grpSpPr>
+      <p:sp>
+        <p:nvSpPr>
+          <p:cNvPr id="2" name="Slide Image Placeholder 1"/>
+          <p:cNvSpPr>
+            <a:spLocks noGrp="1"/>
+          </p:cNvSpPr>
+          <p:nvPr>
+            <p:ph type="sldImg" idx="2"/>
+          </p:nvPr>
+        </p:nvSpPr>
+        <p:spPr/>
+      </p:sp>
+      <p:sp>
+        <p:nvSpPr>
+          <p:cNvPr id="3" name="Notes Placeholder 2"/>
+          <p:cNvSpPr>
+            <a:spLocks noGrp="1"/>
+          </p:cNvSpPr>
+          <p:nvPr>
+            <p:ph type="body" idx="3" sz="quarter"/>
+          </p:nvPr>
+        </p:nvSpPr>
+        <p:spPr/>
+        <p:txBody>
+          <a:bodyPr/>
+          <a:lstStyle/>
+          <a:p>
+            <a:r>
               <a:t>Sec 11.5 / Table 22. Cost-neutral. But see the donor caveat next.</a:t>
             </a:r>
           </a:p>
@@ -1284,7 +1720,7 @@
             <a:spLocks noGrp="1"/>
           </p:cNvSpPr>
           <p:nvPr>
-            <p:ph type="sldNum" sz="quarter" idx="5"/>
+            <p:ph type="sldNum" idx="5" sz="quarter"/>
           </p:nvPr>
         </p:nvSpPr>
         <p:spPr/>
@@ -1505,13 +1941,13 @@
           <p:nvPr userDrawn="1"/>
         </p:nvPicPr>
         <p:blipFill>
-          <a:blip>
+          <a:blip r:embed="rId2">
             <a:extLst>
               <a:ext uri="{28A0092B-C50C-407E-A947-70E740481C1C}">
                 <a14:useLocalDpi xmlns:a14="http://schemas.microsoft.com/office/drawing/2010/main" val="0"/>
               </a:ext>
               <a:ext uri="{96DAC541-7B7A-43D3-8B79-37D633B846F1}">
-                <asvg:svgBlip xmlns:asvg="http://schemas.microsoft.com/office/drawing/2016/SVG/main" r:embed="rId2"/>
+                <asvg:svgBlip xmlns:asvg="http://schemas.microsoft.com/office/drawing/2016/SVG/main" r:embed="rId3"/>
               </a:ext>
             </a:extLst>
           </a:blip>
@@ -2214,13 +2650,13 @@
           <p:nvPr userDrawn="1"/>
         </p:nvPicPr>
         <p:blipFill>
-          <a:blip>
+          <a:blip r:embed="rId2">
             <a:extLst>
               <a:ext uri="{28A0092B-C50C-407E-A947-70E740481C1C}">
                 <a14:useLocalDpi xmlns:a14="http://schemas.microsoft.com/office/drawing/2010/main" val="0"/>
               </a:ext>
               <a:ext uri="{96DAC541-7B7A-43D3-8B79-37D633B846F1}">
-                <asvg:svgBlip xmlns:asvg="http://schemas.microsoft.com/office/drawing/2016/SVG/main" r:embed="rId2"/>
+                <asvg:svgBlip xmlns:asvg="http://schemas.microsoft.com/office/drawing/2016/SVG/main" r:embed="rId3"/>
               </a:ext>
             </a:extLst>
           </a:blip>
@@ -2677,13 +3113,13 @@
           <p:nvPr userDrawn="1"/>
         </p:nvPicPr>
         <p:blipFill>
-          <a:blip>
+          <a:blip r:embed="rId2">
             <a:extLst>
               <a:ext uri="{28A0092B-C50C-407E-A947-70E740481C1C}">
                 <a14:useLocalDpi xmlns:a14="http://schemas.microsoft.com/office/drawing/2010/main" val="0"/>
               </a:ext>
               <a:ext uri="{96DAC541-7B7A-43D3-8B79-37D633B846F1}">
-                <asvg:svgBlip xmlns:asvg="http://schemas.microsoft.com/office/drawing/2016/SVG/main" r:embed="rId2"/>
+                <asvg:svgBlip xmlns:asvg="http://schemas.microsoft.com/office/drawing/2016/SVG/main" r:embed="rId3"/>
               </a:ext>
             </a:extLst>
           </a:blip>
@@ -3187,13 +3623,13 @@
           <p:nvPr userDrawn="1"/>
         </p:nvPicPr>
         <p:blipFill>
-          <a:blip>
+          <a:blip r:embed="rId2">
             <a:extLst>
               <a:ext uri="{28A0092B-C50C-407E-A947-70E740481C1C}">
                 <a14:useLocalDpi xmlns:a14="http://schemas.microsoft.com/office/drawing/2010/main" val="0"/>
               </a:ext>
               <a:ext uri="{96DAC541-7B7A-43D3-8B79-37D633B846F1}">
-                <asvg:svgBlip xmlns:asvg="http://schemas.microsoft.com/office/drawing/2016/SVG/main" r:embed="rId2"/>
+                <asvg:svgBlip xmlns:asvg="http://schemas.microsoft.com/office/drawing/2016/SVG/main" r:embed="rId3"/>
               </a:ext>
             </a:extLst>
           </a:blip>
@@ -3801,13 +4237,13 @@
           <p:nvPr userDrawn="1"/>
         </p:nvPicPr>
         <p:blipFill>
-          <a:blip>
+          <a:blip r:embed="rId2">
             <a:extLst>
               <a:ext uri="{28A0092B-C50C-407E-A947-70E740481C1C}">
                 <a14:useLocalDpi xmlns:a14="http://schemas.microsoft.com/office/drawing/2010/main" val="0"/>
               </a:ext>
               <a:ext uri="{96DAC541-7B7A-43D3-8B79-37D633B846F1}">
-                <asvg:svgBlip xmlns:asvg="http://schemas.microsoft.com/office/drawing/2016/SVG/main" r:embed="rId2"/>
+                <asvg:svgBlip xmlns:asvg="http://schemas.microsoft.com/office/drawing/2016/SVG/main" r:embed="rId3"/>
               </a:ext>
             </a:extLst>
           </a:blip>
@@ -4537,13 +4973,13 @@
           <p:nvPr userDrawn="1"/>
         </p:nvPicPr>
         <p:blipFill>
-          <a:blip>
+          <a:blip r:embed="rId2">
             <a:extLst>
               <a:ext uri="{28A0092B-C50C-407E-A947-70E740481C1C}">
                 <a14:useLocalDpi xmlns:a14="http://schemas.microsoft.com/office/drawing/2010/main" val="0"/>
               </a:ext>
               <a:ext uri="{96DAC541-7B7A-43D3-8B79-37D633B846F1}">
-                <asvg:svgBlip xmlns:asvg="http://schemas.microsoft.com/office/drawing/2016/SVG/main" r:embed="rId2"/>
+                <asvg:svgBlip xmlns:asvg="http://schemas.microsoft.com/office/drawing/2016/SVG/main" r:embed="rId3"/>
               </a:ext>
             </a:extLst>
           </a:blip>
@@ -5395,13 +5831,13 @@
           <p:nvPr userDrawn="1"/>
         </p:nvPicPr>
         <p:blipFill>
-          <a:blip>
+          <a:blip r:embed="rId2">
             <a:extLst>
               <a:ext uri="{28A0092B-C50C-407E-A947-70E740481C1C}">
                 <a14:useLocalDpi xmlns:a14="http://schemas.microsoft.com/office/drawing/2010/main" val="0"/>
               </a:ext>
               <a:ext uri="{96DAC541-7B7A-43D3-8B79-37D633B846F1}">
-                <asvg:svgBlip xmlns:asvg="http://schemas.microsoft.com/office/drawing/2016/SVG/main" r:embed="rId2"/>
+                <asvg:svgBlip xmlns:asvg="http://schemas.microsoft.com/office/drawing/2016/SVG/main" r:embed="rId3"/>
               </a:ext>
             </a:extLst>
           </a:blip>
@@ -5814,13 +6250,13 @@
           <p:nvPr userDrawn="1"/>
         </p:nvPicPr>
         <p:blipFill>
-          <a:blip>
+          <a:blip r:embed="rId2">
             <a:extLst>
               <a:ext uri="{28A0092B-C50C-407E-A947-70E740481C1C}">
                 <a14:useLocalDpi xmlns:a14="http://schemas.microsoft.com/office/drawing/2010/main" val="0"/>
               </a:ext>
               <a:ext uri="{96DAC541-7B7A-43D3-8B79-37D633B846F1}">
-                <asvg:svgBlip xmlns:asvg="http://schemas.microsoft.com/office/drawing/2016/SVG/main" r:embed="rId2"/>
+                <asvg:svgBlip xmlns:asvg="http://schemas.microsoft.com/office/drawing/2016/SVG/main" r:embed="rId3"/>
               </a:ext>
             </a:extLst>
           </a:blip>
@@ -6281,7 +6717,7 @@
 </file>
 
 <file path=ppt/slides/slide1.xml><?xml version="1.0" encoding="utf-8"?>
-<p:sld xmlns:a="http://schemas.openxmlformats.org/drawingml/2006/main" xmlns:r="http://schemas.openxmlformats.org/officeDocument/2006/relationships" xmlns:p="http://schemas.openxmlformats.org/presentationml/2006/main">
+<p:sld xmlns:a="http://schemas.openxmlformats.org/drawingml/2006/main" xmlns:p="http://schemas.openxmlformats.org/presentationml/2006/main" xmlns:r="http://schemas.openxmlformats.org/officeDocument/2006/relationships">
   <p:cSld>
     <p:spTree>
       <p:nvGrpSpPr>
@@ -6289,14 +6725,7 @@
         <p:cNvGrpSpPr/>
         <p:nvPr/>
       </p:nvGrpSpPr>
-      <p:grpSpPr>
-        <a:xfrm>
-          <a:off x="0" y="0"/>
-          <a:ext cx="0" cy="0"/>
-          <a:chOff x="0" y="0"/>
-          <a:chExt cx="0" cy="0"/>
-        </a:xfrm>
-      </p:grpSpPr>
+      <p:grpSpPr/>
       <p:sp>
         <p:nvSpPr>
           <p:cNvPr id="2" name="Title 1"/>
@@ -6325,30 +6754,25 @@
             <a:spLocks noGrp="1"/>
           </p:cNvSpPr>
           <p:nvPr>
-            <p:ph sz="half" idx="1"/>
+            <p:ph idx="1" sz="half"/>
           </p:nvPr>
         </p:nvSpPr>
         <p:spPr/>
         <p:txBody>
-          <a:bodyPr wrap="square">
-            <a:noAutofit/>
-          </a:bodyPr>
+          <a:bodyPr wrap="square"/>
           <a:lstStyle/>
           <a:p>
             <a:r>
-              <a:rPr sz="2000" dirty="0"/>
               <a:t>Findings from the 2026 harvest-estimate methodology review (v10)</a:t>
             </a:r>
           </a:p>
           <a:p>
             <a:r>
-              <a:rPr sz="2000" dirty="0"/>
               <a:t>Matthew George  ·  Coastal Shellfish Unit, WDFW</a:t>
             </a:r>
           </a:p>
           <a:p>
             <a:r>
-              <a:rPr sz="2000" dirty="0"/>
               <a:t>2026-27 season planning</a:t>
             </a:r>
           </a:p>
@@ -6363,7 +6787,7 @@
 </file>
 
 <file path=ppt/slides/slide10.xml><?xml version="1.0" encoding="utf-8"?>
-<p:sld xmlns:a="http://schemas.openxmlformats.org/drawingml/2006/main" xmlns:r="http://schemas.openxmlformats.org/officeDocument/2006/relationships" xmlns:p="http://schemas.openxmlformats.org/presentationml/2006/main">
+<p:sld xmlns:a="http://schemas.openxmlformats.org/drawingml/2006/main" xmlns:p="http://schemas.openxmlformats.org/presentationml/2006/main" xmlns:r="http://schemas.openxmlformats.org/officeDocument/2006/relationships">
   <p:cSld>
     <p:spTree>
       <p:nvGrpSpPr>
@@ -6371,14 +6795,7 @@
         <p:cNvGrpSpPr/>
         <p:nvPr/>
       </p:nvGrpSpPr>
-      <p:grpSpPr>
-        <a:xfrm>
-          <a:off x="0" y="0"/>
-          <a:ext cx="0" cy="0"/>
-          <a:chOff x="0" y="0"/>
-          <a:chExt cx="0" cy="0"/>
-        </a:xfrm>
-      </p:grpSpPr>
+      <p:grpSpPr/>
       <p:sp>
         <p:nvSpPr>
           <p:cNvPr id="2" name="Title 1"/>
@@ -6407,7 +6824,7 @@
             <a:spLocks noGrp="1"/>
           </p:cNvSpPr>
           <p:nvPr>
-            <p:ph sz="half" idx="1"/>
+            <p:ph idx="1" sz="half"/>
           </p:nvPr>
         </p:nvSpPr>
         <p:spPr/>
@@ -6416,7 +6833,7 @@
           <a:lstStyle/>
           <a:p>
             <a:r>
-              <a:rPr sz="1500" b="1"/>
+              <a:rPr b="1" sz="1500"/>
               <a:t>Copalis cannot go below a series CV of 0.126; Mocrocks below 0.095 </a:t>
             </a:r>
             <a:r>
@@ -6432,7 +6849,7 @@
           </a:p>
           <a:p>
             <a:r>
-              <a:rPr sz="1500" b="1"/>
+              <a:rPr b="1" sz="1500"/>
               <a:t>The question inverts: </a:t>
             </a:r>
             <a:r>
@@ -6449,16 +6866,14 @@
             <a:spLocks noGrp="1"/>
           </p:cNvSpPr>
           <p:nvPr>
-            <p:ph sz="half" idx="11"/>
+            <p:ph idx="11" sz="half"/>
           </p:nvPr>
         </p:nvSpPr>
         <p:spPr/>
         <p:txBody>
           <a:bodyPr/>
           <a:lstStyle/>
-          <a:p>
-            <a:endParaRPr/>
-          </a:p>
+          <a:p/>
         </p:txBody>
       </p:sp>
       <p:pic>
@@ -6470,7 +6885,7 @@
           <p:nvPr/>
         </p:nvPicPr>
         <p:blipFill>
-          <a:blip r:embed="rId3"/>
+          <a:blip r:embed="rId2"/>
           <a:stretch>
             <a:fillRect/>
           </a:stretch>
@@ -6494,7 +6909,7 @@
 </file>
 
 <file path=ppt/slides/slide11.xml><?xml version="1.0" encoding="utf-8"?>
-<p:sld xmlns:a="http://schemas.openxmlformats.org/drawingml/2006/main" xmlns:r="http://schemas.openxmlformats.org/officeDocument/2006/relationships" xmlns:p="http://schemas.openxmlformats.org/presentationml/2006/main">
+<p:sld xmlns:a="http://schemas.openxmlformats.org/drawingml/2006/main" xmlns:p="http://schemas.openxmlformats.org/presentationml/2006/main" xmlns:r="http://schemas.openxmlformats.org/officeDocument/2006/relationships">
   <p:cSld>
     <p:spTree>
       <p:nvGrpSpPr>
@@ -6502,14 +6917,7 @@
         <p:cNvGrpSpPr/>
         <p:nvPr/>
       </p:nvGrpSpPr>
-      <p:grpSpPr>
-        <a:xfrm>
-          <a:off x="0" y="0"/>
-          <a:ext cx="0" cy="0"/>
-          <a:chOff x="0" y="0"/>
-          <a:chExt cx="0" cy="0"/>
-        </a:xfrm>
-      </p:grpSpPr>
+      <p:grpSpPr/>
       <p:sp>
         <p:nvSpPr>
           <p:cNvPr id="2" name="Title 1"/>
@@ -6545,9 +6953,7 @@
         <p:txBody>
           <a:bodyPr/>
           <a:lstStyle/>
-          <a:p>
-            <a:endParaRPr/>
-          </a:p>
+          <a:p/>
         </p:txBody>
       </p:sp>
       <p:graphicFrame>
@@ -6569,48 +6975,12 @@
                 <a:tableStyleId>{5C22544A-7EE6-4342-B048-85BDC9FD1C3A}</a:tableStyleId>
               </a:tblPr>
               <a:tblGrid>
-                <a:gridCol w="2560320">
-                  <a:extLst>
-                    <a:ext uri="{9D8B030D-6E8A-4147-A177-3AD203B41FA5}">
-                      <a16:colId xmlns:a16="http://schemas.microsoft.com/office/drawing/2014/main" val="20000"/>
-                    </a:ext>
-                  </a:extLst>
-                </a:gridCol>
-                <a:gridCol w="1463040">
-                  <a:extLst>
-                    <a:ext uri="{9D8B030D-6E8A-4147-A177-3AD203B41FA5}">
-                      <a16:colId xmlns:a16="http://schemas.microsoft.com/office/drawing/2014/main" val="20001"/>
-                    </a:ext>
-                  </a:extLst>
-                </a:gridCol>
-                <a:gridCol w="1920240">
-                  <a:extLst>
-                    <a:ext uri="{9D8B030D-6E8A-4147-A177-3AD203B41FA5}">
-                      <a16:colId xmlns:a16="http://schemas.microsoft.com/office/drawing/2014/main" val="20002"/>
-                    </a:ext>
-                  </a:extLst>
-                </a:gridCol>
-                <a:gridCol w="1280160">
-                  <a:extLst>
-                    <a:ext uri="{9D8B030D-6E8A-4147-A177-3AD203B41FA5}">
-                      <a16:colId xmlns:a16="http://schemas.microsoft.com/office/drawing/2014/main" val="20003"/>
-                    </a:ext>
-                  </a:extLst>
-                </a:gridCol>
-                <a:gridCol w="1874519">
-                  <a:extLst>
-                    <a:ext uri="{9D8B030D-6E8A-4147-A177-3AD203B41FA5}">
-                      <a16:colId xmlns:a16="http://schemas.microsoft.com/office/drawing/2014/main" val="20004"/>
-                    </a:ext>
-                  </a:extLst>
-                </a:gridCol>
-                <a:gridCol w="1874519">
-                  <a:extLst>
-                    <a:ext uri="{9D8B030D-6E8A-4147-A177-3AD203B41FA5}">
-                      <a16:colId xmlns:a16="http://schemas.microsoft.com/office/drawing/2014/main" val="20005"/>
-                    </a:ext>
-                  </a:extLst>
-                </a:gridCol>
+                <a:gridCol w="2560320"/>
+                <a:gridCol w="1463040"/>
+                <a:gridCol w="1920240"/>
+                <a:gridCol w="1280160"/>
+                <a:gridCol w="1874519"/>
+                <a:gridCol w="1874519"/>
               </a:tblGrid>
               <a:tr h="487680">
                 <a:tc>
@@ -6739,11 +7109,6 @@
                     </a:solidFill>
                   </a:tcPr>
                 </a:tc>
-                <a:extLst>
-                  <a:ext uri="{0D108BD9-81ED-4DB2-BD59-A6C34878D82A}">
-                    <a16:rowId xmlns:a16="http://schemas.microsoft.com/office/drawing/2014/main" val="10000"/>
-                  </a:ext>
-                </a:extLst>
               </a:tr>
               <a:tr h="487680">
                 <a:tc>
@@ -6824,11 +7189,6 @@
                   </a:txBody>
                   <a:tcPr/>
                 </a:tc>
-                <a:extLst>
-                  <a:ext uri="{0D108BD9-81ED-4DB2-BD59-A6C34878D82A}">
-                    <a16:rowId xmlns:a16="http://schemas.microsoft.com/office/drawing/2014/main" val="10001"/>
-                  </a:ext>
-                </a:extLst>
               </a:tr>
               <a:tr h="487680">
                 <a:tc>
@@ -6909,11 +7269,6 @@
                   </a:txBody>
                   <a:tcPr/>
                 </a:tc>
-                <a:extLst>
-                  <a:ext uri="{0D108BD9-81ED-4DB2-BD59-A6C34878D82A}">
-                    <a16:rowId xmlns:a16="http://schemas.microsoft.com/office/drawing/2014/main" val="10002"/>
-                  </a:ext>
-                </a:extLst>
               </a:tr>
               <a:tr h="487680">
                 <a:tc>
@@ -6994,11 +7349,6 @@
                   </a:txBody>
                   <a:tcPr/>
                 </a:tc>
-                <a:extLst>
-                  <a:ext uri="{0D108BD9-81ED-4DB2-BD59-A6C34878D82A}">
-                    <a16:rowId xmlns:a16="http://schemas.microsoft.com/office/drawing/2014/main" val="10003"/>
-                  </a:ext>
-                </a:extLst>
               </a:tr>
               <a:tr h="487680">
                 <a:tc>
@@ -7079,11 +7429,6 @@
                   </a:txBody>
                   <a:tcPr/>
                 </a:tc>
-                <a:extLst>
-                  <a:ext uri="{0D108BD9-81ED-4DB2-BD59-A6C34878D82A}">
-                    <a16:rowId xmlns:a16="http://schemas.microsoft.com/office/drawing/2014/main" val="10004"/>
-                  </a:ext>
-                </a:extLst>
               </a:tr>
               <a:tr h="487680">
                 <a:tc>
@@ -7103,9 +7448,7 @@
                   <a:txBody>
                     <a:bodyPr/>
                     <a:lstStyle/>
-                    <a:p>
-                      <a:endParaRPr/>
-                    </a:p>
+                    <a:p/>
                   </a:txBody>
                   <a:tcPr/>
                 </a:tc>
@@ -7139,9 +7482,7 @@
                   <a:txBody>
                     <a:bodyPr/>
                     <a:lstStyle/>
-                    <a:p>
-                      <a:endParaRPr/>
-                    </a:p>
+                    <a:p/>
                   </a:txBody>
                   <a:tcPr/>
                 </a:tc>
@@ -7158,11 +7499,6 @@
                   </a:txBody>
                   <a:tcPr/>
                 </a:tc>
-                <a:extLst>
-                  <a:ext uri="{0D108BD9-81ED-4DB2-BD59-A6C34878D82A}">
-                    <a16:rowId xmlns:a16="http://schemas.microsoft.com/office/drawing/2014/main" val="10005"/>
-                  </a:ext>
-                </a:extLst>
               </a:tr>
             </a:tbl>
           </a:graphicData>
@@ -7192,7 +7528,7 @@
           <a:p>
             <a:r>
               <a:rPr sz="1400"/>
-              <a:t>Long Beach's series CV falls from 0.294 to 0.175, crossing the design target for the first time. Copalis and Mocrocks rise to 0.192 and 0.171 and stay inside it. No new staff, nineteen surplus crew-day units on the two northern beaches move to Long Beach.</a:t>
+              <a:t>Long Beach's series CV falls from 0.294 to 0.175, crossing the design target for the first time. Copalis and Mocrocks rise to 0.192 and 0.171 and stay inside it. No new staff, nineteen crew-day units move to Long Beach; but those units are not truly free once the two beaches' donor role is counted, which the co-management slide takes up.</a:t>
             </a:r>
           </a:p>
         </p:txBody>
@@ -7206,7 +7542,7 @@
 </file>
 
 <file path=ppt/slides/slide12.xml><?xml version="1.0" encoding="utf-8"?>
-<p:sld xmlns:a="http://schemas.openxmlformats.org/drawingml/2006/main" xmlns:r="http://schemas.openxmlformats.org/officeDocument/2006/relationships" xmlns:p="http://schemas.openxmlformats.org/presentationml/2006/main">
+<p:sld xmlns:a="http://schemas.openxmlformats.org/drawingml/2006/main" xmlns:p="http://schemas.openxmlformats.org/presentationml/2006/main" xmlns:r="http://schemas.openxmlformats.org/officeDocument/2006/relationships">
   <p:cSld>
     <p:spTree>
       <p:nvGrpSpPr>
@@ -7214,14 +7550,7 @@
         <p:cNvGrpSpPr/>
         <p:nvPr/>
       </p:nvGrpSpPr>
-      <p:grpSpPr>
-        <a:xfrm>
-          <a:off x="0" y="0"/>
-          <a:ext cx="0" cy="0"/>
-          <a:chOff x="0" y="0"/>
-          <a:chExt cx="0" cy="0"/>
-        </a:xfrm>
-      </p:grpSpPr>
+      <p:grpSpPr/>
       <p:sp>
         <p:nvSpPr>
           <p:cNvPr id="2" name="Title 1"/>
@@ -7252,7 +7581,7 @@
 </file>
 
 <file path=ppt/slides/slide13.xml><?xml version="1.0" encoding="utf-8"?>
-<p:sld xmlns:a="http://schemas.openxmlformats.org/drawingml/2006/main" xmlns:r="http://schemas.openxmlformats.org/officeDocument/2006/relationships" xmlns:p="http://schemas.openxmlformats.org/presentationml/2006/main">
+<p:sld xmlns:a="http://schemas.openxmlformats.org/drawingml/2006/main" xmlns:p="http://schemas.openxmlformats.org/presentationml/2006/main" xmlns:r="http://schemas.openxmlformats.org/officeDocument/2006/relationships">
   <p:cSld>
     <p:spTree>
       <p:nvGrpSpPr>
@@ -7260,14 +7589,7 @@
         <p:cNvGrpSpPr/>
         <p:nvPr/>
       </p:nvGrpSpPr>
-      <p:grpSpPr>
-        <a:xfrm>
-          <a:off x="0" y="0"/>
-          <a:ext cx="0" cy="0"/>
-          <a:chOff x="0" y="0"/>
-          <a:chExt cx="0" cy="0"/>
-        </a:xfrm>
-      </p:grpSpPr>
+      <p:grpSpPr/>
       <p:sp>
         <p:nvSpPr>
           <p:cNvPr id="2" name="Title 1"/>
@@ -7296,7 +7618,7 @@
             <a:spLocks noGrp="1"/>
           </p:cNvSpPr>
           <p:nvPr>
-            <p:ph sz="half" idx="1"/>
+            <p:ph idx="1" sz="half"/>
           </p:nvPr>
         </p:nvSpPr>
         <p:spPr/>
@@ -7311,7 +7633,7 @@
           </a:p>
           <a:p>
             <a:r>
-              <a:rPr sz="1500" b="1"/>
+              <a:rPr b="1" sz="1500"/>
               <a:t>Newest survey: 2011. </a:t>
             </a:r>
             <a:r>
@@ -7327,7 +7649,7 @@
           </a:p>
           <a:p>
             <a:r>
-              <a:rPr sz="1500" b="1"/>
+              <a:rPr b="1" sz="1500"/>
               <a:t>The single most valuable unpurchased input </a:t>
             </a:r>
             <a:r>
@@ -7344,16 +7666,14 @@
             <a:spLocks noGrp="1"/>
           </p:cNvSpPr>
           <p:nvPr>
-            <p:ph sz="half" idx="11"/>
+            <p:ph idx="11" sz="half"/>
           </p:nvPr>
         </p:nvSpPr>
         <p:spPr/>
         <p:txBody>
           <a:bodyPr/>
           <a:lstStyle/>
-          <a:p>
-            <a:endParaRPr/>
-          </a:p>
+          <a:p/>
         </p:txBody>
       </p:sp>
       <p:pic>
@@ -7365,7 +7685,7 @@
           <p:nvPr/>
         </p:nvPicPr>
         <p:blipFill>
-          <a:blip r:embed="rId3"/>
+          <a:blip r:embed="rId2"/>
           <a:stretch>
             <a:fillRect/>
           </a:stretch>
@@ -7389,7 +7709,7 @@
 </file>
 
 <file path=ppt/slides/slide14.xml><?xml version="1.0" encoding="utf-8"?>
-<p:sld xmlns:a="http://schemas.openxmlformats.org/drawingml/2006/main" xmlns:r="http://schemas.openxmlformats.org/officeDocument/2006/relationships" xmlns:p="http://schemas.openxmlformats.org/presentationml/2006/main">
+<p:sld xmlns:a="http://schemas.openxmlformats.org/drawingml/2006/main" xmlns:p="http://schemas.openxmlformats.org/presentationml/2006/main" xmlns:r="http://schemas.openxmlformats.org/officeDocument/2006/relationships">
   <p:cSld>
     <p:spTree>
       <p:nvGrpSpPr>
@@ -7397,14 +7717,7 @@
         <p:cNvGrpSpPr/>
         <p:nvPr/>
       </p:nvGrpSpPr>
-      <p:grpSpPr>
-        <a:xfrm>
-          <a:off x="0" y="0"/>
-          <a:ext cx="0" cy="0"/>
-          <a:chOff x="0" y="0"/>
-          <a:chExt cx="0" cy="0"/>
-        </a:xfrm>
-      </p:grpSpPr>
+      <p:grpSpPr/>
       <p:sp>
         <p:nvSpPr>
           <p:cNvPr id="2" name="Title 1"/>
@@ -7421,7 +7734,7 @@
           <a:lstStyle/>
           <a:p>
             <a:r>
-              <a:t>Pulling the southern beaches back is not free, co-management is the lever</a:t>
+              <a:t>Pulling the southern beaches back is not free, and no tribal count offsets it</a:t>
             </a:r>
           </a:p>
         </p:txBody>
@@ -7433,7 +7746,7 @@
             <a:spLocks noGrp="1"/>
           </p:cNvSpPr>
           <p:nvPr>
-            <p:ph sz="half" idx="1"/>
+            <p:ph idx="1" sz="half"/>
           </p:nvPr>
         </p:nvSpPr>
         <p:spPr/>
@@ -7442,38 +7755,42 @@
           <a:lstStyle/>
           <a:p>
             <a:r>
-              <a:rPr sz="1400" b="1"/>
+              <a:rPr b="1" sz="1400"/>
               <a:t>Copalis and Mocrocks are the donor for ~63% </a:t>
             </a:r>
             <a:r>
               <a:rPr sz="1400"/>
-              <a:t>of Long Beach / Twin Harbors imputed days.</a:t>
-            </a:r>
-          </a:p>
-          <a:p>
+              <a:t>of Long Beach / Twin Harbors imputed days; jointly they are the best donor (sd 0.43 in log, against 0.62 and 0.64 for either alone).</a:t>
+            </a:r>
+          </a:p>
+          <a:p>
+            <a:r>
+              <a:rPr b="1" sz="1400"/>
+              <a:t>Under state-Quinault day-trading (2 on, 2 off) </a:t>
+            </a:r>
             <a:r>
               <a:rPr sz="1400"/>
-              <a:t>Under state-Quinault day-trading (2 on, 2 off) the two interleave: exactly one is state-counted each dig day.</a:t>
-            </a:r>
-          </a:p>
-          <a:p>
-            <a:r>
-              <a:rPr sz="1400" b="1"/>
-              <a:t>Pull state sampling to 45% </a:t>
+              <a:t>exactly one of the two is state-counted each dig day, so the state seldom holds that best joint donor.</a:t>
+            </a:r>
+          </a:p>
+          <a:p>
+            <a:r>
+              <a:rPr b="1" sz="1400"/>
+              <a:t>The Quinault dig the alternate days, </a:t>
             </a:r>
             <a:r>
               <a:rPr sz="1400"/>
-              <a:t>and single-day imputation error rises 0.45 → 0.50 (donor coverage 99% → 45%).</a:t>
-            </a:r>
-          </a:p>
-          <a:p>
-            <a:r>
-              <a:rPr sz="1400" b="1"/>
-              <a:t>Share the tribe's alternate-day counts </a:t>
+              <a:t>but theirs is a smaller, lower-participation fishery: its effort and catch rate do not proxy the state, so those counts cannot fill the state donor series.</a:t>
+            </a:r>
+          </a:p>
+          <a:p>
+            <a:r>
+              <a:rPr b="1" sz="1400"/>
+              <a:t>Pulling state sampling to 45% </a:t>
             </a:r>
             <a:r>
               <a:rPr sz="1400"/>
-              <a:t>and it holds at 0.40, better than today (both beaches every dig day = best joint donor).</a:t>
+              <a:t>raises single-day imputation error from 0.45 to 0.50 in the log, with no data-share available to offset it.</a:t>
             </a:r>
           </a:p>
         </p:txBody>
@@ -7485,16 +7802,14 @@
             <a:spLocks noGrp="1"/>
           </p:cNvSpPr>
           <p:nvPr>
-            <p:ph sz="half" idx="11"/>
+            <p:ph idx="11" sz="half"/>
           </p:nvPr>
         </p:nvSpPr>
         <p:spPr/>
         <p:txBody>
           <a:bodyPr/>
           <a:lstStyle/>
-          <a:p>
-            <a:endParaRPr/>
-          </a:p>
+          <a:p/>
         </p:txBody>
       </p:sp>
       <p:pic>
@@ -7506,7 +7821,7 @@
           <p:nvPr/>
         </p:nvPicPr>
         <p:blipFill>
-          <a:blip r:embed="rId3"/>
+          <a:blip r:embed="rId2"/>
           <a:stretch>
             <a:fillRect/>
           </a:stretch>
@@ -7530,7 +7845,7 @@
 </file>
 
 <file path=ppt/slides/slide15.xml><?xml version="1.0" encoding="utf-8"?>
-<p:sld xmlns:a="http://schemas.openxmlformats.org/drawingml/2006/main" xmlns:r="http://schemas.openxmlformats.org/officeDocument/2006/relationships" xmlns:p="http://schemas.openxmlformats.org/presentationml/2006/main">
+<p:sld xmlns:a="http://schemas.openxmlformats.org/drawingml/2006/main" xmlns:p="http://schemas.openxmlformats.org/presentationml/2006/main" xmlns:r="http://schemas.openxmlformats.org/officeDocument/2006/relationships">
   <p:cSld>
     <p:spTree>
       <p:nvGrpSpPr>
@@ -7538,14 +7853,7 @@
         <p:cNvGrpSpPr/>
         <p:nvPr/>
       </p:nvGrpSpPr>
-      <p:grpSpPr>
-        <a:xfrm>
-          <a:off x="0" y="0"/>
-          <a:ext cx="0" cy="0"/>
-          <a:chOff x="0" y="0"/>
-          <a:chExt cx="0" cy="0"/>
-        </a:xfrm>
-      </p:grpSpPr>
+      <p:grpSpPr/>
       <p:sp>
         <p:nvSpPr>
           <p:cNvPr id="2" name="Title 1"/>
@@ -7553,7 +7861,7 @@
             <a:spLocks noGrp="1"/>
           </p:cNvSpPr>
           <p:nvPr>
-            <p:ph type="title"/>
+            <p:ph type="ctrTitle"/>
           </p:nvPr>
         </p:nvSpPr>
         <p:spPr/>
@@ -7562,63 +7870,7 @@
           <a:lstStyle/>
           <a:p>
             <a:r>
-              <a:t>Recommendations, in priority order</a:t>
-            </a:r>
-          </a:p>
-        </p:txBody>
-      </p:sp>
-      <p:sp>
-        <p:nvSpPr>
-          <p:cNvPr id="3" name="Content Placeholder 2"/>
-          <p:cNvSpPr>
-            <a:spLocks noGrp="1"/>
-          </p:cNvSpPr>
-          <p:nvPr>
-            <p:ph idx="1"/>
-          </p:nvPr>
-        </p:nvSpPr>
-        <p:spPr/>
-        <p:txBody>
-          <a:bodyPr wrap="square"/>
-          <a:lstStyle/>
-          <a:p>
-            <a:r>
-              <a:rPr sz="1500" b="1"/>
-              <a:t>1.  Survey first. </a:t>
-            </a:r>
-            <a:r>
-              <a:rPr sz="1500"/>
-              <a:t>Run egress surveys at Long Beach and Twin Harbors, both conditions, the only input that moves the dominant term.</a:t>
-            </a:r>
-          </a:p>
-          <a:p>
-            <a:r>
-              <a:rPr sz="1500" b="1"/>
-              <a:t>2.  Sample ~45% of open days, largest-effort first, </a:t>
-            </a:r>
-            <a:r>
-              <a:rPr sz="1500"/>
-              <a:t>and reallocate crew from Copalis/Mocrocks to Long Beach. Cost-neutral (−19 crew-day units); Long Beach meets a published standard for the first time.</a:t>
-            </a:r>
-          </a:p>
-          <a:p>
-            <a:r>
-              <a:rPr sz="1500" b="1"/>
-              <a:t>3.  Condition the southern pullback on Quinault data-sharing </a:t>
-            </a:r>
-            <a:r>
-              <a:rPr sz="1500"/>
-              <a:t>for alternate-day effort and CPUE. It completes the donor series and holds northern-beach imputation error at or below today's.</a:t>
-            </a:r>
-          </a:p>
-          <a:p>
-            <a:r>
-              <a:rPr sz="1500" b="1"/>
-              <a:t>4.  Accept the Copalis floor: </a:t>
-            </a:r>
-            <a:r>
-              <a:rPr sz="1500"/>
-              <a:t>a harvest CV of 0.10 is infeasible there at any sampling rate, only more surveys would move it.</a:t>
+              <a:t>A Long Beach ingress / egress pilot</a:t>
             </a:r>
           </a:p>
         </p:txBody>
@@ -7632,7 +7884,7 @@
 </file>
 
 <file path=ppt/slides/slide16.xml><?xml version="1.0" encoding="utf-8"?>
-<p:sld xmlns:a="http://schemas.openxmlformats.org/drawingml/2006/main" xmlns:r="http://schemas.openxmlformats.org/officeDocument/2006/relationships" xmlns:p="http://schemas.openxmlformats.org/presentationml/2006/main">
+<p:sld xmlns:a="http://schemas.openxmlformats.org/drawingml/2006/main" xmlns:p="http://schemas.openxmlformats.org/presentationml/2006/main" xmlns:r="http://schemas.openxmlformats.org/officeDocument/2006/relationships">
   <p:cSld>
     <p:spTree>
       <p:nvGrpSpPr>
@@ -7640,14 +7892,7 @@
         <p:cNvGrpSpPr/>
         <p:nvPr/>
       </p:nvGrpSpPr>
-      <p:grpSpPr>
-        <a:xfrm>
-          <a:off x="0" y="0"/>
-          <a:ext cx="0" cy="0"/>
-          <a:chOff x="0" y="0"/>
-          <a:chExt cx="0" cy="0"/>
-        </a:xfrm>
-      </p:grpSpPr>
+      <p:grpSpPr/>
       <p:sp>
         <p:nvSpPr>
           <p:cNvPr id="2" name="Title 1"/>
@@ -7655,7 +7900,7 @@
             <a:spLocks noGrp="1"/>
           </p:cNvSpPr>
           <p:nvPr>
-            <p:ph type="ctrTitle"/>
+            <p:ph type="title"/>
           </p:nvPr>
         </p:nvSpPr>
         <p:spPr/>
@@ -7664,7 +7909,970 @@
           <a:lstStyle/>
           <a:p>
             <a:r>
-              <a:t>Discussion</a:t>
+              <a:t>The design: a whole-beach egress survey across six approaches</a:t>
+            </a:r>
+          </a:p>
+        </p:txBody>
+      </p:sp>
+      <p:graphicFrame>
+        <p:nvGraphicFramePr>
+          <p:cNvPr id="3" name="Table 2"/>
+          <p:cNvGraphicFramePr>
+            <a:graphicFrameLocks noGrp="1"/>
+          </p:cNvGraphicFramePr>
+          <p:nvPr/>
+        </p:nvGraphicFramePr>
+        <p:xfrm>
+          <a:off x="594360" y="1325880"/>
+          <a:ext cx="10607040" cy="2560320"/>
+        </p:xfrm>
+        <a:graphic>
+          <a:graphicData uri="http://schemas.openxmlformats.org/drawingml/2006/table">
+            <a:tbl>
+              <a:tblPr firstRow="1" bandRow="1">
+                <a:tableStyleId>{5C22544A-7EE6-4342-B048-85BDC9FD1C3A}</a:tableStyleId>
+              </a:tblPr>
+              <a:tblGrid>
+                <a:gridCol w="3657600"/>
+                <a:gridCol w="4937760"/>
+                <a:gridCol w="2011680"/>
+              </a:tblGrid>
+              <a:tr h="365760">
+                <a:tc>
+                  <a:txBody>
+                    <a:bodyPr/>
+                    <a:lstStyle/>
+                    <a:p>
+                      <a:r>
+                        <a:rPr sz="1300" b="1">
+                          <a:solidFill>
+                            <a:srgbClr val="FFFFFF"/>
+                          </a:solidFill>
+                        </a:rPr>
+                        <a:t>Vehicle approach  (south to north)</a:t>
+                      </a:r>
+                    </a:p>
+                  </a:txBody>
+                  <a:tcPr>
+                    <a:solidFill>
+                      <a:srgbClr val="1B3A5C"/>
+                    </a:solidFill>
+                  </a:tcPr>
+                </a:tc>
+                <a:tc>
+                  <a:txBody>
+                    <a:bodyPr/>
+                    <a:lstStyle/>
+                    <a:p>
+                      <a:r>
+                        <a:rPr sz="1300" b="1">
+                          <a:solidFill>
+                            <a:srgbClr val="FFFFFF"/>
+                          </a:solidFill>
+                        </a:rPr>
+                        <a:t>Historical egress coverage</a:t>
+                      </a:r>
+                    </a:p>
+                  </a:txBody>
+                  <a:tcPr>
+                    <a:solidFill>
+                      <a:srgbClr val="1B3A5C"/>
+                    </a:solidFill>
+                  </a:tcPr>
+                </a:tc>
+                <a:tc>
+                  <a:txBody>
+                    <a:bodyPr/>
+                    <a:lstStyle/>
+                    <a:p>
+                      <a:r>
+                        <a:rPr sz="1300" b="1">
+                          <a:solidFill>
+                            <a:srgbClr val="FFFFFF"/>
+                          </a:solidFill>
+                        </a:rPr>
+                        <a:t>Pilot role</a:t>
+                      </a:r>
+                    </a:p>
+                  </a:txBody>
+                  <a:tcPr>
+                    <a:solidFill>
+                      <a:srgbClr val="1B3A5C"/>
+                    </a:solidFill>
+                  </a:tcPr>
+                </a:tc>
+              </a:tr>
+              <a:tr h="365760">
+                <a:tc>
+                  <a:txBody>
+                    <a:bodyPr/>
+                    <a:lstStyle/>
+                    <a:p>
+                      <a:r>
+                        <a:rPr sz="1200"/>
+                        <a:t>Seaview</a:t>
+                      </a:r>
+                    </a:p>
+                  </a:txBody>
+                  <a:tcPr/>
+                </a:tc>
+                <a:tc>
+                  <a:txBody>
+                    <a:bodyPr/>
+                    <a:lstStyle/>
+                    <a:p>
+                      <a:r>
+                        <a:rPr sz="1200"/>
+                        <a:t>2004 only (south to Beards Hollow)</a:t>
+                      </a:r>
+                    </a:p>
+                  </a:txBody>
+                  <a:tcPr/>
+                </a:tc>
+                <a:tc>
+                  <a:txBody>
+                    <a:bodyPr/>
+                    <a:lstStyle/>
+                    <a:p>
+                      <a:r>
+                        <a:rPr sz="1200"/>
+                        <a:t>Counter</a:t>
+                      </a:r>
+                    </a:p>
+                  </a:txBody>
+                  <a:tcPr/>
+                </a:tc>
+              </a:tr>
+              <a:tr h="365760">
+                <a:tc>
+                  <a:txBody>
+                    <a:bodyPr/>
+                    <a:lstStyle/>
+                    <a:p>
+                      <a:r>
+                        <a:rPr sz="1200"/>
+                        <a:t>Long Beach (Bolstad)</a:t>
+                      </a:r>
+                    </a:p>
+                  </a:txBody>
+                  <a:tcPr/>
+                </a:tc>
+                <a:tc>
+                  <a:txBody>
+                    <a:bodyPr/>
+                    <a:lstStyle/>
+                    <a:p>
+                      <a:r>
+                        <a:rPr sz="1200"/>
+                        <a:t>never counted</a:t>
+                      </a:r>
+                    </a:p>
+                  </a:txBody>
+                  <a:tcPr/>
+                </a:tc>
+                <a:tc>
+                  <a:txBody>
+                    <a:bodyPr/>
+                    <a:lstStyle/>
+                    <a:p>
+                      <a:r>
+                        <a:rPr sz="1200"/>
+                        <a:t>Counter</a:t>
+                      </a:r>
+                    </a:p>
+                  </a:txBody>
+                  <a:tcPr/>
+                </a:tc>
+              </a:tr>
+              <a:tr h="365760">
+                <a:tc>
+                  <a:txBody>
+                    <a:bodyPr/>
+                    <a:lstStyle/>
+                    <a:p>
+                      <a:r>
+                        <a:rPr sz="1200"/>
+                        <a:t>Cranberry</a:t>
+                      </a:r>
+                    </a:p>
+                  </a:txBody>
+                  <a:tcPr/>
+                </a:tc>
+                <a:tc>
+                  <a:txBody>
+                    <a:bodyPr/>
+                    <a:lstStyle/>
+                    <a:p>
+                      <a:r>
+                        <a:rPr sz="1200"/>
+                        <a:t>never counted</a:t>
+                      </a:r>
+                    </a:p>
+                  </a:txBody>
+                  <a:tcPr/>
+                </a:tc>
+                <a:tc>
+                  <a:txBody>
+                    <a:bodyPr/>
+                    <a:lstStyle/>
+                    <a:p>
+                      <a:r>
+                        <a:rPr sz="1200"/>
+                        <a:t>Counter</a:t>
+                      </a:r>
+                    </a:p>
+                  </a:txBody>
+                  <a:tcPr/>
+                </a:tc>
+              </a:tr>
+              <a:tr h="365760">
+                <a:tc>
+                  <a:txBody>
+                    <a:bodyPr/>
+                    <a:lstStyle/>
+                    <a:p>
+                      <a:r>
+                        <a:rPr sz="1200"/>
+                        <a:t>Klipsan</a:t>
+                      </a:r>
+                    </a:p>
+                  </a:txBody>
+                  <a:tcPr/>
+                </a:tc>
+                <a:tc>
+                  <a:txBody>
+                    <a:bodyPr/>
+                    <a:lstStyle/>
+                    <a:p>
+                      <a:r>
+                        <a:rPr sz="1200"/>
+                        <a:t>never counted</a:t>
+                      </a:r>
+                    </a:p>
+                  </a:txBody>
+                  <a:tcPr/>
+                </a:tc>
+                <a:tc>
+                  <a:txBody>
+                    <a:bodyPr/>
+                    <a:lstStyle/>
+                    <a:p>
+                      <a:r>
+                        <a:rPr sz="1200"/>
+                        <a:t>Counter</a:t>
+                      </a:r>
+                    </a:p>
+                  </a:txBody>
+                  <a:tcPr/>
+                </a:tc>
+              </a:tr>
+              <a:tr h="365760">
+                <a:tc>
+                  <a:txBody>
+                    <a:bodyPr/>
+                    <a:lstStyle/>
+                    <a:p>
+                      <a:r>
+                        <a:rPr sz="1200"/>
+                        <a:t>Ocean Park</a:t>
+                      </a:r>
+                    </a:p>
+                  </a:txBody>
+                  <a:tcPr/>
+                </a:tc>
+                <a:tc>
+                  <a:txBody>
+                    <a:bodyPr/>
+                    <a:lstStyle/>
+                    <a:p>
+                      <a:r>
+                        <a:rPr sz="1200"/>
+                        <a:t>never counted</a:t>
+                      </a:r>
+                    </a:p>
+                  </a:txBody>
+                  <a:tcPr/>
+                </a:tc>
+                <a:tc>
+                  <a:txBody>
+                    <a:bodyPr/>
+                    <a:lstStyle/>
+                    <a:p>
+                      <a:r>
+                        <a:rPr sz="1200"/>
+                        <a:t>Counter</a:t>
+                      </a:r>
+                    </a:p>
+                  </a:txBody>
+                  <a:tcPr/>
+                </a:tc>
+              </a:tr>
+              <a:tr h="365760">
+                <a:tc>
+                  <a:txBody>
+                    <a:bodyPr/>
+                    <a:lstStyle/>
+                    <a:p>
+                      <a:r>
+                        <a:rPr sz="1200"/>
+                        <a:t>Oysterville</a:t>
+                      </a:r>
+                    </a:p>
+                  </a:txBody>
+                  <a:tcPr/>
+                </a:tc>
+                <a:tc>
+                  <a:txBody>
+                    <a:bodyPr/>
+                    <a:lstStyle/>
+                    <a:p>
+                      <a:r>
+                        <a:rPr sz="1200"/>
+                        <a:t>1990, 1998, 2004, 2011 (north to Leadbetter)</a:t>
+                      </a:r>
+                    </a:p>
+                  </a:txBody>
+                  <a:tcPr/>
+                </a:tc>
+                <a:tc>
+                  <a:txBody>
+                    <a:bodyPr/>
+                    <a:lstStyle/>
+                    <a:p>
+                      <a:r>
+                        <a:rPr sz="1200"/>
+                        <a:t>Counter</a:t>
+                      </a:r>
+                    </a:p>
+                  </a:txBody>
+                  <a:tcPr/>
+                </a:tc>
+              </a:tr>
+            </a:tbl>
+          </a:graphicData>
+        </a:graphic>
+      </p:graphicFrame>
+      <p:sp>
+        <p:nvSpPr>
+          <p:cNvPr id="4" name="TextBox 3"/>
+          <p:cNvSpPr txBox="1"/>
+          <p:nvPr/>
+        </p:nvSpPr>
+        <p:spPr>
+          <a:xfrm>
+            <a:off x="594360" y="4297680"/>
+            <a:ext cx="10972800" cy="1554480"/>
+          </a:xfrm>
+          <a:prstGeom prst="rect">
+            <a:avLst/>
+          </a:prstGeom>
+          <a:noFill/>
+        </p:spPr>
+        <p:txBody>
+          <a:bodyPr wrap="square">
+            <a:spAutoFit/>
+          </a:bodyPr>
+          <a:lstStyle/>
+          <a:p>
+            <a:r>
+              <a:rPr sz="1300"/>
+              <a:t>One counter per approach records cars on and off in 15-minute bins across the tidal window (about three hours before to ninety minutes after low water); a roving crew runs the instantaneous beach count near the peak and works the full length for catch and effort. Long Beach splits into seven census sections between Beards Hollow and Leadbetter Point. Four of its six approaches have never been counted, and no survey has ever counted all six on the same day: coverage was one end or the other, on separate days. This is the first whole-beach measurement.</a:t>
+            </a:r>
+          </a:p>
+        </p:txBody>
+      </p:sp>
+    </p:spTree>
+  </p:cSld>
+  <p:clrMapOvr>
+    <a:masterClrMapping/>
+  </p:clrMapOvr>
+</p:sld>
+</file>
+
+<file path=ppt/slides/slide17.xml><?xml version="1.0" encoding="utf-8"?>
+<p:sld xmlns:a="http://schemas.openxmlformats.org/drawingml/2006/main" xmlns:p="http://schemas.openxmlformats.org/presentationml/2006/main" xmlns:r="http://schemas.openxmlformats.org/officeDocument/2006/relationships">
+  <p:cSld>
+    <p:spTree>
+      <p:nvGrpSpPr>
+        <p:cNvPr id="1" name=""/>
+        <p:cNvGrpSpPr/>
+        <p:nvPr/>
+      </p:nvGrpSpPr>
+      <p:grpSpPr/>
+      <p:sp>
+        <p:nvSpPr>
+          <p:cNvPr id="2" name="Title 1"/>
+          <p:cNvSpPr>
+            <a:spLocks noGrp="1"/>
+          </p:cNvSpPr>
+          <p:nvPr>
+            <p:ph type="title"/>
+          </p:nvPr>
+        </p:nvSpPr>
+        <p:spPr/>
+        <p:txBody>
+          <a:bodyPr/>
+          <a:lstStyle/>
+          <a:p>
+            <a:r>
+              <a:t>Staffing: eight for Long Beach, thirteen with a paired northern beach</a:t>
+            </a:r>
+          </a:p>
+        </p:txBody>
+      </p:sp>
+      <p:graphicFrame>
+        <p:nvGraphicFramePr>
+          <p:cNvPr id="3" name="Table 2"/>
+          <p:cNvGraphicFramePr>
+            <a:graphicFrameLocks noGrp="1"/>
+          </p:cNvGraphicFramePr>
+          <p:nvPr/>
+        </p:nvGraphicFramePr>
+        <p:xfrm>
+          <a:off x="594360" y="1325880"/>
+          <a:ext cx="10972800" cy="2194560"/>
+        </p:xfrm>
+        <a:graphic>
+          <a:graphicData uri="http://schemas.openxmlformats.org/drawingml/2006/table">
+            <a:tbl>
+              <a:tblPr firstRow="1" bandRow="1">
+                <a:tableStyleId>{5C22544A-7EE6-4342-B048-85BDC9FD1C3A}</a:tableStyleId>
+              </a:tblPr>
+              <a:tblGrid>
+                <a:gridCol w="5120640"/>
+                <a:gridCol w="1188720"/>
+                <a:gridCol w="4663440"/>
+              </a:tblGrid>
+              <a:tr h="365760">
+                <a:tc>
+                  <a:txBody>
+                    <a:bodyPr/>
+                    <a:lstStyle/>
+                    <a:p>
+                      <a:r>
+                        <a:rPr sz="1300" b="1">
+                          <a:solidFill>
+                            <a:srgbClr val="FFFFFF"/>
+                          </a:solidFill>
+                        </a:rPr>
+                        <a:t>Role</a:t>
+                      </a:r>
+                    </a:p>
+                  </a:txBody>
+                  <a:tcPr>
+                    <a:solidFill>
+                      <a:srgbClr val="1B3A5C"/>
+                    </a:solidFill>
+                  </a:tcPr>
+                </a:tc>
+                <a:tc>
+                  <a:txBody>
+                    <a:bodyPr/>
+                    <a:lstStyle/>
+                    <a:p>
+                      <a:r>
+                        <a:rPr sz="1300" b="1">
+                          <a:solidFill>
+                            <a:srgbClr val="FFFFFF"/>
+                          </a:solidFill>
+                        </a:rPr>
+                        <a:t>Staff</a:t>
+                      </a:r>
+                    </a:p>
+                  </a:txBody>
+                  <a:tcPr>
+                    <a:solidFill>
+                      <a:srgbClr val="1B3A5C"/>
+                    </a:solidFill>
+                  </a:tcPr>
+                </a:tc>
+                <a:tc>
+                  <a:txBody>
+                    <a:bodyPr/>
+                    <a:lstStyle/>
+                    <a:p>
+                      <a:r>
+                        <a:rPr sz="1300" b="1">
+                          <a:solidFill>
+                            <a:srgbClr val="FFFFFF"/>
+                          </a:solidFill>
+                        </a:rPr>
+                        <a:t>Basis</a:t>
+                      </a:r>
+                    </a:p>
+                  </a:txBody>
+                  <a:tcPr>
+                    <a:solidFill>
+                      <a:srgbClr val="1B3A5C"/>
+                    </a:solidFill>
+                  </a:tcPr>
+                </a:tc>
+              </a:tr>
+              <a:tr h="365760">
+                <a:tc>
+                  <a:txBody>
+                    <a:bodyPr/>
+                    <a:lstStyle/>
+                    <a:p>
+                      <a:r>
+                        <a:rPr sz="1200"/>
+                        <a:t>Approach counters</a:t>
+                      </a:r>
+                    </a:p>
+                  </a:txBody>
+                  <a:tcPr/>
+                </a:tc>
+                <a:tc>
+                  <a:txBody>
+                    <a:bodyPr/>
+                    <a:lstStyle/>
+                    <a:p>
+                      <a:r>
+                        <a:rPr sz="1200"/>
+                        <a:t>6</a:t>
+                      </a:r>
+                    </a:p>
+                  </a:txBody>
+                  <a:tcPr/>
+                </a:tc>
+                <a:tc>
+                  <a:txBody>
+                    <a:bodyPr/>
+                    <a:lstStyle/>
+                    <a:p>
+                      <a:r>
+                        <a:rPr sz="1200"/>
+                        <a:t>one per drivable approach (1998 field model)</a:t>
+                      </a:r>
+                    </a:p>
+                  </a:txBody>
+                  <a:tcPr/>
+                </a:tc>
+              </a:tr>
+              <a:tr h="365760">
+                <a:tc>
+                  <a:txBody>
+                    <a:bodyPr/>
+                    <a:lstStyle/>
+                    <a:p>
+                      <a:r>
+                        <a:rPr sz="1200"/>
+                        <a:t>Roving beach-count / interview crews</a:t>
+                      </a:r>
+                    </a:p>
+                  </a:txBody>
+                  <a:tcPr/>
+                </a:tc>
+                <a:tc>
+                  <a:txBody>
+                    <a:bodyPr/>
+                    <a:lstStyle/>
+                    <a:p>
+                      <a:r>
+                        <a:rPr sz="1200"/>
+                        <a:t>2</a:t>
+                      </a:r>
+                    </a:p>
+                  </a:txBody>
+                  <a:tcPr/>
+                </a:tc>
+                <a:tc>
+                  <a:txBody>
+                    <a:bodyPr/>
+                    <a:lstStyle/>
+                    <a:p>
+                      <a:r>
+                        <a:rPr sz="1200"/>
+                        <a:t>28-mile beach, up to ~5,200 trips on a 90th-percentile day</a:t>
+                      </a:r>
+                    </a:p>
+                  </a:txBody>
+                  <a:tcPr/>
+                </a:tc>
+              </a:tr>
+              <a:tr h="365760">
+                <a:tc>
+                  <a:txBody>
+                    <a:bodyPr/>
+                    <a:lstStyle/>
+                    <a:p>
+                      <a:r>
+                        <a:rPr sz="1200" b="1"/>
+                        <a:t>Long Beach core, per survey day</a:t>
+                      </a:r>
+                    </a:p>
+                  </a:txBody>
+                  <a:tcPr/>
+                </a:tc>
+                <a:tc>
+                  <a:txBody>
+                    <a:bodyPr/>
+                    <a:lstStyle/>
+                    <a:p>
+                      <a:r>
+                        <a:rPr sz="1200" b="1"/>
+                        <a:t>8</a:t>
+                      </a:r>
+                    </a:p>
+                  </a:txBody>
+                  <a:tcPr/>
+                </a:tc>
+                <a:tc>
+                  <a:txBody>
+                    <a:bodyPr/>
+                    <a:lstStyle/>
+                    <a:p/>
+                  </a:txBody>
+                  <a:tcPr/>
+                </a:tc>
+              </a:tr>
+              <a:tr h="365760">
+                <a:tc>
+                  <a:txBody>
+                    <a:bodyPr/>
+                    <a:lstStyle/>
+                    <a:p>
+                      <a:r>
+                        <a:rPr sz="1200"/>
+                        <a:t>Paired northern egress (Copalis or Mocrocks)</a:t>
+                      </a:r>
+                    </a:p>
+                  </a:txBody>
+                  <a:tcPr/>
+                </a:tc>
+                <a:tc>
+                  <a:txBody>
+                    <a:bodyPr/>
+                    <a:lstStyle/>
+                    <a:p>
+                      <a:r>
+                        <a:rPr sz="1200"/>
+                        <a:t>+5</a:t>
+                      </a:r>
+                    </a:p>
+                  </a:txBody>
+                  <a:tcPr/>
+                </a:tc>
+                <a:tc>
+                  <a:txBody>
+                    <a:bodyPr/>
+                    <a:lstStyle/>
+                    <a:p>
+                      <a:r>
+                        <a:rPr sz="1200"/>
+                        <a:t>same-day donor truth on a subset of days</a:t>
+                      </a:r>
+                    </a:p>
+                  </a:txBody>
+                  <a:tcPr/>
+                </a:tc>
+              </a:tr>
+              <a:tr h="365760">
+                <a:tc>
+                  <a:txBody>
+                    <a:bodyPr/>
+                    <a:lstStyle/>
+                    <a:p>
+                      <a:r>
+                        <a:rPr sz="1200" b="1"/>
+                        <a:t>Peak, on a paired day</a:t>
+                      </a:r>
+                    </a:p>
+                  </a:txBody>
+                  <a:tcPr/>
+                </a:tc>
+                <a:tc>
+                  <a:txBody>
+                    <a:bodyPr/>
+                    <a:lstStyle/>
+                    <a:p>
+                      <a:r>
+                        <a:rPr sz="1200" b="1"/>
+                        <a:t>13</a:t>
+                      </a:r>
+                    </a:p>
+                  </a:txBody>
+                  <a:tcPr/>
+                </a:tc>
+                <a:tc>
+                  <a:txBody>
+                    <a:bodyPr/>
+                    <a:lstStyle/>
+                    <a:p/>
+                  </a:txBody>
+                  <a:tcPr/>
+                </a:tc>
+              </a:tr>
+            </a:tbl>
+          </a:graphicData>
+        </a:graphic>
+      </p:graphicFrame>
+      <p:sp>
+        <p:nvSpPr>
+          <p:cNvPr id="4" name="TextBox 3"/>
+          <p:cNvSpPr txBox="1"/>
+          <p:nvPr/>
+        </p:nvSpPr>
+        <p:spPr>
+          <a:xfrm>
+            <a:off x="594360" y="4160520"/>
+            <a:ext cx="10972800" cy="1554480"/>
+          </a:xfrm>
+          <a:prstGeom prst="rect">
+            <a:avLst/>
+          </a:prstGeom>
+          <a:noFill/>
+        </p:spPr>
+        <p:txBody>
+          <a:bodyPr wrap="square">
+            <a:spAutoFit/>
+          </a:bodyPr>
+          <a:lstStyle/>
+          <a:p>
+            <a:r>
+              <a:rPr sz="1300"/>
+              <a:t>Counters are stationary and low-skill (enforcement, seasonals, trained volunteers); the roving crews are the program's regular samplers, who are on the beach that day regardless, so the marginal cost is mainly the six counters. On a subset of days, add a whole-beach egress at whichever northern donor the state is digging that day. That yields paired same-day truth at donor and target, measuring the imputation transfer directly and adding to the 97 same-day pairs that anchor the joint-donor error (sd 0.43).</a:t>
+            </a:r>
+          </a:p>
+        </p:txBody>
+      </p:sp>
+    </p:spTree>
+  </p:cSld>
+  <p:clrMapOvr>
+    <a:masterClrMapping/>
+  </p:clrMapOvr>
+</p:sld>
+</file>
+
+<file path=ppt/slides/slide18.xml><?xml version="1.0" encoding="utf-8"?>
+<p:sld xmlns:a="http://schemas.openxmlformats.org/drawingml/2006/main" xmlns:p="http://schemas.openxmlformats.org/presentationml/2006/main" xmlns:r="http://schemas.openxmlformats.org/officeDocument/2006/relationships">
+  <p:cSld>
+    <p:spTree>
+      <p:nvGrpSpPr>
+        <p:cNvPr id="1" name=""/>
+        <p:cNvGrpSpPr/>
+        <p:nvPr/>
+      </p:nvGrpSpPr>
+      <p:grpSpPr/>
+      <p:sp>
+        <p:nvSpPr>
+          <p:cNvPr id="2" name="Title 1"/>
+          <p:cNvSpPr>
+            <a:spLocks noGrp="1"/>
+          </p:cNvSpPr>
+          <p:nvPr>
+            <p:ph type="title"/>
+          </p:nvPr>
+        </p:nvSpPr>
+        <p:spPr/>
+        <p:txBody>
+          <a:bodyPr/>
+          <a:lstStyle/>
+          <a:p>
+            <a:r>
+              <a:t>What it buys: from 18% toward 6%, and a template for partial surveys</a:t>
+            </a:r>
+          </a:p>
+        </p:txBody>
+      </p:sp>
+      <p:sp>
+        <p:nvSpPr>
+          <p:cNvPr id="3" name="Content Placeholder 2"/>
+          <p:cNvSpPr>
+            <a:spLocks noGrp="1"/>
+          </p:cNvSpPr>
+          <p:nvPr>
+            <p:ph idx="1" sz="half"/>
+          </p:nvPr>
+        </p:nvSpPr>
+        <p:spPr/>
+        <p:txBody>
+          <a:bodyPr wrap="square"/>
+          <a:lstStyle/>
+          <a:p>
+            <a:r>
+              <a:rPr b="1" sz="1400"/>
+              <a:t>Today: 18.4% relative sd on three daylight surveys, newest 2011. </a:t>
+            </a:r>
+            <a:r>
+              <a:rPr sz="1400"/>
+              <a:t>Between-survey error falls as one over the root of the survey count.</a:t>
+            </a:r>
+          </a:p>
+          <a:p>
+            <a:r>
+              <a:rPr b="1" sz="1400"/>
+              <a:t>A pilot season (~8 whole-beach surveys) </a:t>
+            </a:r>
+            <a:r>
+              <a:rPr sz="1400"/>
+              <a:t>roughly halves it to ~11%; a ~16-survey rebuild reaches ~8%, approaching the ~6% of the refreshed northern beaches.</a:t>
+            </a:r>
+          </a:p>
+          <a:p>
+            <a:r>
+              <a:rPr b="1" sz="1400"/>
+              <a:t>Whole-beach coverage also retires the section-ratio error (sd 0.281) </a:t>
+            </a:r>
+            <a:r>
+              <a:rPr sz="1400"/>
+              <a:t>that the historical single-approach partials cannot.</a:t>
+            </a:r>
+          </a:p>
+          <a:p>
+            <a:r>
+              <a:rPr b="1" sz="1400"/>
+              <a:t>It calibrates the section shares, </a:t>
+            </a:r>
+            <a:r>
+              <a:rPr sz="1400"/>
+              <a:t>so future cheap partial surveys (one approach) can be expanded reliably instead of imputed.</a:t>
+            </a:r>
+          </a:p>
+        </p:txBody>
+      </p:sp>
+      <p:sp>
+        <p:nvSpPr>
+          <p:cNvPr id="5" name="Content Placeholder 4"/>
+          <p:cNvSpPr>
+            <a:spLocks noGrp="1"/>
+          </p:cNvSpPr>
+          <p:nvPr>
+            <p:ph idx="11" sz="half"/>
+          </p:nvPr>
+        </p:nvSpPr>
+        <p:spPr/>
+        <p:txBody>
+          <a:bodyPr/>
+          <a:lstStyle/>
+          <a:p/>
+        </p:txBody>
+      </p:sp>
+      <p:pic>
+        <p:nvPicPr>
+          <p:cNvPr id="6" name="Picture 5" descr="fig16_lb_survey_target.png"/>
+          <p:cNvPicPr>
+            <a:picLocks noChangeAspect="1"/>
+          </p:cNvPicPr>
+          <p:nvPr/>
+        </p:nvPicPr>
+        <p:blipFill>
+          <a:blip r:embed="rId2"/>
+          <a:stretch>
+            <a:fillRect/>
+          </a:stretch>
+        </p:blipFill>
+        <p:spPr>
+          <a:xfrm>
+            <a:off x="6178610" y="1692602"/>
+            <a:ext cx="5403790" cy="3242274"/>
+          </a:xfrm>
+          <a:prstGeom prst="rect">
+            <a:avLst/>
+          </a:prstGeom>
+        </p:spPr>
+      </p:pic>
+    </p:spTree>
+  </p:cSld>
+  <p:clrMapOvr>
+    <a:masterClrMapping/>
+  </p:clrMapOvr>
+</p:sld>
+</file>
+
+<file path=ppt/slides/slide19.xml><?xml version="1.0" encoding="utf-8"?>
+<p:sld xmlns:a="http://schemas.openxmlformats.org/drawingml/2006/main" xmlns:p="http://schemas.openxmlformats.org/presentationml/2006/main" xmlns:r="http://schemas.openxmlformats.org/officeDocument/2006/relationships">
+  <p:cSld>
+    <p:spTree>
+      <p:nvGrpSpPr>
+        <p:cNvPr id="1" name=""/>
+        <p:cNvGrpSpPr/>
+        <p:nvPr/>
+      </p:nvGrpSpPr>
+      <p:grpSpPr/>
+      <p:sp>
+        <p:nvSpPr>
+          <p:cNvPr id="2" name="Title 1"/>
+          <p:cNvSpPr>
+            <a:spLocks noGrp="1"/>
+          </p:cNvSpPr>
+          <p:nvPr>
+            <p:ph type="title"/>
+          </p:nvPr>
+        </p:nvSpPr>
+        <p:spPr/>
+        <p:txBody>
+          <a:bodyPr/>
+          <a:lstStyle/>
+          <a:p>
+            <a:r>
+              <a:t>Recommendations, in priority order</a:t>
+            </a:r>
+          </a:p>
+        </p:txBody>
+      </p:sp>
+      <p:sp>
+        <p:nvSpPr>
+          <p:cNvPr id="3" name="Content Placeholder 2"/>
+          <p:cNvSpPr>
+            <a:spLocks noGrp="1"/>
+          </p:cNvSpPr>
+          <p:nvPr>
+            <p:ph idx="1"/>
+          </p:nvPr>
+        </p:nvSpPr>
+        <p:spPr/>
+        <p:txBody>
+          <a:bodyPr wrap="square"/>
+          <a:lstStyle/>
+          <a:p>
+            <a:r>
+              <a:rPr b="1" sz="1400"/>
+              <a:t>1.  Survey Long Beach first. </a:t>
+            </a:r>
+            <a:r>
+              <a:rPr sz="1400"/>
+              <a:t>Run the whole-beach egress pilot, six approaches and about eight staff, both tide conditions. The correction factor is the largest term and Long Beach's table is the thinnest and oldest.</a:t>
+            </a:r>
+          </a:p>
+          <a:p>
+            <a:r>
+              <a:rPr b="1" sz="1400"/>
+              <a:t>2.  Hold the southern donor at its co-management floor. </a:t>
+            </a:r>
+            <a:r>
+              <a:rPr sz="1400"/>
+              <a:t>Keep one of Copalis or Mocrocks state-counted every dig day, which the 2-on / 2-off calendar already delivers. The Quinault's alternate-day counts cannot substitute for the state.</a:t>
+            </a:r>
+          </a:p>
+          <a:p>
+            <a:r>
+              <a:rPr b="1" sz="1400"/>
+              <a:t>3.  Pair the pilot with the northern donor on a subset of days </a:t>
+            </a:r>
+            <a:r>
+              <a:rPr sz="1400"/>
+              <a:t>to measure the imputation transfer directly and tighten the joint-donor error, rather than leaning on the modeled lag curve.</a:t>
+            </a:r>
+          </a:p>
+          <a:p>
+            <a:r>
+              <a:rPr b="1" sz="1400"/>
+              <a:t>4.  Treat the 45% reallocation as optional, not free. </a:t>
+            </a:r>
+            <a:r>
+              <a:rPr sz="1400"/>
+              <a:t>It buys direct Long Beach precision but degrades the donor with no offset; fund Long Beach from dedicated effort where possible.</a:t>
+            </a:r>
+          </a:p>
+          <a:p>
+            <a:r>
+              <a:rPr b="1" sz="1400"/>
+              <a:t>5.  Accept the Copalis floor: </a:t>
+            </a:r>
+            <a:r>
+              <a:rPr sz="1400"/>
+              <a:t>a harvest CV of 0.10 is infeasible there at any sampling rate, only more surveys would move it.</a:t>
             </a:r>
           </a:p>
         </p:txBody>
@@ -7678,7 +8886,7 @@
 </file>
 
 <file path=ppt/slides/slide2.xml><?xml version="1.0" encoding="utf-8"?>
-<p:sld xmlns:a="http://schemas.openxmlformats.org/drawingml/2006/main" xmlns:r="http://schemas.openxmlformats.org/officeDocument/2006/relationships" xmlns:p="http://schemas.openxmlformats.org/presentationml/2006/main">
+<p:sld xmlns:a="http://schemas.openxmlformats.org/drawingml/2006/main" xmlns:p="http://schemas.openxmlformats.org/presentationml/2006/main" xmlns:r="http://schemas.openxmlformats.org/officeDocument/2006/relationships">
   <p:cSld>
     <p:spTree>
       <p:nvGrpSpPr>
@@ -7686,14 +8894,7 @@
         <p:cNvGrpSpPr/>
         <p:nvPr/>
       </p:nvGrpSpPr>
-      <p:grpSpPr>
-        <a:xfrm>
-          <a:off x="0" y="0"/>
-          <a:ext cx="0" cy="0"/>
-          <a:chOff x="0" y="0"/>
-          <a:chExt cx="0" cy="0"/>
-        </a:xfrm>
-      </p:grpSpPr>
+      <p:grpSpPr/>
       <p:sp>
         <p:nvSpPr>
           <p:cNvPr id="2" name="Title 1"/>
@@ -7727,40 +8928,73 @@
         </p:nvSpPr>
         <p:spPr/>
         <p:txBody>
-          <a:bodyPr wrap="square">
-            <a:normAutofit/>
-          </a:bodyPr>
+          <a:bodyPr wrap="square"/>
           <a:lstStyle/>
           <a:p>
             <a:r>
-              <a:rPr sz="2800" b="1" dirty="0"/>
+              <a:rPr b="1"/>
               <a:t>Given a crew of finite size: </a:t>
             </a:r>
             <a:r>
-              <a:rPr sz="2800" dirty="0"/>
               <a:t>how many beach-days per tide series must be counted, and which ones?</a:t>
             </a:r>
           </a:p>
           <a:p>
             <a:r>
-              <a:rPr sz="2800" dirty="0"/>
               <a:t>This is new work, the program has never had a quantitative answer.</a:t>
             </a:r>
           </a:p>
           <a:p>
             <a:r>
-              <a:rPr sz="2800" b="1" dirty="0"/>
+              <a:rPr b="1"/>
               <a:t>Judged against a published standard: </a:t>
             </a:r>
             <a:r>
-              <a:rPr sz="2800" dirty="0"/>
               <a:t>CV ≤ 0.20 (creel-survey design target) and NOAA MRIP's ≤ 0.30 publication threshold.</a:t>
             </a:r>
           </a:p>
           <a:p>
             <a:r>
-              <a:rPr sz="2800" dirty="0"/>
               <a:t>Every figure here is a lower bound: it excludes beach-count observer error, which has never been measured.</a:t>
+            </a:r>
+          </a:p>
+        </p:txBody>
+      </p:sp>
+    </p:spTree>
+  </p:cSld>
+  <p:clrMapOvr>
+    <a:masterClrMapping/>
+  </p:clrMapOvr>
+</p:sld>
+</file>
+
+<file path=ppt/slides/slide20.xml><?xml version="1.0" encoding="utf-8"?>
+<p:sld xmlns:a="http://schemas.openxmlformats.org/drawingml/2006/main" xmlns:p="http://schemas.openxmlformats.org/presentationml/2006/main" xmlns:r="http://schemas.openxmlformats.org/officeDocument/2006/relationships">
+  <p:cSld>
+    <p:spTree>
+      <p:nvGrpSpPr>
+        <p:cNvPr id="1" name=""/>
+        <p:cNvGrpSpPr/>
+        <p:nvPr/>
+      </p:nvGrpSpPr>
+      <p:grpSpPr/>
+      <p:sp>
+        <p:nvSpPr>
+          <p:cNvPr id="2" name="Title 1"/>
+          <p:cNvSpPr>
+            <a:spLocks noGrp="1"/>
+          </p:cNvSpPr>
+          <p:nvPr>
+            <p:ph type="ctrTitle"/>
+          </p:nvPr>
+        </p:nvSpPr>
+        <p:spPr/>
+        <p:txBody>
+          <a:bodyPr/>
+          <a:lstStyle/>
+          <a:p>
+            <a:r>
+              <a:t>Discussion</a:t>
             </a:r>
           </a:p>
         </p:txBody>
@@ -7774,7 +9008,7 @@
 </file>
 
 <file path=ppt/slides/slide3.xml><?xml version="1.0" encoding="utf-8"?>
-<p:sld xmlns:a="http://schemas.openxmlformats.org/drawingml/2006/main" xmlns:r="http://schemas.openxmlformats.org/officeDocument/2006/relationships" xmlns:p="http://schemas.openxmlformats.org/presentationml/2006/main">
+<p:sld xmlns:a="http://schemas.openxmlformats.org/drawingml/2006/main" xmlns:p="http://schemas.openxmlformats.org/presentationml/2006/main" xmlns:r="http://schemas.openxmlformats.org/officeDocument/2006/relationships">
   <p:cSld>
     <p:spTree>
       <p:nvGrpSpPr>
@@ -7782,14 +9016,7 @@
         <p:cNvGrpSpPr/>
         <p:nvPr/>
       </p:nvGrpSpPr>
-      <p:grpSpPr>
-        <a:xfrm>
-          <a:off x="0" y="0"/>
-          <a:ext cx="0" cy="0"/>
-          <a:chOff x="0" y="0"/>
-          <a:chExt cx="0" cy="0"/>
-        </a:xfrm>
-      </p:grpSpPr>
+      <p:grpSpPr/>
       <p:sp>
         <p:nvSpPr>
           <p:cNvPr id="2" name="Title 1"/>
@@ -7820,7 +9047,7 @@
 </file>
 
 <file path=ppt/slides/slide4.xml><?xml version="1.0" encoding="utf-8"?>
-<p:sld xmlns:a="http://schemas.openxmlformats.org/drawingml/2006/main" xmlns:r="http://schemas.openxmlformats.org/officeDocument/2006/relationships" xmlns:p="http://schemas.openxmlformats.org/presentationml/2006/main">
+<p:sld xmlns:a="http://schemas.openxmlformats.org/drawingml/2006/main" xmlns:p="http://schemas.openxmlformats.org/presentationml/2006/main" xmlns:r="http://schemas.openxmlformats.org/officeDocument/2006/relationships">
   <p:cSld>
     <p:spTree>
       <p:nvGrpSpPr>
@@ -7828,14 +9055,7 @@
         <p:cNvGrpSpPr/>
         <p:nvPr/>
       </p:nvGrpSpPr>
-      <p:grpSpPr>
-        <a:xfrm>
-          <a:off x="0" y="0"/>
-          <a:ext cx="0" cy="0"/>
-          <a:chOff x="0" y="0"/>
-          <a:chExt cx="0" cy="0"/>
-        </a:xfrm>
-      </p:grpSpPr>
+      <p:grpSpPr/>
       <p:sp>
         <p:nvSpPr>
           <p:cNvPr id="2" name="Title 1"/>
@@ -7864,7 +9084,7 @@
             <a:spLocks noGrp="1"/>
           </p:cNvSpPr>
           <p:nvPr>
-            <p:ph sz="half" idx="1"/>
+            <p:ph idx="1" sz="half"/>
           </p:nvPr>
         </p:nvSpPr>
         <p:spPr/>
@@ -7873,7 +9093,7 @@
           <a:lstStyle/>
           <a:p>
             <a:r>
-              <a:rPr sz="1500" b="1"/>
+              <a:rPr b="1" sz="1500"/>
               <a:t>May 2013 correction: </a:t>
             </a:r>
             <a:r>
@@ -7889,7 +9109,7 @@
           </a:p>
           <a:p>
             <a:r>
-              <a:rPr sz="1500" b="1"/>
+              <a:rPr b="1" sz="1500"/>
               <a:t>Long Beach's table was reshaped after 2013: </a:t>
             </a:r>
             <a:r>
@@ -7912,16 +9132,14 @@
             <a:spLocks noGrp="1"/>
           </p:cNvSpPr>
           <p:nvPr>
-            <p:ph sz="half" idx="11"/>
+            <p:ph idx="11" sz="half"/>
           </p:nvPr>
         </p:nvSpPr>
         <p:spPr/>
         <p:txBody>
           <a:bodyPr/>
           <a:lstStyle/>
-          <a:p>
-            <a:endParaRPr/>
-          </a:p>
+          <a:p/>
         </p:txBody>
       </p:sp>
       <p:pic>
@@ -7933,7 +9151,7 @@
           <p:nvPr/>
         </p:nvPicPr>
         <p:blipFill>
-          <a:blip r:embed="rId3"/>
+          <a:blip r:embed="rId2"/>
           <a:stretch>
             <a:fillRect/>
           </a:stretch>
@@ -7957,7 +9175,7 @@
 </file>
 
 <file path=ppt/slides/slide5.xml><?xml version="1.0" encoding="utf-8"?>
-<p:sld xmlns:a="http://schemas.openxmlformats.org/drawingml/2006/main" xmlns:r="http://schemas.openxmlformats.org/officeDocument/2006/relationships" xmlns:p="http://schemas.openxmlformats.org/presentationml/2006/main">
+<p:sld xmlns:a="http://schemas.openxmlformats.org/drawingml/2006/main" xmlns:p="http://schemas.openxmlformats.org/presentationml/2006/main" xmlns:r="http://schemas.openxmlformats.org/officeDocument/2006/relationships">
   <p:cSld>
     <p:spTree>
       <p:nvGrpSpPr>
@@ -7965,14 +9183,7 @@
         <p:cNvGrpSpPr/>
         <p:nvPr/>
       </p:nvGrpSpPr>
-      <p:grpSpPr>
-        <a:xfrm>
-          <a:off x="0" y="0"/>
-          <a:ext cx="0" cy="0"/>
-          <a:chOff x="0" y="0"/>
-          <a:chExt cx="0" cy="0"/>
-        </a:xfrm>
-      </p:grpSpPr>
+      <p:grpSpPr/>
       <p:sp>
         <p:nvSpPr>
           <p:cNvPr id="2" name="Title 1"/>
@@ -8001,7 +9212,7 @@
             <a:spLocks noGrp="1"/>
           </p:cNvSpPr>
           <p:nvPr>
-            <p:ph sz="half" idx="1"/>
+            <p:ph idx="1" sz="half"/>
           </p:nvPr>
         </p:nvSpPr>
         <p:spPr/>
@@ -8010,7 +9221,7 @@
           <a:lstStyle/>
           <a:p>
             <a:r>
-              <a:rPr sz="1500" b="1"/>
+              <a:rPr b="1" sz="1500"/>
               <a:t>71-96% of season effort variance </a:t>
             </a:r>
             <a:r>
@@ -8032,7 +9243,7 @@
           </a:p>
           <a:p>
             <a:r>
-              <a:rPr sz="1500" b="1"/>
+              <a:rPr b="1" sz="1500"/>
               <a:t>The lever is surveys, not crew days </a:t>
             </a:r>
             <a:r>
@@ -8049,16 +9260,14 @@
             <a:spLocks noGrp="1"/>
           </p:cNvSpPr>
           <p:nvPr>
-            <p:ph sz="half" idx="11"/>
+            <p:ph idx="11" sz="half"/>
           </p:nvPr>
         </p:nvSpPr>
         <p:spPr/>
         <p:txBody>
           <a:bodyPr/>
           <a:lstStyle/>
-          <a:p>
-            <a:endParaRPr/>
-          </a:p>
+          <a:p/>
         </p:txBody>
       </p:sp>
       <p:pic>
@@ -8070,7 +9279,7 @@
           <p:nvPr/>
         </p:nvPicPr>
         <p:blipFill>
-          <a:blip r:embed="rId3"/>
+          <a:blip r:embed="rId2"/>
           <a:stretch>
             <a:fillRect/>
           </a:stretch>
@@ -8094,7 +9303,7 @@
 </file>
 
 <file path=ppt/slides/slide6.xml><?xml version="1.0" encoding="utf-8"?>
-<p:sld xmlns:a="http://schemas.openxmlformats.org/drawingml/2006/main" xmlns:r="http://schemas.openxmlformats.org/officeDocument/2006/relationships" xmlns:p="http://schemas.openxmlformats.org/presentationml/2006/main">
+<p:sld xmlns:a="http://schemas.openxmlformats.org/drawingml/2006/main" xmlns:p="http://schemas.openxmlformats.org/presentationml/2006/main" xmlns:r="http://schemas.openxmlformats.org/officeDocument/2006/relationships">
   <p:cSld>
     <p:spTree>
       <p:nvGrpSpPr>
@@ -8102,14 +9311,7 @@
         <p:cNvGrpSpPr/>
         <p:nvPr/>
       </p:nvGrpSpPr>
-      <p:grpSpPr>
-        <a:xfrm>
-          <a:off x="0" y="0"/>
-          <a:ext cx="0" cy="0"/>
-          <a:chOff x="0" y="0"/>
-          <a:chExt cx="0" cy="0"/>
-        </a:xfrm>
-      </p:grpSpPr>
+      <p:grpSpPr/>
       <p:sp>
         <p:nvSpPr>
           <p:cNvPr id="2" name="Title 1"/>
@@ -8138,7 +9340,7 @@
             <a:spLocks noGrp="1"/>
           </p:cNvSpPr>
           <p:nvPr>
-            <p:ph sz="half" idx="1"/>
+            <p:ph idx="1" sz="half"/>
           </p:nvPr>
         </p:nvSpPr>
         <p:spPr/>
@@ -8147,7 +9349,7 @@
           <a:lstStyle/>
           <a:p>
             <a:r>
-              <a:rPr sz="1500" b="1"/>
+              <a:rPr b="1" sz="1500"/>
               <a:t>CPUE transfer (borrowed catch rate on uncounted days): </a:t>
             </a:r>
             <a:r>
@@ -8163,7 +9365,7 @@
           </a:p>
           <a:p>
             <a:r>
-              <a:rPr sz="1500" b="1"/>
+              <a:rPr b="1" sz="1500"/>
               <a:t>Best donor for the two northern beaches: </a:t>
             </a:r>
             <a:r>
@@ -8180,16 +9382,14 @@
             <a:spLocks noGrp="1"/>
           </p:cNvSpPr>
           <p:nvPr>
-            <p:ph sz="half" idx="11"/>
+            <p:ph idx="11" sz="half"/>
           </p:nvPr>
         </p:nvSpPr>
         <p:spPr/>
         <p:txBody>
           <a:bodyPr/>
           <a:lstStyle/>
-          <a:p>
-            <a:endParaRPr/>
-          </a:p>
+          <a:p/>
         </p:txBody>
       </p:sp>
       <p:pic>
@@ -8201,7 +9401,7 @@
           <p:nvPr/>
         </p:nvPicPr>
         <p:blipFill>
-          <a:blip r:embed="rId3"/>
+          <a:blip r:embed="rId2"/>
           <a:stretch>
             <a:fillRect/>
           </a:stretch>
@@ -8225,7 +9425,7 @@
 </file>
 
 <file path=ppt/slides/slide7.xml><?xml version="1.0" encoding="utf-8"?>
-<p:sld xmlns:a="http://schemas.openxmlformats.org/drawingml/2006/main" xmlns:r="http://schemas.openxmlformats.org/officeDocument/2006/relationships" xmlns:p="http://schemas.openxmlformats.org/presentationml/2006/main">
+<p:sld xmlns:a="http://schemas.openxmlformats.org/drawingml/2006/main" xmlns:p="http://schemas.openxmlformats.org/presentationml/2006/main" xmlns:r="http://schemas.openxmlformats.org/officeDocument/2006/relationships">
   <p:cSld>
     <p:spTree>
       <p:nvGrpSpPr>
@@ -8233,14 +9433,7 @@
         <p:cNvGrpSpPr/>
         <p:nvPr/>
       </p:nvGrpSpPr>
-      <p:grpSpPr>
-        <a:xfrm>
-          <a:off x="0" y="0"/>
-          <a:ext cx="0" cy="0"/>
-          <a:chOff x="0" y="0"/>
-          <a:chExt cx="0" cy="0"/>
-        </a:xfrm>
-      </p:grpSpPr>
+      <p:grpSpPr/>
       <p:sp>
         <p:nvSpPr>
           <p:cNvPr id="2" name="Title 1"/>
@@ -8271,7 +9464,7 @@
 </file>
 
 <file path=ppt/slides/slide8.xml><?xml version="1.0" encoding="utf-8"?>
-<p:sld xmlns:a="http://schemas.openxmlformats.org/drawingml/2006/main" xmlns:r="http://schemas.openxmlformats.org/officeDocument/2006/relationships" xmlns:p="http://schemas.openxmlformats.org/presentationml/2006/main">
+<p:sld xmlns:a="http://schemas.openxmlformats.org/drawingml/2006/main" xmlns:p="http://schemas.openxmlformats.org/presentationml/2006/main" xmlns:r="http://schemas.openxmlformats.org/officeDocument/2006/relationships">
   <p:cSld>
     <p:spTree>
       <p:nvGrpSpPr>
@@ -8279,14 +9472,7 @@
         <p:cNvGrpSpPr/>
         <p:nvPr/>
       </p:nvGrpSpPr>
-      <p:grpSpPr>
-        <a:xfrm>
-          <a:off x="0" y="0"/>
-          <a:ext cx="0" cy="0"/>
-          <a:chOff x="0" y="0"/>
-          <a:chExt cx="0" cy="0"/>
-        </a:xfrm>
-      </p:grpSpPr>
+      <p:grpSpPr/>
       <p:sp>
         <p:nvSpPr>
           <p:cNvPr id="2" name="Title 1"/>
@@ -8315,7 +9501,7 @@
             <a:spLocks noGrp="1"/>
           </p:cNvSpPr>
           <p:nvPr>
-            <p:ph sz="half" idx="1"/>
+            <p:ph idx="1" sz="half"/>
           </p:nvPr>
         </p:nvSpPr>
         <p:spPr/>
@@ -8324,7 +9510,7 @@
           <a:lstStyle/>
           <a:p>
             <a:r>
-              <a:rPr sz="1500" b="1"/>
+              <a:rPr b="1" sz="1500"/>
               <a:t>Count 2 of a 4- or 5-day series; </a:t>
             </a:r>
             <a:r>
@@ -8340,7 +9526,7 @@
           </a:p>
           <a:p>
             <a:r>
-              <a:rPr sz="1500" b="1"/>
+              <a:rPr b="1" sz="1500"/>
               <a:t>Read it as 45% of open days, floor of two.</a:t>
             </a:r>
           </a:p>
@@ -8359,16 +9545,14 @@
             <a:spLocks noGrp="1"/>
           </p:cNvSpPr>
           <p:nvPr>
-            <p:ph sz="half" idx="11"/>
+            <p:ph idx="11" sz="half"/>
           </p:nvPr>
         </p:nvSpPr>
         <p:spPr/>
         <p:txBody>
           <a:bodyPr/>
           <a:lstStyle/>
-          <a:p>
-            <a:endParaRPr/>
-          </a:p>
+          <a:p/>
         </p:txBody>
       </p:sp>
       <p:pic>
@@ -8380,7 +9564,7 @@
           <p:nvPr/>
         </p:nvPicPr>
         <p:blipFill>
-          <a:blip r:embed="rId3"/>
+          <a:blip r:embed="rId2"/>
           <a:stretch>
             <a:fillRect/>
           </a:stretch>
@@ -8404,7 +9588,7 @@
 </file>
 
 <file path=ppt/slides/slide9.xml><?xml version="1.0" encoding="utf-8"?>
-<p:sld xmlns:a="http://schemas.openxmlformats.org/drawingml/2006/main" xmlns:r="http://schemas.openxmlformats.org/officeDocument/2006/relationships" xmlns:p="http://schemas.openxmlformats.org/presentationml/2006/main">
+<p:sld xmlns:a="http://schemas.openxmlformats.org/drawingml/2006/main" xmlns:p="http://schemas.openxmlformats.org/presentationml/2006/main" xmlns:r="http://schemas.openxmlformats.org/officeDocument/2006/relationships">
   <p:cSld>
     <p:spTree>
       <p:nvGrpSpPr>
@@ -8412,14 +9596,7 @@
         <p:cNvGrpSpPr/>
         <p:nvPr/>
       </p:nvGrpSpPr>
-      <p:grpSpPr>
-        <a:xfrm>
-          <a:off x="0" y="0"/>
-          <a:ext cx="0" cy="0"/>
-          <a:chOff x="0" y="0"/>
-          <a:chExt cx="0" cy="0"/>
-        </a:xfrm>
-      </p:grpSpPr>
+      <p:grpSpPr/>
       <p:sp>
         <p:nvSpPr>
           <p:cNvPr id="2" name="Title 1"/>
@@ -8453,43 +9630,37 @@
         </p:nvSpPr>
         <p:spPr/>
         <p:txBody>
-          <a:bodyPr wrap="square">
-            <a:normAutofit/>
-          </a:bodyPr>
+          <a:bodyPr wrap="square"/>
           <a:lstStyle/>
           <a:p>
             <a:r>
-              <a:rPr sz="2800" b="1" dirty="0"/>
+              <a:rPr b="1"/>
               <a:t>Selecting the largest-effort days beats an even spread by 4-11 CV points </a:t>
             </a:r>
             <a:r>
-              <a:rPr sz="2800" dirty="0"/>
               <a:t>at every series length tested.</a:t>
             </a:r>
           </a:p>
           <a:p>
             <a:r>
-              <a:rPr sz="2800" b="1" dirty="0"/>
+              <a:rPr b="1"/>
               <a:t>Small bias penalty (1-6%), </a:t>
             </a:r>
             <a:r>
-              <a:rPr sz="2800" dirty="0"/>
               <a:t>no worse than the alternatives.</a:t>
             </a:r>
           </a:p>
           <a:p>
             <a:r>
-              <a:rPr sz="2800" dirty="0"/>
               <a:t>The program already does this implicitly, staffing the opening weekend and the biggest tides.</a:t>
             </a:r>
           </a:p>
           <a:p>
             <a:r>
-              <a:rPr sz="2800" b="1" dirty="0"/>
+              <a:rPr b="1"/>
               <a:t>It is correct. </a:t>
             </a:r>
             <a:r>
-              <a:rPr sz="2800" dirty="0"/>
               <a:t>Which days will be largest is well predicted by the schedule, tide height, and day of week.</a:t>
             </a:r>
           </a:p>
@@ -8829,301 +10000,6 @@
         <a:sysClr val="window" lastClr="FFFFFF"/>
       </a:lt1>
       <a:dk2>
-        <a:srgbClr val="44546A"/>
-      </a:dk2>
-      <a:lt2>
-        <a:srgbClr val="E7E6E6"/>
-      </a:lt2>
-      <a:accent1>
-        <a:srgbClr val="4472C4"/>
-      </a:accent1>
-      <a:accent2>
-        <a:srgbClr val="ED7D31"/>
-      </a:accent2>
-      <a:accent3>
-        <a:srgbClr val="A5A5A5"/>
-      </a:accent3>
-      <a:accent4>
-        <a:srgbClr val="FFC000"/>
-      </a:accent4>
-      <a:accent5>
-        <a:srgbClr val="5B9BD5"/>
-      </a:accent5>
-      <a:accent6>
-        <a:srgbClr val="70AD47"/>
-      </a:accent6>
-      <a:hlink>
-        <a:srgbClr val="0563C1"/>
-      </a:hlink>
-      <a:folHlink>
-        <a:srgbClr val="954F72"/>
-      </a:folHlink>
-    </a:clrScheme>
-    <a:fontScheme name="Office">
-      <a:majorFont>
-        <a:latin typeface="Calibri Light" panose="020F0302020204030204"/>
-        <a:ea typeface=""/>
-        <a:cs typeface=""/>
-        <a:font script="Jpan" typeface="游ゴシック Light"/>
-        <a:font script="Hang" typeface="맑은 고딕"/>
-        <a:font script="Hans" typeface="等线 Light"/>
-        <a:font script="Hant" typeface="新細明體"/>
-        <a:font script="Arab" typeface="Times New Roman"/>
-        <a:font script="Hebr" typeface="Times New Roman"/>
-        <a:font script="Thai" typeface="Angsana New"/>
-        <a:font script="Ethi" typeface="Nyala"/>
-        <a:font script="Beng" typeface="Vrinda"/>
-        <a:font script="Gujr" typeface="Shruti"/>
-        <a:font script="Khmr" typeface="MoolBoran"/>
-        <a:font script="Knda" typeface="Tunga"/>
-        <a:font script="Guru" typeface="Raavi"/>
-        <a:font script="Cans" typeface="Euphemia"/>
-        <a:font script="Cher" typeface="Plantagenet Cherokee"/>
-        <a:font script="Yiii" typeface="Microsoft Yi Baiti"/>
-        <a:font script="Tibt" typeface="Microsoft Himalaya"/>
-        <a:font script="Thaa" typeface="MV Boli"/>
-        <a:font script="Deva" typeface="Mangal"/>
-        <a:font script="Telu" typeface="Gautami"/>
-        <a:font script="Taml" typeface="Latha"/>
-        <a:font script="Syrc" typeface="Estrangelo Edessa"/>
-        <a:font script="Orya" typeface="Kalinga"/>
-        <a:font script="Mlym" typeface="Kartika"/>
-        <a:font script="Laoo" typeface="DokChampa"/>
-        <a:font script="Sinh" typeface="Iskoola Pota"/>
-        <a:font script="Mong" typeface="Mongolian Baiti"/>
-        <a:font script="Viet" typeface="Times New Roman"/>
-        <a:font script="Uigh" typeface="Microsoft Uighur"/>
-        <a:font script="Geor" typeface="Sylfaen"/>
-        <a:font script="Armn" typeface="Arial"/>
-        <a:font script="Bugi" typeface="Leelawadee UI"/>
-        <a:font script="Bopo" typeface="Microsoft JhengHei"/>
-        <a:font script="Java" typeface="Javanese Text"/>
-        <a:font script="Lisu" typeface="Segoe UI"/>
-        <a:font script="Mymr" typeface="Myanmar Text"/>
-        <a:font script="Nkoo" typeface="Ebrima"/>
-        <a:font script="Olck" typeface="Nirmala UI"/>
-        <a:font script="Osma" typeface="Ebrima"/>
-        <a:font script="Phag" typeface="Phagspa"/>
-        <a:font script="Syrn" typeface="Estrangelo Edessa"/>
-        <a:font script="Syrj" typeface="Estrangelo Edessa"/>
-        <a:font script="Syre" typeface="Estrangelo Edessa"/>
-        <a:font script="Sora" typeface="Nirmala UI"/>
-        <a:font script="Tale" typeface="Microsoft Tai Le"/>
-        <a:font script="Talu" typeface="Microsoft New Tai Lue"/>
-        <a:font script="Tfng" typeface="Ebrima"/>
-      </a:majorFont>
-      <a:minorFont>
-        <a:latin typeface="Calibri" panose="020F0502020204030204"/>
-        <a:ea typeface=""/>
-        <a:cs typeface=""/>
-        <a:font script="Jpan" typeface="游ゴシック"/>
-        <a:font script="Hang" typeface="맑은 고딕"/>
-        <a:font script="Hans" typeface="等线"/>
-        <a:font script="Hant" typeface="新細明體"/>
-        <a:font script="Arab" typeface="Arial"/>
-        <a:font script="Hebr" typeface="Arial"/>
-        <a:font script="Thai" typeface="Cordia New"/>
-        <a:font script="Ethi" typeface="Nyala"/>
-        <a:font script="Beng" typeface="Vrinda"/>
-        <a:font script="Gujr" typeface="Shruti"/>
-        <a:font script="Khmr" typeface="DaunPenh"/>
-        <a:font script="Knda" typeface="Tunga"/>
-        <a:font script="Guru" typeface="Raavi"/>
-        <a:font script="Cans" typeface="Euphemia"/>
-        <a:font script="Cher" typeface="Plantagenet Cherokee"/>
-        <a:font script="Yiii" typeface="Microsoft Yi Baiti"/>
-        <a:font script="Tibt" typeface="Microsoft Himalaya"/>
-        <a:font script="Thaa" typeface="MV Boli"/>
-        <a:font script="Deva" typeface="Mangal"/>
-        <a:font script="Telu" typeface="Gautami"/>
-        <a:font script="Taml" typeface="Latha"/>
-        <a:font script="Syrc" typeface="Estrangelo Edessa"/>
-        <a:font script="Orya" typeface="Kalinga"/>
-        <a:font script="Mlym" typeface="Kartika"/>
-        <a:font script="Laoo" typeface="DokChampa"/>
-        <a:font script="Sinh" typeface="Iskoola Pota"/>
-        <a:font script="Mong" typeface="Mongolian Baiti"/>
-        <a:font script="Viet" typeface="Arial"/>
-        <a:font script="Uigh" typeface="Microsoft Uighur"/>
-        <a:font script="Geor" typeface="Sylfaen"/>
-        <a:font script="Armn" typeface="Arial"/>
-        <a:font script="Bugi" typeface="Leelawadee UI"/>
-        <a:font script="Bopo" typeface="Microsoft JhengHei"/>
-        <a:font script="Java" typeface="Javanese Text"/>
-        <a:font script="Lisu" typeface="Segoe UI"/>
-        <a:font script="Mymr" typeface="Myanmar Text"/>
-        <a:font script="Nkoo" typeface="Ebrima"/>
-        <a:font script="Olck" typeface="Nirmala UI"/>
-        <a:font script="Osma" typeface="Ebrima"/>
-        <a:font script="Phag" typeface="Phagspa"/>
-        <a:font script="Syrn" typeface="Estrangelo Edessa"/>
-        <a:font script="Syrj" typeface="Estrangelo Edessa"/>
-        <a:font script="Syre" typeface="Estrangelo Edessa"/>
-        <a:font script="Sora" typeface="Nirmala UI"/>
-        <a:font script="Tale" typeface="Microsoft Tai Le"/>
-        <a:font script="Talu" typeface="Microsoft New Tai Lue"/>
-        <a:font script="Tfng" typeface="Ebrima"/>
-      </a:minorFont>
-    </a:fontScheme>
-    <a:fmtScheme name="Office">
-      <a:fillStyleLst>
-        <a:solidFill>
-          <a:schemeClr val="phClr"/>
-        </a:solidFill>
-        <a:gradFill rotWithShape="1">
-          <a:gsLst>
-            <a:gs pos="0">
-              <a:schemeClr val="phClr">
-                <a:lumMod val="110000"/>
-                <a:satMod val="105000"/>
-                <a:tint val="67000"/>
-              </a:schemeClr>
-            </a:gs>
-            <a:gs pos="50000">
-              <a:schemeClr val="phClr">
-                <a:lumMod val="105000"/>
-                <a:satMod val="103000"/>
-                <a:tint val="73000"/>
-              </a:schemeClr>
-            </a:gs>
-            <a:gs pos="100000">
-              <a:schemeClr val="phClr">
-                <a:lumMod val="105000"/>
-                <a:satMod val="109000"/>
-                <a:tint val="81000"/>
-              </a:schemeClr>
-            </a:gs>
-          </a:gsLst>
-          <a:lin ang="5400000" scaled="0"/>
-        </a:gradFill>
-        <a:gradFill rotWithShape="1">
-          <a:gsLst>
-            <a:gs pos="0">
-              <a:schemeClr val="phClr">
-                <a:satMod val="103000"/>
-                <a:lumMod val="102000"/>
-                <a:tint val="94000"/>
-              </a:schemeClr>
-            </a:gs>
-            <a:gs pos="50000">
-              <a:schemeClr val="phClr">
-                <a:satMod val="110000"/>
-                <a:lumMod val="100000"/>
-                <a:shade val="100000"/>
-              </a:schemeClr>
-            </a:gs>
-            <a:gs pos="100000">
-              <a:schemeClr val="phClr">
-                <a:lumMod val="99000"/>
-                <a:satMod val="120000"/>
-                <a:shade val="78000"/>
-              </a:schemeClr>
-            </a:gs>
-          </a:gsLst>
-          <a:lin ang="5400000" scaled="0"/>
-        </a:gradFill>
-      </a:fillStyleLst>
-      <a:lnStyleLst>
-        <a:ln w="6350" cap="flat" cmpd="sng" algn="ctr">
-          <a:solidFill>
-            <a:schemeClr val="phClr"/>
-          </a:solidFill>
-          <a:prstDash val="solid"/>
-          <a:miter lim="800000"/>
-        </a:ln>
-        <a:ln w="12700" cap="flat" cmpd="sng" algn="ctr">
-          <a:solidFill>
-            <a:schemeClr val="phClr"/>
-          </a:solidFill>
-          <a:prstDash val="solid"/>
-          <a:miter lim="800000"/>
-        </a:ln>
-        <a:ln w="19050" cap="flat" cmpd="sng" algn="ctr">
-          <a:solidFill>
-            <a:schemeClr val="phClr"/>
-          </a:solidFill>
-          <a:prstDash val="solid"/>
-          <a:miter lim="800000"/>
-        </a:ln>
-      </a:lnStyleLst>
-      <a:effectStyleLst>
-        <a:effectStyle>
-          <a:effectLst/>
-        </a:effectStyle>
-        <a:effectStyle>
-          <a:effectLst/>
-        </a:effectStyle>
-        <a:effectStyle>
-          <a:effectLst>
-            <a:outerShdw blurRad="57150" dist="19050" dir="5400000" algn="ctr" rotWithShape="0">
-              <a:srgbClr val="000000">
-                <a:alpha val="63000"/>
-              </a:srgbClr>
-            </a:outerShdw>
-          </a:effectLst>
-        </a:effectStyle>
-      </a:effectStyleLst>
-      <a:bgFillStyleLst>
-        <a:solidFill>
-          <a:schemeClr val="phClr"/>
-        </a:solidFill>
-        <a:solidFill>
-          <a:schemeClr val="phClr">
-            <a:tint val="95000"/>
-            <a:satMod val="170000"/>
-          </a:schemeClr>
-        </a:solidFill>
-        <a:gradFill rotWithShape="1">
-          <a:gsLst>
-            <a:gs pos="0">
-              <a:schemeClr val="phClr">
-                <a:tint val="93000"/>
-                <a:satMod val="150000"/>
-                <a:shade val="98000"/>
-                <a:lumMod val="102000"/>
-              </a:schemeClr>
-            </a:gs>
-            <a:gs pos="50000">
-              <a:schemeClr val="phClr">
-                <a:tint val="98000"/>
-                <a:satMod val="130000"/>
-                <a:shade val="90000"/>
-                <a:lumMod val="103000"/>
-              </a:schemeClr>
-            </a:gs>
-            <a:gs pos="100000">
-              <a:schemeClr val="phClr">
-                <a:shade val="63000"/>
-                <a:satMod val="120000"/>
-              </a:schemeClr>
-            </a:gs>
-          </a:gsLst>
-          <a:lin ang="5400000" scaled="0"/>
-        </a:gradFill>
-      </a:bgFillStyleLst>
-    </a:fmtScheme>
-  </a:themeElements>
-  <a:objectDefaults/>
-  <a:extraClrSchemeLst/>
-  <a:extLst>
-    <a:ext uri="{05A4C25C-085E-4340-85A3-A5531E510DB2}">
-      <thm15:themeFamily xmlns:thm15="http://schemas.microsoft.com/office/thememl/2012/main" name="Office Theme" id="{62F939B6-93AF-4DB8-9C6B-D6C7DFDC589F}" vid="{4A3C46E8-61CC-4603-A589-7422A47A8E4A}"/>
-    </a:ext>
-  </a:extLst>
-</a:theme>
-</file>
-
-<file path=ppt/theme/theme3.xml><?xml version="1.0" encoding="utf-8"?>
-<a:theme xmlns:a="http://schemas.openxmlformats.org/drawingml/2006/main" name="Office Theme">
-  <a:themeElements>
-    <a:clrScheme name="Office">
-      <a:dk1>
-        <a:sysClr val="windowText" lastClr="000000"/>
-      </a:dk1>
-      <a:lt1>
-        <a:sysClr val="window" lastClr="FFFFFF"/>
-      </a:lt1>
-      <a:dk2>
         <a:srgbClr val="0E2841"/>
       </a:dk2>
       <a:lt2>
@@ -9428,30 +10304,327 @@
 </a:theme>
 </file>
 
-<file path=customXml/item1.xml><?xml version="1.0" encoding="utf-8"?>
-<?mso-contentType ?>
-<FormTemplates xmlns="http://schemas.microsoft.com/sharepoint/v3/contenttype/forms">
-  <Display>DocumentLibraryForm</Display>
-  <Edit>DocumentLibraryForm</Edit>
-  <New>DocumentLibraryForm</New>
-</FormTemplates>
+<file path=ppt/theme/theme3.xml><?xml version="1.0" encoding="utf-8"?>
+<a:theme xmlns:a="http://schemas.openxmlformats.org/drawingml/2006/main" name="Office Theme">
+  <a:themeElements>
+    <a:clrScheme name="Office">
+      <a:dk1>
+        <a:sysClr val="windowText" lastClr="000000"/>
+      </a:dk1>
+      <a:lt1>
+        <a:sysClr val="window" lastClr="FFFFFF"/>
+      </a:lt1>
+      <a:dk2>
+        <a:srgbClr val="1F497D"/>
+      </a:dk2>
+      <a:lt2>
+        <a:srgbClr val="EEECE1"/>
+      </a:lt2>
+      <a:accent1>
+        <a:srgbClr val="4F81BD"/>
+      </a:accent1>
+      <a:accent2>
+        <a:srgbClr val="C0504D"/>
+      </a:accent2>
+      <a:accent3>
+        <a:srgbClr val="9BBB59"/>
+      </a:accent3>
+      <a:accent4>
+        <a:srgbClr val="8064A2"/>
+      </a:accent4>
+      <a:accent5>
+        <a:srgbClr val="4BACC6"/>
+      </a:accent5>
+      <a:accent6>
+        <a:srgbClr val="F79646"/>
+      </a:accent6>
+      <a:hlink>
+        <a:srgbClr val="0000FF"/>
+      </a:hlink>
+      <a:folHlink>
+        <a:srgbClr val="800080"/>
+      </a:folHlink>
+    </a:clrScheme>
+    <a:fontScheme name="Office">
+      <a:majorFont>
+        <a:latin typeface="Calibri"/>
+        <a:ea typeface=""/>
+        <a:cs typeface=""/>
+        <a:font script="Jpan" typeface="ＭＳ Ｐゴシック"/>
+        <a:font script="Hang" typeface="맑은 고딕"/>
+        <a:font script="Hans" typeface="宋体"/>
+        <a:font script="Hant" typeface="新細明體"/>
+        <a:font script="Arab" typeface="Times New Roman"/>
+        <a:font script="Hebr" typeface="Times New Roman"/>
+        <a:font script="Thai" typeface="Angsana New"/>
+        <a:font script="Ethi" typeface="Nyala"/>
+        <a:font script="Beng" typeface="Vrinda"/>
+        <a:font script="Gujr" typeface="Shruti"/>
+        <a:font script="Khmr" typeface="MoolBoran"/>
+        <a:font script="Knda" typeface="Tunga"/>
+        <a:font script="Guru" typeface="Raavi"/>
+        <a:font script="Cans" typeface="Euphemia"/>
+        <a:font script="Cher" typeface="Plantagenet Cherokee"/>
+        <a:font script="Yiii" typeface="Microsoft Yi Baiti"/>
+        <a:font script="Tibt" typeface="Microsoft Himalaya"/>
+        <a:font script="Thaa" typeface="MV Boli"/>
+        <a:font script="Deva" typeface="Mangal"/>
+        <a:font script="Telu" typeface="Gautami"/>
+        <a:font script="Taml" typeface="Latha"/>
+        <a:font script="Syrc" typeface="Estrangelo Edessa"/>
+        <a:font script="Orya" typeface="Kalinga"/>
+        <a:font script="Mlym" typeface="Kartika"/>
+        <a:font script="Laoo" typeface="DokChampa"/>
+        <a:font script="Sinh" typeface="Iskoola Pota"/>
+        <a:font script="Mong" typeface="Mongolian Baiti"/>
+        <a:font script="Viet" typeface="Times New Roman"/>
+        <a:font script="Uigh" typeface="Microsoft Uighur"/>
+        <a:font script="Geor" typeface="Sylfaen"/>
+      </a:majorFont>
+      <a:minorFont>
+        <a:latin typeface="Calibri"/>
+        <a:ea typeface=""/>
+        <a:cs typeface=""/>
+        <a:font script="Jpan" typeface="ＭＳ Ｐゴシック"/>
+        <a:font script="Hang" typeface="맑은 고딕"/>
+        <a:font script="Hans" typeface="宋体"/>
+        <a:font script="Hant" typeface="新細明體"/>
+        <a:font script="Arab" typeface="Arial"/>
+        <a:font script="Hebr" typeface="Arial"/>
+        <a:font script="Thai" typeface="Cordia New"/>
+        <a:font script="Ethi" typeface="Nyala"/>
+        <a:font script="Beng" typeface="Vrinda"/>
+        <a:font script="Gujr" typeface="Shruti"/>
+        <a:font script="Khmr" typeface="DaunPenh"/>
+        <a:font script="Knda" typeface="Tunga"/>
+        <a:font script="Guru" typeface="Raavi"/>
+        <a:font script="Cans" typeface="Euphemia"/>
+        <a:font script="Cher" typeface="Plantagenet Cherokee"/>
+        <a:font script="Yiii" typeface="Microsoft Yi Baiti"/>
+        <a:font script="Tibt" typeface="Microsoft Himalaya"/>
+        <a:font script="Thaa" typeface="MV Boli"/>
+        <a:font script="Deva" typeface="Mangal"/>
+        <a:font script="Telu" typeface="Gautami"/>
+        <a:font script="Taml" typeface="Latha"/>
+        <a:font script="Syrc" typeface="Estrangelo Edessa"/>
+        <a:font script="Orya" typeface="Kalinga"/>
+        <a:font script="Mlym" typeface="Kartika"/>
+        <a:font script="Laoo" typeface="DokChampa"/>
+        <a:font script="Sinh" typeface="Iskoola Pota"/>
+        <a:font script="Mong" typeface="Mongolian Baiti"/>
+        <a:font script="Viet" typeface="Arial"/>
+        <a:font script="Uigh" typeface="Microsoft Uighur"/>
+        <a:font script="Geor" typeface="Sylfaen"/>
+      </a:minorFont>
+    </a:fontScheme>
+    <a:fmtScheme name="Office">
+      <a:fillStyleLst>
+        <a:solidFill>
+          <a:schemeClr val="phClr"/>
+        </a:solidFill>
+        <a:gradFill rotWithShape="1">
+          <a:gsLst>
+            <a:gs pos="0">
+              <a:schemeClr val="phClr">
+                <a:tint val="50000"/>
+                <a:satMod val="300000"/>
+              </a:schemeClr>
+            </a:gs>
+            <a:gs pos="35000">
+              <a:schemeClr val="phClr">
+                <a:tint val="37000"/>
+                <a:satMod val="300000"/>
+              </a:schemeClr>
+            </a:gs>
+            <a:gs pos="100000">
+              <a:schemeClr val="phClr">
+                <a:tint val="15000"/>
+                <a:satMod val="350000"/>
+              </a:schemeClr>
+            </a:gs>
+          </a:gsLst>
+          <a:lin ang="16200000" scaled="1"/>
+        </a:gradFill>
+        <a:gradFill rotWithShape="1">
+          <a:gsLst>
+            <a:gs pos="0">
+              <a:schemeClr val="phClr">
+                <a:tint val="100000"/>
+                <a:shade val="100000"/>
+                <a:satMod val="130000"/>
+              </a:schemeClr>
+            </a:gs>
+            <a:gs pos="100000">
+              <a:schemeClr val="phClr">
+                <a:tint val="50000"/>
+                <a:shade val="100000"/>
+                <a:satMod val="350000"/>
+              </a:schemeClr>
+            </a:gs>
+          </a:gsLst>
+          <a:lin ang="16200000" scaled="0"/>
+        </a:gradFill>
+      </a:fillStyleLst>
+      <a:lnStyleLst>
+        <a:ln w="9525" cap="flat" cmpd="sng" algn="ctr">
+          <a:solidFill>
+            <a:schemeClr val="phClr">
+              <a:shade val="95000"/>
+              <a:satMod val="105000"/>
+            </a:schemeClr>
+          </a:solidFill>
+          <a:prstDash val="solid"/>
+        </a:ln>
+        <a:ln w="25400" cap="flat" cmpd="sng" algn="ctr">
+          <a:solidFill>
+            <a:schemeClr val="phClr"/>
+          </a:solidFill>
+          <a:prstDash val="solid"/>
+        </a:ln>
+        <a:ln w="38100" cap="flat" cmpd="sng" algn="ctr">
+          <a:solidFill>
+            <a:schemeClr val="phClr"/>
+          </a:solidFill>
+          <a:prstDash val="solid"/>
+        </a:ln>
+      </a:lnStyleLst>
+      <a:effectStyleLst>
+        <a:effectStyle>
+          <a:effectLst>
+            <a:outerShdw blurRad="40000" dist="20000" dir="5400000" rotWithShape="0">
+              <a:srgbClr val="000000">
+                <a:alpha val="38000"/>
+              </a:srgbClr>
+            </a:outerShdw>
+          </a:effectLst>
+        </a:effectStyle>
+        <a:effectStyle>
+          <a:effectLst>
+            <a:outerShdw blurRad="40000" dist="23000" dir="5400000" rotWithShape="0">
+              <a:srgbClr val="000000">
+                <a:alpha val="35000"/>
+              </a:srgbClr>
+            </a:outerShdw>
+          </a:effectLst>
+        </a:effectStyle>
+        <a:effectStyle>
+          <a:effectLst>
+            <a:outerShdw blurRad="40000" dist="23000" dir="5400000" rotWithShape="0">
+              <a:srgbClr val="000000">
+                <a:alpha val="35000"/>
+              </a:srgbClr>
+            </a:outerShdw>
+          </a:effectLst>
+          <a:scene3d>
+            <a:camera prst="orthographicFront">
+              <a:rot lat="0" lon="0" rev="0"/>
+            </a:camera>
+            <a:lightRig rig="threePt" dir="t">
+              <a:rot lat="0" lon="0" rev="1200000"/>
+            </a:lightRig>
+          </a:scene3d>
+          <a:sp3d>
+            <a:bevelT w="63500" h="25400"/>
+          </a:sp3d>
+        </a:effectStyle>
+      </a:effectStyleLst>
+      <a:bgFillStyleLst>
+        <a:solidFill>
+          <a:schemeClr val="phClr"/>
+        </a:solidFill>
+        <a:gradFill rotWithShape="1">
+          <a:gsLst>
+            <a:gs pos="0">
+              <a:schemeClr val="phClr">
+                <a:tint val="40000"/>
+                <a:satMod val="350000"/>
+              </a:schemeClr>
+            </a:gs>
+            <a:gs pos="40000">
+              <a:schemeClr val="phClr">
+                <a:tint val="45000"/>
+                <a:shade val="99000"/>
+                <a:satMod val="350000"/>
+              </a:schemeClr>
+            </a:gs>
+            <a:gs pos="100000">
+              <a:schemeClr val="phClr">
+                <a:shade val="20000"/>
+                <a:satMod val="255000"/>
+              </a:schemeClr>
+            </a:gs>
+          </a:gsLst>
+          <a:path path="circle">
+            <a:fillToRect l="50000" t="-80000" r="50000" b="180000"/>
+          </a:path>
+        </a:gradFill>
+        <a:gradFill rotWithShape="1">
+          <a:gsLst>
+            <a:gs pos="0">
+              <a:schemeClr val="phClr">
+                <a:tint val="80000"/>
+                <a:satMod val="300000"/>
+              </a:schemeClr>
+            </a:gs>
+            <a:gs pos="100000">
+              <a:schemeClr val="phClr">
+                <a:shade val="30000"/>
+                <a:satMod val="200000"/>
+              </a:schemeClr>
+            </a:gs>
+          </a:gsLst>
+          <a:path path="circle">
+            <a:fillToRect l="50000" t="50000" r="50000" b="50000"/>
+          </a:path>
+        </a:gradFill>
+      </a:bgFillStyleLst>
+    </a:fmtScheme>
+  </a:themeElements>
+  <a:objectDefaults>
+    <a:spDef>
+      <a:spPr/>
+      <a:bodyPr/>
+      <a:lstStyle/>
+      <a:style>
+        <a:lnRef idx="1">
+          <a:schemeClr val="accent1"/>
+        </a:lnRef>
+        <a:fillRef idx="3">
+          <a:schemeClr val="accent1"/>
+        </a:fillRef>
+        <a:effectRef idx="2">
+          <a:schemeClr val="accent1"/>
+        </a:effectRef>
+        <a:fontRef idx="minor">
+          <a:schemeClr val="lt1"/>
+        </a:fontRef>
+      </a:style>
+    </a:spDef>
+    <a:lnDef>
+      <a:spPr/>
+      <a:bodyPr/>
+      <a:lstStyle/>
+      <a:style>
+        <a:lnRef idx="2">
+          <a:schemeClr val="accent1"/>
+        </a:lnRef>
+        <a:fillRef idx="0">
+          <a:schemeClr val="accent1"/>
+        </a:fillRef>
+        <a:effectRef idx="1">
+          <a:schemeClr val="accent1"/>
+        </a:effectRef>
+        <a:fontRef idx="minor">
+          <a:schemeClr val="tx1"/>
+        </a:fontRef>
+      </a:style>
+    </a:lnDef>
+  </a:objectDefaults>
+  <a:extraClrSchemeLst/>
+</a:theme>
 </file>
 
-<file path=customXml/item2.xml><?xml version="1.0" encoding="utf-8"?>
-<p:properties xmlns:p="http://schemas.microsoft.com/office/2006/metadata/properties" xmlns:xsi="http://www.w3.org/2001/XMLSchema-instance" xmlns:pc="http://schemas.microsoft.com/office/infopath/2007/PartnerControls">
-  <documentManagement>
-    <_ip_UnifiedCompliancePolicyUIAction xmlns="http://schemas.microsoft.com/sharepoint/v3" xsi:nil="true"/>
-    <_ip_UnifiedCompliancePolicyProperties xmlns="http://schemas.microsoft.com/sharepoint/v3" xsi:nil="true"/>
-    <lcf76f155ced4ddcb4097134ff3c332f xmlns="c55fcec3-bb2d-4ee6-a56c-bdfd532525fc">
-      <Terms xmlns="http://schemas.microsoft.com/office/infopath/2007/PartnerControls"/>
-    </lcf76f155ced4ddcb4097134ff3c332f>
-    <TaxCatchAll xmlns="73c3c465-f3d4-4d37-9c58-e2ee535ad8e0" xsi:nil="true"/>
-    <NameinDAM xmlns="c55fcec3-bb2d-4ee6-a56c-bdfd532525fc" xsi:nil="true"/>
-  </documentManagement>
-</p:properties>
-</file>
-
-<file path=customXml/item3.xml><?xml version="1.0" encoding="utf-8"?>
+<file path=customXml/item1.xml><?xml version="1.0" encoding="utf-8"?>
 <ct:contentTypeSchema xmlns:ct="http://schemas.microsoft.com/office/2006/metadata/contentType" xmlns:ma="http://schemas.microsoft.com/office/2006/metadata/properties/metaAttributes" ct:_="" ma:_="" ma:contentTypeName="Document" ma:contentTypeID="0x01010053DF6C379CEE474091FA722A741F562C" ma:contentTypeVersion="18" ma:contentTypeDescription="Create a new document." ma:contentTypeScope="" ma:versionID="6d943700fdf77bec9a4960ab6af060cd">
   <xsd:schema xmlns:xsd="http://www.w3.org/2001/XMLSchema" xmlns:xs="http://www.w3.org/2001/XMLSchema" xmlns:p="http://schemas.microsoft.com/office/2006/metadata/properties" xmlns:ns1="http://schemas.microsoft.com/sharepoint/v3" xmlns:ns2="c55fcec3-bb2d-4ee6-a56c-bdfd532525fc" xmlns:ns3="73c3c465-f3d4-4d37-9c58-e2ee535ad8e0" targetNamespace="http://schemas.microsoft.com/office/2006/metadata/properties" ma:root="true" ma:fieldsID="f5f2cddc585f7bcfd68998bfccb1991a" ns1:_="" ns2:_="" ns3:_="">
     <xsd:import namespace="http://schemas.microsoft.com/sharepoint/v3"/>
@@ -9711,10 +10884,45 @@
 </ct:contentTypeSchema>
 </file>
 
+<file path=customXml/item2.xml><?xml version="1.0" encoding="utf-8"?>
+<p:properties xmlns:p="http://schemas.microsoft.com/office/2006/metadata/properties" xmlns:xsi="http://www.w3.org/2001/XMLSchema-instance" xmlns:pc="http://schemas.microsoft.com/office/infopath/2007/PartnerControls">
+  <documentManagement>
+    <_ip_UnifiedCompliancePolicyUIAction xmlns="http://schemas.microsoft.com/sharepoint/v3" xsi:nil="true"/>
+    <_ip_UnifiedCompliancePolicyProperties xmlns="http://schemas.microsoft.com/sharepoint/v3" xsi:nil="true"/>
+    <lcf76f155ced4ddcb4097134ff3c332f xmlns="c55fcec3-bb2d-4ee6-a56c-bdfd532525fc">
+      <Terms xmlns="http://schemas.microsoft.com/office/infopath/2007/PartnerControls"/>
+    </lcf76f155ced4ddcb4097134ff3c332f>
+    <TaxCatchAll xmlns="73c3c465-f3d4-4d37-9c58-e2ee535ad8e0" xsi:nil="true"/>
+    <NameinDAM xmlns="c55fcec3-bb2d-4ee6-a56c-bdfd532525fc" xsi:nil="true"/>
+  </documentManagement>
+</p:properties>
+</file>
+
+<file path=customXml/item3.xml><?xml version="1.0" encoding="utf-8"?>
+<?mso-contentType ?>
+<FormTemplates xmlns="http://schemas.microsoft.com/sharepoint/v3/contenttype/forms">
+  <Display>DocumentLibraryForm</Display>
+  <Edit>DocumentLibraryForm</Edit>
+  <New>DocumentLibraryForm</New>
+</FormTemplates>
+</file>
+
 <file path=customXml/itemProps1.xml><?xml version="1.0" encoding="utf-8"?>
-<ds:datastoreItem xmlns:ds="http://schemas.openxmlformats.org/officeDocument/2006/customXml" ds:itemID="{01EA9719-73E1-4AAC-90C2-9E9ED399E0F4}">
+<ds:datastoreItem xmlns:ds="http://schemas.openxmlformats.org/officeDocument/2006/customXml" ds:itemID="{236337B2-684D-4381-98D1-02BFB3997964}">
   <ds:schemaRefs>
-    <ds:schemaRef ds:uri="http://schemas.microsoft.com/sharepoint/v3/contenttype/forms"/>
+    <ds:schemaRef ds:uri="http://schemas.microsoft.com/office/2006/metadata/contentType"/>
+    <ds:schemaRef ds:uri="http://schemas.microsoft.com/office/2006/metadata/properties/metaAttributes"/>
+    <ds:schemaRef ds:uri="http://www.w3.org/2001/XMLSchema"/>
+    <ds:schemaRef ds:uri="http://schemas.microsoft.com/office/2006/metadata/properties"/>
+    <ds:schemaRef ds:uri="http://schemas.microsoft.com/sharepoint/v3"/>
+    <ds:schemaRef ds:uri="c55fcec3-bb2d-4ee6-a56c-bdfd532525fc"/>
+    <ds:schemaRef ds:uri="73c3c465-f3d4-4d37-9c58-e2ee535ad8e0"/>
+    <ds:schemaRef ds:uri="http://schemas.microsoft.com/office/2006/documentManagement/types"/>
+    <ds:schemaRef ds:uri="http://schemas.microsoft.com/office/infopath/2007/PartnerControls"/>
+    <ds:schemaRef ds:uri="http://schemas.openxmlformats.org/package/2006/metadata/core-properties"/>
+    <ds:schemaRef ds:uri="http://purl.org/dc/elements/1.1/"/>
+    <ds:schemaRef ds:uri="http://purl.org/dc/terms/"/>
+    <ds:schemaRef ds:uri="http://schemas.microsoft.com/internal/obd"/>
   </ds:schemaRefs>
 </ds:datastoreItem>
 </file>
@@ -9738,21 +10946,9 @@
 </file>
 
 <file path=customXml/itemProps3.xml><?xml version="1.0" encoding="utf-8"?>
-<ds:datastoreItem xmlns:ds="http://schemas.openxmlformats.org/officeDocument/2006/customXml" ds:itemID="{236337B2-684D-4381-98D1-02BFB3997964}">
+<ds:datastoreItem xmlns:ds="http://schemas.openxmlformats.org/officeDocument/2006/customXml" ds:itemID="{01EA9719-73E1-4AAC-90C2-9E9ED399E0F4}">
   <ds:schemaRefs>
-    <ds:schemaRef ds:uri="http://schemas.microsoft.com/office/2006/metadata/contentType"/>
-    <ds:schemaRef ds:uri="http://schemas.microsoft.com/office/2006/metadata/properties/metaAttributes"/>
-    <ds:schemaRef ds:uri="http://www.w3.org/2001/XMLSchema"/>
-    <ds:schemaRef ds:uri="http://schemas.microsoft.com/office/2006/metadata/properties"/>
-    <ds:schemaRef ds:uri="http://schemas.microsoft.com/sharepoint/v3"/>
-    <ds:schemaRef ds:uri="c55fcec3-bb2d-4ee6-a56c-bdfd532525fc"/>
-    <ds:schemaRef ds:uri="73c3c465-f3d4-4d37-9c58-e2ee535ad8e0"/>
-    <ds:schemaRef ds:uri="http://schemas.microsoft.com/office/2006/documentManagement/types"/>
-    <ds:schemaRef ds:uri="http://schemas.microsoft.com/office/infopath/2007/PartnerControls"/>
-    <ds:schemaRef ds:uri="http://schemas.openxmlformats.org/package/2006/metadata/core-properties"/>
-    <ds:schemaRef ds:uri="http://purl.org/dc/elements/1.1/"/>
-    <ds:schemaRef ds:uri="http://purl.org/dc/terms/"/>
-    <ds:schemaRef ds:uri="http://schemas.microsoft.com/internal/obd"/>
+    <ds:schemaRef ds:uri="http://schemas.microsoft.com/sharepoint/v3/contenttype/forms"/>
   </ds:schemaRefs>
 </ds:datastoreItem>
 </file>

--- a/07_presentations/razor-clam-sampling-design.pptx
+++ b/07_presentations/razor-clam-sampling-design.pptx
@@ -4,30 +4,33 @@
   <p:sldMasterIdLst>
     <p:sldMasterId id="2147483648" r:id="rId4"/>
   </p:sldMasterIdLst>
+  <p:notesMasterIdLst>
+    <p:notesMasterId r:id="rId25"/>
+  </p:notesMasterIdLst>
   <p:handoutMasterIdLst>
-    <p:handoutMasterId r:id="rId19"/>
+    <p:handoutMasterId r:id="rId26"/>
   </p:handoutMasterIdLst>
   <p:sldIdLst>
-    <p:sldId id="256" r:id="rId11"/>
-    <p:sldId id="257" r:id="rId13"/>
-    <p:sldId id="258" r:id="rId14"/>
-    <p:sldId id="259" r:id="rId15"/>
-    <p:sldId id="260" r:id="rId16"/>
-    <p:sldId id="261" r:id="rId17"/>
-    <p:sldId id="262" r:id="rId18"/>
-    <p:sldId id="263" r:id="rId10"/>
-    <p:sldId id="264" r:id="rId9"/>
-    <p:sldId id="265" r:id="rId8"/>
-    <p:sldId id="266" r:id="rId7"/>
-    <p:sldId id="267" r:id="rId6"/>
-    <p:sldId id="268" r:id="rId5"/>
-    <p:sldId id="269" r:id="rId25"/>
-    <p:sldId id="270" r:id="rId26"/>
-    <p:sldId id="271" r:id="rId27"/>
-    <p:sldId id="272" r:id="rId28"/>
-    <p:sldId id="273" r:id="rId29"/>
-    <p:sldId id="274" r:id="rId30"/>
-    <p:sldId id="275" r:id="rId31"/>
+    <p:sldId id="256" r:id="rId5"/>
+    <p:sldId id="257" r:id="rId6"/>
+    <p:sldId id="258" r:id="rId7"/>
+    <p:sldId id="259" r:id="rId8"/>
+    <p:sldId id="260" r:id="rId9"/>
+    <p:sldId id="261" r:id="rId10"/>
+    <p:sldId id="262" r:id="rId11"/>
+    <p:sldId id="263" r:id="rId12"/>
+    <p:sldId id="264" r:id="rId13"/>
+    <p:sldId id="265" r:id="rId14"/>
+    <p:sldId id="266" r:id="rId15"/>
+    <p:sldId id="267" r:id="rId16"/>
+    <p:sldId id="268" r:id="rId17"/>
+    <p:sldId id="269" r:id="rId18"/>
+    <p:sldId id="270" r:id="rId19"/>
+    <p:sldId id="271" r:id="rId20"/>
+    <p:sldId id="272" r:id="rId21"/>
+    <p:sldId id="273" r:id="rId22"/>
+    <p:sldId id="274" r:id="rId23"/>
+    <p:sldId id="275" r:id="rId24"/>
   </p:sldIdLst>
   <p:sldSz cx="12192000" cy="6858000"/>
   <p:notesSz cx="6858000" cy="9144000"/>
@@ -144,6 +147,50 @@
 </p188:authorLst>
 </file>
 
+<file path=ppt/changesInfos/changesInfo1.xml><?xml version="1.0" encoding="utf-8"?>
+<pc:chgInfo xmlns:a="http://schemas.openxmlformats.org/drawingml/2006/main" xmlns:r="http://schemas.openxmlformats.org/officeDocument/2006/relationships" xmlns:ac="http://schemas.microsoft.com/office/drawing/2013/main/command" xmlns:pc="http://schemas.microsoft.com/office/powerpoint/2013/main/command">
+  <pc:docChgLst>
+    <pc:chgData name="George, Matthew (DFW)" userId="8ba433ef-8e18-4348-89a6-fb3bb26ec9f1" providerId="ADAL" clId="{11FC2F9B-6E6E-4645-819B-98A64F5AF5DA}"/>
+    <pc:docChg chg="modSld">
+      <pc:chgData name="George, Matthew (DFW)" userId="8ba433ef-8e18-4348-89a6-fb3bb26ec9f1" providerId="ADAL" clId="{11FC2F9B-6E6E-4645-819B-98A64F5AF5DA}" dt="2026-07-13T19:26:03.258" v="1" actId="14100"/>
+      <pc:docMkLst>
+        <pc:docMk/>
+      </pc:docMkLst>
+      <pc:sldChg chg="modSp mod">
+        <pc:chgData name="George, Matthew (DFW)" userId="8ba433ef-8e18-4348-89a6-fb3bb26ec9f1" providerId="ADAL" clId="{11FC2F9B-6E6E-4645-819B-98A64F5AF5DA}" dt="2026-07-13T19:21:27.189" v="0" actId="404"/>
+        <pc:sldMkLst>
+          <pc:docMk/>
+          <pc:sldMk cId="0" sldId="264"/>
+        </pc:sldMkLst>
+        <pc:spChg chg="mod">
+          <ac:chgData name="George, Matthew (DFW)" userId="8ba433ef-8e18-4348-89a6-fb3bb26ec9f1" providerId="ADAL" clId="{11FC2F9B-6E6E-4645-819B-98A64F5AF5DA}" dt="2026-07-13T19:21:27.189" v="0" actId="404"/>
+          <ac:spMkLst>
+            <pc:docMk/>
+            <pc:sldMk cId="0" sldId="264"/>
+            <ac:spMk id="3" creationId="{00000000-0000-0000-0000-000000000000}"/>
+          </ac:spMkLst>
+        </pc:spChg>
+      </pc:sldChg>
+      <pc:sldChg chg="modSp mod">
+        <pc:chgData name="George, Matthew (DFW)" userId="8ba433ef-8e18-4348-89a6-fb3bb26ec9f1" providerId="ADAL" clId="{11FC2F9B-6E6E-4645-819B-98A64F5AF5DA}" dt="2026-07-13T19:26:03.258" v="1" actId="14100"/>
+        <pc:sldMkLst>
+          <pc:docMk/>
+          <pc:sldMk cId="0" sldId="273"/>
+        </pc:sldMkLst>
+        <pc:spChg chg="mod">
+          <ac:chgData name="George, Matthew (DFW)" userId="8ba433ef-8e18-4348-89a6-fb3bb26ec9f1" providerId="ADAL" clId="{11FC2F9B-6E6E-4645-819B-98A64F5AF5DA}" dt="2026-07-13T19:26:03.258" v="1" actId="14100"/>
+          <ac:spMkLst>
+            <pc:docMk/>
+            <pc:sldMk cId="0" sldId="273"/>
+            <ac:spMk id="3" creationId="{00000000-0000-0000-0000-000000000000}"/>
+          </ac:spMkLst>
+        </pc:spChg>
+      </pc:sldChg>
+    </pc:docChg>
+  </pc:docChgLst>
+</pc:chgInfo>
+</file>
+
 <file path=ppt/handoutMasters/handoutMaster1.xml><?xml version="1.0" encoding="utf-8"?>
 <p:handoutMaster xmlns:a="http://schemas.openxmlformats.org/drawingml/2006/main" xmlns:r="http://schemas.openxmlformats.org/officeDocument/2006/relationships" xmlns:p="http://schemas.openxmlformats.org/presentationml/2006/main">
   <p:cSld>
@@ -238,7 +285,7 @@
           <a:p>
             <a:fld id="{DAA1D058-9860-4C37-9D21-AC6EFE975A47}" type="datetimeFigureOut">
               <a:rPr lang="en-US" smtClean="0"/>
-              <a:t>3/12/2026</a:t>
+              <a:t>7/13/2026</a:t>
             </a:fld>
             <a:endParaRPr lang="en-US"/>
           </a:p>
@@ -334,7 +381,7 @@
 </file>
 
 <file path=ppt/notesMasters/notesMaster1.xml><?xml version="1.0" encoding="utf-8"?>
-<p:notesMaster xmlns:a="http://schemas.openxmlformats.org/drawingml/2006/main" xmlns:p="http://schemas.openxmlformats.org/presentationml/2006/main" xmlns:r="http://schemas.openxmlformats.org/officeDocument/2006/relationships">
+<p:notesMaster xmlns:a="http://schemas.openxmlformats.org/drawingml/2006/main" xmlns:r="http://schemas.openxmlformats.org/officeDocument/2006/relationships" xmlns:p="http://schemas.openxmlformats.org/presentationml/2006/main">
   <p:cSld>
     <p:bg>
       <p:bgRef idx="1001">
@@ -355,241 +402,16 @@
           <a:chExt cx="0" cy="0"/>
         </a:xfrm>
       </p:grpSpPr>
-      <p:sp>
-        <p:nvSpPr>
-          <p:cNvPr id="2" name="Header Placeholder 1"/>
-          <p:cNvSpPr>
-            <a:spLocks noGrp="1"/>
-          </p:cNvSpPr>
-          <p:nvPr>
-            <p:ph type="hdr" sz="quarter"/>
-          </p:nvPr>
-        </p:nvSpPr>
-        <p:spPr>
-          <a:xfrm>
-            <a:off x="0" y="0"/>
-            <a:ext cx="2971800" cy="457200"/>
-          </a:xfrm>
-          <a:prstGeom prst="rect">
-            <a:avLst/>
-          </a:prstGeom>
-        </p:spPr>
-        <p:txBody>
-          <a:bodyPr vert="horz" lIns="91440" tIns="45720" rIns="91440" bIns="45720" rtlCol="0"/>
-          <a:lstStyle>
-            <a:lvl1pPr algn="l">
-              <a:defRPr sz="1200"/>
-            </a:lvl1pPr>
-          </a:lstStyle>
-          <a:p>
-            <a:endParaRPr lang="en-US"/>
-          </a:p>
-        </p:txBody>
-      </p:sp>
-      <p:sp>
-        <p:nvSpPr>
-          <p:cNvPr id="3" name="Date Placeholder 2"/>
-          <p:cNvSpPr>
-            <a:spLocks noGrp="1"/>
-          </p:cNvSpPr>
-          <p:nvPr>
-            <p:ph type="dt" idx="1"/>
-          </p:nvPr>
-        </p:nvSpPr>
-        <p:spPr>
-          <a:xfrm>
-            <a:off x="3884613" y="0"/>
-            <a:ext cx="2971800" cy="457200"/>
-          </a:xfrm>
-          <a:prstGeom prst="rect">
-            <a:avLst/>
-          </a:prstGeom>
-        </p:spPr>
-        <p:txBody>
-          <a:bodyPr vert="horz" lIns="91440" tIns="45720" rIns="91440" bIns="45720" rtlCol="0"/>
-          <a:lstStyle>
-            <a:lvl1pPr algn="r">
-              <a:defRPr sz="1200"/>
-            </a:lvl1pPr>
-          </a:lstStyle>
-          <a:p>
-            <a:fld id="{0F89C1C7-3DCD-1040-A9CF-14679D8B5DDD}" type="datetimeFigureOut">
-              <a:rPr lang="en-US" smtClean="0"/>
-              <a:t>10/17/16</a:t>
-            </a:fld>
-            <a:endParaRPr lang="en-US"/>
-          </a:p>
-        </p:txBody>
-      </p:sp>
-      <p:sp>
-        <p:nvSpPr>
-          <p:cNvPr id="4" name="Slide Image Placeholder 3"/>
-          <p:cNvSpPr>
-            <a:spLocks noGrp="1" noRot="1" noChangeAspect="1"/>
-          </p:cNvSpPr>
-          <p:nvPr>
-            <p:ph type="sldImg" idx="2"/>
-          </p:nvPr>
-        </p:nvSpPr>
-        <p:spPr>
-          <a:xfrm>
-            <a:off x="1143000" y="685800"/>
-            <a:ext cx="4572000" cy="3429000"/>
-          </a:xfrm>
-          <a:prstGeom prst="rect">
-            <a:avLst/>
-          </a:prstGeom>
-          <a:noFill/>
-          <a:ln w="12700">
-            <a:solidFill>
-              <a:prstClr val="black"/>
-            </a:solidFill>
-          </a:ln>
-        </p:spPr>
-        <p:txBody>
-          <a:bodyPr vert="horz" lIns="91440" tIns="45720" rIns="91440" bIns="45720" rtlCol="0" anchor="ctr"/>
-          <a:lstStyle/>
-          <a:p>
-            <a:endParaRPr lang="en-US"/>
-          </a:p>
-        </p:txBody>
-      </p:sp>
-      <p:sp>
-        <p:nvSpPr>
-          <p:cNvPr id="5" name="Notes Placeholder 4"/>
-          <p:cNvSpPr>
-            <a:spLocks noGrp="1"/>
-          </p:cNvSpPr>
-          <p:nvPr>
-            <p:ph type="body" sz="quarter" idx="3"/>
-          </p:nvPr>
-        </p:nvSpPr>
-        <p:spPr>
-          <a:xfrm>
-            <a:off x="685800" y="4343400"/>
-            <a:ext cx="5486400" cy="4114800"/>
-          </a:xfrm>
-          <a:prstGeom prst="rect">
-            <a:avLst/>
-          </a:prstGeom>
-        </p:spPr>
-        <p:txBody>
-          <a:bodyPr vert="horz" lIns="91440" tIns="45720" rIns="91440" bIns="45720" rtlCol="0"/>
-          <a:lstStyle/>
-          <a:p>
-            <a:pPr lvl="0"/>
-            <a:r>
-              <a:rPr lang="en-US" smtClean="0"/>
-              <a:t>Click to edit Master text styles</a:t>
-            </a:r>
-          </a:p>
-          <a:p>
-            <a:pPr lvl="1"/>
-            <a:r>
-              <a:rPr lang="en-US" smtClean="0"/>
-              <a:t>Second level</a:t>
-            </a:r>
-          </a:p>
-          <a:p>
-            <a:pPr lvl="2"/>
-            <a:r>
-              <a:rPr lang="en-US" smtClean="0"/>
-              <a:t>Third level</a:t>
-            </a:r>
-          </a:p>
-          <a:p>
-            <a:pPr lvl="3"/>
-            <a:r>
-              <a:rPr lang="en-US" smtClean="0"/>
-              <a:t>Fourth level</a:t>
-            </a:r>
-          </a:p>
-          <a:p>
-            <a:pPr lvl="4"/>
-            <a:r>
-              <a:rPr lang="en-US" smtClean="0"/>
-              <a:t>Fifth level</a:t>
-            </a:r>
-            <a:endParaRPr lang="en-US"/>
-          </a:p>
-        </p:txBody>
-      </p:sp>
-      <p:sp>
-        <p:nvSpPr>
-          <p:cNvPr id="6" name="Footer Placeholder 5"/>
-          <p:cNvSpPr>
-            <a:spLocks noGrp="1"/>
-          </p:cNvSpPr>
-          <p:nvPr>
-            <p:ph type="ftr" sz="quarter" idx="4"/>
-          </p:nvPr>
-        </p:nvSpPr>
-        <p:spPr>
-          <a:xfrm>
-            <a:off x="0" y="8685213"/>
-            <a:ext cx="2971800" cy="457200"/>
-          </a:xfrm>
-          <a:prstGeom prst="rect">
-            <a:avLst/>
-          </a:prstGeom>
-        </p:spPr>
-        <p:txBody>
-          <a:bodyPr vert="horz" lIns="91440" tIns="45720" rIns="91440" bIns="45720" rtlCol="0" anchor="b"/>
-          <a:lstStyle>
-            <a:lvl1pPr algn="l">
-              <a:defRPr sz="1200"/>
-            </a:lvl1pPr>
-          </a:lstStyle>
-          <a:p>
-            <a:endParaRPr lang="en-US"/>
-          </a:p>
-        </p:txBody>
-      </p:sp>
-      <p:sp>
-        <p:nvSpPr>
-          <p:cNvPr id="7" name="Slide Number Placeholder 6"/>
-          <p:cNvSpPr>
-            <a:spLocks noGrp="1"/>
-          </p:cNvSpPr>
-          <p:nvPr>
-            <p:ph type="sldNum" sz="quarter" idx="5"/>
-          </p:nvPr>
-        </p:nvSpPr>
-        <p:spPr>
-          <a:xfrm>
-            <a:off x="3884613" y="8685213"/>
-            <a:ext cx="2971800" cy="457200"/>
-          </a:xfrm>
-          <a:prstGeom prst="rect">
-            <a:avLst/>
-          </a:prstGeom>
-        </p:spPr>
-        <p:txBody>
-          <a:bodyPr vert="horz" lIns="91440" tIns="45720" rIns="91440" bIns="45720" rtlCol="0" anchor="b"/>
-          <a:lstStyle>
-            <a:lvl1pPr algn="r">
-              <a:defRPr sz="1200"/>
-            </a:lvl1pPr>
-          </a:lstStyle>
-          <a:p>
-            <a:fld id="{BB5E49A5-4136-284D-997B-48E1D791AD67}" type="slidenum">
-              <a:rPr lang="en-US" smtClean="0"/>
-              <a:t>‹#›</a:t>
-            </a:fld>
-            <a:endParaRPr lang="en-US"/>
-          </a:p>
-        </p:txBody>
-      </p:sp>
     </p:spTree>
     <p:extLst>
       <p:ext uri="{BB962C8B-B14F-4D97-AF65-F5344CB8AC3E}">
-        <p14:creationId xmlns:p14="http://schemas.microsoft.com/office/powerpoint/2010/main" val="2623252185"/>
+        <p14:creationId xmlns:p14="http://schemas.microsoft.com/office/powerpoint/2010/main" val="1432836530"/>
       </p:ext>
     </p:extLst>
   </p:cSld>
   <p:clrMap bg1="lt1" tx1="dk1" bg2="lt2" tx2="dk2" accent1="accent1" accent2="accent2" accent3="accent3" accent4="accent4" accent5="accent5" accent6="accent6" hlink="hlink" folHlink="folHlink"/>
   <p:notesStyle>
-    <a:lvl1pPr marL="0" algn="l" defTabSz="457200" rtl="0" eaLnBrk="1" latinLnBrk="0" hangingPunct="1">
+    <a:lvl1pPr marL="0" algn="l" defTabSz="914400" rtl="0" eaLnBrk="1" latinLnBrk="0" hangingPunct="1">
       <a:defRPr sz="1200" kern="1200">
         <a:solidFill>
           <a:schemeClr val="tx1"/>
@@ -599,7 +421,7 @@
         <a:cs typeface="+mn-cs"/>
       </a:defRPr>
     </a:lvl1pPr>
-    <a:lvl2pPr marL="457200" algn="l" defTabSz="457200" rtl="0" eaLnBrk="1" latinLnBrk="0" hangingPunct="1">
+    <a:lvl2pPr marL="457200" algn="l" defTabSz="914400" rtl="0" eaLnBrk="1" latinLnBrk="0" hangingPunct="1">
       <a:defRPr sz="1200" kern="1200">
         <a:solidFill>
           <a:schemeClr val="tx1"/>
@@ -609,7 +431,7 @@
         <a:cs typeface="+mn-cs"/>
       </a:defRPr>
     </a:lvl2pPr>
-    <a:lvl3pPr marL="914400" algn="l" defTabSz="457200" rtl="0" eaLnBrk="1" latinLnBrk="0" hangingPunct="1">
+    <a:lvl3pPr marL="914400" algn="l" defTabSz="914400" rtl="0" eaLnBrk="1" latinLnBrk="0" hangingPunct="1">
       <a:defRPr sz="1200" kern="1200">
         <a:solidFill>
           <a:schemeClr val="tx1"/>
@@ -619,7 +441,7 @@
         <a:cs typeface="+mn-cs"/>
       </a:defRPr>
     </a:lvl3pPr>
-    <a:lvl4pPr marL="1371600" algn="l" defTabSz="457200" rtl="0" eaLnBrk="1" latinLnBrk="0" hangingPunct="1">
+    <a:lvl4pPr marL="1371600" algn="l" defTabSz="914400" rtl="0" eaLnBrk="1" latinLnBrk="0" hangingPunct="1">
       <a:defRPr sz="1200" kern="1200">
         <a:solidFill>
           <a:schemeClr val="tx1"/>
@@ -629,7 +451,7 @@
         <a:cs typeface="+mn-cs"/>
       </a:defRPr>
     </a:lvl4pPr>
-    <a:lvl5pPr marL="1828800" algn="l" defTabSz="457200" rtl="0" eaLnBrk="1" latinLnBrk="0" hangingPunct="1">
+    <a:lvl5pPr marL="1828800" algn="l" defTabSz="914400" rtl="0" eaLnBrk="1" latinLnBrk="0" hangingPunct="1">
       <a:defRPr sz="1200" kern="1200">
         <a:solidFill>
           <a:schemeClr val="tx1"/>
@@ -639,7 +461,7 @@
         <a:cs typeface="+mn-cs"/>
       </a:defRPr>
     </a:lvl5pPr>
-    <a:lvl6pPr marL="2286000" algn="l" defTabSz="457200" rtl="0" eaLnBrk="1" latinLnBrk="0" hangingPunct="1">
+    <a:lvl6pPr marL="2286000" algn="l" defTabSz="914400" rtl="0" eaLnBrk="1" latinLnBrk="0" hangingPunct="1">
       <a:defRPr sz="1200" kern="1200">
         <a:solidFill>
           <a:schemeClr val="tx1"/>
@@ -649,7 +471,7 @@
         <a:cs typeface="+mn-cs"/>
       </a:defRPr>
     </a:lvl6pPr>
-    <a:lvl7pPr marL="2743200" algn="l" defTabSz="457200" rtl="0" eaLnBrk="1" latinLnBrk="0" hangingPunct="1">
+    <a:lvl7pPr marL="2743200" algn="l" defTabSz="914400" rtl="0" eaLnBrk="1" latinLnBrk="0" hangingPunct="1">
       <a:defRPr sz="1200" kern="1200">
         <a:solidFill>
           <a:schemeClr val="tx1"/>
@@ -659,7 +481,7 @@
         <a:cs typeface="+mn-cs"/>
       </a:defRPr>
     </a:lvl7pPr>
-    <a:lvl8pPr marL="3200400" algn="l" defTabSz="457200" rtl="0" eaLnBrk="1" latinLnBrk="0" hangingPunct="1">
+    <a:lvl8pPr marL="3200400" algn="l" defTabSz="914400" rtl="0" eaLnBrk="1" latinLnBrk="0" hangingPunct="1">
       <a:defRPr sz="1200" kern="1200">
         <a:solidFill>
           <a:schemeClr val="tx1"/>
@@ -669,7 +491,7 @@
         <a:cs typeface="+mn-cs"/>
       </a:defRPr>
     </a:lvl8pPr>
-    <a:lvl9pPr marL="3657600" algn="l" defTabSz="457200" rtl="0" eaLnBrk="1" latinLnBrk="0" hangingPunct="1">
+    <a:lvl9pPr marL="3657600" algn="l" defTabSz="914400" rtl="0" eaLnBrk="1" latinLnBrk="0" hangingPunct="1">
       <a:defRPr sz="1200" kern="1200">
         <a:solidFill>
           <a:schemeClr val="tx1"/>
@@ -684,7 +506,7 @@
 </file>
 
 <file path=ppt/notesSlides/notesSlide1.xml><?xml version="1.0" encoding="utf-8"?>
-<p:notes xmlns:a="http://schemas.openxmlformats.org/drawingml/2006/main" xmlns:p="http://schemas.openxmlformats.org/presentationml/2006/main" xmlns:r="http://schemas.openxmlformats.org/officeDocument/2006/relationships">
+<p:notes xmlns:a="http://schemas.openxmlformats.org/drawingml/2006/main" xmlns:r="http://schemas.openxmlformats.org/officeDocument/2006/relationships" xmlns:p="http://schemas.openxmlformats.org/presentationml/2006/main">
   <p:cSld>
     <p:spTree>
       <p:nvGrpSpPr>
@@ -704,7 +526,7 @@
         <p:nvSpPr>
           <p:cNvPr id="2" name="Slide Image Placeholder 1"/>
           <p:cNvSpPr>
-            <a:spLocks noGrp="1"/>
+            <a:spLocks noGrp="1" noRot="1" noChangeAspect="1"/>
           </p:cNvSpPr>
           <p:nvPr>
             <p:ph type="sldImg" idx="2"/>
@@ -719,7 +541,7 @@
             <a:spLocks noGrp="1"/>
           </p:cNvSpPr>
           <p:nvPr>
-            <p:ph type="body" idx="3" sz="quarter"/>
+            <p:ph type="body" sz="quarter" idx="3"/>
           </p:nvPr>
         </p:nvSpPr>
         <p:spPr/>
@@ -740,7 +562,7 @@
             <a:spLocks noGrp="1"/>
           </p:cNvSpPr>
           <p:nvPr>
-            <p:ph type="sldNum" idx="5" sz="quarter"/>
+            <p:ph type="sldNum" sz="quarter" idx="5"/>
           </p:nvPr>
         </p:nvSpPr>
         <p:spPr/>
@@ -754,7 +576,7 @@
 </file>
 
 <file path=ppt/notesSlides/notesSlide10.xml><?xml version="1.0" encoding="utf-8"?>
-<p:notes xmlns:a="http://schemas.openxmlformats.org/drawingml/2006/main" xmlns:p="http://schemas.openxmlformats.org/presentationml/2006/main" xmlns:r="http://schemas.openxmlformats.org/officeDocument/2006/relationships">
+<p:notes xmlns:a="http://schemas.openxmlformats.org/drawingml/2006/main" xmlns:r="http://schemas.openxmlformats.org/officeDocument/2006/relationships" xmlns:p="http://schemas.openxmlformats.org/presentationml/2006/main">
   <p:cSld>
     <p:spTree>
       <p:nvGrpSpPr>
@@ -774,7 +596,7 @@
         <p:nvSpPr>
           <p:cNvPr id="2" name="Slide Image Placeholder 1"/>
           <p:cNvSpPr>
-            <a:spLocks noGrp="1"/>
+            <a:spLocks noGrp="1" noRot="1" noChangeAspect="1"/>
           </p:cNvSpPr>
           <p:nvPr>
             <p:ph type="sldImg" idx="2"/>
@@ -789,7 +611,7 @@
             <a:spLocks noGrp="1"/>
           </p:cNvSpPr>
           <p:nvPr>
-            <p:ph type="body" idx="3" sz="quarter"/>
+            <p:ph type="body" sz="quarter" idx="3"/>
           </p:nvPr>
         </p:nvSpPr>
         <p:spPr/>
@@ -810,7 +632,7 @@
             <a:spLocks noGrp="1"/>
           </p:cNvSpPr>
           <p:nvPr>
-            <p:ph type="sldNum" idx="5" sz="quarter"/>
+            <p:ph type="sldNum" sz="quarter" idx="5"/>
           </p:nvPr>
         </p:nvSpPr>
         <p:spPr/>
@@ -824,7 +646,7 @@
 </file>
 
 <file path=ppt/notesSlides/notesSlide11.xml><?xml version="1.0" encoding="utf-8"?>
-<p:notes xmlns:a="http://schemas.openxmlformats.org/drawingml/2006/main" xmlns:p="http://schemas.openxmlformats.org/presentationml/2006/main" xmlns:r="http://schemas.openxmlformats.org/officeDocument/2006/relationships">
+<p:notes xmlns:a="http://schemas.openxmlformats.org/drawingml/2006/main" xmlns:r="http://schemas.openxmlformats.org/officeDocument/2006/relationships" xmlns:p="http://schemas.openxmlformats.org/presentationml/2006/main">
   <p:cSld>
     <p:spTree>
       <p:nvGrpSpPr>
@@ -844,7 +666,7 @@
         <p:nvSpPr>
           <p:cNvPr id="2" name="Slide Image Placeholder 1"/>
           <p:cNvSpPr>
-            <a:spLocks noGrp="1"/>
+            <a:spLocks noGrp="1" noRot="1" noChangeAspect="1"/>
           </p:cNvSpPr>
           <p:nvPr>
             <p:ph type="sldImg" idx="2"/>
@@ -859,7 +681,7 @@
             <a:spLocks noGrp="1"/>
           </p:cNvSpPr>
           <p:nvPr>
-            <p:ph type="body" idx="3" sz="quarter"/>
+            <p:ph type="body" sz="quarter" idx="3"/>
           </p:nvPr>
         </p:nvSpPr>
         <p:spPr/>
@@ -880,7 +702,7 @@
             <a:spLocks noGrp="1"/>
           </p:cNvSpPr>
           <p:nvPr>
-            <p:ph type="sldNum" idx="5" sz="quarter"/>
+            <p:ph type="sldNum" sz="quarter" idx="5"/>
           </p:nvPr>
         </p:nvSpPr>
         <p:spPr/>
@@ -894,7 +716,7 @@
 </file>
 
 <file path=ppt/notesSlides/notesSlide12.xml><?xml version="1.0" encoding="utf-8"?>
-<p:notes xmlns:a="http://schemas.openxmlformats.org/drawingml/2006/main" xmlns:p="http://schemas.openxmlformats.org/presentationml/2006/main" xmlns:r="http://schemas.openxmlformats.org/officeDocument/2006/relationships">
+<p:notes xmlns:a="http://schemas.openxmlformats.org/drawingml/2006/main" xmlns:r="http://schemas.openxmlformats.org/officeDocument/2006/relationships" xmlns:p="http://schemas.openxmlformats.org/presentationml/2006/main">
   <p:cSld>
     <p:spTree>
       <p:nvGrpSpPr>
@@ -914,7 +736,7 @@
         <p:nvSpPr>
           <p:cNvPr id="2" name="Slide Image Placeholder 1"/>
           <p:cNvSpPr>
-            <a:spLocks noGrp="1"/>
+            <a:spLocks noGrp="1" noRot="1" noChangeAspect="1"/>
           </p:cNvSpPr>
           <p:nvPr>
             <p:ph type="sldImg" idx="2"/>
@@ -929,7 +751,7 @@
             <a:spLocks noGrp="1"/>
           </p:cNvSpPr>
           <p:nvPr>
-            <p:ph type="body" idx="3" sz="quarter"/>
+            <p:ph type="body" sz="quarter" idx="3"/>
           </p:nvPr>
         </p:nvSpPr>
         <p:spPr/>
@@ -950,7 +772,7 @@
             <a:spLocks noGrp="1"/>
           </p:cNvSpPr>
           <p:nvPr>
-            <p:ph type="sldNum" idx="5" sz="quarter"/>
+            <p:ph type="sldNum" sz="quarter" idx="5"/>
           </p:nvPr>
         </p:nvSpPr>
         <p:spPr/>
@@ -964,7 +786,7 @@
 </file>
 
 <file path=ppt/notesSlides/notesSlide13.xml><?xml version="1.0" encoding="utf-8"?>
-<p:notes xmlns:a="http://schemas.openxmlformats.org/drawingml/2006/main" xmlns:p="http://schemas.openxmlformats.org/presentationml/2006/main" xmlns:r="http://schemas.openxmlformats.org/officeDocument/2006/relationships">
+<p:notes xmlns:a="http://schemas.openxmlformats.org/drawingml/2006/main" xmlns:r="http://schemas.openxmlformats.org/officeDocument/2006/relationships" xmlns:p="http://schemas.openxmlformats.org/presentationml/2006/main">
   <p:cSld>
     <p:spTree>
       <p:nvGrpSpPr>
@@ -984,7 +806,7 @@
         <p:nvSpPr>
           <p:cNvPr id="2" name="Slide Image Placeholder 1"/>
           <p:cNvSpPr>
-            <a:spLocks noGrp="1"/>
+            <a:spLocks noGrp="1" noRot="1" noChangeAspect="1"/>
           </p:cNvSpPr>
           <p:nvPr>
             <p:ph type="sldImg" idx="2"/>
@@ -999,7 +821,7 @@
             <a:spLocks noGrp="1"/>
           </p:cNvSpPr>
           <p:nvPr>
-            <p:ph type="body" idx="3" sz="quarter"/>
+            <p:ph type="body" sz="quarter" idx="3"/>
           </p:nvPr>
         </p:nvSpPr>
         <p:spPr/>
@@ -1020,7 +842,7 @@
             <a:spLocks noGrp="1"/>
           </p:cNvSpPr>
           <p:nvPr>
-            <p:ph type="sldNum" idx="5" sz="quarter"/>
+            <p:ph type="sldNum" sz="quarter" idx="5"/>
           </p:nvPr>
         </p:nvSpPr>
         <p:spPr/>
@@ -1034,7 +856,7 @@
 </file>
 
 <file path=ppt/notesSlides/notesSlide14.xml><?xml version="1.0" encoding="utf-8"?>
-<p:notes xmlns:a="http://schemas.openxmlformats.org/drawingml/2006/main" xmlns:p="http://schemas.openxmlformats.org/presentationml/2006/main" xmlns:r="http://schemas.openxmlformats.org/officeDocument/2006/relationships">
+<p:notes xmlns:a="http://schemas.openxmlformats.org/drawingml/2006/main" xmlns:r="http://schemas.openxmlformats.org/officeDocument/2006/relationships" xmlns:p="http://schemas.openxmlformats.org/presentationml/2006/main">
   <p:cSld>
     <p:spTree>
       <p:nvGrpSpPr>
@@ -1054,7 +876,7 @@
         <p:nvSpPr>
           <p:cNvPr id="2" name="Slide Image Placeholder 1"/>
           <p:cNvSpPr>
-            <a:spLocks noGrp="1"/>
+            <a:spLocks noGrp="1" noRot="1" noChangeAspect="1"/>
           </p:cNvSpPr>
           <p:nvPr>
             <p:ph type="sldImg" idx="2"/>
@@ -1069,7 +891,7 @@
             <a:spLocks noGrp="1"/>
           </p:cNvSpPr>
           <p:nvPr>
-            <p:ph type="body" idx="3" sz="quarter"/>
+            <p:ph type="body" sz="quarter" idx="3"/>
           </p:nvPr>
         </p:nvSpPr>
         <p:spPr/>
@@ -1090,7 +912,7 @@
             <a:spLocks noGrp="1"/>
           </p:cNvSpPr>
           <p:nvPr>
-            <p:ph type="sldNum" idx="5" sz="quarter"/>
+            <p:ph type="sldNum" sz="quarter" idx="5"/>
           </p:nvPr>
         </p:nvSpPr>
         <p:spPr/>
@@ -1104,7 +926,7 @@
 </file>
 
 <file path=ppt/notesSlides/notesSlide15.xml><?xml version="1.0" encoding="utf-8"?>
-<p:notes xmlns:a="http://schemas.openxmlformats.org/drawingml/2006/main" xmlns:p="http://schemas.openxmlformats.org/presentationml/2006/main" xmlns:r="http://schemas.openxmlformats.org/officeDocument/2006/relationships">
+<p:notes xmlns:a="http://schemas.openxmlformats.org/drawingml/2006/main" xmlns:r="http://schemas.openxmlformats.org/officeDocument/2006/relationships" xmlns:p="http://schemas.openxmlformats.org/presentationml/2006/main">
   <p:cSld>
     <p:spTree>
       <p:nvGrpSpPr>
@@ -1124,7 +946,7 @@
         <p:nvSpPr>
           <p:cNvPr id="2" name="Slide Image Placeholder 1"/>
           <p:cNvSpPr>
-            <a:spLocks noGrp="1"/>
+            <a:spLocks noGrp="1" noRot="1" noChangeAspect="1"/>
           </p:cNvSpPr>
           <p:nvPr>
             <p:ph type="sldImg" idx="2"/>
@@ -1139,7 +961,7 @@
             <a:spLocks noGrp="1"/>
           </p:cNvSpPr>
           <p:nvPr>
-            <p:ph type="body" idx="3" sz="quarter"/>
+            <p:ph type="body" sz="quarter" idx="3"/>
           </p:nvPr>
         </p:nvSpPr>
         <p:spPr/>
@@ -1160,7 +982,7 @@
             <a:spLocks noGrp="1"/>
           </p:cNvSpPr>
           <p:nvPr>
-            <p:ph type="sldNum" idx="5" sz="quarter"/>
+            <p:ph type="sldNum" sz="quarter" idx="5"/>
           </p:nvPr>
         </p:nvSpPr>
         <p:spPr/>
@@ -1174,7 +996,7 @@
 </file>
 
 <file path=ppt/notesSlides/notesSlide2.xml><?xml version="1.0" encoding="utf-8"?>
-<p:notes xmlns:a="http://schemas.openxmlformats.org/drawingml/2006/main" xmlns:p="http://schemas.openxmlformats.org/presentationml/2006/main" xmlns:r="http://schemas.openxmlformats.org/officeDocument/2006/relationships">
+<p:notes xmlns:a="http://schemas.openxmlformats.org/drawingml/2006/main" xmlns:r="http://schemas.openxmlformats.org/officeDocument/2006/relationships" xmlns:p="http://schemas.openxmlformats.org/presentationml/2006/main">
   <p:cSld>
     <p:spTree>
       <p:nvGrpSpPr>
@@ -1194,7 +1016,7 @@
         <p:nvSpPr>
           <p:cNvPr id="2" name="Slide Image Placeholder 1"/>
           <p:cNvSpPr>
-            <a:spLocks noGrp="1"/>
+            <a:spLocks noGrp="1" noRot="1" noChangeAspect="1"/>
           </p:cNvSpPr>
           <p:nvPr>
             <p:ph type="sldImg" idx="2"/>
@@ -1209,7 +1031,7 @@
             <a:spLocks noGrp="1"/>
           </p:cNvSpPr>
           <p:nvPr>
-            <p:ph type="body" idx="3" sz="quarter"/>
+            <p:ph type="body" sz="quarter" idx="3"/>
           </p:nvPr>
         </p:nvSpPr>
         <p:spPr/>
@@ -1230,7 +1052,7 @@
             <a:spLocks noGrp="1"/>
           </p:cNvSpPr>
           <p:nvPr>
-            <p:ph type="sldNum" idx="5" sz="quarter"/>
+            <p:ph type="sldNum" sz="quarter" idx="5"/>
           </p:nvPr>
         </p:nvSpPr>
         <p:spPr/>
@@ -1244,7 +1066,7 @@
 </file>
 
 <file path=ppt/notesSlides/notesSlide3.xml><?xml version="1.0" encoding="utf-8"?>
-<p:notes xmlns:a="http://schemas.openxmlformats.org/drawingml/2006/main" xmlns:p="http://schemas.openxmlformats.org/presentationml/2006/main" xmlns:r="http://schemas.openxmlformats.org/officeDocument/2006/relationships">
+<p:notes xmlns:a="http://schemas.openxmlformats.org/drawingml/2006/main" xmlns:r="http://schemas.openxmlformats.org/officeDocument/2006/relationships" xmlns:p="http://schemas.openxmlformats.org/presentationml/2006/main">
   <p:cSld>
     <p:spTree>
       <p:nvGrpSpPr>
@@ -1264,7 +1086,7 @@
         <p:nvSpPr>
           <p:cNvPr id="2" name="Slide Image Placeholder 1"/>
           <p:cNvSpPr>
-            <a:spLocks noGrp="1"/>
+            <a:spLocks noGrp="1" noRot="1" noChangeAspect="1"/>
           </p:cNvSpPr>
           <p:nvPr>
             <p:ph type="sldImg" idx="2"/>
@@ -1279,7 +1101,7 @@
             <a:spLocks noGrp="1"/>
           </p:cNvSpPr>
           <p:nvPr>
-            <p:ph type="body" idx="3" sz="quarter"/>
+            <p:ph type="body" sz="quarter" idx="3"/>
           </p:nvPr>
         </p:nvSpPr>
         <p:spPr/>
@@ -1300,7 +1122,7 @@
             <a:spLocks noGrp="1"/>
           </p:cNvSpPr>
           <p:nvPr>
-            <p:ph type="sldNum" idx="5" sz="quarter"/>
+            <p:ph type="sldNum" sz="quarter" idx="5"/>
           </p:nvPr>
         </p:nvSpPr>
         <p:spPr/>
@@ -1314,7 +1136,7 @@
 </file>
 
 <file path=ppt/notesSlides/notesSlide4.xml><?xml version="1.0" encoding="utf-8"?>
-<p:notes xmlns:a="http://schemas.openxmlformats.org/drawingml/2006/main" xmlns:p="http://schemas.openxmlformats.org/presentationml/2006/main" xmlns:r="http://schemas.openxmlformats.org/officeDocument/2006/relationships">
+<p:notes xmlns:a="http://schemas.openxmlformats.org/drawingml/2006/main" xmlns:r="http://schemas.openxmlformats.org/officeDocument/2006/relationships" xmlns:p="http://schemas.openxmlformats.org/presentationml/2006/main">
   <p:cSld>
     <p:spTree>
       <p:nvGrpSpPr>
@@ -1334,7 +1156,7 @@
         <p:nvSpPr>
           <p:cNvPr id="2" name="Slide Image Placeholder 1"/>
           <p:cNvSpPr>
-            <a:spLocks noGrp="1"/>
+            <a:spLocks noGrp="1" noRot="1" noChangeAspect="1"/>
           </p:cNvSpPr>
           <p:nvPr>
             <p:ph type="sldImg" idx="2"/>
@@ -1349,7 +1171,7 @@
             <a:spLocks noGrp="1"/>
           </p:cNvSpPr>
           <p:nvPr>
-            <p:ph type="body" idx="3" sz="quarter"/>
+            <p:ph type="body" sz="quarter" idx="3"/>
           </p:nvPr>
         </p:nvSpPr>
         <p:spPr/>
@@ -1370,7 +1192,7 @@
             <a:spLocks noGrp="1"/>
           </p:cNvSpPr>
           <p:nvPr>
-            <p:ph type="sldNum" idx="5" sz="quarter"/>
+            <p:ph type="sldNum" sz="quarter" idx="5"/>
           </p:nvPr>
         </p:nvSpPr>
         <p:spPr/>
@@ -1384,7 +1206,7 @@
 </file>
 
 <file path=ppt/notesSlides/notesSlide5.xml><?xml version="1.0" encoding="utf-8"?>
-<p:notes xmlns:a="http://schemas.openxmlformats.org/drawingml/2006/main" xmlns:p="http://schemas.openxmlformats.org/presentationml/2006/main" xmlns:r="http://schemas.openxmlformats.org/officeDocument/2006/relationships">
+<p:notes xmlns:a="http://schemas.openxmlformats.org/drawingml/2006/main" xmlns:r="http://schemas.openxmlformats.org/officeDocument/2006/relationships" xmlns:p="http://schemas.openxmlformats.org/presentationml/2006/main">
   <p:cSld>
     <p:spTree>
       <p:nvGrpSpPr>
@@ -1404,7 +1226,7 @@
         <p:nvSpPr>
           <p:cNvPr id="2" name="Slide Image Placeholder 1"/>
           <p:cNvSpPr>
-            <a:spLocks noGrp="1"/>
+            <a:spLocks noGrp="1" noRot="1" noChangeAspect="1"/>
           </p:cNvSpPr>
           <p:nvPr>
             <p:ph type="sldImg" idx="2"/>
@@ -1419,7 +1241,7 @@
             <a:spLocks noGrp="1"/>
           </p:cNvSpPr>
           <p:nvPr>
-            <p:ph type="body" idx="3" sz="quarter"/>
+            <p:ph type="body" sz="quarter" idx="3"/>
           </p:nvPr>
         </p:nvSpPr>
         <p:spPr/>
@@ -1440,7 +1262,7 @@
             <a:spLocks noGrp="1"/>
           </p:cNvSpPr>
           <p:nvPr>
-            <p:ph type="sldNum" idx="5" sz="quarter"/>
+            <p:ph type="sldNum" sz="quarter" idx="5"/>
           </p:nvPr>
         </p:nvSpPr>
         <p:spPr/>
@@ -1454,7 +1276,7 @@
 </file>
 
 <file path=ppt/notesSlides/notesSlide6.xml><?xml version="1.0" encoding="utf-8"?>
-<p:notes xmlns:a="http://schemas.openxmlformats.org/drawingml/2006/main" xmlns:p="http://schemas.openxmlformats.org/presentationml/2006/main" xmlns:r="http://schemas.openxmlformats.org/officeDocument/2006/relationships">
+<p:notes xmlns:a="http://schemas.openxmlformats.org/drawingml/2006/main" xmlns:r="http://schemas.openxmlformats.org/officeDocument/2006/relationships" xmlns:p="http://schemas.openxmlformats.org/presentationml/2006/main">
   <p:cSld>
     <p:spTree>
       <p:nvGrpSpPr>
@@ -1474,7 +1296,7 @@
         <p:nvSpPr>
           <p:cNvPr id="2" name="Slide Image Placeholder 1"/>
           <p:cNvSpPr>
-            <a:spLocks noGrp="1"/>
+            <a:spLocks noGrp="1" noRot="1" noChangeAspect="1"/>
           </p:cNvSpPr>
           <p:nvPr>
             <p:ph type="sldImg" idx="2"/>
@@ -1489,7 +1311,7 @@
             <a:spLocks noGrp="1"/>
           </p:cNvSpPr>
           <p:nvPr>
-            <p:ph type="body" idx="3" sz="quarter"/>
+            <p:ph type="body" sz="quarter" idx="3"/>
           </p:nvPr>
         </p:nvSpPr>
         <p:spPr/>
@@ -1510,7 +1332,7 @@
             <a:spLocks noGrp="1"/>
           </p:cNvSpPr>
           <p:nvPr>
-            <p:ph type="sldNum" idx="5" sz="quarter"/>
+            <p:ph type="sldNum" sz="quarter" idx="5"/>
           </p:nvPr>
         </p:nvSpPr>
         <p:spPr/>
@@ -1524,7 +1346,7 @@
 </file>
 
 <file path=ppt/notesSlides/notesSlide7.xml><?xml version="1.0" encoding="utf-8"?>
-<p:notes xmlns:a="http://schemas.openxmlformats.org/drawingml/2006/main" xmlns:p="http://schemas.openxmlformats.org/presentationml/2006/main" xmlns:r="http://schemas.openxmlformats.org/officeDocument/2006/relationships">
+<p:notes xmlns:a="http://schemas.openxmlformats.org/drawingml/2006/main" xmlns:r="http://schemas.openxmlformats.org/officeDocument/2006/relationships" xmlns:p="http://schemas.openxmlformats.org/presentationml/2006/main">
   <p:cSld>
     <p:spTree>
       <p:nvGrpSpPr>
@@ -1544,7 +1366,7 @@
         <p:nvSpPr>
           <p:cNvPr id="2" name="Slide Image Placeholder 1"/>
           <p:cNvSpPr>
-            <a:spLocks noGrp="1"/>
+            <a:spLocks noGrp="1" noRot="1" noChangeAspect="1"/>
           </p:cNvSpPr>
           <p:nvPr>
             <p:ph type="sldImg" idx="2"/>
@@ -1559,7 +1381,7 @@
             <a:spLocks noGrp="1"/>
           </p:cNvSpPr>
           <p:nvPr>
-            <p:ph type="body" idx="3" sz="quarter"/>
+            <p:ph type="body" sz="quarter" idx="3"/>
           </p:nvPr>
         </p:nvSpPr>
         <p:spPr/>
@@ -1580,7 +1402,7 @@
             <a:spLocks noGrp="1"/>
           </p:cNvSpPr>
           <p:nvPr>
-            <p:ph type="sldNum" idx="5" sz="quarter"/>
+            <p:ph type="sldNum" sz="quarter" idx="5"/>
           </p:nvPr>
         </p:nvSpPr>
         <p:spPr/>
@@ -1594,7 +1416,7 @@
 </file>
 
 <file path=ppt/notesSlides/notesSlide8.xml><?xml version="1.0" encoding="utf-8"?>
-<p:notes xmlns:a="http://schemas.openxmlformats.org/drawingml/2006/main" xmlns:p="http://schemas.openxmlformats.org/presentationml/2006/main" xmlns:r="http://schemas.openxmlformats.org/officeDocument/2006/relationships">
+<p:notes xmlns:a="http://schemas.openxmlformats.org/drawingml/2006/main" xmlns:r="http://schemas.openxmlformats.org/officeDocument/2006/relationships" xmlns:p="http://schemas.openxmlformats.org/presentationml/2006/main">
   <p:cSld>
     <p:spTree>
       <p:nvGrpSpPr>
@@ -1614,7 +1436,7 @@
         <p:nvSpPr>
           <p:cNvPr id="2" name="Slide Image Placeholder 1"/>
           <p:cNvSpPr>
-            <a:spLocks noGrp="1"/>
+            <a:spLocks noGrp="1" noRot="1" noChangeAspect="1"/>
           </p:cNvSpPr>
           <p:nvPr>
             <p:ph type="sldImg" idx="2"/>
@@ -1629,7 +1451,7 @@
             <a:spLocks noGrp="1"/>
           </p:cNvSpPr>
           <p:nvPr>
-            <p:ph type="body" idx="3" sz="quarter"/>
+            <p:ph type="body" sz="quarter" idx="3"/>
           </p:nvPr>
         </p:nvSpPr>
         <p:spPr/>
@@ -1650,7 +1472,7 @@
             <a:spLocks noGrp="1"/>
           </p:cNvSpPr>
           <p:nvPr>
-            <p:ph type="sldNum" idx="5" sz="quarter"/>
+            <p:ph type="sldNum" sz="quarter" idx="5"/>
           </p:nvPr>
         </p:nvSpPr>
         <p:spPr/>
@@ -1664,7 +1486,7 @@
 </file>
 
 <file path=ppt/notesSlides/notesSlide9.xml><?xml version="1.0" encoding="utf-8"?>
-<p:notes xmlns:a="http://schemas.openxmlformats.org/drawingml/2006/main" xmlns:p="http://schemas.openxmlformats.org/presentationml/2006/main" xmlns:r="http://schemas.openxmlformats.org/officeDocument/2006/relationships">
+<p:notes xmlns:a="http://schemas.openxmlformats.org/drawingml/2006/main" xmlns:r="http://schemas.openxmlformats.org/officeDocument/2006/relationships" xmlns:p="http://schemas.openxmlformats.org/presentationml/2006/main">
   <p:cSld>
     <p:spTree>
       <p:nvGrpSpPr>
@@ -1684,7 +1506,7 @@
         <p:nvSpPr>
           <p:cNvPr id="2" name="Slide Image Placeholder 1"/>
           <p:cNvSpPr>
-            <a:spLocks noGrp="1"/>
+            <a:spLocks noGrp="1" noRot="1" noChangeAspect="1"/>
           </p:cNvSpPr>
           <p:nvPr>
             <p:ph type="sldImg" idx="2"/>
@@ -1699,7 +1521,7 @@
             <a:spLocks noGrp="1"/>
           </p:cNvSpPr>
           <p:nvPr>
-            <p:ph type="body" idx="3" sz="quarter"/>
+            <p:ph type="body" sz="quarter" idx="3"/>
           </p:nvPr>
         </p:nvSpPr>
         <p:spPr/>
@@ -1720,7 +1542,7 @@
             <a:spLocks noGrp="1"/>
           </p:cNvSpPr>
           <p:nvPr>
-            <p:ph type="sldNum" idx="5" sz="quarter"/>
+            <p:ph type="sldNum" sz="quarter" idx="5"/>
           </p:nvPr>
         </p:nvSpPr>
         <p:spPr/>
@@ -1941,13 +1763,13 @@
           <p:nvPr userDrawn="1"/>
         </p:nvPicPr>
         <p:blipFill>
-          <a:blip r:embed="rId2">
+          <a:blip>
             <a:extLst>
               <a:ext uri="{28A0092B-C50C-407E-A947-70E740481C1C}">
                 <a14:useLocalDpi xmlns:a14="http://schemas.microsoft.com/office/drawing/2010/main" val="0"/>
               </a:ext>
               <a:ext uri="{96DAC541-7B7A-43D3-8B79-37D633B846F1}">
-                <asvg:svgBlip xmlns:asvg="http://schemas.microsoft.com/office/drawing/2016/SVG/main" r:embed="rId3"/>
+                <asvg:svgBlip xmlns:asvg="http://schemas.microsoft.com/office/drawing/2016/SVG/main" r:embed="rId2"/>
               </a:ext>
             </a:extLst>
           </a:blip>
@@ -2650,13 +2472,13 @@
           <p:nvPr userDrawn="1"/>
         </p:nvPicPr>
         <p:blipFill>
-          <a:blip r:embed="rId2">
+          <a:blip>
             <a:extLst>
               <a:ext uri="{28A0092B-C50C-407E-A947-70E740481C1C}">
                 <a14:useLocalDpi xmlns:a14="http://schemas.microsoft.com/office/drawing/2010/main" val="0"/>
               </a:ext>
               <a:ext uri="{96DAC541-7B7A-43D3-8B79-37D633B846F1}">
-                <asvg:svgBlip xmlns:asvg="http://schemas.microsoft.com/office/drawing/2016/SVG/main" r:embed="rId3"/>
+                <asvg:svgBlip xmlns:asvg="http://schemas.microsoft.com/office/drawing/2016/SVG/main" r:embed="rId2"/>
               </a:ext>
             </a:extLst>
           </a:blip>
@@ -3113,13 +2935,13 @@
           <p:nvPr userDrawn="1"/>
         </p:nvPicPr>
         <p:blipFill>
-          <a:blip r:embed="rId2">
+          <a:blip>
             <a:extLst>
               <a:ext uri="{28A0092B-C50C-407E-A947-70E740481C1C}">
                 <a14:useLocalDpi xmlns:a14="http://schemas.microsoft.com/office/drawing/2010/main" val="0"/>
               </a:ext>
               <a:ext uri="{96DAC541-7B7A-43D3-8B79-37D633B846F1}">
-                <asvg:svgBlip xmlns:asvg="http://schemas.microsoft.com/office/drawing/2016/SVG/main" r:embed="rId3"/>
+                <asvg:svgBlip xmlns:asvg="http://schemas.microsoft.com/office/drawing/2016/SVG/main" r:embed="rId2"/>
               </a:ext>
             </a:extLst>
           </a:blip>
@@ -3623,13 +3445,13 @@
           <p:nvPr userDrawn="1"/>
         </p:nvPicPr>
         <p:blipFill>
-          <a:blip r:embed="rId2">
+          <a:blip>
             <a:extLst>
               <a:ext uri="{28A0092B-C50C-407E-A947-70E740481C1C}">
                 <a14:useLocalDpi xmlns:a14="http://schemas.microsoft.com/office/drawing/2010/main" val="0"/>
               </a:ext>
               <a:ext uri="{96DAC541-7B7A-43D3-8B79-37D633B846F1}">
-                <asvg:svgBlip xmlns:asvg="http://schemas.microsoft.com/office/drawing/2016/SVG/main" r:embed="rId3"/>
+                <asvg:svgBlip xmlns:asvg="http://schemas.microsoft.com/office/drawing/2016/SVG/main" r:embed="rId2"/>
               </a:ext>
             </a:extLst>
           </a:blip>
@@ -4237,13 +4059,13 @@
           <p:nvPr userDrawn="1"/>
         </p:nvPicPr>
         <p:blipFill>
-          <a:blip r:embed="rId2">
+          <a:blip>
             <a:extLst>
               <a:ext uri="{28A0092B-C50C-407E-A947-70E740481C1C}">
                 <a14:useLocalDpi xmlns:a14="http://schemas.microsoft.com/office/drawing/2010/main" val="0"/>
               </a:ext>
               <a:ext uri="{96DAC541-7B7A-43D3-8B79-37D633B846F1}">
-                <asvg:svgBlip xmlns:asvg="http://schemas.microsoft.com/office/drawing/2016/SVG/main" r:embed="rId3"/>
+                <asvg:svgBlip xmlns:asvg="http://schemas.microsoft.com/office/drawing/2016/SVG/main" r:embed="rId2"/>
               </a:ext>
             </a:extLst>
           </a:blip>
@@ -4973,13 +4795,13 @@
           <p:nvPr userDrawn="1"/>
         </p:nvPicPr>
         <p:blipFill>
-          <a:blip r:embed="rId2">
+          <a:blip>
             <a:extLst>
               <a:ext uri="{28A0092B-C50C-407E-A947-70E740481C1C}">
                 <a14:useLocalDpi xmlns:a14="http://schemas.microsoft.com/office/drawing/2010/main" val="0"/>
               </a:ext>
               <a:ext uri="{96DAC541-7B7A-43D3-8B79-37D633B846F1}">
-                <asvg:svgBlip xmlns:asvg="http://schemas.microsoft.com/office/drawing/2016/SVG/main" r:embed="rId3"/>
+                <asvg:svgBlip xmlns:asvg="http://schemas.microsoft.com/office/drawing/2016/SVG/main" r:embed="rId2"/>
               </a:ext>
             </a:extLst>
           </a:blip>
@@ -5831,13 +5653,13 @@
           <p:nvPr userDrawn="1"/>
         </p:nvPicPr>
         <p:blipFill>
-          <a:blip r:embed="rId2">
+          <a:blip>
             <a:extLst>
               <a:ext uri="{28A0092B-C50C-407E-A947-70E740481C1C}">
                 <a14:useLocalDpi xmlns:a14="http://schemas.microsoft.com/office/drawing/2010/main" val="0"/>
               </a:ext>
               <a:ext uri="{96DAC541-7B7A-43D3-8B79-37D633B846F1}">
-                <asvg:svgBlip xmlns:asvg="http://schemas.microsoft.com/office/drawing/2016/SVG/main" r:embed="rId3"/>
+                <asvg:svgBlip xmlns:asvg="http://schemas.microsoft.com/office/drawing/2016/SVG/main" r:embed="rId2"/>
               </a:ext>
             </a:extLst>
           </a:blip>
@@ -6250,13 +6072,13 @@
           <p:nvPr userDrawn="1"/>
         </p:nvPicPr>
         <p:blipFill>
-          <a:blip r:embed="rId2">
+          <a:blip>
             <a:extLst>
               <a:ext uri="{28A0092B-C50C-407E-A947-70E740481C1C}">
                 <a14:useLocalDpi xmlns:a14="http://schemas.microsoft.com/office/drawing/2010/main" val="0"/>
               </a:ext>
               <a:ext uri="{96DAC541-7B7A-43D3-8B79-37D633B846F1}">
-                <asvg:svgBlip xmlns:asvg="http://schemas.microsoft.com/office/drawing/2016/SVG/main" r:embed="rId3"/>
+                <asvg:svgBlip xmlns:asvg="http://schemas.microsoft.com/office/drawing/2016/SVG/main" r:embed="rId2"/>
               </a:ext>
             </a:extLst>
           </a:blip>
@@ -6717,7 +6539,7 @@
 </file>
 
 <file path=ppt/slides/slide1.xml><?xml version="1.0" encoding="utf-8"?>
-<p:sld xmlns:a="http://schemas.openxmlformats.org/drawingml/2006/main" xmlns:p="http://schemas.openxmlformats.org/presentationml/2006/main" xmlns:r="http://schemas.openxmlformats.org/officeDocument/2006/relationships">
+<p:sld xmlns:a="http://schemas.openxmlformats.org/drawingml/2006/main" xmlns:r="http://schemas.openxmlformats.org/officeDocument/2006/relationships" xmlns:p="http://schemas.openxmlformats.org/presentationml/2006/main">
   <p:cSld>
     <p:spTree>
       <p:nvGrpSpPr>
@@ -6725,7 +6547,14 @@
         <p:cNvGrpSpPr/>
         <p:nvPr/>
       </p:nvGrpSpPr>
-      <p:grpSpPr/>
+      <p:grpSpPr>
+        <a:xfrm>
+          <a:off x="0" y="0"/>
+          <a:ext cx="0" cy="0"/>
+          <a:chOff x="0" y="0"/>
+          <a:chExt cx="0" cy="0"/>
+        </a:xfrm>
+      </p:grpSpPr>
       <p:sp>
         <p:nvSpPr>
           <p:cNvPr id="2" name="Title 1"/>
@@ -6754,7 +6583,7 @@
             <a:spLocks noGrp="1"/>
           </p:cNvSpPr>
           <p:nvPr>
-            <p:ph idx="1" sz="half"/>
+            <p:ph sz="half" idx="1"/>
           </p:nvPr>
         </p:nvSpPr>
         <p:spPr/>
@@ -6787,7 +6616,7 @@
 </file>
 
 <file path=ppt/slides/slide10.xml><?xml version="1.0" encoding="utf-8"?>
-<p:sld xmlns:a="http://schemas.openxmlformats.org/drawingml/2006/main" xmlns:p="http://schemas.openxmlformats.org/presentationml/2006/main" xmlns:r="http://schemas.openxmlformats.org/officeDocument/2006/relationships">
+<p:sld xmlns:a="http://schemas.openxmlformats.org/drawingml/2006/main" xmlns:r="http://schemas.openxmlformats.org/officeDocument/2006/relationships" xmlns:p="http://schemas.openxmlformats.org/presentationml/2006/main">
   <p:cSld>
     <p:spTree>
       <p:nvGrpSpPr>
@@ -6795,7 +6624,14 @@
         <p:cNvGrpSpPr/>
         <p:nvPr/>
       </p:nvGrpSpPr>
-      <p:grpSpPr/>
+      <p:grpSpPr>
+        <a:xfrm>
+          <a:off x="0" y="0"/>
+          <a:ext cx="0" cy="0"/>
+          <a:chOff x="0" y="0"/>
+          <a:chExt cx="0" cy="0"/>
+        </a:xfrm>
+      </p:grpSpPr>
       <p:sp>
         <p:nvSpPr>
           <p:cNvPr id="2" name="Title 1"/>
@@ -6824,7 +6660,7 @@
             <a:spLocks noGrp="1"/>
           </p:cNvSpPr>
           <p:nvPr>
-            <p:ph idx="1" sz="half"/>
+            <p:ph sz="half" idx="1"/>
           </p:nvPr>
         </p:nvSpPr>
         <p:spPr/>
@@ -6833,7 +6669,7 @@
           <a:lstStyle/>
           <a:p>
             <a:r>
-              <a:rPr b="1" sz="1500"/>
+              <a:rPr sz="1500" b="1"/>
               <a:t>Copalis cannot go below a series CV of 0.126; Mocrocks below 0.095 </a:t>
             </a:r>
             <a:r>
@@ -6849,7 +6685,7 @@
           </a:p>
           <a:p>
             <a:r>
-              <a:rPr b="1" sz="1500"/>
+              <a:rPr sz="1500" b="1"/>
               <a:t>The question inverts: </a:t>
             </a:r>
             <a:r>
@@ -6866,14 +6702,16 @@
             <a:spLocks noGrp="1"/>
           </p:cNvSpPr>
           <p:nvPr>
-            <p:ph idx="11" sz="half"/>
+            <p:ph sz="half" idx="11"/>
           </p:nvPr>
         </p:nvSpPr>
         <p:spPr/>
         <p:txBody>
           <a:bodyPr/>
           <a:lstStyle/>
-          <a:p/>
+          <a:p>
+            <a:endParaRPr/>
+          </a:p>
         </p:txBody>
       </p:sp>
       <p:pic>
@@ -6885,7 +6723,7 @@
           <p:nvPr/>
         </p:nvPicPr>
         <p:blipFill>
-          <a:blip r:embed="rId2"/>
+          <a:blip r:embed="rId3"/>
           <a:stretch>
             <a:fillRect/>
           </a:stretch>
@@ -6909,7 +6747,7 @@
 </file>
 
 <file path=ppt/slides/slide11.xml><?xml version="1.0" encoding="utf-8"?>
-<p:sld xmlns:a="http://schemas.openxmlformats.org/drawingml/2006/main" xmlns:p="http://schemas.openxmlformats.org/presentationml/2006/main" xmlns:r="http://schemas.openxmlformats.org/officeDocument/2006/relationships">
+<p:sld xmlns:a="http://schemas.openxmlformats.org/drawingml/2006/main" xmlns:r="http://schemas.openxmlformats.org/officeDocument/2006/relationships" xmlns:p="http://schemas.openxmlformats.org/presentationml/2006/main">
   <p:cSld>
     <p:spTree>
       <p:nvGrpSpPr>
@@ -6917,7 +6755,14 @@
         <p:cNvGrpSpPr/>
         <p:nvPr/>
       </p:nvGrpSpPr>
-      <p:grpSpPr/>
+      <p:grpSpPr>
+        <a:xfrm>
+          <a:off x="0" y="0"/>
+          <a:ext cx="0" cy="0"/>
+          <a:chOff x="0" y="0"/>
+          <a:chExt cx="0" cy="0"/>
+        </a:xfrm>
+      </p:grpSpPr>
       <p:sp>
         <p:nvSpPr>
           <p:cNvPr id="2" name="Title 1"/>
@@ -6953,7 +6798,9 @@
         <p:txBody>
           <a:bodyPr/>
           <a:lstStyle/>
-          <a:p/>
+          <a:p>
+            <a:endParaRPr/>
+          </a:p>
         </p:txBody>
       </p:sp>
       <p:graphicFrame>
@@ -6975,12 +6822,48 @@
                 <a:tableStyleId>{5C22544A-7EE6-4342-B048-85BDC9FD1C3A}</a:tableStyleId>
               </a:tblPr>
               <a:tblGrid>
-                <a:gridCol w="2560320"/>
-                <a:gridCol w="1463040"/>
-                <a:gridCol w="1920240"/>
-                <a:gridCol w="1280160"/>
-                <a:gridCol w="1874519"/>
-                <a:gridCol w="1874519"/>
+                <a:gridCol w="2560320">
+                  <a:extLst>
+                    <a:ext uri="{9D8B030D-6E8A-4147-A177-3AD203B41FA5}">
+                      <a16:colId xmlns:a16="http://schemas.microsoft.com/office/drawing/2014/main" val="20000"/>
+                    </a:ext>
+                  </a:extLst>
+                </a:gridCol>
+                <a:gridCol w="1463040">
+                  <a:extLst>
+                    <a:ext uri="{9D8B030D-6E8A-4147-A177-3AD203B41FA5}">
+                      <a16:colId xmlns:a16="http://schemas.microsoft.com/office/drawing/2014/main" val="20001"/>
+                    </a:ext>
+                  </a:extLst>
+                </a:gridCol>
+                <a:gridCol w="1920240">
+                  <a:extLst>
+                    <a:ext uri="{9D8B030D-6E8A-4147-A177-3AD203B41FA5}">
+                      <a16:colId xmlns:a16="http://schemas.microsoft.com/office/drawing/2014/main" val="20002"/>
+                    </a:ext>
+                  </a:extLst>
+                </a:gridCol>
+                <a:gridCol w="1280160">
+                  <a:extLst>
+                    <a:ext uri="{9D8B030D-6E8A-4147-A177-3AD203B41FA5}">
+                      <a16:colId xmlns:a16="http://schemas.microsoft.com/office/drawing/2014/main" val="20003"/>
+                    </a:ext>
+                  </a:extLst>
+                </a:gridCol>
+                <a:gridCol w="1874519">
+                  <a:extLst>
+                    <a:ext uri="{9D8B030D-6E8A-4147-A177-3AD203B41FA5}">
+                      <a16:colId xmlns:a16="http://schemas.microsoft.com/office/drawing/2014/main" val="20004"/>
+                    </a:ext>
+                  </a:extLst>
+                </a:gridCol>
+                <a:gridCol w="1874519">
+                  <a:extLst>
+                    <a:ext uri="{9D8B030D-6E8A-4147-A177-3AD203B41FA5}">
+                      <a16:colId xmlns:a16="http://schemas.microsoft.com/office/drawing/2014/main" val="20005"/>
+                    </a:ext>
+                  </a:extLst>
+                </a:gridCol>
               </a:tblGrid>
               <a:tr h="487680">
                 <a:tc>
@@ -7109,6 +6992,11 @@
                     </a:solidFill>
                   </a:tcPr>
                 </a:tc>
+                <a:extLst>
+                  <a:ext uri="{0D108BD9-81ED-4DB2-BD59-A6C34878D82A}">
+                    <a16:rowId xmlns:a16="http://schemas.microsoft.com/office/drawing/2014/main" val="10000"/>
+                  </a:ext>
+                </a:extLst>
               </a:tr>
               <a:tr h="487680">
                 <a:tc>
@@ -7189,6 +7077,11 @@
                   </a:txBody>
                   <a:tcPr/>
                 </a:tc>
+                <a:extLst>
+                  <a:ext uri="{0D108BD9-81ED-4DB2-BD59-A6C34878D82A}">
+                    <a16:rowId xmlns:a16="http://schemas.microsoft.com/office/drawing/2014/main" val="10001"/>
+                  </a:ext>
+                </a:extLst>
               </a:tr>
               <a:tr h="487680">
                 <a:tc>
@@ -7269,6 +7162,11 @@
                   </a:txBody>
                   <a:tcPr/>
                 </a:tc>
+                <a:extLst>
+                  <a:ext uri="{0D108BD9-81ED-4DB2-BD59-A6C34878D82A}">
+                    <a16:rowId xmlns:a16="http://schemas.microsoft.com/office/drawing/2014/main" val="10002"/>
+                  </a:ext>
+                </a:extLst>
               </a:tr>
               <a:tr h="487680">
                 <a:tc>
@@ -7349,6 +7247,11 @@
                   </a:txBody>
                   <a:tcPr/>
                 </a:tc>
+                <a:extLst>
+                  <a:ext uri="{0D108BD9-81ED-4DB2-BD59-A6C34878D82A}">
+                    <a16:rowId xmlns:a16="http://schemas.microsoft.com/office/drawing/2014/main" val="10003"/>
+                  </a:ext>
+                </a:extLst>
               </a:tr>
               <a:tr h="487680">
                 <a:tc>
@@ -7429,6 +7332,11 @@
                   </a:txBody>
                   <a:tcPr/>
                 </a:tc>
+                <a:extLst>
+                  <a:ext uri="{0D108BD9-81ED-4DB2-BD59-A6C34878D82A}">
+                    <a16:rowId xmlns:a16="http://schemas.microsoft.com/office/drawing/2014/main" val="10004"/>
+                  </a:ext>
+                </a:extLst>
               </a:tr>
               <a:tr h="487680">
                 <a:tc>
@@ -7448,7 +7356,9 @@
                   <a:txBody>
                     <a:bodyPr/>
                     <a:lstStyle/>
-                    <a:p/>
+                    <a:p>
+                      <a:endParaRPr/>
+                    </a:p>
                   </a:txBody>
                   <a:tcPr/>
                 </a:tc>
@@ -7482,7 +7392,9 @@
                   <a:txBody>
                     <a:bodyPr/>
                     <a:lstStyle/>
-                    <a:p/>
+                    <a:p>
+                      <a:endParaRPr/>
+                    </a:p>
                   </a:txBody>
                   <a:tcPr/>
                 </a:tc>
@@ -7499,6 +7411,11 @@
                   </a:txBody>
                   <a:tcPr/>
                 </a:tc>
+                <a:extLst>
+                  <a:ext uri="{0D108BD9-81ED-4DB2-BD59-A6C34878D82A}">
+                    <a16:rowId xmlns:a16="http://schemas.microsoft.com/office/drawing/2014/main" val="10005"/>
+                  </a:ext>
+                </a:extLst>
               </a:tr>
             </a:tbl>
           </a:graphicData>
@@ -7542,7 +7459,7 @@
 </file>
 
 <file path=ppt/slides/slide12.xml><?xml version="1.0" encoding="utf-8"?>
-<p:sld xmlns:a="http://schemas.openxmlformats.org/drawingml/2006/main" xmlns:p="http://schemas.openxmlformats.org/presentationml/2006/main" xmlns:r="http://schemas.openxmlformats.org/officeDocument/2006/relationships">
+<p:sld xmlns:a="http://schemas.openxmlformats.org/drawingml/2006/main" xmlns:r="http://schemas.openxmlformats.org/officeDocument/2006/relationships" xmlns:p="http://schemas.openxmlformats.org/presentationml/2006/main">
   <p:cSld>
     <p:spTree>
       <p:nvGrpSpPr>
@@ -7550,7 +7467,14 @@
         <p:cNvGrpSpPr/>
         <p:nvPr/>
       </p:nvGrpSpPr>
-      <p:grpSpPr/>
+      <p:grpSpPr>
+        <a:xfrm>
+          <a:off x="0" y="0"/>
+          <a:ext cx="0" cy="0"/>
+          <a:chOff x="0" y="0"/>
+          <a:chExt cx="0" cy="0"/>
+        </a:xfrm>
+      </p:grpSpPr>
       <p:sp>
         <p:nvSpPr>
           <p:cNvPr id="2" name="Title 1"/>
@@ -7581,7 +7505,7 @@
 </file>
 
 <file path=ppt/slides/slide13.xml><?xml version="1.0" encoding="utf-8"?>
-<p:sld xmlns:a="http://schemas.openxmlformats.org/drawingml/2006/main" xmlns:p="http://schemas.openxmlformats.org/presentationml/2006/main" xmlns:r="http://schemas.openxmlformats.org/officeDocument/2006/relationships">
+<p:sld xmlns:a="http://schemas.openxmlformats.org/drawingml/2006/main" xmlns:r="http://schemas.openxmlformats.org/officeDocument/2006/relationships" xmlns:p="http://schemas.openxmlformats.org/presentationml/2006/main">
   <p:cSld>
     <p:spTree>
       <p:nvGrpSpPr>
@@ -7589,7 +7513,14 @@
         <p:cNvGrpSpPr/>
         <p:nvPr/>
       </p:nvGrpSpPr>
-      <p:grpSpPr/>
+      <p:grpSpPr>
+        <a:xfrm>
+          <a:off x="0" y="0"/>
+          <a:ext cx="0" cy="0"/>
+          <a:chOff x="0" y="0"/>
+          <a:chExt cx="0" cy="0"/>
+        </a:xfrm>
+      </p:grpSpPr>
       <p:sp>
         <p:nvSpPr>
           <p:cNvPr id="2" name="Title 1"/>
@@ -7618,7 +7549,7 @@
             <a:spLocks noGrp="1"/>
           </p:cNvSpPr>
           <p:nvPr>
-            <p:ph idx="1" sz="half"/>
+            <p:ph sz="half" idx="1"/>
           </p:nvPr>
         </p:nvSpPr>
         <p:spPr/>
@@ -7633,7 +7564,7 @@
           </a:p>
           <a:p>
             <a:r>
-              <a:rPr b="1" sz="1500"/>
+              <a:rPr sz="1500" b="1"/>
               <a:t>Newest survey: 2011. </a:t>
             </a:r>
             <a:r>
@@ -7649,7 +7580,7 @@
           </a:p>
           <a:p>
             <a:r>
-              <a:rPr b="1" sz="1500"/>
+              <a:rPr sz="1500" b="1"/>
               <a:t>The single most valuable unpurchased input </a:t>
             </a:r>
             <a:r>
@@ -7666,14 +7597,16 @@
             <a:spLocks noGrp="1"/>
           </p:cNvSpPr>
           <p:nvPr>
-            <p:ph idx="11" sz="half"/>
+            <p:ph sz="half" idx="11"/>
           </p:nvPr>
         </p:nvSpPr>
         <p:spPr/>
         <p:txBody>
           <a:bodyPr/>
           <a:lstStyle/>
-          <a:p/>
+          <a:p>
+            <a:endParaRPr/>
+          </a:p>
         </p:txBody>
       </p:sp>
       <p:pic>
@@ -7685,7 +7618,7 @@
           <p:nvPr/>
         </p:nvPicPr>
         <p:blipFill>
-          <a:blip r:embed="rId2"/>
+          <a:blip r:embed="rId3"/>
           <a:stretch>
             <a:fillRect/>
           </a:stretch>
@@ -7709,7 +7642,7 @@
 </file>
 
 <file path=ppt/slides/slide14.xml><?xml version="1.0" encoding="utf-8"?>
-<p:sld xmlns:a="http://schemas.openxmlformats.org/drawingml/2006/main" xmlns:p="http://schemas.openxmlformats.org/presentationml/2006/main" xmlns:r="http://schemas.openxmlformats.org/officeDocument/2006/relationships">
+<p:sld xmlns:a="http://schemas.openxmlformats.org/drawingml/2006/main" xmlns:r="http://schemas.openxmlformats.org/officeDocument/2006/relationships" xmlns:p="http://schemas.openxmlformats.org/presentationml/2006/main">
   <p:cSld>
     <p:spTree>
       <p:nvGrpSpPr>
@@ -7717,7 +7650,14 @@
         <p:cNvGrpSpPr/>
         <p:nvPr/>
       </p:nvGrpSpPr>
-      <p:grpSpPr/>
+      <p:grpSpPr>
+        <a:xfrm>
+          <a:off x="0" y="0"/>
+          <a:ext cx="0" cy="0"/>
+          <a:chOff x="0" y="0"/>
+          <a:chExt cx="0" cy="0"/>
+        </a:xfrm>
+      </p:grpSpPr>
       <p:sp>
         <p:nvSpPr>
           <p:cNvPr id="2" name="Title 1"/>
@@ -7746,7 +7686,7 @@
             <a:spLocks noGrp="1"/>
           </p:cNvSpPr>
           <p:nvPr>
-            <p:ph idx="1" sz="half"/>
+            <p:ph sz="half" idx="1"/>
           </p:nvPr>
         </p:nvSpPr>
         <p:spPr/>
@@ -7755,7 +7695,7 @@
           <a:lstStyle/>
           <a:p>
             <a:r>
-              <a:rPr b="1" sz="1400"/>
+              <a:rPr sz="1400" b="1"/>
               <a:t>Copalis and Mocrocks are the donor for ~63% </a:t>
             </a:r>
             <a:r>
@@ -7765,7 +7705,7 @@
           </a:p>
           <a:p>
             <a:r>
-              <a:rPr b="1" sz="1400"/>
+              <a:rPr sz="1400" b="1"/>
               <a:t>Under state-Quinault day-trading (2 on, 2 off) </a:t>
             </a:r>
             <a:r>
@@ -7775,7 +7715,7 @@
           </a:p>
           <a:p>
             <a:r>
-              <a:rPr b="1" sz="1400"/>
+              <a:rPr sz="1400" b="1"/>
               <a:t>The Quinault dig the alternate days, </a:t>
             </a:r>
             <a:r>
@@ -7785,7 +7725,7 @@
           </a:p>
           <a:p>
             <a:r>
-              <a:rPr b="1" sz="1400"/>
+              <a:rPr sz="1400" b="1"/>
               <a:t>Pulling state sampling to 45% </a:t>
             </a:r>
             <a:r>
@@ -7802,14 +7742,16 @@
             <a:spLocks noGrp="1"/>
           </p:cNvSpPr>
           <p:nvPr>
-            <p:ph idx="11" sz="half"/>
+            <p:ph sz="half" idx="11"/>
           </p:nvPr>
         </p:nvSpPr>
         <p:spPr/>
         <p:txBody>
           <a:bodyPr/>
           <a:lstStyle/>
-          <a:p/>
+          <a:p>
+            <a:endParaRPr/>
+          </a:p>
         </p:txBody>
       </p:sp>
       <p:pic>
@@ -7821,7 +7763,7 @@
           <p:nvPr/>
         </p:nvPicPr>
         <p:blipFill>
-          <a:blip r:embed="rId2"/>
+          <a:blip r:embed="rId3"/>
           <a:stretch>
             <a:fillRect/>
           </a:stretch>
@@ -7845,7 +7787,7 @@
 </file>
 
 <file path=ppt/slides/slide15.xml><?xml version="1.0" encoding="utf-8"?>
-<p:sld xmlns:a="http://schemas.openxmlformats.org/drawingml/2006/main" xmlns:p="http://schemas.openxmlformats.org/presentationml/2006/main" xmlns:r="http://schemas.openxmlformats.org/officeDocument/2006/relationships">
+<p:sld xmlns:a="http://schemas.openxmlformats.org/drawingml/2006/main" xmlns:r="http://schemas.openxmlformats.org/officeDocument/2006/relationships" xmlns:p="http://schemas.openxmlformats.org/presentationml/2006/main">
   <p:cSld>
     <p:spTree>
       <p:nvGrpSpPr>
@@ -7853,7 +7795,14 @@
         <p:cNvGrpSpPr/>
         <p:nvPr/>
       </p:nvGrpSpPr>
-      <p:grpSpPr/>
+      <p:grpSpPr>
+        <a:xfrm>
+          <a:off x="0" y="0"/>
+          <a:ext cx="0" cy="0"/>
+          <a:chOff x="0" y="0"/>
+          <a:chExt cx="0" cy="0"/>
+        </a:xfrm>
+      </p:grpSpPr>
       <p:sp>
         <p:nvSpPr>
           <p:cNvPr id="2" name="Title 1"/>
@@ -7884,7 +7833,7 @@
 </file>
 
 <file path=ppt/slides/slide16.xml><?xml version="1.0" encoding="utf-8"?>
-<p:sld xmlns:a="http://schemas.openxmlformats.org/drawingml/2006/main" xmlns:p="http://schemas.openxmlformats.org/presentationml/2006/main" xmlns:r="http://schemas.openxmlformats.org/officeDocument/2006/relationships">
+<p:sld xmlns:a="http://schemas.openxmlformats.org/drawingml/2006/main" xmlns:r="http://schemas.openxmlformats.org/officeDocument/2006/relationships" xmlns:p="http://schemas.openxmlformats.org/presentationml/2006/main">
   <p:cSld>
     <p:spTree>
       <p:nvGrpSpPr>
@@ -7892,7 +7841,14 @@
         <p:cNvGrpSpPr/>
         <p:nvPr/>
       </p:nvGrpSpPr>
-      <p:grpSpPr/>
+      <p:grpSpPr>
+        <a:xfrm>
+          <a:off x="0" y="0"/>
+          <a:ext cx="0" cy="0"/>
+          <a:chOff x="0" y="0"/>
+          <a:chExt cx="0" cy="0"/>
+        </a:xfrm>
+      </p:grpSpPr>
       <p:sp>
         <p:nvSpPr>
           <p:cNvPr id="2" name="Title 1"/>
@@ -7933,9 +7889,27 @@
                 <a:tableStyleId>{5C22544A-7EE6-4342-B048-85BDC9FD1C3A}</a:tableStyleId>
               </a:tblPr>
               <a:tblGrid>
-                <a:gridCol w="3657600"/>
-                <a:gridCol w="4937760"/>
-                <a:gridCol w="2011680"/>
+                <a:gridCol w="3657600">
+                  <a:extLst>
+                    <a:ext uri="{9D8B030D-6E8A-4147-A177-3AD203B41FA5}">
+                      <a16:colId xmlns:a16="http://schemas.microsoft.com/office/drawing/2014/main" val="20000"/>
+                    </a:ext>
+                  </a:extLst>
+                </a:gridCol>
+                <a:gridCol w="4937760">
+                  <a:extLst>
+                    <a:ext uri="{9D8B030D-6E8A-4147-A177-3AD203B41FA5}">
+                      <a16:colId xmlns:a16="http://schemas.microsoft.com/office/drawing/2014/main" val="20001"/>
+                    </a:ext>
+                  </a:extLst>
+                </a:gridCol>
+                <a:gridCol w="2011680">
+                  <a:extLst>
+                    <a:ext uri="{9D8B030D-6E8A-4147-A177-3AD203B41FA5}">
+                      <a16:colId xmlns:a16="http://schemas.microsoft.com/office/drawing/2014/main" val="20002"/>
+                    </a:ext>
+                  </a:extLst>
+                </a:gridCol>
               </a:tblGrid>
               <a:tr h="365760">
                 <a:tc>
@@ -8001,6 +7975,11 @@
                     </a:solidFill>
                   </a:tcPr>
                 </a:tc>
+                <a:extLst>
+                  <a:ext uri="{0D108BD9-81ED-4DB2-BD59-A6C34878D82A}">
+                    <a16:rowId xmlns:a16="http://schemas.microsoft.com/office/drawing/2014/main" val="10000"/>
+                  </a:ext>
+                </a:extLst>
               </a:tr>
               <a:tr h="365760">
                 <a:tc>
@@ -8042,6 +8021,11 @@
                   </a:txBody>
                   <a:tcPr/>
                 </a:tc>
+                <a:extLst>
+                  <a:ext uri="{0D108BD9-81ED-4DB2-BD59-A6C34878D82A}">
+                    <a16:rowId xmlns:a16="http://schemas.microsoft.com/office/drawing/2014/main" val="10001"/>
+                  </a:ext>
+                </a:extLst>
               </a:tr>
               <a:tr h="365760">
                 <a:tc>
@@ -8083,6 +8067,11 @@
                   </a:txBody>
                   <a:tcPr/>
                 </a:tc>
+                <a:extLst>
+                  <a:ext uri="{0D108BD9-81ED-4DB2-BD59-A6C34878D82A}">
+                    <a16:rowId xmlns:a16="http://schemas.microsoft.com/office/drawing/2014/main" val="10002"/>
+                  </a:ext>
+                </a:extLst>
               </a:tr>
               <a:tr h="365760">
                 <a:tc>
@@ -8124,6 +8113,11 @@
                   </a:txBody>
                   <a:tcPr/>
                 </a:tc>
+                <a:extLst>
+                  <a:ext uri="{0D108BD9-81ED-4DB2-BD59-A6C34878D82A}">
+                    <a16:rowId xmlns:a16="http://schemas.microsoft.com/office/drawing/2014/main" val="10003"/>
+                  </a:ext>
+                </a:extLst>
               </a:tr>
               <a:tr h="365760">
                 <a:tc>
@@ -8165,6 +8159,11 @@
                   </a:txBody>
                   <a:tcPr/>
                 </a:tc>
+                <a:extLst>
+                  <a:ext uri="{0D108BD9-81ED-4DB2-BD59-A6C34878D82A}">
+                    <a16:rowId xmlns:a16="http://schemas.microsoft.com/office/drawing/2014/main" val="10004"/>
+                  </a:ext>
+                </a:extLst>
               </a:tr>
               <a:tr h="365760">
                 <a:tc>
@@ -8206,6 +8205,11 @@
                   </a:txBody>
                   <a:tcPr/>
                 </a:tc>
+                <a:extLst>
+                  <a:ext uri="{0D108BD9-81ED-4DB2-BD59-A6C34878D82A}">
+                    <a16:rowId xmlns:a16="http://schemas.microsoft.com/office/drawing/2014/main" val="10005"/>
+                  </a:ext>
+                </a:extLst>
               </a:tr>
               <a:tr h="365760">
                 <a:tc>
@@ -8247,6 +8251,11 @@
                   </a:txBody>
                   <a:tcPr/>
                 </a:tc>
+                <a:extLst>
+                  <a:ext uri="{0D108BD9-81ED-4DB2-BD59-A6C34878D82A}">
+                    <a16:rowId xmlns:a16="http://schemas.microsoft.com/office/drawing/2014/main" val="10006"/>
+                  </a:ext>
+                </a:extLst>
               </a:tr>
             </a:tbl>
           </a:graphicData>
@@ -8290,7 +8299,7 @@
 </file>
 
 <file path=ppt/slides/slide17.xml><?xml version="1.0" encoding="utf-8"?>
-<p:sld xmlns:a="http://schemas.openxmlformats.org/drawingml/2006/main" xmlns:p="http://schemas.openxmlformats.org/presentationml/2006/main" xmlns:r="http://schemas.openxmlformats.org/officeDocument/2006/relationships">
+<p:sld xmlns:a="http://schemas.openxmlformats.org/drawingml/2006/main" xmlns:r="http://schemas.openxmlformats.org/officeDocument/2006/relationships" xmlns:p="http://schemas.openxmlformats.org/presentationml/2006/main">
   <p:cSld>
     <p:spTree>
       <p:nvGrpSpPr>
@@ -8298,7 +8307,14 @@
         <p:cNvGrpSpPr/>
         <p:nvPr/>
       </p:nvGrpSpPr>
-      <p:grpSpPr/>
+      <p:grpSpPr>
+        <a:xfrm>
+          <a:off x="0" y="0"/>
+          <a:ext cx="0" cy="0"/>
+          <a:chOff x="0" y="0"/>
+          <a:chExt cx="0" cy="0"/>
+        </a:xfrm>
+      </p:grpSpPr>
       <p:sp>
         <p:nvSpPr>
           <p:cNvPr id="2" name="Title 1"/>
@@ -8339,9 +8355,27 @@
                 <a:tableStyleId>{5C22544A-7EE6-4342-B048-85BDC9FD1C3A}</a:tableStyleId>
               </a:tblPr>
               <a:tblGrid>
-                <a:gridCol w="5120640"/>
-                <a:gridCol w="1188720"/>
-                <a:gridCol w="4663440"/>
+                <a:gridCol w="5120640">
+                  <a:extLst>
+                    <a:ext uri="{9D8B030D-6E8A-4147-A177-3AD203B41FA5}">
+                      <a16:colId xmlns:a16="http://schemas.microsoft.com/office/drawing/2014/main" val="20000"/>
+                    </a:ext>
+                  </a:extLst>
+                </a:gridCol>
+                <a:gridCol w="1188720">
+                  <a:extLst>
+                    <a:ext uri="{9D8B030D-6E8A-4147-A177-3AD203B41FA5}">
+                      <a16:colId xmlns:a16="http://schemas.microsoft.com/office/drawing/2014/main" val="20001"/>
+                    </a:ext>
+                  </a:extLst>
+                </a:gridCol>
+                <a:gridCol w="4663440">
+                  <a:extLst>
+                    <a:ext uri="{9D8B030D-6E8A-4147-A177-3AD203B41FA5}">
+                      <a16:colId xmlns:a16="http://schemas.microsoft.com/office/drawing/2014/main" val="20002"/>
+                    </a:ext>
+                  </a:extLst>
+                </a:gridCol>
               </a:tblGrid>
               <a:tr h="365760">
                 <a:tc>
@@ -8407,6 +8441,11 @@
                     </a:solidFill>
                   </a:tcPr>
                 </a:tc>
+                <a:extLst>
+                  <a:ext uri="{0D108BD9-81ED-4DB2-BD59-A6C34878D82A}">
+                    <a16:rowId xmlns:a16="http://schemas.microsoft.com/office/drawing/2014/main" val="10000"/>
+                  </a:ext>
+                </a:extLst>
               </a:tr>
               <a:tr h="365760">
                 <a:tc>
@@ -8448,6 +8487,11 @@
                   </a:txBody>
                   <a:tcPr/>
                 </a:tc>
+                <a:extLst>
+                  <a:ext uri="{0D108BD9-81ED-4DB2-BD59-A6C34878D82A}">
+                    <a16:rowId xmlns:a16="http://schemas.microsoft.com/office/drawing/2014/main" val="10001"/>
+                  </a:ext>
+                </a:extLst>
               </a:tr>
               <a:tr h="365760">
                 <a:tc>
@@ -8489,6 +8533,11 @@
                   </a:txBody>
                   <a:tcPr/>
                 </a:tc>
+                <a:extLst>
+                  <a:ext uri="{0D108BD9-81ED-4DB2-BD59-A6C34878D82A}">
+                    <a16:rowId xmlns:a16="http://schemas.microsoft.com/office/drawing/2014/main" val="10002"/>
+                  </a:ext>
+                </a:extLst>
               </a:tr>
               <a:tr h="365760">
                 <a:tc>
@@ -8521,10 +8570,17 @@
                   <a:txBody>
                     <a:bodyPr/>
                     <a:lstStyle/>
-                    <a:p/>
+                    <a:p>
+                      <a:endParaRPr/>
+                    </a:p>
                   </a:txBody>
                   <a:tcPr/>
                 </a:tc>
+                <a:extLst>
+                  <a:ext uri="{0D108BD9-81ED-4DB2-BD59-A6C34878D82A}">
+                    <a16:rowId xmlns:a16="http://schemas.microsoft.com/office/drawing/2014/main" val="10003"/>
+                  </a:ext>
+                </a:extLst>
               </a:tr>
               <a:tr h="365760">
                 <a:tc>
@@ -8566,6 +8622,11 @@
                   </a:txBody>
                   <a:tcPr/>
                 </a:tc>
+                <a:extLst>
+                  <a:ext uri="{0D108BD9-81ED-4DB2-BD59-A6C34878D82A}">
+                    <a16:rowId xmlns:a16="http://schemas.microsoft.com/office/drawing/2014/main" val="10004"/>
+                  </a:ext>
+                </a:extLst>
               </a:tr>
               <a:tr h="365760">
                 <a:tc>
@@ -8598,10 +8659,17 @@
                   <a:txBody>
                     <a:bodyPr/>
                     <a:lstStyle/>
-                    <a:p/>
+                    <a:p>
+                      <a:endParaRPr/>
+                    </a:p>
                   </a:txBody>
                   <a:tcPr/>
                 </a:tc>
+                <a:extLst>
+                  <a:ext uri="{0D108BD9-81ED-4DB2-BD59-A6C34878D82A}">
+                    <a16:rowId xmlns:a16="http://schemas.microsoft.com/office/drawing/2014/main" val="10005"/>
+                  </a:ext>
+                </a:extLst>
               </a:tr>
             </a:tbl>
           </a:graphicData>
@@ -8645,7 +8713,7 @@
 </file>
 
 <file path=ppt/slides/slide18.xml><?xml version="1.0" encoding="utf-8"?>
-<p:sld xmlns:a="http://schemas.openxmlformats.org/drawingml/2006/main" xmlns:p="http://schemas.openxmlformats.org/presentationml/2006/main" xmlns:r="http://schemas.openxmlformats.org/officeDocument/2006/relationships">
+<p:sld xmlns:a="http://schemas.openxmlformats.org/drawingml/2006/main" xmlns:r="http://schemas.openxmlformats.org/officeDocument/2006/relationships" xmlns:p="http://schemas.openxmlformats.org/presentationml/2006/main">
   <p:cSld>
     <p:spTree>
       <p:nvGrpSpPr>
@@ -8653,7 +8721,14 @@
         <p:cNvGrpSpPr/>
         <p:nvPr/>
       </p:nvGrpSpPr>
-      <p:grpSpPr/>
+      <p:grpSpPr>
+        <a:xfrm>
+          <a:off x="0" y="0"/>
+          <a:ext cx="0" cy="0"/>
+          <a:chOff x="0" y="0"/>
+          <a:chExt cx="0" cy="0"/>
+        </a:xfrm>
+      </p:grpSpPr>
       <p:sp>
         <p:nvSpPr>
           <p:cNvPr id="2" name="Title 1"/>
@@ -8682,50 +8757,71 @@
             <a:spLocks noGrp="1"/>
           </p:cNvSpPr>
           <p:nvPr>
-            <p:ph idx="1" sz="half"/>
-          </p:nvPr>
-        </p:nvSpPr>
-        <p:spPr/>
+            <p:ph sz="half" idx="1"/>
+          </p:nvPr>
+        </p:nvSpPr>
+        <p:spPr>
+          <a:xfrm>
+            <a:off x="593212" y="1837765"/>
+            <a:ext cx="5420180" cy="4053463"/>
+          </a:xfrm>
+        </p:spPr>
         <p:txBody>
           <a:bodyPr wrap="square"/>
           <a:lstStyle/>
           <a:p>
             <a:r>
-              <a:rPr b="1" sz="1400"/>
-              <a:t>Today: 18.4% relative sd on three daylight surveys, newest 2011. </a:t>
-            </a:r>
-            <a:r>
-              <a:rPr sz="1400"/>
+              <a:rPr sz="1400" b="1" dirty="0"/>
+              <a:t>Today: 18.4% relative </a:t>
+            </a:r>
+            <a:r>
+              <a:rPr sz="1400" b="1" dirty="0" err="1"/>
+              <a:t>sd</a:t>
+            </a:r>
+            <a:r>
+              <a:rPr sz="1400" b="1" dirty="0"/>
+              <a:t> on three daylight surveys, newest 2011. </a:t>
+            </a:r>
+            <a:r>
+              <a:rPr sz="1400" dirty="0"/>
               <a:t>Between-survey error falls as one over the root of the survey count.</a:t>
             </a:r>
           </a:p>
           <a:p>
             <a:r>
-              <a:rPr b="1" sz="1400"/>
+              <a:rPr sz="1400" b="1" dirty="0"/>
               <a:t>A pilot season (~8 whole-beach surveys) </a:t>
             </a:r>
             <a:r>
-              <a:rPr sz="1400"/>
+              <a:rPr sz="1400" dirty="0"/>
               <a:t>roughly halves it to ~11%; a ~16-survey rebuild reaches ~8%, approaching the ~6% of the refreshed northern beaches.</a:t>
             </a:r>
           </a:p>
           <a:p>
             <a:r>
-              <a:rPr b="1" sz="1400"/>
-              <a:t>Whole-beach coverage also retires the section-ratio error (sd 0.281) </a:t>
-            </a:r>
-            <a:r>
-              <a:rPr sz="1400"/>
+              <a:rPr sz="1400" b="1" dirty="0"/>
+              <a:t>Whole-beach coverage also retires the section-ratio error (</a:t>
+            </a:r>
+            <a:r>
+              <a:rPr sz="1400" b="1" dirty="0" err="1"/>
+              <a:t>sd</a:t>
+            </a:r>
+            <a:r>
+              <a:rPr sz="1400" b="1" dirty="0"/>
+              <a:t> 0.281) </a:t>
+            </a:r>
+            <a:r>
+              <a:rPr sz="1400" dirty="0"/>
               <a:t>that the historical single-approach partials cannot.</a:t>
             </a:r>
           </a:p>
           <a:p>
             <a:r>
-              <a:rPr b="1" sz="1400"/>
+              <a:rPr sz="1400" b="1" dirty="0"/>
               <a:t>It calibrates the section shares, </a:t>
             </a:r>
             <a:r>
-              <a:rPr sz="1400"/>
+              <a:rPr sz="1400" dirty="0"/>
               <a:t>so future cheap partial surveys (one approach) can be expanded reliably instead of imputed.</a:t>
             </a:r>
           </a:p>
@@ -8738,14 +8834,16 @@
             <a:spLocks noGrp="1"/>
           </p:cNvSpPr>
           <p:nvPr>
-            <p:ph idx="11" sz="half"/>
+            <p:ph sz="half" idx="11"/>
           </p:nvPr>
         </p:nvSpPr>
         <p:spPr/>
         <p:txBody>
           <a:bodyPr/>
           <a:lstStyle/>
-          <a:p/>
+          <a:p>
+            <a:endParaRPr/>
+          </a:p>
         </p:txBody>
       </p:sp>
       <p:pic>
@@ -8757,7 +8855,7 @@
           <p:nvPr/>
         </p:nvPicPr>
         <p:blipFill>
-          <a:blip r:embed="rId2"/>
+          <a:blip r:embed="rId3"/>
           <a:stretch>
             <a:fillRect/>
           </a:stretch>
@@ -8781,7 +8879,7 @@
 </file>
 
 <file path=ppt/slides/slide19.xml><?xml version="1.0" encoding="utf-8"?>
-<p:sld xmlns:a="http://schemas.openxmlformats.org/drawingml/2006/main" xmlns:p="http://schemas.openxmlformats.org/presentationml/2006/main" xmlns:r="http://schemas.openxmlformats.org/officeDocument/2006/relationships">
+<p:sld xmlns:a="http://schemas.openxmlformats.org/drawingml/2006/main" xmlns:r="http://schemas.openxmlformats.org/officeDocument/2006/relationships" xmlns:p="http://schemas.openxmlformats.org/presentationml/2006/main">
   <p:cSld>
     <p:spTree>
       <p:nvGrpSpPr>
@@ -8789,7 +8887,14 @@
         <p:cNvGrpSpPr/>
         <p:nvPr/>
       </p:nvGrpSpPr>
-      <p:grpSpPr/>
+      <p:grpSpPr>
+        <a:xfrm>
+          <a:off x="0" y="0"/>
+          <a:ext cx="0" cy="0"/>
+          <a:chOff x="0" y="0"/>
+          <a:chExt cx="0" cy="0"/>
+        </a:xfrm>
+      </p:grpSpPr>
       <p:sp>
         <p:nvSpPr>
           <p:cNvPr id="2" name="Title 1"/>
@@ -8827,7 +8932,7 @@
           <a:lstStyle/>
           <a:p>
             <a:r>
-              <a:rPr b="1" sz="1400"/>
+              <a:rPr sz="1400" b="1"/>
               <a:t>1.  Survey Long Beach first. </a:t>
             </a:r>
             <a:r>
@@ -8837,7 +8942,7 @@
           </a:p>
           <a:p>
             <a:r>
-              <a:rPr b="1" sz="1400"/>
+              <a:rPr sz="1400" b="1"/>
               <a:t>2.  Hold the southern donor at its co-management floor. </a:t>
             </a:r>
             <a:r>
@@ -8847,7 +8952,7 @@
           </a:p>
           <a:p>
             <a:r>
-              <a:rPr b="1" sz="1400"/>
+              <a:rPr sz="1400" b="1"/>
               <a:t>3.  Pair the pilot with the northern donor on a subset of days </a:t>
             </a:r>
             <a:r>
@@ -8857,7 +8962,7 @@
           </a:p>
           <a:p>
             <a:r>
-              <a:rPr b="1" sz="1400"/>
+              <a:rPr sz="1400" b="1"/>
               <a:t>4.  Treat the 45% reallocation as optional, not free. </a:t>
             </a:r>
             <a:r>
@@ -8867,7 +8972,7 @@
           </a:p>
           <a:p>
             <a:r>
-              <a:rPr b="1" sz="1400"/>
+              <a:rPr sz="1400" b="1"/>
               <a:t>5.  Accept the Copalis floor: </a:t>
             </a:r>
             <a:r>
@@ -8886,7 +8991,7 @@
 </file>
 
 <file path=ppt/slides/slide2.xml><?xml version="1.0" encoding="utf-8"?>
-<p:sld xmlns:a="http://schemas.openxmlformats.org/drawingml/2006/main" xmlns:p="http://schemas.openxmlformats.org/presentationml/2006/main" xmlns:r="http://schemas.openxmlformats.org/officeDocument/2006/relationships">
+<p:sld xmlns:a="http://schemas.openxmlformats.org/drawingml/2006/main" xmlns:r="http://schemas.openxmlformats.org/officeDocument/2006/relationships" xmlns:p="http://schemas.openxmlformats.org/presentationml/2006/main">
   <p:cSld>
     <p:spTree>
       <p:nvGrpSpPr>
@@ -8894,7 +8999,14 @@
         <p:cNvGrpSpPr/>
         <p:nvPr/>
       </p:nvGrpSpPr>
-      <p:grpSpPr/>
+      <p:grpSpPr>
+        <a:xfrm>
+          <a:off x="0" y="0"/>
+          <a:ext cx="0" cy="0"/>
+          <a:chOff x="0" y="0"/>
+          <a:chExt cx="0" cy="0"/>
+        </a:xfrm>
+      </p:grpSpPr>
       <p:sp>
         <p:nvSpPr>
           <p:cNvPr id="2" name="Title 1"/>
@@ -8969,7 +9081,7 @@
 </file>
 
 <file path=ppt/slides/slide20.xml><?xml version="1.0" encoding="utf-8"?>
-<p:sld xmlns:a="http://schemas.openxmlformats.org/drawingml/2006/main" xmlns:p="http://schemas.openxmlformats.org/presentationml/2006/main" xmlns:r="http://schemas.openxmlformats.org/officeDocument/2006/relationships">
+<p:sld xmlns:a="http://schemas.openxmlformats.org/drawingml/2006/main" xmlns:r="http://schemas.openxmlformats.org/officeDocument/2006/relationships" xmlns:p="http://schemas.openxmlformats.org/presentationml/2006/main">
   <p:cSld>
     <p:spTree>
       <p:nvGrpSpPr>
@@ -8977,7 +9089,14 @@
         <p:cNvGrpSpPr/>
         <p:nvPr/>
       </p:nvGrpSpPr>
-      <p:grpSpPr/>
+      <p:grpSpPr>
+        <a:xfrm>
+          <a:off x="0" y="0"/>
+          <a:ext cx="0" cy="0"/>
+          <a:chOff x="0" y="0"/>
+          <a:chExt cx="0" cy="0"/>
+        </a:xfrm>
+      </p:grpSpPr>
       <p:sp>
         <p:nvSpPr>
           <p:cNvPr id="2" name="Title 1"/>
@@ -9008,7 +9127,7 @@
 </file>
 
 <file path=ppt/slides/slide3.xml><?xml version="1.0" encoding="utf-8"?>
-<p:sld xmlns:a="http://schemas.openxmlformats.org/drawingml/2006/main" xmlns:p="http://schemas.openxmlformats.org/presentationml/2006/main" xmlns:r="http://schemas.openxmlformats.org/officeDocument/2006/relationships">
+<p:sld xmlns:a="http://schemas.openxmlformats.org/drawingml/2006/main" xmlns:r="http://schemas.openxmlformats.org/officeDocument/2006/relationships" xmlns:p="http://schemas.openxmlformats.org/presentationml/2006/main">
   <p:cSld>
     <p:spTree>
       <p:nvGrpSpPr>
@@ -9016,7 +9135,14 @@
         <p:cNvGrpSpPr/>
         <p:nvPr/>
       </p:nvGrpSpPr>
-      <p:grpSpPr/>
+      <p:grpSpPr>
+        <a:xfrm>
+          <a:off x="0" y="0"/>
+          <a:ext cx="0" cy="0"/>
+          <a:chOff x="0" y="0"/>
+          <a:chExt cx="0" cy="0"/>
+        </a:xfrm>
+      </p:grpSpPr>
       <p:sp>
         <p:nvSpPr>
           <p:cNvPr id="2" name="Title 1"/>
@@ -9047,7 +9173,7 @@
 </file>
 
 <file path=ppt/slides/slide4.xml><?xml version="1.0" encoding="utf-8"?>
-<p:sld xmlns:a="http://schemas.openxmlformats.org/drawingml/2006/main" xmlns:p="http://schemas.openxmlformats.org/presentationml/2006/main" xmlns:r="http://schemas.openxmlformats.org/officeDocument/2006/relationships">
+<p:sld xmlns:a="http://schemas.openxmlformats.org/drawingml/2006/main" xmlns:r="http://schemas.openxmlformats.org/officeDocument/2006/relationships" xmlns:p="http://schemas.openxmlformats.org/presentationml/2006/main">
   <p:cSld>
     <p:spTree>
       <p:nvGrpSpPr>
@@ -9055,7 +9181,14 @@
         <p:cNvGrpSpPr/>
         <p:nvPr/>
       </p:nvGrpSpPr>
-      <p:grpSpPr/>
+      <p:grpSpPr>
+        <a:xfrm>
+          <a:off x="0" y="0"/>
+          <a:ext cx="0" cy="0"/>
+          <a:chOff x="0" y="0"/>
+          <a:chExt cx="0" cy="0"/>
+        </a:xfrm>
+      </p:grpSpPr>
       <p:sp>
         <p:nvSpPr>
           <p:cNvPr id="2" name="Title 1"/>
@@ -9084,7 +9217,7 @@
             <a:spLocks noGrp="1"/>
           </p:cNvSpPr>
           <p:nvPr>
-            <p:ph idx="1" sz="half"/>
+            <p:ph sz="half" idx="1"/>
           </p:nvPr>
         </p:nvSpPr>
         <p:spPr/>
@@ -9093,7 +9226,7 @@
           <a:lstStyle/>
           <a:p>
             <a:r>
-              <a:rPr b="1" sz="1500"/>
+              <a:rPr sz="1500" b="1"/>
               <a:t>May 2013 correction: </a:t>
             </a:r>
             <a:r>
@@ -9109,7 +9242,7 @@
           </a:p>
           <a:p>
             <a:r>
-              <a:rPr b="1" sz="1500"/>
+              <a:rPr sz="1500" b="1"/>
               <a:t>Long Beach's table was reshaped after 2013: </a:t>
             </a:r>
             <a:r>
@@ -9132,14 +9265,16 @@
             <a:spLocks noGrp="1"/>
           </p:cNvSpPr>
           <p:nvPr>
-            <p:ph idx="11" sz="half"/>
+            <p:ph sz="half" idx="11"/>
           </p:nvPr>
         </p:nvSpPr>
         <p:spPr/>
         <p:txBody>
           <a:bodyPr/>
           <a:lstStyle/>
-          <a:p/>
+          <a:p>
+            <a:endParaRPr/>
+          </a:p>
         </p:txBody>
       </p:sp>
       <p:pic>
@@ -9151,7 +9286,7 @@
           <p:nvPr/>
         </p:nvPicPr>
         <p:blipFill>
-          <a:blip r:embed="rId2"/>
+          <a:blip r:embed="rId3"/>
           <a:stretch>
             <a:fillRect/>
           </a:stretch>
@@ -9175,7 +9310,7 @@
 </file>
 
 <file path=ppt/slides/slide5.xml><?xml version="1.0" encoding="utf-8"?>
-<p:sld xmlns:a="http://schemas.openxmlformats.org/drawingml/2006/main" xmlns:p="http://schemas.openxmlformats.org/presentationml/2006/main" xmlns:r="http://schemas.openxmlformats.org/officeDocument/2006/relationships">
+<p:sld xmlns:a="http://schemas.openxmlformats.org/drawingml/2006/main" xmlns:r="http://schemas.openxmlformats.org/officeDocument/2006/relationships" xmlns:p="http://schemas.openxmlformats.org/presentationml/2006/main">
   <p:cSld>
     <p:spTree>
       <p:nvGrpSpPr>
@@ -9183,7 +9318,14 @@
         <p:cNvGrpSpPr/>
         <p:nvPr/>
       </p:nvGrpSpPr>
-      <p:grpSpPr/>
+      <p:grpSpPr>
+        <a:xfrm>
+          <a:off x="0" y="0"/>
+          <a:ext cx="0" cy="0"/>
+          <a:chOff x="0" y="0"/>
+          <a:chExt cx="0" cy="0"/>
+        </a:xfrm>
+      </p:grpSpPr>
       <p:sp>
         <p:nvSpPr>
           <p:cNvPr id="2" name="Title 1"/>
@@ -9212,7 +9354,7 @@
             <a:spLocks noGrp="1"/>
           </p:cNvSpPr>
           <p:nvPr>
-            <p:ph idx="1" sz="half"/>
+            <p:ph sz="half" idx="1"/>
           </p:nvPr>
         </p:nvSpPr>
         <p:spPr/>
@@ -9221,7 +9363,7 @@
           <a:lstStyle/>
           <a:p>
             <a:r>
-              <a:rPr b="1" sz="1500"/>
+              <a:rPr sz="1500" b="1"/>
               <a:t>71-96% of season effort variance </a:t>
             </a:r>
             <a:r>
@@ -9243,7 +9385,7 @@
           </a:p>
           <a:p>
             <a:r>
-              <a:rPr b="1" sz="1500"/>
+              <a:rPr sz="1500" b="1"/>
               <a:t>The lever is surveys, not crew days </a:t>
             </a:r>
             <a:r>
@@ -9260,14 +9402,16 @@
             <a:spLocks noGrp="1"/>
           </p:cNvSpPr>
           <p:nvPr>
-            <p:ph idx="11" sz="half"/>
+            <p:ph sz="half" idx="11"/>
           </p:nvPr>
         </p:nvSpPr>
         <p:spPr/>
         <p:txBody>
           <a:bodyPr/>
           <a:lstStyle/>
-          <a:p/>
+          <a:p>
+            <a:endParaRPr/>
+          </a:p>
         </p:txBody>
       </p:sp>
       <p:pic>
@@ -9279,7 +9423,7 @@
           <p:nvPr/>
         </p:nvPicPr>
         <p:blipFill>
-          <a:blip r:embed="rId2"/>
+          <a:blip r:embed="rId3"/>
           <a:stretch>
             <a:fillRect/>
           </a:stretch>
@@ -9303,7 +9447,7 @@
 </file>
 
 <file path=ppt/slides/slide6.xml><?xml version="1.0" encoding="utf-8"?>
-<p:sld xmlns:a="http://schemas.openxmlformats.org/drawingml/2006/main" xmlns:p="http://schemas.openxmlformats.org/presentationml/2006/main" xmlns:r="http://schemas.openxmlformats.org/officeDocument/2006/relationships">
+<p:sld xmlns:a="http://schemas.openxmlformats.org/drawingml/2006/main" xmlns:r="http://schemas.openxmlformats.org/officeDocument/2006/relationships" xmlns:p="http://schemas.openxmlformats.org/presentationml/2006/main">
   <p:cSld>
     <p:spTree>
       <p:nvGrpSpPr>
@@ -9311,7 +9455,14 @@
         <p:cNvGrpSpPr/>
         <p:nvPr/>
       </p:nvGrpSpPr>
-      <p:grpSpPr/>
+      <p:grpSpPr>
+        <a:xfrm>
+          <a:off x="0" y="0"/>
+          <a:ext cx="0" cy="0"/>
+          <a:chOff x="0" y="0"/>
+          <a:chExt cx="0" cy="0"/>
+        </a:xfrm>
+      </p:grpSpPr>
       <p:sp>
         <p:nvSpPr>
           <p:cNvPr id="2" name="Title 1"/>
@@ -9340,7 +9491,7 @@
             <a:spLocks noGrp="1"/>
           </p:cNvSpPr>
           <p:nvPr>
-            <p:ph idx="1" sz="half"/>
+            <p:ph sz="half" idx="1"/>
           </p:nvPr>
         </p:nvSpPr>
         <p:spPr/>
@@ -9349,7 +9500,7 @@
           <a:lstStyle/>
           <a:p>
             <a:r>
-              <a:rPr b="1" sz="1500"/>
+              <a:rPr sz="1500" b="1"/>
               <a:t>CPUE transfer (borrowed catch rate on uncounted days): </a:t>
             </a:r>
             <a:r>
@@ -9365,7 +9516,7 @@
           </a:p>
           <a:p>
             <a:r>
-              <a:rPr b="1" sz="1500"/>
+              <a:rPr sz="1500" b="1"/>
               <a:t>Best donor for the two northern beaches: </a:t>
             </a:r>
             <a:r>
@@ -9382,14 +9533,16 @@
             <a:spLocks noGrp="1"/>
           </p:cNvSpPr>
           <p:nvPr>
-            <p:ph idx="11" sz="half"/>
+            <p:ph sz="half" idx="11"/>
           </p:nvPr>
         </p:nvSpPr>
         <p:spPr/>
         <p:txBody>
           <a:bodyPr/>
           <a:lstStyle/>
-          <a:p/>
+          <a:p>
+            <a:endParaRPr/>
+          </a:p>
         </p:txBody>
       </p:sp>
       <p:pic>
@@ -9401,7 +9554,7 @@
           <p:nvPr/>
         </p:nvPicPr>
         <p:blipFill>
-          <a:blip r:embed="rId2"/>
+          <a:blip r:embed="rId3"/>
           <a:stretch>
             <a:fillRect/>
           </a:stretch>
@@ -9425,7 +9578,7 @@
 </file>
 
 <file path=ppt/slides/slide7.xml><?xml version="1.0" encoding="utf-8"?>
-<p:sld xmlns:a="http://schemas.openxmlformats.org/drawingml/2006/main" xmlns:p="http://schemas.openxmlformats.org/presentationml/2006/main" xmlns:r="http://schemas.openxmlformats.org/officeDocument/2006/relationships">
+<p:sld xmlns:a="http://schemas.openxmlformats.org/drawingml/2006/main" xmlns:r="http://schemas.openxmlformats.org/officeDocument/2006/relationships" xmlns:p="http://schemas.openxmlformats.org/presentationml/2006/main">
   <p:cSld>
     <p:spTree>
       <p:nvGrpSpPr>
@@ -9433,7 +9586,14 @@
         <p:cNvGrpSpPr/>
         <p:nvPr/>
       </p:nvGrpSpPr>
-      <p:grpSpPr/>
+      <p:grpSpPr>
+        <a:xfrm>
+          <a:off x="0" y="0"/>
+          <a:ext cx="0" cy="0"/>
+          <a:chOff x="0" y="0"/>
+          <a:chExt cx="0" cy="0"/>
+        </a:xfrm>
+      </p:grpSpPr>
       <p:sp>
         <p:nvSpPr>
           <p:cNvPr id="2" name="Title 1"/>
@@ -9464,7 +9624,7 @@
 </file>
 
 <file path=ppt/slides/slide8.xml><?xml version="1.0" encoding="utf-8"?>
-<p:sld xmlns:a="http://schemas.openxmlformats.org/drawingml/2006/main" xmlns:p="http://schemas.openxmlformats.org/presentationml/2006/main" xmlns:r="http://schemas.openxmlformats.org/officeDocument/2006/relationships">
+<p:sld xmlns:a="http://schemas.openxmlformats.org/drawingml/2006/main" xmlns:r="http://schemas.openxmlformats.org/officeDocument/2006/relationships" xmlns:p="http://schemas.openxmlformats.org/presentationml/2006/main">
   <p:cSld>
     <p:spTree>
       <p:nvGrpSpPr>
@@ -9472,7 +9632,14 @@
         <p:cNvGrpSpPr/>
         <p:nvPr/>
       </p:nvGrpSpPr>
-      <p:grpSpPr/>
+      <p:grpSpPr>
+        <a:xfrm>
+          <a:off x="0" y="0"/>
+          <a:ext cx="0" cy="0"/>
+          <a:chOff x="0" y="0"/>
+          <a:chExt cx="0" cy="0"/>
+        </a:xfrm>
+      </p:grpSpPr>
       <p:sp>
         <p:nvSpPr>
           <p:cNvPr id="2" name="Title 1"/>
@@ -9501,7 +9668,7 @@
             <a:spLocks noGrp="1"/>
           </p:cNvSpPr>
           <p:nvPr>
-            <p:ph idx="1" sz="half"/>
+            <p:ph sz="half" idx="1"/>
           </p:nvPr>
         </p:nvSpPr>
         <p:spPr/>
@@ -9510,7 +9677,7 @@
           <a:lstStyle/>
           <a:p>
             <a:r>
-              <a:rPr b="1" sz="1500"/>
+              <a:rPr sz="1500" b="1"/>
               <a:t>Count 2 of a 4- or 5-day series; </a:t>
             </a:r>
             <a:r>
@@ -9526,7 +9693,7 @@
           </a:p>
           <a:p>
             <a:r>
-              <a:rPr b="1" sz="1500"/>
+              <a:rPr sz="1500" b="1"/>
               <a:t>Read it as 45% of open days, floor of two.</a:t>
             </a:r>
           </a:p>
@@ -9545,14 +9712,16 @@
             <a:spLocks noGrp="1"/>
           </p:cNvSpPr>
           <p:nvPr>
-            <p:ph idx="11" sz="half"/>
+            <p:ph sz="half" idx="11"/>
           </p:nvPr>
         </p:nvSpPr>
         <p:spPr/>
         <p:txBody>
           <a:bodyPr/>
           <a:lstStyle/>
-          <a:p/>
+          <a:p>
+            <a:endParaRPr/>
+          </a:p>
         </p:txBody>
       </p:sp>
       <p:pic>
@@ -9564,7 +9733,7 @@
           <p:nvPr/>
         </p:nvPicPr>
         <p:blipFill>
-          <a:blip r:embed="rId2"/>
+          <a:blip r:embed="rId3"/>
           <a:stretch>
             <a:fillRect/>
           </a:stretch>
@@ -9588,7 +9757,7 @@
 </file>
 
 <file path=ppt/slides/slide9.xml><?xml version="1.0" encoding="utf-8"?>
-<p:sld xmlns:a="http://schemas.openxmlformats.org/drawingml/2006/main" xmlns:p="http://schemas.openxmlformats.org/presentationml/2006/main" xmlns:r="http://schemas.openxmlformats.org/officeDocument/2006/relationships">
+<p:sld xmlns:a="http://schemas.openxmlformats.org/drawingml/2006/main" xmlns:r="http://schemas.openxmlformats.org/officeDocument/2006/relationships" xmlns:p="http://schemas.openxmlformats.org/presentationml/2006/main">
   <p:cSld>
     <p:spTree>
       <p:nvGrpSpPr>
@@ -9596,7 +9765,14 @@
         <p:cNvGrpSpPr/>
         <p:nvPr/>
       </p:nvGrpSpPr>
-      <p:grpSpPr/>
+      <p:grpSpPr>
+        <a:xfrm>
+          <a:off x="0" y="0"/>
+          <a:ext cx="0" cy="0"/>
+          <a:chOff x="0" y="0"/>
+          <a:chExt cx="0" cy="0"/>
+        </a:xfrm>
+      </p:grpSpPr>
       <p:sp>
         <p:nvSpPr>
           <p:cNvPr id="2" name="Title 1"/>
@@ -9630,37 +9806,43 @@
         </p:nvSpPr>
         <p:spPr/>
         <p:txBody>
-          <a:bodyPr wrap="square"/>
+          <a:bodyPr wrap="square">
+            <a:normAutofit/>
+          </a:bodyPr>
           <a:lstStyle/>
           <a:p>
             <a:r>
-              <a:rPr b="1"/>
+              <a:rPr sz="2800" b="1" dirty="0"/>
               <a:t>Selecting the largest-effort days beats an even spread by 4-11 CV points </a:t>
             </a:r>
             <a:r>
+              <a:rPr sz="2800" dirty="0"/>
               <a:t>at every series length tested.</a:t>
             </a:r>
           </a:p>
           <a:p>
             <a:r>
-              <a:rPr b="1"/>
+              <a:rPr sz="2800" b="1" dirty="0"/>
               <a:t>Small bias penalty (1-6%), </a:t>
             </a:r>
             <a:r>
+              <a:rPr sz="2800" dirty="0"/>
               <a:t>no worse than the alternatives.</a:t>
             </a:r>
           </a:p>
           <a:p>
             <a:r>
+              <a:rPr sz="2800" dirty="0"/>
               <a:t>The program already does this implicitly, staffing the opening weekend and the biggest tides.</a:t>
             </a:r>
           </a:p>
           <a:p>
             <a:r>
-              <a:rPr b="1"/>
+              <a:rPr sz="2800" b="1" dirty="0"/>
               <a:t>It is correct. </a:t>
             </a:r>
             <a:r>
+              <a:rPr sz="2800" dirty="0"/>
               <a:t>Which days will be largest is well predicted by the schedule, tide height, and day of week.</a:t>
             </a:r>
           </a:p>
@@ -10315,44 +10497,44 @@
         <a:sysClr val="window" lastClr="FFFFFF"/>
       </a:lt1>
       <a:dk2>
-        <a:srgbClr val="1F497D"/>
+        <a:srgbClr val="0E2841"/>
       </a:dk2>
       <a:lt2>
-        <a:srgbClr val="EEECE1"/>
+        <a:srgbClr val="E8E8E8"/>
       </a:lt2>
       <a:accent1>
-        <a:srgbClr val="4F81BD"/>
+        <a:srgbClr val="156082"/>
       </a:accent1>
       <a:accent2>
-        <a:srgbClr val="C0504D"/>
+        <a:srgbClr val="E97132"/>
       </a:accent2>
       <a:accent3>
-        <a:srgbClr val="9BBB59"/>
+        <a:srgbClr val="196B24"/>
       </a:accent3>
       <a:accent4>
-        <a:srgbClr val="8064A2"/>
+        <a:srgbClr val="0F9ED5"/>
       </a:accent4>
       <a:accent5>
-        <a:srgbClr val="4BACC6"/>
+        <a:srgbClr val="A02B93"/>
       </a:accent5>
       <a:accent6>
-        <a:srgbClr val="F79646"/>
+        <a:srgbClr val="4EA72E"/>
       </a:accent6>
       <a:hlink>
-        <a:srgbClr val="0000FF"/>
+        <a:srgbClr val="467886"/>
       </a:hlink>
       <a:folHlink>
-        <a:srgbClr val="800080"/>
+        <a:srgbClr val="96607D"/>
       </a:folHlink>
     </a:clrScheme>
     <a:fontScheme name="Office">
       <a:majorFont>
-        <a:latin typeface="Calibri"/>
+        <a:latin typeface="Aptos Display" panose="02110004020202020204"/>
         <a:ea typeface=""/>
         <a:cs typeface=""/>
-        <a:font script="Jpan" typeface="ＭＳ Ｐゴシック"/>
+        <a:font script="Jpan" typeface="游ゴシック Light"/>
         <a:font script="Hang" typeface="맑은 고딕"/>
-        <a:font script="Hans" typeface="宋体"/>
+        <a:font script="Hans" typeface="等线 Light"/>
         <a:font script="Hant" typeface="新細明體"/>
         <a:font script="Arab" typeface="Times New Roman"/>
         <a:font script="Hebr" typeface="Times New Roman"/>
@@ -10380,14 +10562,31 @@
         <a:font script="Viet" typeface="Times New Roman"/>
         <a:font script="Uigh" typeface="Microsoft Uighur"/>
         <a:font script="Geor" typeface="Sylfaen"/>
+        <a:font script="Armn" typeface="Arial"/>
+        <a:font script="Bugi" typeface="Leelawadee UI"/>
+        <a:font script="Bopo" typeface="Microsoft JhengHei"/>
+        <a:font script="Java" typeface="Javanese Text"/>
+        <a:font script="Lisu" typeface="Segoe UI"/>
+        <a:font script="Mymr" typeface="Myanmar Text"/>
+        <a:font script="Nkoo" typeface="Ebrima"/>
+        <a:font script="Olck" typeface="Nirmala UI"/>
+        <a:font script="Osma" typeface="Ebrima"/>
+        <a:font script="Phag" typeface="Phagspa"/>
+        <a:font script="Syrn" typeface="Estrangelo Edessa"/>
+        <a:font script="Syrj" typeface="Estrangelo Edessa"/>
+        <a:font script="Syre" typeface="Estrangelo Edessa"/>
+        <a:font script="Sora" typeface="Nirmala UI"/>
+        <a:font script="Tale" typeface="Microsoft Tai Le"/>
+        <a:font script="Talu" typeface="Microsoft New Tai Lue"/>
+        <a:font script="Tfng" typeface="Ebrima"/>
       </a:majorFont>
       <a:minorFont>
-        <a:latin typeface="Calibri"/>
+        <a:latin typeface="Aptos" panose="02110004020202020204"/>
         <a:ea typeface=""/>
         <a:cs typeface=""/>
-        <a:font script="Jpan" typeface="ＭＳ Ｐゴシック"/>
+        <a:font script="Jpan" typeface="游ゴシック"/>
         <a:font script="Hang" typeface="맑은 고딕"/>
-        <a:font script="Hans" typeface="宋体"/>
+        <a:font script="Hans" typeface="等线"/>
         <a:font script="Hant" typeface="新細明體"/>
         <a:font script="Arab" typeface="Arial"/>
         <a:font script="Hebr" typeface="Arial"/>
@@ -10415,6 +10614,23 @@
         <a:font script="Viet" typeface="Arial"/>
         <a:font script="Uigh" typeface="Microsoft Uighur"/>
         <a:font script="Geor" typeface="Sylfaen"/>
+        <a:font script="Armn" typeface="Arial"/>
+        <a:font script="Bugi" typeface="Leelawadee UI"/>
+        <a:font script="Bopo" typeface="Microsoft JhengHei"/>
+        <a:font script="Java" typeface="Javanese Text"/>
+        <a:font script="Lisu" typeface="Segoe UI"/>
+        <a:font script="Mymr" typeface="Myanmar Text"/>
+        <a:font script="Nkoo" typeface="Ebrima"/>
+        <a:font script="Olck" typeface="Nirmala UI"/>
+        <a:font script="Osma" typeface="Ebrima"/>
+        <a:font script="Phag" typeface="Phagspa"/>
+        <a:font script="Syrn" typeface="Estrangelo Edessa"/>
+        <a:font script="Syrj" typeface="Estrangelo Edessa"/>
+        <a:font script="Syre" typeface="Estrangelo Edessa"/>
+        <a:font script="Sora" typeface="Nirmala UI"/>
+        <a:font script="Tale" typeface="Microsoft Tai Le"/>
+        <a:font script="Talu" typeface="Microsoft New Tai Lue"/>
+        <a:font script="Tfng" typeface="Ebrima"/>
       </a:minorFont>
     </a:fontScheme>
     <a:fmtScheme name="Office">
@@ -10426,180 +10642,136 @@
           <a:gsLst>
             <a:gs pos="0">
               <a:schemeClr val="phClr">
-                <a:tint val="50000"/>
-                <a:satMod val="300000"/>
+                <a:lumMod val="110000"/>
+                <a:satMod val="105000"/>
+                <a:tint val="67000"/>
               </a:schemeClr>
             </a:gs>
-            <a:gs pos="35000">
+            <a:gs pos="50000">
               <a:schemeClr val="phClr">
-                <a:tint val="37000"/>
-                <a:satMod val="300000"/>
+                <a:lumMod val="105000"/>
+                <a:satMod val="103000"/>
+                <a:tint val="73000"/>
               </a:schemeClr>
             </a:gs>
             <a:gs pos="100000">
               <a:schemeClr val="phClr">
-                <a:tint val="15000"/>
-                <a:satMod val="350000"/>
+                <a:lumMod val="105000"/>
+                <a:satMod val="109000"/>
+                <a:tint val="81000"/>
               </a:schemeClr>
             </a:gs>
           </a:gsLst>
-          <a:lin ang="16200000" scaled="1"/>
+          <a:lin ang="5400000" scaled="0"/>
         </a:gradFill>
         <a:gradFill rotWithShape="1">
           <a:gsLst>
             <a:gs pos="0">
               <a:schemeClr val="phClr">
-                <a:tint val="100000"/>
+                <a:satMod val="103000"/>
+                <a:lumMod val="102000"/>
+                <a:tint val="94000"/>
+              </a:schemeClr>
+            </a:gs>
+            <a:gs pos="50000">
+              <a:schemeClr val="phClr">
+                <a:satMod val="110000"/>
+                <a:lumMod val="100000"/>
                 <a:shade val="100000"/>
-                <a:satMod val="130000"/>
               </a:schemeClr>
             </a:gs>
             <a:gs pos="100000">
               <a:schemeClr val="phClr">
-                <a:tint val="50000"/>
-                <a:shade val="100000"/>
-                <a:satMod val="350000"/>
+                <a:lumMod val="99000"/>
+                <a:satMod val="120000"/>
+                <a:shade val="78000"/>
               </a:schemeClr>
             </a:gs>
           </a:gsLst>
-          <a:lin ang="16200000" scaled="0"/>
+          <a:lin ang="5400000" scaled="0"/>
         </a:gradFill>
       </a:fillStyleLst>
       <a:lnStyleLst>
-        <a:ln w="9525" cap="flat" cmpd="sng" algn="ctr">
+        <a:ln w="12700" cap="flat" cmpd="sng" algn="ctr">
           <a:solidFill>
-            <a:schemeClr val="phClr">
-              <a:shade val="95000"/>
-              <a:satMod val="105000"/>
-            </a:schemeClr>
+            <a:schemeClr val="phClr"/>
           </a:solidFill>
           <a:prstDash val="solid"/>
+          <a:miter lim="800000"/>
+        </a:ln>
+        <a:ln w="19050" cap="flat" cmpd="sng" algn="ctr">
+          <a:solidFill>
+            <a:schemeClr val="phClr"/>
+          </a:solidFill>
+          <a:prstDash val="solid"/>
+          <a:miter lim="800000"/>
         </a:ln>
         <a:ln w="25400" cap="flat" cmpd="sng" algn="ctr">
           <a:solidFill>
             <a:schemeClr val="phClr"/>
           </a:solidFill>
           <a:prstDash val="solid"/>
-        </a:ln>
-        <a:ln w="38100" cap="flat" cmpd="sng" algn="ctr">
-          <a:solidFill>
-            <a:schemeClr val="phClr"/>
-          </a:solidFill>
-          <a:prstDash val="solid"/>
+          <a:miter lim="800000"/>
         </a:ln>
       </a:lnStyleLst>
       <a:effectStyleLst>
         <a:effectStyle>
+          <a:effectLst/>
+        </a:effectStyle>
+        <a:effectStyle>
+          <a:effectLst/>
+        </a:effectStyle>
+        <a:effectStyle>
           <a:effectLst>
-            <a:outerShdw blurRad="40000" dist="20000" dir="5400000" rotWithShape="0">
+            <a:outerShdw blurRad="57150" dist="19050" dir="5400000" algn="ctr" rotWithShape="0">
               <a:srgbClr val="000000">
-                <a:alpha val="38000"/>
+                <a:alpha val="63000"/>
               </a:srgbClr>
             </a:outerShdw>
           </a:effectLst>
-        </a:effectStyle>
-        <a:effectStyle>
-          <a:effectLst>
-            <a:outerShdw blurRad="40000" dist="23000" dir="5400000" rotWithShape="0">
-              <a:srgbClr val="000000">
-                <a:alpha val="35000"/>
-              </a:srgbClr>
-            </a:outerShdw>
-          </a:effectLst>
-        </a:effectStyle>
-        <a:effectStyle>
-          <a:effectLst>
-            <a:outerShdw blurRad="40000" dist="23000" dir="5400000" rotWithShape="0">
-              <a:srgbClr val="000000">
-                <a:alpha val="35000"/>
-              </a:srgbClr>
-            </a:outerShdw>
-          </a:effectLst>
-          <a:scene3d>
-            <a:camera prst="orthographicFront">
-              <a:rot lat="0" lon="0" rev="0"/>
-            </a:camera>
-            <a:lightRig rig="threePt" dir="t">
-              <a:rot lat="0" lon="0" rev="1200000"/>
-            </a:lightRig>
-          </a:scene3d>
-          <a:sp3d>
-            <a:bevelT w="63500" h="25400"/>
-          </a:sp3d>
         </a:effectStyle>
       </a:effectStyleLst>
       <a:bgFillStyleLst>
         <a:solidFill>
           <a:schemeClr val="phClr"/>
         </a:solidFill>
+        <a:solidFill>
+          <a:schemeClr val="phClr">
+            <a:tint val="95000"/>
+            <a:satMod val="170000"/>
+          </a:schemeClr>
+        </a:solidFill>
         <a:gradFill rotWithShape="1">
           <a:gsLst>
             <a:gs pos="0">
               <a:schemeClr val="phClr">
-                <a:tint val="40000"/>
-                <a:satMod val="350000"/>
+                <a:tint val="93000"/>
+                <a:satMod val="150000"/>
+                <a:shade val="98000"/>
+                <a:lumMod val="102000"/>
               </a:schemeClr>
             </a:gs>
-            <a:gs pos="40000">
+            <a:gs pos="50000">
               <a:schemeClr val="phClr">
-                <a:tint val="45000"/>
-                <a:shade val="99000"/>
-                <a:satMod val="350000"/>
+                <a:tint val="98000"/>
+                <a:satMod val="130000"/>
+                <a:shade val="90000"/>
+                <a:lumMod val="103000"/>
               </a:schemeClr>
             </a:gs>
             <a:gs pos="100000">
               <a:schemeClr val="phClr">
-                <a:shade val="20000"/>
-                <a:satMod val="255000"/>
+                <a:shade val="63000"/>
+                <a:satMod val="120000"/>
               </a:schemeClr>
             </a:gs>
           </a:gsLst>
-          <a:path path="circle">
-            <a:fillToRect l="50000" t="-80000" r="50000" b="180000"/>
-          </a:path>
-        </a:gradFill>
-        <a:gradFill rotWithShape="1">
-          <a:gsLst>
-            <a:gs pos="0">
-              <a:schemeClr val="phClr">
-                <a:tint val="80000"/>
-                <a:satMod val="300000"/>
-              </a:schemeClr>
-            </a:gs>
-            <a:gs pos="100000">
-              <a:schemeClr val="phClr">
-                <a:shade val="30000"/>
-                <a:satMod val="200000"/>
-              </a:schemeClr>
-            </a:gs>
-          </a:gsLst>
-          <a:path path="circle">
-            <a:fillToRect l="50000" t="50000" r="50000" b="50000"/>
-          </a:path>
+          <a:lin ang="5400000" scaled="0"/>
         </a:gradFill>
       </a:bgFillStyleLst>
     </a:fmtScheme>
   </a:themeElements>
   <a:objectDefaults>
-    <a:spDef>
-      <a:spPr/>
-      <a:bodyPr/>
-      <a:lstStyle/>
-      <a:style>
-        <a:lnRef idx="1">
-          <a:schemeClr val="accent1"/>
-        </a:lnRef>
-        <a:fillRef idx="3">
-          <a:schemeClr val="accent1"/>
-        </a:fillRef>
-        <a:effectRef idx="2">
-          <a:schemeClr val="accent1"/>
-        </a:effectRef>
-        <a:fontRef idx="minor">
-          <a:schemeClr val="lt1"/>
-        </a:fontRef>
-      </a:style>
-    </a:spDef>
     <a:lnDef>
       <a:spPr/>
       <a:bodyPr/>
@@ -10621,10 +10793,38 @@
     </a:lnDef>
   </a:objectDefaults>
   <a:extraClrSchemeLst/>
+  <a:extLst>
+    <a:ext uri="{05A4C25C-085E-4340-85A3-A5531E510DB2}">
+      <thm15:themeFamily xmlns:thm15="http://schemas.microsoft.com/office/thememl/2012/main" name="Office Theme" id="{2E142A2C-CD16-42D6-873A-C26D2A0506FA}" vid="{1BDDFF52-6CD6-40A5-AB3C-68EB2F1E4D0A}"/>
+    </a:ext>
+  </a:extLst>
 </a:theme>
 </file>
 
 <file path=customXml/item1.xml><?xml version="1.0" encoding="utf-8"?>
+<?mso-contentType ?>
+<FormTemplates xmlns="http://schemas.microsoft.com/sharepoint/v3/contenttype/forms">
+  <Display>DocumentLibraryForm</Display>
+  <Edit>DocumentLibraryForm</Edit>
+  <New>DocumentLibraryForm</New>
+</FormTemplates>
+</file>
+
+<file path=customXml/item2.xml><?xml version="1.0" encoding="utf-8"?>
+<p:properties xmlns:p="http://schemas.microsoft.com/office/2006/metadata/properties" xmlns:xsi="http://www.w3.org/2001/XMLSchema-instance" xmlns:pc="http://schemas.microsoft.com/office/infopath/2007/PartnerControls">
+  <documentManagement>
+    <_ip_UnifiedCompliancePolicyUIAction xmlns="http://schemas.microsoft.com/sharepoint/v3" xsi:nil="true"/>
+    <_ip_UnifiedCompliancePolicyProperties xmlns="http://schemas.microsoft.com/sharepoint/v3" xsi:nil="true"/>
+    <lcf76f155ced4ddcb4097134ff3c332f xmlns="c55fcec3-bb2d-4ee6-a56c-bdfd532525fc">
+      <Terms xmlns="http://schemas.microsoft.com/office/infopath/2007/PartnerControls"/>
+    </lcf76f155ced4ddcb4097134ff3c332f>
+    <TaxCatchAll xmlns="73c3c465-f3d4-4d37-9c58-e2ee535ad8e0" xsi:nil="true"/>
+    <NameinDAM xmlns="c55fcec3-bb2d-4ee6-a56c-bdfd532525fc" xsi:nil="true"/>
+  </documentManagement>
+</p:properties>
+</file>
+
+<file path=customXml/item3.xml><?xml version="1.0" encoding="utf-8"?>
 <ct:contentTypeSchema xmlns:ct="http://schemas.microsoft.com/office/2006/metadata/contentType" xmlns:ma="http://schemas.microsoft.com/office/2006/metadata/properties/metaAttributes" ct:_="" ma:_="" ma:contentTypeName="Document" ma:contentTypeID="0x01010053DF6C379CEE474091FA722A741F562C" ma:contentTypeVersion="18" ma:contentTypeDescription="Create a new document." ma:contentTypeScope="" ma:versionID="6d943700fdf77bec9a4960ab6af060cd">
   <xsd:schema xmlns:xsd="http://www.w3.org/2001/XMLSchema" xmlns:xs="http://www.w3.org/2001/XMLSchema" xmlns:p="http://schemas.microsoft.com/office/2006/metadata/properties" xmlns:ns1="http://schemas.microsoft.com/sharepoint/v3" xmlns:ns2="c55fcec3-bb2d-4ee6-a56c-bdfd532525fc" xmlns:ns3="73c3c465-f3d4-4d37-9c58-e2ee535ad8e0" targetNamespace="http://schemas.microsoft.com/office/2006/metadata/properties" ma:root="true" ma:fieldsID="f5f2cddc585f7bcfd68998bfccb1991a" ns1:_="" ns2:_="" ns3:_="">
     <xsd:import namespace="http://schemas.microsoft.com/sharepoint/v3"/>
@@ -10884,45 +11084,10 @@
 </ct:contentTypeSchema>
 </file>
 
-<file path=customXml/item2.xml><?xml version="1.0" encoding="utf-8"?>
-<p:properties xmlns:p="http://schemas.microsoft.com/office/2006/metadata/properties" xmlns:xsi="http://www.w3.org/2001/XMLSchema-instance" xmlns:pc="http://schemas.microsoft.com/office/infopath/2007/PartnerControls">
-  <documentManagement>
-    <_ip_UnifiedCompliancePolicyUIAction xmlns="http://schemas.microsoft.com/sharepoint/v3" xsi:nil="true"/>
-    <_ip_UnifiedCompliancePolicyProperties xmlns="http://schemas.microsoft.com/sharepoint/v3" xsi:nil="true"/>
-    <lcf76f155ced4ddcb4097134ff3c332f xmlns="c55fcec3-bb2d-4ee6-a56c-bdfd532525fc">
-      <Terms xmlns="http://schemas.microsoft.com/office/infopath/2007/PartnerControls"/>
-    </lcf76f155ced4ddcb4097134ff3c332f>
-    <TaxCatchAll xmlns="73c3c465-f3d4-4d37-9c58-e2ee535ad8e0" xsi:nil="true"/>
-    <NameinDAM xmlns="c55fcec3-bb2d-4ee6-a56c-bdfd532525fc" xsi:nil="true"/>
-  </documentManagement>
-</p:properties>
-</file>
-
-<file path=customXml/item3.xml><?xml version="1.0" encoding="utf-8"?>
-<?mso-contentType ?>
-<FormTemplates xmlns="http://schemas.microsoft.com/sharepoint/v3/contenttype/forms">
-  <Display>DocumentLibraryForm</Display>
-  <Edit>DocumentLibraryForm</Edit>
-  <New>DocumentLibraryForm</New>
-</FormTemplates>
-</file>
-
 <file path=customXml/itemProps1.xml><?xml version="1.0" encoding="utf-8"?>
-<ds:datastoreItem xmlns:ds="http://schemas.openxmlformats.org/officeDocument/2006/customXml" ds:itemID="{236337B2-684D-4381-98D1-02BFB3997964}">
+<ds:datastoreItem xmlns:ds="http://schemas.openxmlformats.org/officeDocument/2006/customXml" ds:itemID="{01EA9719-73E1-4AAC-90C2-9E9ED399E0F4}">
   <ds:schemaRefs>
-    <ds:schemaRef ds:uri="http://schemas.microsoft.com/office/2006/metadata/contentType"/>
-    <ds:schemaRef ds:uri="http://schemas.microsoft.com/office/2006/metadata/properties/metaAttributes"/>
-    <ds:schemaRef ds:uri="http://www.w3.org/2001/XMLSchema"/>
-    <ds:schemaRef ds:uri="http://schemas.microsoft.com/office/2006/metadata/properties"/>
-    <ds:schemaRef ds:uri="http://schemas.microsoft.com/sharepoint/v3"/>
-    <ds:schemaRef ds:uri="c55fcec3-bb2d-4ee6-a56c-bdfd532525fc"/>
-    <ds:schemaRef ds:uri="73c3c465-f3d4-4d37-9c58-e2ee535ad8e0"/>
-    <ds:schemaRef ds:uri="http://schemas.microsoft.com/office/2006/documentManagement/types"/>
-    <ds:schemaRef ds:uri="http://schemas.microsoft.com/office/infopath/2007/PartnerControls"/>
-    <ds:schemaRef ds:uri="http://schemas.openxmlformats.org/package/2006/metadata/core-properties"/>
-    <ds:schemaRef ds:uri="http://purl.org/dc/elements/1.1/"/>
-    <ds:schemaRef ds:uri="http://purl.org/dc/terms/"/>
-    <ds:schemaRef ds:uri="http://schemas.microsoft.com/internal/obd"/>
+    <ds:schemaRef ds:uri="http://schemas.microsoft.com/sharepoint/v3/contenttype/forms"/>
   </ds:schemaRefs>
 </ds:datastoreItem>
 </file>
@@ -10946,9 +11111,21 @@
 </file>
 
 <file path=customXml/itemProps3.xml><?xml version="1.0" encoding="utf-8"?>
-<ds:datastoreItem xmlns:ds="http://schemas.openxmlformats.org/officeDocument/2006/customXml" ds:itemID="{01EA9719-73E1-4AAC-90C2-9E9ED399E0F4}">
+<ds:datastoreItem xmlns:ds="http://schemas.openxmlformats.org/officeDocument/2006/customXml" ds:itemID="{236337B2-684D-4381-98D1-02BFB3997964}">
   <ds:schemaRefs>
-    <ds:schemaRef ds:uri="http://schemas.microsoft.com/sharepoint/v3/contenttype/forms"/>
+    <ds:schemaRef ds:uri="http://schemas.microsoft.com/office/2006/metadata/contentType"/>
+    <ds:schemaRef ds:uri="http://schemas.microsoft.com/office/2006/metadata/properties/metaAttributes"/>
+    <ds:schemaRef ds:uri="http://www.w3.org/2001/XMLSchema"/>
+    <ds:schemaRef ds:uri="http://schemas.microsoft.com/office/2006/metadata/properties"/>
+    <ds:schemaRef ds:uri="http://schemas.microsoft.com/sharepoint/v3"/>
+    <ds:schemaRef ds:uri="c55fcec3-bb2d-4ee6-a56c-bdfd532525fc"/>
+    <ds:schemaRef ds:uri="73c3c465-f3d4-4d37-9c58-e2ee535ad8e0"/>
+    <ds:schemaRef ds:uri="http://schemas.microsoft.com/office/2006/documentManagement/types"/>
+    <ds:schemaRef ds:uri="http://schemas.microsoft.com/office/infopath/2007/PartnerControls"/>
+    <ds:schemaRef ds:uri="http://schemas.openxmlformats.org/package/2006/metadata/core-properties"/>
+    <ds:schemaRef ds:uri="http://purl.org/dc/elements/1.1/"/>
+    <ds:schemaRef ds:uri="http://purl.org/dc/terms/"/>
+    <ds:schemaRef ds:uri="http://schemas.microsoft.com/internal/obd"/>
   </ds:schemaRefs>
 </ds:datastoreItem>
 </file>

--- a/07_presentations/razor-clam-sampling-design.pptx
+++ b/07_presentations/razor-clam-sampling-design.pptx
@@ -13,6 +13,12 @@
   <p:sldIdLst>
     <p:sldId id="256" r:id="rId5"/>
     <p:sldId id="257" r:id="rId6"/>
+    <p:sldId id="276" r:id="rId33"/>
+    <p:sldId id="277" r:id="rId34"/>
+    <p:sldId id="278" r:id="rId35"/>
+    <p:sldId id="279" r:id="rId36"/>
+    <p:sldId id="280" r:id="rId37"/>
+    <p:sldId id="281" r:id="rId38"/>
     <p:sldId id="258" r:id="rId7"/>
     <p:sldId id="259" r:id="rId8"/>
     <p:sldId id="260" r:id="rId9"/>
@@ -28,8 +34,8 @@
     <p:sldId id="270" r:id="rId19"/>
     <p:sldId id="271" r:id="rId20"/>
     <p:sldId id="272" r:id="rId21"/>
-    <p:sldId id="273" r:id="rId22"/>
-    <p:sldId id="274" r:id="rId23"/>
+    <p:sldId id="282" r:id="rId39"/>
+    <p:sldId id="283" r:id="rId40"/>
     <p:sldId id="275" r:id="rId24"/>
   </p:sldIdLst>
   <p:sldSz cx="12192000" cy="6858000"/>
@@ -855,8 +861,8 @@
 </p:notes>
 </file>
 
-<file path=ppt/notesSlides/notesSlide14.xml><?xml version="1.0" encoding="utf-8"?>
-<p:notes xmlns:a="http://schemas.openxmlformats.org/drawingml/2006/main" xmlns:r="http://schemas.openxmlformats.org/officeDocument/2006/relationships" xmlns:p="http://schemas.openxmlformats.org/presentationml/2006/main">
+<file path=ppt/notesSlides/notesSlide16.xml><?xml version="1.0" encoding="utf-8"?>
+<p:notes xmlns:a="http://schemas.openxmlformats.org/drawingml/2006/main" xmlns:p="http://schemas.openxmlformats.org/presentationml/2006/main" xmlns:r="http://schemas.openxmlformats.org/officeDocument/2006/relationships">
   <p:cSld>
     <p:spTree>
       <p:nvGrpSpPr>
@@ -872,51 +878,6 @@
           <a:chExt cx="0" cy="0"/>
         </a:xfrm>
       </p:grpSpPr>
-      <p:sp>
-        <p:nvSpPr>
-          <p:cNvPr id="2" name="Slide Image Placeholder 1"/>
-          <p:cNvSpPr>
-            <a:spLocks noGrp="1" noRot="1" noChangeAspect="1"/>
-          </p:cNvSpPr>
-          <p:nvPr>
-            <p:ph type="sldImg" idx="2"/>
-          </p:nvPr>
-        </p:nvSpPr>
-        <p:spPr/>
-      </p:sp>
-      <p:sp>
-        <p:nvSpPr>
-          <p:cNvPr id="3" name="Notes Placeholder 2"/>
-          <p:cNvSpPr>
-            <a:spLocks noGrp="1"/>
-          </p:cNvSpPr>
-          <p:nvPr>
-            <p:ph type="body" sz="quarter" idx="3"/>
-          </p:nvPr>
-        </p:nvSpPr>
-        <p:spPr/>
-        <p:txBody>
-          <a:bodyPr/>
-          <a:lstStyle/>
-          <a:p>
-            <a:r>
-              <a:t>Sec 10.3 / new Fig 16. The pilot is not one survey but the start of a rebuilt table; and because it is whole-beach it fixes the within-beach section allocation that partial surveys leave imputed.</a:t>
-            </a:r>
-          </a:p>
-        </p:txBody>
-      </p:sp>
-      <p:sp>
-        <p:nvSpPr>
-          <p:cNvPr id="4" name="Slide Number Placeholder 3"/>
-          <p:cNvSpPr>
-            <a:spLocks noGrp="1"/>
-          </p:cNvSpPr>
-          <p:nvPr>
-            <p:ph type="sldNum" sz="quarter" idx="5"/>
-          </p:nvPr>
-        </p:nvSpPr>
-        <p:spPr/>
-      </p:sp>
     </p:spTree>
   </p:cSld>
   <p:clrMapOvr>
@@ -925,8 +886,8 @@
 </p:notes>
 </file>
 
-<file path=ppt/notesSlides/notesSlide15.xml><?xml version="1.0" encoding="utf-8"?>
-<p:notes xmlns:a="http://schemas.openxmlformats.org/drawingml/2006/main" xmlns:r="http://schemas.openxmlformats.org/officeDocument/2006/relationships" xmlns:p="http://schemas.openxmlformats.org/presentationml/2006/main">
+<file path=ppt/notesSlides/notesSlide17.xml><?xml version="1.0" encoding="utf-8"?>
+<p:notes xmlns:a="http://schemas.openxmlformats.org/drawingml/2006/main" xmlns:p="http://schemas.openxmlformats.org/presentationml/2006/main" xmlns:r="http://schemas.openxmlformats.org/officeDocument/2006/relationships">
   <p:cSld>
     <p:spTree>
       <p:nvGrpSpPr>
@@ -942,51 +903,56 @@
           <a:chExt cx="0" cy="0"/>
         </a:xfrm>
       </p:grpSpPr>
-      <p:sp>
-        <p:nvSpPr>
-          <p:cNvPr id="2" name="Slide Image Placeholder 1"/>
-          <p:cNvSpPr>
-            <a:spLocks noGrp="1" noRot="1" noChangeAspect="1"/>
-          </p:cNvSpPr>
-          <p:nvPr>
-            <p:ph type="sldImg" idx="2"/>
-          </p:nvPr>
-        </p:nvSpPr>
-        <p:spPr/>
-      </p:sp>
-      <p:sp>
-        <p:nvSpPr>
-          <p:cNvPr id="3" name="Notes Placeholder 2"/>
-          <p:cNvSpPr>
-            <a:spLocks noGrp="1"/>
-          </p:cNvSpPr>
-          <p:nvPr>
-            <p:ph type="body" sz="quarter" idx="3"/>
-          </p:nvPr>
-        </p:nvSpPr>
-        <p:spPr/>
-        <p:txBody>
-          <a:bodyPr/>
-          <a:lstStyle/>
-          <a:p>
-            <a:r>
-              <a:t>Reordered after the Quinault correction. #1 (the pilot) and #2 (hold the donor floor) are the highest-leverage moves. #4 replaces the old 'condition the pullback on tribal data-sharing', which was wrong: there is no tribal offset.</a:t>
-            </a:r>
-          </a:p>
-        </p:txBody>
-      </p:sp>
-      <p:sp>
-        <p:nvSpPr>
-          <p:cNvPr id="4" name="Slide Number Placeholder 3"/>
-          <p:cNvSpPr>
-            <a:spLocks noGrp="1"/>
-          </p:cNvSpPr>
-          <p:nvPr>
-            <p:ph type="sldNum" sz="quarter" idx="5"/>
-          </p:nvPr>
-        </p:nvSpPr>
-        <p:spPr/>
-      </p:sp>
+    </p:spTree>
+  </p:cSld>
+  <p:clrMapOvr>
+    <a:masterClrMapping/>
+  </p:clrMapOvr>
+</p:notes>
+</file>
+
+<file path=ppt/notesSlides/notesSlide18.xml><?xml version="1.0" encoding="utf-8"?>
+<p:notes xmlns:a="http://schemas.openxmlformats.org/drawingml/2006/main" xmlns:p="http://schemas.openxmlformats.org/presentationml/2006/main" xmlns:r="http://schemas.openxmlformats.org/officeDocument/2006/relationships">
+  <p:cSld>
+    <p:spTree>
+      <p:nvGrpSpPr>
+        <p:cNvPr id="1" name=""/>
+        <p:cNvGrpSpPr/>
+        <p:nvPr/>
+      </p:nvGrpSpPr>
+      <p:grpSpPr>
+        <a:xfrm>
+          <a:off x="0" y="0"/>
+          <a:ext cx="0" cy="0"/>
+          <a:chOff x="0" y="0"/>
+          <a:chExt cx="0" cy="0"/>
+        </a:xfrm>
+      </p:grpSpPr>
+    </p:spTree>
+  </p:cSld>
+  <p:clrMapOvr>
+    <a:masterClrMapping/>
+  </p:clrMapOvr>
+</p:notes>
+</file>
+
+<file path=ppt/notesSlides/notesSlide19.xml><?xml version="1.0" encoding="utf-8"?>
+<p:notes xmlns:a="http://schemas.openxmlformats.org/drawingml/2006/main" xmlns:p="http://schemas.openxmlformats.org/presentationml/2006/main" xmlns:r="http://schemas.openxmlformats.org/officeDocument/2006/relationships">
+  <p:cSld>
+    <p:spTree>
+      <p:nvGrpSpPr>
+        <p:cNvPr id="1" name=""/>
+        <p:cNvGrpSpPr/>
+        <p:nvPr/>
+      </p:nvGrpSpPr>
+      <p:grpSpPr>
+        <a:xfrm>
+          <a:off x="0" y="0"/>
+          <a:ext cx="0" cy="0"/>
+          <a:chOff x="0" y="0"/>
+          <a:chExt cx="0" cy="0"/>
+        </a:xfrm>
+      </p:grpSpPr>
     </p:spTree>
   </p:cSld>
   <p:clrMapOvr>
@@ -1057,6 +1023,81 @@
         </p:nvSpPr>
         <p:spPr/>
       </p:sp>
+    </p:spTree>
+  </p:cSld>
+  <p:clrMapOvr>
+    <a:masterClrMapping/>
+  </p:clrMapOvr>
+</p:notes>
+</file>
+
+<file path=ppt/notesSlides/notesSlide20.xml><?xml version="1.0" encoding="utf-8"?>
+<p:notes xmlns:a="http://schemas.openxmlformats.org/drawingml/2006/main" xmlns:p="http://schemas.openxmlformats.org/presentationml/2006/main" xmlns:r="http://schemas.openxmlformats.org/officeDocument/2006/relationships">
+  <p:cSld>
+    <p:spTree>
+      <p:nvGrpSpPr>
+        <p:cNvPr id="1" name=""/>
+        <p:cNvGrpSpPr/>
+        <p:nvPr/>
+      </p:nvGrpSpPr>
+      <p:grpSpPr>
+        <a:xfrm>
+          <a:off x="0" y="0"/>
+          <a:ext cx="0" cy="0"/>
+          <a:chOff x="0" y="0"/>
+          <a:chExt cx="0" cy="0"/>
+        </a:xfrm>
+      </p:grpSpPr>
+    </p:spTree>
+  </p:cSld>
+  <p:clrMapOvr>
+    <a:masterClrMapping/>
+  </p:clrMapOvr>
+</p:notes>
+</file>
+
+<file path=ppt/notesSlides/notesSlide21.xml><?xml version="1.0" encoding="utf-8"?>
+<p:notes xmlns:a="http://schemas.openxmlformats.org/drawingml/2006/main" xmlns:p="http://schemas.openxmlformats.org/presentationml/2006/main" xmlns:r="http://schemas.openxmlformats.org/officeDocument/2006/relationships">
+  <p:cSld>
+    <p:spTree>
+      <p:nvGrpSpPr>
+        <p:cNvPr id="1" name=""/>
+        <p:cNvGrpSpPr/>
+        <p:nvPr/>
+      </p:nvGrpSpPr>
+      <p:grpSpPr>
+        <a:xfrm>
+          <a:off x="0" y="0"/>
+          <a:ext cx="0" cy="0"/>
+          <a:chOff x="0" y="0"/>
+          <a:chExt cx="0" cy="0"/>
+        </a:xfrm>
+      </p:grpSpPr>
+    </p:spTree>
+  </p:cSld>
+  <p:clrMapOvr>
+    <a:masterClrMapping/>
+  </p:clrMapOvr>
+</p:notes>
+</file>
+
+<file path=ppt/notesSlides/notesSlide22.xml><?xml version="1.0" encoding="utf-8"?>
+<p:notes xmlns:a="http://schemas.openxmlformats.org/drawingml/2006/main" xmlns:p="http://schemas.openxmlformats.org/presentationml/2006/main" xmlns:r="http://schemas.openxmlformats.org/officeDocument/2006/relationships">
+  <p:cSld>
+    <p:spTree>
+      <p:nvGrpSpPr>
+        <p:cNvPr id="1" name=""/>
+        <p:cNvGrpSpPr/>
+        <p:nvPr/>
+      </p:nvGrpSpPr>
+      <p:grpSpPr>
+        <a:xfrm>
+          <a:off x="0" y="0"/>
+          <a:ext cx="0" cy="0"/>
+          <a:chOff x="0" y="0"/>
+          <a:chExt cx="0" cy="0"/>
+        </a:xfrm>
+      </p:grpSpPr>
     </p:spTree>
   </p:cSld>
   <p:clrMapOvr>
@@ -8712,284 +8753,6 @@
 </p:sld>
 </file>
 
-<file path=ppt/slides/slide18.xml><?xml version="1.0" encoding="utf-8"?>
-<p:sld xmlns:a="http://schemas.openxmlformats.org/drawingml/2006/main" xmlns:r="http://schemas.openxmlformats.org/officeDocument/2006/relationships" xmlns:p="http://schemas.openxmlformats.org/presentationml/2006/main">
-  <p:cSld>
-    <p:spTree>
-      <p:nvGrpSpPr>
-        <p:cNvPr id="1" name=""/>
-        <p:cNvGrpSpPr/>
-        <p:nvPr/>
-      </p:nvGrpSpPr>
-      <p:grpSpPr>
-        <a:xfrm>
-          <a:off x="0" y="0"/>
-          <a:ext cx="0" cy="0"/>
-          <a:chOff x="0" y="0"/>
-          <a:chExt cx="0" cy="0"/>
-        </a:xfrm>
-      </p:grpSpPr>
-      <p:sp>
-        <p:nvSpPr>
-          <p:cNvPr id="2" name="Title 1"/>
-          <p:cNvSpPr>
-            <a:spLocks noGrp="1"/>
-          </p:cNvSpPr>
-          <p:nvPr>
-            <p:ph type="title"/>
-          </p:nvPr>
-        </p:nvSpPr>
-        <p:spPr/>
-        <p:txBody>
-          <a:bodyPr/>
-          <a:lstStyle/>
-          <a:p>
-            <a:r>
-              <a:t>What it buys: from 18% toward 6%, and a template for partial surveys</a:t>
-            </a:r>
-          </a:p>
-        </p:txBody>
-      </p:sp>
-      <p:sp>
-        <p:nvSpPr>
-          <p:cNvPr id="3" name="Content Placeholder 2"/>
-          <p:cNvSpPr>
-            <a:spLocks noGrp="1"/>
-          </p:cNvSpPr>
-          <p:nvPr>
-            <p:ph sz="half" idx="1"/>
-          </p:nvPr>
-        </p:nvSpPr>
-        <p:spPr>
-          <a:xfrm>
-            <a:off x="593212" y="1837765"/>
-            <a:ext cx="5420180" cy="4053463"/>
-          </a:xfrm>
-        </p:spPr>
-        <p:txBody>
-          <a:bodyPr wrap="square"/>
-          <a:lstStyle/>
-          <a:p>
-            <a:r>
-              <a:rPr sz="1400" b="1" dirty="0"/>
-              <a:t>Today: 18.4% relative </a:t>
-            </a:r>
-            <a:r>
-              <a:rPr sz="1400" b="1" dirty="0" err="1"/>
-              <a:t>sd</a:t>
-            </a:r>
-            <a:r>
-              <a:rPr sz="1400" b="1" dirty="0"/>
-              <a:t> on three daylight surveys, newest 2011. </a:t>
-            </a:r>
-            <a:r>
-              <a:rPr sz="1400" dirty="0"/>
-              <a:t>Between-survey error falls as one over the root of the survey count.</a:t>
-            </a:r>
-          </a:p>
-          <a:p>
-            <a:r>
-              <a:rPr sz="1400" b="1" dirty="0"/>
-              <a:t>A pilot season (~8 whole-beach surveys) </a:t>
-            </a:r>
-            <a:r>
-              <a:rPr sz="1400" dirty="0"/>
-              <a:t>roughly halves it to ~11%; a ~16-survey rebuild reaches ~8%, approaching the ~6% of the refreshed northern beaches.</a:t>
-            </a:r>
-          </a:p>
-          <a:p>
-            <a:r>
-              <a:rPr sz="1400" b="1" dirty="0"/>
-              <a:t>Whole-beach coverage also retires the section-ratio error (</a:t>
-            </a:r>
-            <a:r>
-              <a:rPr sz="1400" b="1" dirty="0" err="1"/>
-              <a:t>sd</a:t>
-            </a:r>
-            <a:r>
-              <a:rPr sz="1400" b="1" dirty="0"/>
-              <a:t> 0.281) </a:t>
-            </a:r>
-            <a:r>
-              <a:rPr sz="1400" dirty="0"/>
-              <a:t>that the historical single-approach partials cannot.</a:t>
-            </a:r>
-          </a:p>
-          <a:p>
-            <a:r>
-              <a:rPr sz="1400" b="1" dirty="0"/>
-              <a:t>It calibrates the section shares, </a:t>
-            </a:r>
-            <a:r>
-              <a:rPr sz="1400" dirty="0"/>
-              <a:t>so future cheap partial surveys (one approach) can be expanded reliably instead of imputed.</a:t>
-            </a:r>
-          </a:p>
-        </p:txBody>
-      </p:sp>
-      <p:sp>
-        <p:nvSpPr>
-          <p:cNvPr id="5" name="Content Placeholder 4"/>
-          <p:cNvSpPr>
-            <a:spLocks noGrp="1"/>
-          </p:cNvSpPr>
-          <p:nvPr>
-            <p:ph sz="half" idx="11"/>
-          </p:nvPr>
-        </p:nvSpPr>
-        <p:spPr/>
-        <p:txBody>
-          <a:bodyPr/>
-          <a:lstStyle/>
-          <a:p>
-            <a:endParaRPr/>
-          </a:p>
-        </p:txBody>
-      </p:sp>
-      <p:pic>
-        <p:nvPicPr>
-          <p:cNvPr id="6" name="Picture 5" descr="fig16_lb_survey_target.png"/>
-          <p:cNvPicPr>
-            <a:picLocks noChangeAspect="1"/>
-          </p:cNvPicPr>
-          <p:nvPr/>
-        </p:nvPicPr>
-        <p:blipFill>
-          <a:blip r:embed="rId3"/>
-          <a:stretch>
-            <a:fillRect/>
-          </a:stretch>
-        </p:blipFill>
-        <p:spPr>
-          <a:xfrm>
-            <a:off x="6178610" y="1692602"/>
-            <a:ext cx="5403790" cy="3242274"/>
-          </a:xfrm>
-          <a:prstGeom prst="rect">
-            <a:avLst/>
-          </a:prstGeom>
-        </p:spPr>
-      </p:pic>
-    </p:spTree>
-  </p:cSld>
-  <p:clrMapOvr>
-    <a:masterClrMapping/>
-  </p:clrMapOvr>
-</p:sld>
-</file>
-
-<file path=ppt/slides/slide19.xml><?xml version="1.0" encoding="utf-8"?>
-<p:sld xmlns:a="http://schemas.openxmlformats.org/drawingml/2006/main" xmlns:r="http://schemas.openxmlformats.org/officeDocument/2006/relationships" xmlns:p="http://schemas.openxmlformats.org/presentationml/2006/main">
-  <p:cSld>
-    <p:spTree>
-      <p:nvGrpSpPr>
-        <p:cNvPr id="1" name=""/>
-        <p:cNvGrpSpPr/>
-        <p:nvPr/>
-      </p:nvGrpSpPr>
-      <p:grpSpPr>
-        <a:xfrm>
-          <a:off x="0" y="0"/>
-          <a:ext cx="0" cy="0"/>
-          <a:chOff x="0" y="0"/>
-          <a:chExt cx="0" cy="0"/>
-        </a:xfrm>
-      </p:grpSpPr>
-      <p:sp>
-        <p:nvSpPr>
-          <p:cNvPr id="2" name="Title 1"/>
-          <p:cNvSpPr>
-            <a:spLocks noGrp="1"/>
-          </p:cNvSpPr>
-          <p:nvPr>
-            <p:ph type="title"/>
-          </p:nvPr>
-        </p:nvSpPr>
-        <p:spPr/>
-        <p:txBody>
-          <a:bodyPr/>
-          <a:lstStyle/>
-          <a:p>
-            <a:r>
-              <a:t>Recommendations, in priority order</a:t>
-            </a:r>
-          </a:p>
-        </p:txBody>
-      </p:sp>
-      <p:sp>
-        <p:nvSpPr>
-          <p:cNvPr id="3" name="Content Placeholder 2"/>
-          <p:cNvSpPr>
-            <a:spLocks noGrp="1"/>
-          </p:cNvSpPr>
-          <p:nvPr>
-            <p:ph idx="1"/>
-          </p:nvPr>
-        </p:nvSpPr>
-        <p:spPr/>
-        <p:txBody>
-          <a:bodyPr wrap="square"/>
-          <a:lstStyle/>
-          <a:p>
-            <a:r>
-              <a:rPr sz="1400" b="1"/>
-              <a:t>1.  Survey Long Beach first. </a:t>
-            </a:r>
-            <a:r>
-              <a:rPr sz="1400"/>
-              <a:t>Run the whole-beach egress pilot, six approaches and about eight staff, both tide conditions. The correction factor is the largest term and Long Beach's table is the thinnest and oldest.</a:t>
-            </a:r>
-          </a:p>
-          <a:p>
-            <a:r>
-              <a:rPr sz="1400" b="1"/>
-              <a:t>2.  Hold the southern donor at its co-management floor. </a:t>
-            </a:r>
-            <a:r>
-              <a:rPr sz="1400"/>
-              <a:t>Keep one of Copalis or Mocrocks state-counted every dig day, which the 2-on / 2-off calendar already delivers. The Quinault's alternate-day counts cannot substitute for the state.</a:t>
-            </a:r>
-          </a:p>
-          <a:p>
-            <a:r>
-              <a:rPr sz="1400" b="1"/>
-              <a:t>3.  Pair the pilot with the northern donor on a subset of days </a:t>
-            </a:r>
-            <a:r>
-              <a:rPr sz="1400"/>
-              <a:t>to measure the imputation transfer directly and tighten the joint-donor error, rather than leaning on the modeled lag curve.</a:t>
-            </a:r>
-          </a:p>
-          <a:p>
-            <a:r>
-              <a:rPr sz="1400" b="1"/>
-              <a:t>4.  Treat the 45% reallocation as optional, not free. </a:t>
-            </a:r>
-            <a:r>
-              <a:rPr sz="1400"/>
-              <a:t>It buys direct Long Beach precision but degrades the donor with no offset; fund Long Beach from dedicated effort where possible.</a:t>
-            </a:r>
-          </a:p>
-          <a:p>
-            <a:r>
-              <a:rPr sz="1400" b="1"/>
-              <a:t>5.  Accept the Copalis floor: </a:t>
-            </a:r>
-            <a:r>
-              <a:rPr sz="1400"/>
-              <a:t>a harvest CV of 0.10 is infeasible there at any sampling rate, only more surveys would move it.</a:t>
-            </a:r>
-          </a:p>
-        </p:txBody>
-      </p:sp>
-    </p:spTree>
-  </p:cSld>
-  <p:clrMapOvr>
-    <a:masterClrMapping/>
-  </p:clrMapOvr>
-</p:sld>
-</file>
-
 <file path=ppt/slides/slide2.xml><?xml version="1.0" encoding="utf-8"?>
 <p:sld xmlns:a="http://schemas.openxmlformats.org/drawingml/2006/main" xmlns:r="http://schemas.openxmlformats.org/officeDocument/2006/relationships" xmlns:p="http://schemas.openxmlformats.org/presentationml/2006/main">
   <p:cSld>
@@ -9114,6 +8877,845 @@
           <a:p>
             <a:r>
               <a:t>Discussion</a:t>
+            </a:r>
+          </a:p>
+        </p:txBody>
+      </p:sp>
+    </p:spTree>
+  </p:cSld>
+  <p:clrMapOvr>
+    <a:masterClrMapping/>
+  </p:clrMapOvr>
+</p:sld>
+</file>
+
+<file path=ppt/slides/slide21.xml><?xml version="1.0" encoding="utf-8"?>
+<p:sld xmlns:a="http://schemas.openxmlformats.org/drawingml/2006/main" xmlns:p="http://schemas.openxmlformats.org/presentationml/2006/main" xmlns:r="http://schemas.openxmlformats.org/officeDocument/2006/relationships">
+  <p:cSld>
+    <p:spTree>
+      <p:nvGrpSpPr>
+        <p:cNvPr id="1" name=""/>
+        <p:cNvGrpSpPr/>
+        <p:nvPr/>
+      </p:nvGrpSpPr>
+      <p:grpSpPr/>
+      <p:sp>
+        <p:nvSpPr>
+          <p:cNvPr id="2" name="Title 1"/>
+          <p:cNvSpPr>
+            <a:spLocks noGrp="1"/>
+          </p:cNvSpPr>
+          <p:nvPr>
+            <p:ph type="ctrTitle"/>
+          </p:nvPr>
+        </p:nvSpPr>
+        <p:spPr/>
+        <p:txBody>
+          <a:bodyPr/>
+          <a:lstStyle/>
+          <a:p>
+            <a:r>
+              <a:t>How the estimate works today</a:t>
+            </a:r>
+          </a:p>
+        </p:txBody>
+      </p:sp>
+    </p:spTree>
+  </p:cSld>
+  <p:clrMapOvr>
+    <a:masterClrMapping/>
+  </p:clrMapOvr>
+</p:sld>
+</file>
+
+<file path=ppt/slides/slide22.xml><?xml version="1.0" encoding="utf-8"?>
+<p:sld xmlns:a="http://schemas.openxmlformats.org/drawingml/2006/main" xmlns:p="http://schemas.openxmlformats.org/presentationml/2006/main" xmlns:r="http://schemas.openxmlformats.org/officeDocument/2006/relationships">
+  <p:cSld>
+    <p:spTree>
+      <p:nvGrpSpPr>
+        <p:cNvPr id="1" name=""/>
+        <p:cNvGrpSpPr/>
+        <p:nvPr/>
+      </p:nvGrpSpPr>
+      <p:grpSpPr/>
+      <p:sp>
+        <p:nvSpPr>
+          <p:cNvPr id="2" name="Title 1"/>
+          <p:cNvSpPr>
+            <a:spLocks noGrp="1"/>
+          </p:cNvSpPr>
+          <p:nvPr>
+            <p:ph type="title"/>
+          </p:nvPr>
+        </p:nvSpPr>
+        <p:spPr/>
+        <p:txBody>
+          <a:bodyPr/>
+          <a:lstStyle/>
+          <a:p>
+            <a:r>
+              <a:t>From a head-count to a season total</a:t>
+            </a:r>
+          </a:p>
+        </p:txBody>
+      </p:sp>
+      <p:pic>
+        <p:nvPicPr>
+          <p:cNvPr id="3" name="Picture 2" descr="fig17_estimation_flow.png"/>
+          <p:cNvPicPr>
+            <a:picLocks noChangeAspect="1"/>
+          </p:cNvPicPr>
+          <p:nvPr/>
+        </p:nvPicPr>
+        <p:blipFill>
+          <a:blip r:embed="rId2"/>
+          <a:stretch>
+            <a:fillRect/>
+          </a:stretch>
+        </p:blipFill>
+        <p:spPr>
+          <a:xfrm>
+            <a:off x="2283460" y="1143000"/>
+            <a:ext cx="7594600" cy="4206240"/>
+          </a:xfrm>
+          <a:prstGeom prst="rect">
+            <a:avLst/>
+          </a:prstGeom>
+        </p:spPr>
+      </p:pic>
+      <p:sp>
+        <p:nvSpPr>
+          <p:cNvPr id="4" name="TextBox 3"/>
+          <p:cNvSpPr txBox="1"/>
+          <p:nvPr/>
+        </p:nvSpPr>
+        <p:spPr>
+          <a:xfrm>
+            <a:off x="594360" y="5532120"/>
+            <a:ext cx="10972800" cy="822960"/>
+          </a:xfrm>
+          <a:prstGeom prst="rect">
+            <a:avLst/>
+          </a:prstGeom>
+          <a:noFill/>
+        </p:spPr>
+        <p:txBody>
+          <a:bodyPr wrap="square">
+            <a:spAutoFit/>
+          </a:bodyPr>
+          <a:lstStyle/>
+          <a:p>
+            <a:r>
+              <a:rPr b="1" sz="1300">
+                <a:solidFill>
+                  <a:srgbClr val="1B3A5C"/>
+                </a:solidFill>
+              </a:rPr>
+              <a:t>In plain terms:  </a:t>
+            </a:r>
+            <a:r>
+              <a:rPr sz="1300"/>
+              <a:t>count the diggers once; divide by the correction factor for the whole day; multiply by catch-per-digger for harvest. On uncounted days both are borrowed. The red step never averages away.</a:t>
+            </a:r>
+          </a:p>
+        </p:txBody>
+      </p:sp>
+    </p:spTree>
+  </p:cSld>
+  <p:clrMapOvr>
+    <a:masterClrMapping/>
+  </p:clrMapOvr>
+</p:sld>
+</file>
+
+<file path=ppt/slides/slide23.xml><?xml version="1.0" encoding="utf-8"?>
+<p:sld xmlns:a="http://schemas.openxmlformats.org/drawingml/2006/main" xmlns:p="http://schemas.openxmlformats.org/presentationml/2006/main" xmlns:r="http://schemas.openxmlformats.org/officeDocument/2006/relationships">
+  <p:cSld>
+    <p:spTree>
+      <p:nvGrpSpPr>
+        <p:cNvPr id="1" name=""/>
+        <p:cNvGrpSpPr/>
+        <p:nvPr/>
+      </p:nvGrpSpPr>
+      <p:grpSpPr/>
+      <p:sp>
+        <p:nvSpPr>
+          <p:cNvPr id="2" name="Title 1"/>
+          <p:cNvSpPr>
+            <a:spLocks noGrp="1"/>
+          </p:cNvSpPr>
+          <p:nvPr>
+            <p:ph type="title"/>
+          </p:nvPr>
+        </p:nvSpPr>
+        <p:spPr/>
+        <p:txBody>
+          <a:bodyPr/>
+          <a:lstStyle/>
+          <a:p>
+            <a:r>
+              <a:t>The estimate in four equations</a:t>
+            </a:r>
+          </a:p>
+        </p:txBody>
+      </p:sp>
+      <p:sp>
+        <p:nvSpPr>
+          <p:cNvPr id="3" name="TextBox 2"/>
+          <p:cNvSpPr txBox="1"/>
+          <p:nvPr/>
+        </p:nvSpPr>
+        <p:spPr>
+          <a:xfrm>
+            <a:off x="640080" y="1371600"/>
+            <a:ext cx="10972800" cy="4206240"/>
+          </a:xfrm>
+          <a:prstGeom prst="rect">
+            <a:avLst/>
+          </a:prstGeom>
+          <a:noFill/>
+        </p:spPr>
+        <p:txBody>
+          <a:bodyPr wrap="square">
+            <a:spAutoFit/>
+          </a:bodyPr>
+          <a:lstStyle/>
+          <a:p>
+            <a:pPr>
+              <a:spcAft>
+                <a:spcPts val="600"/>
+              </a:spcAft>
+            </a:pPr>
+            <a:r>
+              <a:rPr b="1" sz="2000">
+                <a:solidFill>
+                  <a:srgbClr val="1B3A5C"/>
+                </a:solidFill>
+                <a:latin typeface="Consolas"/>
+              </a:rPr>
+              <a:t>CPUE  =  clams / diggers</a:t>
+            </a:r>
+            <a:r>
+              <a:rPr sz="1300">
+                <a:solidFill>
+                  <a:srgbClr val="444444"/>
+                </a:solidFill>
+              </a:rPr>
+              <a:t>   catch per digger, from the creel interviews</a:t>
+            </a:r>
+          </a:p>
+          <a:p>
+            <a:pPr>
+              <a:spcAft>
+                <a:spcPts val="600"/>
+              </a:spcAft>
+            </a:pPr>
+            <a:r>
+              <a:rPr b="1" sz="2000">
+                <a:solidFill>
+                  <a:srgbClr val="1B3A5C"/>
+                </a:solidFill>
+                <a:latin typeface="Consolas"/>
+              </a:rPr>
+              <a:t>E_total  =  E_t (1 - p) / CF</a:t>
+            </a:r>
+            <a:r>
+              <a:rPr sz="1300">
+                <a:solidFill>
+                  <a:srgbClr val="444444"/>
+                </a:solidFill>
+              </a:rPr>
+              <a:t>   expand the count E_t to the whole day; CF ~ 0.5 is the share present at count time</a:t>
+            </a:r>
+          </a:p>
+          <a:p>
+            <a:pPr>
+              <a:spcAft>
+                <a:spcPts val="600"/>
+              </a:spcAft>
+            </a:pPr>
+            <a:r>
+              <a:rPr b="1" sz="2000">
+                <a:solidFill>
+                  <a:srgbClr val="1B3A5C"/>
+                </a:solidFill>
+                <a:latin typeface="Consolas"/>
+              </a:rPr>
+              <a:t>Harvest  =  E_total  x  CPUE</a:t>
+            </a:r>
+            <a:r>
+              <a:rPr sz="1300">
+                <a:solidFill>
+                  <a:srgbClr val="444444"/>
+                </a:solidFill>
+              </a:rPr>
+              <a:t>   effort times catch rate, summed over segments, days, and beaches</a:t>
+            </a:r>
+          </a:p>
+          <a:p>
+            <a:pPr>
+              <a:spcAft>
+                <a:spcPts val="600"/>
+              </a:spcAft>
+            </a:pPr>
+            <a:r>
+              <a:rPr b="1" sz="2000">
+                <a:solidFill>
+                  <a:srgbClr val="1B3A5C"/>
+                </a:solidFill>
+                <a:latin typeface="Consolas"/>
+              </a:rPr>
+              <a:t>X_today  =  X_ref  x  ( Donor_today / Donor_ref )</a:t>
+            </a:r>
+            <a:r>
+              <a:rPr sz="1300">
+                <a:solidFill>
+                  <a:srgbClr val="444444"/>
+                </a:solidFill>
+              </a:rPr>
+              <a:t>   uncounted day: borrow a neighbour's day-over-day change</a:t>
+            </a:r>
+          </a:p>
+        </p:txBody>
+      </p:sp>
+      <p:sp>
+        <p:nvSpPr>
+          <p:cNvPr id="4" name="TextBox 3"/>
+          <p:cNvSpPr txBox="1"/>
+          <p:nvPr/>
+        </p:nvSpPr>
+        <p:spPr>
+          <a:xfrm>
+            <a:off x="594360" y="5760720"/>
+            <a:ext cx="10972800" cy="822960"/>
+          </a:xfrm>
+          <a:prstGeom prst="rect">
+            <a:avLst/>
+          </a:prstGeom>
+          <a:noFill/>
+        </p:spPr>
+        <p:txBody>
+          <a:bodyPr wrap="square">
+            <a:spAutoFit/>
+          </a:bodyPr>
+          <a:lstStyle/>
+          <a:p>
+            <a:r>
+              <a:rPr b="1" sz="1300">
+                <a:solidFill>
+                  <a:srgbClr val="1B3A5C"/>
+                </a:solidFill>
+              </a:rPr>
+              <a:t>In plain terms:  </a:t>
+            </a:r>
+            <a:r>
+              <a:rPr sz="1300"/>
+              <a:t>the whole method is one measured count expanded by a correction factor and a catch rate. When a beach is not counted, the first three lines are replaced by the fourth, and the day is inferred from a neighbour.</a:t>
+            </a:r>
+          </a:p>
+        </p:txBody>
+      </p:sp>
+    </p:spTree>
+  </p:cSld>
+  <p:clrMapOvr>
+    <a:masterClrMapping/>
+  </p:clrMapOvr>
+</p:sld>
+</file>
+
+<file path=ppt/slides/slide24.xml><?xml version="1.0" encoding="utf-8"?>
+<p:sld xmlns:a="http://schemas.openxmlformats.org/drawingml/2006/main" xmlns:p="http://schemas.openxmlformats.org/presentationml/2006/main" xmlns:r="http://schemas.openxmlformats.org/officeDocument/2006/relationships">
+  <p:cSld>
+    <p:spTree>
+      <p:nvGrpSpPr>
+        <p:cNvPr id="1" name=""/>
+        <p:cNvGrpSpPr/>
+        <p:nvPr/>
+      </p:nvGrpSpPr>
+      <p:grpSpPr/>
+      <p:sp>
+        <p:nvSpPr>
+          <p:cNvPr id="2" name="Title 1"/>
+          <p:cNvSpPr>
+            <a:spLocks noGrp="1"/>
+          </p:cNvSpPr>
+          <p:nvPr>
+            <p:ph type="title"/>
+          </p:nvPr>
+        </p:nvSpPr>
+        <p:spPr/>
+        <p:txBody>
+          <a:bodyPr/>
+          <a:lstStyle/>
+          <a:p>
+            <a:r>
+              <a:t>Most southern beach-days are borrowed, not counted</a:t>
+            </a:r>
+          </a:p>
+        </p:txBody>
+      </p:sp>
+      <p:pic>
+        <p:nvPicPr>
+          <p:cNvPr id="3" name="Picture 2" descr="fig18_tide_series_imputation.png"/>
+          <p:cNvPicPr>
+            <a:picLocks noChangeAspect="1"/>
+          </p:cNvPicPr>
+          <p:nvPr/>
+        </p:nvPicPr>
+        <p:blipFill>
+          <a:blip r:embed="rId2"/>
+          <a:stretch>
+            <a:fillRect/>
+          </a:stretch>
+        </p:blipFill>
+        <p:spPr>
+          <a:xfrm>
+            <a:off x="1938250" y="1097280"/>
+            <a:ext cx="8285018" cy="4206240"/>
+          </a:xfrm>
+          <a:prstGeom prst="rect">
+            <a:avLst/>
+          </a:prstGeom>
+        </p:spPr>
+      </p:pic>
+      <p:sp>
+        <p:nvSpPr>
+          <p:cNvPr id="4" name="TextBox 3"/>
+          <p:cNvSpPr txBox="1"/>
+          <p:nvPr/>
+        </p:nvSpPr>
+        <p:spPr>
+          <a:xfrm>
+            <a:off x="594360" y="5532120"/>
+            <a:ext cx="10972800" cy="822960"/>
+          </a:xfrm>
+          <a:prstGeom prst="rect">
+            <a:avLst/>
+          </a:prstGeom>
+          <a:noFill/>
+        </p:spPr>
+        <p:txBody>
+          <a:bodyPr wrap="square">
+            <a:spAutoFit/>
+          </a:bodyPr>
+          <a:lstStyle/>
+          <a:p>
+            <a:r>
+              <a:rPr b="1" sz="1300">
+                <a:solidFill>
+                  <a:srgbClr val="1B3A5C"/>
+                </a:solidFill>
+              </a:rPr>
+              <a:t>In plain terms:  </a:t>
+            </a:r>
+            <a:r>
+              <a:rPr sz="1300"/>
+              <a:t>Copalis and Mocrocks are counted every day they open; the southern beaches often are not, so their effort is borrowed from a counted neighbour. In 2025-26, 57% of Long Beach effort is borrowed from another beach.</a:t>
+            </a:r>
+          </a:p>
+        </p:txBody>
+      </p:sp>
+    </p:spTree>
+  </p:cSld>
+  <p:clrMapOvr>
+    <a:masterClrMapping/>
+  </p:clrMapOvr>
+</p:sld>
+</file>
+
+<file path=ppt/slides/slide25.xml><?xml version="1.0" encoding="utf-8"?>
+<p:sld xmlns:a="http://schemas.openxmlformats.org/drawingml/2006/main" xmlns:p="http://schemas.openxmlformats.org/presentationml/2006/main" xmlns:r="http://schemas.openxmlformats.org/officeDocument/2006/relationships">
+  <p:cSld>
+    <p:spTree>
+      <p:nvGrpSpPr>
+        <p:cNvPr id="1" name=""/>
+        <p:cNvGrpSpPr/>
+        <p:nvPr/>
+      </p:nvGrpSpPr>
+      <p:grpSpPr/>
+      <p:sp>
+        <p:nvSpPr>
+          <p:cNvPr id="2" name="Title 1"/>
+          <p:cNvSpPr>
+            <a:spLocks noGrp="1"/>
+          </p:cNvSpPr>
+          <p:nvPr>
+            <p:ph type="title"/>
+          </p:nvPr>
+        </p:nvSpPr>
+        <p:spPr/>
+        <p:txBody>
+          <a:bodyPr/>
+          <a:lstStyle/>
+          <a:p>
+            <a:r>
+              <a:t>Two donors beat one</a:t>
+            </a:r>
+          </a:p>
+        </p:txBody>
+      </p:sp>
+      <p:pic>
+        <p:nvPicPr>
+          <p:cNvPr id="3" name="Picture 2" descr="fig19_joint_donor.png"/>
+          <p:cNvPicPr>
+            <a:picLocks noChangeAspect="1"/>
+          </p:cNvPicPr>
+          <p:nvPr/>
+        </p:nvPicPr>
+        <p:blipFill>
+          <a:blip r:embed="rId2"/>
+          <a:stretch>
+            <a:fillRect/>
+          </a:stretch>
+        </p:blipFill>
+        <p:spPr>
+          <a:xfrm>
+            <a:off x="1808797" y="1097280"/>
+            <a:ext cx="8543925" cy="4206240"/>
+          </a:xfrm>
+          <a:prstGeom prst="rect">
+            <a:avLst/>
+          </a:prstGeom>
+        </p:spPr>
+      </p:pic>
+      <p:sp>
+        <p:nvSpPr>
+          <p:cNvPr id="4" name="TextBox 3"/>
+          <p:cNvSpPr txBox="1"/>
+          <p:nvPr/>
+        </p:nvSpPr>
+        <p:spPr>
+          <a:xfrm>
+            <a:off x="594360" y="5532120"/>
+            <a:ext cx="10972800" cy="822960"/>
+          </a:xfrm>
+          <a:prstGeom prst="rect">
+            <a:avLst/>
+          </a:prstGeom>
+          <a:noFill/>
+        </p:spPr>
+        <p:txBody>
+          <a:bodyPr wrap="square">
+            <a:spAutoFit/>
+          </a:bodyPr>
+          <a:lstStyle/>
+          <a:p>
+            <a:r>
+              <a:rPr b="1" sz="1300">
+                <a:solidFill>
+                  <a:srgbClr val="1B3A5C"/>
+                </a:solidFill>
+              </a:rPr>
+              <a:t>In plain terms:  </a:t>
+            </a:r>
+            <a:r>
+              <a:rPr sz="1300"/>
+              <a:t>each donor carries its own noise; summing Copalis and Mocrocks before taking the ratio averages it out, cutting the single-day error from about 0.62 to 0.43. The catch: the 2-on / 2-off calendar rarely counts both the same day.</a:t>
+            </a:r>
+          </a:p>
+        </p:txBody>
+      </p:sp>
+    </p:spTree>
+  </p:cSld>
+  <p:clrMapOvr>
+    <a:masterClrMapping/>
+  </p:clrMapOvr>
+</p:sld>
+</file>
+
+<file path=ppt/slides/slide26.xml><?xml version="1.0" encoding="utf-8"?>
+<p:sld xmlns:a="http://schemas.openxmlformats.org/drawingml/2006/main" xmlns:p="http://schemas.openxmlformats.org/presentationml/2006/main" xmlns:r="http://schemas.openxmlformats.org/officeDocument/2006/relationships">
+  <p:cSld>
+    <p:spTree>
+      <p:nvGrpSpPr>
+        <p:cNvPr id="1" name=""/>
+        <p:cNvGrpSpPr/>
+        <p:nvPr/>
+      </p:nvGrpSpPr>
+      <p:grpSpPr/>
+      <p:sp>
+        <p:nvSpPr>
+          <p:cNvPr id="2" name="Title 1"/>
+          <p:cNvSpPr>
+            <a:spLocks noGrp="1"/>
+          </p:cNvSpPr>
+          <p:nvPr>
+            <p:ph type="title"/>
+          </p:nvPr>
+        </p:nvSpPr>
+        <p:spPr/>
+        <p:txBody>
+          <a:bodyPr/>
+          <a:lstStyle/>
+          <a:p>
+            <a:r>
+              <a:t>Only 14% of Long Beach rests on a real count</a:t>
+            </a:r>
+          </a:p>
+        </p:txBody>
+      </p:sp>
+      <p:pic>
+        <p:nvPicPr>
+          <p:cNvPr id="3" name="Picture 2" descr="fig20_longbeach_anatomy.png"/>
+          <p:cNvPicPr>
+            <a:picLocks noChangeAspect="1"/>
+          </p:cNvPicPr>
+          <p:nvPr/>
+        </p:nvPicPr>
+        <p:blipFill>
+          <a:blip r:embed="rId2"/>
+          <a:stretch>
+            <a:fillRect/>
+          </a:stretch>
+        </p:blipFill>
+        <p:spPr>
+          <a:xfrm>
+            <a:off x="2475411" y="1051560"/>
+            <a:ext cx="7210697" cy="4206240"/>
+          </a:xfrm>
+          <a:prstGeom prst="rect">
+            <a:avLst/>
+          </a:prstGeom>
+        </p:spPr>
+      </p:pic>
+      <p:sp>
+        <p:nvSpPr>
+          <p:cNvPr id="4" name="TextBox 3"/>
+          <p:cNvSpPr txBox="1"/>
+          <p:nvPr/>
+        </p:nvSpPr>
+        <p:spPr>
+          <a:xfrm>
+            <a:off x="594360" y="5532120"/>
+            <a:ext cx="10972800" cy="822960"/>
+          </a:xfrm>
+          <a:prstGeom prst="rect">
+            <a:avLst/>
+          </a:prstGeom>
+          <a:noFill/>
+        </p:spPr>
+        <p:txBody>
+          <a:bodyPr wrap="square">
+            <a:spAutoFit/>
+          </a:bodyPr>
+          <a:lstStyle/>
+          <a:p>
+            <a:r>
+              <a:rPr b="1" sz="1300">
+                <a:solidFill>
+                  <a:srgbClr val="1B3A5C"/>
+                </a:solidFill>
+              </a:rPr>
+              <a:t>In plain terms:  </a:t>
+            </a:r>
+            <a:r>
+              <a:rPr sz="1300"/>
+              <a:t>28 miles walked in two halves; only 13.8% of 2025-26 effort rests on a full count. The correction factor, the section split, and the whole-beach total are each assumed, not measured, which is what the pilot fixes.</a:t>
+            </a:r>
+          </a:p>
+        </p:txBody>
+      </p:sp>
+    </p:spTree>
+  </p:cSld>
+  <p:clrMapOvr>
+    <a:masterClrMapping/>
+  </p:clrMapOvr>
+</p:sld>
+</file>
+
+<file path=ppt/slides/slide27.xml><?xml version="1.0" encoding="utf-8"?>
+<p:sld xmlns:a="http://schemas.openxmlformats.org/drawingml/2006/main" xmlns:p="http://schemas.openxmlformats.org/presentationml/2006/main" xmlns:r="http://schemas.openxmlformats.org/officeDocument/2006/relationships">
+  <p:cSld>
+    <p:spTree>
+      <p:nvGrpSpPr>
+        <p:cNvPr id="1" name=""/>
+        <p:cNvGrpSpPr/>
+        <p:nvPr/>
+      </p:nvGrpSpPr>
+      <p:grpSpPr/>
+      <p:sp>
+        <p:nvSpPr>
+          <p:cNvPr id="2" name="Title 1"/>
+          <p:cNvSpPr>
+            <a:spLocks noGrp="1"/>
+          </p:cNvSpPr>
+          <p:nvPr>
+            <p:ph type="title"/>
+          </p:nvPr>
+        </p:nvSpPr>
+        <p:spPr/>
+        <p:txBody>
+          <a:bodyPr/>
+          <a:lstStyle/>
+          <a:p>
+            <a:r>
+              <a:t>Why not just one fall and one spring survey?</a:t>
+            </a:r>
+          </a:p>
+        </p:txBody>
+      </p:sp>
+      <p:pic>
+        <p:nvPicPr>
+          <p:cNvPr id="3" name="Picture 2" descr="fig16_lb_survey_target.png"/>
+          <p:cNvPicPr>
+            <a:picLocks noChangeAspect="1"/>
+          </p:cNvPicPr>
+          <p:nvPr/>
+        </p:nvPicPr>
+        <p:blipFill>
+          <a:blip r:embed="rId2"/>
+          <a:stretch>
+            <a:fillRect/>
+          </a:stretch>
+        </p:blipFill>
+        <p:spPr>
+          <a:xfrm>
+            <a:off x="2475411" y="1051560"/>
+            <a:ext cx="7210697" cy="4206240"/>
+          </a:xfrm>
+          <a:prstGeom prst="rect">
+            <a:avLst/>
+          </a:prstGeom>
+        </p:spPr>
+      </p:pic>
+      <p:sp>
+        <p:nvSpPr>
+          <p:cNvPr id="4" name="TextBox 3"/>
+          <p:cNvSpPr txBox="1"/>
+          <p:nvPr/>
+        </p:nvSpPr>
+        <p:spPr>
+          <a:xfrm>
+            <a:off x="594360" y="5532120"/>
+            <a:ext cx="10972800" cy="822960"/>
+          </a:xfrm>
+          <a:prstGeom prst="rect">
+            <a:avLst/>
+          </a:prstGeom>
+          <a:noFill/>
+        </p:spPr>
+        <p:txBody>
+          <a:bodyPr wrap="square">
+            <a:spAutoFit/>
+          </a:bodyPr>
+          <a:lstStyle/>
+          <a:p>
+            <a:r>
+              <a:rPr b="1" sz="1250">
+                <a:solidFill>
+                  <a:srgbClr val="1B3A5C"/>
+                </a:solidFill>
+              </a:rPr>
+              <a:t>In plain terms:  </a:t>
+            </a:r>
+            <a:r>
+              <a:rPr sz="1250"/>
+              <a:t>one survey per condition pins the shape and is worth doing; but the correction factor swings about 30% per survey, so precision improves only as 1 over root-N. About eight surveys halve today's uncertainty, and a whole-beach survey also retires the section-ratio error.</a:t>
+            </a:r>
+          </a:p>
+        </p:txBody>
+      </p:sp>
+    </p:spTree>
+  </p:cSld>
+  <p:clrMapOvr>
+    <a:masterClrMapping/>
+  </p:clrMapOvr>
+</p:sld>
+</file>
+
+<file path=ppt/slides/slide28.xml><?xml version="1.0" encoding="utf-8"?>
+<p:sld xmlns:a="http://schemas.openxmlformats.org/drawingml/2006/main" xmlns:p="http://schemas.openxmlformats.org/presentationml/2006/main" xmlns:r="http://schemas.openxmlformats.org/officeDocument/2006/relationships">
+  <p:cSld>
+    <p:spTree>
+      <p:nvGrpSpPr>
+        <p:cNvPr id="1" name=""/>
+        <p:cNvGrpSpPr/>
+        <p:nvPr/>
+      </p:nvGrpSpPr>
+      <p:grpSpPr/>
+      <p:sp>
+        <p:nvSpPr>
+          <p:cNvPr id="2" name="Title 1"/>
+          <p:cNvSpPr>
+            <a:spLocks noGrp="1"/>
+          </p:cNvSpPr>
+          <p:nvPr>
+            <p:ph type="title"/>
+          </p:nvPr>
+        </p:nvSpPr>
+        <p:spPr/>
+        <p:txBody>
+          <a:bodyPr/>
+          <a:lstStyle/>
+          <a:p>
+            <a:r>
+              <a:t>Recommendations, in priority order</a:t>
+            </a:r>
+          </a:p>
+        </p:txBody>
+      </p:sp>
+      <p:sp>
+        <p:nvSpPr>
+          <p:cNvPr id="3" name="Content Placeholder 2"/>
+          <p:cNvSpPr>
+            <a:spLocks noGrp="1"/>
+          </p:cNvSpPr>
+          <p:nvPr>
+            <p:ph idx="1"/>
+          </p:nvPr>
+        </p:nvSpPr>
+        <p:spPr/>
+        <p:txBody>
+          <a:bodyPr wrap="square"/>
+          <a:lstStyle/>
+          <a:p>
+            <a:r>
+              <a:rPr b="1" sz="1400"/>
+              <a:t>1.  Survey Long Beach first. </a:t>
+            </a:r>
+            <a:r>
+              <a:rPr sz="1400"/>
+              <a:t>Run the whole-beach egress pilot, six approaches and about eight staff. Start with one survey in each tide condition to establish the relationship, then build toward eight to rebuild the table. The correction factor is the largest term and Long Beach's table is the thinnest and oldest.</a:t>
+            </a:r>
+          </a:p>
+          <a:p>
+            <a:r>
+              <a:rPr b="1" sz="1400"/>
+              <a:t>2.  Hold the southern donor at its co-management floor. </a:t>
+            </a:r>
+            <a:r>
+              <a:rPr sz="1400"/>
+              <a:t>Keep one of Copalis or Mocrocks state-counted every dig day, which the 2-on / 2-off calendar already delivers. The Quinault's alternate-day counts cannot substitute for the state.</a:t>
+            </a:r>
+          </a:p>
+          <a:p>
+            <a:r>
+              <a:rPr b="1" sz="1400"/>
+              <a:t>3.  Pair the pilot with the northern donor on a subset of days </a:t>
+            </a:r>
+            <a:r>
+              <a:rPr sz="1400"/>
+              <a:t>to measure the imputation transfer directly and tighten the joint-donor error, rather than leaning on the modeled lag curve.</a:t>
+            </a:r>
+          </a:p>
+          <a:p>
+            <a:r>
+              <a:rPr b="1" sz="1400"/>
+              <a:t>4.  Treat the 45% reallocation as optional, not free. </a:t>
+            </a:r>
+            <a:r>
+              <a:rPr sz="1400"/>
+              <a:t>It buys direct Long Beach precision but degrades the donor with no offset; fund Long Beach from dedicated effort where possible.</a:t>
+            </a:r>
+          </a:p>
+          <a:p>
+            <a:r>
+              <a:rPr b="1" sz="1400"/>
+              <a:t>5.  Accept the Copalis floor: </a:t>
+            </a:r>
+            <a:r>
+              <a:rPr sz="1400"/>
+              <a:t>a harvest CV of 0.10 is infeasible there at any sampling rate, only more surveys would move it.</a:t>
             </a:r>
           </a:p>
         </p:txBody>

--- a/07_presentations/razor-clam-sampling-design.pptx
+++ b/07_presentations/razor-clam-sampling-design.pptx
@@ -5,38 +5,38 @@
     <p:sldMasterId id="2147483648" r:id="rId4"/>
   </p:sldMasterIdLst>
   <p:notesMasterIdLst>
-    <p:notesMasterId r:id="rId25"/>
+    <p:notesMasterId r:id="rId31"/>
   </p:notesMasterIdLst>
   <p:handoutMasterIdLst>
-    <p:handoutMasterId r:id="rId26"/>
+    <p:handoutMasterId r:id="rId32"/>
   </p:handoutMasterIdLst>
   <p:sldIdLst>
     <p:sldId id="256" r:id="rId5"/>
     <p:sldId id="257" r:id="rId6"/>
-    <p:sldId id="276" r:id="rId33"/>
-    <p:sldId id="277" r:id="rId34"/>
-    <p:sldId id="278" r:id="rId35"/>
-    <p:sldId id="279" r:id="rId36"/>
-    <p:sldId id="280" r:id="rId37"/>
-    <p:sldId id="281" r:id="rId38"/>
-    <p:sldId id="258" r:id="rId7"/>
-    <p:sldId id="259" r:id="rId8"/>
-    <p:sldId id="260" r:id="rId9"/>
-    <p:sldId id="261" r:id="rId10"/>
-    <p:sldId id="262" r:id="rId11"/>
-    <p:sldId id="263" r:id="rId12"/>
-    <p:sldId id="264" r:id="rId13"/>
-    <p:sldId id="265" r:id="rId14"/>
-    <p:sldId id="266" r:id="rId15"/>
-    <p:sldId id="267" r:id="rId16"/>
-    <p:sldId id="268" r:id="rId17"/>
-    <p:sldId id="269" r:id="rId18"/>
-    <p:sldId id="270" r:id="rId19"/>
-    <p:sldId id="271" r:id="rId20"/>
-    <p:sldId id="272" r:id="rId21"/>
-    <p:sldId id="282" r:id="rId39"/>
-    <p:sldId id="283" r:id="rId40"/>
-    <p:sldId id="275" r:id="rId24"/>
+    <p:sldId id="276" r:id="rId7"/>
+    <p:sldId id="277" r:id="rId8"/>
+    <p:sldId id="278" r:id="rId9"/>
+    <p:sldId id="279" r:id="rId10"/>
+    <p:sldId id="280" r:id="rId11"/>
+    <p:sldId id="281" r:id="rId12"/>
+    <p:sldId id="258" r:id="rId13"/>
+    <p:sldId id="259" r:id="rId14"/>
+    <p:sldId id="260" r:id="rId15"/>
+    <p:sldId id="261" r:id="rId16"/>
+    <p:sldId id="262" r:id="rId17"/>
+    <p:sldId id="263" r:id="rId18"/>
+    <p:sldId id="264" r:id="rId19"/>
+    <p:sldId id="265" r:id="rId20"/>
+    <p:sldId id="266" r:id="rId21"/>
+    <p:sldId id="267" r:id="rId22"/>
+    <p:sldId id="268" r:id="rId23"/>
+    <p:sldId id="269" r:id="rId24"/>
+    <p:sldId id="270" r:id="rId25"/>
+    <p:sldId id="271" r:id="rId26"/>
+    <p:sldId id="272" r:id="rId27"/>
+    <p:sldId id="282" r:id="rId28"/>
+    <p:sldId id="283" r:id="rId29"/>
+    <p:sldId id="275" r:id="rId30"/>
   </p:sldIdLst>
   <p:sldSz cx="12192000" cy="6858000"/>
   <p:notesSz cx="6858000" cy="9144000"/>
@@ -157,8 +157,8 @@
 <pc:chgInfo xmlns:a="http://schemas.openxmlformats.org/drawingml/2006/main" xmlns:r="http://schemas.openxmlformats.org/officeDocument/2006/relationships" xmlns:ac="http://schemas.microsoft.com/office/drawing/2013/main/command" xmlns:pc="http://schemas.microsoft.com/office/powerpoint/2013/main/command">
   <pc:docChgLst>
     <pc:chgData name="George, Matthew (DFW)" userId="8ba433ef-8e18-4348-89a6-fb3bb26ec9f1" providerId="ADAL" clId="{11FC2F9B-6E6E-4645-819B-98A64F5AF5DA}"/>
-    <pc:docChg chg="modSld">
-      <pc:chgData name="George, Matthew (DFW)" userId="8ba433ef-8e18-4348-89a6-fb3bb26ec9f1" providerId="ADAL" clId="{11FC2F9B-6E6E-4645-819B-98A64F5AF5DA}" dt="2026-07-13T19:26:03.258" v="1" actId="14100"/>
+    <pc:docChg chg="undo custSel modSld">
+      <pc:chgData name="George, Matthew (DFW)" userId="8ba433ef-8e18-4348-89a6-fb3bb26ec9f1" providerId="ADAL" clId="{11FC2F9B-6E6E-4645-819B-98A64F5AF5DA}" dt="2026-07-13T21:34:51.407" v="17" actId="313"/>
       <pc:docMkLst>
         <pc:docMk/>
       </pc:docMkLst>
@@ -189,6 +189,29 @@
             <pc:docMk/>
             <pc:sldMk cId="0" sldId="273"/>
             <ac:spMk id="3" creationId="{00000000-0000-0000-0000-000000000000}"/>
+          </ac:spMkLst>
+        </pc:spChg>
+      </pc:sldChg>
+      <pc:sldChg chg="modSp mod">
+        <pc:chgData name="George, Matthew (DFW)" userId="8ba433ef-8e18-4348-89a6-fb3bb26ec9f1" providerId="ADAL" clId="{11FC2F9B-6E6E-4645-819B-98A64F5AF5DA}" dt="2026-07-13T21:34:51.407" v="17" actId="313"/>
+        <pc:sldMkLst>
+          <pc:docMk/>
+          <pc:sldMk cId="0" sldId="278"/>
+        </pc:sldMkLst>
+        <pc:spChg chg="mod">
+          <ac:chgData name="George, Matthew (DFW)" userId="8ba433ef-8e18-4348-89a6-fb3bb26ec9f1" providerId="ADAL" clId="{11FC2F9B-6E6E-4645-819B-98A64F5AF5DA}" dt="2026-07-13T21:34:51.407" v="17" actId="313"/>
+          <ac:spMkLst>
+            <pc:docMk/>
+            <pc:sldMk cId="0" sldId="278"/>
+            <ac:spMk id="3" creationId="{00000000-0000-0000-0000-000000000000}"/>
+          </ac:spMkLst>
+        </pc:spChg>
+        <pc:spChg chg="mod">
+          <ac:chgData name="George, Matthew (DFW)" userId="8ba433ef-8e18-4348-89a6-fb3bb26ec9f1" providerId="ADAL" clId="{11FC2F9B-6E6E-4645-819B-98A64F5AF5DA}" dt="2026-07-13T21:34:47.946" v="16" actId="313"/>
+          <ac:spMkLst>
+            <pc:docMk/>
+            <pc:sldMk cId="0" sldId="278"/>
+            <ac:spMk id="4" creationId="{00000000-0000-0000-0000-000000000000}"/>
           </ac:spMkLst>
         </pc:spChg>
       </pc:sldChg>
@@ -626,7 +649,7 @@
           <a:lstStyle/>
           <a:p>
             <a:r>
-              <a:t>Sec 10.3 / Table 4. Priority: TH evening (2 surveys), LB evening &amp; daylight, TH daylight.</a:t>
+              <a:t>Sec 10.2 / Tables 15-16. Foreshadows the donor question: the southern beaches are the donors.</a:t>
             </a:r>
           </a:p>
         </p:txBody>
@@ -696,7 +719,7 @@
           <a:lstStyle/>
           <a:p>
             <a:r>
-              <a:t>Sec 11.6-11.7 + revised Fig 15. Correction: the Quinault alternate-day fishery is NOT a state proxy, so there is no offsetting data-share. The cost of thinning the donor is real and unoffset. This is why the recommendation is to hold the donor at its co-management floor and fund Long Beach from the pilot instead.</a:t>
+              <a:t>Sec 11.2 / Table 19. The headline answer.</a:t>
             </a:r>
           </a:p>
         </p:txBody>
@@ -766,7 +789,7 @@
           <a:lstStyle/>
           <a:p>
             <a:r>
-              <a:t>Sources: INGRESSPLAN98.docx (method, one counter per approach); consolidated IE inventory (Long Beach surveys were Oysterville-north-only or Seaview-south-only, never whole-beach); wdfw02656.pdf (7-section effort structure; the six drivable approaches are Seaview, Long Beach/Bolstad, Cranberry, Klipsan, Ocean Park, Oysterville).</a:t>
+              <a:t>Sec 11.3 / Table 20.</a:t>
             </a:r>
           </a:p>
         </p:txBody>
@@ -836,7 +859,7 @@
           <a:lstStyle/>
           <a:p>
             <a:r>
-              <a:t>Two crews, not one, because Long Beach is far longer than Twin Harbors or Mocrocks and carries several thousand diggers on a good day. The paired northern survey is the explicit test of the imputation the whole program leans on.</a:t>
+              <a:t>Sec 11.4 / Table 21. Only surveys move the floor.</a:t>
             </a:r>
           </a:p>
         </p:txBody>
@@ -861,8 +884,8 @@
 </p:notes>
 </file>
 
-<file path=ppt/notesSlides/notesSlide16.xml><?xml version="1.0" encoding="utf-8"?>
-<p:notes xmlns:a="http://schemas.openxmlformats.org/drawingml/2006/main" xmlns:p="http://schemas.openxmlformats.org/presentationml/2006/main" xmlns:r="http://schemas.openxmlformats.org/officeDocument/2006/relationships">
+<file path=ppt/notesSlides/notesSlide14.xml><?xml version="1.0" encoding="utf-8"?>
+<p:notes xmlns:a="http://schemas.openxmlformats.org/drawingml/2006/main" xmlns:r="http://schemas.openxmlformats.org/officeDocument/2006/relationships" xmlns:p="http://schemas.openxmlformats.org/presentationml/2006/main">
   <p:cSld>
     <p:spTree>
       <p:nvGrpSpPr>
@@ -878,6 +901,51 @@
           <a:chExt cx="0" cy="0"/>
         </a:xfrm>
       </p:grpSpPr>
+      <p:sp>
+        <p:nvSpPr>
+          <p:cNvPr id="2" name="Slide Image Placeholder 1"/>
+          <p:cNvSpPr>
+            <a:spLocks noGrp="1" noRot="1" noChangeAspect="1"/>
+          </p:cNvSpPr>
+          <p:nvPr>
+            <p:ph type="sldImg" idx="2"/>
+          </p:nvPr>
+        </p:nvSpPr>
+        <p:spPr/>
+      </p:sp>
+      <p:sp>
+        <p:nvSpPr>
+          <p:cNvPr id="3" name="Notes Placeholder 2"/>
+          <p:cNvSpPr>
+            <a:spLocks noGrp="1"/>
+          </p:cNvSpPr>
+          <p:nvPr>
+            <p:ph type="body" sz="quarter" idx="3"/>
+          </p:nvPr>
+        </p:nvSpPr>
+        <p:spPr/>
+        <p:txBody>
+          <a:bodyPr/>
+          <a:lstStyle/>
+          <a:p>
+            <a:r>
+              <a:t>Sec 11.5 / Table 22. Cost-neutral. But see the donor caveat next.</a:t>
+            </a:r>
+          </a:p>
+        </p:txBody>
+      </p:sp>
+      <p:sp>
+        <p:nvSpPr>
+          <p:cNvPr id="4" name="Slide Number Placeholder 3"/>
+          <p:cNvSpPr>
+            <a:spLocks noGrp="1"/>
+          </p:cNvSpPr>
+          <p:nvPr>
+            <p:ph type="sldNum" sz="quarter" idx="5"/>
+          </p:nvPr>
+        </p:nvSpPr>
+        <p:spPr/>
+      </p:sp>
     </p:spTree>
   </p:cSld>
   <p:clrMapOvr>
@@ -886,8 +954,8 @@
 </p:notes>
 </file>
 
-<file path=ppt/notesSlides/notesSlide17.xml><?xml version="1.0" encoding="utf-8"?>
-<p:notes xmlns:a="http://schemas.openxmlformats.org/drawingml/2006/main" xmlns:p="http://schemas.openxmlformats.org/presentationml/2006/main" xmlns:r="http://schemas.openxmlformats.org/officeDocument/2006/relationships">
+<file path=ppt/notesSlides/notesSlide15.xml><?xml version="1.0" encoding="utf-8"?>
+<p:notes xmlns:a="http://schemas.openxmlformats.org/drawingml/2006/main" xmlns:r="http://schemas.openxmlformats.org/officeDocument/2006/relationships" xmlns:p="http://schemas.openxmlformats.org/presentationml/2006/main">
   <p:cSld>
     <p:spTree>
       <p:nvGrpSpPr>
@@ -903,6 +971,51 @@
           <a:chExt cx="0" cy="0"/>
         </a:xfrm>
       </p:grpSpPr>
+      <p:sp>
+        <p:nvSpPr>
+          <p:cNvPr id="2" name="Slide Image Placeholder 1"/>
+          <p:cNvSpPr>
+            <a:spLocks noGrp="1" noRot="1" noChangeAspect="1"/>
+          </p:cNvSpPr>
+          <p:nvPr>
+            <p:ph type="sldImg" idx="2"/>
+          </p:nvPr>
+        </p:nvSpPr>
+        <p:spPr/>
+      </p:sp>
+      <p:sp>
+        <p:nvSpPr>
+          <p:cNvPr id="3" name="Notes Placeholder 2"/>
+          <p:cNvSpPr>
+            <a:spLocks noGrp="1"/>
+          </p:cNvSpPr>
+          <p:nvPr>
+            <p:ph type="body" sz="quarter" idx="3"/>
+          </p:nvPr>
+        </p:nvSpPr>
+        <p:spPr/>
+        <p:txBody>
+          <a:bodyPr/>
+          <a:lstStyle/>
+          <a:p>
+            <a:r>
+              <a:t>Sec 10.3 / Table 4. Priority: TH evening (2 surveys), LB evening &amp; daylight, TH daylight.</a:t>
+            </a:r>
+          </a:p>
+        </p:txBody>
+      </p:sp>
+      <p:sp>
+        <p:nvSpPr>
+          <p:cNvPr id="4" name="Slide Number Placeholder 3"/>
+          <p:cNvSpPr>
+            <a:spLocks noGrp="1"/>
+          </p:cNvSpPr>
+          <p:nvPr>
+            <p:ph type="sldNum" sz="quarter" idx="5"/>
+          </p:nvPr>
+        </p:nvSpPr>
+        <p:spPr/>
+      </p:sp>
     </p:spTree>
   </p:cSld>
   <p:clrMapOvr>
@@ -911,8 +1024,8 @@
 </p:notes>
 </file>
 
-<file path=ppt/notesSlides/notesSlide18.xml><?xml version="1.0" encoding="utf-8"?>
-<p:notes xmlns:a="http://schemas.openxmlformats.org/drawingml/2006/main" xmlns:p="http://schemas.openxmlformats.org/presentationml/2006/main" xmlns:r="http://schemas.openxmlformats.org/officeDocument/2006/relationships">
+<file path=ppt/notesSlides/notesSlide16.xml><?xml version="1.0" encoding="utf-8"?>
+<p:notes xmlns:a="http://schemas.openxmlformats.org/drawingml/2006/main" xmlns:r="http://schemas.openxmlformats.org/officeDocument/2006/relationships" xmlns:p="http://schemas.openxmlformats.org/presentationml/2006/main">
   <p:cSld>
     <p:spTree>
       <p:nvGrpSpPr>
@@ -928,6 +1041,191 @@
           <a:chExt cx="0" cy="0"/>
         </a:xfrm>
       </p:grpSpPr>
+      <p:sp>
+        <p:nvSpPr>
+          <p:cNvPr id="2" name="Slide Image Placeholder 1"/>
+          <p:cNvSpPr>
+            <a:spLocks noGrp="1" noRot="1" noChangeAspect="1"/>
+          </p:cNvSpPr>
+          <p:nvPr>
+            <p:ph type="sldImg" idx="2"/>
+          </p:nvPr>
+        </p:nvSpPr>
+        <p:spPr/>
+      </p:sp>
+      <p:sp>
+        <p:nvSpPr>
+          <p:cNvPr id="3" name="Notes Placeholder 2"/>
+          <p:cNvSpPr>
+            <a:spLocks noGrp="1"/>
+          </p:cNvSpPr>
+          <p:nvPr>
+            <p:ph type="body" sz="quarter" idx="3"/>
+          </p:nvPr>
+        </p:nvSpPr>
+        <p:spPr/>
+        <p:txBody>
+          <a:bodyPr/>
+          <a:lstStyle/>
+          <a:p>
+            <a:r>
+              <a:t>Sec 11.6-11.7 + revised Fig 15. Correction: the Quinault alternate-day fishery is NOT a state proxy, so there is no offsetting data-share. The cost of thinning the donor is real and unoffset. This is why the recommendation is to hold the donor at its co-management floor and fund Long Beach from the pilot instead.</a:t>
+            </a:r>
+          </a:p>
+        </p:txBody>
+      </p:sp>
+      <p:sp>
+        <p:nvSpPr>
+          <p:cNvPr id="4" name="Slide Number Placeholder 3"/>
+          <p:cNvSpPr>
+            <a:spLocks noGrp="1"/>
+          </p:cNvSpPr>
+          <p:nvPr>
+            <p:ph type="sldNum" sz="quarter" idx="5"/>
+          </p:nvPr>
+        </p:nvSpPr>
+        <p:spPr/>
+      </p:sp>
+    </p:spTree>
+  </p:cSld>
+  <p:clrMapOvr>
+    <a:masterClrMapping/>
+  </p:clrMapOvr>
+</p:notes>
+</file>
+
+<file path=ppt/notesSlides/notesSlide17.xml><?xml version="1.0" encoding="utf-8"?>
+<p:notes xmlns:a="http://schemas.openxmlformats.org/drawingml/2006/main" xmlns:r="http://schemas.openxmlformats.org/officeDocument/2006/relationships" xmlns:p="http://schemas.openxmlformats.org/presentationml/2006/main">
+  <p:cSld>
+    <p:spTree>
+      <p:nvGrpSpPr>
+        <p:cNvPr id="1" name=""/>
+        <p:cNvGrpSpPr/>
+        <p:nvPr/>
+      </p:nvGrpSpPr>
+      <p:grpSpPr>
+        <a:xfrm>
+          <a:off x="0" y="0"/>
+          <a:ext cx="0" cy="0"/>
+          <a:chOff x="0" y="0"/>
+          <a:chExt cx="0" cy="0"/>
+        </a:xfrm>
+      </p:grpSpPr>
+      <p:sp>
+        <p:nvSpPr>
+          <p:cNvPr id="2" name="Slide Image Placeholder 1"/>
+          <p:cNvSpPr>
+            <a:spLocks noGrp="1" noRot="1" noChangeAspect="1"/>
+          </p:cNvSpPr>
+          <p:nvPr>
+            <p:ph type="sldImg" idx="2"/>
+          </p:nvPr>
+        </p:nvSpPr>
+        <p:spPr/>
+      </p:sp>
+      <p:sp>
+        <p:nvSpPr>
+          <p:cNvPr id="3" name="Notes Placeholder 2"/>
+          <p:cNvSpPr>
+            <a:spLocks noGrp="1"/>
+          </p:cNvSpPr>
+          <p:nvPr>
+            <p:ph type="body" sz="quarter" idx="3"/>
+          </p:nvPr>
+        </p:nvSpPr>
+        <p:spPr/>
+        <p:txBody>
+          <a:bodyPr/>
+          <a:lstStyle/>
+          <a:p>
+            <a:r>
+              <a:t>Sources: INGRESSPLAN98.docx (method, one counter per approach); consolidated IE inventory (Long Beach surveys were Oysterville-north-only or Seaview-south-only, never whole-beach); wdfw02656.pdf (7-section effort structure; the six drivable approaches are Seaview, Long Beach/Bolstad, Cranberry, Klipsan, Ocean Park, Oysterville).</a:t>
+            </a:r>
+          </a:p>
+        </p:txBody>
+      </p:sp>
+      <p:sp>
+        <p:nvSpPr>
+          <p:cNvPr id="4" name="Slide Number Placeholder 3"/>
+          <p:cNvSpPr>
+            <a:spLocks noGrp="1"/>
+          </p:cNvSpPr>
+          <p:nvPr>
+            <p:ph type="sldNum" sz="quarter" idx="5"/>
+          </p:nvPr>
+        </p:nvSpPr>
+        <p:spPr/>
+      </p:sp>
+    </p:spTree>
+  </p:cSld>
+  <p:clrMapOvr>
+    <a:masterClrMapping/>
+  </p:clrMapOvr>
+</p:notes>
+</file>
+
+<file path=ppt/notesSlides/notesSlide18.xml><?xml version="1.0" encoding="utf-8"?>
+<p:notes xmlns:a="http://schemas.openxmlformats.org/drawingml/2006/main" xmlns:r="http://schemas.openxmlformats.org/officeDocument/2006/relationships" xmlns:p="http://schemas.openxmlformats.org/presentationml/2006/main">
+  <p:cSld>
+    <p:spTree>
+      <p:nvGrpSpPr>
+        <p:cNvPr id="1" name=""/>
+        <p:cNvGrpSpPr/>
+        <p:nvPr/>
+      </p:nvGrpSpPr>
+      <p:grpSpPr>
+        <a:xfrm>
+          <a:off x="0" y="0"/>
+          <a:ext cx="0" cy="0"/>
+          <a:chOff x="0" y="0"/>
+          <a:chExt cx="0" cy="0"/>
+        </a:xfrm>
+      </p:grpSpPr>
+      <p:sp>
+        <p:nvSpPr>
+          <p:cNvPr id="2" name="Slide Image Placeholder 1"/>
+          <p:cNvSpPr>
+            <a:spLocks noGrp="1" noRot="1" noChangeAspect="1"/>
+          </p:cNvSpPr>
+          <p:nvPr>
+            <p:ph type="sldImg" idx="2"/>
+          </p:nvPr>
+        </p:nvSpPr>
+        <p:spPr/>
+      </p:sp>
+      <p:sp>
+        <p:nvSpPr>
+          <p:cNvPr id="3" name="Notes Placeholder 2"/>
+          <p:cNvSpPr>
+            <a:spLocks noGrp="1"/>
+          </p:cNvSpPr>
+          <p:nvPr>
+            <p:ph type="body" sz="quarter" idx="3"/>
+          </p:nvPr>
+        </p:nvSpPr>
+        <p:spPr/>
+        <p:txBody>
+          <a:bodyPr/>
+          <a:lstStyle/>
+          <a:p>
+            <a:r>
+              <a:t>Two crews, not one, because Long Beach is far longer than Twin Harbors or Mocrocks and carries several thousand diggers on a good day. The paired northern survey is the explicit test of the imputation the whole program leans on.</a:t>
+            </a:r>
+          </a:p>
+        </p:txBody>
+      </p:sp>
+      <p:sp>
+        <p:nvSpPr>
+          <p:cNvPr id="4" name="Slide Number Placeholder 3"/>
+          <p:cNvSpPr>
+            <a:spLocks noGrp="1"/>
+          </p:cNvSpPr>
+          <p:nvPr>
+            <p:ph type="sldNum" sz="quarter" idx="5"/>
+          </p:nvPr>
+        </p:nvSpPr>
+        <p:spPr/>
+      </p:sp>
     </p:spTree>
   </p:cSld>
   <p:clrMapOvr>
@@ -937,7 +1235,7 @@
 </file>
 
 <file path=ppt/notesSlides/notesSlide19.xml><?xml version="1.0" encoding="utf-8"?>
-<p:notes xmlns:a="http://schemas.openxmlformats.org/drawingml/2006/main" xmlns:p="http://schemas.openxmlformats.org/presentationml/2006/main" xmlns:r="http://schemas.openxmlformats.org/officeDocument/2006/relationships">
+<p:notes xmlns:a="http://schemas.openxmlformats.org/drawingml/2006/main" xmlns:r="http://schemas.openxmlformats.org/officeDocument/2006/relationships" xmlns:p="http://schemas.openxmlformats.org/presentationml/2006/main">
   <p:cSld>
     <p:spTree>
       <p:nvGrpSpPr>
@@ -1032,57 +1330,7 @@
 </file>
 
 <file path=ppt/notesSlides/notesSlide20.xml><?xml version="1.0" encoding="utf-8"?>
-<p:notes xmlns:a="http://schemas.openxmlformats.org/drawingml/2006/main" xmlns:p="http://schemas.openxmlformats.org/presentationml/2006/main" xmlns:r="http://schemas.openxmlformats.org/officeDocument/2006/relationships">
-  <p:cSld>
-    <p:spTree>
-      <p:nvGrpSpPr>
-        <p:cNvPr id="1" name=""/>
-        <p:cNvGrpSpPr/>
-        <p:nvPr/>
-      </p:nvGrpSpPr>
-      <p:grpSpPr>
-        <a:xfrm>
-          <a:off x="0" y="0"/>
-          <a:ext cx="0" cy="0"/>
-          <a:chOff x="0" y="0"/>
-          <a:chExt cx="0" cy="0"/>
-        </a:xfrm>
-      </p:grpSpPr>
-    </p:spTree>
-  </p:cSld>
-  <p:clrMapOvr>
-    <a:masterClrMapping/>
-  </p:clrMapOvr>
-</p:notes>
-</file>
-
-<file path=ppt/notesSlides/notesSlide21.xml><?xml version="1.0" encoding="utf-8"?>
-<p:notes xmlns:a="http://schemas.openxmlformats.org/drawingml/2006/main" xmlns:p="http://schemas.openxmlformats.org/presentationml/2006/main" xmlns:r="http://schemas.openxmlformats.org/officeDocument/2006/relationships">
-  <p:cSld>
-    <p:spTree>
-      <p:nvGrpSpPr>
-        <p:cNvPr id="1" name=""/>
-        <p:cNvGrpSpPr/>
-        <p:nvPr/>
-      </p:nvGrpSpPr>
-      <p:grpSpPr>
-        <a:xfrm>
-          <a:off x="0" y="0"/>
-          <a:ext cx="0" cy="0"/>
-          <a:chOff x="0" y="0"/>
-          <a:chExt cx="0" cy="0"/>
-        </a:xfrm>
-      </p:grpSpPr>
-    </p:spTree>
-  </p:cSld>
-  <p:clrMapOvr>
-    <a:masterClrMapping/>
-  </p:clrMapOvr>
-</p:notes>
-</file>
-
-<file path=ppt/notesSlides/notesSlide22.xml><?xml version="1.0" encoding="utf-8"?>
-<p:notes xmlns:a="http://schemas.openxmlformats.org/drawingml/2006/main" xmlns:p="http://schemas.openxmlformats.org/presentationml/2006/main" xmlns:r="http://schemas.openxmlformats.org/officeDocument/2006/relationships">
+<p:notes xmlns:a="http://schemas.openxmlformats.org/drawingml/2006/main" xmlns:r="http://schemas.openxmlformats.org/officeDocument/2006/relationships" xmlns:p="http://schemas.openxmlformats.org/presentationml/2006/main">
   <p:cSld>
     <p:spTree>
       <p:nvGrpSpPr>
@@ -1123,51 +1371,6 @@
           <a:chExt cx="0" cy="0"/>
         </a:xfrm>
       </p:grpSpPr>
-      <p:sp>
-        <p:nvSpPr>
-          <p:cNvPr id="2" name="Slide Image Placeholder 1"/>
-          <p:cNvSpPr>
-            <a:spLocks noGrp="1" noRot="1" noChangeAspect="1"/>
-          </p:cNvSpPr>
-          <p:nvPr>
-            <p:ph type="sldImg" idx="2"/>
-          </p:nvPr>
-        </p:nvSpPr>
-        <p:spPr/>
-      </p:sp>
-      <p:sp>
-        <p:nvSpPr>
-          <p:cNvPr id="3" name="Notes Placeholder 2"/>
-          <p:cNvSpPr>
-            <a:spLocks noGrp="1"/>
-          </p:cNvSpPr>
-          <p:nvPr>
-            <p:ph type="body" sz="quarter" idx="3"/>
-          </p:nvPr>
-        </p:nvSpPr>
-        <p:spPr/>
-        <p:txBody>
-          <a:bodyPr/>
-          <a:lstStyle/>
-          <a:p>
-            <a:r>
-              <a:t>Sec 6.2-6.3. The instrument itself changed, which propagates into the imputation ratios.</a:t>
-            </a:r>
-          </a:p>
-        </p:txBody>
-      </p:sp>
-      <p:sp>
-        <p:nvSpPr>
-          <p:cNvPr id="4" name="Slide Number Placeholder 3"/>
-          <p:cNvSpPr>
-            <a:spLocks noGrp="1"/>
-          </p:cNvSpPr>
-          <p:nvPr>
-            <p:ph type="sldNum" sz="quarter" idx="5"/>
-          </p:nvPr>
-        </p:nvSpPr>
-        <p:spPr/>
-      </p:sp>
     </p:spTree>
   </p:cSld>
   <p:clrMapOvr>
@@ -1193,51 +1396,6 @@
           <a:chExt cx="0" cy="0"/>
         </a:xfrm>
       </p:grpSpPr>
-      <p:sp>
-        <p:nvSpPr>
-          <p:cNvPr id="2" name="Slide Image Placeholder 1"/>
-          <p:cNvSpPr>
-            <a:spLocks noGrp="1" noRot="1" noChangeAspect="1"/>
-          </p:cNvSpPr>
-          <p:nvPr>
-            <p:ph type="sldImg" idx="2"/>
-          </p:nvPr>
-        </p:nvSpPr>
-        <p:spPr/>
-      </p:sp>
-      <p:sp>
-        <p:nvSpPr>
-          <p:cNvPr id="3" name="Notes Placeholder 2"/>
-          <p:cNvSpPr>
-            <a:spLocks noGrp="1"/>
-          </p:cNvSpPr>
-          <p:nvPr>
-            <p:ph type="body" sz="quarter" idx="3"/>
-          </p:nvPr>
-        </p:nvSpPr>
-        <p:spPr/>
-        <p:txBody>
-          <a:bodyPr/>
-          <a:lstStyle/>
-          <a:p>
-            <a:r>
-              <a:t>Sec 10.1 / Table 14. Key reframing: magnitude is not what matters, correlation is.</a:t>
-            </a:r>
-          </a:p>
-        </p:txBody>
-      </p:sp>
-      <p:sp>
-        <p:nvSpPr>
-          <p:cNvPr id="4" name="Slide Number Placeholder 3"/>
-          <p:cNvSpPr>
-            <a:spLocks noGrp="1"/>
-          </p:cNvSpPr>
-          <p:nvPr>
-            <p:ph type="sldNum" sz="quarter" idx="5"/>
-          </p:nvPr>
-        </p:nvSpPr>
-        <p:spPr/>
-      </p:sp>
     </p:spTree>
   </p:cSld>
   <p:clrMapOvr>
@@ -1263,51 +1421,6 @@
           <a:chExt cx="0" cy="0"/>
         </a:xfrm>
       </p:grpSpPr>
-      <p:sp>
-        <p:nvSpPr>
-          <p:cNvPr id="2" name="Slide Image Placeholder 1"/>
-          <p:cNvSpPr>
-            <a:spLocks noGrp="1" noRot="1" noChangeAspect="1"/>
-          </p:cNvSpPr>
-          <p:nvPr>
-            <p:ph type="sldImg" idx="2"/>
-          </p:nvPr>
-        </p:nvSpPr>
-        <p:spPr/>
-      </p:sp>
-      <p:sp>
-        <p:nvSpPr>
-          <p:cNvPr id="3" name="Notes Placeholder 2"/>
-          <p:cNvSpPr>
-            <a:spLocks noGrp="1"/>
-          </p:cNvSpPr>
-          <p:nvPr>
-            <p:ph type="body" sz="quarter" idx="3"/>
-          </p:nvPr>
-        </p:nvSpPr>
-        <p:spPr/>
-        <p:txBody>
-          <a:bodyPr/>
-          <a:lstStyle/>
-          <a:p>
-            <a:r>
-              <a:t>Sec 10.2 / Tables 15-16. Foreshadows the donor question: the southern beaches are the donors.</a:t>
-            </a:r>
-          </a:p>
-        </p:txBody>
-      </p:sp>
-      <p:sp>
-        <p:nvSpPr>
-          <p:cNvPr id="4" name="Slide Number Placeholder 3"/>
-          <p:cNvSpPr>
-            <a:spLocks noGrp="1"/>
-          </p:cNvSpPr>
-          <p:nvPr>
-            <p:ph type="sldNum" sz="quarter" idx="5"/>
-          </p:nvPr>
-        </p:nvSpPr>
-        <p:spPr/>
-      </p:sp>
     </p:spTree>
   </p:cSld>
   <p:clrMapOvr>
@@ -1333,51 +1446,6 @@
           <a:chExt cx="0" cy="0"/>
         </a:xfrm>
       </p:grpSpPr>
-      <p:sp>
-        <p:nvSpPr>
-          <p:cNvPr id="2" name="Slide Image Placeholder 1"/>
-          <p:cNvSpPr>
-            <a:spLocks noGrp="1" noRot="1" noChangeAspect="1"/>
-          </p:cNvSpPr>
-          <p:nvPr>
-            <p:ph type="sldImg" idx="2"/>
-          </p:nvPr>
-        </p:nvSpPr>
-        <p:spPr/>
-      </p:sp>
-      <p:sp>
-        <p:nvSpPr>
-          <p:cNvPr id="3" name="Notes Placeholder 2"/>
-          <p:cNvSpPr>
-            <a:spLocks noGrp="1"/>
-          </p:cNvSpPr>
-          <p:nvPr>
-            <p:ph type="body" sz="quarter" idx="3"/>
-          </p:nvPr>
-        </p:nvSpPr>
-        <p:spPr/>
-        <p:txBody>
-          <a:bodyPr/>
-          <a:lstStyle/>
-          <a:p>
-            <a:r>
-              <a:t>Sec 11.2 / Table 19. The headline answer.</a:t>
-            </a:r>
-          </a:p>
-        </p:txBody>
-      </p:sp>
-      <p:sp>
-        <p:nvSpPr>
-          <p:cNvPr id="4" name="Slide Number Placeholder 3"/>
-          <p:cNvSpPr>
-            <a:spLocks noGrp="1"/>
-          </p:cNvSpPr>
-          <p:nvPr>
-            <p:ph type="sldNum" sz="quarter" idx="5"/>
-          </p:nvPr>
-        </p:nvSpPr>
-        <p:spPr/>
-      </p:sp>
     </p:spTree>
   </p:cSld>
   <p:clrMapOvr>
@@ -1403,51 +1471,6 @@
           <a:chExt cx="0" cy="0"/>
         </a:xfrm>
       </p:grpSpPr>
-      <p:sp>
-        <p:nvSpPr>
-          <p:cNvPr id="2" name="Slide Image Placeholder 1"/>
-          <p:cNvSpPr>
-            <a:spLocks noGrp="1" noRot="1" noChangeAspect="1"/>
-          </p:cNvSpPr>
-          <p:nvPr>
-            <p:ph type="sldImg" idx="2"/>
-          </p:nvPr>
-        </p:nvSpPr>
-        <p:spPr/>
-      </p:sp>
-      <p:sp>
-        <p:nvSpPr>
-          <p:cNvPr id="3" name="Notes Placeholder 2"/>
-          <p:cNvSpPr>
-            <a:spLocks noGrp="1"/>
-          </p:cNvSpPr>
-          <p:nvPr>
-            <p:ph type="body" sz="quarter" idx="3"/>
-          </p:nvPr>
-        </p:nvSpPr>
-        <p:spPr/>
-        <p:txBody>
-          <a:bodyPr/>
-          <a:lstStyle/>
-          <a:p>
-            <a:r>
-              <a:t>Sec 11.3 / Table 20.</a:t>
-            </a:r>
-          </a:p>
-        </p:txBody>
-      </p:sp>
-      <p:sp>
-        <p:nvSpPr>
-          <p:cNvPr id="4" name="Slide Number Placeholder 3"/>
-          <p:cNvSpPr>
-            <a:spLocks noGrp="1"/>
-          </p:cNvSpPr>
-          <p:nvPr>
-            <p:ph type="sldNum" sz="quarter" idx="5"/>
-          </p:nvPr>
-        </p:nvSpPr>
-        <p:spPr/>
-      </p:sp>
     </p:spTree>
   </p:cSld>
   <p:clrMapOvr>
@@ -1501,7 +1524,7 @@
           <a:lstStyle/>
           <a:p>
             <a:r>
-              <a:t>Sec 11.4 / Table 21. Only surveys move the floor.</a:t>
+              <a:t>Sec 6.2-6.3. The instrument itself changed, which propagates into the imputation ratios.</a:t>
             </a:r>
           </a:p>
         </p:txBody>
@@ -1571,7 +1594,7 @@
           <a:lstStyle/>
           <a:p>
             <a:r>
-              <a:t>Sec 11.5 / Table 22. Cost-neutral. But see the donor caveat next.</a:t>
+              <a:t>Sec 10.1 / Table 14. Key reframing: magnitude is not what matters, correlation is.</a:t>
             </a:r>
           </a:p>
         </p:txBody>
@@ -6689,6 +6712,690 @@
           <a:lstStyle/>
           <a:p>
             <a:r>
+              <a:t>The expansion table is the instrument, and it has moved</a:t>
+            </a:r>
+          </a:p>
+        </p:txBody>
+      </p:sp>
+      <p:sp>
+        <p:nvSpPr>
+          <p:cNvPr id="3" name="Content Placeholder 2"/>
+          <p:cNvSpPr>
+            <a:spLocks noGrp="1"/>
+          </p:cNvSpPr>
+          <p:nvPr>
+            <p:ph sz="half" idx="1"/>
+          </p:nvPr>
+        </p:nvSpPr>
+        <p:spPr/>
+        <p:txBody>
+          <a:bodyPr wrap="square"/>
+          <a:lstStyle/>
+          <a:p>
+            <a:r>
+              <a:rPr sz="1500" b="1"/>
+              <a:t>May 2013 correction: </a:t>
+            </a:r>
+            <a:r>
+              <a:rPr sz="1500"/>
+              <a:t>the old arithmetic underestimated harvest by ~16%; re-estimated day-by-day back to 1997-98.</a:t>
+            </a:r>
+          </a:p>
+          <a:p>
+            <a:r>
+              <a:rPr sz="1500"/>
+              <a:t>The correction factor, the share of a day's effort present at the count, is the load-bearing number.</a:t>
+            </a:r>
+          </a:p>
+          <a:p>
+            <a:r>
+              <a:rPr sz="1500" b="1"/>
+              <a:t>Long Beach's table was reshaped after 2013: </a:t>
+            </a:r>
+            <a:r>
+              <a:rPr sz="1500"/>
+              <a:t>+33% expanded effort for the same count.</a:t>
+            </a:r>
+          </a:p>
+          <a:p>
+            <a:r>
+              <a:rPr sz="1500"/>
+              <a:t>Comparing Long Beach effort across that change compares two different instruments.</a:t>
+            </a:r>
+          </a:p>
+        </p:txBody>
+      </p:sp>
+      <p:sp>
+        <p:nvSpPr>
+          <p:cNvPr id="5" name="Content Placeholder 4"/>
+          <p:cNvSpPr>
+            <a:spLocks noGrp="1"/>
+          </p:cNvSpPr>
+          <p:nvPr>
+            <p:ph sz="half" idx="11"/>
+          </p:nvPr>
+        </p:nvSpPr>
+        <p:spPr/>
+        <p:txBody>
+          <a:bodyPr/>
+          <a:lstStyle/>
+          <a:p>
+            <a:endParaRPr/>
+          </a:p>
+        </p:txBody>
+      </p:sp>
+      <p:pic>
+        <p:nvPicPr>
+          <p:cNvPr id="6" name="Picture 5" descr="fig09_operational_vs_vintage.png"/>
+          <p:cNvPicPr>
+            <a:picLocks noChangeAspect="1"/>
+          </p:cNvPicPr>
+          <p:nvPr/>
+        </p:nvPicPr>
+        <p:blipFill>
+          <a:blip r:embed="rId3"/>
+          <a:stretch>
+            <a:fillRect/>
+          </a:stretch>
+        </p:blipFill>
+        <p:spPr>
+          <a:xfrm>
+            <a:off x="6178610" y="1422412"/>
+            <a:ext cx="5403790" cy="3782653"/>
+          </a:xfrm>
+          <a:prstGeom prst="rect">
+            <a:avLst/>
+          </a:prstGeom>
+        </p:spPr>
+      </p:pic>
+    </p:spTree>
+  </p:cSld>
+  <p:clrMapOvr>
+    <a:masterClrMapping/>
+  </p:clrMapOvr>
+</p:sld>
+</file>
+
+<file path=ppt/slides/slide11.xml><?xml version="1.0" encoding="utf-8"?>
+<p:sld xmlns:a="http://schemas.openxmlformats.org/drawingml/2006/main" xmlns:r="http://schemas.openxmlformats.org/officeDocument/2006/relationships" xmlns:p="http://schemas.openxmlformats.org/presentationml/2006/main">
+  <p:cSld>
+    <p:spTree>
+      <p:nvGrpSpPr>
+        <p:cNvPr id="1" name=""/>
+        <p:cNvGrpSpPr/>
+        <p:nvPr/>
+      </p:nvGrpSpPr>
+      <p:grpSpPr>
+        <a:xfrm>
+          <a:off x="0" y="0"/>
+          <a:ext cx="0" cy="0"/>
+          <a:chOff x="0" y="0"/>
+          <a:chExt cx="0" cy="0"/>
+        </a:xfrm>
+      </p:grpSpPr>
+      <p:sp>
+        <p:nvSpPr>
+          <p:cNvPr id="2" name="Title 1"/>
+          <p:cNvSpPr>
+            <a:spLocks noGrp="1"/>
+          </p:cNvSpPr>
+          <p:nvPr>
+            <p:ph type="title"/>
+          </p:nvPr>
+        </p:nvSpPr>
+        <p:spPr/>
+        <p:txBody>
+          <a:bodyPr/>
+          <a:lstStyle/>
+          <a:p>
+            <a:r>
+              <a:t>The correction factor dominates, and it does not average down</a:t>
+            </a:r>
+          </a:p>
+        </p:txBody>
+      </p:sp>
+      <p:sp>
+        <p:nvSpPr>
+          <p:cNvPr id="3" name="Content Placeholder 2"/>
+          <p:cNvSpPr>
+            <a:spLocks noGrp="1"/>
+          </p:cNvSpPr>
+          <p:nvPr>
+            <p:ph sz="half" idx="1"/>
+          </p:nvPr>
+        </p:nvSpPr>
+        <p:spPr/>
+        <p:txBody>
+          <a:bodyPr wrap="square"/>
+          <a:lstStyle/>
+          <a:p>
+            <a:r>
+              <a:rPr sz="1500" b="1"/>
+              <a:t>71-96% of season effort variance </a:t>
+            </a:r>
+            <a:r>
+              <a:rPr sz="1500"/>
+              <a:t>at every beach is the correction factor.</a:t>
+            </a:r>
+          </a:p>
+          <a:p>
+            <a:r>
+              <a:rPr sz="1500"/>
+              <a:t>It is systematic: one table scales every beach-day, so counting more days cannot shrink it.</a:t>
+            </a:r>
+          </a:p>
+          <a:p>
+            <a:r>
+              <a:rPr sz="1500"/>
+              <a:t>Imputation is large on a single day but cancels within a tide series (lag-1 autocorrelation −0.68).</a:t>
+            </a:r>
+          </a:p>
+          <a:p>
+            <a:r>
+              <a:rPr sz="1500" b="1"/>
+              <a:t>The lever is surveys, not crew days </a:t>
+            </a:r>
+            <a:r>
+              <a:rPr sz="1500"/>
+              <a:t>for the term that dominates effort.</a:t>
+            </a:r>
+          </a:p>
+        </p:txBody>
+      </p:sp>
+      <p:sp>
+        <p:nvSpPr>
+          <p:cNvPr id="5" name="Content Placeholder 4"/>
+          <p:cNvSpPr>
+            <a:spLocks noGrp="1"/>
+          </p:cNvSpPr>
+          <p:nvPr>
+            <p:ph sz="half" idx="11"/>
+          </p:nvPr>
+        </p:nvSpPr>
+        <p:spPr/>
+        <p:txBody>
+          <a:bodyPr/>
+          <a:lstStyle/>
+          <a:p>
+            <a:endParaRPr/>
+          </a:p>
+        </p:txBody>
+      </p:sp>
+      <p:pic>
+        <p:nvPicPr>
+          <p:cNvPr id="6" name="Picture 5" descr="fig10_variance_shares.png"/>
+          <p:cNvPicPr>
+            <a:picLocks noChangeAspect="1"/>
+          </p:cNvPicPr>
+          <p:nvPr/>
+        </p:nvPicPr>
+        <p:blipFill>
+          <a:blip r:embed="rId3"/>
+          <a:stretch>
+            <a:fillRect/>
+          </a:stretch>
+        </p:blipFill>
+        <p:spPr>
+          <a:xfrm>
+            <a:off x="6178610" y="1839978"/>
+            <a:ext cx="5403790" cy="2947521"/>
+          </a:xfrm>
+          <a:prstGeom prst="rect">
+            <a:avLst/>
+          </a:prstGeom>
+        </p:spPr>
+      </p:pic>
+    </p:spTree>
+  </p:cSld>
+  <p:clrMapOvr>
+    <a:masterClrMapping/>
+  </p:clrMapOvr>
+</p:sld>
+</file>
+
+<file path=ppt/slides/slide12.xml><?xml version="1.0" encoding="utf-8"?>
+<p:sld xmlns:a="http://schemas.openxmlformats.org/drawingml/2006/main" xmlns:r="http://schemas.openxmlformats.org/officeDocument/2006/relationships" xmlns:p="http://schemas.openxmlformats.org/presentationml/2006/main">
+  <p:cSld>
+    <p:spTree>
+      <p:nvGrpSpPr>
+        <p:cNvPr id="1" name=""/>
+        <p:cNvGrpSpPr/>
+        <p:nvPr/>
+      </p:nvGrpSpPr>
+      <p:grpSpPr>
+        <a:xfrm>
+          <a:off x="0" y="0"/>
+          <a:ext cx="0" cy="0"/>
+          <a:chOff x="0" y="0"/>
+          <a:chExt cx="0" cy="0"/>
+        </a:xfrm>
+      </p:grpSpPr>
+      <p:sp>
+        <p:nvSpPr>
+          <p:cNvPr id="2" name="Title 1"/>
+          <p:cNvSpPr>
+            <a:spLocks noGrp="1"/>
+          </p:cNvSpPr>
+          <p:nvPr>
+            <p:ph type="title"/>
+          </p:nvPr>
+        </p:nvSpPr>
+        <p:spPr/>
+        <p:txBody>
+          <a:bodyPr/>
+          <a:lstStyle/>
+          <a:p>
+            <a:r>
+              <a:t>For harvest, borrowed catch rate is the largest term up north</a:t>
+            </a:r>
+          </a:p>
+        </p:txBody>
+      </p:sp>
+      <p:sp>
+        <p:nvSpPr>
+          <p:cNvPr id="3" name="Content Placeholder 2"/>
+          <p:cNvSpPr>
+            <a:spLocks noGrp="1"/>
+          </p:cNvSpPr>
+          <p:nvPr>
+            <p:ph sz="half" idx="1"/>
+          </p:nvPr>
+        </p:nvSpPr>
+        <p:spPr/>
+        <p:txBody>
+          <a:bodyPr wrap="square"/>
+          <a:lstStyle/>
+          <a:p>
+            <a:r>
+              <a:rPr sz="1500" b="1"/>
+              <a:t>CPUE transfer (borrowed catch rate on uncounted days): </a:t>
+            </a:r>
+            <a:r>
+              <a:rPr sz="1500"/>
+              <a:t>39% of harvest variance at Long Beach, 56% at Twin Harbors.</a:t>
+            </a:r>
+          </a:p>
+          <a:p>
+            <a:r>
+              <a:rPr sz="1500"/>
+              <a:t>Single-day imputation error is large (sd 0.54 in log) but roughly unbiased and cancels when summed.</a:t>
+            </a:r>
+          </a:p>
+          <a:p>
+            <a:r>
+              <a:rPr sz="1500" b="1"/>
+              <a:t>Best donor for the two northern beaches: </a:t>
+            </a:r>
+            <a:r>
+              <a:rPr sz="1500"/>
+              <a:t>Copalis and Mocrocks jointly (sd 0.43 / 0.37).</a:t>
+            </a:r>
+          </a:p>
+        </p:txBody>
+      </p:sp>
+      <p:sp>
+        <p:nvSpPr>
+          <p:cNvPr id="5" name="Content Placeholder 4"/>
+          <p:cNvSpPr>
+            <a:spLocks noGrp="1"/>
+          </p:cNvSpPr>
+          <p:nvPr>
+            <p:ph sz="half" idx="11"/>
+          </p:nvPr>
+        </p:nvSpPr>
+        <p:spPr/>
+        <p:txBody>
+          <a:bodyPr/>
+          <a:lstStyle/>
+          <a:p>
+            <a:endParaRPr/>
+          </a:p>
+        </p:txBody>
+      </p:sp>
+      <p:pic>
+        <p:nvPicPr>
+          <p:cNvPr id="6" name="Picture 5" descr="fig11_imputation_error.png"/>
+          <p:cNvPicPr>
+            <a:picLocks noChangeAspect="1"/>
+          </p:cNvPicPr>
+          <p:nvPr/>
+        </p:nvPicPr>
+        <p:blipFill>
+          <a:blip r:embed="rId3"/>
+          <a:stretch>
+            <a:fillRect/>
+          </a:stretch>
+        </p:blipFill>
+        <p:spPr>
+          <a:xfrm>
+            <a:off x="6178610" y="2085605"/>
+            <a:ext cx="5403790" cy="2456268"/>
+          </a:xfrm>
+          <a:prstGeom prst="rect">
+            <a:avLst/>
+          </a:prstGeom>
+        </p:spPr>
+      </p:pic>
+    </p:spTree>
+  </p:cSld>
+  <p:clrMapOvr>
+    <a:masterClrMapping/>
+  </p:clrMapOvr>
+</p:sld>
+</file>
+
+<file path=ppt/slides/slide13.xml><?xml version="1.0" encoding="utf-8"?>
+<p:sld xmlns:a="http://schemas.openxmlformats.org/drawingml/2006/main" xmlns:r="http://schemas.openxmlformats.org/officeDocument/2006/relationships" xmlns:p="http://schemas.openxmlformats.org/presentationml/2006/main">
+  <p:cSld>
+    <p:spTree>
+      <p:nvGrpSpPr>
+        <p:cNvPr id="1" name=""/>
+        <p:cNvGrpSpPr/>
+        <p:nvPr/>
+      </p:nvGrpSpPr>
+      <p:grpSpPr>
+        <a:xfrm>
+          <a:off x="0" y="0"/>
+          <a:ext cx="0" cy="0"/>
+          <a:chOff x="0" y="0"/>
+          <a:chExt cx="0" cy="0"/>
+        </a:xfrm>
+      </p:grpSpPr>
+      <p:sp>
+        <p:nvSpPr>
+          <p:cNvPr id="2" name="Title 1"/>
+          <p:cNvSpPr>
+            <a:spLocks noGrp="1"/>
+          </p:cNvSpPr>
+          <p:nvPr>
+            <p:ph type="ctrTitle"/>
+          </p:nvPr>
+        </p:nvSpPr>
+        <p:spPr/>
+        <p:txBody>
+          <a:bodyPr/>
+          <a:lstStyle/>
+          <a:p>
+            <a:r>
+              <a:t>How many days, and which ones</a:t>
+            </a:r>
+          </a:p>
+        </p:txBody>
+      </p:sp>
+    </p:spTree>
+  </p:cSld>
+  <p:clrMapOvr>
+    <a:masterClrMapping/>
+  </p:clrMapOvr>
+</p:sld>
+</file>
+
+<file path=ppt/slides/slide14.xml><?xml version="1.0" encoding="utf-8"?>
+<p:sld xmlns:a="http://schemas.openxmlformats.org/drawingml/2006/main" xmlns:r="http://schemas.openxmlformats.org/officeDocument/2006/relationships" xmlns:p="http://schemas.openxmlformats.org/presentationml/2006/main">
+  <p:cSld>
+    <p:spTree>
+      <p:nvGrpSpPr>
+        <p:cNvPr id="1" name=""/>
+        <p:cNvGrpSpPr/>
+        <p:nvPr/>
+      </p:nvGrpSpPr>
+      <p:grpSpPr>
+        <a:xfrm>
+          <a:off x="0" y="0"/>
+          <a:ext cx="0" cy="0"/>
+          <a:chOff x="0" y="0"/>
+          <a:chExt cx="0" cy="0"/>
+        </a:xfrm>
+      </p:grpSpPr>
+      <p:sp>
+        <p:nvSpPr>
+          <p:cNvPr id="2" name="Title 1"/>
+          <p:cNvSpPr>
+            <a:spLocks noGrp="1"/>
+          </p:cNvSpPr>
+          <p:nvPr>
+            <p:ph type="title"/>
+          </p:nvPr>
+        </p:nvSpPr>
+        <p:spPr/>
+        <p:txBody>
+          <a:bodyPr/>
+          <a:lstStyle/>
+          <a:p>
+            <a:r>
+              <a:t>Count about 45% of a beach's open days, with a floor of two</a:t>
+            </a:r>
+          </a:p>
+        </p:txBody>
+      </p:sp>
+      <p:sp>
+        <p:nvSpPr>
+          <p:cNvPr id="3" name="Content Placeholder 2"/>
+          <p:cNvSpPr>
+            <a:spLocks noGrp="1"/>
+          </p:cNvSpPr>
+          <p:nvPr>
+            <p:ph sz="half" idx="1"/>
+          </p:nvPr>
+        </p:nvSpPr>
+        <p:spPr/>
+        <p:txBody>
+          <a:bodyPr wrap="square"/>
+          <a:lstStyle/>
+          <a:p>
+            <a:r>
+              <a:rPr sz="1500" b="1"/>
+              <a:t>Count 2 of a 4- or 5-day series; </a:t>
+            </a:r>
+            <a:r>
+              <a:rPr sz="1500"/>
+              <a:t>3 of a 6- or 7-day series.</a:t>
+            </a:r>
+          </a:p>
+          <a:p>
+            <a:r>
+              <a:rPr sz="1500"/>
+              <a:t>Counting one day per series never meets CV 0.20 (0.21-0.31 at m = 1).</a:t>
+            </a:r>
+          </a:p>
+          <a:p>
+            <a:r>
+              <a:rPr sz="1500" b="1"/>
+              <a:t>Read it as 45% of open days, floor of two.</a:t>
+            </a:r>
+          </a:p>
+          <a:p>
+            <a:r>
+              <a:rPr sz="1500"/>
+              <a:t>Exception: Copalis needs all three of a three-day series, its floor, not sampling, binds.</a:t>
+            </a:r>
+          </a:p>
+        </p:txBody>
+      </p:sp>
+      <p:sp>
+        <p:nvSpPr>
+          <p:cNvPr id="5" name="Content Placeholder 4"/>
+          <p:cNvSpPr>
+            <a:spLocks noGrp="1"/>
+          </p:cNvSpPr>
+          <p:nvPr>
+            <p:ph sz="half" idx="11"/>
+          </p:nvPr>
+        </p:nvSpPr>
+        <p:spPr/>
+        <p:txBody>
+          <a:bodyPr/>
+          <a:lstStyle/>
+          <a:p>
+            <a:endParaRPr/>
+          </a:p>
+        </p:txBody>
+      </p:sp>
+      <p:pic>
+        <p:nvPicPr>
+          <p:cNvPr id="6" name="Picture 5" descr="fig13_tide_series_cv.png"/>
+          <p:cNvPicPr>
+            <a:picLocks noChangeAspect="1"/>
+          </p:cNvPicPr>
+          <p:nvPr/>
+        </p:nvPicPr>
+        <p:blipFill>
+          <a:blip r:embed="rId3"/>
+          <a:stretch>
+            <a:fillRect/>
+          </a:stretch>
+        </p:blipFill>
+        <p:spPr>
+          <a:xfrm>
+            <a:off x="6178610" y="1692602"/>
+            <a:ext cx="5403790" cy="3242274"/>
+          </a:xfrm>
+          <a:prstGeom prst="rect">
+            <a:avLst/>
+          </a:prstGeom>
+        </p:spPr>
+      </p:pic>
+    </p:spTree>
+  </p:cSld>
+  <p:clrMapOvr>
+    <a:masterClrMapping/>
+  </p:clrMapOvr>
+</p:sld>
+</file>
+
+<file path=ppt/slides/slide15.xml><?xml version="1.0" encoding="utf-8"?>
+<p:sld xmlns:a="http://schemas.openxmlformats.org/drawingml/2006/main" xmlns:r="http://schemas.openxmlformats.org/officeDocument/2006/relationships" xmlns:p="http://schemas.openxmlformats.org/presentationml/2006/main">
+  <p:cSld>
+    <p:spTree>
+      <p:nvGrpSpPr>
+        <p:cNvPr id="1" name=""/>
+        <p:cNvGrpSpPr/>
+        <p:nvPr/>
+      </p:nvGrpSpPr>
+      <p:grpSpPr>
+        <a:xfrm>
+          <a:off x="0" y="0"/>
+          <a:ext cx="0" cy="0"/>
+          <a:chOff x="0" y="0"/>
+          <a:chExt cx="0" cy="0"/>
+        </a:xfrm>
+      </p:grpSpPr>
+      <p:sp>
+        <p:nvSpPr>
+          <p:cNvPr id="2" name="Title 1"/>
+          <p:cNvSpPr>
+            <a:spLocks noGrp="1"/>
+          </p:cNvSpPr>
+          <p:nvPr>
+            <p:ph type="title"/>
+          </p:nvPr>
+        </p:nvSpPr>
+        <p:spPr/>
+        <p:txBody>
+          <a:bodyPr/>
+          <a:lstStyle/>
+          <a:p>
+            <a:r>
+              <a:t>Which days to count: the largest-effort days</a:t>
+            </a:r>
+          </a:p>
+        </p:txBody>
+      </p:sp>
+      <p:sp>
+        <p:nvSpPr>
+          <p:cNvPr id="3" name="Content Placeholder 2"/>
+          <p:cNvSpPr>
+            <a:spLocks noGrp="1"/>
+          </p:cNvSpPr>
+          <p:nvPr>
+            <p:ph idx="1"/>
+          </p:nvPr>
+        </p:nvSpPr>
+        <p:spPr/>
+        <p:txBody>
+          <a:bodyPr wrap="square">
+            <a:normAutofit/>
+          </a:bodyPr>
+          <a:lstStyle/>
+          <a:p>
+            <a:r>
+              <a:rPr sz="2800" b="1" dirty="0"/>
+              <a:t>Selecting the largest-effort days beats an even spread by 4-11 CV points </a:t>
+            </a:r>
+            <a:r>
+              <a:rPr sz="2800" dirty="0"/>
+              <a:t>at every series length tested.</a:t>
+            </a:r>
+          </a:p>
+          <a:p>
+            <a:r>
+              <a:rPr sz="2800" b="1" dirty="0"/>
+              <a:t>Small bias penalty (1-6%), </a:t>
+            </a:r>
+            <a:r>
+              <a:rPr sz="2800" dirty="0"/>
+              <a:t>no worse than the alternatives.</a:t>
+            </a:r>
+          </a:p>
+          <a:p>
+            <a:r>
+              <a:rPr sz="2800" dirty="0"/>
+              <a:t>The program already does this implicitly, staffing the opening weekend and the biggest tides.</a:t>
+            </a:r>
+          </a:p>
+          <a:p>
+            <a:r>
+              <a:rPr sz="2800" b="1" dirty="0"/>
+              <a:t>It is correct. </a:t>
+            </a:r>
+            <a:r>
+              <a:rPr sz="2800" dirty="0"/>
+              <a:t>Which days will be largest is well predicted by the schedule, tide height, and day of week.</a:t>
+            </a:r>
+          </a:p>
+        </p:txBody>
+      </p:sp>
+    </p:spTree>
+  </p:cSld>
+  <p:clrMapOvr>
+    <a:masterClrMapping/>
+  </p:clrMapOvr>
+</p:sld>
+</file>
+
+<file path=ppt/slides/slide16.xml><?xml version="1.0" encoding="utf-8"?>
+<p:sld xmlns:a="http://schemas.openxmlformats.org/drawingml/2006/main" xmlns:r="http://schemas.openxmlformats.org/officeDocument/2006/relationships" xmlns:p="http://schemas.openxmlformats.org/presentationml/2006/main">
+  <p:cSld>
+    <p:spTree>
+      <p:nvGrpSpPr>
+        <p:cNvPr id="1" name=""/>
+        <p:cNvGrpSpPr/>
+        <p:nvPr/>
+      </p:nvGrpSpPr>
+      <p:grpSpPr>
+        <a:xfrm>
+          <a:off x="0" y="0"/>
+          <a:ext cx="0" cy="0"/>
+          <a:chOff x="0" y="0"/>
+          <a:chExt cx="0" cy="0"/>
+        </a:xfrm>
+      </p:grpSpPr>
+      <p:sp>
+        <p:nvSpPr>
+          <p:cNvPr id="2" name="Title 1"/>
+          <p:cNvSpPr>
+            <a:spLocks noGrp="1"/>
+          </p:cNvSpPr>
+          <p:nvPr>
+            <p:ph type="title"/>
+          </p:nvPr>
+        </p:nvSpPr>
+        <p:spPr/>
+        <p:txBody>
+          <a:bodyPr/>
+          <a:lstStyle/>
+          <a:p>
+            <a:r>
               <a:t>Some precision cannot be bought with crew days</a:t>
             </a:r>
           </a:p>
@@ -6787,7 +7494,7 @@
 </p:sld>
 </file>
 
-<file path=ppt/slides/slide11.xml><?xml version="1.0" encoding="utf-8"?>
+<file path=ppt/slides/slide17.xml><?xml version="1.0" encoding="utf-8"?>
 <p:sld xmlns:a="http://schemas.openxmlformats.org/drawingml/2006/main" xmlns:r="http://schemas.openxmlformats.org/officeDocument/2006/relationships" xmlns:p="http://schemas.openxmlformats.org/presentationml/2006/main">
   <p:cSld>
     <p:spTree>
@@ -7499,7 +8206,7 @@
 </p:sld>
 </file>
 
-<file path=ppt/slides/slide12.xml><?xml version="1.0" encoding="utf-8"?>
+<file path=ppt/slides/slide18.xml><?xml version="1.0" encoding="utf-8"?>
 <p:sld xmlns:a="http://schemas.openxmlformats.org/drawingml/2006/main" xmlns:r="http://schemas.openxmlformats.org/officeDocument/2006/relationships" xmlns:p="http://schemas.openxmlformats.org/presentationml/2006/main">
   <p:cSld>
     <p:spTree>
@@ -7545,7 +8252,7 @@
 </p:sld>
 </file>
 
-<file path=ppt/slides/slide13.xml><?xml version="1.0" encoding="utf-8"?>
+<file path=ppt/slides/slide19.xml><?xml version="1.0" encoding="utf-8"?>
 <p:sld xmlns:a="http://schemas.openxmlformats.org/drawingml/2006/main" xmlns:r="http://schemas.openxmlformats.org/officeDocument/2006/relationships" xmlns:p="http://schemas.openxmlformats.org/presentationml/2006/main">
   <p:cSld>
     <p:spTree>
@@ -7682,7 +8389,97 @@
 </p:sld>
 </file>
 
-<file path=ppt/slides/slide14.xml><?xml version="1.0" encoding="utf-8"?>
+<file path=ppt/slides/slide2.xml><?xml version="1.0" encoding="utf-8"?>
+<p:sld xmlns:a="http://schemas.openxmlformats.org/drawingml/2006/main" xmlns:r="http://schemas.openxmlformats.org/officeDocument/2006/relationships" xmlns:p="http://schemas.openxmlformats.org/presentationml/2006/main">
+  <p:cSld>
+    <p:spTree>
+      <p:nvGrpSpPr>
+        <p:cNvPr id="1" name=""/>
+        <p:cNvGrpSpPr/>
+        <p:nvPr/>
+      </p:nvGrpSpPr>
+      <p:grpSpPr>
+        <a:xfrm>
+          <a:off x="0" y="0"/>
+          <a:ext cx="0" cy="0"/>
+          <a:chOff x="0" y="0"/>
+          <a:chExt cx="0" cy="0"/>
+        </a:xfrm>
+      </p:grpSpPr>
+      <p:sp>
+        <p:nvSpPr>
+          <p:cNvPr id="2" name="Title 1"/>
+          <p:cNvSpPr>
+            <a:spLocks noGrp="1"/>
+          </p:cNvSpPr>
+          <p:nvPr>
+            <p:ph type="title"/>
+          </p:nvPr>
+        </p:nvSpPr>
+        <p:spPr/>
+        <p:txBody>
+          <a:bodyPr/>
+          <a:lstStyle/>
+          <a:p>
+            <a:r>
+              <a:t>The question this answers</a:t>
+            </a:r>
+          </a:p>
+        </p:txBody>
+      </p:sp>
+      <p:sp>
+        <p:nvSpPr>
+          <p:cNvPr id="3" name="Content Placeholder 2"/>
+          <p:cNvSpPr>
+            <a:spLocks noGrp="1"/>
+          </p:cNvSpPr>
+          <p:nvPr>
+            <p:ph idx="1"/>
+          </p:nvPr>
+        </p:nvSpPr>
+        <p:spPr/>
+        <p:txBody>
+          <a:bodyPr wrap="square"/>
+          <a:lstStyle/>
+          <a:p>
+            <a:r>
+              <a:rPr b="1"/>
+              <a:t>Given a crew of finite size: </a:t>
+            </a:r>
+            <a:r>
+              <a:t>how many beach-days per tide series must be counted, and which ones?</a:t>
+            </a:r>
+          </a:p>
+          <a:p>
+            <a:r>
+              <a:t>This is new work, the program has never had a quantitative answer.</a:t>
+            </a:r>
+          </a:p>
+          <a:p>
+            <a:r>
+              <a:rPr b="1"/>
+              <a:t>Judged against a published standard: </a:t>
+            </a:r>
+            <a:r>
+              <a:t>CV ≤ 0.20 (creel-survey design target) and NOAA MRIP's ≤ 0.30 publication threshold.</a:t>
+            </a:r>
+          </a:p>
+          <a:p>
+            <a:r>
+              <a:t>Every figure here is a lower bound: it excludes beach-count observer error, which has never been measured.</a:t>
+            </a:r>
+          </a:p>
+        </p:txBody>
+      </p:sp>
+    </p:spTree>
+  </p:cSld>
+  <p:clrMapOvr>
+    <a:masterClrMapping/>
+  </p:clrMapOvr>
+</p:sld>
+</file>
+
+<file path=ppt/slides/slide20.xml><?xml version="1.0" encoding="utf-8"?>
 <p:sld xmlns:a="http://schemas.openxmlformats.org/drawingml/2006/main" xmlns:r="http://schemas.openxmlformats.org/officeDocument/2006/relationships" xmlns:p="http://schemas.openxmlformats.org/presentationml/2006/main">
   <p:cSld>
     <p:spTree>
@@ -7827,7 +8624,7 @@
 </p:sld>
 </file>
 
-<file path=ppt/slides/slide15.xml><?xml version="1.0" encoding="utf-8"?>
+<file path=ppt/slides/slide21.xml><?xml version="1.0" encoding="utf-8"?>
 <p:sld xmlns:a="http://schemas.openxmlformats.org/drawingml/2006/main" xmlns:r="http://schemas.openxmlformats.org/officeDocument/2006/relationships" xmlns:p="http://schemas.openxmlformats.org/presentationml/2006/main">
   <p:cSld>
     <p:spTree>
@@ -7873,7 +8670,7 @@
 </p:sld>
 </file>
 
-<file path=ppt/slides/slide16.xml><?xml version="1.0" encoding="utf-8"?>
+<file path=ppt/slides/slide22.xml><?xml version="1.0" encoding="utf-8"?>
 <p:sld xmlns:a="http://schemas.openxmlformats.org/drawingml/2006/main" xmlns:r="http://schemas.openxmlformats.org/officeDocument/2006/relationships" xmlns:p="http://schemas.openxmlformats.org/presentationml/2006/main">
   <p:cSld>
     <p:spTree>
@@ -8339,7 +9136,7 @@
 </p:sld>
 </file>
 
-<file path=ppt/slides/slide17.xml><?xml version="1.0" encoding="utf-8"?>
+<file path=ppt/slides/slide23.xml><?xml version="1.0" encoding="utf-8"?>
 <p:sld xmlns:a="http://schemas.openxmlformats.org/drawingml/2006/main" xmlns:r="http://schemas.openxmlformats.org/officeDocument/2006/relationships" xmlns:p="http://schemas.openxmlformats.org/presentationml/2006/main">
   <p:cSld>
     <p:spTree>
@@ -8753,7 +9550,7 @@
 </p:sld>
 </file>
 
-<file path=ppt/slides/slide2.xml><?xml version="1.0" encoding="utf-8"?>
+<file path=ppt/slides/slide24.xml><?xml version="1.0" encoding="utf-8"?>
 <p:sld xmlns:a="http://schemas.openxmlformats.org/drawingml/2006/main" xmlns:r="http://schemas.openxmlformats.org/officeDocument/2006/relationships" xmlns:p="http://schemas.openxmlformats.org/presentationml/2006/main">
   <p:cSld>
     <p:spTree>
@@ -8786,51 +9583,68 @@
           <a:lstStyle/>
           <a:p>
             <a:r>
-              <a:t>The question this answers</a:t>
-            </a:r>
-          </a:p>
-        </p:txBody>
-      </p:sp>
-      <p:sp>
-        <p:nvSpPr>
-          <p:cNvPr id="3" name="Content Placeholder 2"/>
-          <p:cNvSpPr>
-            <a:spLocks noGrp="1"/>
-          </p:cNvSpPr>
-          <p:nvPr>
-            <p:ph idx="1"/>
-          </p:nvPr>
-        </p:nvSpPr>
-        <p:spPr/>
-        <p:txBody>
-          <a:bodyPr wrap="square"/>
+              <a:t>Why not just one fall and one spring survey?</a:t>
+            </a:r>
+          </a:p>
+        </p:txBody>
+      </p:sp>
+      <p:pic>
+        <p:nvPicPr>
+          <p:cNvPr id="3" name="Picture 2" descr="fig16_lb_survey_target.png"/>
+          <p:cNvPicPr>
+            <a:picLocks noChangeAspect="1"/>
+          </p:cNvPicPr>
+          <p:nvPr/>
+        </p:nvPicPr>
+        <p:blipFill>
+          <a:blip r:embed="rId3"/>
+          <a:stretch>
+            <a:fillRect/>
+          </a:stretch>
+        </p:blipFill>
+        <p:spPr>
+          <a:xfrm>
+            <a:off x="2475411" y="1051560"/>
+            <a:ext cx="7210697" cy="4206240"/>
+          </a:xfrm>
+          <a:prstGeom prst="rect">
+            <a:avLst/>
+          </a:prstGeom>
+        </p:spPr>
+      </p:pic>
+      <p:sp>
+        <p:nvSpPr>
+          <p:cNvPr id="4" name="TextBox 3"/>
+          <p:cNvSpPr txBox="1"/>
+          <p:nvPr/>
+        </p:nvSpPr>
+        <p:spPr>
+          <a:xfrm>
+            <a:off x="594360" y="5532120"/>
+            <a:ext cx="10972800" cy="822960"/>
+          </a:xfrm>
+          <a:prstGeom prst="rect">
+            <a:avLst/>
+          </a:prstGeom>
+          <a:noFill/>
+        </p:spPr>
+        <p:txBody>
+          <a:bodyPr wrap="square">
+            <a:spAutoFit/>
+          </a:bodyPr>
           <a:lstStyle/>
           <a:p>
             <a:r>
-              <a:rPr b="1"/>
-              <a:t>Given a crew of finite size: </a:t>
-            </a:r>
-            <a:r>
-              <a:t>how many beach-days per tide series must be counted, and which ones?</a:t>
-            </a:r>
-          </a:p>
-          <a:p>
-            <a:r>
-              <a:t>This is new work, the program has never had a quantitative answer.</a:t>
-            </a:r>
-          </a:p>
-          <a:p>
-            <a:r>
-              <a:rPr b="1"/>
-              <a:t>Judged against a published standard: </a:t>
-            </a:r>
-            <a:r>
-              <a:t>CV ≤ 0.20 (creel-survey design target) and NOAA MRIP's ≤ 0.30 publication threshold.</a:t>
-            </a:r>
-          </a:p>
-          <a:p>
-            <a:r>
-              <a:t>Every figure here is a lower bound: it excludes beach-count observer error, which has never been measured.</a:t>
+              <a:rPr sz="1250" b="1">
+                <a:solidFill>
+                  <a:srgbClr val="1B3A5C"/>
+                </a:solidFill>
+              </a:rPr>
+              <a:t>In plain terms:  </a:t>
+            </a:r>
+            <a:r>
+              <a:rPr sz="1250"/>
+              <a:t>one survey per condition pins the shape and is worth doing; but the correction factor swings about 30% per survey, so precision improves only as 1 over root-N. About eight surveys halve today's uncertainty, and a whole-beach survey also retires the section-ratio error.</a:t>
             </a:r>
           </a:p>
         </p:txBody>
@@ -8843,7 +9657,7 @@
 </p:sld>
 </file>
 
-<file path=ppt/slides/slide20.xml><?xml version="1.0" encoding="utf-8"?>
+<file path=ppt/slides/slide25.xml><?xml version="1.0" encoding="utf-8"?>
 <p:sld xmlns:a="http://schemas.openxmlformats.org/drawingml/2006/main" xmlns:r="http://schemas.openxmlformats.org/officeDocument/2006/relationships" xmlns:p="http://schemas.openxmlformats.org/presentationml/2006/main">
   <p:cSld>
     <p:spTree>
@@ -8867,7 +9681,7 @@
             <a:spLocks noGrp="1"/>
           </p:cNvSpPr>
           <p:nvPr>
-            <p:ph type="ctrTitle"/>
+            <p:ph type="title"/>
           </p:nvPr>
         </p:nvSpPr>
         <p:spPr/>
@@ -8876,541 +9690,73 @@
           <a:lstStyle/>
           <a:p>
             <a:r>
-              <a:t>Discussion</a:t>
-            </a:r>
-          </a:p>
-        </p:txBody>
-      </p:sp>
-    </p:spTree>
-  </p:cSld>
-  <p:clrMapOvr>
-    <a:masterClrMapping/>
-  </p:clrMapOvr>
-</p:sld>
-</file>
-
-<file path=ppt/slides/slide21.xml><?xml version="1.0" encoding="utf-8"?>
-<p:sld xmlns:a="http://schemas.openxmlformats.org/drawingml/2006/main" xmlns:p="http://schemas.openxmlformats.org/presentationml/2006/main" xmlns:r="http://schemas.openxmlformats.org/officeDocument/2006/relationships">
-  <p:cSld>
-    <p:spTree>
-      <p:nvGrpSpPr>
-        <p:cNvPr id="1" name=""/>
-        <p:cNvGrpSpPr/>
-        <p:nvPr/>
-      </p:nvGrpSpPr>
-      <p:grpSpPr/>
-      <p:sp>
-        <p:nvSpPr>
-          <p:cNvPr id="2" name="Title 1"/>
+              <a:t>Recommendations, in priority order</a:t>
+            </a:r>
+          </a:p>
+        </p:txBody>
+      </p:sp>
+      <p:sp>
+        <p:nvSpPr>
+          <p:cNvPr id="3" name="Content Placeholder 2"/>
           <p:cNvSpPr>
             <a:spLocks noGrp="1"/>
           </p:cNvSpPr>
           <p:nvPr>
-            <p:ph type="ctrTitle"/>
+            <p:ph idx="1"/>
           </p:nvPr>
         </p:nvSpPr>
         <p:spPr/>
         <p:txBody>
-          <a:bodyPr/>
+          <a:bodyPr wrap="square"/>
           <a:lstStyle/>
           <a:p>
             <a:r>
-              <a:t>How the estimate works today</a:t>
-            </a:r>
-          </a:p>
-        </p:txBody>
-      </p:sp>
-    </p:spTree>
-  </p:cSld>
-  <p:clrMapOvr>
-    <a:masterClrMapping/>
-  </p:clrMapOvr>
-</p:sld>
-</file>
-
-<file path=ppt/slides/slide22.xml><?xml version="1.0" encoding="utf-8"?>
-<p:sld xmlns:a="http://schemas.openxmlformats.org/drawingml/2006/main" xmlns:p="http://schemas.openxmlformats.org/presentationml/2006/main" xmlns:r="http://schemas.openxmlformats.org/officeDocument/2006/relationships">
-  <p:cSld>
-    <p:spTree>
-      <p:nvGrpSpPr>
-        <p:cNvPr id="1" name=""/>
-        <p:cNvGrpSpPr/>
-        <p:nvPr/>
-      </p:nvGrpSpPr>
-      <p:grpSpPr/>
-      <p:sp>
-        <p:nvSpPr>
-          <p:cNvPr id="2" name="Title 1"/>
-          <p:cNvSpPr>
-            <a:spLocks noGrp="1"/>
-          </p:cNvSpPr>
-          <p:nvPr>
-            <p:ph type="title"/>
-          </p:nvPr>
-        </p:nvSpPr>
-        <p:spPr/>
-        <p:txBody>
-          <a:bodyPr/>
-          <a:lstStyle/>
-          <a:p>
-            <a:r>
-              <a:t>From a head-count to a season total</a:t>
-            </a:r>
-          </a:p>
-        </p:txBody>
-      </p:sp>
-      <p:pic>
-        <p:nvPicPr>
-          <p:cNvPr id="3" name="Picture 2" descr="fig17_estimation_flow.png"/>
-          <p:cNvPicPr>
-            <a:picLocks noChangeAspect="1"/>
-          </p:cNvPicPr>
-          <p:nvPr/>
-        </p:nvPicPr>
-        <p:blipFill>
-          <a:blip r:embed="rId2"/>
-          <a:stretch>
-            <a:fillRect/>
-          </a:stretch>
-        </p:blipFill>
-        <p:spPr>
-          <a:xfrm>
-            <a:off x="2283460" y="1143000"/>
-            <a:ext cx="7594600" cy="4206240"/>
-          </a:xfrm>
-          <a:prstGeom prst="rect">
-            <a:avLst/>
-          </a:prstGeom>
-        </p:spPr>
-      </p:pic>
-      <p:sp>
-        <p:nvSpPr>
-          <p:cNvPr id="4" name="TextBox 3"/>
-          <p:cNvSpPr txBox="1"/>
-          <p:nvPr/>
-        </p:nvSpPr>
-        <p:spPr>
-          <a:xfrm>
-            <a:off x="594360" y="5532120"/>
-            <a:ext cx="10972800" cy="822960"/>
-          </a:xfrm>
-          <a:prstGeom prst="rect">
-            <a:avLst/>
-          </a:prstGeom>
-          <a:noFill/>
-        </p:spPr>
-        <p:txBody>
-          <a:bodyPr wrap="square">
-            <a:spAutoFit/>
-          </a:bodyPr>
-          <a:lstStyle/>
-          <a:p>
-            <a:r>
-              <a:rPr b="1" sz="1300">
-                <a:solidFill>
-                  <a:srgbClr val="1B3A5C"/>
-                </a:solidFill>
-              </a:rPr>
-              <a:t>In plain terms:  </a:t>
-            </a:r>
-            <a:r>
-              <a:rPr sz="1300"/>
-              <a:t>count the diggers once; divide by the correction factor for the whole day; multiply by catch-per-digger for harvest. On uncounted days both are borrowed. The red step never averages away.</a:t>
-            </a:r>
-          </a:p>
-        </p:txBody>
-      </p:sp>
-    </p:spTree>
-  </p:cSld>
-  <p:clrMapOvr>
-    <a:masterClrMapping/>
-  </p:clrMapOvr>
-</p:sld>
-</file>
-
-<file path=ppt/slides/slide23.xml><?xml version="1.0" encoding="utf-8"?>
-<p:sld xmlns:a="http://schemas.openxmlformats.org/drawingml/2006/main" xmlns:p="http://schemas.openxmlformats.org/presentationml/2006/main" xmlns:r="http://schemas.openxmlformats.org/officeDocument/2006/relationships">
-  <p:cSld>
-    <p:spTree>
-      <p:nvGrpSpPr>
-        <p:cNvPr id="1" name=""/>
-        <p:cNvGrpSpPr/>
-        <p:nvPr/>
-      </p:nvGrpSpPr>
-      <p:grpSpPr/>
-      <p:sp>
-        <p:nvSpPr>
-          <p:cNvPr id="2" name="Title 1"/>
-          <p:cNvSpPr>
-            <a:spLocks noGrp="1"/>
-          </p:cNvSpPr>
-          <p:nvPr>
-            <p:ph type="title"/>
-          </p:nvPr>
-        </p:nvSpPr>
-        <p:spPr/>
-        <p:txBody>
-          <a:bodyPr/>
-          <a:lstStyle/>
-          <a:p>
-            <a:r>
-              <a:t>The estimate in four equations</a:t>
-            </a:r>
-          </a:p>
-        </p:txBody>
-      </p:sp>
-      <p:sp>
-        <p:nvSpPr>
-          <p:cNvPr id="3" name="TextBox 2"/>
-          <p:cNvSpPr txBox="1"/>
-          <p:nvPr/>
-        </p:nvSpPr>
-        <p:spPr>
-          <a:xfrm>
-            <a:off x="640080" y="1371600"/>
-            <a:ext cx="10972800" cy="4206240"/>
-          </a:xfrm>
-          <a:prstGeom prst="rect">
-            <a:avLst/>
-          </a:prstGeom>
-          <a:noFill/>
-        </p:spPr>
-        <p:txBody>
-          <a:bodyPr wrap="square">
-            <a:spAutoFit/>
-          </a:bodyPr>
-          <a:lstStyle/>
-          <a:p>
-            <a:pPr>
-              <a:spcAft>
-                <a:spcPts val="600"/>
-              </a:spcAft>
-            </a:pPr>
-            <a:r>
-              <a:rPr b="1" sz="2000">
-                <a:solidFill>
-                  <a:srgbClr val="1B3A5C"/>
-                </a:solidFill>
-                <a:latin typeface="Consolas"/>
-              </a:rPr>
-              <a:t>CPUE  =  clams / diggers</a:t>
-            </a:r>
-            <a:r>
-              <a:rPr sz="1300">
-                <a:solidFill>
-                  <a:srgbClr val="444444"/>
-                </a:solidFill>
-              </a:rPr>
-              <a:t>   catch per digger, from the creel interviews</a:t>
-            </a:r>
-          </a:p>
-          <a:p>
-            <a:pPr>
-              <a:spcAft>
-                <a:spcPts val="600"/>
-              </a:spcAft>
-            </a:pPr>
-            <a:r>
-              <a:rPr b="1" sz="2000">
-                <a:solidFill>
-                  <a:srgbClr val="1B3A5C"/>
-                </a:solidFill>
-                <a:latin typeface="Consolas"/>
-              </a:rPr>
-              <a:t>E_total  =  E_t (1 - p) / CF</a:t>
-            </a:r>
-            <a:r>
-              <a:rPr sz="1300">
-                <a:solidFill>
-                  <a:srgbClr val="444444"/>
-                </a:solidFill>
-              </a:rPr>
-              <a:t>   expand the count E_t to the whole day; CF ~ 0.5 is the share present at count time</a:t>
-            </a:r>
-          </a:p>
-          <a:p>
-            <a:pPr>
-              <a:spcAft>
-                <a:spcPts val="600"/>
-              </a:spcAft>
-            </a:pPr>
-            <a:r>
-              <a:rPr b="1" sz="2000">
-                <a:solidFill>
-                  <a:srgbClr val="1B3A5C"/>
-                </a:solidFill>
-                <a:latin typeface="Consolas"/>
-              </a:rPr>
-              <a:t>Harvest  =  E_total  x  CPUE</a:t>
-            </a:r>
-            <a:r>
-              <a:rPr sz="1300">
-                <a:solidFill>
-                  <a:srgbClr val="444444"/>
-                </a:solidFill>
-              </a:rPr>
-              <a:t>   effort times catch rate, summed over segments, days, and beaches</a:t>
-            </a:r>
-          </a:p>
-          <a:p>
-            <a:pPr>
-              <a:spcAft>
-                <a:spcPts val="600"/>
-              </a:spcAft>
-            </a:pPr>
-            <a:r>
-              <a:rPr b="1" sz="2000">
-                <a:solidFill>
-                  <a:srgbClr val="1B3A5C"/>
-                </a:solidFill>
-                <a:latin typeface="Consolas"/>
-              </a:rPr>
-              <a:t>X_today  =  X_ref  x  ( Donor_today / Donor_ref )</a:t>
-            </a:r>
-            <a:r>
-              <a:rPr sz="1300">
-                <a:solidFill>
-                  <a:srgbClr val="444444"/>
-                </a:solidFill>
-              </a:rPr>
-              <a:t>   uncounted day: borrow a neighbour's day-over-day change</a:t>
-            </a:r>
-          </a:p>
-        </p:txBody>
-      </p:sp>
-      <p:sp>
-        <p:nvSpPr>
-          <p:cNvPr id="4" name="TextBox 3"/>
-          <p:cNvSpPr txBox="1"/>
-          <p:nvPr/>
-        </p:nvSpPr>
-        <p:spPr>
-          <a:xfrm>
-            <a:off x="594360" y="5760720"/>
-            <a:ext cx="10972800" cy="822960"/>
-          </a:xfrm>
-          <a:prstGeom prst="rect">
-            <a:avLst/>
-          </a:prstGeom>
-          <a:noFill/>
-        </p:spPr>
-        <p:txBody>
-          <a:bodyPr wrap="square">
-            <a:spAutoFit/>
-          </a:bodyPr>
-          <a:lstStyle/>
-          <a:p>
-            <a:r>
-              <a:rPr b="1" sz="1300">
-                <a:solidFill>
-                  <a:srgbClr val="1B3A5C"/>
-                </a:solidFill>
-              </a:rPr>
-              <a:t>In plain terms:  </a:t>
-            </a:r>
-            <a:r>
-              <a:rPr sz="1300"/>
-              <a:t>the whole method is one measured count expanded by a correction factor and a catch rate. When a beach is not counted, the first three lines are replaced by the fourth, and the day is inferred from a neighbour.</a:t>
-            </a:r>
-          </a:p>
-        </p:txBody>
-      </p:sp>
-    </p:spTree>
-  </p:cSld>
-  <p:clrMapOvr>
-    <a:masterClrMapping/>
-  </p:clrMapOvr>
-</p:sld>
-</file>
-
-<file path=ppt/slides/slide24.xml><?xml version="1.0" encoding="utf-8"?>
-<p:sld xmlns:a="http://schemas.openxmlformats.org/drawingml/2006/main" xmlns:p="http://schemas.openxmlformats.org/presentationml/2006/main" xmlns:r="http://schemas.openxmlformats.org/officeDocument/2006/relationships">
-  <p:cSld>
-    <p:spTree>
-      <p:nvGrpSpPr>
-        <p:cNvPr id="1" name=""/>
-        <p:cNvGrpSpPr/>
-        <p:nvPr/>
-      </p:nvGrpSpPr>
-      <p:grpSpPr/>
-      <p:sp>
-        <p:nvSpPr>
-          <p:cNvPr id="2" name="Title 1"/>
-          <p:cNvSpPr>
-            <a:spLocks noGrp="1"/>
-          </p:cNvSpPr>
-          <p:nvPr>
-            <p:ph type="title"/>
-          </p:nvPr>
-        </p:nvSpPr>
-        <p:spPr/>
-        <p:txBody>
-          <a:bodyPr/>
-          <a:lstStyle/>
-          <a:p>
-            <a:r>
-              <a:t>Most southern beach-days are borrowed, not counted</a:t>
-            </a:r>
-          </a:p>
-        </p:txBody>
-      </p:sp>
-      <p:pic>
-        <p:nvPicPr>
-          <p:cNvPr id="3" name="Picture 2" descr="fig18_tide_series_imputation.png"/>
-          <p:cNvPicPr>
-            <a:picLocks noChangeAspect="1"/>
-          </p:cNvPicPr>
-          <p:nvPr/>
-        </p:nvPicPr>
-        <p:blipFill>
-          <a:blip r:embed="rId2"/>
-          <a:stretch>
-            <a:fillRect/>
-          </a:stretch>
-        </p:blipFill>
-        <p:spPr>
-          <a:xfrm>
-            <a:off x="1938250" y="1097280"/>
-            <a:ext cx="8285018" cy="4206240"/>
-          </a:xfrm>
-          <a:prstGeom prst="rect">
-            <a:avLst/>
-          </a:prstGeom>
-        </p:spPr>
-      </p:pic>
-      <p:sp>
-        <p:nvSpPr>
-          <p:cNvPr id="4" name="TextBox 3"/>
-          <p:cNvSpPr txBox="1"/>
-          <p:nvPr/>
-        </p:nvSpPr>
-        <p:spPr>
-          <a:xfrm>
-            <a:off x="594360" y="5532120"/>
-            <a:ext cx="10972800" cy="822960"/>
-          </a:xfrm>
-          <a:prstGeom prst="rect">
-            <a:avLst/>
-          </a:prstGeom>
-          <a:noFill/>
-        </p:spPr>
-        <p:txBody>
-          <a:bodyPr wrap="square">
-            <a:spAutoFit/>
-          </a:bodyPr>
-          <a:lstStyle/>
-          <a:p>
-            <a:r>
-              <a:rPr b="1" sz="1300">
-                <a:solidFill>
-                  <a:srgbClr val="1B3A5C"/>
-                </a:solidFill>
-              </a:rPr>
-              <a:t>In plain terms:  </a:t>
-            </a:r>
-            <a:r>
-              <a:rPr sz="1300"/>
-              <a:t>Copalis and Mocrocks are counted every day they open; the southern beaches often are not, so their effort is borrowed from a counted neighbour. In 2025-26, 57% of Long Beach effort is borrowed from another beach.</a:t>
-            </a:r>
-          </a:p>
-        </p:txBody>
-      </p:sp>
-    </p:spTree>
-  </p:cSld>
-  <p:clrMapOvr>
-    <a:masterClrMapping/>
-  </p:clrMapOvr>
-</p:sld>
-</file>
-
-<file path=ppt/slides/slide25.xml><?xml version="1.0" encoding="utf-8"?>
-<p:sld xmlns:a="http://schemas.openxmlformats.org/drawingml/2006/main" xmlns:p="http://schemas.openxmlformats.org/presentationml/2006/main" xmlns:r="http://schemas.openxmlformats.org/officeDocument/2006/relationships">
-  <p:cSld>
-    <p:spTree>
-      <p:nvGrpSpPr>
-        <p:cNvPr id="1" name=""/>
-        <p:cNvGrpSpPr/>
-        <p:nvPr/>
-      </p:nvGrpSpPr>
-      <p:grpSpPr/>
-      <p:sp>
-        <p:nvSpPr>
-          <p:cNvPr id="2" name="Title 1"/>
-          <p:cNvSpPr>
-            <a:spLocks noGrp="1"/>
-          </p:cNvSpPr>
-          <p:nvPr>
-            <p:ph type="title"/>
-          </p:nvPr>
-        </p:nvSpPr>
-        <p:spPr/>
-        <p:txBody>
-          <a:bodyPr/>
-          <a:lstStyle/>
-          <a:p>
-            <a:r>
-              <a:t>Two donors beat one</a:t>
-            </a:r>
-          </a:p>
-        </p:txBody>
-      </p:sp>
-      <p:pic>
-        <p:nvPicPr>
-          <p:cNvPr id="3" name="Picture 2" descr="fig19_joint_donor.png"/>
-          <p:cNvPicPr>
-            <a:picLocks noChangeAspect="1"/>
-          </p:cNvPicPr>
-          <p:nvPr/>
-        </p:nvPicPr>
-        <p:blipFill>
-          <a:blip r:embed="rId2"/>
-          <a:stretch>
-            <a:fillRect/>
-          </a:stretch>
-        </p:blipFill>
-        <p:spPr>
-          <a:xfrm>
-            <a:off x="1808797" y="1097280"/>
-            <a:ext cx="8543925" cy="4206240"/>
-          </a:xfrm>
-          <a:prstGeom prst="rect">
-            <a:avLst/>
-          </a:prstGeom>
-        </p:spPr>
-      </p:pic>
-      <p:sp>
-        <p:nvSpPr>
-          <p:cNvPr id="4" name="TextBox 3"/>
-          <p:cNvSpPr txBox="1"/>
-          <p:nvPr/>
-        </p:nvSpPr>
-        <p:spPr>
-          <a:xfrm>
-            <a:off x="594360" y="5532120"/>
-            <a:ext cx="10972800" cy="822960"/>
-          </a:xfrm>
-          <a:prstGeom prst="rect">
-            <a:avLst/>
-          </a:prstGeom>
-          <a:noFill/>
-        </p:spPr>
-        <p:txBody>
-          <a:bodyPr wrap="square">
-            <a:spAutoFit/>
-          </a:bodyPr>
-          <a:lstStyle/>
-          <a:p>
-            <a:r>
-              <a:rPr b="1" sz="1300">
-                <a:solidFill>
-                  <a:srgbClr val="1B3A5C"/>
-                </a:solidFill>
-              </a:rPr>
-              <a:t>In plain terms:  </a:t>
-            </a:r>
-            <a:r>
-              <a:rPr sz="1300"/>
-              <a:t>each donor carries its own noise; summing Copalis and Mocrocks before taking the ratio averages it out, cutting the single-day error from about 0.62 to 0.43. The catch: the 2-on / 2-off calendar rarely counts both the same day.</a:t>
+              <a:rPr sz="1400" b="1"/>
+              <a:t>1.  Survey Long Beach first. </a:t>
+            </a:r>
+            <a:r>
+              <a:rPr sz="1400"/>
+              <a:t>Run the whole-beach egress pilot, six approaches and about eight staff. Start with one survey in each tide condition to establish the relationship, then build toward eight to rebuild the table. The correction factor is the largest term and Long Beach's table is the thinnest and oldest.</a:t>
+            </a:r>
+          </a:p>
+          <a:p>
+            <a:r>
+              <a:rPr sz="1400" b="1"/>
+              <a:t>2.  Hold the southern donor at its co-management floor. </a:t>
+            </a:r>
+            <a:r>
+              <a:rPr sz="1400"/>
+              <a:t>Keep one of Copalis or Mocrocks state-counted every dig day, which the 2-on / 2-off calendar already delivers. The Quinault's alternate-day counts cannot substitute for the state.</a:t>
+            </a:r>
+          </a:p>
+          <a:p>
+            <a:r>
+              <a:rPr sz="1400" b="1"/>
+              <a:t>3.  Pair the pilot with the northern donor on a subset of days </a:t>
+            </a:r>
+            <a:r>
+              <a:rPr sz="1400"/>
+              <a:t>to measure the imputation transfer directly and tighten the joint-donor error, rather than leaning on the modeled lag curve.</a:t>
+            </a:r>
+          </a:p>
+          <a:p>
+            <a:r>
+              <a:rPr sz="1400" b="1"/>
+              <a:t>4.  Treat the 45% reallocation as optional, not free. </a:t>
+            </a:r>
+            <a:r>
+              <a:rPr sz="1400"/>
+              <a:t>It buys direct Long Beach precision but degrades the donor with no offset; fund Long Beach from dedicated effort where possible.</a:t>
+            </a:r>
+          </a:p>
+          <a:p>
+            <a:r>
+              <a:rPr sz="1400" b="1"/>
+              <a:t>5.  Accept the Copalis floor: </a:t>
+            </a:r>
+            <a:r>
+              <a:rPr sz="1400"/>
+              <a:t>a harvest CV of 0.10 is infeasible there at any sampling rate, only more surveys would move it.</a:t>
             </a:r>
           </a:p>
         </p:txBody>
@@ -9424,7 +9770,7 @@
 </file>
 
 <file path=ppt/slides/slide26.xml><?xml version="1.0" encoding="utf-8"?>
-<p:sld xmlns:a="http://schemas.openxmlformats.org/drawingml/2006/main" xmlns:p="http://schemas.openxmlformats.org/presentationml/2006/main" xmlns:r="http://schemas.openxmlformats.org/officeDocument/2006/relationships">
+<p:sld xmlns:a="http://schemas.openxmlformats.org/drawingml/2006/main" xmlns:r="http://schemas.openxmlformats.org/officeDocument/2006/relationships" xmlns:p="http://schemas.openxmlformats.org/presentationml/2006/main">
   <p:cSld>
     <p:spTree>
       <p:nvGrpSpPr>
@@ -9432,7 +9778,14 @@
         <p:cNvGrpSpPr/>
         <p:nvPr/>
       </p:nvGrpSpPr>
-      <p:grpSpPr/>
+      <p:grpSpPr>
+        <a:xfrm>
+          <a:off x="0" y="0"/>
+          <a:ext cx="0" cy="0"/>
+          <a:chOff x="0" y="0"/>
+          <a:chExt cx="0" cy="0"/>
+        </a:xfrm>
+      </p:grpSpPr>
       <p:sp>
         <p:nvSpPr>
           <p:cNvPr id="2" name="Title 1"/>
@@ -9440,7 +9793,7 @@
             <a:spLocks noGrp="1"/>
           </p:cNvSpPr>
           <p:nvPr>
-            <p:ph type="title"/>
+            <p:ph type="ctrTitle"/>
           </p:nvPr>
         </p:nvSpPr>
         <p:spPr/>
@@ -9449,273 +9802,7 @@
           <a:lstStyle/>
           <a:p>
             <a:r>
-              <a:t>Only 14% of Long Beach rests on a real count</a:t>
-            </a:r>
-          </a:p>
-        </p:txBody>
-      </p:sp>
-      <p:pic>
-        <p:nvPicPr>
-          <p:cNvPr id="3" name="Picture 2" descr="fig20_longbeach_anatomy.png"/>
-          <p:cNvPicPr>
-            <a:picLocks noChangeAspect="1"/>
-          </p:cNvPicPr>
-          <p:nvPr/>
-        </p:nvPicPr>
-        <p:blipFill>
-          <a:blip r:embed="rId2"/>
-          <a:stretch>
-            <a:fillRect/>
-          </a:stretch>
-        </p:blipFill>
-        <p:spPr>
-          <a:xfrm>
-            <a:off x="2475411" y="1051560"/>
-            <a:ext cx="7210697" cy="4206240"/>
-          </a:xfrm>
-          <a:prstGeom prst="rect">
-            <a:avLst/>
-          </a:prstGeom>
-        </p:spPr>
-      </p:pic>
-      <p:sp>
-        <p:nvSpPr>
-          <p:cNvPr id="4" name="TextBox 3"/>
-          <p:cNvSpPr txBox="1"/>
-          <p:nvPr/>
-        </p:nvSpPr>
-        <p:spPr>
-          <a:xfrm>
-            <a:off x="594360" y="5532120"/>
-            <a:ext cx="10972800" cy="822960"/>
-          </a:xfrm>
-          <a:prstGeom prst="rect">
-            <a:avLst/>
-          </a:prstGeom>
-          <a:noFill/>
-        </p:spPr>
-        <p:txBody>
-          <a:bodyPr wrap="square">
-            <a:spAutoFit/>
-          </a:bodyPr>
-          <a:lstStyle/>
-          <a:p>
-            <a:r>
-              <a:rPr b="1" sz="1300">
-                <a:solidFill>
-                  <a:srgbClr val="1B3A5C"/>
-                </a:solidFill>
-              </a:rPr>
-              <a:t>In plain terms:  </a:t>
-            </a:r>
-            <a:r>
-              <a:rPr sz="1300"/>
-              <a:t>28 miles walked in two halves; only 13.8% of 2025-26 effort rests on a full count. The correction factor, the section split, and the whole-beach total are each assumed, not measured, which is what the pilot fixes.</a:t>
-            </a:r>
-          </a:p>
-        </p:txBody>
-      </p:sp>
-    </p:spTree>
-  </p:cSld>
-  <p:clrMapOvr>
-    <a:masterClrMapping/>
-  </p:clrMapOvr>
-</p:sld>
-</file>
-
-<file path=ppt/slides/slide27.xml><?xml version="1.0" encoding="utf-8"?>
-<p:sld xmlns:a="http://schemas.openxmlformats.org/drawingml/2006/main" xmlns:p="http://schemas.openxmlformats.org/presentationml/2006/main" xmlns:r="http://schemas.openxmlformats.org/officeDocument/2006/relationships">
-  <p:cSld>
-    <p:spTree>
-      <p:nvGrpSpPr>
-        <p:cNvPr id="1" name=""/>
-        <p:cNvGrpSpPr/>
-        <p:nvPr/>
-      </p:nvGrpSpPr>
-      <p:grpSpPr/>
-      <p:sp>
-        <p:nvSpPr>
-          <p:cNvPr id="2" name="Title 1"/>
-          <p:cNvSpPr>
-            <a:spLocks noGrp="1"/>
-          </p:cNvSpPr>
-          <p:nvPr>
-            <p:ph type="title"/>
-          </p:nvPr>
-        </p:nvSpPr>
-        <p:spPr/>
-        <p:txBody>
-          <a:bodyPr/>
-          <a:lstStyle/>
-          <a:p>
-            <a:r>
-              <a:t>Why not just one fall and one spring survey?</a:t>
-            </a:r>
-          </a:p>
-        </p:txBody>
-      </p:sp>
-      <p:pic>
-        <p:nvPicPr>
-          <p:cNvPr id="3" name="Picture 2" descr="fig16_lb_survey_target.png"/>
-          <p:cNvPicPr>
-            <a:picLocks noChangeAspect="1"/>
-          </p:cNvPicPr>
-          <p:nvPr/>
-        </p:nvPicPr>
-        <p:blipFill>
-          <a:blip r:embed="rId2"/>
-          <a:stretch>
-            <a:fillRect/>
-          </a:stretch>
-        </p:blipFill>
-        <p:spPr>
-          <a:xfrm>
-            <a:off x="2475411" y="1051560"/>
-            <a:ext cx="7210697" cy="4206240"/>
-          </a:xfrm>
-          <a:prstGeom prst="rect">
-            <a:avLst/>
-          </a:prstGeom>
-        </p:spPr>
-      </p:pic>
-      <p:sp>
-        <p:nvSpPr>
-          <p:cNvPr id="4" name="TextBox 3"/>
-          <p:cNvSpPr txBox="1"/>
-          <p:nvPr/>
-        </p:nvSpPr>
-        <p:spPr>
-          <a:xfrm>
-            <a:off x="594360" y="5532120"/>
-            <a:ext cx="10972800" cy="822960"/>
-          </a:xfrm>
-          <a:prstGeom prst="rect">
-            <a:avLst/>
-          </a:prstGeom>
-          <a:noFill/>
-        </p:spPr>
-        <p:txBody>
-          <a:bodyPr wrap="square">
-            <a:spAutoFit/>
-          </a:bodyPr>
-          <a:lstStyle/>
-          <a:p>
-            <a:r>
-              <a:rPr b="1" sz="1250">
-                <a:solidFill>
-                  <a:srgbClr val="1B3A5C"/>
-                </a:solidFill>
-              </a:rPr>
-              <a:t>In plain terms:  </a:t>
-            </a:r>
-            <a:r>
-              <a:rPr sz="1250"/>
-              <a:t>one survey per condition pins the shape and is worth doing; but the correction factor swings about 30% per survey, so precision improves only as 1 over root-N. About eight surveys halve today's uncertainty, and a whole-beach survey also retires the section-ratio error.</a:t>
-            </a:r>
-          </a:p>
-        </p:txBody>
-      </p:sp>
-    </p:spTree>
-  </p:cSld>
-  <p:clrMapOvr>
-    <a:masterClrMapping/>
-  </p:clrMapOvr>
-</p:sld>
-</file>
-
-<file path=ppt/slides/slide28.xml><?xml version="1.0" encoding="utf-8"?>
-<p:sld xmlns:a="http://schemas.openxmlformats.org/drawingml/2006/main" xmlns:p="http://schemas.openxmlformats.org/presentationml/2006/main" xmlns:r="http://schemas.openxmlformats.org/officeDocument/2006/relationships">
-  <p:cSld>
-    <p:spTree>
-      <p:nvGrpSpPr>
-        <p:cNvPr id="1" name=""/>
-        <p:cNvGrpSpPr/>
-        <p:nvPr/>
-      </p:nvGrpSpPr>
-      <p:grpSpPr/>
-      <p:sp>
-        <p:nvSpPr>
-          <p:cNvPr id="2" name="Title 1"/>
-          <p:cNvSpPr>
-            <a:spLocks noGrp="1"/>
-          </p:cNvSpPr>
-          <p:nvPr>
-            <p:ph type="title"/>
-          </p:nvPr>
-        </p:nvSpPr>
-        <p:spPr/>
-        <p:txBody>
-          <a:bodyPr/>
-          <a:lstStyle/>
-          <a:p>
-            <a:r>
-              <a:t>Recommendations, in priority order</a:t>
-            </a:r>
-          </a:p>
-        </p:txBody>
-      </p:sp>
-      <p:sp>
-        <p:nvSpPr>
-          <p:cNvPr id="3" name="Content Placeholder 2"/>
-          <p:cNvSpPr>
-            <a:spLocks noGrp="1"/>
-          </p:cNvSpPr>
-          <p:nvPr>
-            <p:ph idx="1"/>
-          </p:nvPr>
-        </p:nvSpPr>
-        <p:spPr/>
-        <p:txBody>
-          <a:bodyPr wrap="square"/>
-          <a:lstStyle/>
-          <a:p>
-            <a:r>
-              <a:rPr b="1" sz="1400"/>
-              <a:t>1.  Survey Long Beach first. </a:t>
-            </a:r>
-            <a:r>
-              <a:rPr sz="1400"/>
-              <a:t>Run the whole-beach egress pilot, six approaches and about eight staff. Start with one survey in each tide condition to establish the relationship, then build toward eight to rebuild the table. The correction factor is the largest term and Long Beach's table is the thinnest and oldest.</a:t>
-            </a:r>
-          </a:p>
-          <a:p>
-            <a:r>
-              <a:rPr b="1" sz="1400"/>
-              <a:t>2.  Hold the southern donor at its co-management floor. </a:t>
-            </a:r>
-            <a:r>
-              <a:rPr sz="1400"/>
-              <a:t>Keep one of Copalis or Mocrocks state-counted every dig day, which the 2-on / 2-off calendar already delivers. The Quinault's alternate-day counts cannot substitute for the state.</a:t>
-            </a:r>
-          </a:p>
-          <a:p>
-            <a:r>
-              <a:rPr b="1" sz="1400"/>
-              <a:t>3.  Pair the pilot with the northern donor on a subset of days </a:t>
-            </a:r>
-            <a:r>
-              <a:rPr sz="1400"/>
-              <a:t>to measure the imputation transfer directly and tighten the joint-donor error, rather than leaning on the modeled lag curve.</a:t>
-            </a:r>
-          </a:p>
-          <a:p>
-            <a:r>
-              <a:rPr b="1" sz="1400"/>
-              <a:t>4.  Treat the 45% reallocation as optional, not free. </a:t>
-            </a:r>
-            <a:r>
-              <a:rPr sz="1400"/>
-              <a:t>It buys direct Long Beach precision but degrades the donor with no offset; fund Long Beach from dedicated effort where possible.</a:t>
-            </a:r>
-          </a:p>
-          <a:p>
-            <a:r>
-              <a:rPr b="1" sz="1400"/>
-              <a:t>5.  Accept the Copalis floor: </a:t>
-            </a:r>
-            <a:r>
-              <a:rPr sz="1400"/>
-              <a:t>a harvest CV of 0.10 is infeasible there at any sampling rate, only more surveys would move it.</a:t>
+              <a:t>Discussion</a:t>
             </a:r>
           </a:p>
         </p:txBody>
@@ -9761,7 +9848,7 @@
           <a:lstStyle/>
           <a:p>
             <a:r>
-              <a:t>Priors: what the estimate rests on</a:t>
+              <a:t>How the estimate works today</a:t>
             </a:r>
           </a:p>
         </p:txBody>
@@ -9807,81 +9894,14 @@
           <a:lstStyle/>
           <a:p>
             <a:r>
-              <a:t>The expansion table is the instrument, and it has moved</a:t>
-            </a:r>
-          </a:p>
-        </p:txBody>
-      </p:sp>
-      <p:sp>
-        <p:nvSpPr>
-          <p:cNvPr id="3" name="Content Placeholder 2"/>
-          <p:cNvSpPr>
-            <a:spLocks noGrp="1"/>
-          </p:cNvSpPr>
-          <p:nvPr>
-            <p:ph sz="half" idx="1"/>
-          </p:nvPr>
-        </p:nvSpPr>
-        <p:spPr/>
-        <p:txBody>
-          <a:bodyPr wrap="square"/>
-          <a:lstStyle/>
-          <a:p>
-            <a:r>
-              <a:rPr sz="1500" b="1"/>
-              <a:t>May 2013 correction: </a:t>
-            </a:r>
-            <a:r>
-              <a:rPr sz="1500"/>
-              <a:t>the old arithmetic underestimated harvest by ~16%; re-estimated day-by-day back to 1997-98.</a:t>
-            </a:r>
-          </a:p>
-          <a:p>
-            <a:r>
-              <a:rPr sz="1500"/>
-              <a:t>The correction factor, the share of a day's effort present at the count, is the load-bearing number.</a:t>
-            </a:r>
-          </a:p>
-          <a:p>
-            <a:r>
-              <a:rPr sz="1500" b="1"/>
-              <a:t>Long Beach's table was reshaped after 2013: </a:t>
-            </a:r>
-            <a:r>
-              <a:rPr sz="1500"/>
-              <a:t>+33% expanded effort for the same count.</a:t>
-            </a:r>
-          </a:p>
-          <a:p>
-            <a:r>
-              <a:rPr sz="1500"/>
-              <a:t>Comparing Long Beach effort across that change compares two different instruments.</a:t>
-            </a:r>
-          </a:p>
-        </p:txBody>
-      </p:sp>
-      <p:sp>
-        <p:nvSpPr>
-          <p:cNvPr id="5" name="Content Placeholder 4"/>
-          <p:cNvSpPr>
-            <a:spLocks noGrp="1"/>
-          </p:cNvSpPr>
-          <p:nvPr>
-            <p:ph sz="half" idx="11"/>
-          </p:nvPr>
-        </p:nvSpPr>
-        <p:spPr/>
-        <p:txBody>
-          <a:bodyPr/>
-          <a:lstStyle/>
-          <a:p>
-            <a:endParaRPr/>
+              <a:t>From a head-count to a season total</a:t>
+            </a:r>
           </a:p>
         </p:txBody>
       </p:sp>
       <p:pic>
         <p:nvPicPr>
-          <p:cNvPr id="6" name="Picture 5" descr="fig09_operational_vs_vintage.png"/>
+          <p:cNvPr id="3" name="Picture 2" descr="fig17_estimation_flow.png"/>
           <p:cNvPicPr>
             <a:picLocks noChangeAspect="1"/>
           </p:cNvPicPr>
@@ -9895,14 +9915,51 @@
         </p:blipFill>
         <p:spPr>
           <a:xfrm>
-            <a:off x="6178610" y="1422412"/>
-            <a:ext cx="5403790" cy="3782653"/>
+            <a:off x="2283460" y="1143000"/>
+            <a:ext cx="7594600" cy="4206240"/>
           </a:xfrm>
           <a:prstGeom prst="rect">
             <a:avLst/>
           </a:prstGeom>
         </p:spPr>
       </p:pic>
+      <p:sp>
+        <p:nvSpPr>
+          <p:cNvPr id="4" name="TextBox 3"/>
+          <p:cNvSpPr txBox="1"/>
+          <p:nvPr/>
+        </p:nvSpPr>
+        <p:spPr>
+          <a:xfrm>
+            <a:off x="594360" y="5532120"/>
+            <a:ext cx="10972800" cy="822960"/>
+          </a:xfrm>
+          <a:prstGeom prst="rect">
+            <a:avLst/>
+          </a:prstGeom>
+          <a:noFill/>
+        </p:spPr>
+        <p:txBody>
+          <a:bodyPr wrap="square">
+            <a:spAutoFit/>
+          </a:bodyPr>
+          <a:lstStyle/>
+          <a:p>
+            <a:r>
+              <a:rPr sz="1300" b="1">
+                <a:solidFill>
+                  <a:srgbClr val="1B3A5C"/>
+                </a:solidFill>
+              </a:rPr>
+              <a:t>In plain terms:  </a:t>
+            </a:r>
+            <a:r>
+              <a:rPr sz="1300"/>
+              <a:t>count the diggers once; divide by the correction factor for the whole day; multiply by catch-per-digger for harvest. On uncounted days both are borrowed. The red step never averages away.</a:t>
+            </a:r>
+          </a:p>
+        </p:txBody>
+      </p:sp>
     </p:spTree>
   </p:cSld>
   <p:clrMapOvr>
@@ -9944,102 +10001,327 @@
           <a:lstStyle/>
           <a:p>
             <a:r>
-              <a:t>The correction factor dominates, and it does not average down</a:t>
-            </a:r>
-          </a:p>
-        </p:txBody>
-      </p:sp>
-      <p:sp>
-        <p:nvSpPr>
-          <p:cNvPr id="3" name="Content Placeholder 2"/>
-          <p:cNvSpPr>
-            <a:spLocks noGrp="1"/>
-          </p:cNvSpPr>
-          <p:nvPr>
-            <p:ph sz="half" idx="1"/>
-          </p:nvPr>
-        </p:nvSpPr>
-        <p:spPr/>
-        <p:txBody>
-          <a:bodyPr wrap="square"/>
-          <a:lstStyle/>
-          <a:p>
-            <a:r>
-              <a:rPr sz="1500" b="1"/>
-              <a:t>71-96% of season effort variance </a:t>
-            </a:r>
-            <a:r>
-              <a:rPr sz="1500"/>
-              <a:t>at every beach is the correction factor.</a:t>
-            </a:r>
-          </a:p>
-          <a:p>
-            <a:r>
-              <a:rPr sz="1500"/>
-              <a:t>It is systematic: one table scales every beach-day, so counting more days cannot shrink it.</a:t>
-            </a:r>
-          </a:p>
-          <a:p>
-            <a:r>
-              <a:rPr sz="1500"/>
-              <a:t>Imputation is large on a single day but cancels within a tide series (lag-1 autocorrelation −0.68).</a:t>
-            </a:r>
-          </a:p>
-          <a:p>
-            <a:r>
-              <a:rPr sz="1500" b="1"/>
-              <a:t>The lever is surveys, not crew days </a:t>
-            </a:r>
-            <a:r>
-              <a:rPr sz="1500"/>
-              <a:t>for the term that dominates effort.</a:t>
-            </a:r>
-          </a:p>
-        </p:txBody>
-      </p:sp>
-      <p:sp>
-        <p:nvSpPr>
-          <p:cNvPr id="5" name="Content Placeholder 4"/>
-          <p:cNvSpPr>
-            <a:spLocks noGrp="1"/>
-          </p:cNvSpPr>
-          <p:nvPr>
-            <p:ph sz="half" idx="11"/>
-          </p:nvPr>
-        </p:nvSpPr>
-        <p:spPr/>
-        <p:txBody>
-          <a:bodyPr/>
-          <a:lstStyle/>
-          <a:p>
-            <a:endParaRPr/>
-          </a:p>
-        </p:txBody>
-      </p:sp>
-      <p:pic>
-        <p:nvPicPr>
-          <p:cNvPr id="6" name="Picture 5" descr="fig10_variance_shares.png"/>
-          <p:cNvPicPr>
-            <a:picLocks noChangeAspect="1"/>
-          </p:cNvPicPr>
+              <a:t>The estimate in four equations</a:t>
+            </a:r>
+          </a:p>
+        </p:txBody>
+      </p:sp>
+      <p:sp>
+        <p:nvSpPr>
+          <p:cNvPr id="3" name="TextBox 2"/>
+          <p:cNvSpPr txBox="1"/>
           <p:nvPr/>
-        </p:nvPicPr>
-        <p:blipFill>
-          <a:blip r:embed="rId3"/>
-          <a:stretch>
-            <a:fillRect/>
-          </a:stretch>
-        </p:blipFill>
+        </p:nvSpPr>
         <p:spPr>
           <a:xfrm>
-            <a:off x="6178610" y="1839978"/>
-            <a:ext cx="5403790" cy="2947521"/>
+            <a:off x="640080" y="1371600"/>
+            <a:ext cx="11247120" cy="1554272"/>
           </a:xfrm>
           <a:prstGeom prst="rect">
             <a:avLst/>
           </a:prstGeom>
+          <a:noFill/>
         </p:spPr>
-      </p:pic>
+        <p:txBody>
+          <a:bodyPr wrap="square">
+            <a:spAutoFit/>
+          </a:bodyPr>
+          <a:lstStyle/>
+          <a:p>
+            <a:pPr>
+              <a:spcAft>
+                <a:spcPts val="600"/>
+              </a:spcAft>
+            </a:pPr>
+            <a:r>
+              <a:rPr sz="2000" b="1" dirty="0" err="1">
+                <a:solidFill>
+                  <a:srgbClr val="1B3A5C"/>
+                </a:solidFill>
+                <a:latin typeface="Consolas"/>
+              </a:rPr>
+              <a:t>CPUE</a:t>
+            </a:r>
+            <a:r>
+              <a:rPr sz="2000" b="1" dirty="0">
+                <a:solidFill>
+                  <a:srgbClr val="1B3A5C"/>
+                </a:solidFill>
+                <a:latin typeface="Consolas"/>
+              </a:rPr>
+              <a:t>  =  clams / diggers</a:t>
+            </a:r>
+            <a:r>
+              <a:rPr sz="1300" dirty="0">
+                <a:solidFill>
+                  <a:srgbClr val="444444"/>
+                </a:solidFill>
+              </a:rPr>
+              <a:t>   catch per digger, from the creel interviews</a:t>
+            </a:r>
+          </a:p>
+          <a:p>
+            <a:pPr>
+              <a:spcAft>
+                <a:spcPts val="600"/>
+              </a:spcAft>
+            </a:pPr>
+            <a:r>
+              <a:rPr sz="2000" b="1" dirty="0" err="1">
+                <a:solidFill>
+                  <a:srgbClr val="1B3A5C"/>
+                </a:solidFill>
+                <a:latin typeface="Consolas"/>
+              </a:rPr>
+              <a:t>E_total</a:t>
+            </a:r>
+            <a:r>
+              <a:rPr sz="2000" b="1" dirty="0">
+                <a:solidFill>
+                  <a:srgbClr val="1B3A5C"/>
+                </a:solidFill>
+                <a:latin typeface="Consolas"/>
+              </a:rPr>
+              <a:t> = </a:t>
+            </a:r>
+            <a:r>
+              <a:rPr sz="2000" b="1" dirty="0" err="1">
+                <a:solidFill>
+                  <a:srgbClr val="1B3A5C"/>
+                </a:solidFill>
+                <a:latin typeface="Consolas"/>
+              </a:rPr>
+              <a:t>E_t</a:t>
+            </a:r>
+            <a:r>
+              <a:rPr sz="2000" b="1" dirty="0">
+                <a:solidFill>
+                  <a:srgbClr val="1B3A5C"/>
+                </a:solidFill>
+                <a:latin typeface="Consolas"/>
+              </a:rPr>
+              <a:t> (1 - p) / CF</a:t>
+            </a:r>
+            <a:r>
+              <a:rPr sz="1300" dirty="0">
+                <a:solidFill>
+                  <a:srgbClr val="444444"/>
+                </a:solidFill>
+              </a:rPr>
+              <a:t>   expand the count </a:t>
+            </a:r>
+            <a:r>
+              <a:rPr sz="1300" dirty="0" err="1">
+                <a:solidFill>
+                  <a:srgbClr val="444444"/>
+                </a:solidFill>
+              </a:rPr>
+              <a:t>E_t</a:t>
+            </a:r>
+            <a:r>
+              <a:rPr sz="1300" dirty="0">
+                <a:solidFill>
+                  <a:srgbClr val="444444"/>
+                </a:solidFill>
+              </a:rPr>
+              <a:t> to the whole day; CF ~ 0.5 is the share present at count time</a:t>
+            </a:r>
+          </a:p>
+          <a:p>
+            <a:pPr>
+              <a:spcAft>
+                <a:spcPts val="600"/>
+              </a:spcAft>
+            </a:pPr>
+            <a:r>
+              <a:rPr sz="2000" b="1" dirty="0">
+                <a:solidFill>
+                  <a:srgbClr val="1B3A5C"/>
+                </a:solidFill>
+                <a:latin typeface="Consolas"/>
+              </a:rPr>
+              <a:t>Harvest = </a:t>
+            </a:r>
+            <a:r>
+              <a:rPr sz="2000" b="1" dirty="0" err="1">
+                <a:solidFill>
+                  <a:srgbClr val="1B3A5C"/>
+                </a:solidFill>
+                <a:latin typeface="Consolas"/>
+              </a:rPr>
+              <a:t>E_total</a:t>
+            </a:r>
+            <a:r>
+              <a:rPr sz="2000" b="1" dirty="0">
+                <a:solidFill>
+                  <a:srgbClr val="1B3A5C"/>
+                </a:solidFill>
+                <a:latin typeface="Consolas"/>
+              </a:rPr>
+              <a:t> x </a:t>
+            </a:r>
+            <a:r>
+              <a:rPr sz="2000" b="1" dirty="0" err="1">
+                <a:solidFill>
+                  <a:srgbClr val="1B3A5C"/>
+                </a:solidFill>
+                <a:latin typeface="Consolas"/>
+              </a:rPr>
+              <a:t>CPUE</a:t>
+            </a:r>
+            <a:r>
+              <a:rPr sz="1300" dirty="0">
+                <a:solidFill>
+                  <a:srgbClr val="444444"/>
+                </a:solidFill>
+              </a:rPr>
+              <a:t>   effort times catch rate, summed over segments, days, and beaches</a:t>
+            </a:r>
+          </a:p>
+          <a:p>
+            <a:pPr>
+              <a:spcAft>
+                <a:spcPts val="600"/>
+              </a:spcAft>
+            </a:pPr>
+            <a:r>
+              <a:rPr sz="2000" b="1" dirty="0" err="1">
+                <a:solidFill>
+                  <a:srgbClr val="1B3A5C"/>
+                </a:solidFill>
+                <a:latin typeface="Consolas"/>
+              </a:rPr>
+              <a:t>X_today</a:t>
+            </a:r>
+            <a:r>
+              <a:rPr sz="2000" b="1" dirty="0">
+                <a:solidFill>
+                  <a:srgbClr val="1B3A5C"/>
+                </a:solidFill>
+                <a:latin typeface="Consolas"/>
+              </a:rPr>
+              <a:t> </a:t>
+            </a:r>
+            <a:r>
+              <a:rPr lang="en-US" sz="2000" b="1" dirty="0">
+                <a:solidFill>
+                  <a:srgbClr val="1B3A5C"/>
+                </a:solidFill>
+                <a:latin typeface="Consolas"/>
+              </a:rPr>
+              <a:t>=</a:t>
+            </a:r>
+            <a:r>
+              <a:rPr sz="2000" b="1" dirty="0">
+                <a:solidFill>
+                  <a:srgbClr val="1B3A5C"/>
+                </a:solidFill>
+                <a:latin typeface="Consolas"/>
+              </a:rPr>
+              <a:t> </a:t>
+            </a:r>
+            <a:r>
+              <a:rPr sz="2000" b="1" dirty="0" err="1">
+                <a:solidFill>
+                  <a:srgbClr val="1B3A5C"/>
+                </a:solidFill>
+                <a:latin typeface="Consolas"/>
+              </a:rPr>
+              <a:t>X_ref</a:t>
+            </a:r>
+            <a:r>
+              <a:rPr sz="2000" b="1" dirty="0">
+                <a:solidFill>
+                  <a:srgbClr val="1B3A5C"/>
+                </a:solidFill>
+                <a:latin typeface="Consolas"/>
+              </a:rPr>
+              <a:t> x ( </a:t>
+            </a:r>
+            <a:r>
+              <a:rPr sz="2000" b="1" dirty="0" err="1">
+                <a:solidFill>
+                  <a:srgbClr val="1B3A5C"/>
+                </a:solidFill>
+                <a:latin typeface="Consolas"/>
+              </a:rPr>
+              <a:t>Donor_today</a:t>
+            </a:r>
+            <a:r>
+              <a:rPr sz="2000" b="1" dirty="0">
+                <a:solidFill>
+                  <a:srgbClr val="1B3A5C"/>
+                </a:solidFill>
+                <a:latin typeface="Consolas"/>
+              </a:rPr>
+              <a:t> / </a:t>
+            </a:r>
+            <a:r>
+              <a:rPr sz="2000" b="1" dirty="0" err="1">
+                <a:solidFill>
+                  <a:srgbClr val="1B3A5C"/>
+                </a:solidFill>
+                <a:latin typeface="Consolas"/>
+              </a:rPr>
+              <a:t>Donor_ref</a:t>
+            </a:r>
+            <a:r>
+              <a:rPr sz="2000" b="1" dirty="0">
+                <a:solidFill>
+                  <a:srgbClr val="1B3A5C"/>
+                </a:solidFill>
+                <a:latin typeface="Consolas"/>
+              </a:rPr>
+              <a:t> )</a:t>
+            </a:r>
+            <a:r>
+              <a:rPr sz="1300" dirty="0">
+                <a:solidFill>
+                  <a:srgbClr val="444444"/>
+                </a:solidFill>
+              </a:rPr>
+              <a:t>   uncounted day: borrow a neighbor's day-over-day change</a:t>
+            </a:r>
+          </a:p>
+        </p:txBody>
+      </p:sp>
+      <p:sp>
+        <p:nvSpPr>
+          <p:cNvPr id="4" name="TextBox 3"/>
+          <p:cNvSpPr txBox="1"/>
+          <p:nvPr/>
+        </p:nvSpPr>
+        <p:spPr>
+          <a:xfrm>
+            <a:off x="640080" y="3520649"/>
+            <a:ext cx="10972800" cy="492443"/>
+          </a:xfrm>
+          <a:prstGeom prst="rect">
+            <a:avLst/>
+          </a:prstGeom>
+          <a:noFill/>
+        </p:spPr>
+        <p:txBody>
+          <a:bodyPr wrap="square">
+            <a:spAutoFit/>
+          </a:bodyPr>
+          <a:lstStyle/>
+          <a:p>
+            <a:r>
+              <a:rPr sz="1300" b="1" dirty="0">
+                <a:solidFill>
+                  <a:srgbClr val="1B3A5C"/>
+                </a:solidFill>
+              </a:rPr>
+              <a:t>In plain terms:  </a:t>
+            </a:r>
+            <a:r>
+              <a:rPr sz="1300" dirty="0"/>
+              <a:t>the whole method is one measured count expanded by a correction factor and a catch rate. When a beach is not counted, the first three lines are replaced by the fourth, and the day is inferred from a neighbor.</a:t>
+            </a:r>
+          </a:p>
+        </p:txBody>
+      </p:sp>
     </p:spTree>
   </p:cSld>
   <p:clrMapOvr>
@@ -10081,75 +10363,14 @@
           <a:lstStyle/>
           <a:p>
             <a:r>
-              <a:t>For harvest, borrowed catch rate is the largest term up north</a:t>
-            </a:r>
-          </a:p>
-        </p:txBody>
-      </p:sp>
-      <p:sp>
-        <p:nvSpPr>
-          <p:cNvPr id="3" name="Content Placeholder 2"/>
-          <p:cNvSpPr>
-            <a:spLocks noGrp="1"/>
-          </p:cNvSpPr>
-          <p:nvPr>
-            <p:ph sz="half" idx="1"/>
-          </p:nvPr>
-        </p:nvSpPr>
-        <p:spPr/>
-        <p:txBody>
-          <a:bodyPr wrap="square"/>
-          <a:lstStyle/>
-          <a:p>
-            <a:r>
-              <a:rPr sz="1500" b="1"/>
-              <a:t>CPUE transfer (borrowed catch rate on uncounted days): </a:t>
-            </a:r>
-            <a:r>
-              <a:rPr sz="1500"/>
-              <a:t>39% of harvest variance at Long Beach, 56% at Twin Harbors.</a:t>
-            </a:r>
-          </a:p>
-          <a:p>
-            <a:r>
-              <a:rPr sz="1500"/>
-              <a:t>Single-day imputation error is large (sd 0.54 in log) but roughly unbiased and cancels when summed.</a:t>
-            </a:r>
-          </a:p>
-          <a:p>
-            <a:r>
-              <a:rPr sz="1500" b="1"/>
-              <a:t>Best donor for the two northern beaches: </a:t>
-            </a:r>
-            <a:r>
-              <a:rPr sz="1500"/>
-              <a:t>Copalis and Mocrocks jointly (sd 0.43 / 0.37).</a:t>
-            </a:r>
-          </a:p>
-        </p:txBody>
-      </p:sp>
-      <p:sp>
-        <p:nvSpPr>
-          <p:cNvPr id="5" name="Content Placeholder 4"/>
-          <p:cNvSpPr>
-            <a:spLocks noGrp="1"/>
-          </p:cNvSpPr>
-          <p:nvPr>
-            <p:ph sz="half" idx="11"/>
-          </p:nvPr>
-        </p:nvSpPr>
-        <p:spPr/>
-        <p:txBody>
-          <a:bodyPr/>
-          <a:lstStyle/>
-          <a:p>
-            <a:endParaRPr/>
+              <a:t>Most southern beach-days are borrowed, not counted</a:t>
+            </a:r>
           </a:p>
         </p:txBody>
       </p:sp>
       <p:pic>
         <p:nvPicPr>
-          <p:cNvPr id="6" name="Picture 5" descr="fig11_imputation_error.png"/>
+          <p:cNvPr id="3" name="Picture 2" descr="fig18_tide_series_imputation.png"/>
           <p:cNvPicPr>
             <a:picLocks noChangeAspect="1"/>
           </p:cNvPicPr>
@@ -10163,14 +10384,51 @@
         </p:blipFill>
         <p:spPr>
           <a:xfrm>
-            <a:off x="6178610" y="2085605"/>
-            <a:ext cx="5403790" cy="2456268"/>
+            <a:off x="1938250" y="1097280"/>
+            <a:ext cx="8285018" cy="4206240"/>
           </a:xfrm>
           <a:prstGeom prst="rect">
             <a:avLst/>
           </a:prstGeom>
         </p:spPr>
       </p:pic>
+      <p:sp>
+        <p:nvSpPr>
+          <p:cNvPr id="4" name="TextBox 3"/>
+          <p:cNvSpPr txBox="1"/>
+          <p:nvPr/>
+        </p:nvSpPr>
+        <p:spPr>
+          <a:xfrm>
+            <a:off x="594360" y="5532120"/>
+            <a:ext cx="10972800" cy="822960"/>
+          </a:xfrm>
+          <a:prstGeom prst="rect">
+            <a:avLst/>
+          </a:prstGeom>
+          <a:noFill/>
+        </p:spPr>
+        <p:txBody>
+          <a:bodyPr wrap="square">
+            <a:spAutoFit/>
+          </a:bodyPr>
+          <a:lstStyle/>
+          <a:p>
+            <a:r>
+              <a:rPr sz="1300" b="1">
+                <a:solidFill>
+                  <a:srgbClr val="1B3A5C"/>
+                </a:solidFill>
+              </a:rPr>
+              <a:t>In plain terms:  </a:t>
+            </a:r>
+            <a:r>
+              <a:rPr sz="1300"/>
+              <a:t>Copalis and Mocrocks are counted every day they open; the southern beaches often are not, so their effort is borrowed from a counted neighbour. In 2025-26, 57% of Long Beach effort is borrowed from another beach.</a:t>
+            </a:r>
+          </a:p>
+        </p:txBody>
+      </p:sp>
     </p:spTree>
   </p:cSld>
   <p:clrMapOvr>
@@ -10203,7 +10461,7 @@
             <a:spLocks noGrp="1"/>
           </p:cNvSpPr>
           <p:nvPr>
-            <p:ph type="ctrTitle"/>
+            <p:ph type="title"/>
           </p:nvPr>
         </p:nvSpPr>
         <p:spPr/>
@@ -10212,7 +10470,68 @@
           <a:lstStyle/>
           <a:p>
             <a:r>
-              <a:t>How many days, and which ones</a:t>
+              <a:t>Two donors beat one</a:t>
+            </a:r>
+          </a:p>
+        </p:txBody>
+      </p:sp>
+      <p:pic>
+        <p:nvPicPr>
+          <p:cNvPr id="3" name="Picture 2" descr="fig19_joint_donor.png"/>
+          <p:cNvPicPr>
+            <a:picLocks noChangeAspect="1"/>
+          </p:cNvPicPr>
+          <p:nvPr/>
+        </p:nvPicPr>
+        <p:blipFill>
+          <a:blip r:embed="rId3"/>
+          <a:stretch>
+            <a:fillRect/>
+          </a:stretch>
+        </p:blipFill>
+        <p:spPr>
+          <a:xfrm>
+            <a:off x="1808797" y="1097280"/>
+            <a:ext cx="8543925" cy="4206240"/>
+          </a:xfrm>
+          <a:prstGeom prst="rect">
+            <a:avLst/>
+          </a:prstGeom>
+        </p:spPr>
+      </p:pic>
+      <p:sp>
+        <p:nvSpPr>
+          <p:cNvPr id="4" name="TextBox 3"/>
+          <p:cNvSpPr txBox="1"/>
+          <p:nvPr/>
+        </p:nvSpPr>
+        <p:spPr>
+          <a:xfrm>
+            <a:off x="594360" y="5532120"/>
+            <a:ext cx="10972800" cy="822960"/>
+          </a:xfrm>
+          <a:prstGeom prst="rect">
+            <a:avLst/>
+          </a:prstGeom>
+          <a:noFill/>
+        </p:spPr>
+        <p:txBody>
+          <a:bodyPr wrap="square">
+            <a:spAutoFit/>
+          </a:bodyPr>
+          <a:lstStyle/>
+          <a:p>
+            <a:r>
+              <a:rPr sz="1300" b="1">
+                <a:solidFill>
+                  <a:srgbClr val="1B3A5C"/>
+                </a:solidFill>
+              </a:rPr>
+              <a:t>In plain terms:  </a:t>
+            </a:r>
+            <a:r>
+              <a:rPr sz="1300"/>
+              <a:t>each donor carries its own noise; summing Copalis and Mocrocks before taking the ratio averages it out, cutting the single-day error from about 0.62 to 0.43. The catch: the 2-on / 2-off calendar rarely counts both the same day.</a:t>
             </a:r>
           </a:p>
         </p:txBody>
@@ -10258,77 +10577,14 @@
           <a:lstStyle/>
           <a:p>
             <a:r>
-              <a:t>Count about 45% of a beach's open days, with a floor of two</a:t>
-            </a:r>
-          </a:p>
-        </p:txBody>
-      </p:sp>
-      <p:sp>
-        <p:nvSpPr>
-          <p:cNvPr id="3" name="Content Placeholder 2"/>
-          <p:cNvSpPr>
-            <a:spLocks noGrp="1"/>
-          </p:cNvSpPr>
-          <p:nvPr>
-            <p:ph sz="half" idx="1"/>
-          </p:nvPr>
-        </p:nvSpPr>
-        <p:spPr/>
-        <p:txBody>
-          <a:bodyPr wrap="square"/>
-          <a:lstStyle/>
-          <a:p>
-            <a:r>
-              <a:rPr sz="1500" b="1"/>
-              <a:t>Count 2 of a 4- or 5-day series; </a:t>
-            </a:r>
-            <a:r>
-              <a:rPr sz="1500"/>
-              <a:t>3 of a 6- or 7-day series.</a:t>
-            </a:r>
-          </a:p>
-          <a:p>
-            <a:r>
-              <a:rPr sz="1500"/>
-              <a:t>Counting one day per series never meets CV 0.20 (0.21-0.31 at m = 1).</a:t>
-            </a:r>
-          </a:p>
-          <a:p>
-            <a:r>
-              <a:rPr sz="1500" b="1"/>
-              <a:t>Read it as 45% of open days, floor of two.</a:t>
-            </a:r>
-          </a:p>
-          <a:p>
-            <a:r>
-              <a:rPr sz="1500"/>
-              <a:t>Exception: Copalis needs all three of a three-day series, its floor, not sampling, binds.</a:t>
-            </a:r>
-          </a:p>
-        </p:txBody>
-      </p:sp>
-      <p:sp>
-        <p:nvSpPr>
-          <p:cNvPr id="5" name="Content Placeholder 4"/>
-          <p:cNvSpPr>
-            <a:spLocks noGrp="1"/>
-          </p:cNvSpPr>
-          <p:nvPr>
-            <p:ph sz="half" idx="11"/>
-          </p:nvPr>
-        </p:nvSpPr>
-        <p:spPr/>
-        <p:txBody>
-          <a:bodyPr/>
-          <a:lstStyle/>
-          <a:p>
-            <a:endParaRPr/>
+              <a:t>Only 14% of Long Beach rests on a real count</a:t>
+            </a:r>
           </a:p>
         </p:txBody>
       </p:sp>
       <p:pic>
         <p:nvPicPr>
-          <p:cNvPr id="6" name="Picture 5" descr="fig13_tide_series_cv.png"/>
+          <p:cNvPr id="3" name="Picture 2" descr="fig20_longbeach_anatomy.png"/>
           <p:cNvPicPr>
             <a:picLocks noChangeAspect="1"/>
           </p:cNvPicPr>
@@ -10342,14 +10598,51 @@
         </p:blipFill>
         <p:spPr>
           <a:xfrm>
-            <a:off x="6178610" y="1692602"/>
-            <a:ext cx="5403790" cy="3242274"/>
+            <a:off x="2475411" y="1051560"/>
+            <a:ext cx="7210697" cy="4206240"/>
           </a:xfrm>
           <a:prstGeom prst="rect">
             <a:avLst/>
           </a:prstGeom>
         </p:spPr>
       </p:pic>
+      <p:sp>
+        <p:nvSpPr>
+          <p:cNvPr id="4" name="TextBox 3"/>
+          <p:cNvSpPr txBox="1"/>
+          <p:nvPr/>
+        </p:nvSpPr>
+        <p:spPr>
+          <a:xfrm>
+            <a:off x="594360" y="5532120"/>
+            <a:ext cx="10972800" cy="822960"/>
+          </a:xfrm>
+          <a:prstGeom prst="rect">
+            <a:avLst/>
+          </a:prstGeom>
+          <a:noFill/>
+        </p:spPr>
+        <p:txBody>
+          <a:bodyPr wrap="square">
+            <a:spAutoFit/>
+          </a:bodyPr>
+          <a:lstStyle/>
+          <a:p>
+            <a:r>
+              <a:rPr sz="1300" b="1">
+                <a:solidFill>
+                  <a:srgbClr val="1B3A5C"/>
+                </a:solidFill>
+              </a:rPr>
+              <a:t>In plain terms:  </a:t>
+            </a:r>
+            <a:r>
+              <a:rPr sz="1300"/>
+              <a:t>28 miles walked in two halves; only 13.8% of 2025-26 effort rests on a full count. The correction factor, the section split, and the whole-beach total are each assumed, not measured, which is what the pilot fixes.</a:t>
+            </a:r>
+          </a:p>
+        </p:txBody>
+      </p:sp>
     </p:spTree>
   </p:cSld>
   <p:clrMapOvr>
@@ -10382,7 +10675,7 @@
             <a:spLocks noGrp="1"/>
           </p:cNvSpPr>
           <p:nvPr>
-            <p:ph type="title"/>
+            <p:ph type="ctrTitle"/>
           </p:nvPr>
         </p:nvSpPr>
         <p:spPr/>
@@ -10391,61 +10684,7 @@
           <a:lstStyle/>
           <a:p>
             <a:r>
-              <a:t>Which days to count: the largest-effort days</a:t>
-            </a:r>
-          </a:p>
-        </p:txBody>
-      </p:sp>
-      <p:sp>
-        <p:nvSpPr>
-          <p:cNvPr id="3" name="Content Placeholder 2"/>
-          <p:cNvSpPr>
-            <a:spLocks noGrp="1"/>
-          </p:cNvSpPr>
-          <p:nvPr>
-            <p:ph idx="1"/>
-          </p:nvPr>
-        </p:nvSpPr>
-        <p:spPr/>
-        <p:txBody>
-          <a:bodyPr wrap="square">
-            <a:normAutofit/>
-          </a:bodyPr>
-          <a:lstStyle/>
-          <a:p>
-            <a:r>
-              <a:rPr sz="2800" b="1" dirty="0"/>
-              <a:t>Selecting the largest-effort days beats an even spread by 4-11 CV points </a:t>
-            </a:r>
-            <a:r>
-              <a:rPr sz="2800" dirty="0"/>
-              <a:t>at every series length tested.</a:t>
-            </a:r>
-          </a:p>
-          <a:p>
-            <a:r>
-              <a:rPr sz="2800" b="1" dirty="0"/>
-              <a:t>Small bias penalty (1-6%), </a:t>
-            </a:r>
-            <a:r>
-              <a:rPr sz="2800" dirty="0"/>
-              <a:t>no worse than the alternatives.</a:t>
-            </a:r>
-          </a:p>
-          <a:p>
-            <a:r>
-              <a:rPr sz="2800" dirty="0"/>
-              <a:t>The program already does this implicitly, staffing the opening weekend and the biggest tides.</a:t>
-            </a:r>
-          </a:p>
-          <a:p>
-            <a:r>
-              <a:rPr sz="2800" b="1" dirty="0"/>
-              <a:t>It is correct. </a:t>
-            </a:r>
-            <a:r>
-              <a:rPr sz="2800" dirty="0"/>
-              <a:t>Which days will be largest is well predicted by the schedule, tide height, and day of week.</a:t>
+              <a:t>Priors: what the estimate rests on</a:t>
             </a:r>
           </a:p>
         </p:txBody>
@@ -11404,15 +11643,6 @@
 </file>
 
 <file path=customXml/item1.xml><?xml version="1.0" encoding="utf-8"?>
-<?mso-contentType ?>
-<FormTemplates xmlns="http://schemas.microsoft.com/sharepoint/v3/contenttype/forms">
-  <Display>DocumentLibraryForm</Display>
-  <Edit>DocumentLibraryForm</Edit>
-  <New>DocumentLibraryForm</New>
-</FormTemplates>
-</file>
-
-<file path=customXml/item2.xml><?xml version="1.0" encoding="utf-8"?>
 <p:properties xmlns:p="http://schemas.microsoft.com/office/2006/metadata/properties" xmlns:xsi="http://www.w3.org/2001/XMLSchema-instance" xmlns:pc="http://schemas.microsoft.com/office/infopath/2007/PartnerControls">
   <documentManagement>
     <_ip_UnifiedCompliancePolicyUIAction xmlns="http://schemas.microsoft.com/sharepoint/v3" xsi:nil="true"/>
@@ -11424,6 +11654,15 @@
     <NameinDAM xmlns="c55fcec3-bb2d-4ee6-a56c-bdfd532525fc" xsi:nil="true"/>
   </documentManagement>
 </p:properties>
+</file>
+
+<file path=customXml/item2.xml><?xml version="1.0" encoding="utf-8"?>
+<?mso-contentType ?>
+<FormTemplates xmlns="http://schemas.microsoft.com/sharepoint/v3/contenttype/forms">
+  <Display>DocumentLibraryForm</Display>
+  <Edit>DocumentLibraryForm</Edit>
+  <New>DocumentLibraryForm</New>
+</FormTemplates>
 </file>
 
 <file path=customXml/item3.xml><?xml version="1.0" encoding="utf-8"?>
@@ -11687,14 +11926,6 @@
 </file>
 
 <file path=customXml/itemProps1.xml><?xml version="1.0" encoding="utf-8"?>
-<ds:datastoreItem xmlns:ds="http://schemas.openxmlformats.org/officeDocument/2006/customXml" ds:itemID="{01EA9719-73E1-4AAC-90C2-9E9ED399E0F4}">
-  <ds:schemaRefs>
-    <ds:schemaRef ds:uri="http://schemas.microsoft.com/sharepoint/v3/contenttype/forms"/>
-  </ds:schemaRefs>
-</ds:datastoreItem>
-</file>
-
-<file path=customXml/itemProps2.xml><?xml version="1.0" encoding="utf-8"?>
 <ds:datastoreItem xmlns:ds="http://schemas.openxmlformats.org/officeDocument/2006/customXml" ds:itemID="{B432BB05-EAC0-435E-80C7-C3FC0DCFDF5B}">
   <ds:schemaRefs>
     <ds:schemaRef ds:uri="http://www.w3.org/XML/1998/namespace"/>
@@ -11708,6 +11939,14 @@
     <ds:schemaRef ds:uri="http://schemas.microsoft.com/office/2006/metadata/properties"/>
     <ds:schemaRef ds:uri="http://purl.org/dc/dcmitype/"/>
     <ds:schemaRef ds:uri="http://purl.org/dc/terms/"/>
+  </ds:schemaRefs>
+</ds:datastoreItem>
+</file>
+
+<file path=customXml/itemProps2.xml><?xml version="1.0" encoding="utf-8"?>
+<ds:datastoreItem xmlns:ds="http://schemas.openxmlformats.org/officeDocument/2006/customXml" ds:itemID="{01EA9719-73E1-4AAC-90C2-9E9ED399E0F4}">
+  <ds:schemaRefs>
+    <ds:schemaRef ds:uri="http://schemas.microsoft.com/sharepoint/v3/contenttype/forms"/>
   </ds:schemaRefs>
 </ds:datastoreItem>
 </file>

--- a/07_presentations/razor-clam-sampling-design.pptx
+++ b/07_presentations/razor-clam-sampling-design.pptx
@@ -4,39 +4,38 @@
   <p:sldMasterIdLst>
     <p:sldMasterId id="2147483648" r:id="rId4"/>
   </p:sldMasterIdLst>
-  <p:notesMasterIdLst>
-    <p:notesMasterId r:id="rId31"/>
-  </p:notesMasterIdLst>
   <p:handoutMasterIdLst>
-    <p:handoutMasterId r:id="rId32"/>
+    <p:handoutMasterId r:id="rId19"/>
   </p:handoutMasterIdLst>
   <p:sldIdLst>
-    <p:sldId id="256" r:id="rId5"/>
-    <p:sldId id="257" r:id="rId6"/>
-    <p:sldId id="276" r:id="rId7"/>
-    <p:sldId id="277" r:id="rId8"/>
-    <p:sldId id="278" r:id="rId9"/>
-    <p:sldId id="279" r:id="rId10"/>
-    <p:sldId id="280" r:id="rId11"/>
-    <p:sldId id="281" r:id="rId12"/>
-    <p:sldId id="258" r:id="rId13"/>
-    <p:sldId id="259" r:id="rId14"/>
-    <p:sldId id="260" r:id="rId15"/>
-    <p:sldId id="261" r:id="rId16"/>
-    <p:sldId id="262" r:id="rId17"/>
-    <p:sldId id="263" r:id="rId18"/>
-    <p:sldId id="264" r:id="rId19"/>
-    <p:sldId id="265" r:id="rId20"/>
-    <p:sldId id="266" r:id="rId21"/>
-    <p:sldId id="267" r:id="rId22"/>
-    <p:sldId id="268" r:id="rId23"/>
-    <p:sldId id="269" r:id="rId24"/>
-    <p:sldId id="270" r:id="rId25"/>
-    <p:sldId id="271" r:id="rId26"/>
-    <p:sldId id="272" r:id="rId27"/>
-    <p:sldId id="282" r:id="rId28"/>
-    <p:sldId id="283" r:id="rId29"/>
-    <p:sldId id="275" r:id="rId30"/>
+    <p:sldId id="256" r:id="rId11"/>
+    <p:sldId id="257" r:id="rId13"/>
+    <p:sldId id="258" r:id="rId14"/>
+    <p:sldId id="259" r:id="rId15"/>
+    <p:sldId id="260" r:id="rId16"/>
+    <p:sldId id="261" r:id="rId17"/>
+    <p:sldId id="262" r:id="rId18"/>
+    <p:sldId id="263" r:id="rId10"/>
+    <p:sldId id="264" r:id="rId9"/>
+    <p:sldId id="265" r:id="rId8"/>
+    <p:sldId id="266" r:id="rId7"/>
+    <p:sldId id="267" r:id="rId6"/>
+    <p:sldId id="268" r:id="rId5"/>
+    <p:sldId id="269" r:id="rId25"/>
+    <p:sldId id="270" r:id="rId26"/>
+    <p:sldId id="271" r:id="rId27"/>
+    <p:sldId id="272" r:id="rId28"/>
+    <p:sldId id="273" r:id="rId29"/>
+    <p:sldId id="274" r:id="rId30"/>
+    <p:sldId id="275" r:id="rId31"/>
+    <p:sldId id="276" r:id="rId32"/>
+    <p:sldId id="277" r:id="rId33"/>
+    <p:sldId id="278" r:id="rId34"/>
+    <p:sldId id="279" r:id="rId35"/>
+    <p:sldId id="280" r:id="rId36"/>
+    <p:sldId id="281" r:id="rId37"/>
+    <p:sldId id="282" r:id="rId38"/>
+    <p:sldId id="283" r:id="rId39"/>
   </p:sldIdLst>
   <p:sldSz cx="12192000" cy="6858000"/>
   <p:notesSz cx="6858000" cy="9144000"/>
@@ -153,73 +152,6 @@
 </p188:authorLst>
 </file>
 
-<file path=ppt/changesInfos/changesInfo1.xml><?xml version="1.0" encoding="utf-8"?>
-<pc:chgInfo xmlns:a="http://schemas.openxmlformats.org/drawingml/2006/main" xmlns:r="http://schemas.openxmlformats.org/officeDocument/2006/relationships" xmlns:ac="http://schemas.microsoft.com/office/drawing/2013/main/command" xmlns:pc="http://schemas.microsoft.com/office/powerpoint/2013/main/command">
-  <pc:docChgLst>
-    <pc:chgData name="George, Matthew (DFW)" userId="8ba433ef-8e18-4348-89a6-fb3bb26ec9f1" providerId="ADAL" clId="{11FC2F9B-6E6E-4645-819B-98A64F5AF5DA}"/>
-    <pc:docChg chg="undo custSel modSld">
-      <pc:chgData name="George, Matthew (DFW)" userId="8ba433ef-8e18-4348-89a6-fb3bb26ec9f1" providerId="ADAL" clId="{11FC2F9B-6E6E-4645-819B-98A64F5AF5DA}" dt="2026-07-13T21:34:51.407" v="17" actId="313"/>
-      <pc:docMkLst>
-        <pc:docMk/>
-      </pc:docMkLst>
-      <pc:sldChg chg="modSp mod">
-        <pc:chgData name="George, Matthew (DFW)" userId="8ba433ef-8e18-4348-89a6-fb3bb26ec9f1" providerId="ADAL" clId="{11FC2F9B-6E6E-4645-819B-98A64F5AF5DA}" dt="2026-07-13T19:21:27.189" v="0" actId="404"/>
-        <pc:sldMkLst>
-          <pc:docMk/>
-          <pc:sldMk cId="0" sldId="264"/>
-        </pc:sldMkLst>
-        <pc:spChg chg="mod">
-          <ac:chgData name="George, Matthew (DFW)" userId="8ba433ef-8e18-4348-89a6-fb3bb26ec9f1" providerId="ADAL" clId="{11FC2F9B-6E6E-4645-819B-98A64F5AF5DA}" dt="2026-07-13T19:21:27.189" v="0" actId="404"/>
-          <ac:spMkLst>
-            <pc:docMk/>
-            <pc:sldMk cId="0" sldId="264"/>
-            <ac:spMk id="3" creationId="{00000000-0000-0000-0000-000000000000}"/>
-          </ac:spMkLst>
-        </pc:spChg>
-      </pc:sldChg>
-      <pc:sldChg chg="modSp mod">
-        <pc:chgData name="George, Matthew (DFW)" userId="8ba433ef-8e18-4348-89a6-fb3bb26ec9f1" providerId="ADAL" clId="{11FC2F9B-6E6E-4645-819B-98A64F5AF5DA}" dt="2026-07-13T19:26:03.258" v="1" actId="14100"/>
-        <pc:sldMkLst>
-          <pc:docMk/>
-          <pc:sldMk cId="0" sldId="273"/>
-        </pc:sldMkLst>
-        <pc:spChg chg="mod">
-          <ac:chgData name="George, Matthew (DFW)" userId="8ba433ef-8e18-4348-89a6-fb3bb26ec9f1" providerId="ADAL" clId="{11FC2F9B-6E6E-4645-819B-98A64F5AF5DA}" dt="2026-07-13T19:26:03.258" v="1" actId="14100"/>
-          <ac:spMkLst>
-            <pc:docMk/>
-            <pc:sldMk cId="0" sldId="273"/>
-            <ac:spMk id="3" creationId="{00000000-0000-0000-0000-000000000000}"/>
-          </ac:spMkLst>
-        </pc:spChg>
-      </pc:sldChg>
-      <pc:sldChg chg="modSp mod">
-        <pc:chgData name="George, Matthew (DFW)" userId="8ba433ef-8e18-4348-89a6-fb3bb26ec9f1" providerId="ADAL" clId="{11FC2F9B-6E6E-4645-819B-98A64F5AF5DA}" dt="2026-07-13T21:34:51.407" v="17" actId="313"/>
-        <pc:sldMkLst>
-          <pc:docMk/>
-          <pc:sldMk cId="0" sldId="278"/>
-        </pc:sldMkLst>
-        <pc:spChg chg="mod">
-          <ac:chgData name="George, Matthew (DFW)" userId="8ba433ef-8e18-4348-89a6-fb3bb26ec9f1" providerId="ADAL" clId="{11FC2F9B-6E6E-4645-819B-98A64F5AF5DA}" dt="2026-07-13T21:34:51.407" v="17" actId="313"/>
-          <ac:spMkLst>
-            <pc:docMk/>
-            <pc:sldMk cId="0" sldId="278"/>
-            <ac:spMk id="3" creationId="{00000000-0000-0000-0000-000000000000}"/>
-          </ac:spMkLst>
-        </pc:spChg>
-        <pc:spChg chg="mod">
-          <ac:chgData name="George, Matthew (DFW)" userId="8ba433ef-8e18-4348-89a6-fb3bb26ec9f1" providerId="ADAL" clId="{11FC2F9B-6E6E-4645-819B-98A64F5AF5DA}" dt="2026-07-13T21:34:47.946" v="16" actId="313"/>
-          <ac:spMkLst>
-            <pc:docMk/>
-            <pc:sldMk cId="0" sldId="278"/>
-            <ac:spMk id="4" creationId="{00000000-0000-0000-0000-000000000000}"/>
-          </ac:spMkLst>
-        </pc:spChg>
-      </pc:sldChg>
-    </pc:docChg>
-  </pc:docChgLst>
-</pc:chgInfo>
-</file>
-
 <file path=ppt/handoutMasters/handoutMaster1.xml><?xml version="1.0" encoding="utf-8"?>
 <p:handoutMaster xmlns:a="http://schemas.openxmlformats.org/drawingml/2006/main" xmlns:r="http://schemas.openxmlformats.org/officeDocument/2006/relationships" xmlns:p="http://schemas.openxmlformats.org/presentationml/2006/main">
   <p:cSld>
@@ -314,7 +246,7 @@
           <a:p>
             <a:fld id="{DAA1D058-9860-4C37-9D21-AC6EFE975A47}" type="datetimeFigureOut">
               <a:rPr lang="en-US" smtClean="0"/>
-              <a:t>7/13/2026</a:t>
+              <a:t>3/12/2026</a:t>
             </a:fld>
             <a:endParaRPr lang="en-US"/>
           </a:p>
@@ -410,7 +342,7 @@
 </file>
 
 <file path=ppt/notesMasters/notesMaster1.xml><?xml version="1.0" encoding="utf-8"?>
-<p:notesMaster xmlns:a="http://schemas.openxmlformats.org/drawingml/2006/main" xmlns:r="http://schemas.openxmlformats.org/officeDocument/2006/relationships" xmlns:p="http://schemas.openxmlformats.org/presentationml/2006/main">
+<p:notesMaster xmlns:a="http://schemas.openxmlformats.org/drawingml/2006/main" xmlns:p="http://schemas.openxmlformats.org/presentationml/2006/main" xmlns:r="http://schemas.openxmlformats.org/officeDocument/2006/relationships">
   <p:cSld>
     <p:bg>
       <p:bgRef idx="1001">
@@ -431,16 +363,241 @@
           <a:chExt cx="0" cy="0"/>
         </a:xfrm>
       </p:grpSpPr>
+      <p:sp>
+        <p:nvSpPr>
+          <p:cNvPr id="2" name="Header Placeholder 1"/>
+          <p:cNvSpPr>
+            <a:spLocks noGrp="1"/>
+          </p:cNvSpPr>
+          <p:nvPr>
+            <p:ph type="hdr" sz="quarter"/>
+          </p:nvPr>
+        </p:nvSpPr>
+        <p:spPr>
+          <a:xfrm>
+            <a:off x="0" y="0"/>
+            <a:ext cx="2971800" cy="457200"/>
+          </a:xfrm>
+          <a:prstGeom prst="rect">
+            <a:avLst/>
+          </a:prstGeom>
+        </p:spPr>
+        <p:txBody>
+          <a:bodyPr vert="horz" lIns="91440" tIns="45720" rIns="91440" bIns="45720" rtlCol="0"/>
+          <a:lstStyle>
+            <a:lvl1pPr algn="l">
+              <a:defRPr sz="1200"/>
+            </a:lvl1pPr>
+          </a:lstStyle>
+          <a:p>
+            <a:endParaRPr lang="en-US"/>
+          </a:p>
+        </p:txBody>
+      </p:sp>
+      <p:sp>
+        <p:nvSpPr>
+          <p:cNvPr id="3" name="Date Placeholder 2"/>
+          <p:cNvSpPr>
+            <a:spLocks noGrp="1"/>
+          </p:cNvSpPr>
+          <p:nvPr>
+            <p:ph type="dt" idx="1"/>
+          </p:nvPr>
+        </p:nvSpPr>
+        <p:spPr>
+          <a:xfrm>
+            <a:off x="3884613" y="0"/>
+            <a:ext cx="2971800" cy="457200"/>
+          </a:xfrm>
+          <a:prstGeom prst="rect">
+            <a:avLst/>
+          </a:prstGeom>
+        </p:spPr>
+        <p:txBody>
+          <a:bodyPr vert="horz" lIns="91440" tIns="45720" rIns="91440" bIns="45720" rtlCol="0"/>
+          <a:lstStyle>
+            <a:lvl1pPr algn="r">
+              <a:defRPr sz="1200"/>
+            </a:lvl1pPr>
+          </a:lstStyle>
+          <a:p>
+            <a:fld id="{0F89C1C7-3DCD-1040-A9CF-14679D8B5DDD}" type="datetimeFigureOut">
+              <a:rPr lang="en-US" smtClean="0"/>
+              <a:t>10/17/16</a:t>
+            </a:fld>
+            <a:endParaRPr lang="en-US"/>
+          </a:p>
+        </p:txBody>
+      </p:sp>
+      <p:sp>
+        <p:nvSpPr>
+          <p:cNvPr id="4" name="Slide Image Placeholder 3"/>
+          <p:cNvSpPr>
+            <a:spLocks noGrp="1" noRot="1" noChangeAspect="1"/>
+          </p:cNvSpPr>
+          <p:nvPr>
+            <p:ph type="sldImg" idx="2"/>
+          </p:nvPr>
+        </p:nvSpPr>
+        <p:spPr>
+          <a:xfrm>
+            <a:off x="1143000" y="685800"/>
+            <a:ext cx="4572000" cy="3429000"/>
+          </a:xfrm>
+          <a:prstGeom prst="rect">
+            <a:avLst/>
+          </a:prstGeom>
+          <a:noFill/>
+          <a:ln w="12700">
+            <a:solidFill>
+              <a:prstClr val="black"/>
+            </a:solidFill>
+          </a:ln>
+        </p:spPr>
+        <p:txBody>
+          <a:bodyPr vert="horz" lIns="91440" tIns="45720" rIns="91440" bIns="45720" rtlCol="0" anchor="ctr"/>
+          <a:lstStyle/>
+          <a:p>
+            <a:endParaRPr lang="en-US"/>
+          </a:p>
+        </p:txBody>
+      </p:sp>
+      <p:sp>
+        <p:nvSpPr>
+          <p:cNvPr id="5" name="Notes Placeholder 4"/>
+          <p:cNvSpPr>
+            <a:spLocks noGrp="1"/>
+          </p:cNvSpPr>
+          <p:nvPr>
+            <p:ph type="body" sz="quarter" idx="3"/>
+          </p:nvPr>
+        </p:nvSpPr>
+        <p:spPr>
+          <a:xfrm>
+            <a:off x="685800" y="4343400"/>
+            <a:ext cx="5486400" cy="4114800"/>
+          </a:xfrm>
+          <a:prstGeom prst="rect">
+            <a:avLst/>
+          </a:prstGeom>
+        </p:spPr>
+        <p:txBody>
+          <a:bodyPr vert="horz" lIns="91440" tIns="45720" rIns="91440" bIns="45720" rtlCol="0"/>
+          <a:lstStyle/>
+          <a:p>
+            <a:pPr lvl="0"/>
+            <a:r>
+              <a:rPr lang="en-US" smtClean="0"/>
+              <a:t>Click to edit Master text styles</a:t>
+            </a:r>
+          </a:p>
+          <a:p>
+            <a:pPr lvl="1"/>
+            <a:r>
+              <a:rPr lang="en-US" smtClean="0"/>
+              <a:t>Second level</a:t>
+            </a:r>
+          </a:p>
+          <a:p>
+            <a:pPr lvl="2"/>
+            <a:r>
+              <a:rPr lang="en-US" smtClean="0"/>
+              <a:t>Third level</a:t>
+            </a:r>
+          </a:p>
+          <a:p>
+            <a:pPr lvl="3"/>
+            <a:r>
+              <a:rPr lang="en-US" smtClean="0"/>
+              <a:t>Fourth level</a:t>
+            </a:r>
+          </a:p>
+          <a:p>
+            <a:pPr lvl="4"/>
+            <a:r>
+              <a:rPr lang="en-US" smtClean="0"/>
+              <a:t>Fifth level</a:t>
+            </a:r>
+            <a:endParaRPr lang="en-US"/>
+          </a:p>
+        </p:txBody>
+      </p:sp>
+      <p:sp>
+        <p:nvSpPr>
+          <p:cNvPr id="6" name="Footer Placeholder 5"/>
+          <p:cNvSpPr>
+            <a:spLocks noGrp="1"/>
+          </p:cNvSpPr>
+          <p:nvPr>
+            <p:ph type="ftr" sz="quarter" idx="4"/>
+          </p:nvPr>
+        </p:nvSpPr>
+        <p:spPr>
+          <a:xfrm>
+            <a:off x="0" y="8685213"/>
+            <a:ext cx="2971800" cy="457200"/>
+          </a:xfrm>
+          <a:prstGeom prst="rect">
+            <a:avLst/>
+          </a:prstGeom>
+        </p:spPr>
+        <p:txBody>
+          <a:bodyPr vert="horz" lIns="91440" tIns="45720" rIns="91440" bIns="45720" rtlCol="0" anchor="b"/>
+          <a:lstStyle>
+            <a:lvl1pPr algn="l">
+              <a:defRPr sz="1200"/>
+            </a:lvl1pPr>
+          </a:lstStyle>
+          <a:p>
+            <a:endParaRPr lang="en-US"/>
+          </a:p>
+        </p:txBody>
+      </p:sp>
+      <p:sp>
+        <p:nvSpPr>
+          <p:cNvPr id="7" name="Slide Number Placeholder 6"/>
+          <p:cNvSpPr>
+            <a:spLocks noGrp="1"/>
+          </p:cNvSpPr>
+          <p:nvPr>
+            <p:ph type="sldNum" sz="quarter" idx="5"/>
+          </p:nvPr>
+        </p:nvSpPr>
+        <p:spPr>
+          <a:xfrm>
+            <a:off x="3884613" y="8685213"/>
+            <a:ext cx="2971800" cy="457200"/>
+          </a:xfrm>
+          <a:prstGeom prst="rect">
+            <a:avLst/>
+          </a:prstGeom>
+        </p:spPr>
+        <p:txBody>
+          <a:bodyPr vert="horz" lIns="91440" tIns="45720" rIns="91440" bIns="45720" rtlCol="0" anchor="b"/>
+          <a:lstStyle>
+            <a:lvl1pPr algn="r">
+              <a:defRPr sz="1200"/>
+            </a:lvl1pPr>
+          </a:lstStyle>
+          <a:p>
+            <a:fld id="{BB5E49A5-4136-284D-997B-48E1D791AD67}" type="slidenum">
+              <a:rPr lang="en-US" smtClean="0"/>
+              <a:t>‹#›</a:t>
+            </a:fld>
+            <a:endParaRPr lang="en-US"/>
+          </a:p>
+        </p:txBody>
+      </p:sp>
     </p:spTree>
     <p:extLst>
       <p:ext uri="{BB962C8B-B14F-4D97-AF65-F5344CB8AC3E}">
-        <p14:creationId xmlns:p14="http://schemas.microsoft.com/office/powerpoint/2010/main" val="1432836530"/>
+        <p14:creationId xmlns:p14="http://schemas.microsoft.com/office/powerpoint/2010/main" val="2623252185"/>
       </p:ext>
     </p:extLst>
   </p:cSld>
   <p:clrMap bg1="lt1" tx1="dk1" bg2="lt2" tx2="dk2" accent1="accent1" accent2="accent2" accent3="accent3" accent4="accent4" accent5="accent5" accent6="accent6" hlink="hlink" folHlink="folHlink"/>
   <p:notesStyle>
-    <a:lvl1pPr marL="0" algn="l" defTabSz="914400" rtl="0" eaLnBrk="1" latinLnBrk="0" hangingPunct="1">
+    <a:lvl1pPr marL="0" algn="l" defTabSz="457200" rtl="0" eaLnBrk="1" latinLnBrk="0" hangingPunct="1">
       <a:defRPr sz="1200" kern="1200">
         <a:solidFill>
           <a:schemeClr val="tx1"/>
@@ -450,7 +607,7 @@
         <a:cs typeface="+mn-cs"/>
       </a:defRPr>
     </a:lvl1pPr>
-    <a:lvl2pPr marL="457200" algn="l" defTabSz="914400" rtl="0" eaLnBrk="1" latinLnBrk="0" hangingPunct="1">
+    <a:lvl2pPr marL="457200" algn="l" defTabSz="457200" rtl="0" eaLnBrk="1" latinLnBrk="0" hangingPunct="1">
       <a:defRPr sz="1200" kern="1200">
         <a:solidFill>
           <a:schemeClr val="tx1"/>
@@ -460,7 +617,7 @@
         <a:cs typeface="+mn-cs"/>
       </a:defRPr>
     </a:lvl2pPr>
-    <a:lvl3pPr marL="914400" algn="l" defTabSz="914400" rtl="0" eaLnBrk="1" latinLnBrk="0" hangingPunct="1">
+    <a:lvl3pPr marL="914400" algn="l" defTabSz="457200" rtl="0" eaLnBrk="1" latinLnBrk="0" hangingPunct="1">
       <a:defRPr sz="1200" kern="1200">
         <a:solidFill>
           <a:schemeClr val="tx1"/>
@@ -470,7 +627,7 @@
         <a:cs typeface="+mn-cs"/>
       </a:defRPr>
     </a:lvl3pPr>
-    <a:lvl4pPr marL="1371600" algn="l" defTabSz="914400" rtl="0" eaLnBrk="1" latinLnBrk="0" hangingPunct="1">
+    <a:lvl4pPr marL="1371600" algn="l" defTabSz="457200" rtl="0" eaLnBrk="1" latinLnBrk="0" hangingPunct="1">
       <a:defRPr sz="1200" kern="1200">
         <a:solidFill>
           <a:schemeClr val="tx1"/>
@@ -480,7 +637,7 @@
         <a:cs typeface="+mn-cs"/>
       </a:defRPr>
     </a:lvl4pPr>
-    <a:lvl5pPr marL="1828800" algn="l" defTabSz="914400" rtl="0" eaLnBrk="1" latinLnBrk="0" hangingPunct="1">
+    <a:lvl5pPr marL="1828800" algn="l" defTabSz="457200" rtl="0" eaLnBrk="1" latinLnBrk="0" hangingPunct="1">
       <a:defRPr sz="1200" kern="1200">
         <a:solidFill>
           <a:schemeClr val="tx1"/>
@@ -490,7 +647,7 @@
         <a:cs typeface="+mn-cs"/>
       </a:defRPr>
     </a:lvl5pPr>
-    <a:lvl6pPr marL="2286000" algn="l" defTabSz="914400" rtl="0" eaLnBrk="1" latinLnBrk="0" hangingPunct="1">
+    <a:lvl6pPr marL="2286000" algn="l" defTabSz="457200" rtl="0" eaLnBrk="1" latinLnBrk="0" hangingPunct="1">
       <a:defRPr sz="1200" kern="1200">
         <a:solidFill>
           <a:schemeClr val="tx1"/>
@@ -500,7 +657,7 @@
         <a:cs typeface="+mn-cs"/>
       </a:defRPr>
     </a:lvl6pPr>
-    <a:lvl7pPr marL="2743200" algn="l" defTabSz="914400" rtl="0" eaLnBrk="1" latinLnBrk="0" hangingPunct="1">
+    <a:lvl7pPr marL="2743200" algn="l" defTabSz="457200" rtl="0" eaLnBrk="1" latinLnBrk="0" hangingPunct="1">
       <a:defRPr sz="1200" kern="1200">
         <a:solidFill>
           <a:schemeClr val="tx1"/>
@@ -510,7 +667,7 @@
         <a:cs typeface="+mn-cs"/>
       </a:defRPr>
     </a:lvl7pPr>
-    <a:lvl8pPr marL="3200400" algn="l" defTabSz="914400" rtl="0" eaLnBrk="1" latinLnBrk="0" hangingPunct="1">
+    <a:lvl8pPr marL="3200400" algn="l" defTabSz="457200" rtl="0" eaLnBrk="1" latinLnBrk="0" hangingPunct="1">
       <a:defRPr sz="1200" kern="1200">
         <a:solidFill>
           <a:schemeClr val="tx1"/>
@@ -520,7 +677,7 @@
         <a:cs typeface="+mn-cs"/>
       </a:defRPr>
     </a:lvl8pPr>
-    <a:lvl9pPr marL="3657600" algn="l" defTabSz="914400" rtl="0" eaLnBrk="1" latinLnBrk="0" hangingPunct="1">
+    <a:lvl9pPr marL="3657600" algn="l" defTabSz="457200" rtl="0" eaLnBrk="1" latinLnBrk="0" hangingPunct="1">
       <a:defRPr sz="1200" kern="1200">
         <a:solidFill>
           <a:schemeClr val="tx1"/>
@@ -535,7 +692,7 @@
 </file>
 
 <file path=ppt/notesSlides/notesSlide1.xml><?xml version="1.0" encoding="utf-8"?>
-<p:notes xmlns:a="http://schemas.openxmlformats.org/drawingml/2006/main" xmlns:r="http://schemas.openxmlformats.org/officeDocument/2006/relationships" xmlns:p="http://schemas.openxmlformats.org/presentationml/2006/main">
+<p:notes xmlns:a="http://schemas.openxmlformats.org/drawingml/2006/main" xmlns:p="http://schemas.openxmlformats.org/presentationml/2006/main" xmlns:r="http://schemas.openxmlformats.org/officeDocument/2006/relationships">
   <p:cSld>
     <p:spTree>
       <p:nvGrpSpPr>
@@ -555,7 +712,7 @@
         <p:nvSpPr>
           <p:cNvPr id="2" name="Slide Image Placeholder 1"/>
           <p:cNvSpPr>
-            <a:spLocks noGrp="1" noRot="1" noChangeAspect="1"/>
+            <a:spLocks noGrp="1"/>
           </p:cNvSpPr>
           <p:nvPr>
             <p:ph type="sldImg" idx="2"/>
@@ -570,7 +727,7 @@
             <a:spLocks noGrp="1"/>
           </p:cNvSpPr>
           <p:nvPr>
-            <p:ph type="body" sz="quarter" idx="3"/>
+            <p:ph type="body" idx="3" sz="quarter"/>
           </p:nvPr>
         </p:nvSpPr>
         <p:spPr/>
@@ -579,7 +736,7 @@
           <a:lstStyle/>
           <a:p>
             <a:r>
-              <a:t>Goal: present the Section 11 sampling-design result, framed by the error budget (Sec 10) and the history (Sec 6), plus survey recommendations and the Copalis/Mocrocks donor question under co-management.</a:t>
+              <a:t>Framing meeting for razor clam harvest monitoring: history, gaps, budget impact, and a re-imagined framework.</a:t>
             </a:r>
           </a:p>
         </p:txBody>
@@ -591,7 +748,7 @@
             <a:spLocks noGrp="1"/>
           </p:cNvSpPr>
           <p:nvPr>
-            <p:ph type="sldNum" sz="quarter" idx="5"/>
+            <p:ph type="sldNum" idx="5" sz="quarter"/>
           </p:nvPr>
         </p:nvSpPr>
         <p:spPr/>
@@ -605,7 +762,7 @@
 </file>
 
 <file path=ppt/notesSlides/notesSlide10.xml><?xml version="1.0" encoding="utf-8"?>
-<p:notes xmlns:a="http://schemas.openxmlformats.org/drawingml/2006/main" xmlns:r="http://schemas.openxmlformats.org/officeDocument/2006/relationships" xmlns:p="http://schemas.openxmlformats.org/presentationml/2006/main">
+<p:notes xmlns:a="http://schemas.openxmlformats.org/drawingml/2006/main" xmlns:p="http://schemas.openxmlformats.org/presentationml/2006/main" xmlns:r="http://schemas.openxmlformats.org/officeDocument/2006/relationships">
   <p:cSld>
     <p:spTree>
       <p:nvGrpSpPr>
@@ -625,7 +782,7 @@
         <p:nvSpPr>
           <p:cNvPr id="2" name="Slide Image Placeholder 1"/>
           <p:cNvSpPr>
-            <a:spLocks noGrp="1" noRot="1" noChangeAspect="1"/>
+            <a:spLocks noGrp="1"/>
           </p:cNvSpPr>
           <p:nvPr>
             <p:ph type="sldImg" idx="2"/>
@@ -640,7 +797,7 @@
             <a:spLocks noGrp="1"/>
           </p:cNvSpPr>
           <p:nvPr>
-            <p:ph type="body" sz="quarter" idx="3"/>
+            <p:ph type="body" idx="3" sz="quarter"/>
           </p:nvPr>
         </p:nvSpPr>
         <p:spPr/>
@@ -649,7 +806,7 @@
           <a:lstStyle/>
           <a:p>
             <a:r>
-              <a:t>Sec 10.2 / Tables 15-16. Foreshadows the donor question: the southern beaches are the donors.</a:t>
+              <a:t>New Section (Fig 21). The headline budget-impact result.</a:t>
             </a:r>
           </a:p>
         </p:txBody>
@@ -661,7 +818,7 @@
             <a:spLocks noGrp="1"/>
           </p:cNvSpPr>
           <p:nvPr>
-            <p:ph type="sldNum" sz="quarter" idx="5"/>
+            <p:ph type="sldNum" idx="5" sz="quarter"/>
           </p:nvPr>
         </p:nvSpPr>
         <p:spPr/>
@@ -675,7 +832,7 @@
 </file>
 
 <file path=ppt/notesSlides/notesSlide11.xml><?xml version="1.0" encoding="utf-8"?>
-<p:notes xmlns:a="http://schemas.openxmlformats.org/drawingml/2006/main" xmlns:r="http://schemas.openxmlformats.org/officeDocument/2006/relationships" xmlns:p="http://schemas.openxmlformats.org/presentationml/2006/main">
+<p:notes xmlns:a="http://schemas.openxmlformats.org/drawingml/2006/main" xmlns:p="http://schemas.openxmlformats.org/presentationml/2006/main" xmlns:r="http://schemas.openxmlformats.org/officeDocument/2006/relationships">
   <p:cSld>
     <p:spTree>
       <p:nvGrpSpPr>
@@ -695,7 +852,7 @@
         <p:nvSpPr>
           <p:cNvPr id="2" name="Slide Image Placeholder 1"/>
           <p:cNvSpPr>
-            <a:spLocks noGrp="1" noRot="1" noChangeAspect="1"/>
+            <a:spLocks noGrp="1"/>
           </p:cNvSpPr>
           <p:nvPr>
             <p:ph type="sldImg" idx="2"/>
@@ -710,7 +867,7 @@
             <a:spLocks noGrp="1"/>
           </p:cNvSpPr>
           <p:nvPr>
-            <p:ph type="body" sz="quarter" idx="3"/>
+            <p:ph type="body" idx="3" sz="quarter"/>
           </p:nvPr>
         </p:nvSpPr>
         <p:spPr/>
@@ -719,7 +876,7 @@
           <a:lstStyle/>
           <a:p>
             <a:r>
-              <a:t>Sec 11.2 / Table 19. The headline answer.</a:t>
+              <a:t>Frame the budget decision: reductions are not uniform; they concentrate cost on the already-weak southern beaches.</a:t>
             </a:r>
           </a:p>
         </p:txBody>
@@ -731,7 +888,7 @@
             <a:spLocks noGrp="1"/>
           </p:cNvSpPr>
           <p:nvPr>
-            <p:ph type="sldNum" sz="quarter" idx="5"/>
+            <p:ph type="sldNum" idx="5" sz="quarter"/>
           </p:nvPr>
         </p:nvSpPr>
         <p:spPr/>
@@ -745,7 +902,7 @@
 </file>
 
 <file path=ppt/notesSlides/notesSlide12.xml><?xml version="1.0" encoding="utf-8"?>
-<p:notes xmlns:a="http://schemas.openxmlformats.org/drawingml/2006/main" xmlns:r="http://schemas.openxmlformats.org/officeDocument/2006/relationships" xmlns:p="http://schemas.openxmlformats.org/presentationml/2006/main">
+<p:notes xmlns:a="http://schemas.openxmlformats.org/drawingml/2006/main" xmlns:p="http://schemas.openxmlformats.org/presentationml/2006/main" xmlns:r="http://schemas.openxmlformats.org/officeDocument/2006/relationships">
   <p:cSld>
     <p:spTree>
       <p:nvGrpSpPr>
@@ -765,7 +922,7 @@
         <p:nvSpPr>
           <p:cNvPr id="2" name="Slide Image Placeholder 1"/>
           <p:cNvSpPr>
-            <a:spLocks noGrp="1" noRot="1" noChangeAspect="1"/>
+            <a:spLocks noGrp="1"/>
           </p:cNvSpPr>
           <p:nvPr>
             <p:ph type="sldImg" idx="2"/>
@@ -780,7 +937,7 @@
             <a:spLocks noGrp="1"/>
           </p:cNvSpPr>
           <p:nvPr>
-            <p:ph type="body" sz="quarter" idx="3"/>
+            <p:ph type="body" idx="3" sz="quarter"/>
           </p:nvPr>
         </p:nvSpPr>
         <p:spPr/>
@@ -789,7 +946,7 @@
           <a:lstStyle/>
           <a:p>
             <a:r>
-              <a:t>Sec 11.3 / Table 20.</a:t>
+              <a:t>The synthesis slide: given the gaps and the budget, here is where effort should go.</a:t>
             </a:r>
           </a:p>
         </p:txBody>
@@ -801,7 +958,7 @@
             <a:spLocks noGrp="1"/>
           </p:cNvSpPr>
           <p:nvPr>
-            <p:ph type="sldNum" sz="quarter" idx="5"/>
+            <p:ph type="sldNum" idx="5" sz="quarter"/>
           </p:nvPr>
         </p:nvSpPr>
         <p:spPr/>
@@ -815,7 +972,7 @@
 </file>
 
 <file path=ppt/notesSlides/notesSlide13.xml><?xml version="1.0" encoding="utf-8"?>
-<p:notes xmlns:a="http://schemas.openxmlformats.org/drawingml/2006/main" xmlns:r="http://schemas.openxmlformats.org/officeDocument/2006/relationships" xmlns:p="http://schemas.openxmlformats.org/presentationml/2006/main">
+<p:notes xmlns:a="http://schemas.openxmlformats.org/drawingml/2006/main" xmlns:p="http://schemas.openxmlformats.org/presentationml/2006/main" xmlns:r="http://schemas.openxmlformats.org/officeDocument/2006/relationships">
   <p:cSld>
     <p:spTree>
       <p:nvGrpSpPr>
@@ -835,7 +992,7 @@
         <p:nvSpPr>
           <p:cNvPr id="2" name="Slide Image Placeholder 1"/>
           <p:cNvSpPr>
-            <a:spLocks noGrp="1" noRot="1" noChangeAspect="1"/>
+            <a:spLocks noGrp="1"/>
           </p:cNvSpPr>
           <p:nvPr>
             <p:ph type="sldImg" idx="2"/>
@@ -850,7 +1007,7 @@
             <a:spLocks noGrp="1"/>
           </p:cNvSpPr>
           <p:nvPr>
-            <p:ph type="body" sz="quarter" idx="3"/>
+            <p:ph type="body" idx="3" sz="quarter"/>
           </p:nvPr>
         </p:nvSpPr>
         <p:spPr/>
@@ -859,7 +1016,7 @@
           <a:lstStyle/>
           <a:p>
             <a:r>
-              <a:t>Sec 11.4 / Table 21. Only surveys move the floor.</a:t>
+              <a:t>Sec 10.3 / Table 4.</a:t>
             </a:r>
           </a:p>
         </p:txBody>
@@ -871,7 +1028,7 @@
             <a:spLocks noGrp="1"/>
           </p:cNvSpPr>
           <p:nvPr>
-            <p:ph type="sldNum" sz="quarter" idx="5"/>
+            <p:ph type="sldNum" idx="5" sz="quarter"/>
           </p:nvPr>
         </p:nvSpPr>
         <p:spPr/>
@@ -885,7 +1042,7 @@
 </file>
 
 <file path=ppt/notesSlides/notesSlide14.xml><?xml version="1.0" encoding="utf-8"?>
-<p:notes xmlns:a="http://schemas.openxmlformats.org/drawingml/2006/main" xmlns:r="http://schemas.openxmlformats.org/officeDocument/2006/relationships" xmlns:p="http://schemas.openxmlformats.org/presentationml/2006/main">
+<p:notes xmlns:a="http://schemas.openxmlformats.org/drawingml/2006/main" xmlns:p="http://schemas.openxmlformats.org/presentationml/2006/main" xmlns:r="http://schemas.openxmlformats.org/officeDocument/2006/relationships">
   <p:cSld>
     <p:spTree>
       <p:nvGrpSpPr>
@@ -905,7 +1062,7 @@
         <p:nvSpPr>
           <p:cNvPr id="2" name="Slide Image Placeholder 1"/>
           <p:cNvSpPr>
-            <a:spLocks noGrp="1" noRot="1" noChangeAspect="1"/>
+            <a:spLocks noGrp="1"/>
           </p:cNvSpPr>
           <p:nvPr>
             <p:ph type="sldImg" idx="2"/>
@@ -920,7 +1077,7 @@
             <a:spLocks noGrp="1"/>
           </p:cNvSpPr>
           <p:nvPr>
-            <p:ph type="body" sz="quarter" idx="3"/>
+            <p:ph type="body" idx="3" sz="quarter"/>
           </p:nvPr>
         </p:nvSpPr>
         <p:spPr/>
@@ -929,7 +1086,7 @@
           <a:lstStyle/>
           <a:p>
             <a:r>
-              <a:t>Sec 11.5 / Table 22. Cost-neutral. But see the donor caveat next.</a:t>
+              <a:t>Sec 11.8. Sources: INGRESSPLAN98, consolidated IE inventory, wdfw02656.</a:t>
             </a:r>
           </a:p>
         </p:txBody>
@@ -941,7 +1098,7 @@
             <a:spLocks noGrp="1"/>
           </p:cNvSpPr>
           <p:nvPr>
-            <p:ph type="sldNum" sz="quarter" idx="5"/>
+            <p:ph type="sldNum" idx="5" sz="quarter"/>
           </p:nvPr>
         </p:nvSpPr>
         <p:spPr/>
@@ -955,7 +1112,7 @@
 </file>
 
 <file path=ppt/notesSlides/notesSlide15.xml><?xml version="1.0" encoding="utf-8"?>
-<p:notes xmlns:a="http://schemas.openxmlformats.org/drawingml/2006/main" xmlns:r="http://schemas.openxmlformats.org/officeDocument/2006/relationships" xmlns:p="http://schemas.openxmlformats.org/presentationml/2006/main">
+<p:notes xmlns:a="http://schemas.openxmlformats.org/drawingml/2006/main" xmlns:p="http://schemas.openxmlformats.org/presentationml/2006/main" xmlns:r="http://schemas.openxmlformats.org/officeDocument/2006/relationships">
   <p:cSld>
     <p:spTree>
       <p:nvGrpSpPr>
@@ -975,7 +1132,7 @@
         <p:nvSpPr>
           <p:cNvPr id="2" name="Slide Image Placeholder 1"/>
           <p:cNvSpPr>
-            <a:spLocks noGrp="1" noRot="1" noChangeAspect="1"/>
+            <a:spLocks noGrp="1"/>
           </p:cNvSpPr>
           <p:nvPr>
             <p:ph type="sldImg" idx="2"/>
@@ -990,7 +1147,7 @@
             <a:spLocks noGrp="1"/>
           </p:cNvSpPr>
           <p:nvPr>
-            <p:ph type="body" sz="quarter" idx="3"/>
+            <p:ph type="body" idx="3" sz="quarter"/>
           </p:nvPr>
         </p:nvSpPr>
         <p:spPr/>
@@ -999,7 +1156,7 @@
           <a:lstStyle/>
           <a:p>
             <a:r>
-              <a:t>Sec 10.3 / Table 4. Priority: TH evening (2 surveys), LB evening &amp; daylight, TH daylight.</a:t>
+              <a:t>Sec 11.8.</a:t>
             </a:r>
           </a:p>
         </p:txBody>
@@ -1011,7 +1168,7 @@
             <a:spLocks noGrp="1"/>
           </p:cNvSpPr>
           <p:nvPr>
-            <p:ph type="sldNum" sz="quarter" idx="5"/>
+            <p:ph type="sldNum" idx="5" sz="quarter"/>
           </p:nvPr>
         </p:nvSpPr>
         <p:spPr/>
@@ -1025,7 +1182,7 @@
 </file>
 
 <file path=ppt/notesSlides/notesSlide16.xml><?xml version="1.0" encoding="utf-8"?>
-<p:notes xmlns:a="http://schemas.openxmlformats.org/drawingml/2006/main" xmlns:r="http://schemas.openxmlformats.org/officeDocument/2006/relationships" xmlns:p="http://schemas.openxmlformats.org/presentationml/2006/main">
+<p:notes xmlns:a="http://schemas.openxmlformats.org/drawingml/2006/main" xmlns:p="http://schemas.openxmlformats.org/presentationml/2006/main" xmlns:r="http://schemas.openxmlformats.org/officeDocument/2006/relationships">
   <p:cSld>
     <p:spTree>
       <p:nvGrpSpPr>
@@ -1045,7 +1202,7 @@
         <p:nvSpPr>
           <p:cNvPr id="2" name="Slide Image Placeholder 1"/>
           <p:cNvSpPr>
-            <a:spLocks noGrp="1" noRot="1" noChangeAspect="1"/>
+            <a:spLocks noGrp="1"/>
           </p:cNvSpPr>
           <p:nvPr>
             <p:ph type="sldImg" idx="2"/>
@@ -1060,7 +1217,7 @@
             <a:spLocks noGrp="1"/>
           </p:cNvSpPr>
           <p:nvPr>
-            <p:ph type="body" sz="quarter" idx="3"/>
+            <p:ph type="body" idx="3" sz="quarter"/>
           </p:nvPr>
         </p:nvSpPr>
         <p:spPr/>
@@ -1069,7 +1226,7 @@
           <a:lstStyle/>
           <a:p>
             <a:r>
-              <a:t>Sec 11.6-11.7 + revised Fig 15. Correction: the Quinault alternate-day fishery is NOT a state proxy, so there is no offsetting data-share. The cost of thinning the donor is real and unoffset. This is why the recommendation is to hold the donor at its co-management floor and fund Long Beach from the pilot instead.</a:t>
+              <a:t>Sec 10.3 / Fig 16. Start with 1 fall + 1 spring; 8 is the target for a halved table, not a threshold.</a:t>
             </a:r>
           </a:p>
         </p:txBody>
@@ -1081,7 +1238,7 @@
             <a:spLocks noGrp="1"/>
           </p:cNvSpPr>
           <p:nvPr>
-            <p:ph type="sldNum" sz="quarter" idx="5"/>
+            <p:ph type="sldNum" idx="5" sz="quarter"/>
           </p:nvPr>
         </p:nvSpPr>
         <p:spPr/>
@@ -1095,7 +1252,7 @@
 </file>
 
 <file path=ppt/notesSlides/notesSlide17.xml><?xml version="1.0" encoding="utf-8"?>
-<p:notes xmlns:a="http://schemas.openxmlformats.org/drawingml/2006/main" xmlns:r="http://schemas.openxmlformats.org/officeDocument/2006/relationships" xmlns:p="http://schemas.openxmlformats.org/presentationml/2006/main">
+<p:notes xmlns:a="http://schemas.openxmlformats.org/drawingml/2006/main" xmlns:p="http://schemas.openxmlformats.org/presentationml/2006/main" xmlns:r="http://schemas.openxmlformats.org/officeDocument/2006/relationships">
   <p:cSld>
     <p:spTree>
       <p:nvGrpSpPr>
@@ -1115,7 +1272,7 @@
         <p:nvSpPr>
           <p:cNvPr id="2" name="Slide Image Placeholder 1"/>
           <p:cNvSpPr>
-            <a:spLocks noGrp="1" noRot="1" noChangeAspect="1"/>
+            <a:spLocks noGrp="1"/>
           </p:cNvSpPr>
           <p:nvPr>
             <p:ph type="sldImg" idx="2"/>
@@ -1130,7 +1287,7 @@
             <a:spLocks noGrp="1"/>
           </p:cNvSpPr>
           <p:nvPr>
-            <p:ph type="body" sz="quarter" idx="3"/>
+            <p:ph type="body" idx="3" sz="quarter"/>
           </p:nvPr>
         </p:nvSpPr>
         <p:spPr/>
@@ -1139,7 +1296,7 @@
           <a:lstStyle/>
           <a:p>
             <a:r>
-              <a:t>Sources: INGRESSPLAN98.docx (method, one counter per approach); consolidated IE inventory (Long Beach surveys were Oysterville-north-only or Seaview-south-only, never whole-beach); wdfw02656.pdf (7-section effort structure; the six drivable approaches are Seaview, Long Beach/Bolstad, Cranberry, Klipsan, Ocean Park, Oysterville).</a:t>
+              <a:t>Sec 11.7. The corrected co-management trade-off.</a:t>
             </a:r>
           </a:p>
         </p:txBody>
@@ -1151,7 +1308,7 @@
             <a:spLocks noGrp="1"/>
           </p:cNvSpPr>
           <p:nvPr>
-            <p:ph type="sldNum" sz="quarter" idx="5"/>
+            <p:ph type="sldNum" idx="5" sz="quarter"/>
           </p:nvPr>
         </p:nvSpPr>
         <p:spPr/>
@@ -1165,7 +1322,7 @@
 </file>
 
 <file path=ppt/notesSlides/notesSlide18.xml><?xml version="1.0" encoding="utf-8"?>
-<p:notes xmlns:a="http://schemas.openxmlformats.org/drawingml/2006/main" xmlns:r="http://schemas.openxmlformats.org/officeDocument/2006/relationships" xmlns:p="http://schemas.openxmlformats.org/presentationml/2006/main">
+<p:notes xmlns:a="http://schemas.openxmlformats.org/drawingml/2006/main" xmlns:p="http://schemas.openxmlformats.org/presentationml/2006/main" xmlns:r="http://schemas.openxmlformats.org/officeDocument/2006/relationships">
   <p:cSld>
     <p:spTree>
       <p:nvGrpSpPr>
@@ -1185,7 +1342,7 @@
         <p:nvSpPr>
           <p:cNvPr id="2" name="Slide Image Placeholder 1"/>
           <p:cNvSpPr>
-            <a:spLocks noGrp="1" noRot="1" noChangeAspect="1"/>
+            <a:spLocks noGrp="1"/>
           </p:cNvSpPr>
           <p:nvPr>
             <p:ph type="sldImg" idx="2"/>
@@ -1200,7 +1357,7 @@
             <a:spLocks noGrp="1"/>
           </p:cNvSpPr>
           <p:nvPr>
-            <p:ph type="body" sz="quarter" idx="3"/>
+            <p:ph type="body" idx="3" sz="quarter"/>
           </p:nvPr>
         </p:nvSpPr>
         <p:spPr/>
@@ -1209,7 +1366,7 @@
           <a:lstStyle/>
           <a:p>
             <a:r>
-              <a:t>Two crews, not one, because Long Beach is far longer than Twin Harbors or Mocrocks and carries several thousand diggers on a good day. The paired northern survey is the explicit test of the imputation the whole program leans on.</a:t>
+              <a:t>Sec 11.2-11.3 / Tables 19-20.</a:t>
             </a:r>
           </a:p>
         </p:txBody>
@@ -1221,7 +1378,7 @@
             <a:spLocks noGrp="1"/>
           </p:cNvSpPr>
           <p:nvPr>
-            <p:ph type="sldNum" sz="quarter" idx="5"/>
+            <p:ph type="sldNum" idx="5" sz="quarter"/>
           </p:nvPr>
         </p:nvSpPr>
         <p:spPr/>
@@ -1235,7 +1392,7 @@
 </file>
 
 <file path=ppt/notesSlides/notesSlide19.xml><?xml version="1.0" encoding="utf-8"?>
-<p:notes xmlns:a="http://schemas.openxmlformats.org/drawingml/2006/main" xmlns:r="http://schemas.openxmlformats.org/officeDocument/2006/relationships" xmlns:p="http://schemas.openxmlformats.org/presentationml/2006/main">
+<p:notes xmlns:a="http://schemas.openxmlformats.org/drawingml/2006/main" xmlns:p="http://schemas.openxmlformats.org/presentationml/2006/main" xmlns:r="http://schemas.openxmlformats.org/officeDocument/2006/relationships">
   <p:cSld>
     <p:spTree>
       <p:nvGrpSpPr>
@@ -1251,6 +1408,51 @@
           <a:chExt cx="0" cy="0"/>
         </a:xfrm>
       </p:grpSpPr>
+      <p:sp>
+        <p:nvSpPr>
+          <p:cNvPr id="2" name="Slide Image Placeholder 1"/>
+          <p:cNvSpPr>
+            <a:spLocks noGrp="1"/>
+          </p:cNvSpPr>
+          <p:nvPr>
+            <p:ph type="sldImg" idx="2"/>
+          </p:nvPr>
+        </p:nvSpPr>
+        <p:spPr/>
+      </p:sp>
+      <p:sp>
+        <p:nvSpPr>
+          <p:cNvPr id="3" name="Notes Placeholder 2"/>
+          <p:cNvSpPr>
+            <a:spLocks noGrp="1"/>
+          </p:cNvSpPr>
+          <p:nvPr>
+            <p:ph type="body" idx="3" sz="quarter"/>
+          </p:nvPr>
+        </p:nvSpPr>
+        <p:spPr/>
+        <p:txBody>
+          <a:bodyPr/>
+          <a:lstStyle/>
+          <a:p>
+            <a:r>
+              <a:t>Sec 11.5. Cost-neutral in crew-days; donor cost is real.</a:t>
+            </a:r>
+          </a:p>
+        </p:txBody>
+      </p:sp>
+      <p:sp>
+        <p:nvSpPr>
+          <p:cNvPr id="4" name="Slide Number Placeholder 3"/>
+          <p:cNvSpPr>
+            <a:spLocks noGrp="1"/>
+          </p:cNvSpPr>
+          <p:nvPr>
+            <p:ph type="sldNum" idx="5" sz="quarter"/>
+          </p:nvPr>
+        </p:nvSpPr>
+        <p:spPr/>
+      </p:sp>
     </p:spTree>
   </p:cSld>
   <p:clrMapOvr>
@@ -1260,7 +1462,7 @@
 </file>
 
 <file path=ppt/notesSlides/notesSlide2.xml><?xml version="1.0" encoding="utf-8"?>
-<p:notes xmlns:a="http://schemas.openxmlformats.org/drawingml/2006/main" xmlns:r="http://schemas.openxmlformats.org/officeDocument/2006/relationships" xmlns:p="http://schemas.openxmlformats.org/presentationml/2006/main">
+<p:notes xmlns:a="http://schemas.openxmlformats.org/drawingml/2006/main" xmlns:p="http://schemas.openxmlformats.org/presentationml/2006/main" xmlns:r="http://schemas.openxmlformats.org/officeDocument/2006/relationships">
   <p:cSld>
     <p:spTree>
       <p:nvGrpSpPr>
@@ -1280,7 +1482,7 @@
         <p:nvSpPr>
           <p:cNvPr id="2" name="Slide Image Placeholder 1"/>
           <p:cNvSpPr>
-            <a:spLocks noGrp="1" noRot="1" noChangeAspect="1"/>
+            <a:spLocks noGrp="1"/>
           </p:cNvSpPr>
           <p:nvPr>
             <p:ph type="sldImg" idx="2"/>
@@ -1295,7 +1497,7 @@
             <a:spLocks noGrp="1"/>
           </p:cNvSpPr>
           <p:nvPr>
-            <p:ph type="body" sz="quarter" idx="3"/>
+            <p:ph type="body" idx="3" sz="quarter"/>
           </p:nvPr>
         </p:nvSpPr>
         <p:spPr/>
@@ -1304,7 +1506,7 @@
           <a:lstStyle/>
           <a:p>
             <a:r>
-              <a:t>Set up the decision. The standard is external because WDFW has none for this fishery.</a:t>
+              <a:t>The six agenda items. This deck is organized to follow them.</a:t>
             </a:r>
           </a:p>
         </p:txBody>
@@ -1316,7 +1518,7 @@
             <a:spLocks noGrp="1"/>
           </p:cNvSpPr>
           <p:nvPr>
-            <p:ph type="sldNum" sz="quarter" idx="5"/>
+            <p:ph type="sldNum" idx="5" sz="quarter"/>
           </p:nvPr>
         </p:nvSpPr>
         <p:spPr/>
@@ -1330,7 +1532,7 @@
 </file>
 
 <file path=ppt/notesSlides/notesSlide20.xml><?xml version="1.0" encoding="utf-8"?>
-<p:notes xmlns:a="http://schemas.openxmlformats.org/drawingml/2006/main" xmlns:r="http://schemas.openxmlformats.org/officeDocument/2006/relationships" xmlns:p="http://schemas.openxmlformats.org/presentationml/2006/main">
+<p:notes xmlns:a="http://schemas.openxmlformats.org/drawingml/2006/main" xmlns:p="http://schemas.openxmlformats.org/presentationml/2006/main" xmlns:r="http://schemas.openxmlformats.org/officeDocument/2006/relationships">
   <p:cSld>
     <p:spTree>
       <p:nvGrpSpPr>
@@ -1346,6 +1548,51 @@
           <a:chExt cx="0" cy="0"/>
         </a:xfrm>
       </p:grpSpPr>
+      <p:sp>
+        <p:nvSpPr>
+          <p:cNvPr id="2" name="Slide Image Placeholder 1"/>
+          <p:cNvSpPr>
+            <a:spLocks noGrp="1"/>
+          </p:cNvSpPr>
+          <p:nvPr>
+            <p:ph type="sldImg" idx="2"/>
+          </p:nvPr>
+        </p:nvSpPr>
+        <p:spPr/>
+      </p:sp>
+      <p:sp>
+        <p:nvSpPr>
+          <p:cNvPr id="3" name="Notes Placeholder 2"/>
+          <p:cNvSpPr>
+            <a:spLocks noGrp="1"/>
+          </p:cNvSpPr>
+          <p:nvPr>
+            <p:ph type="body" idx="3" sz="quarter"/>
+          </p:nvPr>
+        </p:nvSpPr>
+        <p:spPr/>
+        <p:txBody>
+          <a:bodyPr/>
+          <a:lstStyle/>
+          <a:p>
+            <a:r>
+              <a:t>Priority recommendations, updated for the no-joint-donor and budget-impact findings.</a:t>
+            </a:r>
+          </a:p>
+        </p:txBody>
+      </p:sp>
+      <p:sp>
+        <p:nvSpPr>
+          <p:cNvPr id="4" name="Slide Number Placeholder 3"/>
+          <p:cNvSpPr>
+            <a:spLocks noGrp="1"/>
+          </p:cNvSpPr>
+          <p:nvPr>
+            <p:ph type="sldNum" idx="5" sz="quarter"/>
+          </p:nvPr>
+        </p:nvSpPr>
+        <p:spPr/>
+      </p:sp>
     </p:spTree>
   </p:cSld>
   <p:clrMapOvr>
@@ -1354,8 +1601,8 @@
 </p:notes>
 </file>
 
-<file path=ppt/notesSlides/notesSlide3.xml><?xml version="1.0" encoding="utf-8"?>
-<p:notes xmlns:a="http://schemas.openxmlformats.org/drawingml/2006/main" xmlns:r="http://schemas.openxmlformats.org/officeDocument/2006/relationships" xmlns:p="http://schemas.openxmlformats.org/presentationml/2006/main">
+<file path=ppt/notesSlides/notesSlide21.xml><?xml version="1.0" encoding="utf-8"?>
+<p:notes xmlns:a="http://schemas.openxmlformats.org/drawingml/2006/main" xmlns:p="http://schemas.openxmlformats.org/presentationml/2006/main" xmlns:r="http://schemas.openxmlformats.org/officeDocument/2006/relationships">
   <p:cSld>
     <p:spTree>
       <p:nvGrpSpPr>
@@ -1371,6 +1618,51 @@
           <a:chExt cx="0" cy="0"/>
         </a:xfrm>
       </p:grpSpPr>
+      <p:sp>
+        <p:nvSpPr>
+          <p:cNvPr id="2" name="Slide Image Placeholder 1"/>
+          <p:cNvSpPr>
+            <a:spLocks noGrp="1"/>
+          </p:cNvSpPr>
+          <p:nvPr>
+            <p:ph type="sldImg" idx="2"/>
+          </p:nvPr>
+        </p:nvSpPr>
+        <p:spPr/>
+      </p:sp>
+      <p:sp>
+        <p:nvSpPr>
+          <p:cNvPr id="3" name="Notes Placeholder 2"/>
+          <p:cNvSpPr>
+            <a:spLocks noGrp="1"/>
+          </p:cNvSpPr>
+          <p:nvPr>
+            <p:ph type="body" idx="3" sz="quarter"/>
+          </p:nvPr>
+        </p:nvSpPr>
+        <p:spPr/>
+        <p:txBody>
+          <a:bodyPr/>
+          <a:lstStyle/>
+          <a:p>
+            <a:r>
+              <a:t>Bridge to the stock-assessment follow-up meeting; list the decisions needed.</a:t>
+            </a:r>
+          </a:p>
+        </p:txBody>
+      </p:sp>
+      <p:sp>
+        <p:nvSpPr>
+          <p:cNvPr id="4" name="Slide Number Placeholder 3"/>
+          <p:cNvSpPr>
+            <a:spLocks noGrp="1"/>
+          </p:cNvSpPr>
+          <p:nvPr>
+            <p:ph type="sldNum" idx="5" sz="quarter"/>
+          </p:nvPr>
+        </p:nvSpPr>
+        <p:spPr/>
+      </p:sp>
     </p:spTree>
   </p:cSld>
   <p:clrMapOvr>
@@ -1379,8 +1671,8 @@
 </p:notes>
 </file>
 
-<file path=ppt/notesSlides/notesSlide4.xml><?xml version="1.0" encoding="utf-8"?>
-<p:notes xmlns:a="http://schemas.openxmlformats.org/drawingml/2006/main" xmlns:r="http://schemas.openxmlformats.org/officeDocument/2006/relationships" xmlns:p="http://schemas.openxmlformats.org/presentationml/2006/main">
+<file path=ppt/notesSlides/notesSlide3.xml><?xml version="1.0" encoding="utf-8"?>
+<p:notes xmlns:a="http://schemas.openxmlformats.org/drawingml/2006/main" xmlns:p="http://schemas.openxmlformats.org/presentationml/2006/main" xmlns:r="http://schemas.openxmlformats.org/officeDocument/2006/relationships">
   <p:cSld>
     <p:spTree>
       <p:nvGrpSpPr>
@@ -1396,6 +1688,51 @@
           <a:chExt cx="0" cy="0"/>
         </a:xfrm>
       </p:grpSpPr>
+      <p:sp>
+        <p:nvSpPr>
+          <p:cNvPr id="2" name="Slide Image Placeholder 1"/>
+          <p:cNvSpPr>
+            <a:spLocks noGrp="1"/>
+          </p:cNvSpPr>
+          <p:nvPr>
+            <p:ph type="sldImg" idx="2"/>
+          </p:nvPr>
+        </p:nvSpPr>
+        <p:spPr/>
+      </p:sp>
+      <p:sp>
+        <p:nvSpPr>
+          <p:cNvPr id="3" name="Notes Placeholder 2"/>
+          <p:cNvSpPr>
+            <a:spLocks noGrp="1"/>
+          </p:cNvSpPr>
+          <p:nvPr>
+            <p:ph type="body" idx="3" sz="quarter"/>
+          </p:nvPr>
+        </p:nvSpPr>
+        <p:spPr/>
+        <p:txBody>
+          <a:bodyPr/>
+          <a:lstStyle/>
+          <a:p>
+            <a:r>
+              <a:t>Sec 4 chain + Sec 10 budget.</a:t>
+            </a:r>
+          </a:p>
+        </p:txBody>
+      </p:sp>
+      <p:sp>
+        <p:nvSpPr>
+          <p:cNvPr id="4" name="Slide Number Placeholder 3"/>
+          <p:cNvSpPr>
+            <a:spLocks noGrp="1"/>
+          </p:cNvSpPr>
+          <p:nvPr>
+            <p:ph type="sldNum" idx="5" sz="quarter"/>
+          </p:nvPr>
+        </p:nvSpPr>
+        <p:spPr/>
+      </p:sp>
     </p:spTree>
   </p:cSld>
   <p:clrMapOvr>
@@ -1404,8 +1741,8 @@
 </p:notes>
 </file>
 
-<file path=ppt/notesSlides/notesSlide5.xml><?xml version="1.0" encoding="utf-8"?>
-<p:notes xmlns:a="http://schemas.openxmlformats.org/drawingml/2006/main" xmlns:r="http://schemas.openxmlformats.org/officeDocument/2006/relationships" xmlns:p="http://schemas.openxmlformats.org/presentationml/2006/main">
+<file path=ppt/notesSlides/notesSlide4.xml><?xml version="1.0" encoding="utf-8"?>
+<p:notes xmlns:a="http://schemas.openxmlformats.org/drawingml/2006/main" xmlns:p="http://schemas.openxmlformats.org/presentationml/2006/main" xmlns:r="http://schemas.openxmlformats.org/officeDocument/2006/relationships">
   <p:cSld>
     <p:spTree>
       <p:nvGrpSpPr>
@@ -1421,6 +1758,51 @@
           <a:chExt cx="0" cy="0"/>
         </a:xfrm>
       </p:grpSpPr>
+      <p:sp>
+        <p:nvSpPr>
+          <p:cNvPr id="2" name="Slide Image Placeholder 1"/>
+          <p:cNvSpPr>
+            <a:spLocks noGrp="1"/>
+          </p:cNvSpPr>
+          <p:nvPr>
+            <p:ph type="sldImg" idx="2"/>
+          </p:nvPr>
+        </p:nvSpPr>
+        <p:spPr/>
+      </p:sp>
+      <p:sp>
+        <p:nvSpPr>
+          <p:cNvPr id="3" name="Notes Placeholder 2"/>
+          <p:cNvSpPr>
+            <a:spLocks noGrp="1"/>
+          </p:cNvSpPr>
+          <p:nvPr>
+            <p:ph type="body" idx="3" sz="quarter"/>
+          </p:nvPr>
+        </p:nvSpPr>
+        <p:spPr/>
+        <p:txBody>
+          <a:bodyPr/>
+          <a:lstStyle/>
+          <a:p>
+            <a:r>
+              <a:t>Section 4.1-4.5.</a:t>
+            </a:r>
+          </a:p>
+        </p:txBody>
+      </p:sp>
+      <p:sp>
+        <p:nvSpPr>
+          <p:cNvPr id="4" name="Slide Number Placeholder 3"/>
+          <p:cNvSpPr>
+            <a:spLocks noGrp="1"/>
+          </p:cNvSpPr>
+          <p:nvPr>
+            <p:ph type="sldNum" idx="5" sz="quarter"/>
+          </p:nvPr>
+        </p:nvSpPr>
+        <p:spPr/>
+      </p:sp>
     </p:spTree>
   </p:cSld>
   <p:clrMapOvr>
@@ -1429,8 +1811,8 @@
 </p:notes>
 </file>
 
-<file path=ppt/notesSlides/notesSlide6.xml><?xml version="1.0" encoding="utf-8"?>
-<p:notes xmlns:a="http://schemas.openxmlformats.org/drawingml/2006/main" xmlns:r="http://schemas.openxmlformats.org/officeDocument/2006/relationships" xmlns:p="http://schemas.openxmlformats.org/presentationml/2006/main">
+<file path=ppt/notesSlides/notesSlide5.xml><?xml version="1.0" encoding="utf-8"?>
+<p:notes xmlns:a="http://schemas.openxmlformats.org/drawingml/2006/main" xmlns:p="http://schemas.openxmlformats.org/presentationml/2006/main" xmlns:r="http://schemas.openxmlformats.org/officeDocument/2006/relationships">
   <p:cSld>
     <p:spTree>
       <p:nvGrpSpPr>
@@ -1446,6 +1828,51 @@
           <a:chExt cx="0" cy="0"/>
         </a:xfrm>
       </p:grpSpPr>
+      <p:sp>
+        <p:nvSpPr>
+          <p:cNvPr id="2" name="Slide Image Placeholder 1"/>
+          <p:cNvSpPr>
+            <a:spLocks noGrp="1"/>
+          </p:cNvSpPr>
+          <p:nvPr>
+            <p:ph type="sldImg" idx="2"/>
+          </p:nvPr>
+        </p:nvSpPr>
+        <p:spPr/>
+      </p:sp>
+      <p:sp>
+        <p:nvSpPr>
+          <p:cNvPr id="3" name="Notes Placeholder 2"/>
+          <p:cNvSpPr>
+            <a:spLocks noGrp="1"/>
+          </p:cNvSpPr>
+          <p:nvPr>
+            <p:ph type="body" idx="3" sz="quarter"/>
+          </p:nvPr>
+        </p:nvSpPr>
+        <p:spPr/>
+        <p:txBody>
+          <a:bodyPr/>
+          <a:lstStyle/>
+          <a:p>
+            <a:r>
+              <a:t>Sec 6.2-6.3.</a:t>
+            </a:r>
+          </a:p>
+        </p:txBody>
+      </p:sp>
+      <p:sp>
+        <p:nvSpPr>
+          <p:cNvPr id="4" name="Slide Number Placeholder 3"/>
+          <p:cNvSpPr>
+            <a:spLocks noGrp="1"/>
+          </p:cNvSpPr>
+          <p:nvPr>
+            <p:ph type="sldNum" idx="5" sz="quarter"/>
+          </p:nvPr>
+        </p:nvSpPr>
+        <p:spPr/>
+      </p:sp>
     </p:spTree>
   </p:cSld>
   <p:clrMapOvr>
@@ -1454,8 +1881,8 @@
 </p:notes>
 </file>
 
-<file path=ppt/notesSlides/notesSlide7.xml><?xml version="1.0" encoding="utf-8"?>
-<p:notes xmlns:a="http://schemas.openxmlformats.org/drawingml/2006/main" xmlns:r="http://schemas.openxmlformats.org/officeDocument/2006/relationships" xmlns:p="http://schemas.openxmlformats.org/presentationml/2006/main">
+<file path=ppt/notesSlides/notesSlide6.xml><?xml version="1.0" encoding="utf-8"?>
+<p:notes xmlns:a="http://schemas.openxmlformats.org/drawingml/2006/main" xmlns:p="http://schemas.openxmlformats.org/presentationml/2006/main" xmlns:r="http://schemas.openxmlformats.org/officeDocument/2006/relationships">
   <p:cSld>
     <p:spTree>
       <p:nvGrpSpPr>
@@ -1471,6 +1898,51 @@
           <a:chExt cx="0" cy="0"/>
         </a:xfrm>
       </p:grpSpPr>
+      <p:sp>
+        <p:nvSpPr>
+          <p:cNvPr id="2" name="Slide Image Placeholder 1"/>
+          <p:cNvSpPr>
+            <a:spLocks noGrp="1"/>
+          </p:cNvSpPr>
+          <p:nvPr>
+            <p:ph type="sldImg" idx="2"/>
+          </p:nvPr>
+        </p:nvSpPr>
+        <p:spPr/>
+      </p:sp>
+      <p:sp>
+        <p:nvSpPr>
+          <p:cNvPr id="3" name="Notes Placeholder 2"/>
+          <p:cNvSpPr>
+            <a:spLocks noGrp="1"/>
+          </p:cNvSpPr>
+          <p:nvPr>
+            <p:ph type="body" idx="3" sz="quarter"/>
+          </p:nvPr>
+        </p:nvSpPr>
+        <p:spPr/>
+        <p:txBody>
+          <a:bodyPr/>
+          <a:lstStyle/>
+          <a:p>
+            <a:r>
+              <a:t>Sec 10.1 / Table 14.</a:t>
+            </a:r>
+          </a:p>
+        </p:txBody>
+      </p:sp>
+      <p:sp>
+        <p:nvSpPr>
+          <p:cNvPr id="4" name="Slide Number Placeholder 3"/>
+          <p:cNvSpPr>
+            <a:spLocks noGrp="1"/>
+          </p:cNvSpPr>
+          <p:nvPr>
+            <p:ph type="sldNum" idx="5" sz="quarter"/>
+          </p:nvPr>
+        </p:nvSpPr>
+        <p:spPr/>
+      </p:sp>
     </p:spTree>
   </p:cSld>
   <p:clrMapOvr>
@@ -1479,8 +1951,8 @@
 </p:notes>
 </file>
 
-<file path=ppt/notesSlides/notesSlide8.xml><?xml version="1.0" encoding="utf-8"?>
-<p:notes xmlns:a="http://schemas.openxmlformats.org/drawingml/2006/main" xmlns:r="http://schemas.openxmlformats.org/officeDocument/2006/relationships" xmlns:p="http://schemas.openxmlformats.org/presentationml/2006/main">
+<file path=ppt/notesSlides/notesSlide7.xml><?xml version="1.0" encoding="utf-8"?>
+<p:notes xmlns:a="http://schemas.openxmlformats.org/drawingml/2006/main" xmlns:p="http://schemas.openxmlformats.org/presentationml/2006/main" xmlns:r="http://schemas.openxmlformats.org/officeDocument/2006/relationships">
   <p:cSld>
     <p:spTree>
       <p:nvGrpSpPr>
@@ -1500,7 +1972,7 @@
         <p:nvSpPr>
           <p:cNvPr id="2" name="Slide Image Placeholder 1"/>
           <p:cNvSpPr>
-            <a:spLocks noGrp="1" noRot="1" noChangeAspect="1"/>
+            <a:spLocks noGrp="1"/>
           </p:cNvSpPr>
           <p:nvPr>
             <p:ph type="sldImg" idx="2"/>
@@ -1515,7 +1987,7 @@
             <a:spLocks noGrp="1"/>
           </p:cNvSpPr>
           <p:nvPr>
-            <p:ph type="body" sz="quarter" idx="3"/>
+            <p:ph type="body" idx="3" sz="quarter"/>
           </p:nvPr>
         </p:nvSpPr>
         <p:spPr/>
@@ -1524,7 +1996,7 @@
           <a:lstStyle/>
           <a:p>
             <a:r>
-              <a:t>Sec 6.2-6.3. The instrument itself changed, which propagates into the imputation ratios.</a:t>
+              <a:t>Sec 4.5.</a:t>
             </a:r>
           </a:p>
         </p:txBody>
@@ -1536,7 +2008,7 @@
             <a:spLocks noGrp="1"/>
           </p:cNvSpPr>
           <p:nvPr>
-            <p:ph type="sldNum" sz="quarter" idx="5"/>
+            <p:ph type="sldNum" idx="5" sz="quarter"/>
           </p:nvPr>
         </p:nvSpPr>
         <p:spPr/>
@@ -1549,8 +2021,8 @@
 </p:notes>
 </file>
 
-<file path=ppt/notesSlides/notesSlide9.xml><?xml version="1.0" encoding="utf-8"?>
-<p:notes xmlns:a="http://schemas.openxmlformats.org/drawingml/2006/main" xmlns:r="http://schemas.openxmlformats.org/officeDocument/2006/relationships" xmlns:p="http://schemas.openxmlformats.org/presentationml/2006/main">
+<file path=ppt/notesSlides/notesSlide8.xml><?xml version="1.0" encoding="utf-8"?>
+<p:notes xmlns:a="http://schemas.openxmlformats.org/drawingml/2006/main" xmlns:p="http://schemas.openxmlformats.org/presentationml/2006/main" xmlns:r="http://schemas.openxmlformats.org/officeDocument/2006/relationships">
   <p:cSld>
     <p:spTree>
       <p:nvGrpSpPr>
@@ -1570,7 +2042,7 @@
         <p:nvSpPr>
           <p:cNvPr id="2" name="Slide Image Placeholder 1"/>
           <p:cNvSpPr>
-            <a:spLocks noGrp="1" noRot="1" noChangeAspect="1"/>
+            <a:spLocks noGrp="1"/>
           </p:cNvSpPr>
           <p:nvPr>
             <p:ph type="sldImg" idx="2"/>
@@ -1585,7 +2057,7 @@
             <a:spLocks noGrp="1"/>
           </p:cNvSpPr>
           <p:nvPr>
-            <p:ph type="body" sz="quarter" idx="3"/>
+            <p:ph type="body" idx="3" sz="quarter"/>
           </p:nvPr>
         </p:nvSpPr>
         <p:spPr/>
@@ -1594,7 +2066,7 @@
           <a:lstStyle/>
           <a:p>
             <a:r>
-              <a:t>Sec 10.1 / Table 14. Key reframing: magnitude is not what matters, correlation is.</a:t>
+              <a:t>Sec 4.5 / 11.7. Correction: joint donor unavailable going forward.</a:t>
             </a:r>
           </a:p>
         </p:txBody>
@@ -1606,7 +2078,77 @@
             <a:spLocks noGrp="1"/>
           </p:cNvSpPr>
           <p:nvPr>
-            <p:ph type="sldNum" sz="quarter" idx="5"/>
+            <p:ph type="sldNum" idx="5" sz="quarter"/>
+          </p:nvPr>
+        </p:nvSpPr>
+        <p:spPr/>
+      </p:sp>
+    </p:spTree>
+  </p:cSld>
+  <p:clrMapOvr>
+    <a:masterClrMapping/>
+  </p:clrMapOvr>
+</p:notes>
+</file>
+
+<file path=ppt/notesSlides/notesSlide9.xml><?xml version="1.0" encoding="utf-8"?>
+<p:notes xmlns:a="http://schemas.openxmlformats.org/drawingml/2006/main" xmlns:p="http://schemas.openxmlformats.org/presentationml/2006/main" xmlns:r="http://schemas.openxmlformats.org/officeDocument/2006/relationships">
+  <p:cSld>
+    <p:spTree>
+      <p:nvGrpSpPr>
+        <p:cNvPr id="1" name=""/>
+        <p:cNvGrpSpPr/>
+        <p:nvPr/>
+      </p:nvGrpSpPr>
+      <p:grpSpPr>
+        <a:xfrm>
+          <a:off x="0" y="0"/>
+          <a:ext cx="0" cy="0"/>
+          <a:chOff x="0" y="0"/>
+          <a:chExt cx="0" cy="0"/>
+        </a:xfrm>
+      </p:grpSpPr>
+      <p:sp>
+        <p:nvSpPr>
+          <p:cNvPr id="2" name="Slide Image Placeholder 1"/>
+          <p:cNvSpPr>
+            <a:spLocks noGrp="1"/>
+          </p:cNvSpPr>
+          <p:nvPr>
+            <p:ph type="sldImg" idx="2"/>
+          </p:nvPr>
+        </p:nvSpPr>
+        <p:spPr/>
+      </p:sp>
+      <p:sp>
+        <p:nvSpPr>
+          <p:cNvPr id="3" name="Notes Placeholder 2"/>
+          <p:cNvSpPr>
+            <a:spLocks noGrp="1"/>
+          </p:cNvSpPr>
+          <p:nvPr>
+            <p:ph type="body" idx="3" sz="quarter"/>
+          </p:nvPr>
+        </p:nvSpPr>
+        <p:spPr/>
+        <p:txBody>
+          <a:bodyPr/>
+          <a:lstStyle/>
+          <a:p>
+            <a:r>
+              <a:t>Sec 5.4.</a:t>
+            </a:r>
+          </a:p>
+        </p:txBody>
+      </p:sp>
+      <p:sp>
+        <p:nvSpPr>
+          <p:cNvPr id="4" name="Slide Number Placeholder 3"/>
+          <p:cNvSpPr>
+            <a:spLocks noGrp="1"/>
+          </p:cNvSpPr>
+          <p:nvPr>
+            <p:ph type="sldNum" idx="5" sz="quarter"/>
           </p:nvPr>
         </p:nvSpPr>
         <p:spPr/>
@@ -1827,13 +2369,13 @@
           <p:nvPr userDrawn="1"/>
         </p:nvPicPr>
         <p:blipFill>
-          <a:blip>
+          <a:blip r:embed="rId2">
             <a:extLst>
               <a:ext uri="{28A0092B-C50C-407E-A947-70E740481C1C}">
                 <a14:useLocalDpi xmlns:a14="http://schemas.microsoft.com/office/drawing/2010/main" val="0"/>
               </a:ext>
               <a:ext uri="{96DAC541-7B7A-43D3-8B79-37D633B846F1}">
-                <asvg:svgBlip xmlns:asvg="http://schemas.microsoft.com/office/drawing/2016/SVG/main" r:embed="rId2"/>
+                <asvg:svgBlip xmlns:asvg="http://schemas.microsoft.com/office/drawing/2016/SVG/main" r:embed="rId3"/>
               </a:ext>
             </a:extLst>
           </a:blip>
@@ -2536,13 +3078,13 @@
           <p:nvPr userDrawn="1"/>
         </p:nvPicPr>
         <p:blipFill>
-          <a:blip>
+          <a:blip r:embed="rId2">
             <a:extLst>
               <a:ext uri="{28A0092B-C50C-407E-A947-70E740481C1C}">
                 <a14:useLocalDpi xmlns:a14="http://schemas.microsoft.com/office/drawing/2010/main" val="0"/>
               </a:ext>
               <a:ext uri="{96DAC541-7B7A-43D3-8B79-37D633B846F1}">
-                <asvg:svgBlip xmlns:asvg="http://schemas.microsoft.com/office/drawing/2016/SVG/main" r:embed="rId2"/>
+                <asvg:svgBlip xmlns:asvg="http://schemas.microsoft.com/office/drawing/2016/SVG/main" r:embed="rId3"/>
               </a:ext>
             </a:extLst>
           </a:blip>
@@ -2999,13 +3541,13 @@
           <p:nvPr userDrawn="1"/>
         </p:nvPicPr>
         <p:blipFill>
-          <a:blip>
+          <a:blip r:embed="rId2">
             <a:extLst>
               <a:ext uri="{28A0092B-C50C-407E-A947-70E740481C1C}">
                 <a14:useLocalDpi xmlns:a14="http://schemas.microsoft.com/office/drawing/2010/main" val="0"/>
               </a:ext>
               <a:ext uri="{96DAC541-7B7A-43D3-8B79-37D633B846F1}">
-                <asvg:svgBlip xmlns:asvg="http://schemas.microsoft.com/office/drawing/2016/SVG/main" r:embed="rId2"/>
+                <asvg:svgBlip xmlns:asvg="http://schemas.microsoft.com/office/drawing/2016/SVG/main" r:embed="rId3"/>
               </a:ext>
             </a:extLst>
           </a:blip>
@@ -3509,13 +4051,13 @@
           <p:nvPr userDrawn="1"/>
         </p:nvPicPr>
         <p:blipFill>
-          <a:blip>
+          <a:blip r:embed="rId2">
             <a:extLst>
               <a:ext uri="{28A0092B-C50C-407E-A947-70E740481C1C}">
                 <a14:useLocalDpi xmlns:a14="http://schemas.microsoft.com/office/drawing/2010/main" val="0"/>
               </a:ext>
               <a:ext uri="{96DAC541-7B7A-43D3-8B79-37D633B846F1}">
-                <asvg:svgBlip xmlns:asvg="http://schemas.microsoft.com/office/drawing/2016/SVG/main" r:embed="rId2"/>
+                <asvg:svgBlip xmlns:asvg="http://schemas.microsoft.com/office/drawing/2016/SVG/main" r:embed="rId3"/>
               </a:ext>
             </a:extLst>
           </a:blip>
@@ -4123,13 +4665,13 @@
           <p:nvPr userDrawn="1"/>
         </p:nvPicPr>
         <p:blipFill>
-          <a:blip>
+          <a:blip r:embed="rId2">
             <a:extLst>
               <a:ext uri="{28A0092B-C50C-407E-A947-70E740481C1C}">
                 <a14:useLocalDpi xmlns:a14="http://schemas.microsoft.com/office/drawing/2010/main" val="0"/>
               </a:ext>
               <a:ext uri="{96DAC541-7B7A-43D3-8B79-37D633B846F1}">
-                <asvg:svgBlip xmlns:asvg="http://schemas.microsoft.com/office/drawing/2016/SVG/main" r:embed="rId2"/>
+                <asvg:svgBlip xmlns:asvg="http://schemas.microsoft.com/office/drawing/2016/SVG/main" r:embed="rId3"/>
               </a:ext>
             </a:extLst>
           </a:blip>
@@ -4859,13 +5401,13 @@
           <p:nvPr userDrawn="1"/>
         </p:nvPicPr>
         <p:blipFill>
-          <a:blip>
+          <a:blip r:embed="rId2">
             <a:extLst>
               <a:ext uri="{28A0092B-C50C-407E-A947-70E740481C1C}">
                 <a14:useLocalDpi xmlns:a14="http://schemas.microsoft.com/office/drawing/2010/main" val="0"/>
               </a:ext>
               <a:ext uri="{96DAC541-7B7A-43D3-8B79-37D633B846F1}">
-                <asvg:svgBlip xmlns:asvg="http://schemas.microsoft.com/office/drawing/2016/SVG/main" r:embed="rId2"/>
+                <asvg:svgBlip xmlns:asvg="http://schemas.microsoft.com/office/drawing/2016/SVG/main" r:embed="rId3"/>
               </a:ext>
             </a:extLst>
           </a:blip>
@@ -5717,13 +6259,13 @@
           <p:nvPr userDrawn="1"/>
         </p:nvPicPr>
         <p:blipFill>
-          <a:blip>
+          <a:blip r:embed="rId2">
             <a:extLst>
               <a:ext uri="{28A0092B-C50C-407E-A947-70E740481C1C}">
                 <a14:useLocalDpi xmlns:a14="http://schemas.microsoft.com/office/drawing/2010/main" val="0"/>
               </a:ext>
               <a:ext uri="{96DAC541-7B7A-43D3-8B79-37D633B846F1}">
-                <asvg:svgBlip xmlns:asvg="http://schemas.microsoft.com/office/drawing/2016/SVG/main" r:embed="rId2"/>
+                <asvg:svgBlip xmlns:asvg="http://schemas.microsoft.com/office/drawing/2016/SVG/main" r:embed="rId3"/>
               </a:ext>
             </a:extLst>
           </a:blip>
@@ -6136,13 +6678,13 @@
           <p:nvPr userDrawn="1"/>
         </p:nvPicPr>
         <p:blipFill>
-          <a:blip>
+          <a:blip r:embed="rId2">
             <a:extLst>
               <a:ext uri="{28A0092B-C50C-407E-A947-70E740481C1C}">
                 <a14:useLocalDpi xmlns:a14="http://schemas.microsoft.com/office/drawing/2010/main" val="0"/>
               </a:ext>
               <a:ext uri="{96DAC541-7B7A-43D3-8B79-37D633B846F1}">
-                <asvg:svgBlip xmlns:asvg="http://schemas.microsoft.com/office/drawing/2016/SVG/main" r:embed="rId2"/>
+                <asvg:svgBlip xmlns:asvg="http://schemas.microsoft.com/office/drawing/2016/SVG/main" r:embed="rId3"/>
               </a:ext>
             </a:extLst>
           </a:blip>
@@ -6603,7 +7145,7 @@
 </file>
 
 <file path=ppt/slides/slide1.xml><?xml version="1.0" encoding="utf-8"?>
-<p:sld xmlns:a="http://schemas.openxmlformats.org/drawingml/2006/main" xmlns:r="http://schemas.openxmlformats.org/officeDocument/2006/relationships" xmlns:p="http://schemas.openxmlformats.org/presentationml/2006/main">
+<p:sld xmlns:a="http://schemas.openxmlformats.org/drawingml/2006/main" xmlns:p="http://schemas.openxmlformats.org/presentationml/2006/main" xmlns:r="http://schemas.openxmlformats.org/officeDocument/2006/relationships">
   <p:cSld>
     <p:spTree>
       <p:nvGrpSpPr>
@@ -6611,14 +7153,7 @@
         <p:cNvGrpSpPr/>
         <p:nvPr/>
       </p:nvGrpSpPr>
-      <p:grpSpPr>
-        <a:xfrm>
-          <a:off x="0" y="0"/>
-          <a:ext cx="0" cy="0"/>
-          <a:chOff x="0" y="0"/>
-          <a:chExt cx="0" cy="0"/>
-        </a:xfrm>
-      </p:grpSpPr>
+      <p:grpSpPr/>
       <p:sp>
         <p:nvSpPr>
           <p:cNvPr id="2" name="Title 1"/>
@@ -6635,7 +7170,7 @@
           <a:lstStyle/>
           <a:p>
             <a:r>
-              <a:t>In-Season Sampling Design for the Coastal Razor Clam Fishery</a:t>
+              <a:t>Coastal Razor Clam Harvest Monitoring</a:t>
             </a:r>
           </a:p>
         </p:txBody>
@@ -6647,7 +7182,7 @@
             <a:spLocks noGrp="1"/>
           </p:cNvSpPr>
           <p:nvPr>
-            <p:ph sz="half" idx="1"/>
+            <p:ph idx="1" sz="half"/>
           </p:nvPr>
         </p:nvSpPr>
         <p:spPr/>
@@ -6656,17 +7191,17 @@
           <a:lstStyle/>
           <a:p>
             <a:r>
-              <a:t>Findings from the 2026 harvest-estimate methodology review (v10)</a:t>
-            </a:r>
-          </a:p>
-          <a:p>
-            <a:r>
-              <a:t>Matthew George  ·  Coastal Shellfish Unit, WDFW</a:t>
-            </a:r>
-          </a:p>
-          <a:p>
-            <a:r>
-              <a:t>2026-27 season planning</a:t>
+              <a:t>Methodology, uncertainty, and options for 2026-27</a:t>
+            </a:r>
+          </a:p>
+          <a:p>
+            <a:r>
+              <a:t>Internal staff discussion  ·  Coastal Shellfish Unit, WDFW</a:t>
+            </a:r>
+          </a:p>
+          <a:p>
+            <a:r>
+              <a:t>Matthew George</a:t>
             </a:r>
           </a:p>
         </p:txBody>
@@ -6680,7 +7215,7 @@
 </file>
 
 <file path=ppt/slides/slide10.xml><?xml version="1.0" encoding="utf-8"?>
-<p:sld xmlns:a="http://schemas.openxmlformats.org/drawingml/2006/main" xmlns:r="http://schemas.openxmlformats.org/officeDocument/2006/relationships" xmlns:p="http://schemas.openxmlformats.org/presentationml/2006/main">
+<p:sld xmlns:a="http://schemas.openxmlformats.org/drawingml/2006/main" xmlns:p="http://schemas.openxmlformats.org/presentationml/2006/main" xmlns:r="http://schemas.openxmlformats.org/officeDocument/2006/relationships">
   <p:cSld>
     <p:spTree>
       <p:nvGrpSpPr>
@@ -6688,14 +7223,7 @@
         <p:cNvGrpSpPr/>
         <p:nvPr/>
       </p:nvGrpSpPr>
-      <p:grpSpPr>
-        <a:xfrm>
-          <a:off x="0" y="0"/>
-          <a:ext cx="0" cy="0"/>
-          <a:chOff x="0" y="0"/>
-          <a:chExt cx="0" cy="0"/>
-        </a:xfrm>
-      </p:grpSpPr>
+      <p:grpSpPr/>
       <p:sp>
         <p:nvSpPr>
           <p:cNvPr id="2" name="Title 1"/>
@@ -6712,102 +7240,72 @@
           <a:lstStyle/>
           <a:p>
             <a:r>
-              <a:t>The expansion table is the instrument, and it has moved</a:t>
-            </a:r>
-          </a:p>
-        </p:txBody>
-      </p:sp>
-      <p:sp>
-        <p:nvSpPr>
-          <p:cNvPr id="3" name="Content Placeholder 2"/>
-          <p:cNvSpPr>
-            <a:spLocks noGrp="1"/>
-          </p:cNvSpPr>
-          <p:nvPr>
-            <p:ph sz="half" idx="1"/>
-          </p:nvPr>
-        </p:nvSpPr>
-        <p:spPr/>
-        <p:txBody>
-          <a:bodyPr wrap="square"/>
-          <a:lstStyle/>
-          <a:p>
-            <a:r>
-              <a:rPr sz="1500" b="1"/>
-              <a:t>May 2013 correction: </a:t>
-            </a:r>
-            <a:r>
-              <a:rPr sz="1500"/>
-              <a:t>the old arithmetic underestimated harvest by ~16%; re-estimated day-by-day back to 1997-98.</a:t>
-            </a:r>
-          </a:p>
-          <a:p>
-            <a:r>
-              <a:rPr sz="1500"/>
-              <a:t>The correction factor, the share of a day's effort present at the count, is the load-bearing number.</a:t>
-            </a:r>
-          </a:p>
-          <a:p>
-            <a:r>
-              <a:rPr sz="1500" b="1"/>
-              <a:t>Long Beach's table was reshaped after 2013: </a:t>
-            </a:r>
-            <a:r>
-              <a:rPr sz="1500"/>
-              <a:t>+33% expanded effort for the same count.</a:t>
-            </a:r>
-          </a:p>
-          <a:p>
-            <a:r>
-              <a:rPr sz="1500"/>
-              <a:t>Comparing Long Beach effort across that change compares two different instruments.</a:t>
-            </a:r>
-          </a:p>
-        </p:txBody>
-      </p:sp>
-      <p:sp>
-        <p:nvSpPr>
-          <p:cNvPr id="5" name="Content Placeholder 4"/>
-          <p:cNvSpPr>
-            <a:spLocks noGrp="1"/>
-          </p:cNvSpPr>
-          <p:nvPr>
-            <p:ph sz="half" idx="11"/>
-          </p:nvPr>
-        </p:nvSpPr>
-        <p:spPr/>
-        <p:txBody>
-          <a:bodyPr/>
-          <a:lstStyle/>
-          <a:p>
-            <a:endParaRPr/>
+              <a:t>No joint donor under co-management</a:t>
+            </a:r>
           </a:p>
         </p:txBody>
       </p:sp>
       <p:pic>
         <p:nvPicPr>
-          <p:cNvPr id="6" name="Picture 5" descr="fig09_operational_vs_vintage.png"/>
+          <p:cNvPr id="3" name="Picture 2" descr="fig19_joint_donor.png"/>
           <p:cNvPicPr>
             <a:picLocks noChangeAspect="1"/>
           </p:cNvPicPr>
           <p:nvPr/>
         </p:nvPicPr>
         <p:blipFill>
-          <a:blip r:embed="rId3"/>
+          <a:blip r:embed="rId2"/>
           <a:stretch>
             <a:fillRect/>
           </a:stretch>
         </p:blipFill>
         <p:spPr>
           <a:xfrm>
-            <a:off x="6178610" y="1422412"/>
-            <a:ext cx="5403790" cy="3782653"/>
+            <a:off x="2180272" y="1417320"/>
+            <a:ext cx="7800975" cy="3840480"/>
           </a:xfrm>
           <a:prstGeom prst="rect">
             <a:avLst/>
           </a:prstGeom>
         </p:spPr>
       </p:pic>
+      <p:sp>
+        <p:nvSpPr>
+          <p:cNvPr id="4" name="TextBox 3"/>
+          <p:cNvSpPr txBox="1"/>
+          <p:nvPr/>
+        </p:nvSpPr>
+        <p:spPr>
+          <a:xfrm>
+            <a:off x="594360" y="5532120"/>
+            <a:ext cx="10972800" cy="822960"/>
+          </a:xfrm>
+          <a:prstGeom prst="rect">
+            <a:avLst/>
+          </a:prstGeom>
+          <a:noFill/>
+        </p:spPr>
+        <p:txBody>
+          <a:bodyPr wrap="square">
+            <a:spAutoFit/>
+          </a:bodyPr>
+          <a:lstStyle/>
+          <a:p>
+            <a:r>
+              <a:rPr b="1" sz="1300">
+                <a:solidFill>
+                  <a:srgbClr val="1B3A5C"/>
+                </a:solidFill>
+              </a:rPr>
+              <a:t>In plain terms:  </a:t>
+            </a:r>
+            <a:r>
+              <a:rPr sz="1300"/>
+              <a:t>co-management means the state counts only one northern beach per day, so the best (joint) donor cannot be built. Long Beach must borrow from a single northern beach, single-day error about 0.62, roughly 45% worse than the joint donor.</a:t>
+            </a:r>
+          </a:p>
+        </p:txBody>
+      </p:sp>
     </p:spTree>
   </p:cSld>
   <p:clrMapOvr>
@@ -6817,7 +7315,7 @@
 </file>
 
 <file path=ppt/slides/slide11.xml><?xml version="1.0" encoding="utf-8"?>
-<p:sld xmlns:a="http://schemas.openxmlformats.org/drawingml/2006/main" xmlns:r="http://schemas.openxmlformats.org/officeDocument/2006/relationships" xmlns:p="http://schemas.openxmlformats.org/presentationml/2006/main">
+<p:sld xmlns:a="http://schemas.openxmlformats.org/drawingml/2006/main" xmlns:p="http://schemas.openxmlformats.org/presentationml/2006/main" xmlns:r="http://schemas.openxmlformats.org/officeDocument/2006/relationships">
   <p:cSld>
     <p:spTree>
       <p:nvGrpSpPr>
@@ -6825,14 +7323,7 @@
         <p:cNvGrpSpPr/>
         <p:nvPr/>
       </p:nvGrpSpPr>
-      <p:grpSpPr>
-        <a:xfrm>
-          <a:off x="0" y="0"/>
-          <a:ext cx="0" cy="0"/>
-          <a:chOff x="0" y="0"/>
-          <a:chExt cx="0" cy="0"/>
-        </a:xfrm>
-      </p:grpSpPr>
+      <p:grpSpPr/>
       <p:sp>
         <p:nvSpPr>
           <p:cNvPr id="2" name="Title 1"/>
@@ -6849,102 +7340,72 @@
           <a:lstStyle/>
           <a:p>
             <a:r>
-              <a:t>The correction factor dominates, and it does not average down</a:t>
-            </a:r>
-          </a:p>
-        </p:txBody>
-      </p:sp>
-      <p:sp>
-        <p:nvSpPr>
-          <p:cNvPr id="3" name="Content Placeholder 2"/>
-          <p:cNvSpPr>
-            <a:spLocks noGrp="1"/>
-          </p:cNvSpPr>
-          <p:nvPr>
-            <p:ph sz="half" idx="1"/>
-          </p:nvPr>
-        </p:nvSpPr>
-        <p:spPr/>
-        <p:txBody>
-          <a:bodyPr wrap="square"/>
-          <a:lstStyle/>
-          <a:p>
-            <a:r>
-              <a:rPr sz="1500" b="1"/>
-              <a:t>71-96% of season effort variance </a:t>
-            </a:r>
-            <a:r>
-              <a:rPr sz="1500"/>
-              <a:t>at every beach is the correction factor.</a:t>
-            </a:r>
-          </a:p>
-          <a:p>
-            <a:r>
-              <a:rPr sz="1500"/>
-              <a:t>It is systematic: one table scales every beach-day, so counting more days cannot shrink it.</a:t>
-            </a:r>
-          </a:p>
-          <a:p>
-            <a:r>
-              <a:rPr sz="1500"/>
-              <a:t>Imputation is large on a single day but cancels within a tide series (lag-1 autocorrelation −0.68).</a:t>
-            </a:r>
-          </a:p>
-          <a:p>
-            <a:r>
-              <a:rPr sz="1500" b="1"/>
-              <a:t>The lever is surveys, not crew days </a:t>
-            </a:r>
-            <a:r>
-              <a:rPr sz="1500"/>
-              <a:t>for the term that dominates effort.</a:t>
-            </a:r>
-          </a:p>
-        </p:txBody>
-      </p:sp>
-      <p:sp>
-        <p:nvSpPr>
-          <p:cNvPr id="5" name="Content Placeholder 4"/>
-          <p:cNvSpPr>
-            <a:spLocks noGrp="1"/>
-          </p:cNvSpPr>
-          <p:nvPr>
-            <p:ph sz="half" idx="11"/>
-          </p:nvPr>
-        </p:nvSpPr>
-        <p:spPr/>
-        <p:txBody>
-          <a:bodyPr/>
-          <a:lstStyle/>
-          <a:p>
-            <a:endParaRPr/>
+              <a:t>Only 14% of Long Beach rests on a real count</a:t>
+            </a:r>
           </a:p>
         </p:txBody>
       </p:sp>
       <p:pic>
         <p:nvPicPr>
-          <p:cNvPr id="6" name="Picture 5" descr="fig10_variance_shares.png"/>
+          <p:cNvPr id="3" name="Picture 2" descr="fig20_longbeach_anatomy.png"/>
           <p:cNvPicPr>
             <a:picLocks noChangeAspect="1"/>
           </p:cNvPicPr>
           <p:nvPr/>
         </p:nvPicPr>
         <p:blipFill>
-          <a:blip r:embed="rId3"/>
+          <a:blip r:embed="rId2"/>
           <a:stretch>
             <a:fillRect/>
           </a:stretch>
         </p:blipFill>
         <p:spPr>
           <a:xfrm>
-            <a:off x="6178610" y="1839978"/>
-            <a:ext cx="5403790" cy="2947521"/>
+            <a:off x="2788920" y="1417320"/>
+            <a:ext cx="6583680" cy="3840480"/>
           </a:xfrm>
           <a:prstGeom prst="rect">
             <a:avLst/>
           </a:prstGeom>
         </p:spPr>
       </p:pic>
+      <p:sp>
+        <p:nvSpPr>
+          <p:cNvPr id="4" name="TextBox 3"/>
+          <p:cNvSpPr txBox="1"/>
+          <p:nvPr/>
+        </p:nvSpPr>
+        <p:spPr>
+          <a:xfrm>
+            <a:off x="594360" y="5532120"/>
+            <a:ext cx="10972800" cy="822960"/>
+          </a:xfrm>
+          <a:prstGeom prst="rect">
+            <a:avLst/>
+          </a:prstGeom>
+          <a:noFill/>
+        </p:spPr>
+        <p:txBody>
+          <a:bodyPr wrap="square">
+            <a:spAutoFit/>
+          </a:bodyPr>
+          <a:lstStyle/>
+          <a:p>
+            <a:r>
+              <a:rPr b="1" sz="1300">
+                <a:solidFill>
+                  <a:srgbClr val="1B3A5C"/>
+                </a:solidFill>
+              </a:rPr>
+              <a:t>In plain terms:  </a:t>
+            </a:r>
+            <a:r>
+              <a:rPr sz="1300"/>
+              <a:t>28 miles walked in two halves; only 13.8% of 2025-26 effort rests on a full count. The correction factor, the section split, and the whole-beach total are each assumed, not measured.</a:t>
+            </a:r>
+          </a:p>
+        </p:txBody>
+      </p:sp>
     </p:spTree>
   </p:cSld>
   <p:clrMapOvr>
@@ -6954,7 +7415,7 @@
 </file>
 
 <file path=ppt/slides/slide12.xml><?xml version="1.0" encoding="utf-8"?>
-<p:sld xmlns:a="http://schemas.openxmlformats.org/drawingml/2006/main" xmlns:r="http://schemas.openxmlformats.org/officeDocument/2006/relationships" xmlns:p="http://schemas.openxmlformats.org/presentationml/2006/main">
+<p:sld xmlns:a="http://schemas.openxmlformats.org/drawingml/2006/main" xmlns:p="http://schemas.openxmlformats.org/presentationml/2006/main" xmlns:r="http://schemas.openxmlformats.org/officeDocument/2006/relationships">
   <p:cSld>
     <p:spTree>
       <p:nvGrpSpPr>
@@ -6962,14 +7423,7 @@
         <p:cNvGrpSpPr/>
         <p:nvPr/>
       </p:nvGrpSpPr>
-      <p:grpSpPr>
-        <a:xfrm>
-          <a:off x="0" y="0"/>
-          <a:ext cx="0" cy="0"/>
-          <a:chOff x="0" y="0"/>
-          <a:chExt cx="0" cy="0"/>
-        </a:xfrm>
-      </p:grpSpPr>
+      <p:grpSpPr/>
       <p:sp>
         <p:nvSpPr>
           <p:cNvPr id="2" name="Title 1"/>
@@ -6977,7 +7431,7 @@
             <a:spLocks noGrp="1"/>
           </p:cNvSpPr>
           <p:nvPr>
-            <p:ph type="title"/>
+            <p:ph type="ctrTitle"/>
           </p:nvPr>
         </p:nvSpPr>
         <p:spPr/>
@@ -6986,61 +7440,37 @@
           <a:lstStyle/>
           <a:p>
             <a:r>
-              <a:t>For harvest, borrowed catch rate is the largest term up north</a:t>
-            </a:r>
-          </a:p>
-        </p:txBody>
-      </p:sp>
-      <p:sp>
-        <p:nvSpPr>
-          <p:cNvPr id="3" name="Content Placeholder 2"/>
-          <p:cNvSpPr>
-            <a:spLocks noGrp="1"/>
-          </p:cNvSpPr>
-          <p:nvPr>
-            <p:ph sz="half" idx="1"/>
-          </p:nvPr>
-        </p:nvSpPr>
-        <p:spPr/>
-        <p:txBody>
-          <a:bodyPr wrap="square"/>
-          <a:lstStyle/>
-          <a:p>
-            <a:r>
-              <a:rPr sz="1500" b="1"/>
-              <a:t>CPUE transfer (borrowed catch rate on uncounted days): </a:t>
-            </a:r>
-            <a:r>
-              <a:rPr sz="1500"/>
-              <a:t>39% of harvest variance at Long Beach, 56% at Twin Harbors.</a:t>
-            </a:r>
-          </a:p>
-          <a:p>
-            <a:r>
-              <a:rPr sz="1500"/>
-              <a:t>Single-day imputation error is large (sd 0.54 in log) but roughly unbiased and cancels when summed.</a:t>
-            </a:r>
-          </a:p>
-          <a:p>
-            <a:r>
-              <a:rPr sz="1500" b="1"/>
-              <a:t>Best donor for the two northern beaches: </a:t>
-            </a:r>
-            <a:r>
-              <a:rPr sz="1500"/>
-              <a:t>Copalis and Mocrocks jointly (sd 0.43 / 0.37).</a:t>
-            </a:r>
-          </a:p>
-        </p:txBody>
-      </p:sp>
-      <p:sp>
-        <p:nvSpPr>
-          <p:cNvPr id="5" name="Content Placeholder 4"/>
-          <p:cNvSpPr>
-            <a:spLocks noGrp="1"/>
-          </p:cNvSpPr>
-          <p:nvPr>
-            <p:ph sz="half" idx="11"/>
+              <a:t>3.  Impact of budget reduction</a:t>
+            </a:r>
+          </a:p>
+        </p:txBody>
+      </p:sp>
+    </p:spTree>
+  </p:cSld>
+  <p:clrMapOvr>
+    <a:masterClrMapping/>
+  </p:clrMapOvr>
+</p:sld>
+</file>
+
+<file path=ppt/slides/slide13.xml><?xml version="1.0" encoding="utf-8"?>
+<p:sld xmlns:a="http://schemas.openxmlformats.org/drawingml/2006/main" xmlns:p="http://schemas.openxmlformats.org/presentationml/2006/main" xmlns:r="http://schemas.openxmlformats.org/officeDocument/2006/relationships">
+  <p:cSld>
+    <p:spTree>
+      <p:nvGrpSpPr>
+        <p:cNvPr id="1" name=""/>
+        <p:cNvGrpSpPr/>
+        <p:nvPr/>
+      </p:nvGrpSpPr>
+      <p:grpSpPr/>
+      <p:sp>
+        <p:nvSpPr>
+          <p:cNvPr id="2" name="Title 1"/>
+          <p:cNvSpPr>
+            <a:spLocks noGrp="1"/>
+          </p:cNvSpPr>
+          <p:nvPr>
+            <p:ph type="title"/>
           </p:nvPr>
         </p:nvSpPr>
         <p:spPr/>
@@ -7048,20 +7478,416 @@
           <a:bodyPr/>
           <a:lstStyle/>
           <a:p>
-            <a:endParaRPr/>
+            <a:r>
+              <a:t>What a budget cut does to Long Beach</a:t>
+            </a:r>
           </a:p>
         </p:txBody>
       </p:sp>
       <p:pic>
         <p:nvPicPr>
-          <p:cNvPr id="6" name="Picture 5" descr="fig11_imputation_error.png"/>
+          <p:cNvPr id="3" name="Picture 2" descr="fig21_budget_cut.png"/>
           <p:cNvPicPr>
             <a:picLocks noChangeAspect="1"/>
           </p:cNvPicPr>
           <p:nvPr/>
         </p:nvPicPr>
         <p:blipFill>
-          <a:blip r:embed="rId3"/>
+          <a:blip r:embed="rId2"/>
+          <a:stretch>
+            <a:fillRect/>
+          </a:stretch>
+        </p:blipFill>
+        <p:spPr>
+          <a:xfrm>
+            <a:off x="2298469" y="1417320"/>
+            <a:ext cx="7564581" cy="3840480"/>
+          </a:xfrm>
+          <a:prstGeom prst="rect">
+            <a:avLst/>
+          </a:prstGeom>
+        </p:spPr>
+      </p:pic>
+      <p:sp>
+        <p:nvSpPr>
+          <p:cNvPr id="4" name="TextBox 3"/>
+          <p:cNvSpPr txBox="1"/>
+          <p:nvPr/>
+        </p:nvSpPr>
+        <p:spPr>
+          <a:xfrm>
+            <a:off x="594360" y="5532120"/>
+            <a:ext cx="10972800" cy="822960"/>
+          </a:xfrm>
+          <a:prstGeom prst="rect">
+            <a:avLst/>
+          </a:prstGeom>
+          <a:noFill/>
+        </p:spPr>
+        <p:txBody>
+          <a:bodyPr wrap="square">
+            <a:spAutoFit/>
+          </a:bodyPr>
+          <a:lstStyle/>
+          <a:p>
+            <a:r>
+              <a:rPr b="1" sz="1250">
+                <a:solidFill>
+                  <a:srgbClr val="1B3A5C"/>
+                </a:solidFill>
+              </a:rPr>
+              <a:t>In plain terms:  </a:t>
+            </a:r>
+            <a:r>
+              <a:rPr sz="1250"/>
+              <a:t>if cuts leave Long Beach 100% imputed, its season effort CV rises from about 9% to about 32%. Most of that increase is systematic: Long Beach does not track the northern beaches (ratio swings 31%), and no amount of donor sampling fixes it.</a:t>
+            </a:r>
+          </a:p>
+        </p:txBody>
+      </p:sp>
+    </p:spTree>
+  </p:cSld>
+  <p:clrMapOvr>
+    <a:masterClrMapping/>
+  </p:clrMapOvr>
+</p:sld>
+</file>
+
+<file path=ppt/slides/slide14.xml><?xml version="1.0" encoding="utf-8"?>
+<p:sld xmlns:a="http://schemas.openxmlformats.org/drawingml/2006/main" xmlns:p="http://schemas.openxmlformats.org/presentationml/2006/main" xmlns:r="http://schemas.openxmlformats.org/officeDocument/2006/relationships">
+  <p:cSld>
+    <p:spTree>
+      <p:nvGrpSpPr>
+        <p:cNvPr id="1" name=""/>
+        <p:cNvGrpSpPr/>
+        <p:nvPr/>
+      </p:nvGrpSpPr>
+      <p:grpSpPr/>
+      <p:sp>
+        <p:nvSpPr>
+          <p:cNvPr id="2" name="Title 1"/>
+          <p:cNvSpPr>
+            <a:spLocks noGrp="1"/>
+          </p:cNvSpPr>
+          <p:nvPr>
+            <p:ph type="title"/>
+          </p:nvPr>
+        </p:nvSpPr>
+        <p:spPr/>
+        <p:txBody>
+          <a:bodyPr/>
+          <a:lstStyle/>
+          <a:p>
+            <a:r>
+              <a:t>What a reduction actually costs</a:t>
+            </a:r>
+          </a:p>
+        </p:txBody>
+      </p:sp>
+      <p:sp>
+        <p:nvSpPr>
+          <p:cNvPr id="3" name="Content Placeholder 2"/>
+          <p:cNvSpPr>
+            <a:spLocks noGrp="1"/>
+          </p:cNvSpPr>
+          <p:nvPr>
+            <p:ph idx="1"/>
+          </p:nvPr>
+        </p:nvSpPr>
+        <p:spPr/>
+        <p:txBody>
+          <a:bodyPr wrap="square"/>
+          <a:lstStyle/>
+          <a:p>
+            <a:r>
+              <a:rPr b="1" sz="1500"/>
+              <a:t>The cheap beaches are already efficient. </a:t>
+            </a:r>
+            <a:r>
+              <a:rPr sz="1500"/>
+              <a:t>Copalis and Mocrocks are counted every open day and sit near 6-9% CV; cutting them saves little and loses the donor the south depends on.</a:t>
+            </a:r>
+          </a:p>
+          <a:p>
+            <a:r>
+              <a:rPr b="1" sz="1500"/>
+              <a:t>The expensive uncertainty is at Long Beach and Twin Harbors, </a:t>
+            </a:r>
+            <a:r>
+              <a:rPr sz="1500"/>
+              <a:t>the two beaches already most imputed. Cutting them is where a budget reduction bites hardest.</a:t>
+            </a:r>
+          </a:p>
+          <a:p>
+            <a:r>
+              <a:rPr b="1" sz="1500"/>
+              <a:t>Imputation is not a free substitute for counting. </a:t>
+            </a:r>
+            <a:r>
+              <a:rPr sz="1500"/>
+              <a:t>At 100% imputation Long Beach's uncertainty is dominated by a systematic term that more donor sampling cannot reduce.</a:t>
+            </a:r>
+          </a:p>
+          <a:p>
+            <a:r>
+              <a:rPr b="1" sz="1500"/>
+              <a:t>A reduction is therefore a choice about which beach's estimate to weaken, </a:t>
+            </a:r>
+            <a:r>
+              <a:rPr sz="1500"/>
+              <a:t>not a uniform trim. The next section is where a smaller budget should go.</a:t>
+            </a:r>
+          </a:p>
+        </p:txBody>
+      </p:sp>
+    </p:spTree>
+  </p:cSld>
+  <p:clrMapOvr>
+    <a:masterClrMapping/>
+  </p:clrMapOvr>
+</p:sld>
+</file>
+
+<file path=ppt/slides/slide15.xml><?xml version="1.0" encoding="utf-8"?>
+<p:sld xmlns:a="http://schemas.openxmlformats.org/drawingml/2006/main" xmlns:p="http://schemas.openxmlformats.org/presentationml/2006/main" xmlns:r="http://schemas.openxmlformats.org/officeDocument/2006/relationships">
+  <p:cSld>
+    <p:spTree>
+      <p:nvGrpSpPr>
+        <p:cNvPr id="1" name=""/>
+        <p:cNvGrpSpPr/>
+        <p:nvPr/>
+      </p:nvGrpSpPr>
+      <p:grpSpPr/>
+      <p:sp>
+        <p:nvSpPr>
+          <p:cNvPr id="2" name="Title 1"/>
+          <p:cNvSpPr>
+            <a:spLocks noGrp="1"/>
+          </p:cNvSpPr>
+          <p:nvPr>
+            <p:ph type="ctrTitle"/>
+          </p:nvPr>
+        </p:nvSpPr>
+        <p:spPr/>
+        <p:txBody>
+          <a:bodyPr/>
+          <a:lstStyle/>
+          <a:p>
+            <a:r>
+              <a:t>4.  Data needs; a re-imagined framework</a:t>
+            </a:r>
+          </a:p>
+        </p:txBody>
+      </p:sp>
+    </p:spTree>
+  </p:cSld>
+  <p:clrMapOvr>
+    <a:masterClrMapping/>
+  </p:clrMapOvr>
+</p:sld>
+</file>
+
+<file path=ppt/slides/slide16.xml><?xml version="1.0" encoding="utf-8"?>
+<p:sld xmlns:a="http://schemas.openxmlformats.org/drawingml/2006/main" xmlns:p="http://schemas.openxmlformats.org/presentationml/2006/main" xmlns:r="http://schemas.openxmlformats.org/officeDocument/2006/relationships">
+  <p:cSld>
+    <p:spTree>
+      <p:nvGrpSpPr>
+        <p:cNvPr id="1" name=""/>
+        <p:cNvGrpSpPr/>
+        <p:nvPr/>
+      </p:nvGrpSpPr>
+      <p:grpSpPr/>
+      <p:sp>
+        <p:nvSpPr>
+          <p:cNvPr id="2" name="Title 1"/>
+          <p:cNvSpPr>
+            <a:spLocks noGrp="1"/>
+          </p:cNvSpPr>
+          <p:nvPr>
+            <p:ph type="title"/>
+          </p:nvPr>
+        </p:nvSpPr>
+        <p:spPr/>
+        <p:txBody>
+          <a:bodyPr/>
+          <a:lstStyle/>
+          <a:p>
+            <a:r>
+              <a:t>A re-imagined monitoring framework, in one page</a:t>
+            </a:r>
+          </a:p>
+        </p:txBody>
+      </p:sp>
+      <p:sp>
+        <p:nvSpPr>
+          <p:cNvPr id="3" name="Content Placeholder 2"/>
+          <p:cNvSpPr>
+            <a:spLocks noGrp="1"/>
+          </p:cNvSpPr>
+          <p:nvPr>
+            <p:ph idx="1"/>
+          </p:nvPr>
+        </p:nvSpPr>
+        <p:spPr/>
+        <p:txBody>
+          <a:bodyPr wrap="square"/>
+          <a:lstStyle/>
+          <a:p>
+            <a:r>
+              <a:rPr b="1" sz="1500"/>
+              <a:t>Survey the term that dominates. </a:t>
+            </a:r>
+            <a:r>
+              <a:rPr sz="1500"/>
+              <a:t>The correction factor is the largest error everywhere; egress surveys, not more counted days, are the lever. Priority: Long Beach and Twin Harbors, whose tables are the oldest and thinnest.</a:t>
+            </a:r>
+          </a:p>
+          <a:p>
+            <a:r>
+              <a:rPr b="1" sz="1500"/>
+              <a:t>Count enough days, and the right days. </a:t>
+            </a:r>
+            <a:r>
+              <a:rPr sz="1500"/>
+              <a:t>About 45% of a beach's open days, largest-effort first, meets a published precision standard; below that, imputation error grows.</a:t>
+            </a:r>
+          </a:p>
+          <a:p>
+            <a:r>
+              <a:rPr b="1" sz="1500"/>
+              <a:t>Protect the donor. </a:t>
+            </a:r>
+            <a:r>
+              <a:rPr sz="1500"/>
+              <a:t>Keep one of Copalis or Mocrocks counted every dig day (the co-management floor); the joint donor is gone, so the single donor must at least be current.</a:t>
+            </a:r>
+          </a:p>
+          <a:p>
+            <a:r>
+              <a:rPr b="1" sz="1500"/>
+              <a:t>Anchor the imputed beaches with their own data. </a:t>
+            </a:r>
+            <a:r>
+              <a:rPr sz="1500"/>
+              <a:t>A whole-beach Long Beach pilot replaces three stacked assumptions with one measurement and calibrates cheap partial surveys for later.</a:t>
+            </a:r>
+          </a:p>
+        </p:txBody>
+      </p:sp>
+    </p:spTree>
+  </p:cSld>
+  <p:clrMapOvr>
+    <a:masterClrMapping/>
+  </p:clrMapOvr>
+</p:sld>
+</file>
+
+<file path=ppt/slides/slide17.xml><?xml version="1.0" encoding="utf-8"?>
+<p:sld xmlns:a="http://schemas.openxmlformats.org/drawingml/2006/main" xmlns:p="http://schemas.openxmlformats.org/presentationml/2006/main" xmlns:r="http://schemas.openxmlformats.org/officeDocument/2006/relationships">
+  <p:cSld>
+    <p:spTree>
+      <p:nvGrpSpPr>
+        <p:cNvPr id="1" name=""/>
+        <p:cNvGrpSpPr/>
+        <p:nvPr/>
+      </p:nvGrpSpPr>
+      <p:grpSpPr/>
+      <p:sp>
+        <p:nvSpPr>
+          <p:cNvPr id="2" name="Title 1"/>
+          <p:cNvSpPr>
+            <a:spLocks noGrp="1"/>
+          </p:cNvSpPr>
+          <p:nvPr>
+            <p:ph type="title"/>
+          </p:nvPr>
+        </p:nvSpPr>
+        <p:spPr/>
+        <p:txBody>
+          <a:bodyPr/>
+          <a:lstStyle/>
+          <a:p>
+            <a:r>
+              <a:t>Run egress surveys at Long Beach and Twin Harbors</a:t>
+            </a:r>
+          </a:p>
+        </p:txBody>
+      </p:sp>
+      <p:sp>
+        <p:nvSpPr>
+          <p:cNvPr id="3" name="Content Placeholder 2"/>
+          <p:cNvSpPr>
+            <a:spLocks noGrp="1"/>
+          </p:cNvSpPr>
+          <p:nvPr>
+            <p:ph idx="1" sz="half"/>
+          </p:nvPr>
+        </p:nvSpPr>
+        <p:spPr/>
+        <p:txBody>
+          <a:bodyPr wrap="square"/>
+          <a:lstStyle/>
+          <a:p>
+            <a:r>
+              <a:rPr sz="1500"/>
+              <a:t>The correction factor is the largest term, and these two beaches now carry the worst of it.</a:t>
+            </a:r>
+          </a:p>
+          <a:p>
+            <a:r>
+              <a:rPr b="1" sz="1500"/>
+              <a:t>Newest survey: 2011. </a:t>
+            </a:r>
+            <a:r>
+              <a:rPr sz="1500"/>
+              <a:t>Twin Harbors evening rests on just two surveys.</a:t>
+            </a:r>
+          </a:p>
+          <a:p>
+            <a:r>
+              <a:rPr sz="1500"/>
+              <a:t>Copalis and Mocrocks were resurveyed 2022-2026 and no longer need egress effort.</a:t>
+            </a:r>
+          </a:p>
+          <a:p>
+            <a:r>
+              <a:rPr b="1" sz="1500"/>
+              <a:t>The single most valuable unpurchased input </a:t>
+            </a:r>
+            <a:r>
+              <a:rPr sz="1500"/>
+              <a:t>in the program.</a:t>
+            </a:r>
+          </a:p>
+        </p:txBody>
+      </p:sp>
+      <p:sp>
+        <p:nvSpPr>
+          <p:cNvPr id="5" name="Content Placeholder 4"/>
+          <p:cNvSpPr>
+            <a:spLocks noGrp="1"/>
+          </p:cNvSpPr>
+          <p:nvPr>
+            <p:ph idx="11" sz="half"/>
+          </p:nvPr>
+        </p:nvSpPr>
+        <p:spPr/>
+        <p:txBody>
+          <a:bodyPr/>
+          <a:lstStyle/>
+          <a:p/>
+        </p:txBody>
+      </p:sp>
+      <p:pic>
+        <p:nvPicPr>
+          <p:cNvPr id="6" name="Picture 5" descr="fig08_located_egress_surveys.png"/>
+          <p:cNvPicPr>
+            <a:picLocks noChangeAspect="1"/>
+          </p:cNvPicPr>
+          <p:nvPr/>
+        </p:nvPicPr>
+        <p:blipFill>
+          <a:blip r:embed="rId2"/>
           <a:stretch>
             <a:fillRect/>
           </a:stretch>
@@ -7084,8 +7910,8 @@
 </p:sld>
 </file>
 
-<file path=ppt/slides/slide13.xml><?xml version="1.0" encoding="utf-8"?>
-<p:sld xmlns:a="http://schemas.openxmlformats.org/drawingml/2006/main" xmlns:r="http://schemas.openxmlformats.org/officeDocument/2006/relationships" xmlns:p="http://schemas.openxmlformats.org/presentationml/2006/main">
+<file path=ppt/slides/slide18.xml><?xml version="1.0" encoding="utf-8"?>
+<p:sld xmlns:a="http://schemas.openxmlformats.org/drawingml/2006/main" xmlns:p="http://schemas.openxmlformats.org/presentationml/2006/main" xmlns:r="http://schemas.openxmlformats.org/officeDocument/2006/relationships">
   <p:cSld>
     <p:spTree>
       <p:nvGrpSpPr>
@@ -7093,14 +7919,7 @@
         <p:cNvGrpSpPr/>
         <p:nvPr/>
       </p:nvGrpSpPr>
-      <p:grpSpPr>
-        <a:xfrm>
-          <a:off x="0" y="0"/>
-          <a:ext cx="0" cy="0"/>
-          <a:chOff x="0" y="0"/>
-          <a:chExt cx="0" cy="0"/>
-        </a:xfrm>
-      </p:grpSpPr>
+      <p:grpSpPr/>
       <p:sp>
         <p:nvSpPr>
           <p:cNvPr id="2" name="Title 1"/>
@@ -7108,7 +7927,7 @@
             <a:spLocks noGrp="1"/>
           </p:cNvSpPr>
           <p:nvPr>
-            <p:ph type="ctrTitle"/>
+            <p:ph type="title"/>
           </p:nvPr>
         </p:nvSpPr>
         <p:spPr/>
@@ -7117,7 +7936,374 @@
           <a:lstStyle/>
           <a:p>
             <a:r>
-              <a:t>How many days, and which ones</a:t>
+              <a:t>The Long Beach pilot: whole-beach egress across six approaches</a:t>
+            </a:r>
+          </a:p>
+        </p:txBody>
+      </p:sp>
+      <p:graphicFrame>
+        <p:nvGraphicFramePr>
+          <p:cNvPr id="3" name="Table 2"/>
+          <p:cNvGraphicFramePr>
+            <a:graphicFrameLocks noGrp="1"/>
+          </p:cNvGraphicFramePr>
+          <p:nvPr/>
+        </p:nvGraphicFramePr>
+        <p:xfrm>
+          <a:off x="594360" y="1325880"/>
+          <a:ext cx="10607040" cy="2560320"/>
+        </p:xfrm>
+        <a:graphic>
+          <a:graphicData uri="http://schemas.openxmlformats.org/drawingml/2006/table">
+            <a:tbl>
+              <a:tblPr firstRow="1" bandRow="1">
+                <a:tableStyleId>{5C22544A-7EE6-4342-B048-85BDC9FD1C3A}</a:tableStyleId>
+              </a:tblPr>
+              <a:tblGrid>
+                <a:gridCol w="3657600"/>
+                <a:gridCol w="4937760"/>
+                <a:gridCol w="2011680"/>
+              </a:tblGrid>
+              <a:tr h="365760">
+                <a:tc>
+                  <a:txBody>
+                    <a:bodyPr/>
+                    <a:lstStyle/>
+                    <a:p>
+                      <a:r>
+                        <a:rPr sz="1300" b="1">
+                          <a:solidFill>
+                            <a:srgbClr val="FFFFFF"/>
+                          </a:solidFill>
+                        </a:rPr>
+                        <a:t>Vehicle approach  (south to north)</a:t>
+                      </a:r>
+                    </a:p>
+                  </a:txBody>
+                  <a:tcPr>
+                    <a:solidFill>
+                      <a:srgbClr val="1B3A5C"/>
+                    </a:solidFill>
+                  </a:tcPr>
+                </a:tc>
+                <a:tc>
+                  <a:txBody>
+                    <a:bodyPr/>
+                    <a:lstStyle/>
+                    <a:p>
+                      <a:r>
+                        <a:rPr sz="1300" b="1">
+                          <a:solidFill>
+                            <a:srgbClr val="FFFFFF"/>
+                          </a:solidFill>
+                        </a:rPr>
+                        <a:t>Historical egress coverage</a:t>
+                      </a:r>
+                    </a:p>
+                  </a:txBody>
+                  <a:tcPr>
+                    <a:solidFill>
+                      <a:srgbClr val="1B3A5C"/>
+                    </a:solidFill>
+                  </a:tcPr>
+                </a:tc>
+                <a:tc>
+                  <a:txBody>
+                    <a:bodyPr/>
+                    <a:lstStyle/>
+                    <a:p>
+                      <a:r>
+                        <a:rPr sz="1300" b="1">
+                          <a:solidFill>
+                            <a:srgbClr val="FFFFFF"/>
+                          </a:solidFill>
+                        </a:rPr>
+                        <a:t>Pilot role</a:t>
+                      </a:r>
+                    </a:p>
+                  </a:txBody>
+                  <a:tcPr>
+                    <a:solidFill>
+                      <a:srgbClr val="1B3A5C"/>
+                    </a:solidFill>
+                  </a:tcPr>
+                </a:tc>
+              </a:tr>
+              <a:tr h="365760">
+                <a:tc>
+                  <a:txBody>
+                    <a:bodyPr/>
+                    <a:lstStyle/>
+                    <a:p>
+                      <a:r>
+                        <a:rPr sz="1200"/>
+                        <a:t>Seaview</a:t>
+                      </a:r>
+                    </a:p>
+                  </a:txBody>
+                  <a:tcPr/>
+                </a:tc>
+                <a:tc>
+                  <a:txBody>
+                    <a:bodyPr/>
+                    <a:lstStyle/>
+                    <a:p>
+                      <a:r>
+                        <a:rPr sz="1200"/>
+                        <a:t>2004 only (south to Beards Hollow)</a:t>
+                      </a:r>
+                    </a:p>
+                  </a:txBody>
+                  <a:tcPr/>
+                </a:tc>
+                <a:tc>
+                  <a:txBody>
+                    <a:bodyPr/>
+                    <a:lstStyle/>
+                    <a:p>
+                      <a:r>
+                        <a:rPr sz="1200"/>
+                        <a:t>Counter</a:t>
+                      </a:r>
+                    </a:p>
+                  </a:txBody>
+                  <a:tcPr/>
+                </a:tc>
+              </a:tr>
+              <a:tr h="365760">
+                <a:tc>
+                  <a:txBody>
+                    <a:bodyPr/>
+                    <a:lstStyle/>
+                    <a:p>
+                      <a:r>
+                        <a:rPr sz="1200"/>
+                        <a:t>Long Beach (Bolstad)</a:t>
+                      </a:r>
+                    </a:p>
+                  </a:txBody>
+                  <a:tcPr/>
+                </a:tc>
+                <a:tc>
+                  <a:txBody>
+                    <a:bodyPr/>
+                    <a:lstStyle/>
+                    <a:p>
+                      <a:r>
+                        <a:rPr sz="1200"/>
+                        <a:t>never counted</a:t>
+                      </a:r>
+                    </a:p>
+                  </a:txBody>
+                  <a:tcPr/>
+                </a:tc>
+                <a:tc>
+                  <a:txBody>
+                    <a:bodyPr/>
+                    <a:lstStyle/>
+                    <a:p>
+                      <a:r>
+                        <a:rPr sz="1200"/>
+                        <a:t>Counter</a:t>
+                      </a:r>
+                    </a:p>
+                  </a:txBody>
+                  <a:tcPr/>
+                </a:tc>
+              </a:tr>
+              <a:tr h="365760">
+                <a:tc>
+                  <a:txBody>
+                    <a:bodyPr/>
+                    <a:lstStyle/>
+                    <a:p>
+                      <a:r>
+                        <a:rPr sz="1200"/>
+                        <a:t>Cranberry</a:t>
+                      </a:r>
+                    </a:p>
+                  </a:txBody>
+                  <a:tcPr/>
+                </a:tc>
+                <a:tc>
+                  <a:txBody>
+                    <a:bodyPr/>
+                    <a:lstStyle/>
+                    <a:p>
+                      <a:r>
+                        <a:rPr sz="1200"/>
+                        <a:t>never counted</a:t>
+                      </a:r>
+                    </a:p>
+                  </a:txBody>
+                  <a:tcPr/>
+                </a:tc>
+                <a:tc>
+                  <a:txBody>
+                    <a:bodyPr/>
+                    <a:lstStyle/>
+                    <a:p>
+                      <a:r>
+                        <a:rPr sz="1200"/>
+                        <a:t>Counter</a:t>
+                      </a:r>
+                    </a:p>
+                  </a:txBody>
+                  <a:tcPr/>
+                </a:tc>
+              </a:tr>
+              <a:tr h="365760">
+                <a:tc>
+                  <a:txBody>
+                    <a:bodyPr/>
+                    <a:lstStyle/>
+                    <a:p>
+                      <a:r>
+                        <a:rPr sz="1200"/>
+                        <a:t>Klipsan</a:t>
+                      </a:r>
+                    </a:p>
+                  </a:txBody>
+                  <a:tcPr/>
+                </a:tc>
+                <a:tc>
+                  <a:txBody>
+                    <a:bodyPr/>
+                    <a:lstStyle/>
+                    <a:p>
+                      <a:r>
+                        <a:rPr sz="1200"/>
+                        <a:t>never counted</a:t>
+                      </a:r>
+                    </a:p>
+                  </a:txBody>
+                  <a:tcPr/>
+                </a:tc>
+                <a:tc>
+                  <a:txBody>
+                    <a:bodyPr/>
+                    <a:lstStyle/>
+                    <a:p>
+                      <a:r>
+                        <a:rPr sz="1200"/>
+                        <a:t>Counter</a:t>
+                      </a:r>
+                    </a:p>
+                  </a:txBody>
+                  <a:tcPr/>
+                </a:tc>
+              </a:tr>
+              <a:tr h="365760">
+                <a:tc>
+                  <a:txBody>
+                    <a:bodyPr/>
+                    <a:lstStyle/>
+                    <a:p>
+                      <a:r>
+                        <a:rPr sz="1200"/>
+                        <a:t>Ocean Park</a:t>
+                      </a:r>
+                    </a:p>
+                  </a:txBody>
+                  <a:tcPr/>
+                </a:tc>
+                <a:tc>
+                  <a:txBody>
+                    <a:bodyPr/>
+                    <a:lstStyle/>
+                    <a:p>
+                      <a:r>
+                        <a:rPr sz="1200"/>
+                        <a:t>never counted</a:t>
+                      </a:r>
+                    </a:p>
+                  </a:txBody>
+                  <a:tcPr/>
+                </a:tc>
+                <a:tc>
+                  <a:txBody>
+                    <a:bodyPr/>
+                    <a:lstStyle/>
+                    <a:p>
+                      <a:r>
+                        <a:rPr sz="1200"/>
+                        <a:t>Counter</a:t>
+                      </a:r>
+                    </a:p>
+                  </a:txBody>
+                  <a:tcPr/>
+                </a:tc>
+              </a:tr>
+              <a:tr h="365760">
+                <a:tc>
+                  <a:txBody>
+                    <a:bodyPr/>
+                    <a:lstStyle/>
+                    <a:p>
+                      <a:r>
+                        <a:rPr sz="1200"/>
+                        <a:t>Oysterville</a:t>
+                      </a:r>
+                    </a:p>
+                  </a:txBody>
+                  <a:tcPr/>
+                </a:tc>
+                <a:tc>
+                  <a:txBody>
+                    <a:bodyPr/>
+                    <a:lstStyle/>
+                    <a:p>
+                      <a:r>
+                        <a:rPr sz="1200"/>
+                        <a:t>1990, 1998, 2004, 2011 (north to Leadbetter)</a:t>
+                      </a:r>
+                    </a:p>
+                  </a:txBody>
+                  <a:tcPr/>
+                </a:tc>
+                <a:tc>
+                  <a:txBody>
+                    <a:bodyPr/>
+                    <a:lstStyle/>
+                    <a:p>
+                      <a:r>
+                        <a:rPr sz="1200"/>
+                        <a:t>Counter</a:t>
+                      </a:r>
+                    </a:p>
+                  </a:txBody>
+                  <a:tcPr/>
+                </a:tc>
+              </a:tr>
+            </a:tbl>
+          </a:graphicData>
+        </a:graphic>
+      </p:graphicFrame>
+      <p:sp>
+        <p:nvSpPr>
+          <p:cNvPr id="4" name="TextBox 3"/>
+          <p:cNvSpPr txBox="1"/>
+          <p:nvPr/>
+        </p:nvSpPr>
+        <p:spPr>
+          <a:xfrm>
+            <a:off x="594360" y="4297680"/>
+            <a:ext cx="10972800" cy="1554480"/>
+          </a:xfrm>
+          <a:prstGeom prst="rect">
+            <a:avLst/>
+          </a:prstGeom>
+          <a:noFill/>
+        </p:spPr>
+        <p:txBody>
+          <a:bodyPr wrap="square">
+            <a:spAutoFit/>
+          </a:bodyPr>
+          <a:lstStyle/>
+          <a:p>
+            <a:r>
+              <a:rPr sz="1300"/>
+              <a:t>One counter per approach records cars on and off in 15-minute bins across the tidal window. Four of the six approaches have never been counted, and no survey has ever counted all six on the same day. This is the first whole-beach measurement, and it retires the section-ratio and CF-from-one-end assumptions.</a:t>
             </a:r>
           </a:p>
         </p:txBody>
@@ -7130,8 +8316,8 @@
 </p:sld>
 </file>
 
-<file path=ppt/slides/slide14.xml><?xml version="1.0" encoding="utf-8"?>
-<p:sld xmlns:a="http://schemas.openxmlformats.org/drawingml/2006/main" xmlns:r="http://schemas.openxmlformats.org/officeDocument/2006/relationships" xmlns:p="http://schemas.openxmlformats.org/presentationml/2006/main">
+<file path=ppt/slides/slide19.xml><?xml version="1.0" encoding="utf-8"?>
+<p:sld xmlns:a="http://schemas.openxmlformats.org/drawingml/2006/main" xmlns:p="http://schemas.openxmlformats.org/presentationml/2006/main" xmlns:r="http://schemas.openxmlformats.org/officeDocument/2006/relationships">
   <p:cSld>
     <p:spTree>
       <p:nvGrpSpPr>
@@ -7139,14 +8325,7 @@
         <p:cNvGrpSpPr/>
         <p:nvPr/>
       </p:nvGrpSpPr>
-      <p:grpSpPr>
-        <a:xfrm>
-          <a:off x="0" y="0"/>
-          <a:ext cx="0" cy="0"/>
-          <a:chOff x="0" y="0"/>
-          <a:chExt cx="0" cy="0"/>
-        </a:xfrm>
-      </p:grpSpPr>
+      <p:grpSpPr/>
       <p:sp>
         <p:nvSpPr>
           <p:cNvPr id="2" name="Title 1"/>
@@ -7163,7 +8342,362 @@
           <a:lstStyle/>
           <a:p>
             <a:r>
-              <a:t>Count about 45% of a beach's open days, with a floor of two</a:t>
+              <a:t>Staffing: eight for Long Beach, thirteen with a paired northern beach</a:t>
+            </a:r>
+          </a:p>
+        </p:txBody>
+      </p:sp>
+      <p:graphicFrame>
+        <p:nvGraphicFramePr>
+          <p:cNvPr id="3" name="Table 2"/>
+          <p:cNvGraphicFramePr>
+            <a:graphicFrameLocks noGrp="1"/>
+          </p:cNvGraphicFramePr>
+          <p:nvPr/>
+        </p:nvGraphicFramePr>
+        <p:xfrm>
+          <a:off x="594360" y="1325880"/>
+          <a:ext cx="10972800" cy="2194560"/>
+        </p:xfrm>
+        <a:graphic>
+          <a:graphicData uri="http://schemas.openxmlformats.org/drawingml/2006/table">
+            <a:tbl>
+              <a:tblPr firstRow="1" bandRow="1">
+                <a:tableStyleId>{5C22544A-7EE6-4342-B048-85BDC9FD1C3A}</a:tableStyleId>
+              </a:tblPr>
+              <a:tblGrid>
+                <a:gridCol w="5120640"/>
+                <a:gridCol w="1188720"/>
+                <a:gridCol w="4663440"/>
+              </a:tblGrid>
+              <a:tr h="365760">
+                <a:tc>
+                  <a:txBody>
+                    <a:bodyPr/>
+                    <a:lstStyle/>
+                    <a:p>
+                      <a:r>
+                        <a:rPr sz="1300" b="1">
+                          <a:solidFill>
+                            <a:srgbClr val="FFFFFF"/>
+                          </a:solidFill>
+                        </a:rPr>
+                        <a:t>Role</a:t>
+                      </a:r>
+                    </a:p>
+                  </a:txBody>
+                  <a:tcPr>
+                    <a:solidFill>
+                      <a:srgbClr val="1B3A5C"/>
+                    </a:solidFill>
+                  </a:tcPr>
+                </a:tc>
+                <a:tc>
+                  <a:txBody>
+                    <a:bodyPr/>
+                    <a:lstStyle/>
+                    <a:p>
+                      <a:r>
+                        <a:rPr sz="1300" b="1">
+                          <a:solidFill>
+                            <a:srgbClr val="FFFFFF"/>
+                          </a:solidFill>
+                        </a:rPr>
+                        <a:t>Staff</a:t>
+                      </a:r>
+                    </a:p>
+                  </a:txBody>
+                  <a:tcPr>
+                    <a:solidFill>
+                      <a:srgbClr val="1B3A5C"/>
+                    </a:solidFill>
+                  </a:tcPr>
+                </a:tc>
+                <a:tc>
+                  <a:txBody>
+                    <a:bodyPr/>
+                    <a:lstStyle/>
+                    <a:p>
+                      <a:r>
+                        <a:rPr sz="1300" b="1">
+                          <a:solidFill>
+                            <a:srgbClr val="FFFFFF"/>
+                          </a:solidFill>
+                        </a:rPr>
+                        <a:t>Basis</a:t>
+                      </a:r>
+                    </a:p>
+                  </a:txBody>
+                  <a:tcPr>
+                    <a:solidFill>
+                      <a:srgbClr val="1B3A5C"/>
+                    </a:solidFill>
+                  </a:tcPr>
+                </a:tc>
+              </a:tr>
+              <a:tr h="365760">
+                <a:tc>
+                  <a:txBody>
+                    <a:bodyPr/>
+                    <a:lstStyle/>
+                    <a:p>
+                      <a:r>
+                        <a:rPr sz="1200"/>
+                        <a:t>Approach counters</a:t>
+                      </a:r>
+                    </a:p>
+                  </a:txBody>
+                  <a:tcPr/>
+                </a:tc>
+                <a:tc>
+                  <a:txBody>
+                    <a:bodyPr/>
+                    <a:lstStyle/>
+                    <a:p>
+                      <a:r>
+                        <a:rPr sz="1200"/>
+                        <a:t>6</a:t>
+                      </a:r>
+                    </a:p>
+                  </a:txBody>
+                  <a:tcPr/>
+                </a:tc>
+                <a:tc>
+                  <a:txBody>
+                    <a:bodyPr/>
+                    <a:lstStyle/>
+                    <a:p>
+                      <a:r>
+                        <a:rPr sz="1200"/>
+                        <a:t>one per drivable approach (1998 field model)</a:t>
+                      </a:r>
+                    </a:p>
+                  </a:txBody>
+                  <a:tcPr/>
+                </a:tc>
+              </a:tr>
+              <a:tr h="365760">
+                <a:tc>
+                  <a:txBody>
+                    <a:bodyPr/>
+                    <a:lstStyle/>
+                    <a:p>
+                      <a:r>
+                        <a:rPr sz="1200"/>
+                        <a:t>Roving beach-count / interview crews</a:t>
+                      </a:r>
+                    </a:p>
+                  </a:txBody>
+                  <a:tcPr/>
+                </a:tc>
+                <a:tc>
+                  <a:txBody>
+                    <a:bodyPr/>
+                    <a:lstStyle/>
+                    <a:p>
+                      <a:r>
+                        <a:rPr sz="1200"/>
+                        <a:t>2</a:t>
+                      </a:r>
+                    </a:p>
+                  </a:txBody>
+                  <a:tcPr/>
+                </a:tc>
+                <a:tc>
+                  <a:txBody>
+                    <a:bodyPr/>
+                    <a:lstStyle/>
+                    <a:p>
+                      <a:r>
+                        <a:rPr sz="1200"/>
+                        <a:t>28-mile beach, up to ~5,200 trips on a 90th-percentile day</a:t>
+                      </a:r>
+                    </a:p>
+                  </a:txBody>
+                  <a:tcPr/>
+                </a:tc>
+              </a:tr>
+              <a:tr h="365760">
+                <a:tc>
+                  <a:txBody>
+                    <a:bodyPr/>
+                    <a:lstStyle/>
+                    <a:p>
+                      <a:r>
+                        <a:rPr sz="1200" b="1"/>
+                        <a:t>Long Beach core, per survey day</a:t>
+                      </a:r>
+                    </a:p>
+                  </a:txBody>
+                  <a:tcPr/>
+                </a:tc>
+                <a:tc>
+                  <a:txBody>
+                    <a:bodyPr/>
+                    <a:lstStyle/>
+                    <a:p>
+                      <a:r>
+                        <a:rPr sz="1200" b="1"/>
+                        <a:t>8</a:t>
+                      </a:r>
+                    </a:p>
+                  </a:txBody>
+                  <a:tcPr/>
+                </a:tc>
+                <a:tc>
+                  <a:txBody>
+                    <a:bodyPr/>
+                    <a:lstStyle/>
+                    <a:p/>
+                  </a:txBody>
+                  <a:tcPr/>
+                </a:tc>
+              </a:tr>
+              <a:tr h="365760">
+                <a:tc>
+                  <a:txBody>
+                    <a:bodyPr/>
+                    <a:lstStyle/>
+                    <a:p>
+                      <a:r>
+                        <a:rPr sz="1200"/>
+                        <a:t>Paired northern egress (Copalis or Mocrocks)</a:t>
+                      </a:r>
+                    </a:p>
+                  </a:txBody>
+                  <a:tcPr/>
+                </a:tc>
+                <a:tc>
+                  <a:txBody>
+                    <a:bodyPr/>
+                    <a:lstStyle/>
+                    <a:p>
+                      <a:r>
+                        <a:rPr sz="1200"/>
+                        <a:t>+5</a:t>
+                      </a:r>
+                    </a:p>
+                  </a:txBody>
+                  <a:tcPr/>
+                </a:tc>
+                <a:tc>
+                  <a:txBody>
+                    <a:bodyPr/>
+                    <a:lstStyle/>
+                    <a:p>
+                      <a:r>
+                        <a:rPr sz="1200"/>
+                        <a:t>same-day donor truth on a subset of days</a:t>
+                      </a:r>
+                    </a:p>
+                  </a:txBody>
+                  <a:tcPr/>
+                </a:tc>
+              </a:tr>
+              <a:tr h="365760">
+                <a:tc>
+                  <a:txBody>
+                    <a:bodyPr/>
+                    <a:lstStyle/>
+                    <a:p>
+                      <a:r>
+                        <a:rPr sz="1200" b="1"/>
+                        <a:t>Peak, on a paired day</a:t>
+                      </a:r>
+                    </a:p>
+                  </a:txBody>
+                  <a:tcPr/>
+                </a:tc>
+                <a:tc>
+                  <a:txBody>
+                    <a:bodyPr/>
+                    <a:lstStyle/>
+                    <a:p>
+                      <a:r>
+                        <a:rPr sz="1200" b="1"/>
+                        <a:t>13</a:t>
+                      </a:r>
+                    </a:p>
+                  </a:txBody>
+                  <a:tcPr/>
+                </a:tc>
+                <a:tc>
+                  <a:txBody>
+                    <a:bodyPr/>
+                    <a:lstStyle/>
+                    <a:p/>
+                  </a:txBody>
+                  <a:tcPr/>
+                </a:tc>
+              </a:tr>
+            </a:tbl>
+          </a:graphicData>
+        </a:graphic>
+      </p:graphicFrame>
+      <p:sp>
+        <p:nvSpPr>
+          <p:cNvPr id="4" name="TextBox 3"/>
+          <p:cNvSpPr txBox="1"/>
+          <p:nvPr/>
+        </p:nvSpPr>
+        <p:spPr>
+          <a:xfrm>
+            <a:off x="594360" y="4160520"/>
+            <a:ext cx="10972800" cy="1554480"/>
+          </a:xfrm>
+          <a:prstGeom prst="rect">
+            <a:avLst/>
+          </a:prstGeom>
+          <a:noFill/>
+        </p:spPr>
+        <p:txBody>
+          <a:bodyPr wrap="square">
+            <a:spAutoFit/>
+          </a:bodyPr>
+          <a:lstStyle/>
+          <a:p>
+            <a:r>
+              <a:rPr sz="1300"/>
+              <a:t>Counters are stationary and low-skill; the roving crews are the program's regular samplers, on the beach that day regardless, so the marginal cost is mainly the six counters. On a subset of days, add a whole-beach egress at whichever northern donor the state is digging, to measure the imputation transfer directly.</a:t>
+            </a:r>
+          </a:p>
+        </p:txBody>
+      </p:sp>
+    </p:spTree>
+  </p:cSld>
+  <p:clrMapOvr>
+    <a:masterClrMapping/>
+  </p:clrMapOvr>
+</p:sld>
+</file>
+
+<file path=ppt/slides/slide2.xml><?xml version="1.0" encoding="utf-8"?>
+<p:sld xmlns:a="http://schemas.openxmlformats.org/drawingml/2006/main" xmlns:p="http://schemas.openxmlformats.org/presentationml/2006/main" xmlns:r="http://schemas.openxmlformats.org/officeDocument/2006/relationships">
+  <p:cSld>
+    <p:spTree>
+      <p:nvGrpSpPr>
+        <p:cNvPr id="1" name=""/>
+        <p:cNvGrpSpPr/>
+        <p:nvPr/>
+      </p:nvGrpSpPr>
+      <p:grpSpPr/>
+      <p:sp>
+        <p:nvSpPr>
+          <p:cNvPr id="2" name="Title 1"/>
+          <p:cNvSpPr>
+            <a:spLocks noGrp="1"/>
+          </p:cNvSpPr>
+          <p:nvPr>
+            <p:ph type="title"/>
+          </p:nvPr>
+        </p:nvSpPr>
+        <p:spPr/>
+        <p:txBody>
+          <a:bodyPr/>
+          <a:lstStyle/>
+          <a:p>
+            <a:r>
+              <a:t>Agenda</a:t>
             </a:r>
           </a:p>
         </p:txBody>
@@ -7175,7 +8709,7 @@
             <a:spLocks noGrp="1"/>
           </p:cNvSpPr>
           <p:nvPr>
-            <p:ph sz="half" idx="1"/>
+            <p:ph idx="1"/>
           </p:nvPr>
         </p:nvSpPr>
         <p:spPr/>
@@ -7184,7 +8718,302 @@
           <a:lstStyle/>
           <a:p>
             <a:r>
-              <a:rPr sz="1500" b="1"/>
+              <a:rPr b="1" sz="2000"/>
+              <a:t>1.  History </a:t>
+            </a:r>
+            <a:r>
+              <a:rPr sz="2000"/>
+              <a:t>of razor clam harvest monitoring and estimation</a:t>
+            </a:r>
+          </a:p>
+          <a:p>
+            <a:r>
+              <a:rPr b="1" sz="2000"/>
+              <a:t>2.  Data gaps and uncertainty</a:t>
+            </a:r>
+          </a:p>
+          <a:p>
+            <a:r>
+              <a:rPr b="1" sz="2000"/>
+              <a:t>3.  Impact of budget reduction</a:t>
+            </a:r>
+          </a:p>
+          <a:p>
+            <a:r>
+              <a:rPr b="1" sz="2000"/>
+              <a:t>4.  Data needs; a re-imagined harvest monitoring framework</a:t>
+            </a:r>
+          </a:p>
+          <a:p>
+            <a:r>
+              <a:rPr b="1" sz="2000"/>
+              <a:t>5.  Plan for the 2026-27 season</a:t>
+            </a:r>
+          </a:p>
+          <a:p>
+            <a:r>
+              <a:rPr b="1" sz="2000"/>
+              <a:t>6.  Follow-up: the 2027 stock assessment</a:t>
+            </a:r>
+          </a:p>
+        </p:txBody>
+      </p:sp>
+    </p:spTree>
+  </p:cSld>
+  <p:clrMapOvr>
+    <a:masterClrMapping/>
+  </p:clrMapOvr>
+</p:sld>
+</file>
+
+<file path=ppt/slides/slide20.xml><?xml version="1.0" encoding="utf-8"?>
+<p:sld xmlns:a="http://schemas.openxmlformats.org/drawingml/2006/main" xmlns:p="http://schemas.openxmlformats.org/presentationml/2006/main" xmlns:r="http://schemas.openxmlformats.org/officeDocument/2006/relationships">
+  <p:cSld>
+    <p:spTree>
+      <p:nvGrpSpPr>
+        <p:cNvPr id="1" name=""/>
+        <p:cNvGrpSpPr/>
+        <p:nvPr/>
+      </p:nvGrpSpPr>
+      <p:grpSpPr/>
+      <p:sp>
+        <p:nvSpPr>
+          <p:cNvPr id="2" name="Title 1"/>
+          <p:cNvSpPr>
+            <a:spLocks noGrp="1"/>
+          </p:cNvSpPr>
+          <p:nvPr>
+            <p:ph type="title"/>
+          </p:nvPr>
+        </p:nvSpPr>
+        <p:spPr/>
+        <p:txBody>
+          <a:bodyPr/>
+          <a:lstStyle/>
+          <a:p>
+            <a:r>
+              <a:t>Why not just one fall and one spring survey?</a:t>
+            </a:r>
+          </a:p>
+        </p:txBody>
+      </p:sp>
+      <p:pic>
+        <p:nvPicPr>
+          <p:cNvPr id="3" name="Picture 2" descr="fig16_lb_survey_target.png"/>
+          <p:cNvPicPr>
+            <a:picLocks noChangeAspect="1"/>
+          </p:cNvPicPr>
+          <p:nvPr/>
+        </p:nvPicPr>
+        <p:blipFill>
+          <a:blip r:embed="rId2"/>
+          <a:stretch>
+            <a:fillRect/>
+          </a:stretch>
+        </p:blipFill>
+        <p:spPr>
+          <a:xfrm>
+            <a:off x="2788920" y="1417320"/>
+            <a:ext cx="6583680" cy="3840480"/>
+          </a:xfrm>
+          <a:prstGeom prst="rect">
+            <a:avLst/>
+          </a:prstGeom>
+        </p:spPr>
+      </p:pic>
+      <p:sp>
+        <p:nvSpPr>
+          <p:cNvPr id="4" name="TextBox 3"/>
+          <p:cNvSpPr txBox="1"/>
+          <p:nvPr/>
+        </p:nvSpPr>
+        <p:spPr>
+          <a:xfrm>
+            <a:off x="594360" y="5532120"/>
+            <a:ext cx="10972800" cy="822960"/>
+          </a:xfrm>
+          <a:prstGeom prst="rect">
+            <a:avLst/>
+          </a:prstGeom>
+          <a:noFill/>
+        </p:spPr>
+        <p:txBody>
+          <a:bodyPr wrap="square">
+            <a:spAutoFit/>
+          </a:bodyPr>
+          <a:lstStyle/>
+          <a:p>
+            <a:r>
+              <a:rPr b="1" sz="1250">
+                <a:solidFill>
+                  <a:srgbClr val="1B3A5C"/>
+                </a:solidFill>
+              </a:rPr>
+              <a:t>In plain terms:  </a:t>
+            </a:r>
+            <a:r>
+              <a:rPr sz="1250"/>
+              <a:t>one survey per condition pins the shape and is worth doing; but the correction factor swings about 30% per survey, so precision improves only as 1 over root-N. About eight surveys halve today's uncertainty.</a:t>
+            </a:r>
+          </a:p>
+        </p:txBody>
+      </p:sp>
+    </p:spTree>
+  </p:cSld>
+  <p:clrMapOvr>
+    <a:masterClrMapping/>
+  </p:clrMapOvr>
+</p:sld>
+</file>
+
+<file path=ppt/slides/slide21.xml><?xml version="1.0" encoding="utf-8"?>
+<p:sld xmlns:a="http://schemas.openxmlformats.org/drawingml/2006/main" xmlns:p="http://schemas.openxmlformats.org/presentationml/2006/main" xmlns:r="http://schemas.openxmlformats.org/officeDocument/2006/relationships">
+  <p:cSld>
+    <p:spTree>
+      <p:nvGrpSpPr>
+        <p:cNvPr id="1" name=""/>
+        <p:cNvGrpSpPr/>
+        <p:nvPr/>
+      </p:nvGrpSpPr>
+      <p:grpSpPr/>
+      <p:sp>
+        <p:nvSpPr>
+          <p:cNvPr id="2" name="Title 1"/>
+          <p:cNvSpPr>
+            <a:spLocks noGrp="1"/>
+          </p:cNvSpPr>
+          <p:nvPr>
+            <p:ph type="title"/>
+          </p:nvPr>
+        </p:nvSpPr>
+        <p:spPr/>
+        <p:txBody>
+          <a:bodyPr/>
+          <a:lstStyle/>
+          <a:p>
+            <a:r>
+              <a:t>Hold the southern donor at its co-management floor</a:t>
+            </a:r>
+          </a:p>
+        </p:txBody>
+      </p:sp>
+      <p:pic>
+        <p:nvPicPr>
+          <p:cNvPr id="3" name="Picture 2" descr="fig15_donor_comanagement.png"/>
+          <p:cNvPicPr>
+            <a:picLocks noChangeAspect="1"/>
+          </p:cNvPicPr>
+          <p:nvPr/>
+        </p:nvPicPr>
+        <p:blipFill>
+          <a:blip r:embed="rId2"/>
+          <a:stretch>
+            <a:fillRect/>
+          </a:stretch>
+        </p:blipFill>
+        <p:spPr>
+          <a:xfrm>
+            <a:off x="2880360" y="1417320"/>
+            <a:ext cx="6400800" cy="3840480"/>
+          </a:xfrm>
+          <a:prstGeom prst="rect">
+            <a:avLst/>
+          </a:prstGeom>
+        </p:spPr>
+      </p:pic>
+      <p:sp>
+        <p:nvSpPr>
+          <p:cNvPr id="4" name="TextBox 3"/>
+          <p:cNvSpPr txBox="1"/>
+          <p:nvPr/>
+        </p:nvSpPr>
+        <p:spPr>
+          <a:xfrm>
+            <a:off x="594360" y="5532120"/>
+            <a:ext cx="10972800" cy="822960"/>
+          </a:xfrm>
+          <a:prstGeom prst="rect">
+            <a:avLst/>
+          </a:prstGeom>
+          <a:noFill/>
+        </p:spPr>
+        <p:txBody>
+          <a:bodyPr wrap="square">
+            <a:spAutoFit/>
+          </a:bodyPr>
+          <a:lstStyle/>
+          <a:p>
+            <a:r>
+              <a:rPr b="1" sz="1250">
+                <a:solidFill>
+                  <a:srgbClr val="1B3A5C"/>
+                </a:solidFill>
+              </a:rPr>
+              <a:t>In plain terms:  </a:t>
+            </a:r>
+            <a:r>
+              <a:rPr sz="1250"/>
+              <a:t>pulling Copalis and Mocrocks back raises the southern imputation error with no tribal offset, because the Quinault alternate-day fishery is not a state proxy. Keep one of the two counted every dig day.</a:t>
+            </a:r>
+          </a:p>
+        </p:txBody>
+      </p:sp>
+    </p:spTree>
+  </p:cSld>
+  <p:clrMapOvr>
+    <a:masterClrMapping/>
+  </p:clrMapOvr>
+</p:sld>
+</file>
+
+<file path=ppt/slides/slide22.xml><?xml version="1.0" encoding="utf-8"?>
+<p:sld xmlns:a="http://schemas.openxmlformats.org/drawingml/2006/main" xmlns:p="http://schemas.openxmlformats.org/presentationml/2006/main" xmlns:r="http://schemas.openxmlformats.org/officeDocument/2006/relationships">
+  <p:cSld>
+    <p:spTree>
+      <p:nvGrpSpPr>
+        <p:cNvPr id="1" name=""/>
+        <p:cNvGrpSpPr/>
+        <p:nvPr/>
+      </p:nvGrpSpPr>
+      <p:grpSpPr/>
+      <p:sp>
+        <p:nvSpPr>
+          <p:cNvPr id="2" name="Title 1"/>
+          <p:cNvSpPr>
+            <a:spLocks noGrp="1"/>
+          </p:cNvSpPr>
+          <p:nvPr>
+            <p:ph type="title"/>
+          </p:nvPr>
+        </p:nvSpPr>
+        <p:spPr/>
+        <p:txBody>
+          <a:bodyPr/>
+          <a:lstStyle/>
+          <a:p>
+            <a:r>
+              <a:t>How many days per tide series: about 45%, floor of two</a:t>
+            </a:r>
+          </a:p>
+        </p:txBody>
+      </p:sp>
+      <p:sp>
+        <p:nvSpPr>
+          <p:cNvPr id="3" name="Content Placeholder 2"/>
+          <p:cNvSpPr>
+            <a:spLocks noGrp="1"/>
+          </p:cNvSpPr>
+          <p:nvPr>
+            <p:ph idx="1" sz="half"/>
+          </p:nvPr>
+        </p:nvSpPr>
+        <p:spPr/>
+        <p:txBody>
+          <a:bodyPr wrap="square"/>
+          <a:lstStyle/>
+          <a:p>
+            <a:r>
+              <a:rPr b="1" sz="1500"/>
               <a:t>Count 2 of a 4- or 5-day series; </a:t>
             </a:r>
             <a:r>
@@ -7195,19 +9024,23 @@
           <a:p>
             <a:r>
               <a:rPr sz="1500"/>
-              <a:t>Counting one day per series never meets CV 0.20 (0.21-0.31 at m = 1).</a:t>
-            </a:r>
-          </a:p>
-          <a:p>
-            <a:r>
-              <a:rPr sz="1500" b="1"/>
-              <a:t>Read it as 45% of open days, floor of two.</a:t>
-            </a:r>
-          </a:p>
-          <a:p>
+              <a:t>Counting one day per series never meets the CV 0.20 design target.</a:t>
+            </a:r>
+          </a:p>
+          <a:p>
+            <a:r>
+              <a:rPr b="1" sz="1500"/>
+              <a:t>Read it as 45% of open days, floor of two, </a:t>
+            </a:r>
             <a:r>
               <a:rPr sz="1500"/>
-              <a:t>Exception: Copalis needs all three of a three-day series, its floor, not sampling, binds.</a:t>
+              <a:t>largest-effort days first.</a:t>
+            </a:r>
+          </a:p>
+          <a:p>
+            <a:r>
+              <a:rPr sz="1500"/>
+              <a:t>Copalis needs all three of a three-day series, its floor, not sampling, binds.</a:t>
             </a:r>
           </a:p>
         </p:txBody>
@@ -7219,16 +9052,14 @@
             <a:spLocks noGrp="1"/>
           </p:cNvSpPr>
           <p:nvPr>
-            <p:ph sz="half" idx="11"/>
+            <p:ph idx="11" sz="half"/>
           </p:nvPr>
         </p:nvSpPr>
         <p:spPr/>
         <p:txBody>
           <a:bodyPr/>
           <a:lstStyle/>
-          <a:p>
-            <a:endParaRPr/>
-          </a:p>
+          <a:p/>
         </p:txBody>
       </p:sp>
       <p:pic>
@@ -7240,7 +9071,7 @@
           <p:nvPr/>
         </p:nvPicPr>
         <p:blipFill>
-          <a:blip r:embed="rId3"/>
+          <a:blip r:embed="rId2"/>
           <a:stretch>
             <a:fillRect/>
           </a:stretch>
@@ -7263,8 +9094,8 @@
 </p:sld>
 </file>
 
-<file path=ppt/slides/slide15.xml><?xml version="1.0" encoding="utf-8"?>
-<p:sld xmlns:a="http://schemas.openxmlformats.org/drawingml/2006/main" xmlns:r="http://schemas.openxmlformats.org/officeDocument/2006/relationships" xmlns:p="http://schemas.openxmlformats.org/presentationml/2006/main">
+<file path=ppt/slides/slide23.xml><?xml version="1.0" encoding="utf-8"?>
+<p:sld xmlns:a="http://schemas.openxmlformats.org/drawingml/2006/main" xmlns:p="http://schemas.openxmlformats.org/presentationml/2006/main" xmlns:r="http://schemas.openxmlformats.org/officeDocument/2006/relationships">
   <p:cSld>
     <p:spTree>
       <p:nvGrpSpPr>
@@ -7272,14 +9103,7 @@
         <p:cNvGrpSpPr/>
         <p:nvPr/>
       </p:nvGrpSpPr>
-      <p:grpSpPr>
-        <a:xfrm>
-          <a:off x="0" y="0"/>
-          <a:ext cx="0" cy="0"/>
-          <a:chOff x="0" y="0"/>
-          <a:chExt cx="0" cy="0"/>
-        </a:xfrm>
-      </p:grpSpPr>
+      <p:grpSpPr/>
       <p:sp>
         <p:nvSpPr>
           <p:cNvPr id="2" name="Title 1"/>
@@ -7287,7 +9111,7 @@
             <a:spLocks noGrp="1"/>
           </p:cNvSpPr>
           <p:nvPr>
-            <p:ph type="title"/>
+            <p:ph type="ctrTitle"/>
           </p:nvPr>
         </p:nvSpPr>
         <p:spPr/>
@@ -7296,61 +9120,7 @@
           <a:lstStyle/>
           <a:p>
             <a:r>
-              <a:t>Which days to count: the largest-effort days</a:t>
-            </a:r>
-          </a:p>
-        </p:txBody>
-      </p:sp>
-      <p:sp>
-        <p:nvSpPr>
-          <p:cNvPr id="3" name="Content Placeholder 2"/>
-          <p:cNvSpPr>
-            <a:spLocks noGrp="1"/>
-          </p:cNvSpPr>
-          <p:nvPr>
-            <p:ph idx="1"/>
-          </p:nvPr>
-        </p:nvSpPr>
-        <p:spPr/>
-        <p:txBody>
-          <a:bodyPr wrap="square">
-            <a:normAutofit/>
-          </a:bodyPr>
-          <a:lstStyle/>
-          <a:p>
-            <a:r>
-              <a:rPr sz="2800" b="1" dirty="0"/>
-              <a:t>Selecting the largest-effort days beats an even spread by 4-11 CV points </a:t>
-            </a:r>
-            <a:r>
-              <a:rPr sz="2800" dirty="0"/>
-              <a:t>at every series length tested.</a:t>
-            </a:r>
-          </a:p>
-          <a:p>
-            <a:r>
-              <a:rPr sz="2800" b="1" dirty="0"/>
-              <a:t>Small bias penalty (1-6%), </a:t>
-            </a:r>
-            <a:r>
-              <a:rPr sz="2800" dirty="0"/>
-              <a:t>no worse than the alternatives.</a:t>
-            </a:r>
-          </a:p>
-          <a:p>
-            <a:r>
-              <a:rPr sz="2800" dirty="0"/>
-              <a:t>The program already does this implicitly, staffing the opening weekend and the biggest tides.</a:t>
-            </a:r>
-          </a:p>
-          <a:p>
-            <a:r>
-              <a:rPr sz="2800" b="1" dirty="0"/>
-              <a:t>It is correct. </a:t>
-            </a:r>
-            <a:r>
-              <a:rPr sz="2800" dirty="0"/>
-              <a:t>Which days will be largest is well predicted by the schedule, tide height, and day of week.</a:t>
+              <a:t>5.  Plan for the 2026-27 season</a:t>
             </a:r>
           </a:p>
         </p:txBody>
@@ -7363,8 +9133,8 @@
 </p:sld>
 </file>
 
-<file path=ppt/slides/slide16.xml><?xml version="1.0" encoding="utf-8"?>
-<p:sld xmlns:a="http://schemas.openxmlformats.org/drawingml/2006/main" xmlns:r="http://schemas.openxmlformats.org/officeDocument/2006/relationships" xmlns:p="http://schemas.openxmlformats.org/presentationml/2006/main">
+<file path=ppt/slides/slide24.xml><?xml version="1.0" encoding="utf-8"?>
+<p:sld xmlns:a="http://schemas.openxmlformats.org/drawingml/2006/main" xmlns:p="http://schemas.openxmlformats.org/presentationml/2006/main" xmlns:r="http://schemas.openxmlformats.org/officeDocument/2006/relationships">
   <p:cSld>
     <p:spTree>
       <p:nvGrpSpPr>
@@ -7372,14 +9142,7 @@
         <p:cNvGrpSpPr/>
         <p:nvPr/>
       </p:nvGrpSpPr>
-      <p:grpSpPr>
-        <a:xfrm>
-          <a:off x="0" y="0"/>
-          <a:ext cx="0" cy="0"/>
-          <a:chOff x="0" y="0"/>
-          <a:chExt cx="0" cy="0"/>
-        </a:xfrm>
-      </p:grpSpPr>
+      <p:grpSpPr/>
       <p:sp>
         <p:nvSpPr>
           <p:cNvPr id="2" name="Title 1"/>
@@ -7396,164 +9159,14 @@
           <a:lstStyle/>
           <a:p>
             <a:r>
-              <a:t>Some precision cannot be bought with crew days</a:t>
-            </a:r>
-          </a:p>
-        </p:txBody>
-      </p:sp>
-      <p:sp>
-        <p:nvSpPr>
-          <p:cNvPr id="3" name="Content Placeholder 2"/>
-          <p:cNvSpPr>
-            <a:spLocks noGrp="1"/>
-          </p:cNvSpPr>
-          <p:nvPr>
-            <p:ph sz="half" idx="1"/>
-          </p:nvPr>
-        </p:nvSpPr>
-        <p:spPr/>
-        <p:txBody>
-          <a:bodyPr wrap="square"/>
-          <a:lstStyle/>
-          <a:p>
-            <a:r>
-              <a:rPr sz="1500" b="1"/>
-              <a:t>Copalis cannot go below a series CV of 0.126; Mocrocks below 0.095 </a:t>
-            </a:r>
-            <a:r>
-              <a:rPr sz="1500"/>
-              <a:t>, the between-survey error of their tables.</a:t>
-            </a:r>
-          </a:p>
-          <a:p>
-            <a:r>
-              <a:rPr sz="1500"/>
-              <a:t>Copalis is already counted 100% and sits at 0.129; a 10% target is infeasible there at any rate.</a:t>
-            </a:r>
-          </a:p>
-          <a:p>
-            <a:r>
-              <a:rPr sz="1500" b="1"/>
-              <a:t>The question inverts: </a:t>
-            </a:r>
-            <a:r>
-              <a:rPr sz="1500"/>
-              <a:t>how much of a season each beach's table can afford to impute (Table 21).</a:t>
-            </a:r>
-          </a:p>
-        </p:txBody>
-      </p:sp>
-      <p:sp>
-        <p:nvSpPr>
-          <p:cNvPr id="5" name="Content Placeholder 4"/>
-          <p:cNvSpPr>
-            <a:spLocks noGrp="1"/>
-          </p:cNvSpPr>
-          <p:nvPr>
-            <p:ph sz="half" idx="11"/>
-          </p:nvPr>
-        </p:nvSpPr>
-        <p:spPr/>
-        <p:txBody>
-          <a:bodyPr/>
-          <a:lstStyle/>
-          <a:p>
-            <a:endParaRPr/>
-          </a:p>
-        </p:txBody>
-      </p:sp>
-      <p:pic>
-        <p:nvPicPr>
-          <p:cNvPr id="6" name="Picture 5" descr="fig14_season_cv_vs_imputed.png"/>
-          <p:cNvPicPr>
-            <a:picLocks noChangeAspect="1"/>
-          </p:cNvPicPr>
-          <p:nvPr/>
-        </p:nvPicPr>
-        <p:blipFill>
-          <a:blip r:embed="rId3"/>
-          <a:stretch>
-            <a:fillRect/>
-          </a:stretch>
-        </p:blipFill>
-        <p:spPr>
-          <a:xfrm>
-            <a:off x="6178610" y="1692602"/>
-            <a:ext cx="5403790" cy="3242274"/>
-          </a:xfrm>
-          <a:prstGeom prst="rect">
-            <a:avLst/>
-          </a:prstGeom>
-        </p:spPr>
-      </p:pic>
-    </p:spTree>
-  </p:cSld>
-  <p:clrMapOvr>
-    <a:masterClrMapping/>
-  </p:clrMapOvr>
-</p:sld>
-</file>
-
-<file path=ppt/slides/slide17.xml><?xml version="1.0" encoding="utf-8"?>
-<p:sld xmlns:a="http://schemas.openxmlformats.org/drawingml/2006/main" xmlns:r="http://schemas.openxmlformats.org/officeDocument/2006/relationships" xmlns:p="http://schemas.openxmlformats.org/presentationml/2006/main">
-  <p:cSld>
-    <p:spTree>
-      <p:nvGrpSpPr>
-        <p:cNvPr id="1" name=""/>
-        <p:cNvGrpSpPr/>
-        <p:nvPr/>
-      </p:nvGrpSpPr>
-      <p:grpSpPr>
-        <a:xfrm>
-          <a:off x="0" y="0"/>
-          <a:ext cx="0" cy="0"/>
-          <a:chOff x="0" y="0"/>
-          <a:chExt cx="0" cy="0"/>
-        </a:xfrm>
-      </p:grpSpPr>
-      <p:sp>
-        <p:nvSpPr>
-          <p:cNvPr id="2" name="Title 1"/>
-          <p:cNvSpPr>
-            <a:spLocks noGrp="1"/>
-          </p:cNvSpPr>
-          <p:nvPr>
-            <p:ph type="title"/>
-          </p:nvPr>
-        </p:nvSpPr>
-        <p:spPr/>
-        <p:txBody>
-          <a:bodyPr/>
-          <a:lstStyle/>
-          <a:p>
-            <a:r>
-              <a:t>The reallocation pays for itself: minus 19 crew-day units</a:t>
-            </a:r>
-          </a:p>
-        </p:txBody>
-      </p:sp>
-      <p:sp>
-        <p:nvSpPr>
-          <p:cNvPr id="3" name="Content Placeholder 2"/>
-          <p:cNvSpPr>
-            <a:spLocks noGrp="1"/>
-          </p:cNvSpPr>
-          <p:nvPr>
-            <p:ph idx="1"/>
-          </p:nvPr>
-        </p:nvSpPr>
-        <p:spPr/>
-        <p:txBody>
-          <a:bodyPr/>
-          <a:lstStyle/>
-          <a:p>
-            <a:endParaRPr/>
+              <a:t>The reallocation is cost-neutral, but not free</a:t>
+            </a:r>
           </a:p>
         </p:txBody>
       </p:sp>
       <p:graphicFrame>
         <p:nvGraphicFramePr>
-          <p:cNvPr id="4" name="Table 3"/>
+          <p:cNvPr id="3" name="Table 2"/>
           <p:cNvGraphicFramePr>
             <a:graphicFrameLocks noGrp="1"/>
           </p:cNvGraphicFramePr>
@@ -7561,7 +9174,7 @@
         </p:nvGraphicFramePr>
         <p:xfrm>
           <a:off x="594360" y="1463040"/>
-          <a:ext cx="10972798" cy="2926080"/>
+          <a:ext cx="10972798" cy="2194560"/>
         </p:xfrm>
         <a:graphic>
           <a:graphicData uri="http://schemas.openxmlformats.org/drawingml/2006/table">
@@ -7570,50 +9183,14 @@
                 <a:tableStyleId>{5C22544A-7EE6-4342-B048-85BDC9FD1C3A}</a:tableStyleId>
               </a:tblPr>
               <a:tblGrid>
-                <a:gridCol w="2560320">
-                  <a:extLst>
-                    <a:ext uri="{9D8B030D-6E8A-4147-A177-3AD203B41FA5}">
-                      <a16:colId xmlns:a16="http://schemas.microsoft.com/office/drawing/2014/main" val="20000"/>
-                    </a:ext>
-                  </a:extLst>
-                </a:gridCol>
-                <a:gridCol w="1463040">
-                  <a:extLst>
-                    <a:ext uri="{9D8B030D-6E8A-4147-A177-3AD203B41FA5}">
-                      <a16:colId xmlns:a16="http://schemas.microsoft.com/office/drawing/2014/main" val="20001"/>
-                    </a:ext>
-                  </a:extLst>
-                </a:gridCol>
-                <a:gridCol w="1920240">
-                  <a:extLst>
-                    <a:ext uri="{9D8B030D-6E8A-4147-A177-3AD203B41FA5}">
-                      <a16:colId xmlns:a16="http://schemas.microsoft.com/office/drawing/2014/main" val="20002"/>
-                    </a:ext>
-                  </a:extLst>
-                </a:gridCol>
-                <a:gridCol w="1280160">
-                  <a:extLst>
-                    <a:ext uri="{9D8B030D-6E8A-4147-A177-3AD203B41FA5}">
-                      <a16:colId xmlns:a16="http://schemas.microsoft.com/office/drawing/2014/main" val="20003"/>
-                    </a:ext>
-                  </a:extLst>
-                </a:gridCol>
-                <a:gridCol w="1874519">
-                  <a:extLst>
-                    <a:ext uri="{9D8B030D-6E8A-4147-A177-3AD203B41FA5}">
-                      <a16:colId xmlns:a16="http://schemas.microsoft.com/office/drawing/2014/main" val="20004"/>
-                    </a:ext>
-                  </a:extLst>
-                </a:gridCol>
-                <a:gridCol w="1874519">
-                  <a:extLst>
-                    <a:ext uri="{9D8B030D-6E8A-4147-A177-3AD203B41FA5}">
-                      <a16:colId xmlns:a16="http://schemas.microsoft.com/office/drawing/2014/main" val="20005"/>
-                    </a:ext>
-                  </a:extLst>
-                </a:gridCol>
+                <a:gridCol w="2560320"/>
+                <a:gridCol w="1463040"/>
+                <a:gridCol w="1920240"/>
+                <a:gridCol w="1280160"/>
+                <a:gridCol w="1874519"/>
+                <a:gridCol w="1874519"/>
               </a:tblGrid>
-              <a:tr h="487680">
+              <a:tr h="365760">
                 <a:tc>
                   <a:txBody>
                     <a:bodyPr/>
@@ -7709,7 +9286,7 @@
                             <a:srgbClr val="FFFFFF"/>
                           </a:solidFill>
                         </a:rPr>
-                        <a:t>Series CV now</a:t>
+                        <a:t>CV now</a:t>
                       </a:r>
                     </a:p>
                   </a:txBody>
@@ -7740,13 +9317,8 @@
                     </a:solidFill>
                   </a:tcPr>
                 </a:tc>
-                <a:extLst>
-                  <a:ext uri="{0D108BD9-81ED-4DB2-BD59-A6C34878D82A}">
-                    <a16:rowId xmlns:a16="http://schemas.microsoft.com/office/drawing/2014/main" val="10000"/>
-                  </a:ext>
-                </a:extLst>
               </a:tr>
-              <a:tr h="487680">
+              <a:tr h="365760">
                 <a:tc>
                   <a:txBody>
                     <a:bodyPr/>
@@ -7825,13 +9397,8 @@
                   </a:txBody>
                   <a:tcPr/>
                 </a:tc>
-                <a:extLst>
-                  <a:ext uri="{0D108BD9-81ED-4DB2-BD59-A6C34878D82A}">
-                    <a16:rowId xmlns:a16="http://schemas.microsoft.com/office/drawing/2014/main" val="10001"/>
-                  </a:ext>
-                </a:extLst>
               </a:tr>
-              <a:tr h="487680">
+              <a:tr h="365760">
                 <a:tc>
                   <a:txBody>
                     <a:bodyPr/>
@@ -7910,13 +9477,8 @@
                   </a:txBody>
                   <a:tcPr/>
                 </a:tc>
-                <a:extLst>
-                  <a:ext uri="{0D108BD9-81ED-4DB2-BD59-A6C34878D82A}">
-                    <a16:rowId xmlns:a16="http://schemas.microsoft.com/office/drawing/2014/main" val="10002"/>
-                  </a:ext>
-                </a:extLst>
               </a:tr>
-              <a:tr h="487680">
+              <a:tr h="365760">
                 <a:tc>
                   <a:txBody>
                     <a:bodyPr/>
@@ -7995,13 +9557,8 @@
                   </a:txBody>
                   <a:tcPr/>
                 </a:tc>
-                <a:extLst>
-                  <a:ext uri="{0D108BD9-81ED-4DB2-BD59-A6C34878D82A}">
-                    <a16:rowId xmlns:a16="http://schemas.microsoft.com/office/drawing/2014/main" val="10003"/>
-                  </a:ext>
-                </a:extLst>
               </a:tr>
-              <a:tr h="487680">
+              <a:tr h="365760">
                 <a:tc>
                   <a:txBody>
                     <a:bodyPr/>
@@ -8080,13 +9637,8 @@
                   </a:txBody>
                   <a:tcPr/>
                 </a:tc>
-                <a:extLst>
-                  <a:ext uri="{0D108BD9-81ED-4DB2-BD59-A6C34878D82A}">
-                    <a16:rowId xmlns:a16="http://schemas.microsoft.com/office/drawing/2014/main" val="10004"/>
-                  </a:ext>
-                </a:extLst>
               </a:tr>
-              <a:tr h="487680">
+              <a:tr h="365760">
                 <a:tc>
                   <a:txBody>
                     <a:bodyPr/>
@@ -8104,9 +9656,7 @@
                   <a:txBody>
                     <a:bodyPr/>
                     <a:lstStyle/>
-                    <a:p>
-                      <a:endParaRPr/>
-                    </a:p>
+                    <a:p/>
                   </a:txBody>
                   <a:tcPr/>
                 </a:tc>
@@ -8140,9 +9690,7 @@
                   <a:txBody>
                     <a:bodyPr/>
                     <a:lstStyle/>
-                    <a:p>
-                      <a:endParaRPr/>
-                    </a:p>
+                    <a:p/>
                   </a:txBody>
                   <a:tcPr/>
                 </a:tc>
@@ -8153,17 +9701,12 @@
                     <a:p>
                       <a:r>
                         <a:rPr sz="1200" b="1"/>
-                        <a:t>−19</a:t>
+                        <a:t>-19</a:t>
                       </a:r>
                     </a:p>
                   </a:txBody>
                   <a:tcPr/>
                 </a:tc>
-                <a:extLst>
-                  <a:ext uri="{0D108BD9-81ED-4DB2-BD59-A6C34878D82A}">
-                    <a16:rowId xmlns:a16="http://schemas.microsoft.com/office/drawing/2014/main" val="10005"/>
-                  </a:ext>
-                </a:extLst>
               </a:tr>
             </a:tbl>
           </a:graphicData>
@@ -8171,14 +9714,14 @@
       </p:graphicFrame>
       <p:sp>
         <p:nvSpPr>
-          <p:cNvPr id="5" name="TextBox 4"/>
+          <p:cNvPr id="4" name="TextBox 3"/>
           <p:cNvSpPr txBox="1"/>
           <p:nvPr/>
         </p:nvSpPr>
         <p:spPr>
           <a:xfrm>
-            <a:off x="594360" y="4572000"/>
-            <a:ext cx="10972800" cy="1463040"/>
+            <a:off x="594360" y="4206240"/>
+            <a:ext cx="10972800" cy="1554480"/>
           </a:xfrm>
           <a:prstGeom prst="rect">
             <a:avLst/>
@@ -8192,8 +9735,8 @@
           <a:lstStyle/>
           <a:p>
             <a:r>
-              <a:rPr sz="1400"/>
-              <a:t>Long Beach's series CV falls from 0.294 to 0.175, crossing the design target for the first time. Copalis and Mocrocks rise to 0.192 and 0.171 and stay inside it. No new staff, nineteen crew-day units move to Long Beach; but those units are not truly free once the two beaches' donor role is counted, which the co-management slide takes up.</a:t>
+              <a:rPr sz="1300"/>
+              <a:t>Long Beach's series CV falls from 0.294 to 0.175, crossing the design target for the first time; the northern beaches rise but stay inside it. Nineteen crew-day units move south. But those units are not truly free once the donor role is counted (see item 4): read the reallocation as a trade, not a surplus.</a:t>
             </a:r>
           </a:p>
         </p:txBody>
@@ -8206,8 +9749,8 @@
 </p:sld>
 </file>
 
-<file path=ppt/slides/slide18.xml><?xml version="1.0" encoding="utf-8"?>
-<p:sld xmlns:a="http://schemas.openxmlformats.org/drawingml/2006/main" xmlns:r="http://schemas.openxmlformats.org/officeDocument/2006/relationships" xmlns:p="http://schemas.openxmlformats.org/presentationml/2006/main">
+<file path=ppt/slides/slide25.xml><?xml version="1.0" encoding="utf-8"?>
+<p:sld xmlns:a="http://schemas.openxmlformats.org/drawingml/2006/main" xmlns:p="http://schemas.openxmlformats.org/presentationml/2006/main" xmlns:r="http://schemas.openxmlformats.org/officeDocument/2006/relationships">
   <p:cSld>
     <p:spTree>
       <p:nvGrpSpPr>
@@ -8215,14 +9758,7 @@
         <p:cNvGrpSpPr/>
         <p:nvPr/>
       </p:nvGrpSpPr>
-      <p:grpSpPr>
-        <a:xfrm>
-          <a:off x="0" y="0"/>
-          <a:ext cx="0" cy="0"/>
-          <a:chOff x="0" y="0"/>
-          <a:chExt cx="0" cy="0"/>
-        </a:xfrm>
-      </p:grpSpPr>
+      <p:grpSpPr/>
       <p:sp>
         <p:nvSpPr>
           <p:cNvPr id="2" name="Title 1"/>
@@ -8230,7 +9766,7 @@
             <a:spLocks noGrp="1"/>
           </p:cNvSpPr>
           <p:nvPr>
-            <p:ph type="ctrTitle"/>
+            <p:ph type="title"/>
           </p:nvPr>
         </p:nvSpPr>
         <p:spPr/>
@@ -8239,7 +9775,73 @@
           <a:lstStyle/>
           <a:p>
             <a:r>
-              <a:t>Recommendations for the 2026-27 season</a:t>
+              <a:t>Recommendations, in priority order</a:t>
+            </a:r>
+          </a:p>
+        </p:txBody>
+      </p:sp>
+      <p:sp>
+        <p:nvSpPr>
+          <p:cNvPr id="3" name="Content Placeholder 2"/>
+          <p:cNvSpPr>
+            <a:spLocks noGrp="1"/>
+          </p:cNvSpPr>
+          <p:nvPr>
+            <p:ph idx="1"/>
+          </p:nvPr>
+        </p:nvSpPr>
+        <p:spPr/>
+        <p:txBody>
+          <a:bodyPr wrap="square"/>
+          <a:lstStyle/>
+          <a:p>
+            <a:r>
+              <a:rPr b="1" sz="1400"/>
+              <a:t>1.  Survey Long Beach first. </a:t>
+            </a:r>
+            <a:r>
+              <a:rPr sz="1400"/>
+              <a:t>Run the whole-beach egress pilot, six approaches and about eight staff. Start with one survey in each tide condition, then build toward eight.</a:t>
+            </a:r>
+          </a:p>
+          <a:p>
+            <a:r>
+              <a:rPr b="1" sz="1400"/>
+              <a:t>2.  Hold the southern donor at its co-management floor. </a:t>
+            </a:r>
+            <a:r>
+              <a:rPr sz="1400"/>
+              <a:t>Keep one of Copalis or Mocrocks counted every dig day; the Quinault's counts cannot substitute for the state, and there is no joint donor.</a:t>
+            </a:r>
+          </a:p>
+          <a:p>
+            <a:r>
+              <a:rPr b="1" sz="1400"/>
+              <a:t>3.  Do not treat imputation as a substitute for counting Long Beach. </a:t>
+            </a:r>
+            <a:r>
+              <a:rPr sz="1400"/>
+              <a:t>At 100% imputation its uncertainty roughly triples and the dominant term cannot be bought back.</a:t>
+            </a:r>
+          </a:p>
+          <a:p>
+            <a:r>
+              <a:rPr b="1" sz="1400"/>
+              <a:t>4.  Sample ~45% of open days, largest-effort first; </a:t>
+            </a:r>
+            <a:r>
+              <a:rPr sz="1400"/>
+              <a:t>treat the reallocation as a trade, and fund Long Beach from dedicated effort where possible.</a:t>
+            </a:r>
+          </a:p>
+          <a:p>
+            <a:r>
+              <a:rPr b="1" sz="1400"/>
+              <a:t>5.  Accept the Copalis floor: </a:t>
+            </a:r>
+            <a:r>
+              <a:rPr sz="1400"/>
+              <a:t>a harvest CV of 0.10 is infeasible there at any sampling rate.</a:t>
             </a:r>
           </a:p>
         </p:txBody>
@@ -8252,8 +9854,8 @@
 </p:sld>
 </file>
 
-<file path=ppt/slides/slide19.xml><?xml version="1.0" encoding="utf-8"?>
-<p:sld xmlns:a="http://schemas.openxmlformats.org/drawingml/2006/main" xmlns:r="http://schemas.openxmlformats.org/officeDocument/2006/relationships" xmlns:p="http://schemas.openxmlformats.org/presentationml/2006/main">
+<file path=ppt/slides/slide26.xml><?xml version="1.0" encoding="utf-8"?>
+<p:sld xmlns:a="http://schemas.openxmlformats.org/drawingml/2006/main" xmlns:p="http://schemas.openxmlformats.org/presentationml/2006/main" xmlns:r="http://schemas.openxmlformats.org/officeDocument/2006/relationships">
   <p:cSld>
     <p:spTree>
       <p:nvGrpSpPr>
@@ -8261,14 +9863,7 @@
         <p:cNvGrpSpPr/>
         <p:nvPr/>
       </p:nvGrpSpPr>
-      <p:grpSpPr>
-        <a:xfrm>
-          <a:off x="0" y="0"/>
-          <a:ext cx="0" cy="0"/>
-          <a:chOff x="0" y="0"/>
-          <a:chExt cx="0" cy="0"/>
-        </a:xfrm>
-      </p:grpSpPr>
+      <p:grpSpPr/>
       <p:sp>
         <p:nvSpPr>
           <p:cNvPr id="2" name="Title 1"/>
@@ -8276,7 +9871,7 @@
             <a:spLocks noGrp="1"/>
           </p:cNvSpPr>
           <p:nvPr>
-            <p:ph type="title"/>
+            <p:ph type="ctrTitle"/>
           </p:nvPr>
         </p:nvSpPr>
         <p:spPr/>
@@ -8285,7 +9880,46 @@
           <a:lstStyle/>
           <a:p>
             <a:r>
-              <a:t>Run egress surveys at Long Beach and Twin Harbors, both conditions</a:t>
+              <a:t>6.  Follow-up: the 2027 stock assessment</a:t>
+            </a:r>
+          </a:p>
+        </p:txBody>
+      </p:sp>
+    </p:spTree>
+  </p:cSld>
+  <p:clrMapOvr>
+    <a:masterClrMapping/>
+  </p:clrMapOvr>
+</p:sld>
+</file>
+
+<file path=ppt/slides/slide27.xml><?xml version="1.0" encoding="utf-8"?>
+<p:sld xmlns:a="http://schemas.openxmlformats.org/drawingml/2006/main" xmlns:p="http://schemas.openxmlformats.org/presentationml/2006/main" xmlns:r="http://schemas.openxmlformats.org/officeDocument/2006/relationships">
+  <p:cSld>
+    <p:spTree>
+      <p:nvGrpSpPr>
+        <p:cNvPr id="1" name=""/>
+        <p:cNvGrpSpPr/>
+        <p:nvPr/>
+      </p:nvGrpSpPr>
+      <p:grpSpPr/>
+      <p:sp>
+        <p:nvSpPr>
+          <p:cNvPr id="2" name="Title 1"/>
+          <p:cNvSpPr>
+            <a:spLocks noGrp="1"/>
+          </p:cNvSpPr>
+          <p:nvPr>
+            <p:ph type="title"/>
+          </p:nvPr>
+        </p:nvSpPr>
+        <p:spPr/>
+        <p:txBody>
+          <a:bodyPr/>
+          <a:lstStyle/>
+          <a:p>
+            <a:r>
+              <a:t>Toward the 2027 stock assessment</a:t>
             </a:r>
           </a:p>
         </p:txBody>
@@ -8297,7 +9931,7 @@
             <a:spLocks noGrp="1"/>
           </p:cNvSpPr>
           <p:nvPr>
-            <p:ph sz="half" idx="1"/>
+            <p:ph idx="1"/>
           </p:nvPr>
         </p:nvSpPr>
         <p:spPr/>
@@ -8306,46 +9940,72 @@
           <a:lstStyle/>
           <a:p>
             <a:r>
+              <a:rPr b="1" sz="1500"/>
+              <a:t>Harvest is one input to the assessment. </a:t>
+            </a:r>
+            <a:r>
               <a:rPr sz="1500"/>
-              <a:t>The correction factor is the largest term, and these two beaches now carry the worst of it.</a:t>
-            </a:r>
-          </a:p>
-          <a:p>
-            <a:r>
-              <a:rPr sz="1500" b="1"/>
-              <a:t>Newest survey: 2011. </a:t>
+              <a:t>The pumped-area population estimate and the exploitation-rate policy set the TAC that harvest is measured against; a follow-up meeting should connect the two.</a:t>
+            </a:r>
+          </a:p>
+          <a:p>
+            <a:r>
+              <a:rPr b="1" sz="1500"/>
+              <a:t>Carry a defensible uncertainty forward. </a:t>
             </a:r>
             <a:r>
               <a:rPr sz="1500"/>
-              <a:t>Twin Harbors evening rests on just two surveys.</a:t>
-            </a:r>
-          </a:p>
-          <a:p>
+              <a:t>This review now propagates five of nine error sources; the assessment should inherit the harvest interval, not a point estimate.</a:t>
+            </a:r>
+          </a:p>
+          <a:p>
+            <a:r>
+              <a:rPr b="1" sz="1500"/>
+              <a:t>Decide the survey investment before the season is set, </a:t>
+            </a:r>
             <a:r>
               <a:rPr sz="1500"/>
-              <a:t>Copalis and Mocrocks were resurveyed 2022-2026 and no longer need egress effort.</a:t>
-            </a:r>
-          </a:p>
-          <a:p>
-            <a:r>
-              <a:rPr sz="1500" b="1"/>
-              <a:t>The single most valuable unpurchased input </a:t>
+              <a:t>so the Long Beach pilot and the egress refresh can be scheduled into 2026-27 fieldwork.</a:t>
+            </a:r>
+          </a:p>
+          <a:p>
+            <a:r>
+              <a:rPr b="1" sz="1500"/>
+              <a:t>Open questions for the group: </a:t>
             </a:r>
             <a:r>
               <a:rPr sz="1500"/>
-              <a:t>in the program.</a:t>
-            </a:r>
-          </a:p>
-        </p:txBody>
-      </p:sp>
-      <p:sp>
-        <p:nvSpPr>
-          <p:cNvPr id="5" name="Content Placeholder 4"/>
-          <p:cNvSpPr>
-            <a:spLocks noGrp="1"/>
-          </p:cNvSpPr>
-          <p:nvPr>
-            <p:ph sz="half" idx="11"/>
+              <a:t>survey crewing and timing, the co-management data conversation, and how a reduced budget is allocated across beaches.</a:t>
+            </a:r>
+          </a:p>
+        </p:txBody>
+      </p:sp>
+    </p:spTree>
+  </p:cSld>
+  <p:clrMapOvr>
+    <a:masterClrMapping/>
+  </p:clrMapOvr>
+</p:sld>
+</file>
+
+<file path=ppt/slides/slide28.xml><?xml version="1.0" encoding="utf-8"?>
+<p:sld xmlns:a="http://schemas.openxmlformats.org/drawingml/2006/main" xmlns:p="http://schemas.openxmlformats.org/presentationml/2006/main" xmlns:r="http://schemas.openxmlformats.org/officeDocument/2006/relationships">
+  <p:cSld>
+    <p:spTree>
+      <p:nvGrpSpPr>
+        <p:cNvPr id="1" name=""/>
+        <p:cNvGrpSpPr/>
+        <p:nvPr/>
+      </p:nvGrpSpPr>
+      <p:grpSpPr/>
+      <p:sp>
+        <p:nvSpPr>
+          <p:cNvPr id="2" name="Title 1"/>
+          <p:cNvSpPr>
+            <a:spLocks noGrp="1"/>
+          </p:cNvSpPr>
+          <p:nvPr>
+            <p:ph type="ctrTitle"/>
           </p:nvPr>
         </p:nvSpPr>
         <p:spPr/>
@@ -8353,28 +10013,468 @@
           <a:bodyPr/>
           <a:lstStyle/>
           <a:p>
-            <a:endParaRPr/>
+            <a:r>
+              <a:t>Discussion</a:t>
+            </a:r>
+          </a:p>
+        </p:txBody>
+      </p:sp>
+    </p:spTree>
+  </p:cSld>
+  <p:clrMapOvr>
+    <a:masterClrMapping/>
+  </p:clrMapOvr>
+</p:sld>
+</file>
+
+<file path=ppt/slides/slide3.xml><?xml version="1.0" encoding="utf-8"?>
+<p:sld xmlns:a="http://schemas.openxmlformats.org/drawingml/2006/main" xmlns:p="http://schemas.openxmlformats.org/presentationml/2006/main" xmlns:r="http://schemas.openxmlformats.org/officeDocument/2006/relationships">
+  <p:cSld>
+    <p:spTree>
+      <p:nvGrpSpPr>
+        <p:cNvPr id="1" name=""/>
+        <p:cNvGrpSpPr/>
+        <p:nvPr/>
+      </p:nvGrpSpPr>
+      <p:grpSpPr/>
+      <p:sp>
+        <p:nvSpPr>
+          <p:cNvPr id="2" name="Title 1"/>
+          <p:cNvSpPr>
+            <a:spLocks noGrp="1"/>
+          </p:cNvSpPr>
+          <p:nvPr>
+            <p:ph type="ctrTitle"/>
+          </p:nvPr>
+        </p:nvSpPr>
+        <p:spPr/>
+        <p:txBody>
+          <a:bodyPr/>
+          <a:lstStyle/>
+          <a:p>
+            <a:r>
+              <a:t>1.  History of harvest monitoring and estimation</a:t>
+            </a:r>
+          </a:p>
+        </p:txBody>
+      </p:sp>
+    </p:spTree>
+  </p:cSld>
+  <p:clrMapOvr>
+    <a:masterClrMapping/>
+  </p:clrMapOvr>
+</p:sld>
+</file>
+
+<file path=ppt/slides/slide4.xml><?xml version="1.0" encoding="utf-8"?>
+<p:sld xmlns:a="http://schemas.openxmlformats.org/drawingml/2006/main" xmlns:p="http://schemas.openxmlformats.org/presentationml/2006/main" xmlns:r="http://schemas.openxmlformats.org/officeDocument/2006/relationships">
+  <p:cSld>
+    <p:spTree>
+      <p:nvGrpSpPr>
+        <p:cNvPr id="1" name=""/>
+        <p:cNvGrpSpPr/>
+        <p:nvPr/>
+      </p:nvGrpSpPr>
+      <p:grpSpPr/>
+      <p:sp>
+        <p:nvSpPr>
+          <p:cNvPr id="2" name="Title 1"/>
+          <p:cNvSpPr>
+            <a:spLocks noGrp="1"/>
+          </p:cNvSpPr>
+          <p:nvPr>
+            <p:ph type="title"/>
+          </p:nvPr>
+        </p:nvSpPr>
+        <p:spPr/>
+        <p:txBody>
+          <a:bodyPr/>
+          <a:lstStyle/>
+          <a:p>
+            <a:r>
+              <a:t>How a harvest estimate is built</a:t>
+            </a:r>
           </a:p>
         </p:txBody>
       </p:sp>
       <p:pic>
         <p:nvPicPr>
-          <p:cNvPr id="6" name="Picture 5" descr="fig08_located_egress_surveys.png"/>
+          <p:cNvPr id="3" name="Picture 2" descr="fig17_estimation_flow.png"/>
           <p:cNvPicPr>
             <a:picLocks noChangeAspect="1"/>
           </p:cNvPicPr>
           <p:nvPr/>
         </p:nvPicPr>
         <p:blipFill>
-          <a:blip r:embed="rId3"/>
+          <a:blip r:embed="rId2"/>
           <a:stretch>
             <a:fillRect/>
           </a:stretch>
         </p:blipFill>
         <p:spPr>
           <a:xfrm>
-            <a:off x="6178610" y="2085605"/>
-            <a:ext cx="5403790" cy="2456268"/>
+            <a:off x="2613660" y="1417320"/>
+            <a:ext cx="6934200" cy="3840480"/>
+          </a:xfrm>
+          <a:prstGeom prst="rect">
+            <a:avLst/>
+          </a:prstGeom>
+        </p:spPr>
+      </p:pic>
+      <p:sp>
+        <p:nvSpPr>
+          <p:cNvPr id="4" name="TextBox 3"/>
+          <p:cNvSpPr txBox="1"/>
+          <p:nvPr/>
+        </p:nvSpPr>
+        <p:spPr>
+          <a:xfrm>
+            <a:off x="594360" y="5532120"/>
+            <a:ext cx="10972800" cy="822960"/>
+          </a:xfrm>
+          <a:prstGeom prst="rect">
+            <a:avLst/>
+          </a:prstGeom>
+          <a:noFill/>
+        </p:spPr>
+        <p:txBody>
+          <a:bodyPr wrap="square">
+            <a:spAutoFit/>
+          </a:bodyPr>
+          <a:lstStyle/>
+          <a:p>
+            <a:r>
+              <a:rPr b="1" sz="1300">
+                <a:solidFill>
+                  <a:srgbClr val="1B3A5C"/>
+                </a:solidFill>
+              </a:rPr>
+              <a:t>In plain terms:  </a:t>
+            </a:r>
+            <a:r>
+              <a:rPr sz="1300"/>
+              <a:t>count the diggers once; divide by the correction factor for the whole day; multiply by catch-per-digger for harvest. On uncounted days both are borrowed. The red step never averages away.</a:t>
+            </a:r>
+          </a:p>
+        </p:txBody>
+      </p:sp>
+    </p:spTree>
+  </p:cSld>
+  <p:clrMapOvr>
+    <a:masterClrMapping/>
+  </p:clrMapOvr>
+</p:sld>
+</file>
+
+<file path=ppt/slides/slide5.xml><?xml version="1.0" encoding="utf-8"?>
+<p:sld xmlns:a="http://schemas.openxmlformats.org/drawingml/2006/main" xmlns:p="http://schemas.openxmlformats.org/presentationml/2006/main" xmlns:r="http://schemas.openxmlformats.org/officeDocument/2006/relationships">
+  <p:cSld>
+    <p:spTree>
+      <p:nvGrpSpPr>
+        <p:cNvPr id="1" name=""/>
+        <p:cNvGrpSpPr/>
+        <p:nvPr/>
+      </p:nvGrpSpPr>
+      <p:grpSpPr/>
+      <p:sp>
+        <p:nvSpPr>
+          <p:cNvPr id="2" name="Title 1"/>
+          <p:cNvSpPr>
+            <a:spLocks noGrp="1"/>
+          </p:cNvSpPr>
+          <p:nvPr>
+            <p:ph type="title"/>
+          </p:nvPr>
+        </p:nvSpPr>
+        <p:spPr/>
+        <p:txBody>
+          <a:bodyPr/>
+          <a:lstStyle/>
+          <a:p>
+            <a:r>
+              <a:t>The estimate in four equations</a:t>
+            </a:r>
+          </a:p>
+        </p:txBody>
+      </p:sp>
+      <p:sp>
+        <p:nvSpPr>
+          <p:cNvPr id="3" name="TextBox 2"/>
+          <p:cNvSpPr txBox="1"/>
+          <p:nvPr/>
+        </p:nvSpPr>
+        <p:spPr>
+          <a:xfrm>
+            <a:off x="640080" y="1371600"/>
+            <a:ext cx="10972800" cy="4206240"/>
+          </a:xfrm>
+          <a:prstGeom prst="rect">
+            <a:avLst/>
+          </a:prstGeom>
+          <a:noFill/>
+        </p:spPr>
+        <p:txBody>
+          <a:bodyPr wrap="square">
+            <a:spAutoFit/>
+          </a:bodyPr>
+          <a:lstStyle/>
+          <a:p>
+            <a:pPr>
+              <a:spcAft>
+                <a:spcPts val="600"/>
+              </a:spcAft>
+            </a:pPr>
+            <a:r>
+              <a:rPr b="1" sz="2000">
+                <a:solidFill>
+                  <a:srgbClr val="1B3A5C"/>
+                </a:solidFill>
+                <a:latin typeface="Consolas"/>
+              </a:rPr>
+              <a:t>CPUE  =  clams / diggers</a:t>
+            </a:r>
+            <a:r>
+              <a:rPr sz="1300">
+                <a:solidFill>
+                  <a:srgbClr val="444444"/>
+                </a:solidFill>
+              </a:rPr>
+              <a:t>   catch per digger, from the creel interviews</a:t>
+            </a:r>
+          </a:p>
+          <a:p>
+            <a:pPr>
+              <a:spcAft>
+                <a:spcPts val="600"/>
+              </a:spcAft>
+            </a:pPr>
+            <a:r>
+              <a:rPr b="1" sz="2000">
+                <a:solidFill>
+                  <a:srgbClr val="1B3A5C"/>
+                </a:solidFill>
+                <a:latin typeface="Consolas"/>
+              </a:rPr>
+              <a:t>E_total  =  E_t (1 - p) / CF</a:t>
+            </a:r>
+            <a:r>
+              <a:rPr sz="1300">
+                <a:solidFill>
+                  <a:srgbClr val="444444"/>
+                </a:solidFill>
+              </a:rPr>
+              <a:t>   expand the count E_t to the whole day; CF ~ 0.5 is the share present at count time</a:t>
+            </a:r>
+          </a:p>
+          <a:p>
+            <a:pPr>
+              <a:spcAft>
+                <a:spcPts val="600"/>
+              </a:spcAft>
+            </a:pPr>
+            <a:r>
+              <a:rPr b="1" sz="2000">
+                <a:solidFill>
+                  <a:srgbClr val="1B3A5C"/>
+                </a:solidFill>
+                <a:latin typeface="Consolas"/>
+              </a:rPr>
+              <a:t>Harvest  =  E_total  x  CPUE</a:t>
+            </a:r>
+            <a:r>
+              <a:rPr sz="1300">
+                <a:solidFill>
+                  <a:srgbClr val="444444"/>
+                </a:solidFill>
+              </a:rPr>
+              <a:t>   effort times catch rate, summed over segments, days, and beaches</a:t>
+            </a:r>
+          </a:p>
+          <a:p>
+            <a:pPr>
+              <a:spcAft>
+                <a:spcPts val="600"/>
+              </a:spcAft>
+            </a:pPr>
+            <a:r>
+              <a:rPr b="1" sz="2000">
+                <a:solidFill>
+                  <a:srgbClr val="1B3A5C"/>
+                </a:solidFill>
+                <a:latin typeface="Consolas"/>
+              </a:rPr>
+              <a:t>X_today  =  X_ref  x  ( Donor_today / Donor_ref )</a:t>
+            </a:r>
+            <a:r>
+              <a:rPr sz="1300">
+                <a:solidFill>
+                  <a:srgbClr val="444444"/>
+                </a:solidFill>
+              </a:rPr>
+              <a:t>   uncounted day: borrow a neighbour's day-over-day change</a:t>
+            </a:r>
+          </a:p>
+        </p:txBody>
+      </p:sp>
+      <p:sp>
+        <p:nvSpPr>
+          <p:cNvPr id="4" name="TextBox 3"/>
+          <p:cNvSpPr txBox="1"/>
+          <p:nvPr/>
+        </p:nvSpPr>
+        <p:spPr>
+          <a:xfrm>
+            <a:off x="594360" y="5760720"/>
+            <a:ext cx="10972800" cy="822960"/>
+          </a:xfrm>
+          <a:prstGeom prst="rect">
+            <a:avLst/>
+          </a:prstGeom>
+          <a:noFill/>
+        </p:spPr>
+        <p:txBody>
+          <a:bodyPr wrap="square">
+            <a:spAutoFit/>
+          </a:bodyPr>
+          <a:lstStyle/>
+          <a:p>
+            <a:r>
+              <a:rPr b="1" sz="1300">
+                <a:solidFill>
+                  <a:srgbClr val="1B3A5C"/>
+                </a:solidFill>
+              </a:rPr>
+              <a:t>In plain terms:  </a:t>
+            </a:r>
+            <a:r>
+              <a:rPr sz="1300"/>
+              <a:t>the whole method is one measured count expanded by a correction factor and a catch rate. When a beach is not counted, the first three lines are replaced by the fourth, and the day is inferred from a neighbour.</a:t>
+            </a:r>
+          </a:p>
+        </p:txBody>
+      </p:sp>
+    </p:spTree>
+  </p:cSld>
+  <p:clrMapOvr>
+    <a:masterClrMapping/>
+  </p:clrMapOvr>
+</p:sld>
+</file>
+
+<file path=ppt/slides/slide6.xml><?xml version="1.0" encoding="utf-8"?>
+<p:sld xmlns:a="http://schemas.openxmlformats.org/drawingml/2006/main" xmlns:p="http://schemas.openxmlformats.org/presentationml/2006/main" xmlns:r="http://schemas.openxmlformats.org/officeDocument/2006/relationships">
+  <p:cSld>
+    <p:spTree>
+      <p:nvGrpSpPr>
+        <p:cNvPr id="1" name=""/>
+        <p:cNvGrpSpPr/>
+        <p:nvPr/>
+      </p:nvGrpSpPr>
+      <p:grpSpPr/>
+      <p:sp>
+        <p:nvSpPr>
+          <p:cNvPr id="2" name="Title 1"/>
+          <p:cNvSpPr>
+            <a:spLocks noGrp="1"/>
+          </p:cNvSpPr>
+          <p:nvPr>
+            <p:ph type="title"/>
+          </p:nvPr>
+        </p:nvSpPr>
+        <p:spPr/>
+        <p:txBody>
+          <a:bodyPr/>
+          <a:lstStyle/>
+          <a:p>
+            <a:r>
+              <a:t>The method has moved: the May 2013 correction</a:t>
+            </a:r>
+          </a:p>
+        </p:txBody>
+      </p:sp>
+      <p:sp>
+        <p:nvSpPr>
+          <p:cNvPr id="3" name="Content Placeholder 2"/>
+          <p:cNvSpPr>
+            <a:spLocks noGrp="1"/>
+          </p:cNvSpPr>
+          <p:nvPr>
+            <p:ph idx="1" sz="half"/>
+          </p:nvPr>
+        </p:nvSpPr>
+        <p:spPr/>
+        <p:txBody>
+          <a:bodyPr wrap="square"/>
+          <a:lstStyle/>
+          <a:p>
+            <a:r>
+              <a:rPr b="1" sz="1500"/>
+              <a:t>May 2013 correction: </a:t>
+            </a:r>
+            <a:r>
+              <a:rPr sz="1500"/>
+              <a:t>the old arithmetic underestimated harvest by ~16%; re-estimated day-by-day back to 1997-98.</a:t>
+            </a:r>
+          </a:p>
+          <a:p>
+            <a:r>
+              <a:rPr sz="1500"/>
+              <a:t>The correction factor, the share of a day's effort present at the count, is the load-bearing number.</a:t>
+            </a:r>
+          </a:p>
+          <a:p>
+            <a:r>
+              <a:rPr b="1" sz="1500"/>
+              <a:t>Long Beach's table was reshaped after 2013: </a:t>
+            </a:r>
+            <a:r>
+              <a:rPr sz="1500"/>
+              <a:t>+33% expanded effort for the same count.</a:t>
+            </a:r>
+          </a:p>
+          <a:p>
+            <a:r>
+              <a:rPr sz="1500"/>
+              <a:t>Comparing Long Beach effort across that change compares two different instruments.</a:t>
+            </a:r>
+          </a:p>
+        </p:txBody>
+      </p:sp>
+      <p:sp>
+        <p:nvSpPr>
+          <p:cNvPr id="5" name="Content Placeholder 4"/>
+          <p:cNvSpPr>
+            <a:spLocks noGrp="1"/>
+          </p:cNvSpPr>
+          <p:nvPr>
+            <p:ph idx="11" sz="half"/>
+          </p:nvPr>
+        </p:nvSpPr>
+        <p:spPr/>
+        <p:txBody>
+          <a:bodyPr/>
+          <a:lstStyle/>
+          <a:p/>
+        </p:txBody>
+      </p:sp>
+      <p:pic>
+        <p:nvPicPr>
+          <p:cNvPr id="6" name="Picture 5" descr="fig09_operational_vs_vintage.png"/>
+          <p:cNvPicPr>
+            <a:picLocks noChangeAspect="1"/>
+          </p:cNvPicPr>
+          <p:nvPr/>
+        </p:nvPicPr>
+        <p:blipFill>
+          <a:blip r:embed="rId2"/>
+          <a:stretch>
+            <a:fillRect/>
+          </a:stretch>
+        </p:blipFill>
+        <p:spPr>
+          <a:xfrm>
+            <a:off x="6178610" y="1422412"/>
+            <a:ext cx="5403790" cy="3782653"/>
           </a:xfrm>
           <a:prstGeom prst="rect">
             <a:avLst/>
@@ -8389,8 +10489,8 @@
 </p:sld>
 </file>
 
-<file path=ppt/slides/slide2.xml><?xml version="1.0" encoding="utf-8"?>
-<p:sld xmlns:a="http://schemas.openxmlformats.org/drawingml/2006/main" xmlns:r="http://schemas.openxmlformats.org/officeDocument/2006/relationships" xmlns:p="http://schemas.openxmlformats.org/presentationml/2006/main">
+<file path=ppt/slides/slide7.xml><?xml version="1.0" encoding="utf-8"?>
+<p:sld xmlns:a="http://schemas.openxmlformats.org/drawingml/2006/main" xmlns:p="http://schemas.openxmlformats.org/presentationml/2006/main" xmlns:r="http://schemas.openxmlformats.org/officeDocument/2006/relationships">
   <p:cSld>
     <p:spTree>
       <p:nvGrpSpPr>
@@ -8398,14 +10498,7 @@
         <p:cNvGrpSpPr/>
         <p:nvPr/>
       </p:nvGrpSpPr>
-      <p:grpSpPr>
-        <a:xfrm>
-          <a:off x="0" y="0"/>
-          <a:ext cx="0" cy="0"/>
-          <a:chOff x="0" y="0"/>
-          <a:chExt cx="0" cy="0"/>
-        </a:xfrm>
-      </p:grpSpPr>
+      <p:grpSpPr/>
       <p:sp>
         <p:nvSpPr>
           <p:cNvPr id="2" name="Title 1"/>
@@ -8413,7 +10506,7 @@
             <a:spLocks noGrp="1"/>
           </p:cNvSpPr>
           <p:nvPr>
-            <p:ph type="title"/>
+            <p:ph type="ctrTitle"/>
           </p:nvPr>
         </p:nvSpPr>
         <p:spPr/>
@@ -8422,51 +10515,7 @@
           <a:lstStyle/>
           <a:p>
             <a:r>
-              <a:t>The question this answers</a:t>
-            </a:r>
-          </a:p>
-        </p:txBody>
-      </p:sp>
-      <p:sp>
-        <p:nvSpPr>
-          <p:cNvPr id="3" name="Content Placeholder 2"/>
-          <p:cNvSpPr>
-            <a:spLocks noGrp="1"/>
-          </p:cNvSpPr>
-          <p:nvPr>
-            <p:ph idx="1"/>
-          </p:nvPr>
-        </p:nvSpPr>
-        <p:spPr/>
-        <p:txBody>
-          <a:bodyPr wrap="square"/>
-          <a:lstStyle/>
-          <a:p>
-            <a:r>
-              <a:rPr b="1"/>
-              <a:t>Given a crew of finite size: </a:t>
-            </a:r>
-            <a:r>
-              <a:t>how many beach-days per tide series must be counted, and which ones?</a:t>
-            </a:r>
-          </a:p>
-          <a:p>
-            <a:r>
-              <a:t>This is new work, the program has never had a quantitative answer.</a:t>
-            </a:r>
-          </a:p>
-          <a:p>
-            <a:r>
-              <a:rPr b="1"/>
-              <a:t>Judged against a published standard: </a:t>
-            </a:r>
-            <a:r>
-              <a:t>CV ≤ 0.20 (creel-survey design target) and NOAA MRIP's ≤ 0.30 publication threshold.</a:t>
-            </a:r>
-          </a:p>
-          <a:p>
-            <a:r>
-              <a:t>Every figure here is a lower bound: it excludes beach-count observer error, which has never been measured.</a:t>
+              <a:t>2.  Data gaps and uncertainty</a:t>
             </a:r>
           </a:p>
         </p:txBody>
@@ -8479,8 +10528,8 @@
 </p:sld>
 </file>
 
-<file path=ppt/slides/slide20.xml><?xml version="1.0" encoding="utf-8"?>
-<p:sld xmlns:a="http://schemas.openxmlformats.org/drawingml/2006/main" xmlns:r="http://schemas.openxmlformats.org/officeDocument/2006/relationships" xmlns:p="http://schemas.openxmlformats.org/presentationml/2006/main">
+<file path=ppt/slides/slide8.xml><?xml version="1.0" encoding="utf-8"?>
+<p:sld xmlns:a="http://schemas.openxmlformats.org/drawingml/2006/main" xmlns:p="http://schemas.openxmlformats.org/presentationml/2006/main" xmlns:r="http://schemas.openxmlformats.org/officeDocument/2006/relationships">
   <p:cSld>
     <p:spTree>
       <p:nvGrpSpPr>
@@ -8488,14 +10537,7 @@
         <p:cNvGrpSpPr/>
         <p:nvPr/>
       </p:nvGrpSpPr>
-      <p:grpSpPr>
-        <a:xfrm>
-          <a:off x="0" y="0"/>
-          <a:ext cx="0" cy="0"/>
-          <a:chOff x="0" y="0"/>
-          <a:chExt cx="0" cy="0"/>
-        </a:xfrm>
-      </p:grpSpPr>
+      <p:grpSpPr/>
       <p:sp>
         <p:nvSpPr>
           <p:cNvPr id="2" name="Title 1"/>
@@ -8512,7 +10554,7 @@
           <a:lstStyle/>
           <a:p>
             <a:r>
-              <a:t>Pulling the southern beaches back is not free, and no tribal count offsets it</a:t>
+              <a:t>The correction factor dominates, and it does not average down</a:t>
             </a:r>
           </a:p>
         </p:txBody>
@@ -8524,7 +10566,7 @@
             <a:spLocks noGrp="1"/>
           </p:cNvSpPr>
           <p:nvPr>
-            <p:ph sz="half" idx="1"/>
+            <p:ph idx="1" sz="half"/>
           </p:nvPr>
         </p:nvSpPr>
         <p:spPr/>
@@ -8533,42 +10575,34 @@
           <a:lstStyle/>
           <a:p>
             <a:r>
-              <a:rPr sz="1400" b="1"/>
-              <a:t>Copalis and Mocrocks are the donor for ~63% </a:t>
-            </a:r>
-            <a:r>
-              <a:rPr sz="1400"/>
-              <a:t>of Long Beach / Twin Harbors imputed days; jointly they are the best donor (sd 0.43 in log, against 0.62 and 0.64 for either alone).</a:t>
-            </a:r>
-          </a:p>
-          <a:p>
-            <a:r>
-              <a:rPr sz="1400" b="1"/>
-              <a:t>Under state-Quinault day-trading (2 on, 2 off) </a:t>
-            </a:r>
-            <a:r>
-              <a:rPr sz="1400"/>
-              <a:t>exactly one of the two is state-counted each dig day, so the state seldom holds that best joint donor.</a:t>
-            </a:r>
-          </a:p>
-          <a:p>
-            <a:r>
-              <a:rPr sz="1400" b="1"/>
-              <a:t>The Quinault dig the alternate days, </a:t>
-            </a:r>
-            <a:r>
-              <a:rPr sz="1400"/>
-              <a:t>but theirs is a smaller, lower-participation fishery: its effort and catch rate do not proxy the state, so those counts cannot fill the state donor series.</a:t>
-            </a:r>
-          </a:p>
-          <a:p>
-            <a:r>
-              <a:rPr sz="1400" b="1"/>
-              <a:t>Pulling state sampling to 45% </a:t>
-            </a:r>
-            <a:r>
-              <a:rPr sz="1400"/>
-              <a:t>raises single-day imputation error from 0.45 to 0.50 in the log, with no data-share available to offset it.</a:t>
+              <a:rPr b="1" sz="1500"/>
+              <a:t>71-96% of season effort variance </a:t>
+            </a:r>
+            <a:r>
+              <a:rPr sz="1500"/>
+              <a:t>at every beach is the correction factor.</a:t>
+            </a:r>
+          </a:p>
+          <a:p>
+            <a:r>
+              <a:rPr sz="1500"/>
+              <a:t>It is systematic: one table scales every beach-day, so counting more days cannot shrink it.</a:t>
+            </a:r>
+          </a:p>
+          <a:p>
+            <a:r>
+              <a:rPr sz="1500"/>
+              <a:t>Imputation is large on a single day but cancels within a tide series (lag-1 autocorrelation -0.68).</a:t>
+            </a:r>
+          </a:p>
+          <a:p>
+            <a:r>
+              <a:rPr b="1" sz="1500"/>
+              <a:t>The lever is surveys, not crew days </a:t>
+            </a:r>
+            <a:r>
+              <a:rPr sz="1500"/>
+              <a:t>for the term that dominates effort.</a:t>
             </a:r>
           </a:p>
         </p:txBody>
@@ -8580,36 +10614,34 @@
             <a:spLocks noGrp="1"/>
           </p:cNvSpPr>
           <p:nvPr>
-            <p:ph sz="half" idx="11"/>
+            <p:ph idx="11" sz="half"/>
           </p:nvPr>
         </p:nvSpPr>
         <p:spPr/>
         <p:txBody>
           <a:bodyPr/>
           <a:lstStyle/>
-          <a:p>
-            <a:endParaRPr/>
-          </a:p>
+          <a:p/>
         </p:txBody>
       </p:sp>
       <p:pic>
         <p:nvPicPr>
-          <p:cNvPr id="6" name="Picture 5" descr="fig15_donor_comanagement.png"/>
+          <p:cNvPr id="6" name="Picture 5" descr="fig10_variance_shares.png"/>
           <p:cNvPicPr>
             <a:picLocks noChangeAspect="1"/>
           </p:cNvPicPr>
           <p:nvPr/>
         </p:nvPicPr>
         <p:blipFill>
-          <a:blip r:embed="rId3"/>
+          <a:blip r:embed="rId2"/>
           <a:stretch>
             <a:fillRect/>
           </a:stretch>
         </p:blipFill>
         <p:spPr>
           <a:xfrm>
-            <a:off x="6178610" y="1692602"/>
-            <a:ext cx="5403790" cy="3242274"/>
+            <a:off x="6178610" y="1839978"/>
+            <a:ext cx="5403790" cy="2947521"/>
           </a:xfrm>
           <a:prstGeom prst="rect">
             <a:avLst/>
@@ -8624,8 +10656,8 @@
 </p:sld>
 </file>
 
-<file path=ppt/slides/slide21.xml><?xml version="1.0" encoding="utf-8"?>
-<p:sld xmlns:a="http://schemas.openxmlformats.org/drawingml/2006/main" xmlns:r="http://schemas.openxmlformats.org/officeDocument/2006/relationships" xmlns:p="http://schemas.openxmlformats.org/presentationml/2006/main">
+<file path=ppt/slides/slide9.xml><?xml version="1.0" encoding="utf-8"?>
+<p:sld xmlns:a="http://schemas.openxmlformats.org/drawingml/2006/main" xmlns:p="http://schemas.openxmlformats.org/presentationml/2006/main" xmlns:r="http://schemas.openxmlformats.org/officeDocument/2006/relationships">
   <p:cSld>
     <p:spTree>
       <p:nvGrpSpPr>
@@ -8633,14 +10665,7 @@
         <p:cNvGrpSpPr/>
         <p:nvPr/>
       </p:nvGrpSpPr>
-      <p:grpSpPr>
-        <a:xfrm>
-          <a:off x="0" y="0"/>
-          <a:ext cx="0" cy="0"/>
-          <a:chOff x="0" y="0"/>
-          <a:chExt cx="0" cy="0"/>
-        </a:xfrm>
-      </p:grpSpPr>
+      <p:grpSpPr/>
       <p:sp>
         <p:nvSpPr>
           <p:cNvPr id="2" name="Title 1"/>
@@ -8648,7 +10673,7 @@
             <a:spLocks noGrp="1"/>
           </p:cNvSpPr>
           <p:nvPr>
-            <p:ph type="ctrTitle"/>
+            <p:ph type="title"/>
           </p:nvPr>
         </p:nvSpPr>
         <p:spPr/>
@@ -8657,955 +10682,29 @@
           <a:lstStyle/>
           <a:p>
             <a:r>
-              <a:t>A Long Beach ingress / egress pilot</a:t>
-            </a:r>
-          </a:p>
-        </p:txBody>
-      </p:sp>
-    </p:spTree>
-  </p:cSld>
-  <p:clrMapOvr>
-    <a:masterClrMapping/>
-  </p:clrMapOvr>
-</p:sld>
-</file>
-
-<file path=ppt/slides/slide22.xml><?xml version="1.0" encoding="utf-8"?>
-<p:sld xmlns:a="http://schemas.openxmlformats.org/drawingml/2006/main" xmlns:r="http://schemas.openxmlformats.org/officeDocument/2006/relationships" xmlns:p="http://schemas.openxmlformats.org/presentationml/2006/main">
-  <p:cSld>
-    <p:spTree>
-      <p:nvGrpSpPr>
-        <p:cNvPr id="1" name=""/>
-        <p:cNvGrpSpPr/>
-        <p:nvPr/>
-      </p:nvGrpSpPr>
-      <p:grpSpPr>
-        <a:xfrm>
-          <a:off x="0" y="0"/>
-          <a:ext cx="0" cy="0"/>
-          <a:chOff x="0" y="0"/>
-          <a:chExt cx="0" cy="0"/>
-        </a:xfrm>
-      </p:grpSpPr>
-      <p:sp>
-        <p:nvSpPr>
-          <p:cNvPr id="2" name="Title 1"/>
-          <p:cNvSpPr>
-            <a:spLocks noGrp="1"/>
-          </p:cNvSpPr>
-          <p:nvPr>
-            <p:ph type="title"/>
-          </p:nvPr>
-        </p:nvSpPr>
-        <p:spPr/>
-        <p:txBody>
-          <a:bodyPr/>
-          <a:lstStyle/>
-          <a:p>
-            <a:r>
-              <a:t>The design: a whole-beach egress survey across six approaches</a:t>
-            </a:r>
-          </a:p>
-        </p:txBody>
-      </p:sp>
-      <p:graphicFrame>
-        <p:nvGraphicFramePr>
-          <p:cNvPr id="3" name="Table 2"/>
-          <p:cNvGraphicFramePr>
-            <a:graphicFrameLocks noGrp="1"/>
-          </p:cNvGraphicFramePr>
-          <p:nvPr/>
-        </p:nvGraphicFramePr>
-        <p:xfrm>
-          <a:off x="594360" y="1325880"/>
-          <a:ext cx="10607040" cy="2560320"/>
-        </p:xfrm>
-        <a:graphic>
-          <a:graphicData uri="http://schemas.openxmlformats.org/drawingml/2006/table">
-            <a:tbl>
-              <a:tblPr firstRow="1" bandRow="1">
-                <a:tableStyleId>{5C22544A-7EE6-4342-B048-85BDC9FD1C3A}</a:tableStyleId>
-              </a:tblPr>
-              <a:tblGrid>
-                <a:gridCol w="3657600">
-                  <a:extLst>
-                    <a:ext uri="{9D8B030D-6E8A-4147-A177-3AD203B41FA5}">
-                      <a16:colId xmlns:a16="http://schemas.microsoft.com/office/drawing/2014/main" val="20000"/>
-                    </a:ext>
-                  </a:extLst>
-                </a:gridCol>
-                <a:gridCol w="4937760">
-                  <a:extLst>
-                    <a:ext uri="{9D8B030D-6E8A-4147-A177-3AD203B41FA5}">
-                      <a16:colId xmlns:a16="http://schemas.microsoft.com/office/drawing/2014/main" val="20001"/>
-                    </a:ext>
-                  </a:extLst>
-                </a:gridCol>
-                <a:gridCol w="2011680">
-                  <a:extLst>
-                    <a:ext uri="{9D8B030D-6E8A-4147-A177-3AD203B41FA5}">
-                      <a16:colId xmlns:a16="http://schemas.microsoft.com/office/drawing/2014/main" val="20002"/>
-                    </a:ext>
-                  </a:extLst>
-                </a:gridCol>
-              </a:tblGrid>
-              <a:tr h="365760">
-                <a:tc>
-                  <a:txBody>
-                    <a:bodyPr/>
-                    <a:lstStyle/>
-                    <a:p>
-                      <a:r>
-                        <a:rPr sz="1300" b="1">
-                          <a:solidFill>
-                            <a:srgbClr val="FFFFFF"/>
-                          </a:solidFill>
-                        </a:rPr>
-                        <a:t>Vehicle approach  (south to north)</a:t>
-                      </a:r>
-                    </a:p>
-                  </a:txBody>
-                  <a:tcPr>
-                    <a:solidFill>
-                      <a:srgbClr val="1B3A5C"/>
-                    </a:solidFill>
-                  </a:tcPr>
-                </a:tc>
-                <a:tc>
-                  <a:txBody>
-                    <a:bodyPr/>
-                    <a:lstStyle/>
-                    <a:p>
-                      <a:r>
-                        <a:rPr sz="1300" b="1">
-                          <a:solidFill>
-                            <a:srgbClr val="FFFFFF"/>
-                          </a:solidFill>
-                        </a:rPr>
-                        <a:t>Historical egress coverage</a:t>
-                      </a:r>
-                    </a:p>
-                  </a:txBody>
-                  <a:tcPr>
-                    <a:solidFill>
-                      <a:srgbClr val="1B3A5C"/>
-                    </a:solidFill>
-                  </a:tcPr>
-                </a:tc>
-                <a:tc>
-                  <a:txBody>
-                    <a:bodyPr/>
-                    <a:lstStyle/>
-                    <a:p>
-                      <a:r>
-                        <a:rPr sz="1300" b="1">
-                          <a:solidFill>
-                            <a:srgbClr val="FFFFFF"/>
-                          </a:solidFill>
-                        </a:rPr>
-                        <a:t>Pilot role</a:t>
-                      </a:r>
-                    </a:p>
-                  </a:txBody>
-                  <a:tcPr>
-                    <a:solidFill>
-                      <a:srgbClr val="1B3A5C"/>
-                    </a:solidFill>
-                  </a:tcPr>
-                </a:tc>
-                <a:extLst>
-                  <a:ext uri="{0D108BD9-81ED-4DB2-BD59-A6C34878D82A}">
-                    <a16:rowId xmlns:a16="http://schemas.microsoft.com/office/drawing/2014/main" val="10000"/>
-                  </a:ext>
-                </a:extLst>
-              </a:tr>
-              <a:tr h="365760">
-                <a:tc>
-                  <a:txBody>
-                    <a:bodyPr/>
-                    <a:lstStyle/>
-                    <a:p>
-                      <a:r>
-                        <a:rPr sz="1200"/>
-                        <a:t>Seaview</a:t>
-                      </a:r>
-                    </a:p>
-                  </a:txBody>
-                  <a:tcPr/>
-                </a:tc>
-                <a:tc>
-                  <a:txBody>
-                    <a:bodyPr/>
-                    <a:lstStyle/>
-                    <a:p>
-                      <a:r>
-                        <a:rPr sz="1200"/>
-                        <a:t>2004 only (south to Beards Hollow)</a:t>
-                      </a:r>
-                    </a:p>
-                  </a:txBody>
-                  <a:tcPr/>
-                </a:tc>
-                <a:tc>
-                  <a:txBody>
-                    <a:bodyPr/>
-                    <a:lstStyle/>
-                    <a:p>
-                      <a:r>
-                        <a:rPr sz="1200"/>
-                        <a:t>Counter</a:t>
-                      </a:r>
-                    </a:p>
-                  </a:txBody>
-                  <a:tcPr/>
-                </a:tc>
-                <a:extLst>
-                  <a:ext uri="{0D108BD9-81ED-4DB2-BD59-A6C34878D82A}">
-                    <a16:rowId xmlns:a16="http://schemas.microsoft.com/office/drawing/2014/main" val="10001"/>
-                  </a:ext>
-                </a:extLst>
-              </a:tr>
-              <a:tr h="365760">
-                <a:tc>
-                  <a:txBody>
-                    <a:bodyPr/>
-                    <a:lstStyle/>
-                    <a:p>
-                      <a:r>
-                        <a:rPr sz="1200"/>
-                        <a:t>Long Beach (Bolstad)</a:t>
-                      </a:r>
-                    </a:p>
-                  </a:txBody>
-                  <a:tcPr/>
-                </a:tc>
-                <a:tc>
-                  <a:txBody>
-                    <a:bodyPr/>
-                    <a:lstStyle/>
-                    <a:p>
-                      <a:r>
-                        <a:rPr sz="1200"/>
-                        <a:t>never counted</a:t>
-                      </a:r>
-                    </a:p>
-                  </a:txBody>
-                  <a:tcPr/>
-                </a:tc>
-                <a:tc>
-                  <a:txBody>
-                    <a:bodyPr/>
-                    <a:lstStyle/>
-                    <a:p>
-                      <a:r>
-                        <a:rPr sz="1200"/>
-                        <a:t>Counter</a:t>
-                      </a:r>
-                    </a:p>
-                  </a:txBody>
-                  <a:tcPr/>
-                </a:tc>
-                <a:extLst>
-                  <a:ext uri="{0D108BD9-81ED-4DB2-BD59-A6C34878D82A}">
-                    <a16:rowId xmlns:a16="http://schemas.microsoft.com/office/drawing/2014/main" val="10002"/>
-                  </a:ext>
-                </a:extLst>
-              </a:tr>
-              <a:tr h="365760">
-                <a:tc>
-                  <a:txBody>
-                    <a:bodyPr/>
-                    <a:lstStyle/>
-                    <a:p>
-                      <a:r>
-                        <a:rPr sz="1200"/>
-                        <a:t>Cranberry</a:t>
-                      </a:r>
-                    </a:p>
-                  </a:txBody>
-                  <a:tcPr/>
-                </a:tc>
-                <a:tc>
-                  <a:txBody>
-                    <a:bodyPr/>
-                    <a:lstStyle/>
-                    <a:p>
-                      <a:r>
-                        <a:rPr sz="1200"/>
-                        <a:t>never counted</a:t>
-                      </a:r>
-                    </a:p>
-                  </a:txBody>
-                  <a:tcPr/>
-                </a:tc>
-                <a:tc>
-                  <a:txBody>
-                    <a:bodyPr/>
-                    <a:lstStyle/>
-                    <a:p>
-                      <a:r>
-                        <a:rPr sz="1200"/>
-                        <a:t>Counter</a:t>
-                      </a:r>
-                    </a:p>
-                  </a:txBody>
-                  <a:tcPr/>
-                </a:tc>
-                <a:extLst>
-                  <a:ext uri="{0D108BD9-81ED-4DB2-BD59-A6C34878D82A}">
-                    <a16:rowId xmlns:a16="http://schemas.microsoft.com/office/drawing/2014/main" val="10003"/>
-                  </a:ext>
-                </a:extLst>
-              </a:tr>
-              <a:tr h="365760">
-                <a:tc>
-                  <a:txBody>
-                    <a:bodyPr/>
-                    <a:lstStyle/>
-                    <a:p>
-                      <a:r>
-                        <a:rPr sz="1200"/>
-                        <a:t>Klipsan</a:t>
-                      </a:r>
-                    </a:p>
-                  </a:txBody>
-                  <a:tcPr/>
-                </a:tc>
-                <a:tc>
-                  <a:txBody>
-                    <a:bodyPr/>
-                    <a:lstStyle/>
-                    <a:p>
-                      <a:r>
-                        <a:rPr sz="1200"/>
-                        <a:t>never counted</a:t>
-                      </a:r>
-                    </a:p>
-                  </a:txBody>
-                  <a:tcPr/>
-                </a:tc>
-                <a:tc>
-                  <a:txBody>
-                    <a:bodyPr/>
-                    <a:lstStyle/>
-                    <a:p>
-                      <a:r>
-                        <a:rPr sz="1200"/>
-                        <a:t>Counter</a:t>
-                      </a:r>
-                    </a:p>
-                  </a:txBody>
-                  <a:tcPr/>
-                </a:tc>
-                <a:extLst>
-                  <a:ext uri="{0D108BD9-81ED-4DB2-BD59-A6C34878D82A}">
-                    <a16:rowId xmlns:a16="http://schemas.microsoft.com/office/drawing/2014/main" val="10004"/>
-                  </a:ext>
-                </a:extLst>
-              </a:tr>
-              <a:tr h="365760">
-                <a:tc>
-                  <a:txBody>
-                    <a:bodyPr/>
-                    <a:lstStyle/>
-                    <a:p>
-                      <a:r>
-                        <a:rPr sz="1200"/>
-                        <a:t>Ocean Park</a:t>
-                      </a:r>
-                    </a:p>
-                  </a:txBody>
-                  <a:tcPr/>
-                </a:tc>
-                <a:tc>
-                  <a:txBody>
-                    <a:bodyPr/>
-                    <a:lstStyle/>
-                    <a:p>
-                      <a:r>
-                        <a:rPr sz="1200"/>
-                        <a:t>never counted</a:t>
-                      </a:r>
-                    </a:p>
-                  </a:txBody>
-                  <a:tcPr/>
-                </a:tc>
-                <a:tc>
-                  <a:txBody>
-                    <a:bodyPr/>
-                    <a:lstStyle/>
-                    <a:p>
-                      <a:r>
-                        <a:rPr sz="1200"/>
-                        <a:t>Counter</a:t>
-                      </a:r>
-                    </a:p>
-                  </a:txBody>
-                  <a:tcPr/>
-                </a:tc>
-                <a:extLst>
-                  <a:ext uri="{0D108BD9-81ED-4DB2-BD59-A6C34878D82A}">
-                    <a16:rowId xmlns:a16="http://schemas.microsoft.com/office/drawing/2014/main" val="10005"/>
-                  </a:ext>
-                </a:extLst>
-              </a:tr>
-              <a:tr h="365760">
-                <a:tc>
-                  <a:txBody>
-                    <a:bodyPr/>
-                    <a:lstStyle/>
-                    <a:p>
-                      <a:r>
-                        <a:rPr sz="1200"/>
-                        <a:t>Oysterville</a:t>
-                      </a:r>
-                    </a:p>
-                  </a:txBody>
-                  <a:tcPr/>
-                </a:tc>
-                <a:tc>
-                  <a:txBody>
-                    <a:bodyPr/>
-                    <a:lstStyle/>
-                    <a:p>
-                      <a:r>
-                        <a:rPr sz="1200"/>
-                        <a:t>1990, 1998, 2004, 2011 (north to Leadbetter)</a:t>
-                      </a:r>
-                    </a:p>
-                  </a:txBody>
-                  <a:tcPr/>
-                </a:tc>
-                <a:tc>
-                  <a:txBody>
-                    <a:bodyPr/>
-                    <a:lstStyle/>
-                    <a:p>
-                      <a:r>
-                        <a:rPr sz="1200"/>
-                        <a:t>Counter</a:t>
-                      </a:r>
-                    </a:p>
-                  </a:txBody>
-                  <a:tcPr/>
-                </a:tc>
-                <a:extLst>
-                  <a:ext uri="{0D108BD9-81ED-4DB2-BD59-A6C34878D82A}">
-                    <a16:rowId xmlns:a16="http://schemas.microsoft.com/office/drawing/2014/main" val="10006"/>
-                  </a:ext>
-                </a:extLst>
-              </a:tr>
-            </a:tbl>
-          </a:graphicData>
-        </a:graphic>
-      </p:graphicFrame>
-      <p:sp>
-        <p:nvSpPr>
-          <p:cNvPr id="4" name="TextBox 3"/>
-          <p:cNvSpPr txBox="1"/>
-          <p:nvPr/>
-        </p:nvSpPr>
-        <p:spPr>
-          <a:xfrm>
-            <a:off x="594360" y="4297680"/>
-            <a:ext cx="10972800" cy="1554480"/>
-          </a:xfrm>
-          <a:prstGeom prst="rect">
-            <a:avLst/>
-          </a:prstGeom>
-          <a:noFill/>
-        </p:spPr>
-        <p:txBody>
-          <a:bodyPr wrap="square">
-            <a:spAutoFit/>
-          </a:bodyPr>
-          <a:lstStyle/>
-          <a:p>
-            <a:r>
-              <a:rPr sz="1300"/>
-              <a:t>One counter per approach records cars on and off in 15-minute bins across the tidal window (about three hours before to ninety minutes after low water); a roving crew runs the instantaneous beach count near the peak and works the full length for catch and effort. Long Beach splits into seven census sections between Beards Hollow and Leadbetter Point. Four of its six approaches have never been counted, and no survey has ever counted all six on the same day: coverage was one end or the other, on separate days. This is the first whole-beach measurement.</a:t>
-            </a:r>
-          </a:p>
-        </p:txBody>
-      </p:sp>
-    </p:spTree>
-  </p:cSld>
-  <p:clrMapOvr>
-    <a:masterClrMapping/>
-  </p:clrMapOvr>
-</p:sld>
-</file>
-
-<file path=ppt/slides/slide23.xml><?xml version="1.0" encoding="utf-8"?>
-<p:sld xmlns:a="http://schemas.openxmlformats.org/drawingml/2006/main" xmlns:r="http://schemas.openxmlformats.org/officeDocument/2006/relationships" xmlns:p="http://schemas.openxmlformats.org/presentationml/2006/main">
-  <p:cSld>
-    <p:spTree>
-      <p:nvGrpSpPr>
-        <p:cNvPr id="1" name=""/>
-        <p:cNvGrpSpPr/>
-        <p:nvPr/>
-      </p:nvGrpSpPr>
-      <p:grpSpPr>
-        <a:xfrm>
-          <a:off x="0" y="0"/>
-          <a:ext cx="0" cy="0"/>
-          <a:chOff x="0" y="0"/>
-          <a:chExt cx="0" cy="0"/>
-        </a:xfrm>
-      </p:grpSpPr>
-      <p:sp>
-        <p:nvSpPr>
-          <p:cNvPr id="2" name="Title 1"/>
-          <p:cNvSpPr>
-            <a:spLocks noGrp="1"/>
-          </p:cNvSpPr>
-          <p:nvPr>
-            <p:ph type="title"/>
-          </p:nvPr>
-        </p:nvSpPr>
-        <p:spPr/>
-        <p:txBody>
-          <a:bodyPr/>
-          <a:lstStyle/>
-          <a:p>
-            <a:r>
-              <a:t>Staffing: eight for Long Beach, thirteen with a paired northern beach</a:t>
-            </a:r>
-          </a:p>
-        </p:txBody>
-      </p:sp>
-      <p:graphicFrame>
-        <p:nvGraphicFramePr>
-          <p:cNvPr id="3" name="Table 2"/>
-          <p:cNvGraphicFramePr>
-            <a:graphicFrameLocks noGrp="1"/>
-          </p:cNvGraphicFramePr>
-          <p:nvPr/>
-        </p:nvGraphicFramePr>
-        <p:xfrm>
-          <a:off x="594360" y="1325880"/>
-          <a:ext cx="10972800" cy="2194560"/>
-        </p:xfrm>
-        <a:graphic>
-          <a:graphicData uri="http://schemas.openxmlformats.org/drawingml/2006/table">
-            <a:tbl>
-              <a:tblPr firstRow="1" bandRow="1">
-                <a:tableStyleId>{5C22544A-7EE6-4342-B048-85BDC9FD1C3A}</a:tableStyleId>
-              </a:tblPr>
-              <a:tblGrid>
-                <a:gridCol w="5120640">
-                  <a:extLst>
-                    <a:ext uri="{9D8B030D-6E8A-4147-A177-3AD203B41FA5}">
-                      <a16:colId xmlns:a16="http://schemas.microsoft.com/office/drawing/2014/main" val="20000"/>
-                    </a:ext>
-                  </a:extLst>
-                </a:gridCol>
-                <a:gridCol w="1188720">
-                  <a:extLst>
-                    <a:ext uri="{9D8B030D-6E8A-4147-A177-3AD203B41FA5}">
-                      <a16:colId xmlns:a16="http://schemas.microsoft.com/office/drawing/2014/main" val="20001"/>
-                    </a:ext>
-                  </a:extLst>
-                </a:gridCol>
-                <a:gridCol w="4663440">
-                  <a:extLst>
-                    <a:ext uri="{9D8B030D-6E8A-4147-A177-3AD203B41FA5}">
-                      <a16:colId xmlns:a16="http://schemas.microsoft.com/office/drawing/2014/main" val="20002"/>
-                    </a:ext>
-                  </a:extLst>
-                </a:gridCol>
-              </a:tblGrid>
-              <a:tr h="365760">
-                <a:tc>
-                  <a:txBody>
-                    <a:bodyPr/>
-                    <a:lstStyle/>
-                    <a:p>
-                      <a:r>
-                        <a:rPr sz="1300" b="1">
-                          <a:solidFill>
-                            <a:srgbClr val="FFFFFF"/>
-                          </a:solidFill>
-                        </a:rPr>
-                        <a:t>Role</a:t>
-                      </a:r>
-                    </a:p>
-                  </a:txBody>
-                  <a:tcPr>
-                    <a:solidFill>
-                      <a:srgbClr val="1B3A5C"/>
-                    </a:solidFill>
-                  </a:tcPr>
-                </a:tc>
-                <a:tc>
-                  <a:txBody>
-                    <a:bodyPr/>
-                    <a:lstStyle/>
-                    <a:p>
-                      <a:r>
-                        <a:rPr sz="1300" b="1">
-                          <a:solidFill>
-                            <a:srgbClr val="FFFFFF"/>
-                          </a:solidFill>
-                        </a:rPr>
-                        <a:t>Staff</a:t>
-                      </a:r>
-                    </a:p>
-                  </a:txBody>
-                  <a:tcPr>
-                    <a:solidFill>
-                      <a:srgbClr val="1B3A5C"/>
-                    </a:solidFill>
-                  </a:tcPr>
-                </a:tc>
-                <a:tc>
-                  <a:txBody>
-                    <a:bodyPr/>
-                    <a:lstStyle/>
-                    <a:p>
-                      <a:r>
-                        <a:rPr sz="1300" b="1">
-                          <a:solidFill>
-                            <a:srgbClr val="FFFFFF"/>
-                          </a:solidFill>
-                        </a:rPr>
-                        <a:t>Basis</a:t>
-                      </a:r>
-                    </a:p>
-                  </a:txBody>
-                  <a:tcPr>
-                    <a:solidFill>
-                      <a:srgbClr val="1B3A5C"/>
-                    </a:solidFill>
-                  </a:tcPr>
-                </a:tc>
-                <a:extLst>
-                  <a:ext uri="{0D108BD9-81ED-4DB2-BD59-A6C34878D82A}">
-                    <a16:rowId xmlns:a16="http://schemas.microsoft.com/office/drawing/2014/main" val="10000"/>
-                  </a:ext>
-                </a:extLst>
-              </a:tr>
-              <a:tr h="365760">
-                <a:tc>
-                  <a:txBody>
-                    <a:bodyPr/>
-                    <a:lstStyle/>
-                    <a:p>
-                      <a:r>
-                        <a:rPr sz="1200"/>
-                        <a:t>Approach counters</a:t>
-                      </a:r>
-                    </a:p>
-                  </a:txBody>
-                  <a:tcPr/>
-                </a:tc>
-                <a:tc>
-                  <a:txBody>
-                    <a:bodyPr/>
-                    <a:lstStyle/>
-                    <a:p>
-                      <a:r>
-                        <a:rPr sz="1200"/>
-                        <a:t>6</a:t>
-                      </a:r>
-                    </a:p>
-                  </a:txBody>
-                  <a:tcPr/>
-                </a:tc>
-                <a:tc>
-                  <a:txBody>
-                    <a:bodyPr/>
-                    <a:lstStyle/>
-                    <a:p>
-                      <a:r>
-                        <a:rPr sz="1200"/>
-                        <a:t>one per drivable approach (1998 field model)</a:t>
-                      </a:r>
-                    </a:p>
-                  </a:txBody>
-                  <a:tcPr/>
-                </a:tc>
-                <a:extLst>
-                  <a:ext uri="{0D108BD9-81ED-4DB2-BD59-A6C34878D82A}">
-                    <a16:rowId xmlns:a16="http://schemas.microsoft.com/office/drawing/2014/main" val="10001"/>
-                  </a:ext>
-                </a:extLst>
-              </a:tr>
-              <a:tr h="365760">
-                <a:tc>
-                  <a:txBody>
-                    <a:bodyPr/>
-                    <a:lstStyle/>
-                    <a:p>
-                      <a:r>
-                        <a:rPr sz="1200"/>
-                        <a:t>Roving beach-count / interview crews</a:t>
-                      </a:r>
-                    </a:p>
-                  </a:txBody>
-                  <a:tcPr/>
-                </a:tc>
-                <a:tc>
-                  <a:txBody>
-                    <a:bodyPr/>
-                    <a:lstStyle/>
-                    <a:p>
-                      <a:r>
-                        <a:rPr sz="1200"/>
-                        <a:t>2</a:t>
-                      </a:r>
-                    </a:p>
-                  </a:txBody>
-                  <a:tcPr/>
-                </a:tc>
-                <a:tc>
-                  <a:txBody>
-                    <a:bodyPr/>
-                    <a:lstStyle/>
-                    <a:p>
-                      <a:r>
-                        <a:rPr sz="1200"/>
-                        <a:t>28-mile beach, up to ~5,200 trips on a 90th-percentile day</a:t>
-                      </a:r>
-                    </a:p>
-                  </a:txBody>
-                  <a:tcPr/>
-                </a:tc>
-                <a:extLst>
-                  <a:ext uri="{0D108BD9-81ED-4DB2-BD59-A6C34878D82A}">
-                    <a16:rowId xmlns:a16="http://schemas.microsoft.com/office/drawing/2014/main" val="10002"/>
-                  </a:ext>
-                </a:extLst>
-              </a:tr>
-              <a:tr h="365760">
-                <a:tc>
-                  <a:txBody>
-                    <a:bodyPr/>
-                    <a:lstStyle/>
-                    <a:p>
-                      <a:r>
-                        <a:rPr sz="1200" b="1"/>
-                        <a:t>Long Beach core, per survey day</a:t>
-                      </a:r>
-                    </a:p>
-                  </a:txBody>
-                  <a:tcPr/>
-                </a:tc>
-                <a:tc>
-                  <a:txBody>
-                    <a:bodyPr/>
-                    <a:lstStyle/>
-                    <a:p>
-                      <a:r>
-                        <a:rPr sz="1200" b="1"/>
-                        <a:t>8</a:t>
-                      </a:r>
-                    </a:p>
-                  </a:txBody>
-                  <a:tcPr/>
-                </a:tc>
-                <a:tc>
-                  <a:txBody>
-                    <a:bodyPr/>
-                    <a:lstStyle/>
-                    <a:p>
-                      <a:endParaRPr/>
-                    </a:p>
-                  </a:txBody>
-                  <a:tcPr/>
-                </a:tc>
-                <a:extLst>
-                  <a:ext uri="{0D108BD9-81ED-4DB2-BD59-A6C34878D82A}">
-                    <a16:rowId xmlns:a16="http://schemas.microsoft.com/office/drawing/2014/main" val="10003"/>
-                  </a:ext>
-                </a:extLst>
-              </a:tr>
-              <a:tr h="365760">
-                <a:tc>
-                  <a:txBody>
-                    <a:bodyPr/>
-                    <a:lstStyle/>
-                    <a:p>
-                      <a:r>
-                        <a:rPr sz="1200"/>
-                        <a:t>Paired northern egress (Copalis or Mocrocks)</a:t>
-                      </a:r>
-                    </a:p>
-                  </a:txBody>
-                  <a:tcPr/>
-                </a:tc>
-                <a:tc>
-                  <a:txBody>
-                    <a:bodyPr/>
-                    <a:lstStyle/>
-                    <a:p>
-                      <a:r>
-                        <a:rPr sz="1200"/>
-                        <a:t>+5</a:t>
-                      </a:r>
-                    </a:p>
-                  </a:txBody>
-                  <a:tcPr/>
-                </a:tc>
-                <a:tc>
-                  <a:txBody>
-                    <a:bodyPr/>
-                    <a:lstStyle/>
-                    <a:p>
-                      <a:r>
-                        <a:rPr sz="1200"/>
-                        <a:t>same-day donor truth on a subset of days</a:t>
-                      </a:r>
-                    </a:p>
-                  </a:txBody>
-                  <a:tcPr/>
-                </a:tc>
-                <a:extLst>
-                  <a:ext uri="{0D108BD9-81ED-4DB2-BD59-A6C34878D82A}">
-                    <a16:rowId xmlns:a16="http://schemas.microsoft.com/office/drawing/2014/main" val="10004"/>
-                  </a:ext>
-                </a:extLst>
-              </a:tr>
-              <a:tr h="365760">
-                <a:tc>
-                  <a:txBody>
-                    <a:bodyPr/>
-                    <a:lstStyle/>
-                    <a:p>
-                      <a:r>
-                        <a:rPr sz="1200" b="1"/>
-                        <a:t>Peak, on a paired day</a:t>
-                      </a:r>
-                    </a:p>
-                  </a:txBody>
-                  <a:tcPr/>
-                </a:tc>
-                <a:tc>
-                  <a:txBody>
-                    <a:bodyPr/>
-                    <a:lstStyle/>
-                    <a:p>
-                      <a:r>
-                        <a:rPr sz="1200" b="1"/>
-                        <a:t>13</a:t>
-                      </a:r>
-                    </a:p>
-                  </a:txBody>
-                  <a:tcPr/>
-                </a:tc>
-                <a:tc>
-                  <a:txBody>
-                    <a:bodyPr/>
-                    <a:lstStyle/>
-                    <a:p>
-                      <a:endParaRPr/>
-                    </a:p>
-                  </a:txBody>
-                  <a:tcPr/>
-                </a:tc>
-                <a:extLst>
-                  <a:ext uri="{0D108BD9-81ED-4DB2-BD59-A6C34878D82A}">
-                    <a16:rowId xmlns:a16="http://schemas.microsoft.com/office/drawing/2014/main" val="10005"/>
-                  </a:ext>
-                </a:extLst>
-              </a:tr>
-            </a:tbl>
-          </a:graphicData>
-        </a:graphic>
-      </p:graphicFrame>
-      <p:sp>
-        <p:nvSpPr>
-          <p:cNvPr id="4" name="TextBox 3"/>
-          <p:cNvSpPr txBox="1"/>
-          <p:nvPr/>
-        </p:nvSpPr>
-        <p:spPr>
-          <a:xfrm>
-            <a:off x="594360" y="4160520"/>
-            <a:ext cx="10972800" cy="1554480"/>
-          </a:xfrm>
-          <a:prstGeom prst="rect">
-            <a:avLst/>
-          </a:prstGeom>
-          <a:noFill/>
-        </p:spPr>
-        <p:txBody>
-          <a:bodyPr wrap="square">
-            <a:spAutoFit/>
-          </a:bodyPr>
-          <a:lstStyle/>
-          <a:p>
-            <a:r>
-              <a:rPr sz="1300"/>
-              <a:t>Counters are stationary and low-skill (enforcement, seasonals, trained volunteers); the roving crews are the program's regular samplers, who are on the beach that day regardless, so the marginal cost is mainly the six counters. On a subset of days, add a whole-beach egress at whichever northern donor the state is digging that day. That yields paired same-day truth at donor and target, measuring the imputation transfer directly and adding to the 97 same-day pairs that anchor the joint-donor error (sd 0.43).</a:t>
-            </a:r>
-          </a:p>
-        </p:txBody>
-      </p:sp>
-    </p:spTree>
-  </p:cSld>
-  <p:clrMapOvr>
-    <a:masterClrMapping/>
-  </p:clrMapOvr>
-</p:sld>
-</file>
-
-<file path=ppt/slides/slide24.xml><?xml version="1.0" encoding="utf-8"?>
-<p:sld xmlns:a="http://schemas.openxmlformats.org/drawingml/2006/main" xmlns:r="http://schemas.openxmlformats.org/officeDocument/2006/relationships" xmlns:p="http://schemas.openxmlformats.org/presentationml/2006/main">
-  <p:cSld>
-    <p:spTree>
-      <p:nvGrpSpPr>
-        <p:cNvPr id="1" name=""/>
-        <p:cNvGrpSpPr/>
-        <p:nvPr/>
-      </p:nvGrpSpPr>
-      <p:grpSpPr>
-        <a:xfrm>
-          <a:off x="0" y="0"/>
-          <a:ext cx="0" cy="0"/>
-          <a:chOff x="0" y="0"/>
-          <a:chExt cx="0" cy="0"/>
-        </a:xfrm>
-      </p:grpSpPr>
-      <p:sp>
-        <p:nvSpPr>
-          <p:cNvPr id="2" name="Title 1"/>
-          <p:cNvSpPr>
-            <a:spLocks noGrp="1"/>
-          </p:cNvSpPr>
-          <p:nvPr>
-            <p:ph type="title"/>
-          </p:nvPr>
-        </p:nvSpPr>
-        <p:spPr/>
-        <p:txBody>
-          <a:bodyPr/>
-          <a:lstStyle/>
-          <a:p>
-            <a:r>
-              <a:t>Why not just one fall and one spring survey?</a:t>
+              <a:t>Most southern beach-days are borrowed, not counted</a:t>
             </a:r>
           </a:p>
         </p:txBody>
       </p:sp>
       <p:pic>
         <p:nvPicPr>
-          <p:cNvPr id="3" name="Picture 2" descr="fig16_lb_survey_target.png"/>
+          <p:cNvPr id="3" name="Picture 2" descr="fig18_tide_series_imputation.png"/>
           <p:cNvPicPr>
             <a:picLocks noChangeAspect="1"/>
           </p:cNvPicPr>
           <p:nvPr/>
         </p:nvPicPr>
         <p:blipFill>
-          <a:blip r:embed="rId3"/>
+          <a:blip r:embed="rId2"/>
           <a:stretch>
             <a:fillRect/>
           </a:stretch>
         </p:blipFill>
         <p:spPr>
           <a:xfrm>
-            <a:off x="2475411" y="1051560"/>
-            <a:ext cx="7210697" cy="4206240"/>
+            <a:off x="2298469" y="1417320"/>
+            <a:ext cx="7564581" cy="3840480"/>
           </a:xfrm>
           <a:prstGeom prst="rect">
             <a:avLst/>
@@ -9635,7 +10734,7 @@
           <a:lstStyle/>
           <a:p>
             <a:r>
-              <a:rPr sz="1250" b="1">
+              <a:rPr b="1" sz="1300">
                 <a:solidFill>
                   <a:srgbClr val="1B3A5C"/>
                 </a:solidFill>
@@ -9643,1048 +10742,8 @@
               <a:t>In plain terms:  </a:t>
             </a:r>
             <a:r>
-              <a:rPr sz="1250"/>
-              <a:t>one survey per condition pins the shape and is worth doing; but the correction factor swings about 30% per survey, so precision improves only as 1 over root-N. About eight surveys halve today's uncertainty, and a whole-beach survey also retires the section-ratio error.</a:t>
-            </a:r>
-          </a:p>
-        </p:txBody>
-      </p:sp>
-    </p:spTree>
-  </p:cSld>
-  <p:clrMapOvr>
-    <a:masterClrMapping/>
-  </p:clrMapOvr>
-</p:sld>
-</file>
-
-<file path=ppt/slides/slide25.xml><?xml version="1.0" encoding="utf-8"?>
-<p:sld xmlns:a="http://schemas.openxmlformats.org/drawingml/2006/main" xmlns:r="http://schemas.openxmlformats.org/officeDocument/2006/relationships" xmlns:p="http://schemas.openxmlformats.org/presentationml/2006/main">
-  <p:cSld>
-    <p:spTree>
-      <p:nvGrpSpPr>
-        <p:cNvPr id="1" name=""/>
-        <p:cNvGrpSpPr/>
-        <p:nvPr/>
-      </p:nvGrpSpPr>
-      <p:grpSpPr>
-        <a:xfrm>
-          <a:off x="0" y="0"/>
-          <a:ext cx="0" cy="0"/>
-          <a:chOff x="0" y="0"/>
-          <a:chExt cx="0" cy="0"/>
-        </a:xfrm>
-      </p:grpSpPr>
-      <p:sp>
-        <p:nvSpPr>
-          <p:cNvPr id="2" name="Title 1"/>
-          <p:cNvSpPr>
-            <a:spLocks noGrp="1"/>
-          </p:cNvSpPr>
-          <p:nvPr>
-            <p:ph type="title"/>
-          </p:nvPr>
-        </p:nvSpPr>
-        <p:spPr/>
-        <p:txBody>
-          <a:bodyPr/>
-          <a:lstStyle/>
-          <a:p>
-            <a:r>
-              <a:t>Recommendations, in priority order</a:t>
-            </a:r>
-          </a:p>
-        </p:txBody>
-      </p:sp>
-      <p:sp>
-        <p:nvSpPr>
-          <p:cNvPr id="3" name="Content Placeholder 2"/>
-          <p:cNvSpPr>
-            <a:spLocks noGrp="1"/>
-          </p:cNvSpPr>
-          <p:nvPr>
-            <p:ph idx="1"/>
-          </p:nvPr>
-        </p:nvSpPr>
-        <p:spPr/>
-        <p:txBody>
-          <a:bodyPr wrap="square"/>
-          <a:lstStyle/>
-          <a:p>
-            <a:r>
-              <a:rPr sz="1400" b="1"/>
-              <a:t>1.  Survey Long Beach first. </a:t>
-            </a:r>
-            <a:r>
-              <a:rPr sz="1400"/>
-              <a:t>Run the whole-beach egress pilot, six approaches and about eight staff. Start with one survey in each tide condition to establish the relationship, then build toward eight to rebuild the table. The correction factor is the largest term and Long Beach's table is the thinnest and oldest.</a:t>
-            </a:r>
-          </a:p>
-          <a:p>
-            <a:r>
-              <a:rPr sz="1400" b="1"/>
-              <a:t>2.  Hold the southern donor at its co-management floor. </a:t>
-            </a:r>
-            <a:r>
-              <a:rPr sz="1400"/>
-              <a:t>Keep one of Copalis or Mocrocks state-counted every dig day, which the 2-on / 2-off calendar already delivers. The Quinault's alternate-day counts cannot substitute for the state.</a:t>
-            </a:r>
-          </a:p>
-          <a:p>
-            <a:r>
-              <a:rPr sz="1400" b="1"/>
-              <a:t>3.  Pair the pilot with the northern donor on a subset of days </a:t>
-            </a:r>
-            <a:r>
-              <a:rPr sz="1400"/>
-              <a:t>to measure the imputation transfer directly and tighten the joint-donor error, rather than leaning on the modeled lag curve.</a:t>
-            </a:r>
-          </a:p>
-          <a:p>
-            <a:r>
-              <a:rPr sz="1400" b="1"/>
-              <a:t>4.  Treat the 45% reallocation as optional, not free. </a:t>
-            </a:r>
-            <a:r>
-              <a:rPr sz="1400"/>
-              <a:t>It buys direct Long Beach precision but degrades the donor with no offset; fund Long Beach from dedicated effort where possible.</a:t>
-            </a:r>
-          </a:p>
-          <a:p>
-            <a:r>
-              <a:rPr sz="1400" b="1"/>
-              <a:t>5.  Accept the Copalis floor: </a:t>
-            </a:r>
-            <a:r>
-              <a:rPr sz="1400"/>
-              <a:t>a harvest CV of 0.10 is infeasible there at any sampling rate, only more surveys would move it.</a:t>
-            </a:r>
-          </a:p>
-        </p:txBody>
-      </p:sp>
-    </p:spTree>
-  </p:cSld>
-  <p:clrMapOvr>
-    <a:masterClrMapping/>
-  </p:clrMapOvr>
-</p:sld>
-</file>
-
-<file path=ppt/slides/slide26.xml><?xml version="1.0" encoding="utf-8"?>
-<p:sld xmlns:a="http://schemas.openxmlformats.org/drawingml/2006/main" xmlns:r="http://schemas.openxmlformats.org/officeDocument/2006/relationships" xmlns:p="http://schemas.openxmlformats.org/presentationml/2006/main">
-  <p:cSld>
-    <p:spTree>
-      <p:nvGrpSpPr>
-        <p:cNvPr id="1" name=""/>
-        <p:cNvGrpSpPr/>
-        <p:nvPr/>
-      </p:nvGrpSpPr>
-      <p:grpSpPr>
-        <a:xfrm>
-          <a:off x="0" y="0"/>
-          <a:ext cx="0" cy="0"/>
-          <a:chOff x="0" y="0"/>
-          <a:chExt cx="0" cy="0"/>
-        </a:xfrm>
-      </p:grpSpPr>
-      <p:sp>
-        <p:nvSpPr>
-          <p:cNvPr id="2" name="Title 1"/>
-          <p:cNvSpPr>
-            <a:spLocks noGrp="1"/>
-          </p:cNvSpPr>
-          <p:nvPr>
-            <p:ph type="ctrTitle"/>
-          </p:nvPr>
-        </p:nvSpPr>
-        <p:spPr/>
-        <p:txBody>
-          <a:bodyPr/>
-          <a:lstStyle/>
-          <a:p>
-            <a:r>
-              <a:t>Discussion</a:t>
-            </a:r>
-          </a:p>
-        </p:txBody>
-      </p:sp>
-    </p:spTree>
-  </p:cSld>
-  <p:clrMapOvr>
-    <a:masterClrMapping/>
-  </p:clrMapOvr>
-</p:sld>
-</file>
-
-<file path=ppt/slides/slide3.xml><?xml version="1.0" encoding="utf-8"?>
-<p:sld xmlns:a="http://schemas.openxmlformats.org/drawingml/2006/main" xmlns:r="http://schemas.openxmlformats.org/officeDocument/2006/relationships" xmlns:p="http://schemas.openxmlformats.org/presentationml/2006/main">
-  <p:cSld>
-    <p:spTree>
-      <p:nvGrpSpPr>
-        <p:cNvPr id="1" name=""/>
-        <p:cNvGrpSpPr/>
-        <p:nvPr/>
-      </p:nvGrpSpPr>
-      <p:grpSpPr>
-        <a:xfrm>
-          <a:off x="0" y="0"/>
-          <a:ext cx="0" cy="0"/>
-          <a:chOff x="0" y="0"/>
-          <a:chExt cx="0" cy="0"/>
-        </a:xfrm>
-      </p:grpSpPr>
-      <p:sp>
-        <p:nvSpPr>
-          <p:cNvPr id="2" name="Title 1"/>
-          <p:cNvSpPr>
-            <a:spLocks noGrp="1"/>
-          </p:cNvSpPr>
-          <p:nvPr>
-            <p:ph type="ctrTitle"/>
-          </p:nvPr>
-        </p:nvSpPr>
-        <p:spPr/>
-        <p:txBody>
-          <a:bodyPr/>
-          <a:lstStyle/>
-          <a:p>
-            <a:r>
-              <a:t>How the estimate works today</a:t>
-            </a:r>
-          </a:p>
-        </p:txBody>
-      </p:sp>
-    </p:spTree>
-  </p:cSld>
-  <p:clrMapOvr>
-    <a:masterClrMapping/>
-  </p:clrMapOvr>
-</p:sld>
-</file>
-
-<file path=ppt/slides/slide4.xml><?xml version="1.0" encoding="utf-8"?>
-<p:sld xmlns:a="http://schemas.openxmlformats.org/drawingml/2006/main" xmlns:r="http://schemas.openxmlformats.org/officeDocument/2006/relationships" xmlns:p="http://schemas.openxmlformats.org/presentationml/2006/main">
-  <p:cSld>
-    <p:spTree>
-      <p:nvGrpSpPr>
-        <p:cNvPr id="1" name=""/>
-        <p:cNvGrpSpPr/>
-        <p:nvPr/>
-      </p:nvGrpSpPr>
-      <p:grpSpPr>
-        <a:xfrm>
-          <a:off x="0" y="0"/>
-          <a:ext cx="0" cy="0"/>
-          <a:chOff x="0" y="0"/>
-          <a:chExt cx="0" cy="0"/>
-        </a:xfrm>
-      </p:grpSpPr>
-      <p:sp>
-        <p:nvSpPr>
-          <p:cNvPr id="2" name="Title 1"/>
-          <p:cNvSpPr>
-            <a:spLocks noGrp="1"/>
-          </p:cNvSpPr>
-          <p:nvPr>
-            <p:ph type="title"/>
-          </p:nvPr>
-        </p:nvSpPr>
-        <p:spPr/>
-        <p:txBody>
-          <a:bodyPr/>
-          <a:lstStyle/>
-          <a:p>
-            <a:r>
-              <a:t>From a head-count to a season total</a:t>
-            </a:r>
-          </a:p>
-        </p:txBody>
-      </p:sp>
-      <p:pic>
-        <p:nvPicPr>
-          <p:cNvPr id="3" name="Picture 2" descr="fig17_estimation_flow.png"/>
-          <p:cNvPicPr>
-            <a:picLocks noChangeAspect="1"/>
-          </p:cNvPicPr>
-          <p:nvPr/>
-        </p:nvPicPr>
-        <p:blipFill>
-          <a:blip r:embed="rId3"/>
-          <a:stretch>
-            <a:fillRect/>
-          </a:stretch>
-        </p:blipFill>
-        <p:spPr>
-          <a:xfrm>
-            <a:off x="2283460" y="1143000"/>
-            <a:ext cx="7594600" cy="4206240"/>
-          </a:xfrm>
-          <a:prstGeom prst="rect">
-            <a:avLst/>
-          </a:prstGeom>
-        </p:spPr>
-      </p:pic>
-      <p:sp>
-        <p:nvSpPr>
-          <p:cNvPr id="4" name="TextBox 3"/>
-          <p:cNvSpPr txBox="1"/>
-          <p:nvPr/>
-        </p:nvSpPr>
-        <p:spPr>
-          <a:xfrm>
-            <a:off x="594360" y="5532120"/>
-            <a:ext cx="10972800" cy="822960"/>
-          </a:xfrm>
-          <a:prstGeom prst="rect">
-            <a:avLst/>
-          </a:prstGeom>
-          <a:noFill/>
-        </p:spPr>
-        <p:txBody>
-          <a:bodyPr wrap="square">
-            <a:spAutoFit/>
-          </a:bodyPr>
-          <a:lstStyle/>
-          <a:p>
-            <a:r>
-              <a:rPr sz="1300" b="1">
-                <a:solidFill>
-                  <a:srgbClr val="1B3A5C"/>
-                </a:solidFill>
-              </a:rPr>
-              <a:t>In plain terms:  </a:t>
-            </a:r>
-            <a:r>
-              <a:rPr sz="1300"/>
-              <a:t>count the diggers once; divide by the correction factor for the whole day; multiply by catch-per-digger for harvest. On uncounted days both are borrowed. The red step never averages away.</a:t>
-            </a:r>
-          </a:p>
-        </p:txBody>
-      </p:sp>
-    </p:spTree>
-  </p:cSld>
-  <p:clrMapOvr>
-    <a:masterClrMapping/>
-  </p:clrMapOvr>
-</p:sld>
-</file>
-
-<file path=ppt/slides/slide5.xml><?xml version="1.0" encoding="utf-8"?>
-<p:sld xmlns:a="http://schemas.openxmlformats.org/drawingml/2006/main" xmlns:r="http://schemas.openxmlformats.org/officeDocument/2006/relationships" xmlns:p="http://schemas.openxmlformats.org/presentationml/2006/main">
-  <p:cSld>
-    <p:spTree>
-      <p:nvGrpSpPr>
-        <p:cNvPr id="1" name=""/>
-        <p:cNvGrpSpPr/>
-        <p:nvPr/>
-      </p:nvGrpSpPr>
-      <p:grpSpPr>
-        <a:xfrm>
-          <a:off x="0" y="0"/>
-          <a:ext cx="0" cy="0"/>
-          <a:chOff x="0" y="0"/>
-          <a:chExt cx="0" cy="0"/>
-        </a:xfrm>
-      </p:grpSpPr>
-      <p:sp>
-        <p:nvSpPr>
-          <p:cNvPr id="2" name="Title 1"/>
-          <p:cNvSpPr>
-            <a:spLocks noGrp="1"/>
-          </p:cNvSpPr>
-          <p:nvPr>
-            <p:ph type="title"/>
-          </p:nvPr>
-        </p:nvSpPr>
-        <p:spPr/>
-        <p:txBody>
-          <a:bodyPr/>
-          <a:lstStyle/>
-          <a:p>
-            <a:r>
-              <a:t>The estimate in four equations</a:t>
-            </a:r>
-          </a:p>
-        </p:txBody>
-      </p:sp>
-      <p:sp>
-        <p:nvSpPr>
-          <p:cNvPr id="3" name="TextBox 2"/>
-          <p:cNvSpPr txBox="1"/>
-          <p:nvPr/>
-        </p:nvSpPr>
-        <p:spPr>
-          <a:xfrm>
-            <a:off x="640080" y="1371600"/>
-            <a:ext cx="11247120" cy="1554272"/>
-          </a:xfrm>
-          <a:prstGeom prst="rect">
-            <a:avLst/>
-          </a:prstGeom>
-          <a:noFill/>
-        </p:spPr>
-        <p:txBody>
-          <a:bodyPr wrap="square">
-            <a:spAutoFit/>
-          </a:bodyPr>
-          <a:lstStyle/>
-          <a:p>
-            <a:pPr>
-              <a:spcAft>
-                <a:spcPts val="600"/>
-              </a:spcAft>
-            </a:pPr>
-            <a:r>
-              <a:rPr sz="2000" b="1" dirty="0" err="1">
-                <a:solidFill>
-                  <a:srgbClr val="1B3A5C"/>
-                </a:solidFill>
-                <a:latin typeface="Consolas"/>
-              </a:rPr>
-              <a:t>CPUE</a:t>
-            </a:r>
-            <a:r>
-              <a:rPr sz="2000" b="1" dirty="0">
-                <a:solidFill>
-                  <a:srgbClr val="1B3A5C"/>
-                </a:solidFill>
-                <a:latin typeface="Consolas"/>
-              </a:rPr>
-              <a:t>  =  clams / diggers</a:t>
-            </a:r>
-            <a:r>
-              <a:rPr sz="1300" dirty="0">
-                <a:solidFill>
-                  <a:srgbClr val="444444"/>
-                </a:solidFill>
-              </a:rPr>
-              <a:t>   catch per digger, from the creel interviews</a:t>
-            </a:r>
-          </a:p>
-          <a:p>
-            <a:pPr>
-              <a:spcAft>
-                <a:spcPts val="600"/>
-              </a:spcAft>
-            </a:pPr>
-            <a:r>
-              <a:rPr sz="2000" b="1" dirty="0" err="1">
-                <a:solidFill>
-                  <a:srgbClr val="1B3A5C"/>
-                </a:solidFill>
-                <a:latin typeface="Consolas"/>
-              </a:rPr>
-              <a:t>E_total</a:t>
-            </a:r>
-            <a:r>
-              <a:rPr sz="2000" b="1" dirty="0">
-                <a:solidFill>
-                  <a:srgbClr val="1B3A5C"/>
-                </a:solidFill>
-                <a:latin typeface="Consolas"/>
-              </a:rPr>
-              <a:t> = </a:t>
-            </a:r>
-            <a:r>
-              <a:rPr sz="2000" b="1" dirty="0" err="1">
-                <a:solidFill>
-                  <a:srgbClr val="1B3A5C"/>
-                </a:solidFill>
-                <a:latin typeface="Consolas"/>
-              </a:rPr>
-              <a:t>E_t</a:t>
-            </a:r>
-            <a:r>
-              <a:rPr sz="2000" b="1" dirty="0">
-                <a:solidFill>
-                  <a:srgbClr val="1B3A5C"/>
-                </a:solidFill>
-                <a:latin typeface="Consolas"/>
-              </a:rPr>
-              <a:t> (1 - p) / CF</a:t>
-            </a:r>
-            <a:r>
-              <a:rPr sz="1300" dirty="0">
-                <a:solidFill>
-                  <a:srgbClr val="444444"/>
-                </a:solidFill>
-              </a:rPr>
-              <a:t>   expand the count </a:t>
-            </a:r>
-            <a:r>
-              <a:rPr sz="1300" dirty="0" err="1">
-                <a:solidFill>
-                  <a:srgbClr val="444444"/>
-                </a:solidFill>
-              </a:rPr>
-              <a:t>E_t</a:t>
-            </a:r>
-            <a:r>
-              <a:rPr sz="1300" dirty="0">
-                <a:solidFill>
-                  <a:srgbClr val="444444"/>
-                </a:solidFill>
-              </a:rPr>
-              <a:t> to the whole day; CF ~ 0.5 is the share present at count time</a:t>
-            </a:r>
-          </a:p>
-          <a:p>
-            <a:pPr>
-              <a:spcAft>
-                <a:spcPts val="600"/>
-              </a:spcAft>
-            </a:pPr>
-            <a:r>
-              <a:rPr sz="2000" b="1" dirty="0">
-                <a:solidFill>
-                  <a:srgbClr val="1B3A5C"/>
-                </a:solidFill>
-                <a:latin typeface="Consolas"/>
-              </a:rPr>
-              <a:t>Harvest = </a:t>
-            </a:r>
-            <a:r>
-              <a:rPr sz="2000" b="1" dirty="0" err="1">
-                <a:solidFill>
-                  <a:srgbClr val="1B3A5C"/>
-                </a:solidFill>
-                <a:latin typeface="Consolas"/>
-              </a:rPr>
-              <a:t>E_total</a:t>
-            </a:r>
-            <a:r>
-              <a:rPr sz="2000" b="1" dirty="0">
-                <a:solidFill>
-                  <a:srgbClr val="1B3A5C"/>
-                </a:solidFill>
-                <a:latin typeface="Consolas"/>
-              </a:rPr>
-              <a:t> x </a:t>
-            </a:r>
-            <a:r>
-              <a:rPr sz="2000" b="1" dirty="0" err="1">
-                <a:solidFill>
-                  <a:srgbClr val="1B3A5C"/>
-                </a:solidFill>
-                <a:latin typeface="Consolas"/>
-              </a:rPr>
-              <a:t>CPUE</a:t>
-            </a:r>
-            <a:r>
-              <a:rPr sz="1300" dirty="0">
-                <a:solidFill>
-                  <a:srgbClr val="444444"/>
-                </a:solidFill>
-              </a:rPr>
-              <a:t>   effort times catch rate, summed over segments, days, and beaches</a:t>
-            </a:r>
-          </a:p>
-          <a:p>
-            <a:pPr>
-              <a:spcAft>
-                <a:spcPts val="600"/>
-              </a:spcAft>
-            </a:pPr>
-            <a:r>
-              <a:rPr sz="2000" b="1" dirty="0" err="1">
-                <a:solidFill>
-                  <a:srgbClr val="1B3A5C"/>
-                </a:solidFill>
-                <a:latin typeface="Consolas"/>
-              </a:rPr>
-              <a:t>X_today</a:t>
-            </a:r>
-            <a:r>
-              <a:rPr sz="2000" b="1" dirty="0">
-                <a:solidFill>
-                  <a:srgbClr val="1B3A5C"/>
-                </a:solidFill>
-                <a:latin typeface="Consolas"/>
-              </a:rPr>
-              <a:t> </a:t>
-            </a:r>
-            <a:r>
-              <a:rPr lang="en-US" sz="2000" b="1" dirty="0">
-                <a:solidFill>
-                  <a:srgbClr val="1B3A5C"/>
-                </a:solidFill>
-                <a:latin typeface="Consolas"/>
-              </a:rPr>
-              <a:t>=</a:t>
-            </a:r>
-            <a:r>
-              <a:rPr sz="2000" b="1" dirty="0">
-                <a:solidFill>
-                  <a:srgbClr val="1B3A5C"/>
-                </a:solidFill>
-                <a:latin typeface="Consolas"/>
-              </a:rPr>
-              <a:t> </a:t>
-            </a:r>
-            <a:r>
-              <a:rPr sz="2000" b="1" dirty="0" err="1">
-                <a:solidFill>
-                  <a:srgbClr val="1B3A5C"/>
-                </a:solidFill>
-                <a:latin typeface="Consolas"/>
-              </a:rPr>
-              <a:t>X_ref</a:t>
-            </a:r>
-            <a:r>
-              <a:rPr sz="2000" b="1" dirty="0">
-                <a:solidFill>
-                  <a:srgbClr val="1B3A5C"/>
-                </a:solidFill>
-                <a:latin typeface="Consolas"/>
-              </a:rPr>
-              <a:t> x ( </a:t>
-            </a:r>
-            <a:r>
-              <a:rPr sz="2000" b="1" dirty="0" err="1">
-                <a:solidFill>
-                  <a:srgbClr val="1B3A5C"/>
-                </a:solidFill>
-                <a:latin typeface="Consolas"/>
-              </a:rPr>
-              <a:t>Donor_today</a:t>
-            </a:r>
-            <a:r>
-              <a:rPr sz="2000" b="1" dirty="0">
-                <a:solidFill>
-                  <a:srgbClr val="1B3A5C"/>
-                </a:solidFill>
-                <a:latin typeface="Consolas"/>
-              </a:rPr>
-              <a:t> / </a:t>
-            </a:r>
-            <a:r>
-              <a:rPr sz="2000" b="1" dirty="0" err="1">
-                <a:solidFill>
-                  <a:srgbClr val="1B3A5C"/>
-                </a:solidFill>
-                <a:latin typeface="Consolas"/>
-              </a:rPr>
-              <a:t>Donor_ref</a:t>
-            </a:r>
-            <a:r>
-              <a:rPr sz="2000" b="1" dirty="0">
-                <a:solidFill>
-                  <a:srgbClr val="1B3A5C"/>
-                </a:solidFill>
-                <a:latin typeface="Consolas"/>
-              </a:rPr>
-              <a:t> )</a:t>
-            </a:r>
-            <a:r>
-              <a:rPr sz="1300" dirty="0">
-                <a:solidFill>
-                  <a:srgbClr val="444444"/>
-                </a:solidFill>
-              </a:rPr>
-              <a:t>   uncounted day: borrow a neighbor's day-over-day change</a:t>
-            </a:r>
-          </a:p>
-        </p:txBody>
-      </p:sp>
-      <p:sp>
-        <p:nvSpPr>
-          <p:cNvPr id="4" name="TextBox 3"/>
-          <p:cNvSpPr txBox="1"/>
-          <p:nvPr/>
-        </p:nvSpPr>
-        <p:spPr>
-          <a:xfrm>
-            <a:off x="640080" y="3520649"/>
-            <a:ext cx="10972800" cy="492443"/>
-          </a:xfrm>
-          <a:prstGeom prst="rect">
-            <a:avLst/>
-          </a:prstGeom>
-          <a:noFill/>
-        </p:spPr>
-        <p:txBody>
-          <a:bodyPr wrap="square">
-            <a:spAutoFit/>
-          </a:bodyPr>
-          <a:lstStyle/>
-          <a:p>
-            <a:r>
-              <a:rPr sz="1300" b="1" dirty="0">
-                <a:solidFill>
-                  <a:srgbClr val="1B3A5C"/>
-                </a:solidFill>
-              </a:rPr>
-              <a:t>In plain terms:  </a:t>
-            </a:r>
-            <a:r>
-              <a:rPr sz="1300" dirty="0"/>
-              <a:t>the whole method is one measured count expanded by a correction factor and a catch rate. When a beach is not counted, the first three lines are replaced by the fourth, and the day is inferred from a neighbor.</a:t>
-            </a:r>
-          </a:p>
-        </p:txBody>
-      </p:sp>
-    </p:spTree>
-  </p:cSld>
-  <p:clrMapOvr>
-    <a:masterClrMapping/>
-  </p:clrMapOvr>
-</p:sld>
-</file>
-
-<file path=ppt/slides/slide6.xml><?xml version="1.0" encoding="utf-8"?>
-<p:sld xmlns:a="http://schemas.openxmlformats.org/drawingml/2006/main" xmlns:r="http://schemas.openxmlformats.org/officeDocument/2006/relationships" xmlns:p="http://schemas.openxmlformats.org/presentationml/2006/main">
-  <p:cSld>
-    <p:spTree>
-      <p:nvGrpSpPr>
-        <p:cNvPr id="1" name=""/>
-        <p:cNvGrpSpPr/>
-        <p:nvPr/>
-      </p:nvGrpSpPr>
-      <p:grpSpPr>
-        <a:xfrm>
-          <a:off x="0" y="0"/>
-          <a:ext cx="0" cy="0"/>
-          <a:chOff x="0" y="0"/>
-          <a:chExt cx="0" cy="0"/>
-        </a:xfrm>
-      </p:grpSpPr>
-      <p:sp>
-        <p:nvSpPr>
-          <p:cNvPr id="2" name="Title 1"/>
-          <p:cNvSpPr>
-            <a:spLocks noGrp="1"/>
-          </p:cNvSpPr>
-          <p:nvPr>
-            <p:ph type="title"/>
-          </p:nvPr>
-        </p:nvSpPr>
-        <p:spPr/>
-        <p:txBody>
-          <a:bodyPr/>
-          <a:lstStyle/>
-          <a:p>
-            <a:r>
-              <a:t>Most southern beach-days are borrowed, not counted</a:t>
-            </a:r>
-          </a:p>
-        </p:txBody>
-      </p:sp>
-      <p:pic>
-        <p:nvPicPr>
-          <p:cNvPr id="3" name="Picture 2" descr="fig18_tide_series_imputation.png"/>
-          <p:cNvPicPr>
-            <a:picLocks noChangeAspect="1"/>
-          </p:cNvPicPr>
-          <p:nvPr/>
-        </p:nvPicPr>
-        <p:blipFill>
-          <a:blip r:embed="rId3"/>
-          <a:stretch>
-            <a:fillRect/>
-          </a:stretch>
-        </p:blipFill>
-        <p:spPr>
-          <a:xfrm>
-            <a:off x="1938250" y="1097280"/>
-            <a:ext cx="8285018" cy="4206240"/>
-          </a:xfrm>
-          <a:prstGeom prst="rect">
-            <a:avLst/>
-          </a:prstGeom>
-        </p:spPr>
-      </p:pic>
-      <p:sp>
-        <p:nvSpPr>
-          <p:cNvPr id="4" name="TextBox 3"/>
-          <p:cNvSpPr txBox="1"/>
-          <p:nvPr/>
-        </p:nvSpPr>
-        <p:spPr>
-          <a:xfrm>
-            <a:off x="594360" y="5532120"/>
-            <a:ext cx="10972800" cy="822960"/>
-          </a:xfrm>
-          <a:prstGeom prst="rect">
-            <a:avLst/>
-          </a:prstGeom>
-          <a:noFill/>
-        </p:spPr>
-        <p:txBody>
-          <a:bodyPr wrap="square">
-            <a:spAutoFit/>
-          </a:bodyPr>
-          <a:lstStyle/>
-          <a:p>
-            <a:r>
-              <a:rPr sz="1300" b="1">
-                <a:solidFill>
-                  <a:srgbClr val="1B3A5C"/>
-                </a:solidFill>
-              </a:rPr>
-              <a:t>In plain terms:  </a:t>
-            </a:r>
-            <a:r>
               <a:rPr sz="1300"/>
               <a:t>Copalis and Mocrocks are counted every day they open; the southern beaches often are not, so their effort is borrowed from a counted neighbour. In 2025-26, 57% of Long Beach effort is borrowed from another beach.</a:t>
-            </a:r>
-          </a:p>
-        </p:txBody>
-      </p:sp>
-    </p:spTree>
-  </p:cSld>
-  <p:clrMapOvr>
-    <a:masterClrMapping/>
-  </p:clrMapOvr>
-</p:sld>
-</file>
-
-<file path=ppt/slides/slide7.xml><?xml version="1.0" encoding="utf-8"?>
-<p:sld xmlns:a="http://schemas.openxmlformats.org/drawingml/2006/main" xmlns:r="http://schemas.openxmlformats.org/officeDocument/2006/relationships" xmlns:p="http://schemas.openxmlformats.org/presentationml/2006/main">
-  <p:cSld>
-    <p:spTree>
-      <p:nvGrpSpPr>
-        <p:cNvPr id="1" name=""/>
-        <p:cNvGrpSpPr/>
-        <p:nvPr/>
-      </p:nvGrpSpPr>
-      <p:grpSpPr>
-        <a:xfrm>
-          <a:off x="0" y="0"/>
-          <a:ext cx="0" cy="0"/>
-          <a:chOff x="0" y="0"/>
-          <a:chExt cx="0" cy="0"/>
-        </a:xfrm>
-      </p:grpSpPr>
-      <p:sp>
-        <p:nvSpPr>
-          <p:cNvPr id="2" name="Title 1"/>
-          <p:cNvSpPr>
-            <a:spLocks noGrp="1"/>
-          </p:cNvSpPr>
-          <p:nvPr>
-            <p:ph type="title"/>
-          </p:nvPr>
-        </p:nvSpPr>
-        <p:spPr/>
-        <p:txBody>
-          <a:bodyPr/>
-          <a:lstStyle/>
-          <a:p>
-            <a:r>
-              <a:t>Two donors beat one</a:t>
-            </a:r>
-          </a:p>
-        </p:txBody>
-      </p:sp>
-      <p:pic>
-        <p:nvPicPr>
-          <p:cNvPr id="3" name="Picture 2" descr="fig19_joint_donor.png"/>
-          <p:cNvPicPr>
-            <a:picLocks noChangeAspect="1"/>
-          </p:cNvPicPr>
-          <p:nvPr/>
-        </p:nvPicPr>
-        <p:blipFill>
-          <a:blip r:embed="rId3"/>
-          <a:stretch>
-            <a:fillRect/>
-          </a:stretch>
-        </p:blipFill>
-        <p:spPr>
-          <a:xfrm>
-            <a:off x="1808797" y="1097280"/>
-            <a:ext cx="8543925" cy="4206240"/>
-          </a:xfrm>
-          <a:prstGeom prst="rect">
-            <a:avLst/>
-          </a:prstGeom>
-        </p:spPr>
-      </p:pic>
-      <p:sp>
-        <p:nvSpPr>
-          <p:cNvPr id="4" name="TextBox 3"/>
-          <p:cNvSpPr txBox="1"/>
-          <p:nvPr/>
-        </p:nvSpPr>
-        <p:spPr>
-          <a:xfrm>
-            <a:off x="594360" y="5532120"/>
-            <a:ext cx="10972800" cy="822960"/>
-          </a:xfrm>
-          <a:prstGeom prst="rect">
-            <a:avLst/>
-          </a:prstGeom>
-          <a:noFill/>
-        </p:spPr>
-        <p:txBody>
-          <a:bodyPr wrap="square">
-            <a:spAutoFit/>
-          </a:bodyPr>
-          <a:lstStyle/>
-          <a:p>
-            <a:r>
-              <a:rPr sz="1300" b="1">
-                <a:solidFill>
-                  <a:srgbClr val="1B3A5C"/>
-                </a:solidFill>
-              </a:rPr>
-              <a:t>In plain terms:  </a:t>
-            </a:r>
-            <a:r>
-              <a:rPr sz="1300"/>
-              <a:t>each donor carries its own noise; summing Copalis and Mocrocks before taking the ratio averages it out, cutting the single-day error from about 0.62 to 0.43. The catch: the 2-on / 2-off calendar rarely counts both the same day.</a:t>
-            </a:r>
-          </a:p>
-        </p:txBody>
-      </p:sp>
-    </p:spTree>
-  </p:cSld>
-  <p:clrMapOvr>
-    <a:masterClrMapping/>
-  </p:clrMapOvr>
-</p:sld>
-</file>
-
-<file path=ppt/slides/slide8.xml><?xml version="1.0" encoding="utf-8"?>
-<p:sld xmlns:a="http://schemas.openxmlformats.org/drawingml/2006/main" xmlns:r="http://schemas.openxmlformats.org/officeDocument/2006/relationships" xmlns:p="http://schemas.openxmlformats.org/presentationml/2006/main">
-  <p:cSld>
-    <p:spTree>
-      <p:nvGrpSpPr>
-        <p:cNvPr id="1" name=""/>
-        <p:cNvGrpSpPr/>
-        <p:nvPr/>
-      </p:nvGrpSpPr>
-      <p:grpSpPr>
-        <a:xfrm>
-          <a:off x="0" y="0"/>
-          <a:ext cx="0" cy="0"/>
-          <a:chOff x="0" y="0"/>
-          <a:chExt cx="0" cy="0"/>
-        </a:xfrm>
-      </p:grpSpPr>
-      <p:sp>
-        <p:nvSpPr>
-          <p:cNvPr id="2" name="Title 1"/>
-          <p:cNvSpPr>
-            <a:spLocks noGrp="1"/>
-          </p:cNvSpPr>
-          <p:nvPr>
-            <p:ph type="title"/>
-          </p:nvPr>
-        </p:nvSpPr>
-        <p:spPr/>
-        <p:txBody>
-          <a:bodyPr/>
-          <a:lstStyle/>
-          <a:p>
-            <a:r>
-              <a:t>Only 14% of Long Beach rests on a real count</a:t>
-            </a:r>
-          </a:p>
-        </p:txBody>
-      </p:sp>
-      <p:pic>
-        <p:nvPicPr>
-          <p:cNvPr id="3" name="Picture 2" descr="fig20_longbeach_anatomy.png"/>
-          <p:cNvPicPr>
-            <a:picLocks noChangeAspect="1"/>
-          </p:cNvPicPr>
-          <p:nvPr/>
-        </p:nvPicPr>
-        <p:blipFill>
-          <a:blip r:embed="rId3"/>
-          <a:stretch>
-            <a:fillRect/>
-          </a:stretch>
-        </p:blipFill>
-        <p:spPr>
-          <a:xfrm>
-            <a:off x="2475411" y="1051560"/>
-            <a:ext cx="7210697" cy="4206240"/>
-          </a:xfrm>
-          <a:prstGeom prst="rect">
-            <a:avLst/>
-          </a:prstGeom>
-        </p:spPr>
-      </p:pic>
-      <p:sp>
-        <p:nvSpPr>
-          <p:cNvPr id="4" name="TextBox 3"/>
-          <p:cNvSpPr txBox="1"/>
-          <p:nvPr/>
-        </p:nvSpPr>
-        <p:spPr>
-          <a:xfrm>
-            <a:off x="594360" y="5532120"/>
-            <a:ext cx="10972800" cy="822960"/>
-          </a:xfrm>
-          <a:prstGeom prst="rect">
-            <a:avLst/>
-          </a:prstGeom>
-          <a:noFill/>
-        </p:spPr>
-        <p:txBody>
-          <a:bodyPr wrap="square">
-            <a:spAutoFit/>
-          </a:bodyPr>
-          <a:lstStyle/>
-          <a:p>
-            <a:r>
-              <a:rPr sz="1300" b="1">
-                <a:solidFill>
-                  <a:srgbClr val="1B3A5C"/>
-                </a:solidFill>
-              </a:rPr>
-              <a:t>In plain terms:  </a:t>
-            </a:r>
-            <a:r>
-              <a:rPr sz="1300"/>
-              <a:t>28 miles walked in two halves; only 13.8% of 2025-26 effort rests on a full count. The correction factor, the section split, and the whole-beach total are each assumed, not measured, which is what the pilot fixes.</a:t>
-            </a:r>
-          </a:p>
-        </p:txBody>
-      </p:sp>
-    </p:spTree>
-  </p:cSld>
-  <p:clrMapOvr>
-    <a:masterClrMapping/>
-  </p:clrMapOvr>
-</p:sld>
-</file>
-
-<file path=ppt/slides/slide9.xml><?xml version="1.0" encoding="utf-8"?>
-<p:sld xmlns:a="http://schemas.openxmlformats.org/drawingml/2006/main" xmlns:r="http://schemas.openxmlformats.org/officeDocument/2006/relationships" xmlns:p="http://schemas.openxmlformats.org/presentationml/2006/main">
-  <p:cSld>
-    <p:spTree>
-      <p:nvGrpSpPr>
-        <p:cNvPr id="1" name=""/>
-        <p:cNvGrpSpPr/>
-        <p:nvPr/>
-      </p:nvGrpSpPr>
-      <p:grpSpPr>
-        <a:xfrm>
-          <a:off x="0" y="0"/>
-          <a:ext cx="0" cy="0"/>
-          <a:chOff x="0" y="0"/>
-          <a:chExt cx="0" cy="0"/>
-        </a:xfrm>
-      </p:grpSpPr>
-      <p:sp>
-        <p:nvSpPr>
-          <p:cNvPr id="2" name="Title 1"/>
-          <p:cNvSpPr>
-            <a:spLocks noGrp="1"/>
-          </p:cNvSpPr>
-          <p:nvPr>
-            <p:ph type="ctrTitle"/>
-          </p:nvPr>
-        </p:nvSpPr>
-        <p:spPr/>
-        <p:txBody>
-          <a:bodyPr/>
-          <a:lstStyle/>
-          <a:p>
-            <a:r>
-              <a:t>Priors: what the estimate rests on</a:t>
             </a:r>
           </a:p>
         </p:txBody>
@@ -11338,44 +11397,44 @@
         <a:sysClr val="window" lastClr="FFFFFF"/>
       </a:lt1>
       <a:dk2>
-        <a:srgbClr val="0E2841"/>
+        <a:srgbClr val="1F497D"/>
       </a:dk2>
       <a:lt2>
-        <a:srgbClr val="E8E8E8"/>
+        <a:srgbClr val="EEECE1"/>
       </a:lt2>
       <a:accent1>
-        <a:srgbClr val="156082"/>
+        <a:srgbClr val="4F81BD"/>
       </a:accent1>
       <a:accent2>
-        <a:srgbClr val="E97132"/>
+        <a:srgbClr val="C0504D"/>
       </a:accent2>
       <a:accent3>
-        <a:srgbClr val="196B24"/>
+        <a:srgbClr val="9BBB59"/>
       </a:accent3>
       <a:accent4>
-        <a:srgbClr val="0F9ED5"/>
+        <a:srgbClr val="8064A2"/>
       </a:accent4>
       <a:accent5>
-        <a:srgbClr val="A02B93"/>
+        <a:srgbClr val="4BACC6"/>
       </a:accent5>
       <a:accent6>
-        <a:srgbClr val="4EA72E"/>
+        <a:srgbClr val="F79646"/>
       </a:accent6>
       <a:hlink>
-        <a:srgbClr val="467886"/>
+        <a:srgbClr val="0000FF"/>
       </a:hlink>
       <a:folHlink>
-        <a:srgbClr val="96607D"/>
+        <a:srgbClr val="800080"/>
       </a:folHlink>
     </a:clrScheme>
     <a:fontScheme name="Office">
       <a:majorFont>
-        <a:latin typeface="Aptos Display" panose="02110004020202020204"/>
+        <a:latin typeface="Calibri"/>
         <a:ea typeface=""/>
         <a:cs typeface=""/>
-        <a:font script="Jpan" typeface="游ゴシック Light"/>
+        <a:font script="Jpan" typeface="ＭＳ Ｐゴシック"/>
         <a:font script="Hang" typeface="맑은 고딕"/>
-        <a:font script="Hans" typeface="等线 Light"/>
+        <a:font script="Hans" typeface="宋体"/>
         <a:font script="Hant" typeface="新細明體"/>
         <a:font script="Arab" typeface="Times New Roman"/>
         <a:font script="Hebr" typeface="Times New Roman"/>
@@ -11403,31 +11462,14 @@
         <a:font script="Viet" typeface="Times New Roman"/>
         <a:font script="Uigh" typeface="Microsoft Uighur"/>
         <a:font script="Geor" typeface="Sylfaen"/>
-        <a:font script="Armn" typeface="Arial"/>
-        <a:font script="Bugi" typeface="Leelawadee UI"/>
-        <a:font script="Bopo" typeface="Microsoft JhengHei"/>
-        <a:font script="Java" typeface="Javanese Text"/>
-        <a:font script="Lisu" typeface="Segoe UI"/>
-        <a:font script="Mymr" typeface="Myanmar Text"/>
-        <a:font script="Nkoo" typeface="Ebrima"/>
-        <a:font script="Olck" typeface="Nirmala UI"/>
-        <a:font script="Osma" typeface="Ebrima"/>
-        <a:font script="Phag" typeface="Phagspa"/>
-        <a:font script="Syrn" typeface="Estrangelo Edessa"/>
-        <a:font script="Syrj" typeface="Estrangelo Edessa"/>
-        <a:font script="Syre" typeface="Estrangelo Edessa"/>
-        <a:font script="Sora" typeface="Nirmala UI"/>
-        <a:font script="Tale" typeface="Microsoft Tai Le"/>
-        <a:font script="Talu" typeface="Microsoft New Tai Lue"/>
-        <a:font script="Tfng" typeface="Ebrima"/>
       </a:majorFont>
       <a:minorFont>
-        <a:latin typeface="Aptos" panose="02110004020202020204"/>
+        <a:latin typeface="Calibri"/>
         <a:ea typeface=""/>
         <a:cs typeface=""/>
-        <a:font script="Jpan" typeface="游ゴシック"/>
+        <a:font script="Jpan" typeface="ＭＳ Ｐゴシック"/>
         <a:font script="Hang" typeface="맑은 고딕"/>
-        <a:font script="Hans" typeface="等线"/>
+        <a:font script="Hans" typeface="宋体"/>
         <a:font script="Hant" typeface="新細明體"/>
         <a:font script="Arab" typeface="Arial"/>
         <a:font script="Hebr" typeface="Arial"/>
@@ -11455,23 +11497,6 @@
         <a:font script="Viet" typeface="Arial"/>
         <a:font script="Uigh" typeface="Microsoft Uighur"/>
         <a:font script="Geor" typeface="Sylfaen"/>
-        <a:font script="Armn" typeface="Arial"/>
-        <a:font script="Bugi" typeface="Leelawadee UI"/>
-        <a:font script="Bopo" typeface="Microsoft JhengHei"/>
-        <a:font script="Java" typeface="Javanese Text"/>
-        <a:font script="Lisu" typeface="Segoe UI"/>
-        <a:font script="Mymr" typeface="Myanmar Text"/>
-        <a:font script="Nkoo" typeface="Ebrima"/>
-        <a:font script="Olck" typeface="Nirmala UI"/>
-        <a:font script="Osma" typeface="Ebrima"/>
-        <a:font script="Phag" typeface="Phagspa"/>
-        <a:font script="Syrn" typeface="Estrangelo Edessa"/>
-        <a:font script="Syrj" typeface="Estrangelo Edessa"/>
-        <a:font script="Syre" typeface="Estrangelo Edessa"/>
-        <a:font script="Sora" typeface="Nirmala UI"/>
-        <a:font script="Tale" typeface="Microsoft Tai Le"/>
-        <a:font script="Talu" typeface="Microsoft New Tai Lue"/>
-        <a:font script="Tfng" typeface="Ebrima"/>
       </a:minorFont>
     </a:fontScheme>
     <a:fmtScheme name="Office">
@@ -11483,136 +11508,180 @@
           <a:gsLst>
             <a:gs pos="0">
               <a:schemeClr val="phClr">
-                <a:lumMod val="110000"/>
-                <a:satMod val="105000"/>
-                <a:tint val="67000"/>
+                <a:tint val="50000"/>
+                <a:satMod val="300000"/>
               </a:schemeClr>
             </a:gs>
-            <a:gs pos="50000">
+            <a:gs pos="35000">
               <a:schemeClr val="phClr">
-                <a:lumMod val="105000"/>
-                <a:satMod val="103000"/>
-                <a:tint val="73000"/>
+                <a:tint val="37000"/>
+                <a:satMod val="300000"/>
               </a:schemeClr>
             </a:gs>
             <a:gs pos="100000">
               <a:schemeClr val="phClr">
-                <a:lumMod val="105000"/>
-                <a:satMod val="109000"/>
-                <a:tint val="81000"/>
+                <a:tint val="15000"/>
+                <a:satMod val="350000"/>
               </a:schemeClr>
             </a:gs>
           </a:gsLst>
-          <a:lin ang="5400000" scaled="0"/>
+          <a:lin ang="16200000" scaled="1"/>
         </a:gradFill>
         <a:gradFill rotWithShape="1">
           <a:gsLst>
             <a:gs pos="0">
               <a:schemeClr val="phClr">
-                <a:satMod val="103000"/>
-                <a:lumMod val="102000"/>
-                <a:tint val="94000"/>
-              </a:schemeClr>
-            </a:gs>
-            <a:gs pos="50000">
-              <a:schemeClr val="phClr">
-                <a:satMod val="110000"/>
-                <a:lumMod val="100000"/>
+                <a:tint val="100000"/>
                 <a:shade val="100000"/>
+                <a:satMod val="130000"/>
               </a:schemeClr>
             </a:gs>
             <a:gs pos="100000">
               <a:schemeClr val="phClr">
-                <a:lumMod val="99000"/>
-                <a:satMod val="120000"/>
-                <a:shade val="78000"/>
+                <a:tint val="50000"/>
+                <a:shade val="100000"/>
+                <a:satMod val="350000"/>
               </a:schemeClr>
             </a:gs>
           </a:gsLst>
-          <a:lin ang="5400000" scaled="0"/>
+          <a:lin ang="16200000" scaled="0"/>
         </a:gradFill>
       </a:fillStyleLst>
       <a:lnStyleLst>
-        <a:ln w="12700" cap="flat" cmpd="sng" algn="ctr">
+        <a:ln w="9525" cap="flat" cmpd="sng" algn="ctr">
           <a:solidFill>
-            <a:schemeClr val="phClr"/>
+            <a:schemeClr val="phClr">
+              <a:shade val="95000"/>
+              <a:satMod val="105000"/>
+            </a:schemeClr>
           </a:solidFill>
           <a:prstDash val="solid"/>
-          <a:miter lim="800000"/>
-        </a:ln>
-        <a:ln w="19050" cap="flat" cmpd="sng" algn="ctr">
-          <a:solidFill>
-            <a:schemeClr val="phClr"/>
-          </a:solidFill>
-          <a:prstDash val="solid"/>
-          <a:miter lim="800000"/>
         </a:ln>
         <a:ln w="25400" cap="flat" cmpd="sng" algn="ctr">
           <a:solidFill>
             <a:schemeClr val="phClr"/>
           </a:solidFill>
           <a:prstDash val="solid"/>
-          <a:miter lim="800000"/>
+        </a:ln>
+        <a:ln w="38100" cap="flat" cmpd="sng" algn="ctr">
+          <a:solidFill>
+            <a:schemeClr val="phClr"/>
+          </a:solidFill>
+          <a:prstDash val="solid"/>
         </a:ln>
       </a:lnStyleLst>
       <a:effectStyleLst>
         <a:effectStyle>
-          <a:effectLst/>
-        </a:effectStyle>
-        <a:effectStyle>
-          <a:effectLst/>
+          <a:effectLst>
+            <a:outerShdw blurRad="40000" dist="20000" dir="5400000" rotWithShape="0">
+              <a:srgbClr val="000000">
+                <a:alpha val="38000"/>
+              </a:srgbClr>
+            </a:outerShdw>
+          </a:effectLst>
         </a:effectStyle>
         <a:effectStyle>
           <a:effectLst>
-            <a:outerShdw blurRad="57150" dist="19050" dir="5400000" algn="ctr" rotWithShape="0">
+            <a:outerShdw blurRad="40000" dist="23000" dir="5400000" rotWithShape="0">
               <a:srgbClr val="000000">
-                <a:alpha val="63000"/>
+                <a:alpha val="35000"/>
               </a:srgbClr>
             </a:outerShdw>
           </a:effectLst>
+        </a:effectStyle>
+        <a:effectStyle>
+          <a:effectLst>
+            <a:outerShdw blurRad="40000" dist="23000" dir="5400000" rotWithShape="0">
+              <a:srgbClr val="000000">
+                <a:alpha val="35000"/>
+              </a:srgbClr>
+            </a:outerShdw>
+          </a:effectLst>
+          <a:scene3d>
+            <a:camera prst="orthographicFront">
+              <a:rot lat="0" lon="0" rev="0"/>
+            </a:camera>
+            <a:lightRig rig="threePt" dir="t">
+              <a:rot lat="0" lon="0" rev="1200000"/>
+            </a:lightRig>
+          </a:scene3d>
+          <a:sp3d>
+            <a:bevelT w="63500" h="25400"/>
+          </a:sp3d>
         </a:effectStyle>
       </a:effectStyleLst>
       <a:bgFillStyleLst>
         <a:solidFill>
           <a:schemeClr val="phClr"/>
         </a:solidFill>
-        <a:solidFill>
-          <a:schemeClr val="phClr">
-            <a:tint val="95000"/>
-            <a:satMod val="170000"/>
-          </a:schemeClr>
-        </a:solidFill>
         <a:gradFill rotWithShape="1">
           <a:gsLst>
             <a:gs pos="0">
               <a:schemeClr val="phClr">
-                <a:tint val="93000"/>
-                <a:satMod val="150000"/>
-                <a:shade val="98000"/>
-                <a:lumMod val="102000"/>
+                <a:tint val="40000"/>
+                <a:satMod val="350000"/>
               </a:schemeClr>
             </a:gs>
-            <a:gs pos="50000">
+            <a:gs pos="40000">
               <a:schemeClr val="phClr">
-                <a:tint val="98000"/>
-                <a:satMod val="130000"/>
-                <a:shade val="90000"/>
-                <a:lumMod val="103000"/>
+                <a:tint val="45000"/>
+                <a:shade val="99000"/>
+                <a:satMod val="350000"/>
               </a:schemeClr>
             </a:gs>
             <a:gs pos="100000">
               <a:schemeClr val="phClr">
-                <a:shade val="63000"/>
-                <a:satMod val="120000"/>
+                <a:shade val="20000"/>
+                <a:satMod val="255000"/>
               </a:schemeClr>
             </a:gs>
           </a:gsLst>
-          <a:lin ang="5400000" scaled="0"/>
+          <a:path path="circle">
+            <a:fillToRect l="50000" t="-80000" r="50000" b="180000"/>
+          </a:path>
+        </a:gradFill>
+        <a:gradFill rotWithShape="1">
+          <a:gsLst>
+            <a:gs pos="0">
+              <a:schemeClr val="phClr">
+                <a:tint val="80000"/>
+                <a:satMod val="300000"/>
+              </a:schemeClr>
+            </a:gs>
+            <a:gs pos="100000">
+              <a:schemeClr val="phClr">
+                <a:shade val="30000"/>
+                <a:satMod val="200000"/>
+              </a:schemeClr>
+            </a:gs>
+          </a:gsLst>
+          <a:path path="circle">
+            <a:fillToRect l="50000" t="50000" r="50000" b="50000"/>
+          </a:path>
         </a:gradFill>
       </a:bgFillStyleLst>
     </a:fmtScheme>
   </a:themeElements>
   <a:objectDefaults>
+    <a:spDef>
+      <a:spPr/>
+      <a:bodyPr/>
+      <a:lstStyle/>
+      <a:style>
+        <a:lnRef idx="1">
+          <a:schemeClr val="accent1"/>
+        </a:lnRef>
+        <a:fillRef idx="3">
+          <a:schemeClr val="accent1"/>
+        </a:fillRef>
+        <a:effectRef idx="2">
+          <a:schemeClr val="accent1"/>
+        </a:effectRef>
+        <a:fontRef idx="minor">
+          <a:schemeClr val="lt1"/>
+        </a:fontRef>
+      </a:style>
+    </a:spDef>
     <a:lnDef>
       <a:spPr/>
       <a:bodyPr/>
@@ -11634,38 +11703,10 @@
     </a:lnDef>
   </a:objectDefaults>
   <a:extraClrSchemeLst/>
-  <a:extLst>
-    <a:ext uri="{05A4C25C-085E-4340-85A3-A5531E510DB2}">
-      <thm15:themeFamily xmlns:thm15="http://schemas.microsoft.com/office/thememl/2012/main" name="Office Theme" id="{2E142A2C-CD16-42D6-873A-C26D2A0506FA}" vid="{1BDDFF52-6CD6-40A5-AB3C-68EB2F1E4D0A}"/>
-    </a:ext>
-  </a:extLst>
 </a:theme>
 </file>
 
 <file path=customXml/item1.xml><?xml version="1.0" encoding="utf-8"?>
-<p:properties xmlns:p="http://schemas.microsoft.com/office/2006/metadata/properties" xmlns:xsi="http://www.w3.org/2001/XMLSchema-instance" xmlns:pc="http://schemas.microsoft.com/office/infopath/2007/PartnerControls">
-  <documentManagement>
-    <_ip_UnifiedCompliancePolicyUIAction xmlns="http://schemas.microsoft.com/sharepoint/v3" xsi:nil="true"/>
-    <_ip_UnifiedCompliancePolicyProperties xmlns="http://schemas.microsoft.com/sharepoint/v3" xsi:nil="true"/>
-    <lcf76f155ced4ddcb4097134ff3c332f xmlns="c55fcec3-bb2d-4ee6-a56c-bdfd532525fc">
-      <Terms xmlns="http://schemas.microsoft.com/office/infopath/2007/PartnerControls"/>
-    </lcf76f155ced4ddcb4097134ff3c332f>
-    <TaxCatchAll xmlns="73c3c465-f3d4-4d37-9c58-e2ee535ad8e0" xsi:nil="true"/>
-    <NameinDAM xmlns="c55fcec3-bb2d-4ee6-a56c-bdfd532525fc" xsi:nil="true"/>
-  </documentManagement>
-</p:properties>
-</file>
-
-<file path=customXml/item2.xml><?xml version="1.0" encoding="utf-8"?>
-<?mso-contentType ?>
-<FormTemplates xmlns="http://schemas.microsoft.com/sharepoint/v3/contenttype/forms">
-  <Display>DocumentLibraryForm</Display>
-  <Edit>DocumentLibraryForm</Edit>
-  <New>DocumentLibraryForm</New>
-</FormTemplates>
-</file>
-
-<file path=customXml/item3.xml><?xml version="1.0" encoding="utf-8"?>
 <ct:contentTypeSchema xmlns:ct="http://schemas.microsoft.com/office/2006/metadata/contentType" xmlns:ma="http://schemas.microsoft.com/office/2006/metadata/properties/metaAttributes" ct:_="" ma:_="" ma:contentTypeName="Document" ma:contentTypeID="0x01010053DF6C379CEE474091FA722A741F562C" ma:contentTypeVersion="18" ma:contentTypeDescription="Create a new document." ma:contentTypeScope="" ma:versionID="6d943700fdf77bec9a4960ab6af060cd">
   <xsd:schema xmlns:xsd="http://www.w3.org/2001/XMLSchema" xmlns:xs="http://www.w3.org/2001/XMLSchema" xmlns:p="http://schemas.microsoft.com/office/2006/metadata/properties" xmlns:ns1="http://schemas.microsoft.com/sharepoint/v3" xmlns:ns2="c55fcec3-bb2d-4ee6-a56c-bdfd532525fc" xmlns:ns3="73c3c465-f3d4-4d37-9c58-e2ee535ad8e0" targetNamespace="http://schemas.microsoft.com/office/2006/metadata/properties" ma:root="true" ma:fieldsID="f5f2cddc585f7bcfd68998bfccb1991a" ns1:_="" ns2:_="" ns3:_="">
     <xsd:import namespace="http://schemas.microsoft.com/sharepoint/v3"/>
@@ -11925,33 +11966,30 @@
 </ct:contentTypeSchema>
 </file>
 
-<file path=customXml/itemProps1.xml><?xml version="1.0" encoding="utf-8"?>
-<ds:datastoreItem xmlns:ds="http://schemas.openxmlformats.org/officeDocument/2006/customXml" ds:itemID="{B432BB05-EAC0-435E-80C7-C3FC0DCFDF5B}">
-  <ds:schemaRefs>
-    <ds:schemaRef ds:uri="http://www.w3.org/XML/1998/namespace"/>
-    <ds:schemaRef ds:uri="73c3c465-f3d4-4d37-9c58-e2ee535ad8e0"/>
-    <ds:schemaRef ds:uri="http://schemas.microsoft.com/sharepoint/v3"/>
-    <ds:schemaRef ds:uri="http://schemas.microsoft.com/office/2006/documentManagement/types"/>
-    <ds:schemaRef ds:uri="http://purl.org/dc/elements/1.1/"/>
-    <ds:schemaRef ds:uri="http://schemas.microsoft.com/office/infopath/2007/PartnerControls"/>
-    <ds:schemaRef ds:uri="c55fcec3-bb2d-4ee6-a56c-bdfd532525fc"/>
-    <ds:schemaRef ds:uri="http://schemas.openxmlformats.org/package/2006/metadata/core-properties"/>
-    <ds:schemaRef ds:uri="http://schemas.microsoft.com/office/2006/metadata/properties"/>
-    <ds:schemaRef ds:uri="http://purl.org/dc/dcmitype/"/>
-    <ds:schemaRef ds:uri="http://purl.org/dc/terms/"/>
-  </ds:schemaRefs>
-</ds:datastoreItem>
+<file path=customXml/item2.xml><?xml version="1.0" encoding="utf-8"?>
+<p:properties xmlns:p="http://schemas.microsoft.com/office/2006/metadata/properties" xmlns:xsi="http://www.w3.org/2001/XMLSchema-instance" xmlns:pc="http://schemas.microsoft.com/office/infopath/2007/PartnerControls">
+  <documentManagement>
+    <_ip_UnifiedCompliancePolicyUIAction xmlns="http://schemas.microsoft.com/sharepoint/v3" xsi:nil="true"/>
+    <_ip_UnifiedCompliancePolicyProperties xmlns="http://schemas.microsoft.com/sharepoint/v3" xsi:nil="true"/>
+    <lcf76f155ced4ddcb4097134ff3c332f xmlns="c55fcec3-bb2d-4ee6-a56c-bdfd532525fc">
+      <Terms xmlns="http://schemas.microsoft.com/office/infopath/2007/PartnerControls"/>
+    </lcf76f155ced4ddcb4097134ff3c332f>
+    <TaxCatchAll xmlns="73c3c465-f3d4-4d37-9c58-e2ee535ad8e0" xsi:nil="true"/>
+    <NameinDAM xmlns="c55fcec3-bb2d-4ee6-a56c-bdfd532525fc" xsi:nil="true"/>
+  </documentManagement>
+</p:properties>
 </file>
 
-<file path=customXml/itemProps2.xml><?xml version="1.0" encoding="utf-8"?>
-<ds:datastoreItem xmlns:ds="http://schemas.openxmlformats.org/officeDocument/2006/customXml" ds:itemID="{01EA9719-73E1-4AAC-90C2-9E9ED399E0F4}">
-  <ds:schemaRefs>
-    <ds:schemaRef ds:uri="http://schemas.microsoft.com/sharepoint/v3/contenttype/forms"/>
-  </ds:schemaRefs>
-</ds:datastoreItem>
+<file path=customXml/item3.xml><?xml version="1.0" encoding="utf-8"?>
+<?mso-contentType ?>
+<FormTemplates xmlns="http://schemas.microsoft.com/sharepoint/v3/contenttype/forms">
+  <Display>DocumentLibraryForm</Display>
+  <Edit>DocumentLibraryForm</Edit>
+  <New>DocumentLibraryForm</New>
+</FormTemplates>
 </file>
 
-<file path=customXml/itemProps3.xml><?xml version="1.0" encoding="utf-8"?>
+<file path=customXml/itemProps1.xml><?xml version="1.0" encoding="utf-8"?>
 <ds:datastoreItem xmlns:ds="http://schemas.openxmlformats.org/officeDocument/2006/customXml" ds:itemID="{236337B2-684D-4381-98D1-02BFB3997964}">
   <ds:schemaRefs>
     <ds:schemaRef ds:uri="http://schemas.microsoft.com/office/2006/metadata/contentType"/>
@@ -11971,6 +12009,32 @@
 </ds:datastoreItem>
 </file>
 
+<file path=customXml/itemProps2.xml><?xml version="1.0" encoding="utf-8"?>
+<ds:datastoreItem xmlns:ds="http://schemas.openxmlformats.org/officeDocument/2006/customXml" ds:itemID="{B432BB05-EAC0-435E-80C7-C3FC0DCFDF5B}">
+  <ds:schemaRefs>
+    <ds:schemaRef ds:uri="http://www.w3.org/XML/1998/namespace"/>
+    <ds:schemaRef ds:uri="73c3c465-f3d4-4d37-9c58-e2ee535ad8e0"/>
+    <ds:schemaRef ds:uri="http://schemas.microsoft.com/sharepoint/v3"/>
+    <ds:schemaRef ds:uri="http://schemas.microsoft.com/office/2006/documentManagement/types"/>
+    <ds:schemaRef ds:uri="http://purl.org/dc/elements/1.1/"/>
+    <ds:schemaRef ds:uri="http://schemas.microsoft.com/office/infopath/2007/PartnerControls"/>
+    <ds:schemaRef ds:uri="c55fcec3-bb2d-4ee6-a56c-bdfd532525fc"/>
+    <ds:schemaRef ds:uri="http://schemas.openxmlformats.org/package/2006/metadata/core-properties"/>
+    <ds:schemaRef ds:uri="http://schemas.microsoft.com/office/2006/metadata/properties"/>
+    <ds:schemaRef ds:uri="http://purl.org/dc/dcmitype/"/>
+    <ds:schemaRef ds:uri="http://purl.org/dc/terms/"/>
+  </ds:schemaRefs>
+</ds:datastoreItem>
+</file>
+
+<file path=customXml/itemProps3.xml><?xml version="1.0" encoding="utf-8"?>
+<ds:datastoreItem xmlns:ds="http://schemas.openxmlformats.org/officeDocument/2006/customXml" ds:itemID="{01EA9719-73E1-4AAC-90C2-9E9ED399E0F4}">
+  <ds:schemaRefs>
+    <ds:schemaRef ds:uri="http://schemas.microsoft.com/sharepoint/v3/contenttype/forms"/>
+  </ds:schemaRefs>
+</ds:datastoreItem>
+</file>
+
 <file path=docMetadata/LabelInfo.xml><?xml version="1.0" encoding="utf-8"?>
 <clbl:labelList xmlns:clbl="http://schemas.microsoft.com/office/2020/mipLabelMetadata">
   <clbl:label id="{45011977-b912-4387-97a4-f4c94a801377}" enabled="1" method="Standard" siteId="{11d0e217-264e-400a-8ba0-57dcc127d72d}" removed="0"/>

--- a/07_presentations/razor-clam-sampling-design.pptx
+++ b/07_presentations/razor-clam-sampling-design.pptx
@@ -36,6 +36,10 @@
     <p:sldId id="281" r:id="rId37"/>
     <p:sldId id="282" r:id="rId38"/>
     <p:sldId id="283" r:id="rId39"/>
+    <p:sldId id="284" r:id="rId40"/>
+    <p:sldId id="285" r:id="rId41"/>
+    <p:sldId id="286" r:id="rId42"/>
+    <p:sldId id="287" r:id="rId43"/>
   </p:sldIdLst>
   <p:sldSz cx="12192000" cy="6858000"/>
   <p:notesSz cx="6858000" cy="9144000"/>
@@ -1436,7 +1440,7 @@
           <a:lstStyle/>
           <a:p>
             <a:r>
-              <a:t>Sec 11.5. Cost-neutral in crew-days; donor cost is real.</a:t>
+              <a:t>New CPUE study (Fig 22-23). Confirms the doc's 0.448 and resolves it by pair; degrades to ~0.65 at 1-day lag.</a:t>
             </a:r>
           </a:p>
         </p:txBody>
@@ -1576,7 +1580,7 @@
           <a:lstStyle/>
           <a:p>
             <a:r>
-              <a:t>Priority recommendations, updated for the no-joint-donor and budget-impact findings.</a:t>
+              <a:t>New CPUE study (Fig 24-25). The season-level CPUE component is the harvest floor; only measuring the target removes it.</a:t>
             </a:r>
           </a:p>
         </p:txBody>
@@ -1602,6 +1606,286 @@
 </file>
 
 <file path=ppt/notesSlides/notesSlide21.xml><?xml version="1.0" encoding="utf-8"?>
+<p:notes xmlns:a="http://schemas.openxmlformats.org/drawingml/2006/main" xmlns:p="http://schemas.openxmlformats.org/presentationml/2006/main" xmlns:r="http://schemas.openxmlformats.org/officeDocument/2006/relationships">
+  <p:cSld>
+    <p:spTree>
+      <p:nvGrpSpPr>
+        <p:cNvPr id="1" name=""/>
+        <p:cNvGrpSpPr/>
+        <p:nvPr/>
+      </p:nvGrpSpPr>
+      <p:grpSpPr>
+        <a:xfrm>
+          <a:off x="0" y="0"/>
+          <a:ext cx="0" cy="0"/>
+          <a:chOff x="0" y="0"/>
+          <a:chExt cx="0" cy="0"/>
+        </a:xfrm>
+      </p:grpSpPr>
+      <p:sp>
+        <p:nvSpPr>
+          <p:cNvPr id="2" name="Slide Image Placeholder 1"/>
+          <p:cNvSpPr>
+            <a:spLocks noGrp="1"/>
+          </p:cNvSpPr>
+          <p:nvPr>
+            <p:ph type="sldImg" idx="2"/>
+          </p:nvPr>
+        </p:nvSpPr>
+        <p:spPr/>
+      </p:sp>
+      <p:sp>
+        <p:nvSpPr>
+          <p:cNvPr id="3" name="Notes Placeholder 2"/>
+          <p:cNvSpPr>
+            <a:spLocks noGrp="1"/>
+          </p:cNvSpPr>
+          <p:nvPr>
+            <p:ph type="body" idx="3" sz="quarter"/>
+          </p:nvPr>
+        </p:nvSpPr>
+        <p:spPr/>
+        <p:txBody>
+          <a:bodyPr/>
+          <a:lstStyle/>
+          <a:p>
+            <a:r>
+              <a:t>Sec 11.11. The pilot's product is the CF table; ~8 whole-beach surveys halve it (Fig 20).</a:t>
+            </a:r>
+          </a:p>
+        </p:txBody>
+      </p:sp>
+      <p:sp>
+        <p:nvSpPr>
+          <p:cNvPr id="4" name="Slide Number Placeholder 3"/>
+          <p:cNvSpPr>
+            <a:spLocks noGrp="1"/>
+          </p:cNvSpPr>
+          <p:nvPr>
+            <p:ph type="sldNum" idx="5" sz="quarter"/>
+          </p:nvPr>
+        </p:nvSpPr>
+        <p:spPr/>
+      </p:sp>
+    </p:spTree>
+  </p:cSld>
+  <p:clrMapOvr>
+    <a:masterClrMapping/>
+  </p:clrMapOvr>
+</p:notes>
+</file>
+
+<file path=ppt/notesSlides/notesSlide22.xml><?xml version="1.0" encoding="utf-8"?>
+<p:notes xmlns:a="http://schemas.openxmlformats.org/drawingml/2006/main" xmlns:p="http://schemas.openxmlformats.org/presentationml/2006/main" xmlns:r="http://schemas.openxmlformats.org/officeDocument/2006/relationships">
+  <p:cSld>
+    <p:spTree>
+      <p:nvGrpSpPr>
+        <p:cNvPr id="1" name=""/>
+        <p:cNvGrpSpPr/>
+        <p:nvPr/>
+      </p:nvGrpSpPr>
+      <p:grpSpPr>
+        <a:xfrm>
+          <a:off x="0" y="0"/>
+          <a:ext cx="0" cy="0"/>
+          <a:chOff x="0" y="0"/>
+          <a:chExt cx="0" cy="0"/>
+        </a:xfrm>
+      </p:grpSpPr>
+      <p:sp>
+        <p:nvSpPr>
+          <p:cNvPr id="2" name="Slide Image Placeholder 1"/>
+          <p:cNvSpPr>
+            <a:spLocks noGrp="1"/>
+          </p:cNvSpPr>
+          <p:nvPr>
+            <p:ph type="sldImg" idx="2"/>
+          </p:nvPr>
+        </p:nvSpPr>
+        <p:spPr/>
+      </p:sp>
+      <p:sp>
+        <p:nvSpPr>
+          <p:cNvPr id="3" name="Notes Placeholder 2"/>
+          <p:cNvSpPr>
+            <a:spLocks noGrp="1"/>
+          </p:cNvSpPr>
+          <p:nvPr>
+            <p:ph type="body" idx="3" sz="quarter"/>
+          </p:nvPr>
+        </p:nvSpPr>
+        <p:spPr/>
+        <p:txBody>
+          <a:bodyPr/>
+          <a:lstStyle/>
+          <a:p>
+            <a:r>
+              <a:t>Sec 11.11. Answers 'how often + when to sample to ground-truth'. The lag caveat is why the staffing model's low-counting frontier is optimistic.</a:t>
+            </a:r>
+          </a:p>
+        </p:txBody>
+      </p:sp>
+      <p:sp>
+        <p:nvSpPr>
+          <p:cNvPr id="4" name="Slide Number Placeholder 3"/>
+          <p:cNvSpPr>
+            <a:spLocks noGrp="1"/>
+          </p:cNvSpPr>
+          <p:nvPr>
+            <p:ph type="sldNum" idx="5" sz="quarter"/>
+          </p:nvPr>
+        </p:nvSpPr>
+        <p:spPr/>
+      </p:sp>
+    </p:spTree>
+  </p:cSld>
+  <p:clrMapOvr>
+    <a:masterClrMapping/>
+  </p:clrMapOvr>
+</p:notes>
+</file>
+
+<file path=ppt/notesSlides/notesSlide23.xml><?xml version="1.0" encoding="utf-8"?>
+<p:notes xmlns:a="http://schemas.openxmlformats.org/drawingml/2006/main" xmlns:p="http://schemas.openxmlformats.org/presentationml/2006/main" xmlns:r="http://schemas.openxmlformats.org/officeDocument/2006/relationships">
+  <p:cSld>
+    <p:spTree>
+      <p:nvGrpSpPr>
+        <p:cNvPr id="1" name=""/>
+        <p:cNvGrpSpPr/>
+        <p:nvPr/>
+      </p:nvGrpSpPr>
+      <p:grpSpPr>
+        <a:xfrm>
+          <a:off x="0" y="0"/>
+          <a:ext cx="0" cy="0"/>
+          <a:chOff x="0" y="0"/>
+          <a:chExt cx="0" cy="0"/>
+        </a:xfrm>
+      </p:grpSpPr>
+      <p:sp>
+        <p:nvSpPr>
+          <p:cNvPr id="2" name="Slide Image Placeholder 1"/>
+          <p:cNvSpPr>
+            <a:spLocks noGrp="1"/>
+          </p:cNvSpPr>
+          <p:nvPr>
+            <p:ph type="sldImg" idx="2"/>
+          </p:nvPr>
+        </p:nvSpPr>
+        <p:spPr/>
+      </p:sp>
+      <p:sp>
+        <p:nvSpPr>
+          <p:cNvPr id="3" name="Notes Placeholder 2"/>
+          <p:cNvSpPr>
+            <a:spLocks noGrp="1"/>
+          </p:cNvSpPr>
+          <p:nvPr>
+            <p:ph type="body" idx="3" sz="quarter"/>
+          </p:nvPr>
+        </p:nvSpPr>
+        <p:spPr/>
+        <p:txBody>
+          <a:bodyPr/>
+          <a:lstStyle/>
+          <a:p>
+            <a:r>
+              <a:t>Sec 11.5. Cost-neutral in crew-days; donor cost is real.</a:t>
+            </a:r>
+          </a:p>
+        </p:txBody>
+      </p:sp>
+      <p:sp>
+        <p:nvSpPr>
+          <p:cNvPr id="4" name="Slide Number Placeholder 3"/>
+          <p:cNvSpPr>
+            <a:spLocks noGrp="1"/>
+          </p:cNvSpPr>
+          <p:nvPr>
+            <p:ph type="sldNum" idx="5" sz="quarter"/>
+          </p:nvPr>
+        </p:nvSpPr>
+        <p:spPr/>
+      </p:sp>
+    </p:spTree>
+  </p:cSld>
+  <p:clrMapOvr>
+    <a:masterClrMapping/>
+  </p:clrMapOvr>
+</p:notes>
+</file>
+
+<file path=ppt/notesSlides/notesSlide24.xml><?xml version="1.0" encoding="utf-8"?>
+<p:notes xmlns:a="http://schemas.openxmlformats.org/drawingml/2006/main" xmlns:p="http://schemas.openxmlformats.org/presentationml/2006/main" xmlns:r="http://schemas.openxmlformats.org/officeDocument/2006/relationships">
+  <p:cSld>
+    <p:spTree>
+      <p:nvGrpSpPr>
+        <p:cNvPr id="1" name=""/>
+        <p:cNvGrpSpPr/>
+        <p:nvPr/>
+      </p:nvGrpSpPr>
+      <p:grpSpPr>
+        <a:xfrm>
+          <a:off x="0" y="0"/>
+          <a:ext cx="0" cy="0"/>
+          <a:chOff x="0" y="0"/>
+          <a:chExt cx="0" cy="0"/>
+        </a:xfrm>
+      </p:grpSpPr>
+      <p:sp>
+        <p:nvSpPr>
+          <p:cNvPr id="2" name="Slide Image Placeholder 1"/>
+          <p:cNvSpPr>
+            <a:spLocks noGrp="1"/>
+          </p:cNvSpPr>
+          <p:nvPr>
+            <p:ph type="sldImg" idx="2"/>
+          </p:nvPr>
+        </p:nvSpPr>
+        <p:spPr/>
+      </p:sp>
+      <p:sp>
+        <p:nvSpPr>
+          <p:cNvPr id="3" name="Notes Placeholder 2"/>
+          <p:cNvSpPr>
+            <a:spLocks noGrp="1"/>
+          </p:cNvSpPr>
+          <p:nvPr>
+            <p:ph type="body" idx="3" sz="quarter"/>
+          </p:nvPr>
+        </p:nvSpPr>
+        <p:spPr/>
+        <p:txBody>
+          <a:bodyPr/>
+          <a:lstStyle/>
+          <a:p>
+            <a:r>
+              <a:t>Priority recommendations, updated for the no-joint-donor, budget-impact, and CPUE-transfer findings.</a:t>
+            </a:r>
+          </a:p>
+        </p:txBody>
+      </p:sp>
+      <p:sp>
+        <p:nvSpPr>
+          <p:cNvPr id="4" name="Slide Number Placeholder 3"/>
+          <p:cNvSpPr>
+            <a:spLocks noGrp="1"/>
+          </p:cNvSpPr>
+          <p:nvPr>
+            <p:ph type="sldNum" idx="5" sz="quarter"/>
+          </p:nvPr>
+        </p:nvSpPr>
+        <p:spPr/>
+      </p:sp>
+    </p:spTree>
+  </p:cSld>
+  <p:clrMapOvr>
+    <a:masterClrMapping/>
+  </p:clrMapOvr>
+</p:notes>
+</file>
+
+<file path=ppt/notesSlides/notesSlide25.xml><?xml version="1.0" encoding="utf-8"?>
 <p:notes xmlns:a="http://schemas.openxmlformats.org/drawingml/2006/main" xmlns:p="http://schemas.openxmlformats.org/presentationml/2006/main" xmlns:r="http://schemas.openxmlformats.org/officeDocument/2006/relationships">
   <p:cSld>
     <p:spTree>
@@ -9111,7 +9395,7 @@
             <a:spLocks noGrp="1"/>
           </p:cNvSpPr>
           <p:nvPr>
-            <p:ph type="ctrTitle"/>
+            <p:ph type="title"/>
           </p:nvPr>
         </p:nvSpPr>
         <p:spPr/>
@@ -9120,7 +9404,68 @@
           <a:lstStyle/>
           <a:p>
             <a:r>
-              <a:t>5.  Plan for the 2026-27 season</a:t>
+              <a:t>Borrowing catch rate across the north-south divide is the worst case</a:t>
+            </a:r>
+          </a:p>
+        </p:txBody>
+      </p:sp>
+      <p:pic>
+        <p:nvPicPr>
+          <p:cNvPr id="3" name="Picture 2" descr="cpue_fig1_by_pair.png"/>
+          <p:cNvPicPr>
+            <a:picLocks noChangeAspect="1"/>
+          </p:cNvPicPr>
+          <p:nvPr/>
+        </p:nvPicPr>
+        <p:blipFill>
+          <a:blip r:embed="rId2"/>
+          <a:stretch>
+            <a:fillRect/>
+          </a:stretch>
+        </p:blipFill>
+        <p:spPr>
+          <a:xfrm>
+            <a:off x="2275676" y="1417320"/>
+            <a:ext cx="7610167" cy="3931920"/>
+          </a:xfrm>
+          <a:prstGeom prst="rect">
+            <a:avLst/>
+          </a:prstGeom>
+        </p:spPr>
+      </p:pic>
+      <p:sp>
+        <p:nvSpPr>
+          <p:cNvPr id="4" name="TextBox 3"/>
+          <p:cNvSpPr txBox="1"/>
+          <p:nvPr/>
+        </p:nvSpPr>
+        <p:spPr>
+          <a:xfrm>
+            <a:off x="594360" y="5532120"/>
+            <a:ext cx="10972800" cy="822960"/>
+          </a:xfrm>
+          <a:prstGeom prst="rect">
+            <a:avLst/>
+          </a:prstGeom>
+          <a:noFill/>
+        </p:spPr>
+        <p:txBody>
+          <a:bodyPr wrap="square">
+            <a:spAutoFit/>
+          </a:bodyPr>
+          <a:lstStyle/>
+          <a:p>
+            <a:r>
+              <a:rPr b="1" sz="1250">
+                <a:solidFill>
+                  <a:srgbClr val="1B3A5C"/>
+                </a:solidFill>
+              </a:rPr>
+              <a:t>In plain terms:  </a:t>
+            </a:r>
+            <a:r>
+              <a:rPr sz="1250"/>
+              <a:t>on days both beaches were interviewed, a northern donor's catch rate matches Long Beach or Twin Harbors only at ~0.45 in the log (unbiased). The two northern beaches match each other at 0.26; catch rate is regional, and the imputation borrows it across the divide.</a:t>
             </a:r>
           </a:p>
         </p:txBody>
@@ -9134,6 +9479,335 @@
 </file>
 
 <file path=ppt/slides/slide24.xml><?xml version="1.0" encoding="utf-8"?>
+<p:sld xmlns:a="http://schemas.openxmlformats.org/drawingml/2006/main" xmlns:p="http://schemas.openxmlformats.org/presentationml/2006/main" xmlns:r="http://schemas.openxmlformats.org/officeDocument/2006/relationships">
+  <p:cSld>
+    <p:spTree>
+      <p:nvGrpSpPr>
+        <p:cNvPr id="1" name=""/>
+        <p:cNvGrpSpPr/>
+        <p:nvPr/>
+      </p:nvGrpSpPr>
+      <p:grpSpPr/>
+      <p:sp>
+        <p:nvSpPr>
+          <p:cNvPr id="2" name="Title 1"/>
+          <p:cNvSpPr>
+            <a:spLocks noGrp="1"/>
+          </p:cNvSpPr>
+          <p:nvPr>
+            <p:ph type="title"/>
+          </p:nvPr>
+        </p:nvSpPr>
+        <p:spPr/>
+        <p:txBody>
+          <a:bodyPr/>
+          <a:lstStyle/>
+          <a:p>
+            <a:r>
+              <a:t>The lever on harvest is interviewing the target, not counting the donor</a:t>
+            </a:r>
+          </a:p>
+        </p:txBody>
+      </p:sp>
+      <p:pic>
+        <p:nvPicPr>
+          <p:cNvPr id="3" name="Picture 2" descr="cpue_fig3_floor.png"/>
+          <p:cNvPicPr>
+            <a:picLocks noChangeAspect="1"/>
+          </p:cNvPicPr>
+          <p:nvPr/>
+        </p:nvPicPr>
+        <p:blipFill>
+          <a:blip r:embed="rId2"/>
+          <a:stretch>
+            <a:fillRect/>
+          </a:stretch>
+        </p:blipFill>
+        <p:spPr>
+          <a:xfrm>
+            <a:off x="2476500" y="1417320"/>
+            <a:ext cx="7208520" cy="3931920"/>
+          </a:xfrm>
+          <a:prstGeom prst="rect">
+            <a:avLst/>
+          </a:prstGeom>
+        </p:spPr>
+      </p:pic>
+      <p:sp>
+        <p:nvSpPr>
+          <p:cNvPr id="4" name="TextBox 3"/>
+          <p:cNvSpPr txBox="1"/>
+          <p:nvPr/>
+        </p:nvSpPr>
+        <p:spPr>
+          <a:xfrm>
+            <a:off x="594360" y="5532120"/>
+            <a:ext cx="10972800" cy="822960"/>
+          </a:xfrm>
+          <a:prstGeom prst="rect">
+            <a:avLst/>
+          </a:prstGeom>
+          <a:noFill/>
+        </p:spPr>
+        <p:txBody>
+          <a:bodyPr wrap="square">
+            <a:spAutoFit/>
+          </a:bodyPr>
+          <a:lstStyle/>
+          <a:p>
+            <a:r>
+              <a:rPr b="1" sz="1250">
+                <a:solidFill>
+                  <a:srgbClr val="1B3A5C"/>
+                </a:solidFill>
+              </a:rPr>
+              <a:t>In plain terms:  </a:t>
+            </a:r>
+            <a:r>
+              <a:rPr sz="1250"/>
+              <a:t>day-to-day catch-rate noise averages down over a season either way; what remains is a season-level floor (~0.16) that donor sampling cannot remove. Interviewing Long Beach / Twin Harbors directly drops it toward the interview sampling noise (~0.04).</a:t>
+            </a:r>
+          </a:p>
+        </p:txBody>
+      </p:sp>
+    </p:spTree>
+  </p:cSld>
+  <p:clrMapOvr>
+    <a:masterClrMapping/>
+  </p:clrMapOvr>
+</p:sld>
+</file>
+
+<file path=ppt/slides/slide25.xml><?xml version="1.0" encoding="utf-8"?>
+<p:sld xmlns:a="http://schemas.openxmlformats.org/drawingml/2006/main" xmlns:p="http://schemas.openxmlformats.org/presentationml/2006/main" xmlns:r="http://schemas.openxmlformats.org/officeDocument/2006/relationships">
+  <p:cSld>
+    <p:spTree>
+      <p:nvGrpSpPr>
+        <p:cNvPr id="1" name=""/>
+        <p:cNvGrpSpPr/>
+        <p:nvPr/>
+      </p:nvGrpSpPr>
+      <p:grpSpPr/>
+      <p:sp>
+        <p:nvSpPr>
+          <p:cNvPr id="2" name="Title 1"/>
+          <p:cNvSpPr>
+            <a:spLocks noGrp="1"/>
+          </p:cNvSpPr>
+          <p:nvPr>
+            <p:ph type="title"/>
+          </p:nvPr>
+        </p:nvSpPr>
+        <p:spPr/>
+        <p:txBody>
+          <a:bodyPr/>
+          <a:lstStyle/>
+          <a:p>
+            <a:r>
+              <a:t>What each ingress/egress pilot needs, and its goal</a:t>
+            </a:r>
+          </a:p>
+        </p:txBody>
+      </p:sp>
+      <p:sp>
+        <p:nvSpPr>
+          <p:cNvPr id="3" name="Content Placeholder 2"/>
+          <p:cNvSpPr>
+            <a:spLocks noGrp="1"/>
+          </p:cNvSpPr>
+          <p:nvPr>
+            <p:ph idx="1"/>
+          </p:nvPr>
+        </p:nvSpPr>
+        <p:spPr/>
+        <p:txBody>
+          <a:bodyPr wrap="square"/>
+          <a:lstStyle/>
+          <a:p>
+            <a:r>
+              <a:rPr b="1" sz="1500"/>
+              <a:t>Four data streams, run on the same day: </a:t>
+            </a:r>
+            <a:r>
+              <a:rPr sz="1500"/>
+              <a:t>a counter at every drivable approach (cars on/off in 15-min bins); an instantaneous beach count taken BY SEGMENT; a full-beach creel; and tide/condition metadata.</a:t>
+            </a:r>
+          </a:p>
+          <a:p>
+            <a:r>
+              <a:rPr b="1" sz="1500"/>
+              <a:t>The egress count alone gives only the correction factor. </a:t>
+            </a:r>
+            <a:r>
+              <a:rPr sz="1500"/>
+              <a:t>It retires the section ratio only if the beach count is by segment, and grounds catch rate only if the creel is worked.</a:t>
+            </a:r>
+          </a:p>
+          <a:p>
+            <a:r>
+              <a:rPr b="1" sz="1500"/>
+              <a:t>Long Beach goal: retire three stacked assumptions at once </a:t>
+            </a:r>
+            <a:r>
+              <a:rPr sz="1500"/>
+              <a:t>(whole-beach CF, section ratio, and a modern table; newest survey 2011) by counting all six approaches and seven segments.</a:t>
+            </a:r>
+          </a:p>
+          <a:p>
+            <a:r>
+              <a:rPr b="1" sz="1500"/>
+              <a:t>Twin Harbors goal: refresh a thin, old table </a:t>
+            </a:r>
+            <a:r>
+              <a:rPr sz="1500"/>
+              <a:t>(the evening table rests on two surveys); it is already whole-beach walked, so no section-ratio problem.</a:t>
+            </a:r>
+          </a:p>
+        </p:txBody>
+      </p:sp>
+    </p:spTree>
+  </p:cSld>
+  <p:clrMapOvr>
+    <a:masterClrMapping/>
+  </p:clrMapOvr>
+</p:sld>
+</file>
+
+<file path=ppt/slides/slide26.xml><?xml version="1.0" encoding="utf-8"?>
+<p:sld xmlns:a="http://schemas.openxmlformats.org/drawingml/2006/main" xmlns:p="http://schemas.openxmlformats.org/presentationml/2006/main" xmlns:r="http://schemas.openxmlformats.org/officeDocument/2006/relationships">
+  <p:cSld>
+    <p:spTree>
+      <p:nvGrpSpPr>
+        <p:cNvPr id="1" name=""/>
+        <p:cNvGrpSpPr/>
+        <p:nvPr/>
+      </p:nvGrpSpPr>
+      <p:grpSpPr/>
+      <p:sp>
+        <p:nvSpPr>
+          <p:cNvPr id="2" name="Title 1"/>
+          <p:cNvSpPr>
+            <a:spLocks noGrp="1"/>
+          </p:cNvSpPr>
+          <p:nvPr>
+            <p:ph type="title"/>
+          </p:nvPr>
+        </p:nvSpPr>
+        <p:spPr/>
+        <p:txBody>
+          <a:bodyPr/>
+          <a:lstStyle/>
+          <a:p>
+            <a:r>
+              <a:t>How often to ground-truth a largely-imputed beach</a:t>
+            </a:r>
+          </a:p>
+        </p:txBody>
+      </p:sp>
+      <p:sp>
+        <p:nvSpPr>
+          <p:cNvPr id="3" name="Content Placeholder 2"/>
+          <p:cNvSpPr>
+            <a:spLocks noGrp="1"/>
+          </p:cNvSpPr>
+          <p:nvPr>
+            <p:ph idx="1"/>
+          </p:nvPr>
+        </p:nvSpPr>
+        <p:spPr/>
+        <p:txBody>
+          <a:bodyPr wrap="square"/>
+          <a:lstStyle/>
+          <a:p>
+            <a:r>
+              <a:rPr b="1" sz="1500"/>
+              <a:t>Effort fails by lag. </a:t>
+            </a:r>
+            <a:r>
+              <a:rPr sz="1500"/>
+              <a:t>Imputation error grows with the gap to the nearest counted day (0.49 at 1 day to 0.74 at 4-5). Keep it short: at least one counted day per tide series, spread across fall / winter / spring to catch the ratio drift.</a:t>
+            </a:r>
+          </a:p>
+          <a:p>
+            <a:r>
+              <a:rPr b="1" sz="1500"/>
+              <a:t>Harvest fails by a season-level catch-rate floor. </a:t>
+            </a:r>
+            <a:r>
+              <a:rPr sz="1500"/>
+              <a:t>Removed not by counting the donor but by interviewing the target beach across the season.</a:t>
+            </a:r>
+          </a:p>
+          <a:p>
+            <a:r>
+              <a:rPr b="1" sz="1500"/>
+              <a:t>One cadence does both: </a:t>
+            </a:r>
+            <a:r>
+              <a:rPr sz="1500"/>
+              <a:t>one fully-sampled day, a beach count AND a creel, per tide series at Long Beach and Twin Harbors, on the largest-effort opener.</a:t>
+            </a:r>
+          </a:p>
+          <a:p>
+            <a:r>
+              <a:rPr b="1" sz="1500"/>
+              <a:t>That is more than the staffing model's aggressive imputation implies, and far less than full counting. </a:t>
+            </a:r>
+            <a:r>
+              <a:rPr sz="1500"/>
+              <a:t>It is the cadence a reduced budget should protect first.</a:t>
+            </a:r>
+          </a:p>
+        </p:txBody>
+      </p:sp>
+    </p:spTree>
+  </p:cSld>
+  <p:clrMapOvr>
+    <a:masterClrMapping/>
+  </p:clrMapOvr>
+</p:sld>
+</file>
+
+<file path=ppt/slides/slide27.xml><?xml version="1.0" encoding="utf-8"?>
+<p:sld xmlns:a="http://schemas.openxmlformats.org/drawingml/2006/main" xmlns:p="http://schemas.openxmlformats.org/presentationml/2006/main" xmlns:r="http://schemas.openxmlformats.org/officeDocument/2006/relationships">
+  <p:cSld>
+    <p:spTree>
+      <p:nvGrpSpPr>
+        <p:cNvPr id="1" name=""/>
+        <p:cNvGrpSpPr/>
+        <p:nvPr/>
+      </p:nvGrpSpPr>
+      <p:grpSpPr/>
+      <p:sp>
+        <p:nvSpPr>
+          <p:cNvPr id="2" name="Title 1"/>
+          <p:cNvSpPr>
+            <a:spLocks noGrp="1"/>
+          </p:cNvSpPr>
+          <p:nvPr>
+            <p:ph type="ctrTitle"/>
+          </p:nvPr>
+        </p:nvSpPr>
+        <p:spPr/>
+        <p:txBody>
+          <a:bodyPr/>
+          <a:lstStyle/>
+          <a:p>
+            <a:r>
+              <a:t>5.  Plan for the 2026-27 season</a:t>
+            </a:r>
+          </a:p>
+        </p:txBody>
+      </p:sp>
+    </p:spTree>
+  </p:cSld>
+  <p:clrMapOvr>
+    <a:masterClrMapping/>
+  </p:clrMapOvr>
+</p:sld>
+</file>
+
+<file path=ppt/slides/slide28.xml><?xml version="1.0" encoding="utf-8"?>
 <p:sld xmlns:a="http://schemas.openxmlformats.org/drawingml/2006/main" xmlns:p="http://schemas.openxmlformats.org/presentationml/2006/main" xmlns:r="http://schemas.openxmlformats.org/officeDocument/2006/relationships">
   <p:cSld>
     <p:spTree>
@@ -9749,7 +10423,7 @@
 </p:sld>
 </file>
 
-<file path=ppt/slides/slide25.xml><?xml version="1.0" encoding="utf-8"?>
+<file path=ppt/slides/slide29.xml><?xml version="1.0" encoding="utf-8"?>
 <p:sld xmlns:a="http://schemas.openxmlformats.org/drawingml/2006/main" xmlns:p="http://schemas.openxmlformats.org/presentationml/2006/main" xmlns:r="http://schemas.openxmlformats.org/officeDocument/2006/relationships">
   <p:cSld>
     <p:spTree>
@@ -9801,220 +10475,47 @@
             </a:r>
             <a:r>
               <a:rPr sz="1400"/>
-              <a:t>Run the whole-beach egress pilot, six approaches and about eight staff. Start with one survey in each tide condition, then build toward eight.</a:t>
+              <a:t>Run the whole-beach egress pilot, six approaches and about eight staff, with the beach count by segment and a full creel. Start with one survey per tide condition, build toward eight.</a:t>
             </a:r>
           </a:p>
           <a:p>
             <a:r>
               <a:rPr b="1" sz="1400"/>
-              <a:t>2.  Hold the southern donor at its co-management floor. </a:t>
+              <a:t>2.  Keep one full-sample day per tide series at Long Beach and Twin Harbors. </a:t>
             </a:r>
             <a:r>
               <a:rPr sz="1400"/>
-              <a:t>Keep one of Copalis or Mocrocks counted every dig day; the Quinault's counts cannot substitute for the state, and there is no joint donor.</a:t>
+              <a:t>A count plus a creel on the largest-effort opener controls the effort lag AND removes the harvest catch-rate floor. This is the cadence to protect first.</a:t>
             </a:r>
           </a:p>
           <a:p>
             <a:r>
               <a:rPr b="1" sz="1400"/>
-              <a:t>3.  Do not treat imputation as a substitute for counting Long Beach. </a:t>
+              <a:t>3.  Hold the southern donor at its co-management floor. </a:t>
             </a:r>
             <a:r>
               <a:rPr sz="1400"/>
-              <a:t>At 100% imputation its uncertainty roughly triples and the dominant term cannot be bought back.</a:t>
+              <a:t>Keep one of Copalis or Mocrocks counted every dig day; there is no joint donor and the Quinault's counts are not a state proxy.</a:t>
             </a:r>
           </a:p>
           <a:p>
             <a:r>
               <a:rPr b="1" sz="1400"/>
-              <a:t>4.  Sample ~45% of open days, largest-effort first; </a:t>
+              <a:t>4.  Do not treat imputation as a free substitute. </a:t>
             </a:r>
             <a:r>
               <a:rPr sz="1400"/>
-              <a:t>treat the reallocation as a trade, and fund Long Beach from dedicated effort where possible.</a:t>
+              <a:t>At full imputation Long Beach uncertainty roughly triples (effort), and the harvest catch-rate floor is removed only by interviewing the target, not by counting the donor.</a:t>
             </a:r>
           </a:p>
           <a:p>
             <a:r>
               <a:rPr b="1" sz="1400"/>
-              <a:t>5.  Accept the Copalis floor: </a:t>
+              <a:t>5.  Sample ~45% of open days, largest-effort first, </a:t>
             </a:r>
             <a:r>
               <a:rPr sz="1400"/>
-              <a:t>a harvest CV of 0.10 is infeasible there at any sampling rate.</a:t>
-            </a:r>
-          </a:p>
-        </p:txBody>
-      </p:sp>
-    </p:spTree>
-  </p:cSld>
-  <p:clrMapOvr>
-    <a:masterClrMapping/>
-  </p:clrMapOvr>
-</p:sld>
-</file>
-
-<file path=ppt/slides/slide26.xml><?xml version="1.0" encoding="utf-8"?>
-<p:sld xmlns:a="http://schemas.openxmlformats.org/drawingml/2006/main" xmlns:p="http://schemas.openxmlformats.org/presentationml/2006/main" xmlns:r="http://schemas.openxmlformats.org/officeDocument/2006/relationships">
-  <p:cSld>
-    <p:spTree>
-      <p:nvGrpSpPr>
-        <p:cNvPr id="1" name=""/>
-        <p:cNvGrpSpPr/>
-        <p:nvPr/>
-      </p:nvGrpSpPr>
-      <p:grpSpPr/>
-      <p:sp>
-        <p:nvSpPr>
-          <p:cNvPr id="2" name="Title 1"/>
-          <p:cNvSpPr>
-            <a:spLocks noGrp="1"/>
-          </p:cNvSpPr>
-          <p:nvPr>
-            <p:ph type="ctrTitle"/>
-          </p:nvPr>
-        </p:nvSpPr>
-        <p:spPr/>
-        <p:txBody>
-          <a:bodyPr/>
-          <a:lstStyle/>
-          <a:p>
-            <a:r>
-              <a:t>6.  Follow-up: the 2027 stock assessment</a:t>
-            </a:r>
-          </a:p>
-        </p:txBody>
-      </p:sp>
-    </p:spTree>
-  </p:cSld>
-  <p:clrMapOvr>
-    <a:masterClrMapping/>
-  </p:clrMapOvr>
-</p:sld>
-</file>
-
-<file path=ppt/slides/slide27.xml><?xml version="1.0" encoding="utf-8"?>
-<p:sld xmlns:a="http://schemas.openxmlformats.org/drawingml/2006/main" xmlns:p="http://schemas.openxmlformats.org/presentationml/2006/main" xmlns:r="http://schemas.openxmlformats.org/officeDocument/2006/relationships">
-  <p:cSld>
-    <p:spTree>
-      <p:nvGrpSpPr>
-        <p:cNvPr id="1" name=""/>
-        <p:cNvGrpSpPr/>
-        <p:nvPr/>
-      </p:nvGrpSpPr>
-      <p:grpSpPr/>
-      <p:sp>
-        <p:nvSpPr>
-          <p:cNvPr id="2" name="Title 1"/>
-          <p:cNvSpPr>
-            <a:spLocks noGrp="1"/>
-          </p:cNvSpPr>
-          <p:nvPr>
-            <p:ph type="title"/>
-          </p:nvPr>
-        </p:nvSpPr>
-        <p:spPr/>
-        <p:txBody>
-          <a:bodyPr/>
-          <a:lstStyle/>
-          <a:p>
-            <a:r>
-              <a:t>Toward the 2027 stock assessment</a:t>
-            </a:r>
-          </a:p>
-        </p:txBody>
-      </p:sp>
-      <p:sp>
-        <p:nvSpPr>
-          <p:cNvPr id="3" name="Content Placeholder 2"/>
-          <p:cNvSpPr>
-            <a:spLocks noGrp="1"/>
-          </p:cNvSpPr>
-          <p:nvPr>
-            <p:ph idx="1"/>
-          </p:nvPr>
-        </p:nvSpPr>
-        <p:spPr/>
-        <p:txBody>
-          <a:bodyPr wrap="square"/>
-          <a:lstStyle/>
-          <a:p>
-            <a:r>
-              <a:rPr b="1" sz="1500"/>
-              <a:t>Harvest is one input to the assessment. </a:t>
-            </a:r>
-            <a:r>
-              <a:rPr sz="1500"/>
-              <a:t>The pumped-area population estimate and the exploitation-rate policy set the TAC that harvest is measured against; a follow-up meeting should connect the two.</a:t>
-            </a:r>
-          </a:p>
-          <a:p>
-            <a:r>
-              <a:rPr b="1" sz="1500"/>
-              <a:t>Carry a defensible uncertainty forward. </a:t>
-            </a:r>
-            <a:r>
-              <a:rPr sz="1500"/>
-              <a:t>This review now propagates five of nine error sources; the assessment should inherit the harvest interval, not a point estimate.</a:t>
-            </a:r>
-          </a:p>
-          <a:p>
-            <a:r>
-              <a:rPr b="1" sz="1500"/>
-              <a:t>Decide the survey investment before the season is set, </a:t>
-            </a:r>
-            <a:r>
-              <a:rPr sz="1500"/>
-              <a:t>so the Long Beach pilot and the egress refresh can be scheduled into 2026-27 fieldwork.</a:t>
-            </a:r>
-          </a:p>
-          <a:p>
-            <a:r>
-              <a:rPr b="1" sz="1500"/>
-              <a:t>Open questions for the group: </a:t>
-            </a:r>
-            <a:r>
-              <a:rPr sz="1500"/>
-              <a:t>survey crewing and timing, the co-management data conversation, and how a reduced budget is allocated across beaches.</a:t>
-            </a:r>
-          </a:p>
-        </p:txBody>
-      </p:sp>
-    </p:spTree>
-  </p:cSld>
-  <p:clrMapOvr>
-    <a:masterClrMapping/>
-  </p:clrMapOvr>
-</p:sld>
-</file>
-
-<file path=ppt/slides/slide28.xml><?xml version="1.0" encoding="utf-8"?>
-<p:sld xmlns:a="http://schemas.openxmlformats.org/drawingml/2006/main" xmlns:p="http://schemas.openxmlformats.org/presentationml/2006/main" xmlns:r="http://schemas.openxmlformats.org/officeDocument/2006/relationships">
-  <p:cSld>
-    <p:spTree>
-      <p:nvGrpSpPr>
-        <p:cNvPr id="1" name=""/>
-        <p:cNvGrpSpPr/>
-        <p:nvPr/>
-      </p:nvGrpSpPr>
-      <p:grpSpPr/>
-      <p:sp>
-        <p:nvSpPr>
-          <p:cNvPr id="2" name="Title 1"/>
-          <p:cNvSpPr>
-            <a:spLocks noGrp="1"/>
-          </p:cNvSpPr>
-          <p:nvPr>
-            <p:ph type="ctrTitle"/>
-          </p:nvPr>
-        </p:nvSpPr>
-        <p:spPr/>
-        <p:txBody>
-          <a:bodyPr/>
-          <a:lstStyle/>
-          <a:p>
-            <a:r>
-              <a:t>Discussion</a:t>
+              <a:t>and accept the Copalis floor (a harvest CV of 0.10 is infeasible there at any rate).</a:t>
             </a:r>
           </a:p>
         </p:txBody>
@@ -10054,6 +10555,179 @@
           <a:p>
             <a:r>
               <a:t>1.  History of harvest monitoring and estimation</a:t>
+            </a:r>
+          </a:p>
+        </p:txBody>
+      </p:sp>
+    </p:spTree>
+  </p:cSld>
+  <p:clrMapOvr>
+    <a:masterClrMapping/>
+  </p:clrMapOvr>
+</p:sld>
+</file>
+
+<file path=ppt/slides/slide30.xml><?xml version="1.0" encoding="utf-8"?>
+<p:sld xmlns:a="http://schemas.openxmlformats.org/drawingml/2006/main" xmlns:p="http://schemas.openxmlformats.org/presentationml/2006/main" xmlns:r="http://schemas.openxmlformats.org/officeDocument/2006/relationships">
+  <p:cSld>
+    <p:spTree>
+      <p:nvGrpSpPr>
+        <p:cNvPr id="1" name=""/>
+        <p:cNvGrpSpPr/>
+        <p:nvPr/>
+      </p:nvGrpSpPr>
+      <p:grpSpPr/>
+      <p:sp>
+        <p:nvSpPr>
+          <p:cNvPr id="2" name="Title 1"/>
+          <p:cNvSpPr>
+            <a:spLocks noGrp="1"/>
+          </p:cNvSpPr>
+          <p:nvPr>
+            <p:ph type="ctrTitle"/>
+          </p:nvPr>
+        </p:nvSpPr>
+        <p:spPr/>
+        <p:txBody>
+          <a:bodyPr/>
+          <a:lstStyle/>
+          <a:p>
+            <a:r>
+              <a:t>6.  Follow-up: the 2027 stock assessment</a:t>
+            </a:r>
+          </a:p>
+        </p:txBody>
+      </p:sp>
+    </p:spTree>
+  </p:cSld>
+  <p:clrMapOvr>
+    <a:masterClrMapping/>
+  </p:clrMapOvr>
+</p:sld>
+</file>
+
+<file path=ppt/slides/slide31.xml><?xml version="1.0" encoding="utf-8"?>
+<p:sld xmlns:a="http://schemas.openxmlformats.org/drawingml/2006/main" xmlns:p="http://schemas.openxmlformats.org/presentationml/2006/main" xmlns:r="http://schemas.openxmlformats.org/officeDocument/2006/relationships">
+  <p:cSld>
+    <p:spTree>
+      <p:nvGrpSpPr>
+        <p:cNvPr id="1" name=""/>
+        <p:cNvGrpSpPr/>
+        <p:nvPr/>
+      </p:nvGrpSpPr>
+      <p:grpSpPr/>
+      <p:sp>
+        <p:nvSpPr>
+          <p:cNvPr id="2" name="Title 1"/>
+          <p:cNvSpPr>
+            <a:spLocks noGrp="1"/>
+          </p:cNvSpPr>
+          <p:nvPr>
+            <p:ph type="title"/>
+          </p:nvPr>
+        </p:nvSpPr>
+        <p:spPr/>
+        <p:txBody>
+          <a:bodyPr/>
+          <a:lstStyle/>
+          <a:p>
+            <a:r>
+              <a:t>Toward the 2027 stock assessment</a:t>
+            </a:r>
+          </a:p>
+        </p:txBody>
+      </p:sp>
+      <p:sp>
+        <p:nvSpPr>
+          <p:cNvPr id="3" name="Content Placeholder 2"/>
+          <p:cNvSpPr>
+            <a:spLocks noGrp="1"/>
+          </p:cNvSpPr>
+          <p:nvPr>
+            <p:ph idx="1"/>
+          </p:nvPr>
+        </p:nvSpPr>
+        <p:spPr/>
+        <p:txBody>
+          <a:bodyPr wrap="square"/>
+          <a:lstStyle/>
+          <a:p>
+            <a:r>
+              <a:rPr b="1" sz="1500"/>
+              <a:t>Harvest is one input to the assessment. </a:t>
+            </a:r>
+            <a:r>
+              <a:rPr sz="1500"/>
+              <a:t>The pumped-area population estimate and the exploitation-rate policy set the TAC that harvest is measured against; a follow-up meeting should connect the two.</a:t>
+            </a:r>
+          </a:p>
+          <a:p>
+            <a:r>
+              <a:rPr b="1" sz="1500"/>
+              <a:t>Carry a defensible uncertainty forward. </a:t>
+            </a:r>
+            <a:r>
+              <a:rPr sz="1500"/>
+              <a:t>This review now propagates five of nine error sources; the assessment should inherit the harvest interval, not a point estimate.</a:t>
+            </a:r>
+          </a:p>
+          <a:p>
+            <a:r>
+              <a:rPr b="1" sz="1500"/>
+              <a:t>Decide the survey investment before the season is set, </a:t>
+            </a:r>
+            <a:r>
+              <a:rPr sz="1500"/>
+              <a:t>so the Long Beach pilot and the egress refresh can be scheduled into 2026-27 fieldwork.</a:t>
+            </a:r>
+          </a:p>
+          <a:p>
+            <a:r>
+              <a:rPr b="1" sz="1500"/>
+              <a:t>Open questions for the group: </a:t>
+            </a:r>
+            <a:r>
+              <a:rPr sz="1500"/>
+              <a:t>survey crewing and timing, the co-management data conversation, and how a reduced budget is allocated across beaches.</a:t>
+            </a:r>
+          </a:p>
+        </p:txBody>
+      </p:sp>
+    </p:spTree>
+  </p:cSld>
+  <p:clrMapOvr>
+    <a:masterClrMapping/>
+  </p:clrMapOvr>
+</p:sld>
+</file>
+
+<file path=ppt/slides/slide32.xml><?xml version="1.0" encoding="utf-8"?>
+<p:sld xmlns:a="http://schemas.openxmlformats.org/drawingml/2006/main" xmlns:p="http://schemas.openxmlformats.org/presentationml/2006/main" xmlns:r="http://schemas.openxmlformats.org/officeDocument/2006/relationships">
+  <p:cSld>
+    <p:spTree>
+      <p:nvGrpSpPr>
+        <p:cNvPr id="1" name=""/>
+        <p:cNvGrpSpPr/>
+        <p:nvPr/>
+      </p:nvGrpSpPr>
+      <p:grpSpPr/>
+      <p:sp>
+        <p:nvSpPr>
+          <p:cNvPr id="2" name="Title 1"/>
+          <p:cNvSpPr>
+            <a:spLocks noGrp="1"/>
+          </p:cNvSpPr>
+          <p:nvPr>
+            <p:ph type="ctrTitle"/>
+          </p:nvPr>
+        </p:nvSpPr>
+        <p:spPr/>
+        <p:txBody>
+          <a:bodyPr/>
+          <a:lstStyle/>
+          <a:p>
+            <a:r>
+              <a:t>Discussion</a:t>
             </a:r>
           </a:p>
         </p:txBody>
